--- a/seminar/TTT-seminar.pptx
+++ b/seminar/TTT-seminar.pptx
@@ -9,6 +9,18 @@
     <p:sldId id="257" r:id="rId8"/>
     <p:sldId id="258" r:id="rId9"/>
     <p:sldId id="259" r:id="rId10"/>
+    <p:sldId id="260" r:id="rId11"/>
+    <p:sldId id="261" r:id="rId12"/>
+    <p:sldId id="262" r:id="rId13"/>
+    <p:sldId id="263" r:id="rId14"/>
+    <p:sldId id="264" r:id="rId15"/>
+    <p:sldId id="265" r:id="rId16"/>
+    <p:sldId id="266" r:id="rId17"/>
+    <p:sldId id="267" r:id="rId18"/>
+    <p:sldId id="268" r:id="rId19"/>
+    <p:sldId id="269" r:id="rId20"/>
+    <p:sldId id="270" r:id="rId21"/>
+    <p:sldId id="271" r:id="rId22"/>
   </p:sldIdLst>
   <p:sldSz cx="12191695" cy="6858000" type="screen4x3"/>
   <p:notesSz cx="6858000" cy="9144000"/>
@@ -3314,6 +3326,3260 @@
 </p:sld>
 </file>
 
+<file path=ppt/slides/slide10.xml><?xml version="1.0" encoding="utf-8"?>
+<p:sld xmlns:a="http://schemas.openxmlformats.org/drawingml/2006/main" xmlns:p="http://schemas.openxmlformats.org/presentationml/2006/main" xmlns:r="http://schemas.openxmlformats.org/officeDocument/2006/relationships">
+  <p:cSld>
+    <p:spTree>
+      <p:nvGrpSpPr>
+        <p:cNvPr id="1" name=""/>
+        <p:cNvGrpSpPr/>
+        <p:nvPr/>
+      </p:nvGrpSpPr>
+      <p:grpSpPr/>
+      <p:sp>
+        <p:nvSpPr>
+          <p:cNvPr id="2" name="Rectangle 1"/>
+          <p:cNvSpPr/>
+          <p:nvPr/>
+        </p:nvSpPr>
+        <p:spPr>
+          <a:xfrm>
+            <a:off x="0" y="0"/>
+            <a:ext cx="12191695" cy="54864"/>
+          </a:xfrm>
+          <a:prstGeom prst="rect">
+            <a:avLst/>
+          </a:prstGeom>
+          <a:solidFill>
+            <a:srgbClr val="2A6F97"/>
+          </a:solidFill>
+          <a:ln w="12700">
+            <a:solidFill>
+              <a:srgbClr val="2A6F97"/>
+            </a:solidFill>
+          </a:ln>
+          <a:effectLst/>
+        </p:spPr>
+        <p:style>
+          <a:lnRef idx="1">
+            <a:schemeClr val="accent1"/>
+          </a:lnRef>
+          <a:fillRef idx="3">
+            <a:schemeClr val="accent1"/>
+          </a:fillRef>
+          <a:effectRef idx="2">
+            <a:schemeClr val="accent1"/>
+          </a:effectRef>
+          <a:fontRef idx="minor">
+            <a:schemeClr val="lt1"/>
+          </a:fontRef>
+        </p:style>
+        <p:txBody>
+          <a:bodyPr rtlCol="0" anchor="ctr" wrap="square" lIns="38100" rIns="38100" tIns="25400" bIns="25400"/>
+          <a:lstStyle/>
+          <a:p>
+            <a:pPr algn="ctr"/>
+            <a:r>
+              <a:rPr sz="1100" b="0" i="0">
+                <a:solidFill>
+                  <a:srgbClr val="22252B"/>
+                </a:solidFill>
+                <a:latin typeface="Noto Sans CJK KR"/>
+              </a:rPr>
+              <a:t/>
+            </a:r>
+          </a:p>
+        </p:txBody>
+      </p:sp>
+      <p:sp>
+        <p:nvSpPr>
+          <p:cNvPr id="3" name="TextBox 2"/>
+          <p:cNvSpPr txBox="1"/>
+          <p:nvPr/>
+        </p:nvSpPr>
+        <p:spPr>
+          <a:xfrm>
+            <a:off x="502920" y="164592"/>
+            <a:ext cx="11185855" cy="320040"/>
+          </a:xfrm>
+          <a:prstGeom prst="rect">
+            <a:avLst/>
+          </a:prstGeom>
+          <a:noFill/>
+        </p:spPr>
+        <p:txBody>
+          <a:bodyPr wrap="square" anchor="t" lIns="25400" rIns="25400" tIns="12700" bIns="12700">
+            <a:spAutoFit/>
+          </a:bodyPr>
+          <a:lstStyle/>
+          <a:p>
+            <a:pPr algn="l"/>
+            <a:r>
+              <a:rPr sz="1200" b="1" i="0">
+                <a:solidFill>
+                  <a:srgbClr val="2A6F97"/>
+                </a:solidFill>
+                <a:latin typeface="Noto Sans CJK KR"/>
+              </a:rPr>
+              <a:t>A2 · NAG</a:t>
+            </a:r>
+          </a:p>
+        </p:txBody>
+      </p:sp>
+      <p:sp>
+        <p:nvSpPr>
+          <p:cNvPr id="4" name="TextBox 3"/>
+          <p:cNvSpPr txBox="1"/>
+          <p:nvPr/>
+        </p:nvSpPr>
+        <p:spPr>
+          <a:xfrm>
+            <a:off x="502920" y="457200"/>
+            <a:ext cx="11185855" cy="548640"/>
+          </a:xfrm>
+          <a:prstGeom prst="rect">
+            <a:avLst/>
+          </a:prstGeom>
+          <a:noFill/>
+        </p:spPr>
+        <p:txBody>
+          <a:bodyPr wrap="square" anchor="t" lIns="25400" rIns="25400" tIns="12700" bIns="12700">
+            <a:spAutoFit/>
+          </a:bodyPr>
+          <a:lstStyle/>
+          <a:p>
+            <a:pPr algn="l"/>
+            <a:r>
+              <a:rPr sz="2200" b="1" i="0">
+                <a:solidFill>
+                  <a:srgbClr val="22252B"/>
+                </a:solidFill>
+                <a:latin typeface="Noto Sans CJK KR"/>
+              </a:rPr>
+              <a:t>NAG  ·  Nesterov Accelerated Gradient</a:t>
+            </a:r>
+          </a:p>
+        </p:txBody>
+      </p:sp>
+      <p:sp>
+        <p:nvSpPr>
+          <p:cNvPr id="5" name="TextBox 4"/>
+          <p:cNvSpPr txBox="1"/>
+          <p:nvPr/>
+        </p:nvSpPr>
+        <p:spPr>
+          <a:xfrm>
+            <a:off x="502920" y="932688"/>
+            <a:ext cx="5486400" cy="274320"/>
+          </a:xfrm>
+          <a:prstGeom prst="rect">
+            <a:avLst/>
+          </a:prstGeom>
+          <a:noFill/>
+        </p:spPr>
+        <p:txBody>
+          <a:bodyPr wrap="square" anchor="t" lIns="25400" rIns="25400" tIns="12700" bIns="12700">
+            <a:spAutoFit/>
+          </a:bodyPr>
+          <a:lstStyle/>
+          <a:p>
+            <a:pPr algn="l"/>
+            <a:r>
+              <a:rPr sz="1100" b="1" i="0">
+                <a:solidFill>
+                  <a:srgbClr val="2A6F97"/>
+                </a:solidFill>
+                <a:latin typeface="Noto Sans CJK KR"/>
+              </a:rPr>
+              <a:t>파란 줄기 — look-ahead</a:t>
+            </a:r>
+          </a:p>
+        </p:txBody>
+      </p:sp>
+      <p:sp>
+        <p:nvSpPr>
+          <p:cNvPr id="6" name="Rounded Rectangle 5"/>
+          <p:cNvSpPr/>
+          <p:nvPr/>
+        </p:nvSpPr>
+        <p:spPr>
+          <a:xfrm>
+            <a:off x="502920" y="1298448"/>
+            <a:ext cx="11155680" cy="896112"/>
+          </a:xfrm>
+          <a:prstGeom prst="roundRect">
+            <a:avLst/>
+          </a:prstGeom>
+          <a:solidFill>
+            <a:srgbClr val="DBE7F3"/>
+          </a:solidFill>
+          <a:ln w="12700">
+            <a:solidFill>
+              <a:srgbClr val="2A6F97"/>
+            </a:solidFill>
+          </a:ln>
+          <a:effectLst/>
+        </p:spPr>
+        <p:style>
+          <a:lnRef idx="1">
+            <a:schemeClr val="accent1"/>
+          </a:lnRef>
+          <a:fillRef idx="3">
+            <a:schemeClr val="accent1"/>
+          </a:fillRef>
+          <a:effectRef idx="2">
+            <a:schemeClr val="accent1"/>
+          </a:effectRef>
+          <a:fontRef idx="minor">
+            <a:schemeClr val="lt1"/>
+          </a:fontRef>
+        </p:style>
+        <p:txBody>
+          <a:bodyPr rtlCol="0" anchor="ctr" wrap="square" lIns="38100" rIns="38100" tIns="25400" bIns="25400"/>
+          <a:lstStyle/>
+          <a:p>
+            <a:pPr algn="l"/>
+            <a:r>
+              <a:rPr sz="1150" b="1" i="0">
+                <a:solidFill>
+                  <a:srgbClr val="2A6F97"/>
+                </a:solidFill>
+                <a:latin typeface="Noto Sans CJK KR"/>
+              </a:rPr>
+              <a:t>직관 (왜 이렇게?)</a:t>
+            </a:r>
+          </a:p>
+          <a:p>
+            <a:pPr algn="l"/>
+            <a:r>
+              <a:rPr sz="1250" b="0" i="0">
+                <a:solidFill>
+                  <a:srgbClr val="22252B"/>
+                </a:solidFill>
+                <a:latin typeface="Noto Sans CJK KR"/>
+              </a:rPr>
+              <a:t>"일단 관성 방향으로 먼저 움직이고, 그 자리에서 스텝을 계산하니 더 빠르더라."</a:t>
+            </a:r>
+          </a:p>
+        </p:txBody>
+      </p:sp>
+      <p:sp>
+        <p:nvSpPr>
+          <p:cNvPr id="7" name="Rounded Rectangle 6"/>
+          <p:cNvSpPr/>
+          <p:nvPr/>
+        </p:nvSpPr>
+        <p:spPr>
+          <a:xfrm>
+            <a:off x="502920" y="2377440"/>
+            <a:ext cx="11155680" cy="2148840"/>
+          </a:xfrm>
+          <a:prstGeom prst="roundRect">
+            <a:avLst/>
+          </a:prstGeom>
+          <a:solidFill>
+            <a:srgbClr val="FFFFFF"/>
+          </a:solidFill>
+          <a:ln w="12700">
+            <a:solidFill>
+              <a:srgbClr val="8A8F98"/>
+            </a:solidFill>
+          </a:ln>
+          <a:effectLst/>
+        </p:spPr>
+        <p:style>
+          <a:lnRef idx="1">
+            <a:schemeClr val="accent1"/>
+          </a:lnRef>
+          <a:fillRef idx="3">
+            <a:schemeClr val="accent1"/>
+          </a:fillRef>
+          <a:effectRef idx="2">
+            <a:schemeClr val="accent1"/>
+          </a:effectRef>
+          <a:fontRef idx="minor">
+            <a:schemeClr val="lt1"/>
+          </a:fontRef>
+        </p:style>
+        <p:txBody>
+          <a:bodyPr rtlCol="0" anchor="ctr" wrap="square" lIns="38100" rIns="38100" tIns="25400" bIns="25400"/>
+          <a:lstStyle/>
+          <a:p>
+            <a:pPr algn="l"/>
+            <a:r>
+              <a:rPr sz="1150" b="1" i="0">
+                <a:solidFill>
+                  <a:srgbClr val="22252B"/>
+                </a:solidFill>
+                <a:latin typeface="Noto Sans CJK KR"/>
+              </a:rPr>
+              <a:t>갱신 규칙 (수식)</a:t>
+            </a:r>
+          </a:p>
+          <a:p>
+            <a:pPr algn="l"/>
+            <a:r>
+              <a:rPr sz="1250" b="0" i="0">
+                <a:solidFill>
+                  <a:srgbClr val="22252B"/>
+                </a:solidFill>
+                <a:latin typeface="Noto Sans Mono CJK KR"/>
+              </a:rPr>
+              <a:t>θ_look = θ_t − η · μ · v_{t-1}      # 관성으로 미리 가 본 위치</a:t>
+            </a:r>
+          </a:p>
+          <a:p>
+            <a:pPr algn="l"/>
+            <a:r>
+              <a:rPr sz="1250" b="0" i="0">
+                <a:solidFill>
+                  <a:srgbClr val="22252B"/>
+                </a:solidFill>
+                <a:latin typeface="Noto Sans Mono CJK KR"/>
+              </a:rPr>
+              <a:t>v_t = μ · v_{t-1} + ∇ℓ(θ_look)     # '가 볼 자리'의 gradient로 보정</a:t>
+            </a:r>
+          </a:p>
+          <a:p>
+            <a:pPr algn="l"/>
+            <a:r>
+              <a:rPr sz="1250" b="0" i="0">
+                <a:solidFill>
+                  <a:srgbClr val="22252B"/>
+                </a:solidFill>
+                <a:latin typeface="Noto Sans Mono CJK KR"/>
+              </a:rPr>
+              <a:t>θ_{t+1} = θ_t − η · v_t</a:t>
+            </a:r>
+          </a:p>
+        </p:txBody>
+      </p:sp>
+      <p:sp>
+        <p:nvSpPr>
+          <p:cNvPr id="8" name="Rounded Rectangle 7"/>
+          <p:cNvSpPr/>
+          <p:nvPr/>
+        </p:nvSpPr>
+        <p:spPr>
+          <a:xfrm>
+            <a:off x="502920" y="4709160"/>
+            <a:ext cx="5486400" cy="1737360"/>
+          </a:xfrm>
+          <a:prstGeom prst="roundRect">
+            <a:avLst/>
+          </a:prstGeom>
+          <a:solidFill>
+            <a:srgbClr val="DAF0ED"/>
+          </a:solidFill>
+          <a:ln w="12700">
+            <a:solidFill>
+              <a:srgbClr val="2A9D8F"/>
+            </a:solidFill>
+          </a:ln>
+          <a:effectLst/>
+        </p:spPr>
+        <p:style>
+          <a:lnRef idx="1">
+            <a:schemeClr val="accent1"/>
+          </a:lnRef>
+          <a:fillRef idx="3">
+            <a:schemeClr val="accent1"/>
+          </a:fillRef>
+          <a:effectRef idx="2">
+            <a:schemeClr val="accent1"/>
+          </a:effectRef>
+          <a:fontRef idx="minor">
+            <a:schemeClr val="lt1"/>
+          </a:fontRef>
+        </p:style>
+        <p:txBody>
+          <a:bodyPr rtlCol="0" anchor="ctr" wrap="square" lIns="38100" rIns="38100" tIns="25400" bIns="25400"/>
+          <a:lstStyle/>
+          <a:p>
+            <a:pPr algn="l"/>
+            <a:r>
+              <a:rPr sz="1150" b="1" i="0">
+                <a:solidFill>
+                  <a:srgbClr val="2A9D8F"/>
+                </a:solidFill>
+                <a:latin typeface="Noto Sans CJK KR"/>
+              </a:rPr>
+              <a:t>이 optimizer가 해결한 것</a:t>
+            </a:r>
+          </a:p>
+          <a:p>
+            <a:pPr algn="l"/>
+            <a:r>
+              <a:rPr sz="1150" b="0" i="0">
+                <a:solidFill>
+                  <a:srgbClr val="22252B"/>
+                </a:solidFill>
+                <a:latin typeface="Noto Sans CJK KR"/>
+              </a:rPr>
+              <a:t>미리 가 볼 위치의 gradient로 방향을 교정 → 과주행(overshoot)을 억제하고 수렴이 빨라진다.</a:t>
+            </a:r>
+          </a:p>
+        </p:txBody>
+      </p:sp>
+      <p:sp>
+        <p:nvSpPr>
+          <p:cNvPr id="9" name="Rounded Rectangle 8"/>
+          <p:cNvSpPr/>
+          <p:nvPr/>
+        </p:nvSpPr>
+        <p:spPr>
+          <a:xfrm>
+            <a:off x="6172200" y="4709160"/>
+            <a:ext cx="5486400" cy="1737360"/>
+          </a:xfrm>
+          <a:prstGeom prst="roundRect">
+            <a:avLst/>
+          </a:prstGeom>
+          <a:solidFill>
+            <a:srgbClr val="F6DDDD"/>
+          </a:solidFill>
+          <a:ln w="12700">
+            <a:solidFill>
+              <a:srgbClr val="C1121F"/>
+            </a:solidFill>
+          </a:ln>
+          <a:effectLst/>
+        </p:spPr>
+        <p:style>
+          <a:lnRef idx="1">
+            <a:schemeClr val="accent1"/>
+          </a:lnRef>
+          <a:fillRef idx="3">
+            <a:schemeClr val="accent1"/>
+          </a:fillRef>
+          <a:effectRef idx="2">
+            <a:schemeClr val="accent1"/>
+          </a:effectRef>
+          <a:fontRef idx="minor">
+            <a:schemeClr val="lt1"/>
+          </a:fontRef>
+        </p:style>
+        <p:txBody>
+          <a:bodyPr rtlCol="0" anchor="ctr" wrap="square" lIns="38100" rIns="38100" tIns="25400" bIns="25400"/>
+          <a:lstStyle/>
+          <a:p>
+            <a:pPr algn="l"/>
+            <a:r>
+              <a:rPr sz="1150" b="1" i="0">
+                <a:solidFill>
+                  <a:srgbClr val="C1121F"/>
+                </a:solidFill>
+                <a:latin typeface="Noto Sans CJK KR"/>
+              </a:rPr>
+              <a:t>남은 문제 → 다음</a:t>
+            </a:r>
+          </a:p>
+          <a:p>
+            <a:pPr algn="l"/>
+            <a:r>
+              <a:rPr sz="1150" b="0" i="0">
+                <a:solidFill>
+                  <a:srgbClr val="22252B"/>
+                </a:solidFill>
+                <a:latin typeface="Noto Sans CJK KR"/>
+              </a:rPr>
+              <a:t>여전히 보폭은 좌표 공통. '좌표별 스케일' 문제는 손대지 않았다.  → Adagrad 계열</a:t>
+            </a:r>
+          </a:p>
+        </p:txBody>
+      </p:sp>
+    </p:spTree>
+  </p:cSld>
+  <p:clrMapOvr>
+    <a:masterClrMapping/>
+  </p:clrMapOvr>
+</p:sld>
+</file>
+
+<file path=ppt/slides/slide11.xml><?xml version="1.0" encoding="utf-8"?>
+<p:sld xmlns:a="http://schemas.openxmlformats.org/drawingml/2006/main" xmlns:p="http://schemas.openxmlformats.org/presentationml/2006/main" xmlns:r="http://schemas.openxmlformats.org/officeDocument/2006/relationships">
+  <p:cSld>
+    <p:spTree>
+      <p:nvGrpSpPr>
+        <p:cNvPr id="1" name=""/>
+        <p:cNvGrpSpPr/>
+        <p:nvPr/>
+      </p:nvGrpSpPr>
+      <p:grpSpPr/>
+      <p:sp>
+        <p:nvSpPr>
+          <p:cNvPr id="2" name="Rectangle 1"/>
+          <p:cNvSpPr/>
+          <p:nvPr/>
+        </p:nvSpPr>
+        <p:spPr>
+          <a:xfrm>
+            <a:off x="0" y="0"/>
+            <a:ext cx="12191695" cy="54864"/>
+          </a:xfrm>
+          <a:prstGeom prst="rect">
+            <a:avLst/>
+          </a:prstGeom>
+          <a:solidFill>
+            <a:srgbClr val="2A9D8F"/>
+          </a:solidFill>
+          <a:ln w="12700">
+            <a:solidFill>
+              <a:srgbClr val="2A9D8F"/>
+            </a:solidFill>
+          </a:ln>
+          <a:effectLst/>
+        </p:spPr>
+        <p:style>
+          <a:lnRef idx="1">
+            <a:schemeClr val="accent1"/>
+          </a:lnRef>
+          <a:fillRef idx="3">
+            <a:schemeClr val="accent1"/>
+          </a:fillRef>
+          <a:effectRef idx="2">
+            <a:schemeClr val="accent1"/>
+          </a:effectRef>
+          <a:fontRef idx="minor">
+            <a:schemeClr val="lt1"/>
+          </a:fontRef>
+        </p:style>
+        <p:txBody>
+          <a:bodyPr rtlCol="0" anchor="ctr" wrap="square" lIns="38100" rIns="38100" tIns="25400" bIns="25400"/>
+          <a:lstStyle/>
+          <a:p>
+            <a:pPr algn="ctr"/>
+            <a:r>
+              <a:rPr sz="1100" b="0" i="0">
+                <a:solidFill>
+                  <a:srgbClr val="22252B"/>
+                </a:solidFill>
+                <a:latin typeface="Noto Sans CJK KR"/>
+              </a:rPr>
+              <a:t/>
+            </a:r>
+          </a:p>
+        </p:txBody>
+      </p:sp>
+      <p:sp>
+        <p:nvSpPr>
+          <p:cNvPr id="3" name="TextBox 2"/>
+          <p:cNvSpPr txBox="1"/>
+          <p:nvPr/>
+        </p:nvSpPr>
+        <p:spPr>
+          <a:xfrm>
+            <a:off x="502920" y="164592"/>
+            <a:ext cx="11185855" cy="320040"/>
+          </a:xfrm>
+          <a:prstGeom prst="rect">
+            <a:avLst/>
+          </a:prstGeom>
+          <a:noFill/>
+        </p:spPr>
+        <p:txBody>
+          <a:bodyPr wrap="square" anchor="t" lIns="25400" rIns="25400" tIns="12700" bIns="12700">
+            <a:spAutoFit/>
+          </a:bodyPr>
+          <a:lstStyle/>
+          <a:p>
+            <a:pPr algn="l"/>
+            <a:r>
+              <a:rPr sz="1200" b="1" i="0">
+                <a:solidFill>
+                  <a:srgbClr val="2A9D8F"/>
+                </a:solidFill>
+                <a:latin typeface="Noto Sans CJK KR"/>
+              </a:rPr>
+              <a:t>A2 · Adagrad</a:t>
+            </a:r>
+          </a:p>
+        </p:txBody>
+      </p:sp>
+      <p:sp>
+        <p:nvSpPr>
+          <p:cNvPr id="4" name="TextBox 3"/>
+          <p:cNvSpPr txBox="1"/>
+          <p:nvPr/>
+        </p:nvSpPr>
+        <p:spPr>
+          <a:xfrm>
+            <a:off x="502920" y="457200"/>
+            <a:ext cx="11185855" cy="548640"/>
+          </a:xfrm>
+          <a:prstGeom prst="rect">
+            <a:avLst/>
+          </a:prstGeom>
+          <a:noFill/>
+        </p:spPr>
+        <p:txBody>
+          <a:bodyPr wrap="square" anchor="t" lIns="25400" rIns="25400" tIns="12700" bIns="12700">
+            <a:spAutoFit/>
+          </a:bodyPr>
+          <a:lstStyle/>
+          <a:p>
+            <a:pPr algn="l"/>
+            <a:r>
+              <a:rPr sz="2200" b="1" i="0">
+                <a:solidFill>
+                  <a:srgbClr val="22252B"/>
+                </a:solidFill>
+                <a:latin typeface="Noto Sans CJK KR"/>
+              </a:rPr>
+              <a:t>Adagrad  ·  Adaptive Gradient</a:t>
+            </a:r>
+          </a:p>
+        </p:txBody>
+      </p:sp>
+      <p:sp>
+        <p:nvSpPr>
+          <p:cNvPr id="5" name="TextBox 4"/>
+          <p:cNvSpPr txBox="1"/>
+          <p:nvPr/>
+        </p:nvSpPr>
+        <p:spPr>
+          <a:xfrm>
+            <a:off x="502920" y="932688"/>
+            <a:ext cx="5486400" cy="274320"/>
+          </a:xfrm>
+          <a:prstGeom prst="rect">
+            <a:avLst/>
+          </a:prstGeom>
+          <a:noFill/>
+        </p:spPr>
+        <p:txBody>
+          <a:bodyPr wrap="square" anchor="t" lIns="25400" rIns="25400" tIns="12700" bIns="12700">
+            <a:spAutoFit/>
+          </a:bodyPr>
+          <a:lstStyle/>
+          <a:p>
+            <a:pPr algn="l"/>
+            <a:r>
+              <a:rPr sz="1100" b="1" i="0">
+                <a:solidFill>
+                  <a:srgbClr val="2A9D8F"/>
+                </a:solidFill>
+                <a:latin typeface="Noto Sans CJK KR"/>
+              </a:rPr>
+              <a:t>초록 줄기 — '스텝 사이즈' 개선</a:t>
+            </a:r>
+          </a:p>
+        </p:txBody>
+      </p:sp>
+      <p:sp>
+        <p:nvSpPr>
+          <p:cNvPr id="6" name="Rounded Rectangle 5"/>
+          <p:cNvSpPr/>
+          <p:nvPr/>
+        </p:nvSpPr>
+        <p:spPr>
+          <a:xfrm>
+            <a:off x="502920" y="1298448"/>
+            <a:ext cx="11155680" cy="896112"/>
+          </a:xfrm>
+          <a:prstGeom prst="roundRect">
+            <a:avLst/>
+          </a:prstGeom>
+          <a:solidFill>
+            <a:srgbClr val="DAF0ED"/>
+          </a:solidFill>
+          <a:ln w="12700">
+            <a:solidFill>
+              <a:srgbClr val="2A9D8F"/>
+            </a:solidFill>
+          </a:ln>
+          <a:effectLst/>
+        </p:spPr>
+        <p:style>
+          <a:lnRef idx="1">
+            <a:schemeClr val="accent1"/>
+          </a:lnRef>
+          <a:fillRef idx="3">
+            <a:schemeClr val="accent1"/>
+          </a:fillRef>
+          <a:effectRef idx="2">
+            <a:schemeClr val="accent1"/>
+          </a:effectRef>
+          <a:fontRef idx="minor">
+            <a:schemeClr val="lt1"/>
+          </a:fontRef>
+        </p:style>
+        <p:txBody>
+          <a:bodyPr rtlCol="0" anchor="ctr" wrap="square" lIns="38100" rIns="38100" tIns="25400" bIns="25400"/>
+          <a:lstStyle/>
+          <a:p>
+            <a:pPr algn="l"/>
+            <a:r>
+              <a:rPr sz="1150" b="1" i="0">
+                <a:solidFill>
+                  <a:srgbClr val="2A9D8F"/>
+                </a:solidFill>
+                <a:latin typeface="Noto Sans CJK KR"/>
+              </a:rPr>
+              <a:t>직관 (왜 이렇게?)</a:t>
+            </a:r>
+          </a:p>
+          <a:p>
+            <a:pPr algn="l"/>
+            <a:r>
+              <a:rPr sz="1250" b="0" i="0">
+                <a:solidFill>
+                  <a:srgbClr val="22252B"/>
+                </a:solidFill>
+                <a:latin typeface="Noto Sans CJK KR"/>
+              </a:rPr>
+              <a:t>"안 가 본 곳은 성큼 빠르게 훑고, 많이 가 본 곳은 잘 가니까 갈수록 보폭을 줄여 세밀히 탐색."</a:t>
+            </a:r>
+          </a:p>
+        </p:txBody>
+      </p:sp>
+      <p:sp>
+        <p:nvSpPr>
+          <p:cNvPr id="7" name="Rounded Rectangle 6"/>
+          <p:cNvSpPr/>
+          <p:nvPr/>
+        </p:nvSpPr>
+        <p:spPr>
+          <a:xfrm>
+            <a:off x="502920" y="2377440"/>
+            <a:ext cx="11155680" cy="2148840"/>
+          </a:xfrm>
+          <a:prstGeom prst="roundRect">
+            <a:avLst/>
+          </a:prstGeom>
+          <a:solidFill>
+            <a:srgbClr val="FFFFFF"/>
+          </a:solidFill>
+          <a:ln w="12700">
+            <a:solidFill>
+              <a:srgbClr val="8A8F98"/>
+            </a:solidFill>
+          </a:ln>
+          <a:effectLst/>
+        </p:spPr>
+        <p:style>
+          <a:lnRef idx="1">
+            <a:schemeClr val="accent1"/>
+          </a:lnRef>
+          <a:fillRef idx="3">
+            <a:schemeClr val="accent1"/>
+          </a:fillRef>
+          <a:effectRef idx="2">
+            <a:schemeClr val="accent1"/>
+          </a:effectRef>
+          <a:fontRef idx="minor">
+            <a:schemeClr val="lt1"/>
+          </a:fontRef>
+        </p:style>
+        <p:txBody>
+          <a:bodyPr rtlCol="0" anchor="ctr" wrap="square" lIns="38100" rIns="38100" tIns="25400" bIns="25400"/>
+          <a:lstStyle/>
+          <a:p>
+            <a:pPr algn="l"/>
+            <a:r>
+              <a:rPr sz="1150" b="1" i="0">
+                <a:solidFill>
+                  <a:srgbClr val="22252B"/>
+                </a:solidFill>
+                <a:latin typeface="Noto Sans CJK KR"/>
+              </a:rPr>
+              <a:t>갱신 규칙 (수식)</a:t>
+            </a:r>
+          </a:p>
+          <a:p>
+            <a:pPr algn="l"/>
+            <a:r>
+              <a:rPr sz="1250" b="0" i="0">
+                <a:solidFill>
+                  <a:srgbClr val="22252B"/>
+                </a:solidFill>
+                <a:latin typeface="Noto Sans Mono CJK KR"/>
+              </a:rPr>
+              <a:t>G_t = G_{t-1} + g_t²                  # 좌표별 gradient² 누적</a:t>
+            </a:r>
+          </a:p>
+          <a:p>
+            <a:pPr algn="l"/>
+            <a:r>
+              <a:rPr sz="1250" b="0" i="0">
+                <a:solidFill>
+                  <a:srgbClr val="22252B"/>
+                </a:solidFill>
+                <a:latin typeface="Noto Sans Mono CJK KR"/>
+              </a:rPr>
+              <a:t>θ_{t+1} = θ_t − η · g_t / (√G_t + ε)   # 좌표마다 다른 보폭</a:t>
+            </a:r>
+          </a:p>
+        </p:txBody>
+      </p:sp>
+      <p:sp>
+        <p:nvSpPr>
+          <p:cNvPr id="8" name="Rounded Rectangle 7"/>
+          <p:cNvSpPr/>
+          <p:nvPr/>
+        </p:nvSpPr>
+        <p:spPr>
+          <a:xfrm>
+            <a:off x="502920" y="4709160"/>
+            <a:ext cx="5486400" cy="1737360"/>
+          </a:xfrm>
+          <a:prstGeom prst="roundRect">
+            <a:avLst/>
+          </a:prstGeom>
+          <a:solidFill>
+            <a:srgbClr val="DAF0ED"/>
+          </a:solidFill>
+          <a:ln w="12700">
+            <a:solidFill>
+              <a:srgbClr val="2A9D8F"/>
+            </a:solidFill>
+          </a:ln>
+          <a:effectLst/>
+        </p:spPr>
+        <p:style>
+          <a:lnRef idx="1">
+            <a:schemeClr val="accent1"/>
+          </a:lnRef>
+          <a:fillRef idx="3">
+            <a:schemeClr val="accent1"/>
+          </a:fillRef>
+          <a:effectRef idx="2">
+            <a:schemeClr val="accent1"/>
+          </a:effectRef>
+          <a:fontRef idx="minor">
+            <a:schemeClr val="lt1"/>
+          </a:fontRef>
+        </p:style>
+        <p:txBody>
+          <a:bodyPr rtlCol="0" anchor="ctr" wrap="square" lIns="38100" rIns="38100" tIns="25400" bIns="25400"/>
+          <a:lstStyle/>
+          <a:p>
+            <a:pPr algn="l"/>
+            <a:r>
+              <a:rPr sz="1150" b="1" i="0">
+                <a:solidFill>
+                  <a:srgbClr val="2A9D8F"/>
+                </a:solidFill>
+                <a:latin typeface="Noto Sans CJK KR"/>
+              </a:rPr>
+              <a:t>이 optimizer가 해결한 것</a:t>
+            </a:r>
+          </a:p>
+          <a:p>
+            <a:pPr algn="l"/>
+            <a:r>
+              <a:rPr sz="1150" b="0" i="0">
+                <a:solidFill>
+                  <a:srgbClr val="22252B"/>
+                </a:solidFill>
+                <a:latin typeface="Noto Sans CJK KR"/>
+              </a:rPr>
+              <a:t>좌표마다 다른 learning rate — 드물게 큰 gradient(희소 feature)는 크게, 자주 큰 좌표는 작게.</a:t>
+            </a:r>
+          </a:p>
+        </p:txBody>
+      </p:sp>
+      <p:sp>
+        <p:nvSpPr>
+          <p:cNvPr id="9" name="Rounded Rectangle 8"/>
+          <p:cNvSpPr/>
+          <p:nvPr/>
+        </p:nvSpPr>
+        <p:spPr>
+          <a:xfrm>
+            <a:off x="6172200" y="4709160"/>
+            <a:ext cx="5486400" cy="1737360"/>
+          </a:xfrm>
+          <a:prstGeom prst="roundRect">
+            <a:avLst/>
+          </a:prstGeom>
+          <a:solidFill>
+            <a:srgbClr val="F6DDDD"/>
+          </a:solidFill>
+          <a:ln w="12700">
+            <a:solidFill>
+              <a:srgbClr val="C1121F"/>
+            </a:solidFill>
+          </a:ln>
+          <a:effectLst/>
+        </p:spPr>
+        <p:style>
+          <a:lnRef idx="1">
+            <a:schemeClr val="accent1"/>
+          </a:lnRef>
+          <a:fillRef idx="3">
+            <a:schemeClr val="accent1"/>
+          </a:fillRef>
+          <a:effectRef idx="2">
+            <a:schemeClr val="accent1"/>
+          </a:effectRef>
+          <a:fontRef idx="minor">
+            <a:schemeClr val="lt1"/>
+          </a:fontRef>
+        </p:style>
+        <p:txBody>
+          <a:bodyPr rtlCol="0" anchor="ctr" wrap="square" lIns="38100" rIns="38100" tIns="25400" bIns="25400"/>
+          <a:lstStyle/>
+          <a:p>
+            <a:pPr algn="l"/>
+            <a:r>
+              <a:rPr sz="1150" b="1" i="0">
+                <a:solidFill>
+                  <a:srgbClr val="C1121F"/>
+                </a:solidFill>
+                <a:latin typeface="Noto Sans CJK KR"/>
+              </a:rPr>
+              <a:t>남은 문제 → 다음</a:t>
+            </a:r>
+          </a:p>
+          <a:p>
+            <a:pPr algn="l"/>
+            <a:r>
+              <a:rPr sz="1150" b="0" i="0">
+                <a:solidFill>
+                  <a:srgbClr val="22252B"/>
+                </a:solidFill>
+                <a:latin typeface="Noto Sans CJK KR"/>
+              </a:rPr>
+              <a:t>G_t가 단조 증가 → 분모가 계속 커져 보폭이 0으로 죽는다(학습 정지).  → RMSProp</a:t>
+            </a:r>
+          </a:p>
+        </p:txBody>
+      </p:sp>
+    </p:spTree>
+  </p:cSld>
+  <p:clrMapOvr>
+    <a:masterClrMapping/>
+  </p:clrMapOvr>
+</p:sld>
+</file>
+
+<file path=ppt/slides/slide12.xml><?xml version="1.0" encoding="utf-8"?>
+<p:sld xmlns:a="http://schemas.openxmlformats.org/drawingml/2006/main" xmlns:p="http://schemas.openxmlformats.org/presentationml/2006/main" xmlns:r="http://schemas.openxmlformats.org/officeDocument/2006/relationships">
+  <p:cSld>
+    <p:spTree>
+      <p:nvGrpSpPr>
+        <p:cNvPr id="1" name=""/>
+        <p:cNvGrpSpPr/>
+        <p:nvPr/>
+      </p:nvGrpSpPr>
+      <p:grpSpPr/>
+      <p:sp>
+        <p:nvSpPr>
+          <p:cNvPr id="2" name="Rectangle 1"/>
+          <p:cNvSpPr/>
+          <p:nvPr/>
+        </p:nvSpPr>
+        <p:spPr>
+          <a:xfrm>
+            <a:off x="0" y="0"/>
+            <a:ext cx="12191695" cy="54864"/>
+          </a:xfrm>
+          <a:prstGeom prst="rect">
+            <a:avLst/>
+          </a:prstGeom>
+          <a:solidFill>
+            <a:srgbClr val="2A9D8F"/>
+          </a:solidFill>
+          <a:ln w="12700">
+            <a:solidFill>
+              <a:srgbClr val="2A9D8F"/>
+            </a:solidFill>
+          </a:ln>
+          <a:effectLst/>
+        </p:spPr>
+        <p:style>
+          <a:lnRef idx="1">
+            <a:schemeClr val="accent1"/>
+          </a:lnRef>
+          <a:fillRef idx="3">
+            <a:schemeClr val="accent1"/>
+          </a:fillRef>
+          <a:effectRef idx="2">
+            <a:schemeClr val="accent1"/>
+          </a:effectRef>
+          <a:fontRef idx="minor">
+            <a:schemeClr val="lt1"/>
+          </a:fontRef>
+        </p:style>
+        <p:txBody>
+          <a:bodyPr rtlCol="0" anchor="ctr" wrap="square" lIns="38100" rIns="38100" tIns="25400" bIns="25400"/>
+          <a:lstStyle/>
+          <a:p>
+            <a:pPr algn="ctr"/>
+            <a:r>
+              <a:rPr sz="1100" b="0" i="0">
+                <a:solidFill>
+                  <a:srgbClr val="22252B"/>
+                </a:solidFill>
+                <a:latin typeface="Noto Sans CJK KR"/>
+              </a:rPr>
+              <a:t/>
+            </a:r>
+          </a:p>
+        </p:txBody>
+      </p:sp>
+      <p:sp>
+        <p:nvSpPr>
+          <p:cNvPr id="3" name="TextBox 2"/>
+          <p:cNvSpPr txBox="1"/>
+          <p:nvPr/>
+        </p:nvSpPr>
+        <p:spPr>
+          <a:xfrm>
+            <a:off x="502920" y="164592"/>
+            <a:ext cx="11185855" cy="320040"/>
+          </a:xfrm>
+          <a:prstGeom prst="rect">
+            <a:avLst/>
+          </a:prstGeom>
+          <a:noFill/>
+        </p:spPr>
+        <p:txBody>
+          <a:bodyPr wrap="square" anchor="t" lIns="25400" rIns="25400" tIns="12700" bIns="12700">
+            <a:spAutoFit/>
+          </a:bodyPr>
+          <a:lstStyle/>
+          <a:p>
+            <a:pPr algn="l"/>
+            <a:r>
+              <a:rPr sz="1200" b="1" i="0">
+                <a:solidFill>
+                  <a:srgbClr val="2A9D8F"/>
+                </a:solidFill>
+                <a:latin typeface="Noto Sans CJK KR"/>
+              </a:rPr>
+              <a:t>A2 · RMSProp</a:t>
+            </a:r>
+          </a:p>
+        </p:txBody>
+      </p:sp>
+      <p:sp>
+        <p:nvSpPr>
+          <p:cNvPr id="4" name="TextBox 3"/>
+          <p:cNvSpPr txBox="1"/>
+          <p:nvPr/>
+        </p:nvSpPr>
+        <p:spPr>
+          <a:xfrm>
+            <a:off x="502920" y="457200"/>
+            <a:ext cx="11185855" cy="548640"/>
+          </a:xfrm>
+          <a:prstGeom prst="rect">
+            <a:avLst/>
+          </a:prstGeom>
+          <a:noFill/>
+        </p:spPr>
+        <p:txBody>
+          <a:bodyPr wrap="square" anchor="t" lIns="25400" rIns="25400" tIns="12700" bIns="12700">
+            <a:spAutoFit/>
+          </a:bodyPr>
+          <a:lstStyle/>
+          <a:p>
+            <a:pPr algn="l"/>
+            <a:r>
+              <a:rPr sz="2200" b="1" i="0">
+                <a:solidFill>
+                  <a:srgbClr val="22252B"/>
+                </a:solidFill>
+                <a:latin typeface="Noto Sans CJK KR"/>
+              </a:rPr>
+              <a:t>RMSProp  ·  Root Mean Square Propagation</a:t>
+            </a:r>
+          </a:p>
+        </p:txBody>
+      </p:sp>
+      <p:sp>
+        <p:nvSpPr>
+          <p:cNvPr id="5" name="TextBox 4"/>
+          <p:cNvSpPr txBox="1"/>
+          <p:nvPr/>
+        </p:nvSpPr>
+        <p:spPr>
+          <a:xfrm>
+            <a:off x="502920" y="932688"/>
+            <a:ext cx="5486400" cy="274320"/>
+          </a:xfrm>
+          <a:prstGeom prst="rect">
+            <a:avLst/>
+          </a:prstGeom>
+          <a:noFill/>
+        </p:spPr>
+        <p:txBody>
+          <a:bodyPr wrap="square" anchor="t" lIns="25400" rIns="25400" tIns="12700" bIns="12700">
+            <a:spAutoFit/>
+          </a:bodyPr>
+          <a:lstStyle/>
+          <a:p>
+            <a:pPr algn="l"/>
+            <a:r>
+              <a:rPr sz="1100" b="1" i="0">
+                <a:solidFill>
+                  <a:srgbClr val="2A9D8F"/>
+                </a:solidFill>
+                <a:latin typeface="Noto Sans CJK KR"/>
+              </a:rPr>
+              <a:t>초록 줄기 — EMA로 보완</a:t>
+            </a:r>
+          </a:p>
+        </p:txBody>
+      </p:sp>
+      <p:sp>
+        <p:nvSpPr>
+          <p:cNvPr id="6" name="Rounded Rectangle 5"/>
+          <p:cNvSpPr/>
+          <p:nvPr/>
+        </p:nvSpPr>
+        <p:spPr>
+          <a:xfrm>
+            <a:off x="502920" y="1298448"/>
+            <a:ext cx="11155680" cy="896112"/>
+          </a:xfrm>
+          <a:prstGeom prst="roundRect">
+            <a:avLst/>
+          </a:prstGeom>
+          <a:solidFill>
+            <a:srgbClr val="DAF0ED"/>
+          </a:solidFill>
+          <a:ln w="12700">
+            <a:solidFill>
+              <a:srgbClr val="2A9D8F"/>
+            </a:solidFill>
+          </a:ln>
+          <a:effectLst/>
+        </p:spPr>
+        <p:style>
+          <a:lnRef idx="1">
+            <a:schemeClr val="accent1"/>
+          </a:lnRef>
+          <a:fillRef idx="3">
+            <a:schemeClr val="accent1"/>
+          </a:fillRef>
+          <a:effectRef idx="2">
+            <a:schemeClr val="accent1"/>
+          </a:effectRef>
+          <a:fontRef idx="minor">
+            <a:schemeClr val="lt1"/>
+          </a:fontRef>
+        </p:style>
+        <p:txBody>
+          <a:bodyPr rtlCol="0" anchor="ctr" wrap="square" lIns="38100" rIns="38100" tIns="25400" bIns="25400"/>
+          <a:lstStyle/>
+          <a:p>
+            <a:pPr algn="l"/>
+            <a:r>
+              <a:rPr sz="1150" b="1" i="0">
+                <a:solidFill>
+                  <a:srgbClr val="2A9D8F"/>
+                </a:solidFill>
+                <a:latin typeface="Noto Sans CJK KR"/>
+              </a:rPr>
+              <a:t>직관 (왜 이렇게?)</a:t>
+            </a:r>
+          </a:p>
+          <a:p>
+            <a:pPr algn="l"/>
+            <a:r>
+              <a:rPr sz="1250" b="0" i="0">
+                <a:solidFill>
+                  <a:srgbClr val="22252B"/>
+                </a:solidFill>
+                <a:latin typeface="Noto Sans CJK KR"/>
+              </a:rPr>
+              <a:t>"보폭을 줄이는 건 좋은데, (전부 누적하지 말고) 최근 맥락을 봐 가며 하자."</a:t>
+            </a:r>
+          </a:p>
+        </p:txBody>
+      </p:sp>
+      <p:sp>
+        <p:nvSpPr>
+          <p:cNvPr id="7" name="Rounded Rectangle 6"/>
+          <p:cNvSpPr/>
+          <p:nvPr/>
+        </p:nvSpPr>
+        <p:spPr>
+          <a:xfrm>
+            <a:off x="502920" y="2377440"/>
+            <a:ext cx="11155680" cy="2148840"/>
+          </a:xfrm>
+          <a:prstGeom prst="roundRect">
+            <a:avLst/>
+          </a:prstGeom>
+          <a:solidFill>
+            <a:srgbClr val="FFFFFF"/>
+          </a:solidFill>
+          <a:ln w="12700">
+            <a:solidFill>
+              <a:srgbClr val="8A8F98"/>
+            </a:solidFill>
+          </a:ln>
+          <a:effectLst/>
+        </p:spPr>
+        <p:style>
+          <a:lnRef idx="1">
+            <a:schemeClr val="accent1"/>
+          </a:lnRef>
+          <a:fillRef idx="3">
+            <a:schemeClr val="accent1"/>
+          </a:fillRef>
+          <a:effectRef idx="2">
+            <a:schemeClr val="accent1"/>
+          </a:effectRef>
+          <a:fontRef idx="minor">
+            <a:schemeClr val="lt1"/>
+          </a:fontRef>
+        </p:style>
+        <p:txBody>
+          <a:bodyPr rtlCol="0" anchor="ctr" wrap="square" lIns="38100" rIns="38100" tIns="25400" bIns="25400"/>
+          <a:lstStyle/>
+          <a:p>
+            <a:pPr algn="l"/>
+            <a:r>
+              <a:rPr sz="1150" b="1" i="0">
+                <a:solidFill>
+                  <a:srgbClr val="22252B"/>
+                </a:solidFill>
+                <a:latin typeface="Noto Sans CJK KR"/>
+              </a:rPr>
+              <a:t>갱신 규칙 (수식)</a:t>
+            </a:r>
+          </a:p>
+          <a:p>
+            <a:pPr algn="l"/>
+            <a:r>
+              <a:rPr sz="1250" b="0" i="0">
+                <a:solidFill>
+                  <a:srgbClr val="22252B"/>
+                </a:solidFill>
+                <a:latin typeface="Noto Sans Mono CJK KR"/>
+              </a:rPr>
+              <a:t>E[g²]_t = ρ · E[g²]_{t-1} + (1−ρ) · g_t²   # ρ≈0.9, 최근값 지수이동평균</a:t>
+            </a:r>
+          </a:p>
+          <a:p>
+            <a:pPr algn="l"/>
+            <a:r>
+              <a:rPr sz="1250" b="0" i="0">
+                <a:solidFill>
+                  <a:srgbClr val="22252B"/>
+                </a:solidFill>
+                <a:latin typeface="Noto Sans Mono CJK KR"/>
+              </a:rPr>
+              <a:t>θ_{t+1} = θ_t − η · g_t / (√E[g²]_t + ε)</a:t>
+            </a:r>
+          </a:p>
+        </p:txBody>
+      </p:sp>
+      <p:sp>
+        <p:nvSpPr>
+          <p:cNvPr id="8" name="Rounded Rectangle 7"/>
+          <p:cNvSpPr/>
+          <p:nvPr/>
+        </p:nvSpPr>
+        <p:spPr>
+          <a:xfrm>
+            <a:off x="502920" y="4709160"/>
+            <a:ext cx="5486400" cy="1737360"/>
+          </a:xfrm>
+          <a:prstGeom prst="roundRect">
+            <a:avLst/>
+          </a:prstGeom>
+          <a:solidFill>
+            <a:srgbClr val="DAF0ED"/>
+          </a:solidFill>
+          <a:ln w="12700">
+            <a:solidFill>
+              <a:srgbClr val="2A9D8F"/>
+            </a:solidFill>
+          </a:ln>
+          <a:effectLst/>
+        </p:spPr>
+        <p:style>
+          <a:lnRef idx="1">
+            <a:schemeClr val="accent1"/>
+          </a:lnRef>
+          <a:fillRef idx="3">
+            <a:schemeClr val="accent1"/>
+          </a:fillRef>
+          <a:effectRef idx="2">
+            <a:schemeClr val="accent1"/>
+          </a:effectRef>
+          <a:fontRef idx="minor">
+            <a:schemeClr val="lt1"/>
+          </a:fontRef>
+        </p:style>
+        <p:txBody>
+          <a:bodyPr rtlCol="0" anchor="ctr" wrap="square" lIns="38100" rIns="38100" tIns="25400" bIns="25400"/>
+          <a:lstStyle/>
+          <a:p>
+            <a:pPr algn="l"/>
+            <a:r>
+              <a:rPr sz="1150" b="1" i="0">
+                <a:solidFill>
+                  <a:srgbClr val="2A9D8F"/>
+                </a:solidFill>
+                <a:latin typeface="Noto Sans CJK KR"/>
+              </a:rPr>
+              <a:t>이 optimizer가 해결한 것</a:t>
+            </a:r>
+          </a:p>
+          <a:p>
+            <a:pPr algn="l"/>
+            <a:r>
+              <a:rPr sz="1150" b="0" i="0">
+                <a:solidFill>
+                  <a:srgbClr val="22252B"/>
+                </a:solidFill>
+                <a:latin typeface="Noto Sans CJK KR"/>
+              </a:rPr>
+              <a:t>합 대신 EMA → 분모가 무한정 커지지 않아 보폭이 죽지 않는다. 비정상(non-stationary) 목표에도 안정.</a:t>
+            </a:r>
+          </a:p>
+        </p:txBody>
+      </p:sp>
+      <p:sp>
+        <p:nvSpPr>
+          <p:cNvPr id="9" name="Rounded Rectangle 8"/>
+          <p:cNvSpPr/>
+          <p:nvPr/>
+        </p:nvSpPr>
+        <p:spPr>
+          <a:xfrm>
+            <a:off x="6172200" y="4709160"/>
+            <a:ext cx="5486400" cy="1737360"/>
+          </a:xfrm>
+          <a:prstGeom prst="roundRect">
+            <a:avLst/>
+          </a:prstGeom>
+          <a:solidFill>
+            <a:srgbClr val="F6DDDD"/>
+          </a:solidFill>
+          <a:ln w="12700">
+            <a:solidFill>
+              <a:srgbClr val="C1121F"/>
+            </a:solidFill>
+          </a:ln>
+          <a:effectLst/>
+        </p:spPr>
+        <p:style>
+          <a:lnRef idx="1">
+            <a:schemeClr val="accent1"/>
+          </a:lnRef>
+          <a:fillRef idx="3">
+            <a:schemeClr val="accent1"/>
+          </a:fillRef>
+          <a:effectRef idx="2">
+            <a:schemeClr val="accent1"/>
+          </a:effectRef>
+          <a:fontRef idx="minor">
+            <a:schemeClr val="lt1"/>
+          </a:fontRef>
+        </p:style>
+        <p:txBody>
+          <a:bodyPr rtlCol="0" anchor="ctr" wrap="square" lIns="38100" rIns="38100" tIns="25400" bIns="25400"/>
+          <a:lstStyle/>
+          <a:p>
+            <a:pPr algn="l"/>
+            <a:r>
+              <a:rPr sz="1150" b="1" i="0">
+                <a:solidFill>
+                  <a:srgbClr val="C1121F"/>
+                </a:solidFill>
+                <a:latin typeface="Noto Sans CJK KR"/>
+              </a:rPr>
+              <a:t>남은 문제 → 다음</a:t>
+            </a:r>
+          </a:p>
+          <a:p>
+            <a:pPr algn="l"/>
+            <a:r>
+              <a:rPr sz="1150" b="0" i="0">
+                <a:solidFill>
+                  <a:srgbClr val="22252B"/>
+                </a:solidFill>
+                <a:latin typeface="Noto Sans CJK KR"/>
+              </a:rPr>
+              <a:t>방향(momentum)은 아직 안 씀. 초기(0에서 시작) 편향 보정도 없다.  → Adam</a:t>
+            </a:r>
+          </a:p>
+        </p:txBody>
+      </p:sp>
+    </p:spTree>
+  </p:cSld>
+  <p:clrMapOvr>
+    <a:masterClrMapping/>
+  </p:clrMapOvr>
+</p:sld>
+</file>
+
+<file path=ppt/slides/slide13.xml><?xml version="1.0" encoding="utf-8"?>
+<p:sld xmlns:a="http://schemas.openxmlformats.org/drawingml/2006/main" xmlns:p="http://schemas.openxmlformats.org/presentationml/2006/main" xmlns:r="http://schemas.openxmlformats.org/officeDocument/2006/relationships">
+  <p:cSld>
+    <p:spTree>
+      <p:nvGrpSpPr>
+        <p:cNvPr id="1" name=""/>
+        <p:cNvGrpSpPr/>
+        <p:nvPr/>
+      </p:nvGrpSpPr>
+      <p:grpSpPr/>
+      <p:sp>
+        <p:nvSpPr>
+          <p:cNvPr id="2" name="Rectangle 1"/>
+          <p:cNvSpPr/>
+          <p:nvPr/>
+        </p:nvSpPr>
+        <p:spPr>
+          <a:xfrm>
+            <a:off x="0" y="0"/>
+            <a:ext cx="12191695" cy="54864"/>
+          </a:xfrm>
+          <a:prstGeom prst="rect">
+            <a:avLst/>
+          </a:prstGeom>
+          <a:solidFill>
+            <a:srgbClr val="2A9D8F"/>
+          </a:solidFill>
+          <a:ln w="12700">
+            <a:solidFill>
+              <a:srgbClr val="2A9D8F"/>
+            </a:solidFill>
+          </a:ln>
+          <a:effectLst/>
+        </p:spPr>
+        <p:style>
+          <a:lnRef idx="1">
+            <a:schemeClr val="accent1"/>
+          </a:lnRef>
+          <a:fillRef idx="3">
+            <a:schemeClr val="accent1"/>
+          </a:fillRef>
+          <a:effectRef idx="2">
+            <a:schemeClr val="accent1"/>
+          </a:effectRef>
+          <a:fontRef idx="minor">
+            <a:schemeClr val="lt1"/>
+          </a:fontRef>
+        </p:style>
+        <p:txBody>
+          <a:bodyPr rtlCol="0" anchor="ctr" wrap="square" lIns="38100" rIns="38100" tIns="25400" bIns="25400"/>
+          <a:lstStyle/>
+          <a:p>
+            <a:pPr algn="ctr"/>
+            <a:r>
+              <a:rPr sz="1100" b="0" i="0">
+                <a:solidFill>
+                  <a:srgbClr val="22252B"/>
+                </a:solidFill>
+                <a:latin typeface="Noto Sans CJK KR"/>
+              </a:rPr>
+              <a:t/>
+            </a:r>
+          </a:p>
+        </p:txBody>
+      </p:sp>
+      <p:sp>
+        <p:nvSpPr>
+          <p:cNvPr id="3" name="TextBox 2"/>
+          <p:cNvSpPr txBox="1"/>
+          <p:nvPr/>
+        </p:nvSpPr>
+        <p:spPr>
+          <a:xfrm>
+            <a:off x="502920" y="164592"/>
+            <a:ext cx="11185855" cy="320040"/>
+          </a:xfrm>
+          <a:prstGeom prst="rect">
+            <a:avLst/>
+          </a:prstGeom>
+          <a:noFill/>
+        </p:spPr>
+        <p:txBody>
+          <a:bodyPr wrap="square" anchor="t" lIns="25400" rIns="25400" tIns="12700" bIns="12700">
+            <a:spAutoFit/>
+          </a:bodyPr>
+          <a:lstStyle/>
+          <a:p>
+            <a:pPr algn="l"/>
+            <a:r>
+              <a:rPr sz="1200" b="1" i="0">
+                <a:solidFill>
+                  <a:srgbClr val="2A9D8F"/>
+                </a:solidFill>
+                <a:latin typeface="Noto Sans CJK KR"/>
+              </a:rPr>
+              <a:t>A2 · AdaDelta</a:t>
+            </a:r>
+          </a:p>
+        </p:txBody>
+      </p:sp>
+      <p:sp>
+        <p:nvSpPr>
+          <p:cNvPr id="4" name="TextBox 3"/>
+          <p:cNvSpPr txBox="1"/>
+          <p:nvPr/>
+        </p:nvSpPr>
+        <p:spPr>
+          <a:xfrm>
+            <a:off x="502920" y="457200"/>
+            <a:ext cx="11185855" cy="548640"/>
+          </a:xfrm>
+          <a:prstGeom prst="rect">
+            <a:avLst/>
+          </a:prstGeom>
+          <a:noFill/>
+        </p:spPr>
+        <p:txBody>
+          <a:bodyPr wrap="square" anchor="t" lIns="25400" rIns="25400" tIns="12700" bIns="12700">
+            <a:spAutoFit/>
+          </a:bodyPr>
+          <a:lstStyle/>
+          <a:p>
+            <a:pPr algn="l"/>
+            <a:r>
+              <a:rPr sz="2200" b="1" i="0">
+                <a:solidFill>
+                  <a:srgbClr val="22252B"/>
+                </a:solidFill>
+                <a:latin typeface="Noto Sans CJK KR"/>
+              </a:rPr>
+              <a:t>AdaDelta  ·  Adaptive Delta</a:t>
+            </a:r>
+          </a:p>
+        </p:txBody>
+      </p:sp>
+      <p:sp>
+        <p:nvSpPr>
+          <p:cNvPr id="5" name="TextBox 4"/>
+          <p:cNvSpPr txBox="1"/>
+          <p:nvPr/>
+        </p:nvSpPr>
+        <p:spPr>
+          <a:xfrm>
+            <a:off x="502920" y="932688"/>
+            <a:ext cx="5486400" cy="274320"/>
+          </a:xfrm>
+          <a:prstGeom prst="rect">
+            <a:avLst/>
+          </a:prstGeom>
+          <a:noFill/>
+        </p:spPr>
+        <p:txBody>
+          <a:bodyPr wrap="square" anchor="t" lIns="25400" rIns="25400" tIns="12700" bIns="12700">
+            <a:spAutoFit/>
+          </a:bodyPr>
+          <a:lstStyle/>
+          <a:p>
+            <a:pPr algn="l"/>
+            <a:r>
+              <a:rPr sz="1100" b="1" i="0">
+                <a:solidFill>
+                  <a:srgbClr val="2A9D8F"/>
+                </a:solidFill>
+                <a:latin typeface="Noto Sans CJK KR"/>
+              </a:rPr>
+              <a:t>초록 줄기 — η 제거(곁가지)</a:t>
+            </a:r>
+          </a:p>
+        </p:txBody>
+      </p:sp>
+      <p:sp>
+        <p:nvSpPr>
+          <p:cNvPr id="6" name="Rounded Rectangle 5"/>
+          <p:cNvSpPr/>
+          <p:nvPr/>
+        </p:nvSpPr>
+        <p:spPr>
+          <a:xfrm>
+            <a:off x="502920" y="1298448"/>
+            <a:ext cx="11155680" cy="896112"/>
+          </a:xfrm>
+          <a:prstGeom prst="roundRect">
+            <a:avLst/>
+          </a:prstGeom>
+          <a:solidFill>
+            <a:srgbClr val="DAF0ED"/>
+          </a:solidFill>
+          <a:ln w="12700">
+            <a:solidFill>
+              <a:srgbClr val="2A9D8F"/>
+            </a:solidFill>
+          </a:ln>
+          <a:effectLst/>
+        </p:spPr>
+        <p:style>
+          <a:lnRef idx="1">
+            <a:schemeClr val="accent1"/>
+          </a:lnRef>
+          <a:fillRef idx="3">
+            <a:schemeClr val="accent1"/>
+          </a:fillRef>
+          <a:effectRef idx="2">
+            <a:schemeClr val="accent1"/>
+          </a:effectRef>
+          <a:fontRef idx="minor">
+            <a:schemeClr val="lt1"/>
+          </a:fontRef>
+        </p:style>
+        <p:txBody>
+          <a:bodyPr rtlCol="0" anchor="ctr" wrap="square" lIns="38100" rIns="38100" tIns="25400" bIns="25400"/>
+          <a:lstStyle/>
+          <a:p>
+            <a:pPr algn="l"/>
+            <a:r>
+              <a:rPr sz="1150" b="1" i="0">
+                <a:solidFill>
+                  <a:srgbClr val="2A9D8F"/>
+                </a:solidFill>
+                <a:latin typeface="Noto Sans CJK KR"/>
+              </a:rPr>
+              <a:t>직관 (왜 이렇게?)</a:t>
+            </a:r>
+          </a:p>
+          <a:p>
+            <a:pPr algn="l"/>
+            <a:r>
+              <a:rPr sz="1250" b="0" i="0">
+                <a:solidFill>
+                  <a:srgbClr val="22252B"/>
+                </a:solidFill>
+                <a:latin typeface="Noto Sans CJK KR"/>
+              </a:rPr>
+              <a:t>"종종걸음(보폭)이 너무 작아져 정지하는 걸 막고, learning rate η 자체도 없애 보자."</a:t>
+            </a:r>
+          </a:p>
+        </p:txBody>
+      </p:sp>
+      <p:sp>
+        <p:nvSpPr>
+          <p:cNvPr id="7" name="Rounded Rectangle 6"/>
+          <p:cNvSpPr/>
+          <p:nvPr/>
+        </p:nvSpPr>
+        <p:spPr>
+          <a:xfrm>
+            <a:off x="502920" y="2377440"/>
+            <a:ext cx="11155680" cy="2148840"/>
+          </a:xfrm>
+          <a:prstGeom prst="roundRect">
+            <a:avLst/>
+          </a:prstGeom>
+          <a:solidFill>
+            <a:srgbClr val="FFFFFF"/>
+          </a:solidFill>
+          <a:ln w="12700">
+            <a:solidFill>
+              <a:srgbClr val="8A8F98"/>
+            </a:solidFill>
+          </a:ln>
+          <a:effectLst/>
+        </p:spPr>
+        <p:style>
+          <a:lnRef idx="1">
+            <a:schemeClr val="accent1"/>
+          </a:lnRef>
+          <a:fillRef idx="3">
+            <a:schemeClr val="accent1"/>
+          </a:fillRef>
+          <a:effectRef idx="2">
+            <a:schemeClr val="accent1"/>
+          </a:effectRef>
+          <a:fontRef idx="minor">
+            <a:schemeClr val="lt1"/>
+          </a:fontRef>
+        </p:style>
+        <p:txBody>
+          <a:bodyPr rtlCol="0" anchor="ctr" wrap="square" lIns="38100" rIns="38100" tIns="25400" bIns="25400"/>
+          <a:lstStyle/>
+          <a:p>
+            <a:pPr algn="l"/>
+            <a:r>
+              <a:rPr sz="1150" b="1" i="0">
+                <a:solidFill>
+                  <a:srgbClr val="22252B"/>
+                </a:solidFill>
+                <a:latin typeface="Noto Sans CJK KR"/>
+              </a:rPr>
+              <a:t>갱신 규칙 (수식)</a:t>
+            </a:r>
+          </a:p>
+          <a:p>
+            <a:pPr algn="l"/>
+            <a:r>
+              <a:rPr sz="1250" b="0" i="0">
+                <a:solidFill>
+                  <a:srgbClr val="22252B"/>
+                </a:solidFill>
+                <a:latin typeface="Noto Sans Mono CJK KR"/>
+              </a:rPr>
+              <a:t>E[g²]_t = ρ·E[g²]_{t-1} + (1−ρ)·g_t²</a:t>
+            </a:r>
+          </a:p>
+          <a:p>
+            <a:pPr algn="l"/>
+            <a:r>
+              <a:rPr sz="1250" b="0" i="0">
+                <a:solidFill>
+                  <a:srgbClr val="22252B"/>
+                </a:solidFill>
+                <a:latin typeface="Noto Sans Mono CJK KR"/>
+              </a:rPr>
+              <a:t>Δθ_t = − ( √(E[Δθ²]_{t-1}+ε) / √(E[g²]_t+ε) ) · g_t   # 분자=과거 스텝 크기</a:t>
+            </a:r>
+          </a:p>
+          <a:p>
+            <a:pPr algn="l"/>
+            <a:r>
+              <a:rPr sz="1250" b="0" i="0">
+                <a:solidFill>
+                  <a:srgbClr val="22252B"/>
+                </a:solidFill>
+                <a:latin typeface="Noto Sans Mono CJK KR"/>
+              </a:rPr>
+              <a:t>E[Δθ²]_t = ρ·E[Δθ²]_{t-1} + (1−ρ)·Δθ_t² ;   θ_{t+1} = θ_t + Δθ_t</a:t>
+            </a:r>
+          </a:p>
+        </p:txBody>
+      </p:sp>
+      <p:sp>
+        <p:nvSpPr>
+          <p:cNvPr id="8" name="Rounded Rectangle 7"/>
+          <p:cNvSpPr/>
+          <p:nvPr/>
+        </p:nvSpPr>
+        <p:spPr>
+          <a:xfrm>
+            <a:off x="502920" y="4709160"/>
+            <a:ext cx="5486400" cy="1737360"/>
+          </a:xfrm>
+          <a:prstGeom prst="roundRect">
+            <a:avLst/>
+          </a:prstGeom>
+          <a:solidFill>
+            <a:srgbClr val="DAF0ED"/>
+          </a:solidFill>
+          <a:ln w="12700">
+            <a:solidFill>
+              <a:srgbClr val="2A9D8F"/>
+            </a:solidFill>
+          </a:ln>
+          <a:effectLst/>
+        </p:spPr>
+        <p:style>
+          <a:lnRef idx="1">
+            <a:schemeClr val="accent1"/>
+          </a:lnRef>
+          <a:fillRef idx="3">
+            <a:schemeClr val="accent1"/>
+          </a:fillRef>
+          <a:effectRef idx="2">
+            <a:schemeClr val="accent1"/>
+          </a:effectRef>
+          <a:fontRef idx="minor">
+            <a:schemeClr val="lt1"/>
+          </a:fontRef>
+        </p:style>
+        <p:txBody>
+          <a:bodyPr rtlCol="0" anchor="ctr" wrap="square" lIns="38100" rIns="38100" tIns="25400" bIns="25400"/>
+          <a:lstStyle/>
+          <a:p>
+            <a:pPr algn="l"/>
+            <a:r>
+              <a:rPr sz="1150" b="1" i="0">
+                <a:solidFill>
+                  <a:srgbClr val="2A9D8F"/>
+                </a:solidFill>
+                <a:latin typeface="Noto Sans CJK KR"/>
+              </a:rPr>
+              <a:t>이 optimizer가 해결한 것</a:t>
+            </a:r>
+          </a:p>
+          <a:p>
+            <a:pPr algn="l"/>
+            <a:r>
+              <a:rPr sz="1150" b="0" i="0">
+                <a:solidFill>
+                  <a:srgbClr val="22252B"/>
+                </a:solidFill>
+                <a:latin typeface="Noto Sans CJK KR"/>
+              </a:rPr>
+              <a:t>스텝의 '단위'를 Δθ의 EMA로 맞춰 η 없이 자동 보폭. RMSProp의 보폭 소멸도 완화.</a:t>
+            </a:r>
+          </a:p>
+        </p:txBody>
+      </p:sp>
+      <p:sp>
+        <p:nvSpPr>
+          <p:cNvPr id="9" name="Rounded Rectangle 8"/>
+          <p:cNvSpPr/>
+          <p:nvPr/>
+        </p:nvSpPr>
+        <p:spPr>
+          <a:xfrm>
+            <a:off x="6172200" y="4709160"/>
+            <a:ext cx="5486400" cy="1737360"/>
+          </a:xfrm>
+          <a:prstGeom prst="roundRect">
+            <a:avLst/>
+          </a:prstGeom>
+          <a:solidFill>
+            <a:srgbClr val="F6DDDD"/>
+          </a:solidFill>
+          <a:ln w="12700">
+            <a:solidFill>
+              <a:srgbClr val="C1121F"/>
+            </a:solidFill>
+          </a:ln>
+          <a:effectLst/>
+        </p:spPr>
+        <p:style>
+          <a:lnRef idx="1">
+            <a:schemeClr val="accent1"/>
+          </a:lnRef>
+          <a:fillRef idx="3">
+            <a:schemeClr val="accent1"/>
+          </a:fillRef>
+          <a:effectRef idx="2">
+            <a:schemeClr val="accent1"/>
+          </a:effectRef>
+          <a:fontRef idx="minor">
+            <a:schemeClr val="lt1"/>
+          </a:fontRef>
+        </p:style>
+        <p:txBody>
+          <a:bodyPr rtlCol="0" anchor="ctr" wrap="square" lIns="38100" rIns="38100" tIns="25400" bIns="25400"/>
+          <a:lstStyle/>
+          <a:p>
+            <a:pPr algn="l"/>
+            <a:r>
+              <a:rPr sz="1150" b="1" i="0">
+                <a:solidFill>
+                  <a:srgbClr val="C1121F"/>
+                </a:solidFill>
+                <a:latin typeface="Noto Sans CJK KR"/>
+              </a:rPr>
+              <a:t>남은 문제 → 다음</a:t>
+            </a:r>
+          </a:p>
+          <a:p>
+            <a:pPr algn="l"/>
+            <a:r>
+              <a:rPr sz="1150" b="0" i="0">
+                <a:solidFill>
+                  <a:srgbClr val="22252B"/>
+                </a:solidFill>
+                <a:latin typeface="Noto Sans CJK KR"/>
+              </a:rPr>
+              <a:t>방향 관성은 미결합. 실무 표준 자리는 곧 Adam이 가져간다.  → Adam</a:t>
+            </a:r>
+          </a:p>
+        </p:txBody>
+      </p:sp>
+    </p:spTree>
+  </p:cSld>
+  <p:clrMapOvr>
+    <a:masterClrMapping/>
+  </p:clrMapOvr>
+</p:sld>
+</file>
+
+<file path=ppt/slides/slide14.xml><?xml version="1.0" encoding="utf-8"?>
+<p:sld xmlns:a="http://schemas.openxmlformats.org/drawingml/2006/main" xmlns:p="http://schemas.openxmlformats.org/presentationml/2006/main" xmlns:r="http://schemas.openxmlformats.org/officeDocument/2006/relationships">
+  <p:cSld>
+    <p:spTree>
+      <p:nvGrpSpPr>
+        <p:cNvPr id="1" name=""/>
+        <p:cNvGrpSpPr/>
+        <p:nvPr/>
+      </p:nvGrpSpPr>
+      <p:grpSpPr/>
+      <p:sp>
+        <p:nvSpPr>
+          <p:cNvPr id="2" name="Rectangle 1"/>
+          <p:cNvSpPr/>
+          <p:nvPr/>
+        </p:nvSpPr>
+        <p:spPr>
+          <a:xfrm>
+            <a:off x="0" y="0"/>
+            <a:ext cx="12191695" cy="54864"/>
+          </a:xfrm>
+          <a:prstGeom prst="rect">
+            <a:avLst/>
+          </a:prstGeom>
+          <a:solidFill>
+            <a:srgbClr val="C9A227"/>
+          </a:solidFill>
+          <a:ln w="12700">
+            <a:solidFill>
+              <a:srgbClr val="C9A227"/>
+            </a:solidFill>
+          </a:ln>
+          <a:effectLst/>
+        </p:spPr>
+        <p:style>
+          <a:lnRef idx="1">
+            <a:schemeClr val="accent1"/>
+          </a:lnRef>
+          <a:fillRef idx="3">
+            <a:schemeClr val="accent1"/>
+          </a:fillRef>
+          <a:effectRef idx="2">
+            <a:schemeClr val="accent1"/>
+          </a:effectRef>
+          <a:fontRef idx="minor">
+            <a:schemeClr val="lt1"/>
+          </a:fontRef>
+        </p:style>
+        <p:txBody>
+          <a:bodyPr rtlCol="0" anchor="ctr" wrap="square" lIns="38100" rIns="38100" tIns="25400" bIns="25400"/>
+          <a:lstStyle/>
+          <a:p>
+            <a:pPr algn="ctr"/>
+            <a:r>
+              <a:rPr sz="1100" b="0" i="0">
+                <a:solidFill>
+                  <a:srgbClr val="22252B"/>
+                </a:solidFill>
+                <a:latin typeface="Noto Sans CJK KR"/>
+              </a:rPr>
+              <a:t/>
+            </a:r>
+          </a:p>
+        </p:txBody>
+      </p:sp>
+      <p:sp>
+        <p:nvSpPr>
+          <p:cNvPr id="3" name="TextBox 2"/>
+          <p:cNvSpPr txBox="1"/>
+          <p:nvPr/>
+        </p:nvSpPr>
+        <p:spPr>
+          <a:xfrm>
+            <a:off x="502920" y="164592"/>
+            <a:ext cx="11185855" cy="320040"/>
+          </a:xfrm>
+          <a:prstGeom prst="rect">
+            <a:avLst/>
+          </a:prstGeom>
+          <a:noFill/>
+        </p:spPr>
+        <p:txBody>
+          <a:bodyPr wrap="square" anchor="t" lIns="25400" rIns="25400" tIns="12700" bIns="12700">
+            <a:spAutoFit/>
+          </a:bodyPr>
+          <a:lstStyle/>
+          <a:p>
+            <a:pPr algn="l"/>
+            <a:r>
+              <a:rPr sz="1200" b="1" i="0">
+                <a:solidFill>
+                  <a:srgbClr val="C9A227"/>
+                </a:solidFill>
+                <a:latin typeface="Noto Sans CJK KR"/>
+              </a:rPr>
+              <a:t>A2 · Adam</a:t>
+            </a:r>
+          </a:p>
+        </p:txBody>
+      </p:sp>
+      <p:sp>
+        <p:nvSpPr>
+          <p:cNvPr id="4" name="TextBox 3"/>
+          <p:cNvSpPr txBox="1"/>
+          <p:nvPr/>
+        </p:nvSpPr>
+        <p:spPr>
+          <a:xfrm>
+            <a:off x="502920" y="457200"/>
+            <a:ext cx="11185855" cy="548640"/>
+          </a:xfrm>
+          <a:prstGeom prst="rect">
+            <a:avLst/>
+          </a:prstGeom>
+          <a:noFill/>
+        </p:spPr>
+        <p:txBody>
+          <a:bodyPr wrap="square" anchor="t" lIns="25400" rIns="25400" tIns="12700" bIns="12700">
+            <a:spAutoFit/>
+          </a:bodyPr>
+          <a:lstStyle/>
+          <a:p>
+            <a:pPr algn="l"/>
+            <a:r>
+              <a:rPr sz="2200" b="1" i="0">
+                <a:solidFill>
+                  <a:srgbClr val="22252B"/>
+                </a:solidFill>
+                <a:latin typeface="Noto Sans CJK KR"/>
+              </a:rPr>
+              <a:t>Adam  ·  Adaptive Moment Estimation</a:t>
+            </a:r>
+          </a:p>
+        </p:txBody>
+      </p:sp>
+      <p:sp>
+        <p:nvSpPr>
+          <p:cNvPr id="5" name="TextBox 4"/>
+          <p:cNvSpPr txBox="1"/>
+          <p:nvPr/>
+        </p:nvSpPr>
+        <p:spPr>
+          <a:xfrm>
+            <a:off x="502920" y="932688"/>
+            <a:ext cx="5486400" cy="274320"/>
+          </a:xfrm>
+          <a:prstGeom prst="rect">
+            <a:avLst/>
+          </a:prstGeom>
+          <a:noFill/>
+        </p:spPr>
+        <p:txBody>
+          <a:bodyPr wrap="square" anchor="t" lIns="25400" rIns="25400" tIns="12700" bIns="12700">
+            <a:spAutoFit/>
+          </a:bodyPr>
+          <a:lstStyle/>
+          <a:p>
+            <a:pPr algn="l"/>
+            <a:r>
+              <a:rPr sz="1100" b="1" i="0">
+                <a:solidFill>
+                  <a:srgbClr val="C9A227"/>
+                </a:solidFill>
+                <a:latin typeface="Noto Sans CJK KR"/>
+              </a:rPr>
+              <a:t>두 줄기의 합류 ★</a:t>
+            </a:r>
+          </a:p>
+        </p:txBody>
+      </p:sp>
+      <p:sp>
+        <p:nvSpPr>
+          <p:cNvPr id="6" name="Rounded Rectangle 5"/>
+          <p:cNvSpPr/>
+          <p:nvPr/>
+        </p:nvSpPr>
+        <p:spPr>
+          <a:xfrm>
+            <a:off x="502920" y="1298448"/>
+            <a:ext cx="11155680" cy="896112"/>
+          </a:xfrm>
+          <a:prstGeom prst="roundRect">
+            <a:avLst/>
+          </a:prstGeom>
+          <a:solidFill>
+            <a:srgbClr val="F6ECC7"/>
+          </a:solidFill>
+          <a:ln w="12700">
+            <a:solidFill>
+              <a:srgbClr val="C9A227"/>
+            </a:solidFill>
+          </a:ln>
+          <a:effectLst/>
+        </p:spPr>
+        <p:style>
+          <a:lnRef idx="1">
+            <a:schemeClr val="accent1"/>
+          </a:lnRef>
+          <a:fillRef idx="3">
+            <a:schemeClr val="accent1"/>
+          </a:fillRef>
+          <a:effectRef idx="2">
+            <a:schemeClr val="accent1"/>
+          </a:effectRef>
+          <a:fontRef idx="minor">
+            <a:schemeClr val="lt1"/>
+          </a:fontRef>
+        </p:style>
+        <p:txBody>
+          <a:bodyPr rtlCol="0" anchor="ctr" wrap="square" lIns="38100" rIns="38100" tIns="25400" bIns="25400"/>
+          <a:lstStyle/>
+          <a:p>
+            <a:pPr algn="l"/>
+            <a:r>
+              <a:rPr sz="1150" b="1" i="0">
+                <a:solidFill>
+                  <a:srgbClr val="C9A227"/>
+                </a:solidFill>
+                <a:latin typeface="Noto Sans CJK KR"/>
+              </a:rPr>
+              <a:t>직관 (왜 이렇게?)</a:t>
+            </a:r>
+          </a:p>
+          <a:p>
+            <a:pPr algn="l"/>
+            <a:r>
+              <a:rPr sz="1250" b="0" i="0">
+                <a:solidFill>
+                  <a:srgbClr val="22252B"/>
+                </a:solidFill>
+                <a:latin typeface="Noto Sans CJK KR"/>
+              </a:rPr>
+              <a:t>"RMSProp(보폭) + Momentum(방향)을 합치자 — 방향도 스텝 사이즈도 적절하게!"</a:t>
+            </a:r>
+          </a:p>
+        </p:txBody>
+      </p:sp>
+      <p:sp>
+        <p:nvSpPr>
+          <p:cNvPr id="7" name="Rounded Rectangle 6"/>
+          <p:cNvSpPr/>
+          <p:nvPr/>
+        </p:nvSpPr>
+        <p:spPr>
+          <a:xfrm>
+            <a:off x="502920" y="2377440"/>
+            <a:ext cx="11155680" cy="2148840"/>
+          </a:xfrm>
+          <a:prstGeom prst="roundRect">
+            <a:avLst/>
+          </a:prstGeom>
+          <a:solidFill>
+            <a:srgbClr val="FFFFFF"/>
+          </a:solidFill>
+          <a:ln w="12700">
+            <a:solidFill>
+              <a:srgbClr val="8A8F98"/>
+            </a:solidFill>
+          </a:ln>
+          <a:effectLst/>
+        </p:spPr>
+        <p:style>
+          <a:lnRef idx="1">
+            <a:schemeClr val="accent1"/>
+          </a:lnRef>
+          <a:fillRef idx="3">
+            <a:schemeClr val="accent1"/>
+          </a:fillRef>
+          <a:effectRef idx="2">
+            <a:schemeClr val="accent1"/>
+          </a:effectRef>
+          <a:fontRef idx="minor">
+            <a:schemeClr val="lt1"/>
+          </a:fontRef>
+        </p:style>
+        <p:txBody>
+          <a:bodyPr rtlCol="0" anchor="ctr" wrap="square" lIns="38100" rIns="38100" tIns="25400" bIns="25400"/>
+          <a:lstStyle/>
+          <a:p>
+            <a:pPr algn="l"/>
+            <a:r>
+              <a:rPr sz="1150" b="1" i="0">
+                <a:solidFill>
+                  <a:srgbClr val="22252B"/>
+                </a:solidFill>
+                <a:latin typeface="Noto Sans CJK KR"/>
+              </a:rPr>
+              <a:t>갱신 규칙 (수식)</a:t>
+            </a:r>
+          </a:p>
+          <a:p>
+            <a:pPr algn="l"/>
+            <a:r>
+              <a:rPr sz="1250" b="0" i="0">
+                <a:solidFill>
+                  <a:srgbClr val="22252B"/>
+                </a:solidFill>
+                <a:latin typeface="Noto Sans Mono CJK KR"/>
+              </a:rPr>
+              <a:t>m_t = β₁·m_{t-1} + (1−β₁)·g_t          # 1차 모멘텀: 방향</a:t>
+            </a:r>
+          </a:p>
+          <a:p>
+            <a:pPr algn="l"/>
+            <a:r>
+              <a:rPr sz="1250" b="0" i="0">
+                <a:solidFill>
+                  <a:srgbClr val="22252B"/>
+                </a:solidFill>
+                <a:latin typeface="Noto Sans Mono CJK KR"/>
+              </a:rPr>
+              <a:t>v_t = β₂·v_{t-1} + (1−β₂)·g_t²         # 2차 모멘텀: 좌표별 보폭</a:t>
+            </a:r>
+          </a:p>
+          <a:p>
+            <a:pPr algn="l"/>
+            <a:r>
+              <a:rPr sz="1250" b="0" i="0">
+                <a:solidFill>
+                  <a:srgbClr val="22252B"/>
+                </a:solidFill>
+                <a:latin typeface="Noto Sans Mono CJK KR"/>
+              </a:rPr>
+              <a:t>m̂ = m_t/(1−β₁^t),  v̂ = v_t/(1−β₂^t)     # 초기 0-편향 보정</a:t>
+            </a:r>
+          </a:p>
+          <a:p>
+            <a:pPr algn="l"/>
+            <a:r>
+              <a:rPr sz="1250" b="0" i="0">
+                <a:solidFill>
+                  <a:srgbClr val="22252B"/>
+                </a:solidFill>
+                <a:latin typeface="Noto Sans Mono CJK KR"/>
+              </a:rPr>
+              <a:t>θ_{t+1} = θ_t − η · m̂ / (√v̂ + ε)</a:t>
+            </a:r>
+          </a:p>
+        </p:txBody>
+      </p:sp>
+      <p:sp>
+        <p:nvSpPr>
+          <p:cNvPr id="8" name="Rounded Rectangle 7"/>
+          <p:cNvSpPr/>
+          <p:nvPr/>
+        </p:nvSpPr>
+        <p:spPr>
+          <a:xfrm>
+            <a:off x="502920" y="4709160"/>
+            <a:ext cx="5486400" cy="1737360"/>
+          </a:xfrm>
+          <a:prstGeom prst="roundRect">
+            <a:avLst/>
+          </a:prstGeom>
+          <a:solidFill>
+            <a:srgbClr val="DAF0ED"/>
+          </a:solidFill>
+          <a:ln w="12700">
+            <a:solidFill>
+              <a:srgbClr val="2A9D8F"/>
+            </a:solidFill>
+          </a:ln>
+          <a:effectLst/>
+        </p:spPr>
+        <p:style>
+          <a:lnRef idx="1">
+            <a:schemeClr val="accent1"/>
+          </a:lnRef>
+          <a:fillRef idx="3">
+            <a:schemeClr val="accent1"/>
+          </a:fillRef>
+          <a:effectRef idx="2">
+            <a:schemeClr val="accent1"/>
+          </a:effectRef>
+          <a:fontRef idx="minor">
+            <a:schemeClr val="lt1"/>
+          </a:fontRef>
+        </p:style>
+        <p:txBody>
+          <a:bodyPr rtlCol="0" anchor="ctr" wrap="square" lIns="38100" rIns="38100" tIns="25400" bIns="25400"/>
+          <a:lstStyle/>
+          <a:p>
+            <a:pPr algn="l"/>
+            <a:r>
+              <a:rPr sz="1150" b="1" i="0">
+                <a:solidFill>
+                  <a:srgbClr val="2A9D8F"/>
+                </a:solidFill>
+                <a:latin typeface="Noto Sans CJK KR"/>
+              </a:rPr>
+              <a:t>이 optimizer가 해결한 것</a:t>
+            </a:r>
+          </a:p>
+          <a:p>
+            <a:pPr algn="l"/>
+            <a:r>
+              <a:rPr sz="1150" b="0" i="0">
+                <a:solidFill>
+                  <a:srgbClr val="22252B"/>
+                </a:solidFill>
+                <a:latin typeface="Noto Sans CJK KR"/>
+              </a:rPr>
+              <a:t>방향(m) + 좌표별 보폭(v) + 편향 보정을 한 번에. 튜닝 거의 없이 잘 동작 → 사실상 표준.</a:t>
+            </a:r>
+          </a:p>
+        </p:txBody>
+      </p:sp>
+      <p:sp>
+        <p:nvSpPr>
+          <p:cNvPr id="9" name="Rounded Rectangle 8"/>
+          <p:cNvSpPr/>
+          <p:nvPr/>
+        </p:nvSpPr>
+        <p:spPr>
+          <a:xfrm>
+            <a:off x="6172200" y="4709160"/>
+            <a:ext cx="5486400" cy="1737360"/>
+          </a:xfrm>
+          <a:prstGeom prst="roundRect">
+            <a:avLst/>
+          </a:prstGeom>
+          <a:solidFill>
+            <a:srgbClr val="F6DDDD"/>
+          </a:solidFill>
+          <a:ln w="12700">
+            <a:solidFill>
+              <a:srgbClr val="C1121F"/>
+            </a:solidFill>
+          </a:ln>
+          <a:effectLst/>
+        </p:spPr>
+        <p:style>
+          <a:lnRef idx="1">
+            <a:schemeClr val="accent1"/>
+          </a:lnRef>
+          <a:fillRef idx="3">
+            <a:schemeClr val="accent1"/>
+          </a:fillRef>
+          <a:effectRef idx="2">
+            <a:schemeClr val="accent1"/>
+          </a:effectRef>
+          <a:fontRef idx="minor">
+            <a:schemeClr val="lt1"/>
+          </a:fontRef>
+        </p:style>
+        <p:txBody>
+          <a:bodyPr rtlCol="0" anchor="ctr" wrap="square" lIns="38100" rIns="38100" tIns="25400" bIns="25400"/>
+          <a:lstStyle/>
+          <a:p>
+            <a:pPr algn="l"/>
+            <a:r>
+              <a:rPr sz="1150" b="1" i="0">
+                <a:solidFill>
+                  <a:srgbClr val="C1121F"/>
+                </a:solidFill>
+                <a:latin typeface="Noto Sans CJK KR"/>
+              </a:rPr>
+              <a:t>남은 문제 → 다음</a:t>
+            </a:r>
+          </a:p>
+          <a:p>
+            <a:pPr algn="l"/>
+            <a:r>
+              <a:rPr sz="1150" b="0" i="0">
+                <a:solidFill>
+                  <a:srgbClr val="22252B"/>
+                </a:solidFill>
+                <a:latin typeface="Noto Sans CJK KR"/>
+              </a:rPr>
+              <a:t>L2 weight decay를 gradient에 더하면 1/√v̂로 나뉘어 좌표별로 왜곡된다.  → AdamW</a:t>
+            </a:r>
+          </a:p>
+        </p:txBody>
+      </p:sp>
+    </p:spTree>
+  </p:cSld>
+  <p:clrMapOvr>
+    <a:masterClrMapping/>
+  </p:clrMapOvr>
+</p:sld>
+</file>
+
+<file path=ppt/slides/slide15.xml><?xml version="1.0" encoding="utf-8"?>
+<p:sld xmlns:a="http://schemas.openxmlformats.org/drawingml/2006/main" xmlns:p="http://schemas.openxmlformats.org/presentationml/2006/main" xmlns:r="http://schemas.openxmlformats.org/officeDocument/2006/relationships">
+  <p:cSld>
+    <p:spTree>
+      <p:nvGrpSpPr>
+        <p:cNvPr id="1" name=""/>
+        <p:cNvGrpSpPr/>
+        <p:nvPr/>
+      </p:nvGrpSpPr>
+      <p:grpSpPr/>
+      <p:sp>
+        <p:nvSpPr>
+          <p:cNvPr id="2" name="Rectangle 1"/>
+          <p:cNvSpPr/>
+          <p:nvPr/>
+        </p:nvSpPr>
+        <p:spPr>
+          <a:xfrm>
+            <a:off x="0" y="0"/>
+            <a:ext cx="12191695" cy="54864"/>
+          </a:xfrm>
+          <a:prstGeom prst="rect">
+            <a:avLst/>
+          </a:prstGeom>
+          <a:solidFill>
+            <a:srgbClr val="C9A227"/>
+          </a:solidFill>
+          <a:ln w="12700">
+            <a:solidFill>
+              <a:srgbClr val="C9A227"/>
+            </a:solidFill>
+          </a:ln>
+          <a:effectLst/>
+        </p:spPr>
+        <p:style>
+          <a:lnRef idx="1">
+            <a:schemeClr val="accent1"/>
+          </a:lnRef>
+          <a:fillRef idx="3">
+            <a:schemeClr val="accent1"/>
+          </a:fillRef>
+          <a:effectRef idx="2">
+            <a:schemeClr val="accent1"/>
+          </a:effectRef>
+          <a:fontRef idx="minor">
+            <a:schemeClr val="lt1"/>
+          </a:fontRef>
+        </p:style>
+        <p:txBody>
+          <a:bodyPr rtlCol="0" anchor="ctr" wrap="square" lIns="38100" rIns="38100" tIns="25400" bIns="25400"/>
+          <a:lstStyle/>
+          <a:p>
+            <a:pPr algn="ctr"/>
+            <a:r>
+              <a:rPr sz="1100" b="0" i="0">
+                <a:solidFill>
+                  <a:srgbClr val="22252B"/>
+                </a:solidFill>
+                <a:latin typeface="Noto Sans CJK KR"/>
+              </a:rPr>
+              <a:t/>
+            </a:r>
+          </a:p>
+        </p:txBody>
+      </p:sp>
+      <p:sp>
+        <p:nvSpPr>
+          <p:cNvPr id="3" name="TextBox 2"/>
+          <p:cNvSpPr txBox="1"/>
+          <p:nvPr/>
+        </p:nvSpPr>
+        <p:spPr>
+          <a:xfrm>
+            <a:off x="502920" y="164592"/>
+            <a:ext cx="11185855" cy="320040"/>
+          </a:xfrm>
+          <a:prstGeom prst="rect">
+            <a:avLst/>
+          </a:prstGeom>
+          <a:noFill/>
+        </p:spPr>
+        <p:txBody>
+          <a:bodyPr wrap="square" anchor="t" lIns="25400" rIns="25400" tIns="12700" bIns="12700">
+            <a:spAutoFit/>
+          </a:bodyPr>
+          <a:lstStyle/>
+          <a:p>
+            <a:pPr algn="l"/>
+            <a:r>
+              <a:rPr sz="1200" b="1" i="0">
+                <a:solidFill>
+                  <a:srgbClr val="C9A227"/>
+                </a:solidFill>
+                <a:latin typeface="Noto Sans CJK KR"/>
+              </a:rPr>
+              <a:t>A2 · Nadam</a:t>
+            </a:r>
+          </a:p>
+        </p:txBody>
+      </p:sp>
+      <p:sp>
+        <p:nvSpPr>
+          <p:cNvPr id="4" name="TextBox 3"/>
+          <p:cNvSpPr txBox="1"/>
+          <p:nvPr/>
+        </p:nvSpPr>
+        <p:spPr>
+          <a:xfrm>
+            <a:off x="502920" y="457200"/>
+            <a:ext cx="11185855" cy="548640"/>
+          </a:xfrm>
+          <a:prstGeom prst="rect">
+            <a:avLst/>
+          </a:prstGeom>
+          <a:noFill/>
+        </p:spPr>
+        <p:txBody>
+          <a:bodyPr wrap="square" anchor="t" lIns="25400" rIns="25400" tIns="12700" bIns="12700">
+            <a:spAutoFit/>
+          </a:bodyPr>
+          <a:lstStyle/>
+          <a:p>
+            <a:pPr algn="l"/>
+            <a:r>
+              <a:rPr sz="2200" b="1" i="0">
+                <a:solidFill>
+                  <a:srgbClr val="22252B"/>
+                </a:solidFill>
+                <a:latin typeface="Noto Sans CJK KR"/>
+              </a:rPr>
+              <a:t>Nadam  ·  Nesterov-accelerated Adam</a:t>
+            </a:r>
+          </a:p>
+        </p:txBody>
+      </p:sp>
+      <p:sp>
+        <p:nvSpPr>
+          <p:cNvPr id="5" name="TextBox 4"/>
+          <p:cNvSpPr txBox="1"/>
+          <p:nvPr/>
+        </p:nvSpPr>
+        <p:spPr>
+          <a:xfrm>
+            <a:off x="502920" y="932688"/>
+            <a:ext cx="5486400" cy="274320"/>
+          </a:xfrm>
+          <a:prstGeom prst="rect">
+            <a:avLst/>
+          </a:prstGeom>
+          <a:noFill/>
+        </p:spPr>
+        <p:txBody>
+          <a:bodyPr wrap="square" anchor="t" lIns="25400" rIns="25400" tIns="12700" bIns="12700">
+            <a:spAutoFit/>
+          </a:bodyPr>
+          <a:lstStyle/>
+          <a:p>
+            <a:pPr algn="l"/>
+            <a:r>
+              <a:rPr sz="1100" b="1" i="0">
+                <a:solidFill>
+                  <a:srgbClr val="C9A227"/>
+                </a:solidFill>
+                <a:latin typeface="Noto Sans CJK KR"/>
+              </a:rPr>
+              <a:t>합류점의 곁가지</a:t>
+            </a:r>
+          </a:p>
+        </p:txBody>
+      </p:sp>
+      <p:sp>
+        <p:nvSpPr>
+          <p:cNvPr id="6" name="Rounded Rectangle 5"/>
+          <p:cNvSpPr/>
+          <p:nvPr/>
+        </p:nvSpPr>
+        <p:spPr>
+          <a:xfrm>
+            <a:off x="502920" y="1298448"/>
+            <a:ext cx="11155680" cy="896112"/>
+          </a:xfrm>
+          <a:prstGeom prst="roundRect">
+            <a:avLst/>
+          </a:prstGeom>
+          <a:solidFill>
+            <a:srgbClr val="F6ECC7"/>
+          </a:solidFill>
+          <a:ln w="12700">
+            <a:solidFill>
+              <a:srgbClr val="C9A227"/>
+            </a:solidFill>
+          </a:ln>
+          <a:effectLst/>
+        </p:spPr>
+        <p:style>
+          <a:lnRef idx="1">
+            <a:schemeClr val="accent1"/>
+          </a:lnRef>
+          <a:fillRef idx="3">
+            <a:schemeClr val="accent1"/>
+          </a:fillRef>
+          <a:effectRef idx="2">
+            <a:schemeClr val="accent1"/>
+          </a:effectRef>
+          <a:fontRef idx="minor">
+            <a:schemeClr val="lt1"/>
+          </a:fontRef>
+        </p:style>
+        <p:txBody>
+          <a:bodyPr rtlCol="0" anchor="ctr" wrap="square" lIns="38100" rIns="38100" tIns="25400" bIns="25400"/>
+          <a:lstStyle/>
+          <a:p>
+            <a:pPr algn="l"/>
+            <a:r>
+              <a:rPr sz="1150" b="1" i="0">
+                <a:solidFill>
+                  <a:srgbClr val="C9A227"/>
+                </a:solidFill>
+                <a:latin typeface="Noto Sans CJK KR"/>
+              </a:rPr>
+              <a:t>직관 (왜 이렇게?)</a:t>
+            </a:r>
+          </a:p>
+          <a:p>
+            <a:pPr algn="l"/>
+            <a:r>
+              <a:rPr sz="1250" b="0" i="0">
+                <a:solidFill>
+                  <a:srgbClr val="22252B"/>
+                </a:solidFill>
+                <a:latin typeface="Noto Sans CJK KR"/>
+              </a:rPr>
+              <a:t>"Adam에 (일반 Momentum 대신) NAG의 look-ahead를 붙이자."</a:t>
+            </a:r>
+          </a:p>
+        </p:txBody>
+      </p:sp>
+      <p:sp>
+        <p:nvSpPr>
+          <p:cNvPr id="7" name="Rounded Rectangle 6"/>
+          <p:cNvSpPr/>
+          <p:nvPr/>
+        </p:nvSpPr>
+        <p:spPr>
+          <a:xfrm>
+            <a:off x="502920" y="2377440"/>
+            <a:ext cx="11155680" cy="2148840"/>
+          </a:xfrm>
+          <a:prstGeom prst="roundRect">
+            <a:avLst/>
+          </a:prstGeom>
+          <a:solidFill>
+            <a:srgbClr val="FFFFFF"/>
+          </a:solidFill>
+          <a:ln w="12700">
+            <a:solidFill>
+              <a:srgbClr val="8A8F98"/>
+            </a:solidFill>
+          </a:ln>
+          <a:effectLst/>
+        </p:spPr>
+        <p:style>
+          <a:lnRef idx="1">
+            <a:schemeClr val="accent1"/>
+          </a:lnRef>
+          <a:fillRef idx="3">
+            <a:schemeClr val="accent1"/>
+          </a:fillRef>
+          <a:effectRef idx="2">
+            <a:schemeClr val="accent1"/>
+          </a:effectRef>
+          <a:fontRef idx="minor">
+            <a:schemeClr val="lt1"/>
+          </a:fontRef>
+        </p:style>
+        <p:txBody>
+          <a:bodyPr rtlCol="0" anchor="ctr" wrap="square" lIns="38100" rIns="38100" tIns="25400" bIns="25400"/>
+          <a:lstStyle/>
+          <a:p>
+            <a:pPr algn="l"/>
+            <a:r>
+              <a:rPr sz="1150" b="1" i="0">
+                <a:solidFill>
+                  <a:srgbClr val="22252B"/>
+                </a:solidFill>
+                <a:latin typeface="Noto Sans CJK KR"/>
+              </a:rPr>
+              <a:t>갱신 규칙 (수식)</a:t>
+            </a:r>
+          </a:p>
+          <a:p>
+            <a:pPr algn="l"/>
+            <a:r>
+              <a:rPr sz="1250" b="0" i="0">
+                <a:solidFill>
+                  <a:srgbClr val="22252B"/>
+                </a:solidFill>
+                <a:latin typeface="Noto Sans Mono CJK KR"/>
+              </a:rPr>
+              <a:t>m_t, v_t : Adam과 동일</a:t>
+            </a:r>
+          </a:p>
+          <a:p>
+            <a:pPr algn="l"/>
+            <a:r>
+              <a:rPr sz="1250" b="0" i="0">
+                <a:solidFill>
+                  <a:srgbClr val="22252B"/>
+                </a:solidFill>
+                <a:latin typeface="Noto Sans Mono CJK KR"/>
+              </a:rPr>
+              <a:t>θ_{t+1} = θ_t − η · ( β₁·m̂ + (1−β₁)·g_t/(1−β₁^t) ) / (√v̂ + ε)   # look-ahead 항</a:t>
+            </a:r>
+          </a:p>
+        </p:txBody>
+      </p:sp>
+      <p:sp>
+        <p:nvSpPr>
+          <p:cNvPr id="8" name="Rounded Rectangle 7"/>
+          <p:cNvSpPr/>
+          <p:nvPr/>
+        </p:nvSpPr>
+        <p:spPr>
+          <a:xfrm>
+            <a:off x="502920" y="4709160"/>
+            <a:ext cx="5486400" cy="1737360"/>
+          </a:xfrm>
+          <a:prstGeom prst="roundRect">
+            <a:avLst/>
+          </a:prstGeom>
+          <a:solidFill>
+            <a:srgbClr val="DAF0ED"/>
+          </a:solidFill>
+          <a:ln w="12700">
+            <a:solidFill>
+              <a:srgbClr val="2A9D8F"/>
+            </a:solidFill>
+          </a:ln>
+          <a:effectLst/>
+        </p:spPr>
+        <p:style>
+          <a:lnRef idx="1">
+            <a:schemeClr val="accent1"/>
+          </a:lnRef>
+          <a:fillRef idx="3">
+            <a:schemeClr val="accent1"/>
+          </a:fillRef>
+          <a:effectRef idx="2">
+            <a:schemeClr val="accent1"/>
+          </a:effectRef>
+          <a:fontRef idx="minor">
+            <a:schemeClr val="lt1"/>
+          </a:fontRef>
+        </p:style>
+        <p:txBody>
+          <a:bodyPr rtlCol="0" anchor="ctr" wrap="square" lIns="38100" rIns="38100" tIns="25400" bIns="25400"/>
+          <a:lstStyle/>
+          <a:p>
+            <a:pPr algn="l"/>
+            <a:r>
+              <a:rPr sz="1150" b="1" i="0">
+                <a:solidFill>
+                  <a:srgbClr val="2A9D8F"/>
+                </a:solidFill>
+                <a:latin typeface="Noto Sans CJK KR"/>
+              </a:rPr>
+              <a:t>이 optimizer가 해결한 것</a:t>
+            </a:r>
+          </a:p>
+          <a:p>
+            <a:pPr algn="l"/>
+            <a:r>
+              <a:rPr sz="1150" b="0" i="0">
+                <a:solidFill>
+                  <a:srgbClr val="22252B"/>
+                </a:solidFill>
+                <a:latin typeface="Noto Sans CJK KR"/>
+              </a:rPr>
+              <a:t>Adam의 방향항에 Nesterov 예측을 넣어 약간 더 빠른 수렴.</a:t>
+            </a:r>
+          </a:p>
+        </p:txBody>
+      </p:sp>
+      <p:sp>
+        <p:nvSpPr>
+          <p:cNvPr id="9" name="Rounded Rectangle 8"/>
+          <p:cNvSpPr/>
+          <p:nvPr/>
+        </p:nvSpPr>
+        <p:spPr>
+          <a:xfrm>
+            <a:off x="6172200" y="4709160"/>
+            <a:ext cx="5486400" cy="1737360"/>
+          </a:xfrm>
+          <a:prstGeom prst="roundRect">
+            <a:avLst/>
+          </a:prstGeom>
+          <a:solidFill>
+            <a:srgbClr val="F6DDDD"/>
+          </a:solidFill>
+          <a:ln w="12700">
+            <a:solidFill>
+              <a:srgbClr val="C1121F"/>
+            </a:solidFill>
+          </a:ln>
+          <a:effectLst/>
+        </p:spPr>
+        <p:style>
+          <a:lnRef idx="1">
+            <a:schemeClr val="accent1"/>
+          </a:lnRef>
+          <a:fillRef idx="3">
+            <a:schemeClr val="accent1"/>
+          </a:fillRef>
+          <a:effectRef idx="2">
+            <a:schemeClr val="accent1"/>
+          </a:effectRef>
+          <a:fontRef idx="minor">
+            <a:schemeClr val="lt1"/>
+          </a:fontRef>
+        </p:style>
+        <p:txBody>
+          <a:bodyPr rtlCol="0" anchor="ctr" wrap="square" lIns="38100" rIns="38100" tIns="25400" bIns="25400"/>
+          <a:lstStyle/>
+          <a:p>
+            <a:pPr algn="l"/>
+            <a:r>
+              <a:rPr sz="1150" b="1" i="0">
+                <a:solidFill>
+                  <a:srgbClr val="C1121F"/>
+                </a:solidFill>
+                <a:latin typeface="Noto Sans CJK KR"/>
+              </a:rPr>
+              <a:t>남은 문제 → 다음</a:t>
+            </a:r>
+          </a:p>
+          <a:p>
+            <a:pPr algn="l"/>
+            <a:r>
+              <a:rPr sz="1150" b="0" i="0">
+                <a:solidFill>
+                  <a:srgbClr val="22252B"/>
+                </a:solidFill>
+                <a:latin typeface="Noto Sans CJK KR"/>
+              </a:rPr>
+              <a:t>weight decay 왜곡은 그대로 남아 있다.  → AdamW</a:t>
+            </a:r>
+          </a:p>
+        </p:txBody>
+      </p:sp>
+    </p:spTree>
+  </p:cSld>
+  <p:clrMapOvr>
+    <a:masterClrMapping/>
+  </p:clrMapOvr>
+</p:sld>
+</file>
+
+<file path=ppt/slides/slide16.xml><?xml version="1.0" encoding="utf-8"?>
+<p:sld xmlns:a="http://schemas.openxmlformats.org/drawingml/2006/main" xmlns:p="http://schemas.openxmlformats.org/presentationml/2006/main" xmlns:r="http://schemas.openxmlformats.org/officeDocument/2006/relationships">
+  <p:cSld>
+    <p:spTree>
+      <p:nvGrpSpPr>
+        <p:cNvPr id="1" name=""/>
+        <p:cNvGrpSpPr/>
+        <p:nvPr/>
+      </p:nvGrpSpPr>
+      <p:grpSpPr/>
+      <p:sp>
+        <p:nvSpPr>
+          <p:cNvPr id="2" name="Rectangle 1"/>
+          <p:cNvSpPr/>
+          <p:nvPr/>
+        </p:nvSpPr>
+        <p:spPr>
+          <a:xfrm>
+            <a:off x="0" y="0"/>
+            <a:ext cx="12191695" cy="54864"/>
+          </a:xfrm>
+          <a:prstGeom prst="rect">
+            <a:avLst/>
+          </a:prstGeom>
+          <a:solidFill>
+            <a:srgbClr val="C9A227"/>
+          </a:solidFill>
+          <a:ln w="12700">
+            <a:solidFill>
+              <a:srgbClr val="C9A227"/>
+            </a:solidFill>
+          </a:ln>
+          <a:effectLst/>
+        </p:spPr>
+        <p:style>
+          <a:lnRef idx="1">
+            <a:schemeClr val="accent1"/>
+          </a:lnRef>
+          <a:fillRef idx="3">
+            <a:schemeClr val="accent1"/>
+          </a:fillRef>
+          <a:effectRef idx="2">
+            <a:schemeClr val="accent1"/>
+          </a:effectRef>
+          <a:fontRef idx="minor">
+            <a:schemeClr val="lt1"/>
+          </a:fontRef>
+        </p:style>
+        <p:txBody>
+          <a:bodyPr rtlCol="0" anchor="ctr" wrap="square" lIns="38100" rIns="38100" tIns="25400" bIns="25400"/>
+          <a:lstStyle/>
+          <a:p>
+            <a:pPr algn="ctr"/>
+            <a:r>
+              <a:rPr sz="1100" b="0" i="0">
+                <a:solidFill>
+                  <a:srgbClr val="22252B"/>
+                </a:solidFill>
+                <a:latin typeface="Noto Sans CJK KR"/>
+              </a:rPr>
+              <a:t/>
+            </a:r>
+          </a:p>
+        </p:txBody>
+      </p:sp>
+      <p:sp>
+        <p:nvSpPr>
+          <p:cNvPr id="3" name="TextBox 2"/>
+          <p:cNvSpPr txBox="1"/>
+          <p:nvPr/>
+        </p:nvSpPr>
+        <p:spPr>
+          <a:xfrm>
+            <a:off x="502920" y="164592"/>
+            <a:ext cx="11185855" cy="320040"/>
+          </a:xfrm>
+          <a:prstGeom prst="rect">
+            <a:avLst/>
+          </a:prstGeom>
+          <a:noFill/>
+        </p:spPr>
+        <p:txBody>
+          <a:bodyPr wrap="square" anchor="t" lIns="25400" rIns="25400" tIns="12700" bIns="12700">
+            <a:spAutoFit/>
+          </a:bodyPr>
+          <a:lstStyle/>
+          <a:p>
+            <a:pPr algn="l"/>
+            <a:r>
+              <a:rPr sz="1200" b="1" i="0">
+                <a:solidFill>
+                  <a:srgbClr val="C9A227"/>
+                </a:solidFill>
+                <a:latin typeface="Noto Sans CJK KR"/>
+              </a:rPr>
+              <a:t>A2 · AdamW</a:t>
+            </a:r>
+          </a:p>
+        </p:txBody>
+      </p:sp>
+      <p:sp>
+        <p:nvSpPr>
+          <p:cNvPr id="4" name="TextBox 3"/>
+          <p:cNvSpPr txBox="1"/>
+          <p:nvPr/>
+        </p:nvSpPr>
+        <p:spPr>
+          <a:xfrm>
+            <a:off x="502920" y="457200"/>
+            <a:ext cx="11185855" cy="548640"/>
+          </a:xfrm>
+          <a:prstGeom prst="rect">
+            <a:avLst/>
+          </a:prstGeom>
+          <a:noFill/>
+        </p:spPr>
+        <p:txBody>
+          <a:bodyPr wrap="square" anchor="t" lIns="25400" rIns="25400" tIns="12700" bIns="12700">
+            <a:spAutoFit/>
+          </a:bodyPr>
+          <a:lstStyle/>
+          <a:p>
+            <a:pPr algn="l"/>
+            <a:r>
+              <a:rPr sz="2200" b="1" i="0">
+                <a:solidFill>
+                  <a:srgbClr val="22252B"/>
+                </a:solidFill>
+                <a:latin typeface="Noto Sans CJK KR"/>
+              </a:rPr>
+              <a:t>AdamW ★  ·  Adam with decoupled Weight decay</a:t>
+            </a:r>
+          </a:p>
+        </p:txBody>
+      </p:sp>
+      <p:sp>
+        <p:nvSpPr>
+          <p:cNvPr id="5" name="TextBox 4"/>
+          <p:cNvSpPr txBox="1"/>
+          <p:nvPr/>
+        </p:nvSpPr>
+        <p:spPr>
+          <a:xfrm>
+            <a:off x="502920" y="932688"/>
+            <a:ext cx="5486400" cy="274320"/>
+          </a:xfrm>
+          <a:prstGeom prst="rect">
+            <a:avLst/>
+          </a:prstGeom>
+          <a:noFill/>
+        </p:spPr>
+        <p:txBody>
+          <a:bodyPr wrap="square" anchor="t" lIns="25400" rIns="25400" tIns="12700" bIns="12700">
+            <a:spAutoFit/>
+          </a:bodyPr>
+          <a:lstStyle/>
+          <a:p>
+            <a:pPr algn="l"/>
+            <a:r>
+              <a:rPr sz="1100" b="1" i="0">
+                <a:solidFill>
+                  <a:srgbClr val="C9A227"/>
+                </a:solidFill>
+                <a:latin typeface="Noto Sans CJK KR"/>
+              </a:rPr>
+              <a:t>종착점 — 오늘의 표준</a:t>
+            </a:r>
+          </a:p>
+        </p:txBody>
+      </p:sp>
+      <p:sp>
+        <p:nvSpPr>
+          <p:cNvPr id="6" name="Rounded Rectangle 5"/>
+          <p:cNvSpPr/>
+          <p:nvPr/>
+        </p:nvSpPr>
+        <p:spPr>
+          <a:xfrm>
+            <a:off x="502920" y="1298448"/>
+            <a:ext cx="11155680" cy="896112"/>
+          </a:xfrm>
+          <a:prstGeom prst="roundRect">
+            <a:avLst/>
+          </a:prstGeom>
+          <a:solidFill>
+            <a:srgbClr val="F6ECC7"/>
+          </a:solidFill>
+          <a:ln w="12700">
+            <a:solidFill>
+              <a:srgbClr val="C9A227"/>
+            </a:solidFill>
+          </a:ln>
+          <a:effectLst/>
+        </p:spPr>
+        <p:style>
+          <a:lnRef idx="1">
+            <a:schemeClr val="accent1"/>
+          </a:lnRef>
+          <a:fillRef idx="3">
+            <a:schemeClr val="accent1"/>
+          </a:fillRef>
+          <a:effectRef idx="2">
+            <a:schemeClr val="accent1"/>
+          </a:effectRef>
+          <a:fontRef idx="minor">
+            <a:schemeClr val="lt1"/>
+          </a:fontRef>
+        </p:style>
+        <p:txBody>
+          <a:bodyPr rtlCol="0" anchor="ctr" wrap="square" lIns="38100" rIns="38100" tIns="25400" bIns="25400"/>
+          <a:lstStyle/>
+          <a:p>
+            <a:pPr algn="l"/>
+            <a:r>
+              <a:rPr sz="1150" b="1" i="0">
+                <a:solidFill>
+                  <a:srgbClr val="C9A227"/>
+                </a:solidFill>
+                <a:latin typeface="Noto Sans CJK KR"/>
+              </a:rPr>
+              <a:t>직관 (왜 이렇게?)</a:t>
+            </a:r>
+          </a:p>
+          <a:p>
+            <a:pPr algn="l"/>
+            <a:r>
+              <a:rPr sz="1250" b="0" i="0">
+                <a:solidFill>
+                  <a:srgbClr val="22252B"/>
+                </a:solidFill>
+                <a:latin typeface="Noto Sans CJK KR"/>
+              </a:rPr>
+              <a:t>"weight decay(정규화)를 gradient에 섞지 말고, weight에서 '직접' 빼자 — 그래야 좌표마다 똑같이 적용된다."</a:t>
+            </a:r>
+          </a:p>
+        </p:txBody>
+      </p:sp>
+      <p:sp>
+        <p:nvSpPr>
+          <p:cNvPr id="7" name="Rounded Rectangle 6"/>
+          <p:cNvSpPr/>
+          <p:nvPr/>
+        </p:nvSpPr>
+        <p:spPr>
+          <a:xfrm>
+            <a:off x="502920" y="2377440"/>
+            <a:ext cx="11155680" cy="2148840"/>
+          </a:xfrm>
+          <a:prstGeom prst="roundRect">
+            <a:avLst/>
+          </a:prstGeom>
+          <a:solidFill>
+            <a:srgbClr val="FFFFFF"/>
+          </a:solidFill>
+          <a:ln w="12700">
+            <a:solidFill>
+              <a:srgbClr val="8A8F98"/>
+            </a:solidFill>
+          </a:ln>
+          <a:effectLst/>
+        </p:spPr>
+        <p:style>
+          <a:lnRef idx="1">
+            <a:schemeClr val="accent1"/>
+          </a:lnRef>
+          <a:fillRef idx="3">
+            <a:schemeClr val="accent1"/>
+          </a:fillRef>
+          <a:effectRef idx="2">
+            <a:schemeClr val="accent1"/>
+          </a:effectRef>
+          <a:fontRef idx="minor">
+            <a:schemeClr val="lt1"/>
+          </a:fontRef>
+        </p:style>
+        <p:txBody>
+          <a:bodyPr rtlCol="0" anchor="ctr" wrap="square" lIns="38100" rIns="38100" tIns="25400" bIns="25400"/>
+          <a:lstStyle/>
+          <a:p>
+            <a:pPr algn="l"/>
+            <a:r>
+              <a:rPr sz="1150" b="1" i="0">
+                <a:solidFill>
+                  <a:srgbClr val="22252B"/>
+                </a:solidFill>
+                <a:latin typeface="Noto Sans CJK KR"/>
+              </a:rPr>
+              <a:t>갱신 규칙 (수식)</a:t>
+            </a:r>
+          </a:p>
+          <a:p>
+            <a:pPr algn="l"/>
+            <a:r>
+              <a:rPr sz="1250" b="0" i="0">
+                <a:solidFill>
+                  <a:srgbClr val="22252B"/>
+                </a:solidFill>
+                <a:latin typeface="Noto Sans Mono CJK KR"/>
+              </a:rPr>
+              <a:t>m_t, v_t, m̂, v̂ : Adam과 동일 (decay를 g_t에 넣지 않음)</a:t>
+            </a:r>
+          </a:p>
+          <a:p>
+            <a:pPr algn="l"/>
+            <a:r>
+              <a:rPr sz="1250" b="0" i="0">
+                <a:solidFill>
+                  <a:srgbClr val="22252B"/>
+                </a:solidFill>
+                <a:latin typeface="Noto Sans Mono CJK KR"/>
+              </a:rPr>
+              <a:t>θ_{t+1} = θ_t − η · ( m̂/(√v̂+ε)  +  λ·θ_t )      # λ·θ 항을 분리(decoupled)</a:t>
+            </a:r>
+          </a:p>
+        </p:txBody>
+      </p:sp>
+      <p:sp>
+        <p:nvSpPr>
+          <p:cNvPr id="8" name="Rounded Rectangle 7"/>
+          <p:cNvSpPr/>
+          <p:nvPr/>
+        </p:nvSpPr>
+        <p:spPr>
+          <a:xfrm>
+            <a:off x="502920" y="4709160"/>
+            <a:ext cx="5486400" cy="1737360"/>
+          </a:xfrm>
+          <a:prstGeom prst="roundRect">
+            <a:avLst/>
+          </a:prstGeom>
+          <a:solidFill>
+            <a:srgbClr val="DAF0ED"/>
+          </a:solidFill>
+          <a:ln w="12700">
+            <a:solidFill>
+              <a:srgbClr val="2A9D8F"/>
+            </a:solidFill>
+          </a:ln>
+          <a:effectLst/>
+        </p:spPr>
+        <p:style>
+          <a:lnRef idx="1">
+            <a:schemeClr val="accent1"/>
+          </a:lnRef>
+          <a:fillRef idx="3">
+            <a:schemeClr val="accent1"/>
+          </a:fillRef>
+          <a:effectRef idx="2">
+            <a:schemeClr val="accent1"/>
+          </a:effectRef>
+          <a:fontRef idx="minor">
+            <a:schemeClr val="lt1"/>
+          </a:fontRef>
+        </p:style>
+        <p:txBody>
+          <a:bodyPr rtlCol="0" anchor="ctr" wrap="square" lIns="38100" rIns="38100" tIns="25400" bIns="25400"/>
+          <a:lstStyle/>
+          <a:p>
+            <a:pPr algn="l"/>
+            <a:r>
+              <a:rPr sz="1150" b="1" i="0">
+                <a:solidFill>
+                  <a:srgbClr val="2A9D8F"/>
+                </a:solidFill>
+                <a:latin typeface="Noto Sans CJK KR"/>
+              </a:rPr>
+              <a:t>이 optimizer가 해결한 것</a:t>
+            </a:r>
+          </a:p>
+          <a:p>
+            <a:pPr algn="l"/>
+            <a:r>
+              <a:rPr sz="1150" b="0" i="0">
+                <a:solidFill>
+                  <a:srgbClr val="22252B"/>
+                </a:solidFill>
+                <a:latin typeface="Noto Sans CJK KR"/>
+              </a:rPr>
+              <a:t>decay가 adaptive 스케일(1/√v̂)에 섞이지 않아 정규화가 일관 → 일반화↑. 오늘날 LLM 학습의 표준.</a:t>
+            </a:r>
+          </a:p>
+        </p:txBody>
+      </p:sp>
+      <p:sp>
+        <p:nvSpPr>
+          <p:cNvPr id="9" name="Rounded Rectangle 8"/>
+          <p:cNvSpPr/>
+          <p:nvPr/>
+        </p:nvSpPr>
+        <p:spPr>
+          <a:xfrm>
+            <a:off x="6172200" y="4709160"/>
+            <a:ext cx="5486400" cy="1737360"/>
+          </a:xfrm>
+          <a:prstGeom prst="roundRect">
+            <a:avLst/>
+          </a:prstGeom>
+          <a:solidFill>
+            <a:srgbClr val="F6DDDD"/>
+          </a:solidFill>
+          <a:ln w="12700">
+            <a:solidFill>
+              <a:srgbClr val="C1121F"/>
+            </a:solidFill>
+          </a:ln>
+          <a:effectLst/>
+        </p:spPr>
+        <p:style>
+          <a:lnRef idx="1">
+            <a:schemeClr val="accent1"/>
+          </a:lnRef>
+          <a:fillRef idx="3">
+            <a:schemeClr val="accent1"/>
+          </a:fillRef>
+          <a:effectRef idx="2">
+            <a:schemeClr val="accent1"/>
+          </a:effectRef>
+          <a:fontRef idx="minor">
+            <a:schemeClr val="lt1"/>
+          </a:fontRef>
+        </p:style>
+        <p:txBody>
+          <a:bodyPr rtlCol="0" anchor="ctr" wrap="square" lIns="38100" rIns="38100" tIns="25400" bIns="25400"/>
+          <a:lstStyle/>
+          <a:p>
+            <a:pPr algn="l"/>
+            <a:r>
+              <a:rPr sz="1150" b="1" i="0">
+                <a:solidFill>
+                  <a:srgbClr val="C1121F"/>
+                </a:solidFill>
+                <a:latin typeface="Noto Sans CJK KR"/>
+              </a:rPr>
+              <a:t>남은 문제 → 다음</a:t>
+            </a:r>
+          </a:p>
+          <a:p>
+            <a:pPr algn="l"/>
+            <a:r>
+              <a:rPr sz="1150" b="0" i="0">
+                <a:solidFill>
+                  <a:srgbClr val="22252B"/>
+                </a:solidFill>
+                <a:latin typeface="Noto Sans CJK KR"/>
+              </a:rPr>
+              <a:t>여기까지가 '표준 optimizer'. 이 계열 논문은 이 optimizer 자체를 memory로 재해석한다(HOPE).  → Part B</a:t>
+            </a:r>
+          </a:p>
+        </p:txBody>
+      </p:sp>
+    </p:spTree>
+  </p:cSld>
+  <p:clrMapOvr>
+    <a:masterClrMapping/>
+  </p:clrMapOvr>
+</p:sld>
+</file>
+
 <file path=ppt/slides/slide2.xml><?xml version="1.0" encoding="utf-8"?>
 <p:sld xmlns:a="http://schemas.openxmlformats.org/drawingml/2006/main" xmlns:p="http://schemas.openxmlformats.org/presentationml/2006/main" xmlns:r="http://schemas.openxmlformats.org/officeDocument/2006/relationships">
   <p:cSld>
@@ -3409,7 +6675,7 @@
                 </a:solidFill>
                 <a:latin typeface="Noto Sans CJK KR"/>
               </a:rPr>
-              <a:t>AGENDA</a:t>
+              <a:t>목차</a:t>
             </a:r>
           </a:p>
         </p:txBody>
@@ -3444,7 +6710,7 @@
                 </a:solidFill>
                 <a:latin typeface="Noto Sans CJK KR"/>
               </a:rPr>
-              <a:t>오늘의 지도</a:t>
+              <a:t>오늘 다룰 것</a:t>
             </a:r>
           </a:p>
         </p:txBody>
@@ -3457,8 +6723,8 @@
         </p:nvSpPr>
         <p:spPr>
           <a:xfrm>
-            <a:off x="502920" y="1554480"/>
-            <a:ext cx="3017520" cy="1051560"/>
+            <a:off x="502920" y="1417320"/>
+            <a:ext cx="3657600" cy="457200"/>
           </a:xfrm>
           <a:prstGeom prst="roundRect">
             <a:avLst/>
@@ -3493,13 +6759,13 @@
           <a:p>
             <a:pPr algn="ctr"/>
             <a:r>
-              <a:rPr sz="1500" b="1" i="0">
+              <a:rPr sz="1400" b="1" i="0">
                 <a:solidFill>
                   <a:srgbClr val="2A6F97"/>
                 </a:solidFill>
                 <a:latin typeface="Noto Sans CJK KR"/>
               </a:rPr>
-              <a:t>A. Background</a:t>
+              <a:t>A. Background (학습 입문)</a:t>
             </a:r>
           </a:p>
         </p:txBody>
@@ -3512,8 +6778,8 @@
         </p:nvSpPr>
         <p:spPr>
           <a:xfrm>
-            <a:off x="3749039" y="1664207"/>
-            <a:ext cx="7863840" cy="914400"/>
+            <a:off x="594360" y="1965960"/>
+            <a:ext cx="3474720" cy="4480560"/>
           </a:xfrm>
           <a:prstGeom prst="rect">
             <a:avLst/>
@@ -3528,13 +6794,121 @@
           <a:p>
             <a:pPr algn="l"/>
             <a:r>
-              <a:rPr sz="1250" b="0" i="0">
-                <a:solidFill>
-                  <a:srgbClr val="22252B"/>
-                </a:solidFill>
-                <a:latin typeface="Noto Sans CJK KR"/>
-              </a:rPr>
-              <a:t>학습이 처음인 분을 위해 — 2-layer MLP 학습 한 바퀴, optimizer의 역사(GD→AdamW), 그리고 대안 계열(linear attention·DeltaNet·Mamba2)</a:t>
+              <a:rPr sz="1080" b="0" i="0">
+                <a:solidFill>
+                  <a:srgbClr val="22252B"/>
+                </a:solidFill>
+                <a:latin typeface="Noto Sans CJK KR"/>
+              </a:rPr>
+              <a:t>A1. 학습 한 바퀴 — 2-layer MLP:</a:t>
+            </a:r>
+          </a:p>
+          <a:p>
+            <a:pPr algn="l"/>
+            <a:r>
+              <a:rPr sz="1080" b="0" i="0">
+                <a:solidFill>
+                  <a:srgbClr val="22252B"/>
+                </a:solidFill>
+                <a:latin typeface="Noto Sans CJK KR"/>
+              </a:rPr>
+              <a:t>     forward→loss→backward→optimizer→update</a:t>
+            </a:r>
+          </a:p>
+          <a:p>
+            <a:pPr algn="l"/>
+            <a:r>
+              <a:rPr sz="1080" b="0" i="0">
+                <a:solidFill>
+                  <a:srgbClr val="22252B"/>
+                </a:solidFill>
+                <a:latin typeface="Noto Sans CJK KR"/>
+              </a:rPr>
+              <a:t>A2. Optimizer의 역사 (수식과 함께)</a:t>
+            </a:r>
+          </a:p>
+          <a:p>
+            <a:pPr algn="l"/>
+            <a:r>
+              <a:rPr sz="1080" b="0" i="0">
+                <a:solidFill>
+                  <a:srgbClr val="22252B"/>
+                </a:solidFill>
+                <a:latin typeface="Noto Sans CJK KR"/>
+              </a:rPr>
+              <a:t>     GD · SGD · Momentum · NAG</a:t>
+            </a:r>
+          </a:p>
+          <a:p>
+            <a:pPr algn="l"/>
+            <a:r>
+              <a:rPr sz="1080" b="0" i="0">
+                <a:solidFill>
+                  <a:srgbClr val="22252B"/>
+                </a:solidFill>
+                <a:latin typeface="Noto Sans CJK KR"/>
+              </a:rPr>
+              <a:t>     Adagrad · RMSProp · AdaDelta</a:t>
+            </a:r>
+          </a:p>
+          <a:p>
+            <a:pPr algn="l"/>
+            <a:r>
+              <a:rPr sz="1080" b="0" i="0">
+                <a:solidFill>
+                  <a:srgbClr val="22252B"/>
+                </a:solidFill>
+                <a:latin typeface="Noto Sans CJK KR"/>
+              </a:rPr>
+              <a:t>     Adam · Nadam · AdamW</a:t>
+            </a:r>
+          </a:p>
+          <a:p>
+            <a:pPr algn="l"/>
+            <a:r>
+              <a:rPr sz="1080" b="0" i="0">
+                <a:solidFill>
+                  <a:srgbClr val="22252B"/>
+                </a:solidFill>
+                <a:latin typeface="Noto Sans CJK KR"/>
+              </a:rPr>
+              <a:t>A3. 대안 계열</a:t>
+            </a:r>
+          </a:p>
+          <a:p>
+            <a:pPr algn="l"/>
+            <a:r>
+              <a:rPr sz="1080" b="0" i="0">
+                <a:solidFill>
+                  <a:srgbClr val="22252B"/>
+                </a:solidFill>
+                <a:latin typeface="Noto Sans CJK KR"/>
+              </a:rPr>
+              <a:t>     linear attention</a:t>
+            </a:r>
+          </a:p>
+          <a:p>
+            <a:pPr algn="l"/>
+            <a:r>
+              <a:rPr sz="1080" b="0" i="0">
+                <a:solidFill>
+                  <a:srgbClr val="22252B"/>
+                </a:solidFill>
+                <a:latin typeface="Noto Sans CJK KR"/>
+              </a:rPr>
+              <a:t>     DeltaNet → Gated DeltaNet</a:t>
+            </a:r>
+          </a:p>
+          <a:p>
+            <a:pPr algn="l"/>
+            <a:r>
+              <a:rPr sz="1080" b="0" i="0">
+                <a:solidFill>
+                  <a:srgbClr val="22252B"/>
+                </a:solidFill>
+                <a:latin typeface="Noto Sans CJK KR"/>
+              </a:rPr>
+              <a:t>     SSM · Mamba-2</a:t>
             </a:r>
           </a:p>
         </p:txBody>
@@ -3547,8 +6921,8 @@
         </p:nvSpPr>
         <p:spPr>
           <a:xfrm>
-            <a:off x="502920" y="2880360"/>
-            <a:ext cx="3017520" cy="1051560"/>
+            <a:off x="4297680" y="1417320"/>
+            <a:ext cx="3657600" cy="457200"/>
           </a:xfrm>
           <a:prstGeom prst="roundRect">
             <a:avLst/>
@@ -3583,13 +6957,13 @@
           <a:p>
             <a:pPr algn="ctr"/>
             <a:r>
-              <a:rPr sz="1500" b="1" i="0">
+              <a:rPr sz="1400" b="1" i="0">
                 <a:solidFill>
                   <a:srgbClr val="2A9D8F"/>
                 </a:solidFill>
                 <a:latin typeface="Noto Sans CJK KR"/>
               </a:rPr>
-              <a:t>B. 논문 6편</a:t>
+              <a:t>B. 논문 6편 (발명→구현→증명)</a:t>
             </a:r>
           </a:p>
         </p:txBody>
@@ -3602,8 +6976,8 @@
         </p:nvSpPr>
         <p:spPr>
           <a:xfrm>
-            <a:off x="3749039" y="2990088"/>
-            <a:ext cx="7863840" cy="914400"/>
+            <a:off x="4389120" y="1965960"/>
+            <a:ext cx="3474720" cy="4480560"/>
           </a:xfrm>
           <a:prstGeom prst="rect">
             <a:avLst/>
@@ -3618,13 +6992,121 @@
           <a:p>
             <a:pPr algn="l"/>
             <a:r>
-              <a:rPr sz="1250" b="0" i="0">
-                <a:solidFill>
-                  <a:srgbClr val="22252B"/>
-                </a:solidFill>
-                <a:latin typeface="Noto Sans CJK KR"/>
-              </a:rPr>
-              <a:t>핵심 발명을 먼저 → 어떻게 구현 → 어떻게 증명. Titans가 연 프레임을 Miras·Atlas·TNT가 확장하고, HOPE가 전부 통합, Sleep이 offline으로 확장</a:t>
+              <a:rPr sz="1080" b="0" i="0">
+                <a:solidFill>
+                  <a:srgbClr val="22252B"/>
+                </a:solidFill>
+                <a:latin typeface="Noto Sans CJK KR"/>
+              </a:rPr>
+              <a:t>B1. Titans — deep neural memory</a:t>
+            </a:r>
+          </a:p>
+          <a:p>
+            <a:pPr algn="l"/>
+            <a:r>
+              <a:rPr sz="1080" b="0" i="0">
+                <a:solidFill>
+                  <a:srgbClr val="22252B"/>
+                </a:solidFill>
+                <a:latin typeface="Noto Sans CJK KR"/>
+              </a:rPr>
+              <a:t>     surprise·momentum·forget, MAC/MAG/MAL</a:t>
+            </a:r>
+          </a:p>
+          <a:p>
+            <a:pPr algn="l"/>
+            <a:r>
+              <a:rPr sz="1080" b="0" i="0">
+                <a:solidFill>
+                  <a:srgbClr val="22252B"/>
+                </a:solidFill>
+                <a:latin typeface="Noto Sans CJK KR"/>
+              </a:rPr>
+              <a:t>B2. Miras — 4축 설계공간</a:t>
+            </a:r>
+          </a:p>
+          <a:p>
+            <a:pPr algn="l"/>
+            <a:r>
+              <a:rPr sz="1080" b="0" i="0">
+                <a:solidFill>
+                  <a:srgbClr val="22252B"/>
+                </a:solidFill>
+                <a:latin typeface="Noto Sans CJK KR"/>
+              </a:rPr>
+              <a:t>     메모리 = online 최적화</a:t>
+            </a:r>
+          </a:p>
+          <a:p>
+            <a:pPr algn="l"/>
+            <a:r>
+              <a:rPr sz="1080" b="0" i="0">
+                <a:solidFill>
+                  <a:srgbClr val="22252B"/>
+                </a:solidFill>
+                <a:latin typeface="Noto Sans CJK KR"/>
+              </a:rPr>
+              <a:t>B3. Atlas — Omega rule·용량·Muon</a:t>
+            </a:r>
+          </a:p>
+          <a:p>
+            <a:pPr algn="l"/>
+            <a:r>
+              <a:rPr sz="1080" b="0" i="0">
+                <a:solidFill>
+                  <a:srgbClr val="22252B"/>
+                </a:solidFill>
+                <a:latin typeface="Noto Sans CJK KR"/>
+              </a:rPr>
+              <a:t>B4. TNT — chunk·2-stage·global/local·Q-K</a:t>
+            </a:r>
+          </a:p>
+          <a:p>
+            <a:pPr algn="l"/>
+            <a:r>
+              <a:rPr sz="1080" b="0" i="0">
+                <a:solidFill>
+                  <a:srgbClr val="22252B"/>
+                </a:solidFill>
+                <a:latin typeface="Noto Sans CJK KR"/>
+              </a:rPr>
+              <a:t>B5. Nested Learning / HOPE</a:t>
+            </a:r>
+          </a:p>
+          <a:p>
+            <a:pPr algn="l"/>
+            <a:r>
+              <a:rPr sz="1080" b="0" i="0">
+                <a:solidFill>
+                  <a:srgbClr val="22252B"/>
+                </a:solidFill>
+                <a:latin typeface="Noto Sans CJK KR"/>
+              </a:rPr>
+              <a:t>     optimizer=memory·self-mod·CMS (4편 통합)</a:t>
+            </a:r>
+          </a:p>
+          <a:p>
+            <a:pPr algn="l"/>
+            <a:r>
+              <a:rPr sz="1080" b="0" i="0">
+                <a:solidFill>
+                  <a:srgbClr val="22252B"/>
+                </a:solidFill>
+                <a:latin typeface="Noto Sans CJK KR"/>
+              </a:rPr>
+              <a:t>B6. Sleep — offline consolidation</a:t>
+            </a:r>
+          </a:p>
+          <a:p>
+            <a:pPr algn="l"/>
+            <a:r>
+              <a:rPr sz="1080" b="0" i="0">
+                <a:solidFill>
+                  <a:srgbClr val="22252B"/>
+                </a:solidFill>
+                <a:latin typeface="Noto Sans CJK KR"/>
+              </a:rPr>
+              <a:t>     Knowledge Seeding · Dreaming</a:t>
             </a:r>
           </a:p>
         </p:txBody>
@@ -3637,8 +7119,8 @@
         </p:nvSpPr>
         <p:spPr>
           <a:xfrm>
-            <a:off x="502920" y="4206240"/>
-            <a:ext cx="3017520" cy="1051560"/>
+            <a:off x="8092440" y="1417320"/>
+            <a:ext cx="3566160" cy="457200"/>
           </a:xfrm>
           <a:prstGeom prst="roundRect">
             <a:avLst/>
@@ -3673,7 +7155,7 @@
           <a:p>
             <a:pPr algn="ctr"/>
             <a:r>
-              <a:rPr sz="1500" b="1" i="0">
+              <a:rPr sz="1400" b="1" i="0">
                 <a:solidFill>
                   <a:srgbClr val="C9A227"/>
                 </a:solidFill>
@@ -3692,8 +7174,8 @@
         </p:nvSpPr>
         <p:spPr>
           <a:xfrm>
-            <a:off x="3749039" y="4315968"/>
-            <a:ext cx="7863840" cy="914400"/>
+            <a:off x="8183879" y="1965960"/>
+            <a:ext cx="3383279" cy="4480560"/>
           </a:xfrm>
           <a:prstGeom prst="rect">
             <a:avLst/>
@@ -3708,48 +7190,85 @@
           <a:p>
             <a:pPr algn="l"/>
             <a:r>
-              <a:rPr sz="1250" b="0" i="0">
-                <a:solidFill>
-                  <a:srgbClr val="22252B"/>
-                </a:solidFill>
-                <a:latin typeface="Noto Sans CJK KR"/>
-              </a:rPr>
-              <a:t>이 배포 형태가 서빙에서 얼마나 드는가 — decode는 memory-bound. 8개 가속기 크로스 측정 + scaling 청사진</a:t>
-            </a:r>
-          </a:p>
-        </p:txBody>
-      </p:sp>
-      <p:sp>
-        <p:nvSpPr>
-          <p:cNvPr id="11" name="TextBox 10"/>
-          <p:cNvSpPr txBox="1"/>
-          <p:nvPr/>
-        </p:nvSpPr>
-        <p:spPr>
-          <a:xfrm>
-            <a:off x="502920" y="6309360"/>
-            <a:ext cx="10972800" cy="365760"/>
-          </a:xfrm>
-          <a:prstGeom prst="rect">
-            <a:avLst/>
-          </a:prstGeom>
-          <a:noFill/>
-        </p:spPr>
-        <p:txBody>
-          <a:bodyPr wrap="square" anchor="t" lIns="25400" rIns="25400" tIns="12700" bIns="12700">
-            <a:spAutoFit/>
-          </a:bodyPr>
-          <a:lstStyle/>
-          <a:p>
-            <a:pPr algn="l"/>
-            <a:r>
-              <a:rPr sz="1200" b="0" i="1">
-                <a:solidFill>
-                  <a:srgbClr val="5A5F68"/>
-                </a:solidFill>
-                <a:latin typeface="Noto Sans CJK KR"/>
-              </a:rPr>
-              <a:t>핵심 원리 하나: 학습(training)은 '가중치가 움직이는 것'이고, 이 계열은 그 움직임을 추론(inference) 중에도 계속한다.</a:t>
+              <a:rPr sz="1080" b="0" i="0">
+                <a:solidFill>
+                  <a:srgbClr val="22252B"/>
+                </a:solidFill>
+                <a:latin typeface="Noto Sans CJK KR"/>
+              </a:rPr>
+              <a:t>C1. pair thesis — decode=memory-bound</a:t>
+            </a:r>
+          </a:p>
+          <a:p>
+            <a:pPr algn="l"/>
+            <a:r>
+              <a:rPr sz="1080" b="0" i="0">
+                <a:solidFill>
+                  <a:srgbClr val="22252B"/>
+                </a:solidFill>
+                <a:latin typeface="Noto Sans CJK KR"/>
+              </a:rPr>
+              <a:t>C2. 8개 가속기 크로스 측정</a:t>
+            </a:r>
+          </a:p>
+          <a:p>
+            <a:pPr algn="l"/>
+            <a:r>
+              <a:rPr sz="1080" b="0" i="0">
+                <a:solidFill>
+                  <a:srgbClr val="22252B"/>
+                </a:solidFill>
+                <a:latin typeface="Noto Sans CJK KR"/>
+              </a:rPr>
+              <a:t>C3. HOPE-block roofline</a:t>
+            </a:r>
+          </a:p>
+          <a:p>
+            <a:pPr algn="l"/>
+            <a:r>
+              <a:rPr sz="1080" b="0" i="0">
+                <a:solidFill>
+                  <a:srgbClr val="22252B"/>
+                </a:solidFill>
+                <a:latin typeface="Noto Sans CJK KR"/>
+              </a:rPr>
+              <a:t>     + zHBM · HBM-PIM · SRAM scaling</a:t>
+            </a:r>
+          </a:p>
+          <a:p>
+            <a:pPr algn="l"/>
+            <a:r>
+              <a:rPr sz="1080" b="0" i="0">
+                <a:solidFill>
+                  <a:srgbClr val="22252B"/>
+                </a:solidFill>
+                <a:latin typeface="Noto Sans CJK KR"/>
+              </a:rPr>
+              <a:t>C4. scaling 청사진</a:t>
+            </a:r>
+          </a:p>
+          <a:p>
+            <a:pPr algn="l"/>
+            <a:r>
+              <a:rPr sz="1080" b="0" i="0">
+                <a:solidFill>
+                  <a:srgbClr val="22252B"/>
+                </a:solidFill>
+                <a:latin typeface="Noto Sans CJK KR"/>
+              </a:rPr>
+              <a:t/>
+            </a:r>
+          </a:p>
+          <a:p>
+            <a:pPr algn="l"/>
+            <a:r>
+              <a:rPr sz="1080" b="0" i="0">
+                <a:solidFill>
+                  <a:srgbClr val="22252B"/>
+                </a:solidFill>
+                <a:latin typeface="Noto Sans CJK KR"/>
+              </a:rPr>
+              <a:t>부록. QA 모음 (교차·논문별)</a:t>
             </a:r>
           </a:p>
         </p:txBody>
@@ -3781,7 +7300,7 @@
         <p:spPr>
           <a:xfrm>
             <a:off x="0" y="0"/>
-            <a:ext cx="12191695" cy="6858000"/>
+            <a:ext cx="12191695" cy="54864"/>
           </a:xfrm>
           <a:prstGeom prst="rect">
             <a:avLst/>
@@ -3835,8 +7354,8 @@
         </p:nvSpPr>
         <p:spPr>
           <a:xfrm>
-            <a:off x="822960" y="2468880"/>
-            <a:ext cx="10545775" cy="914400"/>
+            <a:off x="502920" y="164592"/>
+            <a:ext cx="11185855" cy="320040"/>
           </a:xfrm>
           <a:prstGeom prst="rect">
             <a:avLst/>
@@ -3851,13 +7370,13 @@
           <a:p>
             <a:pPr algn="l"/>
             <a:r>
-              <a:rPr sz="2000" b="1" i="0">
-                <a:solidFill>
-                  <a:srgbClr val="FFFFFF"/>
-                </a:solidFill>
-                <a:latin typeface="Noto Sans CJK KR"/>
-              </a:rPr>
-              <a:t>PART A</a:t>
+              <a:rPr sz="1200" b="1" i="0">
+                <a:solidFill>
+                  <a:srgbClr val="2A6F97"/>
+                </a:solidFill>
+                <a:latin typeface="Noto Sans CJK KR"/>
+              </a:rPr>
+              <a:t>들어가기</a:t>
             </a:r>
           </a:p>
         </p:txBody>
@@ -3870,8 +7389,8 @@
         </p:nvSpPr>
         <p:spPr>
           <a:xfrm>
-            <a:off x="822960" y="3108960"/>
-            <a:ext cx="10545775" cy="1463040"/>
+            <a:off x="502920" y="457200"/>
+            <a:ext cx="11185855" cy="548640"/>
           </a:xfrm>
           <a:prstGeom prst="rect">
             <a:avLst/>
@@ -3886,13 +7405,316 @@
           <a:p>
             <a:pPr algn="l"/>
             <a:r>
-              <a:rPr sz="3400" b="1" i="0">
-                <a:solidFill>
-                  <a:srgbClr val="FFFFFF"/>
-                </a:solidFill>
-                <a:latin typeface="Noto Sans CJK KR"/>
-              </a:rPr>
-              <a:t>Background — 학습이 처음이라면</a:t>
+              <a:rPr sz="2200" b="1" i="0">
+                <a:solidFill>
+                  <a:srgbClr val="22252B"/>
+                </a:solidFill>
+                <a:latin typeface="Noto Sans CJK KR"/>
+              </a:rPr>
+              <a:t>이 세미나의 목적 · 범위 · 주의</a:t>
+            </a:r>
+          </a:p>
+        </p:txBody>
+      </p:sp>
+      <p:sp>
+        <p:nvSpPr>
+          <p:cNvPr id="5" name="Rounded Rectangle 4"/>
+          <p:cNvSpPr/>
+          <p:nvPr/>
+        </p:nvSpPr>
+        <p:spPr>
+          <a:xfrm>
+            <a:off x="502920" y="1371600"/>
+            <a:ext cx="11155680" cy="1051560"/>
+          </a:xfrm>
+          <a:prstGeom prst="roundRect">
+            <a:avLst/>
+          </a:prstGeom>
+          <a:solidFill>
+            <a:srgbClr val="DBE7F3"/>
+          </a:solidFill>
+          <a:ln w="12700">
+            <a:solidFill>
+              <a:srgbClr val="2A6F97"/>
+            </a:solidFill>
+          </a:ln>
+          <a:effectLst/>
+        </p:spPr>
+        <p:style>
+          <a:lnRef idx="1">
+            <a:schemeClr val="accent1"/>
+          </a:lnRef>
+          <a:fillRef idx="3">
+            <a:schemeClr val="accent1"/>
+          </a:fillRef>
+          <a:effectRef idx="2">
+            <a:schemeClr val="accent1"/>
+          </a:effectRef>
+          <a:fontRef idx="minor">
+            <a:schemeClr val="lt1"/>
+          </a:fontRef>
+        </p:style>
+        <p:txBody>
+          <a:bodyPr rtlCol="0" anchor="ctr" wrap="square" lIns="38100" rIns="38100" tIns="25400" bIns="25400"/>
+          <a:lstStyle/>
+          <a:p>
+            <a:pPr algn="l"/>
+            <a:r>
+              <a:rPr sz="1300" b="1" i="0">
+                <a:solidFill>
+                  <a:srgbClr val="2A6F97"/>
+                </a:solidFill>
+                <a:latin typeface="Noto Sans CJK KR"/>
+              </a:rPr>
+              <a:t>목적·방향</a:t>
+            </a:r>
+          </a:p>
+          <a:p>
+            <a:pPr algn="l"/>
+            <a:r>
+              <a:rPr sz="1200" b="0" i="0">
+                <a:solidFill>
+                  <a:srgbClr val="22252B"/>
+                </a:solidFill>
+                <a:latin typeface="Noto Sans CJK KR"/>
+              </a:rPr>
+              <a:t>inference·systems 엔지니어가 test-time memory 계열(Titans~Sleep)을 shape·비용 수준으로 이해한다. 각 논문의 핵심 발명을 먼저 보고 → 어떻게 구현·증명되는지 → 논문 간 framing이 이어지는 흐름 → 마지막에 이 배포 형태가 서빙에서 얼마나 드는지(우리 기여).</a:t>
+            </a:r>
+          </a:p>
+        </p:txBody>
+      </p:sp>
+      <p:sp>
+        <p:nvSpPr>
+          <p:cNvPr id="6" name="TextBox 5"/>
+          <p:cNvSpPr txBox="1"/>
+          <p:nvPr/>
+        </p:nvSpPr>
+        <p:spPr>
+          <a:xfrm>
+            <a:off x="502920" y="2697480"/>
+            <a:ext cx="5486400" cy="365760"/>
+          </a:xfrm>
+          <a:prstGeom prst="rect">
+            <a:avLst/>
+          </a:prstGeom>
+          <a:noFill/>
+        </p:spPr>
+        <p:txBody>
+          <a:bodyPr wrap="square" anchor="t" lIns="25400" rIns="25400" tIns="12700" bIns="12700">
+            <a:spAutoFit/>
+          </a:bodyPr>
+          <a:lstStyle/>
+          <a:p>
+            <a:pPr algn="l"/>
+            <a:r>
+              <a:rPr sz="1300" b="1" i="0">
+                <a:solidFill>
+                  <a:srgbClr val="C1121F"/>
+                </a:solidFill>
+                <a:latin typeface="Noto Sans CJK KR"/>
+              </a:rPr>
+              <a:t>미리 알아둘 3가지 (읽는 규칙)</a:t>
+            </a:r>
+          </a:p>
+        </p:txBody>
+      </p:sp>
+      <p:sp>
+        <p:nvSpPr>
+          <p:cNvPr id="7" name="Rounded Rectangle 6"/>
+          <p:cNvSpPr/>
+          <p:nvPr/>
+        </p:nvSpPr>
+        <p:spPr>
+          <a:xfrm>
+            <a:off x="502920" y="3154680"/>
+            <a:ext cx="11155680" cy="960120"/>
+          </a:xfrm>
+          <a:prstGeom prst="roundRect">
+            <a:avLst/>
+          </a:prstGeom>
+          <a:solidFill>
+            <a:srgbClr val="F6DDDD"/>
+          </a:solidFill>
+          <a:ln w="12700">
+            <a:solidFill>
+              <a:srgbClr val="C1121F"/>
+            </a:solidFill>
+          </a:ln>
+          <a:effectLst/>
+        </p:spPr>
+        <p:style>
+          <a:lnRef idx="1">
+            <a:schemeClr val="accent1"/>
+          </a:lnRef>
+          <a:fillRef idx="3">
+            <a:schemeClr val="accent1"/>
+          </a:fillRef>
+          <a:effectRef idx="2">
+            <a:schemeClr val="accent1"/>
+          </a:effectRef>
+          <a:fontRef idx="minor">
+            <a:schemeClr val="lt1"/>
+          </a:fontRef>
+        </p:style>
+        <p:txBody>
+          <a:bodyPr rtlCol="0" anchor="ctr" wrap="square" lIns="38100" rIns="38100" tIns="25400" bIns="25400"/>
+          <a:lstStyle/>
+          <a:p>
+            <a:pPr algn="l"/>
+            <a:r>
+              <a:rPr sz="1250" b="1" i="0">
+                <a:solidFill>
+                  <a:srgbClr val="C1121F"/>
+                </a:solidFill>
+                <a:latin typeface="Noto Sans CJK KR"/>
+              </a:rPr>
+              <a:t>① 학습(pre-training)은 다루지 않는다</a:t>
+            </a:r>
+          </a:p>
+          <a:p>
+            <a:pPr algn="l"/>
+            <a:r>
+              <a:rPr sz="1100" b="0" i="0">
+                <a:solidFill>
+                  <a:srgbClr val="22252B"/>
+                </a:solidFill>
+                <a:latin typeface="Noto Sans CJK KR"/>
+              </a:rPr>
+              <a:t>Titans 기반 모델을 처음부터 훈련하는 과정은 범위 밖. 이 계열의 test-time 동작과 서빙에 집중한다. (Background의 학습 설명은 '무엇을 배우는가'를 읽기 위한 최소한.)</a:t>
+            </a:r>
+          </a:p>
+        </p:txBody>
+      </p:sp>
+      <p:sp>
+        <p:nvSpPr>
+          <p:cNvPr id="8" name="Rounded Rectangle 7"/>
+          <p:cNvSpPr/>
+          <p:nvPr/>
+        </p:nvSpPr>
+        <p:spPr>
+          <a:xfrm>
+            <a:off x="502920" y="4233672"/>
+            <a:ext cx="11155680" cy="960120"/>
+          </a:xfrm>
+          <a:prstGeom prst="roundRect">
+            <a:avLst/>
+          </a:prstGeom>
+          <a:solidFill>
+            <a:srgbClr val="F6DDDD"/>
+          </a:solidFill>
+          <a:ln w="12700">
+            <a:solidFill>
+              <a:srgbClr val="C1121F"/>
+            </a:solidFill>
+          </a:ln>
+          <a:effectLst/>
+        </p:spPr>
+        <p:style>
+          <a:lnRef idx="1">
+            <a:schemeClr val="accent1"/>
+          </a:lnRef>
+          <a:fillRef idx="3">
+            <a:schemeClr val="accent1"/>
+          </a:fillRef>
+          <a:effectRef idx="2">
+            <a:schemeClr val="accent1"/>
+          </a:effectRef>
+          <a:fontRef idx="minor">
+            <a:schemeClr val="lt1"/>
+          </a:fontRef>
+        </p:style>
+        <p:txBody>
+          <a:bodyPr rtlCol="0" anchor="ctr" wrap="square" lIns="38100" rIns="38100" tIns="25400" bIns="25400"/>
+          <a:lstStyle/>
+          <a:p>
+            <a:pPr algn="l"/>
+            <a:r>
+              <a:rPr sz="1250" b="1" i="0">
+                <a:solidFill>
+                  <a:srgbClr val="C1121F"/>
+                </a:solidFill>
+                <a:latin typeface="Noto Sans CJK KR"/>
+              </a:rPr>
+              <a:t>② 논문에 구체 수치가 빠진 곳이 많다</a:t>
+            </a:r>
+          </a:p>
+          <a:p>
+            <a:pPr algn="l"/>
+            <a:r>
+              <a:rPr sz="1100" b="0" i="0">
+                <a:solidFill>
+                  <a:srgbClr val="22252B"/>
+                </a:solidFill>
+                <a:latin typeface="Noto Sans CJK KR"/>
+              </a:rPr>
+              <a:t>모델 파라미터 shape·차원·학습 하이퍼 등 구체값이 명시 안 된 부분이 흔하다. 그림·설명에서 추론한 것은 '추론'으로, 본문에 있는 것은 '명시'로 구분해 표시한다.</a:t>
+            </a:r>
+          </a:p>
+        </p:txBody>
+      </p:sp>
+      <p:sp>
+        <p:nvSpPr>
+          <p:cNvPr id="9" name="Rounded Rectangle 8"/>
+          <p:cNvSpPr/>
+          <p:nvPr/>
+        </p:nvSpPr>
+        <p:spPr>
+          <a:xfrm>
+            <a:off x="502920" y="5312664"/>
+            <a:ext cx="11155680" cy="960120"/>
+          </a:xfrm>
+          <a:prstGeom prst="roundRect">
+            <a:avLst/>
+          </a:prstGeom>
+          <a:solidFill>
+            <a:srgbClr val="F6DDDD"/>
+          </a:solidFill>
+          <a:ln w="12700">
+            <a:solidFill>
+              <a:srgbClr val="C1121F"/>
+            </a:solidFill>
+          </a:ln>
+          <a:effectLst/>
+        </p:spPr>
+        <p:style>
+          <a:lnRef idx="1">
+            <a:schemeClr val="accent1"/>
+          </a:lnRef>
+          <a:fillRef idx="3">
+            <a:schemeClr val="accent1"/>
+          </a:fillRef>
+          <a:effectRef idx="2">
+            <a:schemeClr val="accent1"/>
+          </a:effectRef>
+          <a:fontRef idx="minor">
+            <a:schemeClr val="lt1"/>
+          </a:fontRef>
+        </p:style>
+        <p:txBody>
+          <a:bodyPr rtlCol="0" anchor="ctr" wrap="square" lIns="38100" rIns="38100" tIns="25400" bIns="25400"/>
+          <a:lstStyle/>
+          <a:p>
+            <a:pPr algn="l"/>
+            <a:r>
+              <a:rPr sz="1250" b="1" i="0">
+                <a:solidFill>
+                  <a:srgbClr val="C1121F"/>
+                </a:solidFill>
+                <a:latin typeface="Noto Sans CJK KR"/>
+              </a:rPr>
+              <a:t>③ 논문 1편만으론 불완전하다</a:t>
+            </a:r>
+          </a:p>
+          <a:p>
+            <a:pPr algn="l"/>
+            <a:r>
+              <a:rPr sz="1100" b="0" i="0">
+                <a:solidFill>
+                  <a:srgbClr val="22252B"/>
+                </a:solidFill>
+                <a:latin typeface="Noto Sans CJK KR"/>
+              </a:rPr>
+              <a:t>한 논문의 설명이 스스로 완결되지 않아, 다른 논문(특히 HOPE)을 같이 봐야 이해되는 부분이 많다. 예: Titans의 투영 분리는 HOPE에서야 명시된다. 그래서 6편을 하나의 흐름으로 읽는다.</a:t>
             </a:r>
           </a:p>
         </p:txBody>
@@ -3924,7 +7746,7 @@
         <p:spPr>
           <a:xfrm>
             <a:off x="0" y="0"/>
-            <a:ext cx="12191695" cy="54864"/>
+            <a:ext cx="12191695" cy="6858000"/>
           </a:xfrm>
           <a:prstGeom prst="rect">
             <a:avLst/>
@@ -3978,6 +7800,149 @@
         </p:nvSpPr>
         <p:spPr>
           <a:xfrm>
+            <a:off x="822960" y="2468880"/>
+            <a:ext cx="10545775" cy="914400"/>
+          </a:xfrm>
+          <a:prstGeom prst="rect">
+            <a:avLst/>
+          </a:prstGeom>
+          <a:noFill/>
+        </p:spPr>
+        <p:txBody>
+          <a:bodyPr wrap="square" anchor="t" lIns="25400" rIns="25400" tIns="12700" bIns="12700">
+            <a:spAutoFit/>
+          </a:bodyPr>
+          <a:lstStyle/>
+          <a:p>
+            <a:pPr algn="l"/>
+            <a:r>
+              <a:rPr sz="2000" b="1" i="0">
+                <a:solidFill>
+                  <a:srgbClr val="FFFFFF"/>
+                </a:solidFill>
+                <a:latin typeface="Noto Sans CJK KR"/>
+              </a:rPr>
+              <a:t>PART A</a:t>
+            </a:r>
+          </a:p>
+        </p:txBody>
+      </p:sp>
+      <p:sp>
+        <p:nvSpPr>
+          <p:cNvPr id="4" name="TextBox 3"/>
+          <p:cNvSpPr txBox="1"/>
+          <p:nvPr/>
+        </p:nvSpPr>
+        <p:spPr>
+          <a:xfrm>
+            <a:off x="822960" y="3108960"/>
+            <a:ext cx="10545775" cy="1463040"/>
+          </a:xfrm>
+          <a:prstGeom prst="rect">
+            <a:avLst/>
+          </a:prstGeom>
+          <a:noFill/>
+        </p:spPr>
+        <p:txBody>
+          <a:bodyPr wrap="square" anchor="t" lIns="25400" rIns="25400" tIns="12700" bIns="12700">
+            <a:spAutoFit/>
+          </a:bodyPr>
+          <a:lstStyle/>
+          <a:p>
+            <a:pPr algn="l"/>
+            <a:r>
+              <a:rPr sz="3400" b="1" i="0">
+                <a:solidFill>
+                  <a:srgbClr val="FFFFFF"/>
+                </a:solidFill>
+                <a:latin typeface="Noto Sans CJK KR"/>
+              </a:rPr>
+              <a:t>Background — 학습이 처음이라면</a:t>
+            </a:r>
+          </a:p>
+        </p:txBody>
+      </p:sp>
+    </p:spTree>
+  </p:cSld>
+  <p:clrMapOvr>
+    <a:masterClrMapping/>
+  </p:clrMapOvr>
+</p:sld>
+</file>
+
+<file path=ppt/slides/slide5.xml><?xml version="1.0" encoding="utf-8"?>
+<p:sld xmlns:a="http://schemas.openxmlformats.org/drawingml/2006/main" xmlns:p="http://schemas.openxmlformats.org/presentationml/2006/main" xmlns:r="http://schemas.openxmlformats.org/officeDocument/2006/relationships">
+  <p:cSld>
+    <p:spTree>
+      <p:nvGrpSpPr>
+        <p:cNvPr id="1" name=""/>
+        <p:cNvGrpSpPr/>
+        <p:nvPr/>
+      </p:nvGrpSpPr>
+      <p:grpSpPr/>
+      <p:sp>
+        <p:nvSpPr>
+          <p:cNvPr id="2" name="Rectangle 1"/>
+          <p:cNvSpPr/>
+          <p:nvPr/>
+        </p:nvSpPr>
+        <p:spPr>
+          <a:xfrm>
+            <a:off x="0" y="0"/>
+            <a:ext cx="12191695" cy="54864"/>
+          </a:xfrm>
+          <a:prstGeom prst="rect">
+            <a:avLst/>
+          </a:prstGeom>
+          <a:solidFill>
+            <a:srgbClr val="2A6F97"/>
+          </a:solidFill>
+          <a:ln w="12700">
+            <a:solidFill>
+              <a:srgbClr val="2A6F97"/>
+            </a:solidFill>
+          </a:ln>
+          <a:effectLst/>
+        </p:spPr>
+        <p:style>
+          <a:lnRef idx="1">
+            <a:schemeClr val="accent1"/>
+          </a:lnRef>
+          <a:fillRef idx="3">
+            <a:schemeClr val="accent1"/>
+          </a:fillRef>
+          <a:effectRef idx="2">
+            <a:schemeClr val="accent1"/>
+          </a:effectRef>
+          <a:fontRef idx="minor">
+            <a:schemeClr val="lt1"/>
+          </a:fontRef>
+        </p:style>
+        <p:txBody>
+          <a:bodyPr rtlCol="0" anchor="ctr" wrap="square" lIns="38100" rIns="38100" tIns="25400" bIns="25400"/>
+          <a:lstStyle/>
+          <a:p>
+            <a:pPr algn="ctr"/>
+            <a:r>
+              <a:rPr sz="1100" b="0" i="0">
+                <a:solidFill>
+                  <a:srgbClr val="22252B"/>
+                </a:solidFill>
+                <a:latin typeface="Noto Sans CJK KR"/>
+              </a:rPr>
+              <a:t/>
+            </a:r>
+          </a:p>
+        </p:txBody>
+      </p:sp>
+      <p:sp>
+        <p:nvSpPr>
+          <p:cNvPr id="3" name="TextBox 2"/>
+          <p:cNvSpPr txBox="1"/>
+          <p:nvPr/>
+        </p:nvSpPr>
+        <p:spPr>
+          <a:xfrm>
             <a:off x="502920" y="164592"/>
             <a:ext cx="11185855" cy="320040"/>
           </a:xfrm>
@@ -5216,6 +9181,2903 @@
                 <a:latin typeface="Noto Sans CJK KR"/>
               </a:rPr>
               <a:t>학습 = ①forward로 예측 → ②backward로 'gradient(어디가 틀렸나)' → ③optimizer로 'gradient를 기억·가공(m,v)해 갱신량' → ④weight 이동. 이 계열은 ②③④를 추론 중에도 돌린다.</a:t>
+            </a:r>
+          </a:p>
+        </p:txBody>
+      </p:sp>
+    </p:spTree>
+  </p:cSld>
+  <p:clrMapOvr>
+    <a:masterClrMapping/>
+  </p:clrMapOvr>
+</p:sld>
+</file>
+
+<file path=ppt/slides/slide6.xml><?xml version="1.0" encoding="utf-8"?>
+<p:sld xmlns:a="http://schemas.openxmlformats.org/drawingml/2006/main" xmlns:p="http://schemas.openxmlformats.org/presentationml/2006/main" xmlns:r="http://schemas.openxmlformats.org/officeDocument/2006/relationships">
+  <p:cSld>
+    <p:spTree>
+      <p:nvGrpSpPr>
+        <p:cNvPr id="1" name=""/>
+        <p:cNvGrpSpPr/>
+        <p:nvPr/>
+      </p:nvGrpSpPr>
+      <p:grpSpPr/>
+      <p:sp>
+        <p:nvSpPr>
+          <p:cNvPr id="2" name="Rectangle 1"/>
+          <p:cNvSpPr/>
+          <p:nvPr/>
+        </p:nvSpPr>
+        <p:spPr>
+          <a:xfrm>
+            <a:off x="0" y="0"/>
+            <a:ext cx="12191695" cy="54864"/>
+          </a:xfrm>
+          <a:prstGeom prst="rect">
+            <a:avLst/>
+          </a:prstGeom>
+          <a:solidFill>
+            <a:srgbClr val="2A6F97"/>
+          </a:solidFill>
+          <a:ln w="12700">
+            <a:solidFill>
+              <a:srgbClr val="2A6F97"/>
+            </a:solidFill>
+          </a:ln>
+          <a:effectLst/>
+        </p:spPr>
+        <p:style>
+          <a:lnRef idx="1">
+            <a:schemeClr val="accent1"/>
+          </a:lnRef>
+          <a:fillRef idx="3">
+            <a:schemeClr val="accent1"/>
+          </a:fillRef>
+          <a:effectRef idx="2">
+            <a:schemeClr val="accent1"/>
+          </a:effectRef>
+          <a:fontRef idx="minor">
+            <a:schemeClr val="lt1"/>
+          </a:fontRef>
+        </p:style>
+        <p:txBody>
+          <a:bodyPr rtlCol="0" anchor="ctr" wrap="square" lIns="38100" rIns="38100" tIns="25400" bIns="25400"/>
+          <a:lstStyle/>
+          <a:p>
+            <a:pPr algn="ctr"/>
+            <a:r>
+              <a:rPr sz="1100" b="0" i="0">
+                <a:solidFill>
+                  <a:srgbClr val="22252B"/>
+                </a:solidFill>
+                <a:latin typeface="Noto Sans CJK KR"/>
+              </a:rPr>
+              <a:t/>
+            </a:r>
+          </a:p>
+        </p:txBody>
+      </p:sp>
+      <p:sp>
+        <p:nvSpPr>
+          <p:cNvPr id="3" name="TextBox 2"/>
+          <p:cNvSpPr txBox="1"/>
+          <p:nvPr/>
+        </p:nvSpPr>
+        <p:spPr>
+          <a:xfrm>
+            <a:off x="502920" y="164592"/>
+            <a:ext cx="11185855" cy="320040"/>
+          </a:xfrm>
+          <a:prstGeom prst="rect">
+            <a:avLst/>
+          </a:prstGeom>
+          <a:noFill/>
+        </p:spPr>
+        <p:txBody>
+          <a:bodyPr wrap="square" anchor="t" lIns="25400" rIns="25400" tIns="12700" bIns="12700">
+            <a:spAutoFit/>
+          </a:bodyPr>
+          <a:lstStyle/>
+          <a:p>
+            <a:pPr algn="l"/>
+            <a:r>
+              <a:rPr sz="1200" b="1" i="0">
+                <a:solidFill>
+                  <a:srgbClr val="2A6F97"/>
+                </a:solidFill>
+                <a:latin typeface="Noto Sans CJK KR"/>
+              </a:rPr>
+              <a:t>A2 · Optimizer의 역사</a:t>
+            </a:r>
+          </a:p>
+        </p:txBody>
+      </p:sp>
+      <p:sp>
+        <p:nvSpPr>
+          <p:cNvPr id="4" name="TextBox 3"/>
+          <p:cNvSpPr txBox="1"/>
+          <p:nvPr/>
+        </p:nvSpPr>
+        <p:spPr>
+          <a:xfrm>
+            <a:off x="502920" y="457200"/>
+            <a:ext cx="11185855" cy="548640"/>
+          </a:xfrm>
+          <a:prstGeom prst="rect">
+            <a:avLst/>
+          </a:prstGeom>
+          <a:noFill/>
+        </p:spPr>
+        <p:txBody>
+          <a:bodyPr wrap="square" anchor="t" lIns="25400" rIns="25400" tIns="12700" bIns="12700">
+            <a:spAutoFit/>
+          </a:bodyPr>
+          <a:lstStyle/>
+          <a:p>
+            <a:pPr algn="l"/>
+            <a:r>
+              <a:rPr sz="2200" b="1" i="0">
+                <a:solidFill>
+                  <a:srgbClr val="22252B"/>
+                </a:solidFill>
+                <a:latin typeface="Noto Sans CJK KR"/>
+              </a:rPr>
+              <a:t>한 장으로 보는 계보 — 문제 → 다음이 해결</a:t>
+            </a:r>
+          </a:p>
+        </p:txBody>
+      </p:sp>
+      <p:sp>
+        <p:nvSpPr>
+          <p:cNvPr id="5" name="Rounded Rectangle 4"/>
+          <p:cNvSpPr/>
+          <p:nvPr/>
+        </p:nvSpPr>
+        <p:spPr>
+          <a:xfrm>
+            <a:off x="502920" y="1325880"/>
+            <a:ext cx="1554480" cy="566928"/>
+          </a:xfrm>
+          <a:prstGeom prst="roundRect">
+            <a:avLst/>
+          </a:prstGeom>
+          <a:solidFill>
+            <a:srgbClr val="DBE7F3"/>
+          </a:solidFill>
+          <a:ln w="12700">
+            <a:solidFill>
+              <a:srgbClr val="2A6F97"/>
+            </a:solidFill>
+          </a:ln>
+          <a:effectLst/>
+        </p:spPr>
+        <p:style>
+          <a:lnRef idx="1">
+            <a:schemeClr val="accent1"/>
+          </a:lnRef>
+          <a:fillRef idx="3">
+            <a:schemeClr val="accent1"/>
+          </a:fillRef>
+          <a:effectRef idx="2">
+            <a:schemeClr val="accent1"/>
+          </a:effectRef>
+          <a:fontRef idx="minor">
+            <a:schemeClr val="lt1"/>
+          </a:fontRef>
+        </p:style>
+        <p:txBody>
+          <a:bodyPr rtlCol="0" anchor="ctr" wrap="square" lIns="38100" rIns="38100" tIns="25400" bIns="25400"/>
+          <a:lstStyle/>
+          <a:p>
+            <a:pPr algn="ctr"/>
+            <a:r>
+              <a:rPr sz="1200" b="1" i="0">
+                <a:solidFill>
+                  <a:srgbClr val="2A6F97"/>
+                </a:solidFill>
+                <a:latin typeface="Noto Sans CJK KR"/>
+              </a:rPr>
+              <a:t>GD</a:t>
+            </a:r>
+          </a:p>
+        </p:txBody>
+      </p:sp>
+      <p:sp>
+        <p:nvSpPr>
+          <p:cNvPr id="6" name="TextBox 5"/>
+          <p:cNvSpPr txBox="1"/>
+          <p:nvPr/>
+        </p:nvSpPr>
+        <p:spPr>
+          <a:xfrm>
+            <a:off x="502920" y="1901952"/>
+            <a:ext cx="1554480" cy="502920"/>
+          </a:xfrm>
+          <a:prstGeom prst="rect">
+            <a:avLst/>
+          </a:prstGeom>
+          <a:noFill/>
+        </p:spPr>
+        <p:txBody>
+          <a:bodyPr wrap="square" anchor="t" lIns="25400" rIns="25400" tIns="12700" bIns="12700">
+            <a:spAutoFit/>
+          </a:bodyPr>
+          <a:lstStyle/>
+          <a:p>
+            <a:pPr algn="ctr"/>
+            <a:r>
+              <a:rPr sz="830" b="0" i="0">
+                <a:solidFill>
+                  <a:srgbClr val="5A5F68"/>
+                </a:solidFill>
+                <a:latin typeface="Noto Sans CJK KR"/>
+              </a:rPr>
+              <a:t>전체 데이터로
+정확한 방향</a:t>
+            </a:r>
+          </a:p>
+        </p:txBody>
+      </p:sp>
+      <p:sp>
+        <p:nvSpPr>
+          <p:cNvPr id="7" name="Rounded Rectangle 6"/>
+          <p:cNvSpPr/>
+          <p:nvPr/>
+        </p:nvSpPr>
+        <p:spPr>
+          <a:xfrm>
+            <a:off x="502920" y="2880360"/>
+            <a:ext cx="1554480" cy="566928"/>
+          </a:xfrm>
+          <a:prstGeom prst="roundRect">
+            <a:avLst/>
+          </a:prstGeom>
+          <a:solidFill>
+            <a:srgbClr val="DBE7F3"/>
+          </a:solidFill>
+          <a:ln w="12700">
+            <a:solidFill>
+              <a:srgbClr val="2A6F97"/>
+            </a:solidFill>
+          </a:ln>
+          <a:effectLst/>
+        </p:spPr>
+        <p:style>
+          <a:lnRef idx="1">
+            <a:schemeClr val="accent1"/>
+          </a:lnRef>
+          <a:fillRef idx="3">
+            <a:schemeClr val="accent1"/>
+          </a:fillRef>
+          <a:effectRef idx="2">
+            <a:schemeClr val="accent1"/>
+          </a:effectRef>
+          <a:fontRef idx="minor">
+            <a:schemeClr val="lt1"/>
+          </a:fontRef>
+        </p:style>
+        <p:txBody>
+          <a:bodyPr rtlCol="0" anchor="ctr" wrap="square" lIns="38100" rIns="38100" tIns="25400" bIns="25400"/>
+          <a:lstStyle/>
+          <a:p>
+            <a:pPr algn="ctr"/>
+            <a:r>
+              <a:rPr sz="1200" b="1" i="0">
+                <a:solidFill>
+                  <a:srgbClr val="2A6F97"/>
+                </a:solidFill>
+                <a:latin typeface="Noto Sans CJK KR"/>
+              </a:rPr>
+              <a:t>SGD</a:t>
+            </a:r>
+          </a:p>
+        </p:txBody>
+      </p:sp>
+      <p:sp>
+        <p:nvSpPr>
+          <p:cNvPr id="8" name="TextBox 7"/>
+          <p:cNvSpPr txBox="1"/>
+          <p:nvPr/>
+        </p:nvSpPr>
+        <p:spPr>
+          <a:xfrm>
+            <a:off x="502920" y="3456432"/>
+            <a:ext cx="1554480" cy="502920"/>
+          </a:xfrm>
+          <a:prstGeom prst="rect">
+            <a:avLst/>
+          </a:prstGeom>
+          <a:noFill/>
+        </p:spPr>
+        <p:txBody>
+          <a:bodyPr wrap="square" anchor="t" lIns="25400" rIns="25400" tIns="12700" bIns="12700">
+            <a:spAutoFit/>
+          </a:bodyPr>
+          <a:lstStyle/>
+          <a:p>
+            <a:pPr algn="ctr"/>
+            <a:r>
+              <a:rPr sz="830" b="0" i="0">
+                <a:solidFill>
+                  <a:srgbClr val="5A5F68"/>
+                </a:solidFill>
+                <a:latin typeface="Noto Sans CJK KR"/>
+              </a:rPr>
+              <a:t>미니배치로
+빠르게 자주</a:t>
+            </a:r>
+          </a:p>
+        </p:txBody>
+      </p:sp>
+      <p:sp>
+        <p:nvSpPr>
+          <p:cNvPr id="9" name="Rounded Rectangle 8"/>
+          <p:cNvSpPr/>
+          <p:nvPr/>
+        </p:nvSpPr>
+        <p:spPr>
+          <a:xfrm>
+            <a:off x="2788920" y="1417320"/>
+            <a:ext cx="1828800" cy="566928"/>
+          </a:xfrm>
+          <a:prstGeom prst="roundRect">
+            <a:avLst/>
+          </a:prstGeom>
+          <a:solidFill>
+            <a:srgbClr val="DBE7F3"/>
+          </a:solidFill>
+          <a:ln w="12700">
+            <a:solidFill>
+              <a:srgbClr val="2A6F97"/>
+            </a:solidFill>
+          </a:ln>
+          <a:effectLst/>
+        </p:spPr>
+        <p:style>
+          <a:lnRef idx="1">
+            <a:schemeClr val="accent1"/>
+          </a:lnRef>
+          <a:fillRef idx="3">
+            <a:schemeClr val="accent1"/>
+          </a:fillRef>
+          <a:effectRef idx="2">
+            <a:schemeClr val="accent1"/>
+          </a:effectRef>
+          <a:fontRef idx="minor">
+            <a:schemeClr val="lt1"/>
+          </a:fontRef>
+        </p:style>
+        <p:txBody>
+          <a:bodyPr rtlCol="0" anchor="ctr" wrap="square" lIns="38100" rIns="38100" tIns="25400" bIns="25400"/>
+          <a:lstStyle/>
+          <a:p>
+            <a:pPr algn="ctr"/>
+            <a:r>
+              <a:rPr sz="1200" b="1" i="0">
+                <a:solidFill>
+                  <a:srgbClr val="2A6F97"/>
+                </a:solidFill>
+                <a:latin typeface="Noto Sans CJK KR"/>
+              </a:rPr>
+              <a:t>Momentum</a:t>
+            </a:r>
+          </a:p>
+        </p:txBody>
+      </p:sp>
+      <p:sp>
+        <p:nvSpPr>
+          <p:cNvPr id="10" name="TextBox 9"/>
+          <p:cNvSpPr txBox="1"/>
+          <p:nvPr/>
+        </p:nvSpPr>
+        <p:spPr>
+          <a:xfrm>
+            <a:off x="2788920" y="1993392"/>
+            <a:ext cx="1828800" cy="502920"/>
+          </a:xfrm>
+          <a:prstGeom prst="rect">
+            <a:avLst/>
+          </a:prstGeom>
+          <a:noFill/>
+        </p:spPr>
+        <p:txBody>
+          <a:bodyPr wrap="square" anchor="t" lIns="25400" rIns="25400" tIns="12700" bIns="12700">
+            <a:spAutoFit/>
+          </a:bodyPr>
+          <a:lstStyle/>
+          <a:p>
+            <a:pPr algn="ctr"/>
+            <a:r>
+              <a:rPr sz="830" b="0" i="0">
+                <a:solidFill>
+                  <a:srgbClr val="5A5F68"/>
+                </a:solidFill>
+                <a:latin typeface="Noto Sans CJK KR"/>
+              </a:rPr>
+              <a:t>관성으로 방향 안정</a:t>
+            </a:r>
+          </a:p>
+        </p:txBody>
+      </p:sp>
+      <p:sp>
+        <p:nvSpPr>
+          <p:cNvPr id="11" name="Rounded Rectangle 10"/>
+          <p:cNvSpPr/>
+          <p:nvPr/>
+        </p:nvSpPr>
+        <p:spPr>
+          <a:xfrm>
+            <a:off x="5257800" y="1417320"/>
+            <a:ext cx="1828800" cy="566928"/>
+          </a:xfrm>
+          <a:prstGeom prst="roundRect">
+            <a:avLst/>
+          </a:prstGeom>
+          <a:solidFill>
+            <a:srgbClr val="DBE7F3"/>
+          </a:solidFill>
+          <a:ln w="12700">
+            <a:solidFill>
+              <a:srgbClr val="2A6F97"/>
+            </a:solidFill>
+          </a:ln>
+          <a:effectLst/>
+        </p:spPr>
+        <p:style>
+          <a:lnRef idx="1">
+            <a:schemeClr val="accent1"/>
+          </a:lnRef>
+          <a:fillRef idx="3">
+            <a:schemeClr val="accent1"/>
+          </a:fillRef>
+          <a:effectRef idx="2">
+            <a:schemeClr val="accent1"/>
+          </a:effectRef>
+          <a:fontRef idx="minor">
+            <a:schemeClr val="lt1"/>
+          </a:fontRef>
+        </p:style>
+        <p:txBody>
+          <a:bodyPr rtlCol="0" anchor="ctr" wrap="square" lIns="38100" rIns="38100" tIns="25400" bIns="25400"/>
+          <a:lstStyle/>
+          <a:p>
+            <a:pPr algn="ctr"/>
+            <a:r>
+              <a:rPr sz="1200" b="1" i="0">
+                <a:solidFill>
+                  <a:srgbClr val="2A6F97"/>
+                </a:solidFill>
+                <a:latin typeface="Noto Sans CJK KR"/>
+              </a:rPr>
+              <a:t>NAG</a:t>
+            </a:r>
+          </a:p>
+        </p:txBody>
+      </p:sp>
+      <p:sp>
+        <p:nvSpPr>
+          <p:cNvPr id="12" name="TextBox 11"/>
+          <p:cNvSpPr txBox="1"/>
+          <p:nvPr/>
+        </p:nvSpPr>
+        <p:spPr>
+          <a:xfrm>
+            <a:off x="5257800" y="1993392"/>
+            <a:ext cx="1828800" cy="502920"/>
+          </a:xfrm>
+          <a:prstGeom prst="rect">
+            <a:avLst/>
+          </a:prstGeom>
+          <a:noFill/>
+        </p:spPr>
+        <p:txBody>
+          <a:bodyPr wrap="square" anchor="t" lIns="25400" rIns="25400" tIns="12700" bIns="12700">
+            <a:spAutoFit/>
+          </a:bodyPr>
+          <a:lstStyle/>
+          <a:p>
+            <a:pPr algn="ctr"/>
+            <a:r>
+              <a:rPr sz="830" b="0" i="0">
+                <a:solidFill>
+                  <a:srgbClr val="5A5F68"/>
+                </a:solidFill>
+                <a:latin typeface="Noto Sans CJK KR"/>
+              </a:rPr>
+              <a:t>관성 자리서
+미리 보정</a:t>
+            </a:r>
+          </a:p>
+        </p:txBody>
+      </p:sp>
+      <p:sp>
+        <p:nvSpPr>
+          <p:cNvPr id="13" name="Rounded Rectangle 12"/>
+          <p:cNvSpPr/>
+          <p:nvPr/>
+        </p:nvSpPr>
+        <p:spPr>
+          <a:xfrm>
+            <a:off x="2788920" y="3977639"/>
+            <a:ext cx="1828800" cy="566928"/>
+          </a:xfrm>
+          <a:prstGeom prst="roundRect">
+            <a:avLst/>
+          </a:prstGeom>
+          <a:solidFill>
+            <a:srgbClr val="DAF0ED"/>
+          </a:solidFill>
+          <a:ln w="12700">
+            <a:solidFill>
+              <a:srgbClr val="2A9D8F"/>
+            </a:solidFill>
+          </a:ln>
+          <a:effectLst/>
+        </p:spPr>
+        <p:style>
+          <a:lnRef idx="1">
+            <a:schemeClr val="accent1"/>
+          </a:lnRef>
+          <a:fillRef idx="3">
+            <a:schemeClr val="accent1"/>
+          </a:fillRef>
+          <a:effectRef idx="2">
+            <a:schemeClr val="accent1"/>
+          </a:effectRef>
+          <a:fontRef idx="minor">
+            <a:schemeClr val="lt1"/>
+          </a:fontRef>
+        </p:style>
+        <p:txBody>
+          <a:bodyPr rtlCol="0" anchor="ctr" wrap="square" lIns="38100" rIns="38100" tIns="25400" bIns="25400"/>
+          <a:lstStyle/>
+          <a:p>
+            <a:pPr algn="ctr"/>
+            <a:r>
+              <a:rPr sz="1200" b="1" i="0">
+                <a:solidFill>
+                  <a:srgbClr val="2A9D8F"/>
+                </a:solidFill>
+                <a:latin typeface="Noto Sans CJK KR"/>
+              </a:rPr>
+              <a:t>Adagrad</a:t>
+            </a:r>
+          </a:p>
+        </p:txBody>
+      </p:sp>
+      <p:sp>
+        <p:nvSpPr>
+          <p:cNvPr id="14" name="TextBox 13"/>
+          <p:cNvSpPr txBox="1"/>
+          <p:nvPr/>
+        </p:nvSpPr>
+        <p:spPr>
+          <a:xfrm>
+            <a:off x="2788920" y="4553712"/>
+            <a:ext cx="1828800" cy="502920"/>
+          </a:xfrm>
+          <a:prstGeom prst="rect">
+            <a:avLst/>
+          </a:prstGeom>
+          <a:noFill/>
+        </p:spPr>
+        <p:txBody>
+          <a:bodyPr wrap="square" anchor="t" lIns="25400" rIns="25400" tIns="12700" bIns="12700">
+            <a:spAutoFit/>
+          </a:bodyPr>
+          <a:lstStyle/>
+          <a:p>
+            <a:pPr algn="ctr"/>
+            <a:r>
+              <a:rPr sz="830" b="0" i="0">
+                <a:solidFill>
+                  <a:srgbClr val="5A5F68"/>
+                </a:solidFill>
+                <a:latin typeface="Noto Sans CJK KR"/>
+              </a:rPr>
+              <a:t>좌표별 보폭
+(누적 g²)</a:t>
+            </a:r>
+          </a:p>
+        </p:txBody>
+      </p:sp>
+      <p:sp>
+        <p:nvSpPr>
+          <p:cNvPr id="15" name="Rounded Rectangle 14"/>
+          <p:cNvSpPr/>
+          <p:nvPr/>
+        </p:nvSpPr>
+        <p:spPr>
+          <a:xfrm>
+            <a:off x="5257800" y="3977639"/>
+            <a:ext cx="1828800" cy="566928"/>
+          </a:xfrm>
+          <a:prstGeom prst="roundRect">
+            <a:avLst/>
+          </a:prstGeom>
+          <a:solidFill>
+            <a:srgbClr val="DAF0ED"/>
+          </a:solidFill>
+          <a:ln w="12700">
+            <a:solidFill>
+              <a:srgbClr val="2A9D8F"/>
+            </a:solidFill>
+          </a:ln>
+          <a:effectLst/>
+        </p:spPr>
+        <p:style>
+          <a:lnRef idx="1">
+            <a:schemeClr val="accent1"/>
+          </a:lnRef>
+          <a:fillRef idx="3">
+            <a:schemeClr val="accent1"/>
+          </a:fillRef>
+          <a:effectRef idx="2">
+            <a:schemeClr val="accent1"/>
+          </a:effectRef>
+          <a:fontRef idx="minor">
+            <a:schemeClr val="lt1"/>
+          </a:fontRef>
+        </p:style>
+        <p:txBody>
+          <a:bodyPr rtlCol="0" anchor="ctr" wrap="square" lIns="38100" rIns="38100" tIns="25400" bIns="25400"/>
+          <a:lstStyle/>
+          <a:p>
+            <a:pPr algn="ctr"/>
+            <a:r>
+              <a:rPr sz="1200" b="1" i="0">
+                <a:solidFill>
+                  <a:srgbClr val="2A9D8F"/>
+                </a:solidFill>
+                <a:latin typeface="Noto Sans CJK KR"/>
+              </a:rPr>
+              <a:t>RMSProp</a:t>
+            </a:r>
+          </a:p>
+        </p:txBody>
+      </p:sp>
+      <p:sp>
+        <p:nvSpPr>
+          <p:cNvPr id="16" name="TextBox 15"/>
+          <p:cNvSpPr txBox="1"/>
+          <p:nvPr/>
+        </p:nvSpPr>
+        <p:spPr>
+          <a:xfrm>
+            <a:off x="5257800" y="4553712"/>
+            <a:ext cx="1828800" cy="502920"/>
+          </a:xfrm>
+          <a:prstGeom prst="rect">
+            <a:avLst/>
+          </a:prstGeom>
+          <a:noFill/>
+        </p:spPr>
+        <p:txBody>
+          <a:bodyPr wrap="square" anchor="t" lIns="25400" rIns="25400" tIns="12700" bIns="12700">
+            <a:spAutoFit/>
+          </a:bodyPr>
+          <a:lstStyle/>
+          <a:p>
+            <a:pPr algn="ctr"/>
+            <a:r>
+              <a:rPr sz="830" b="0" i="0">
+                <a:solidFill>
+                  <a:srgbClr val="5A5F68"/>
+                </a:solidFill>
+                <a:latin typeface="Noto Sans CJK KR"/>
+              </a:rPr>
+              <a:t>누적 대신
+EMA(안 죽음)</a:t>
+            </a:r>
+          </a:p>
+        </p:txBody>
+      </p:sp>
+      <p:sp>
+        <p:nvSpPr>
+          <p:cNvPr id="17" name="Rounded Rectangle 16"/>
+          <p:cNvSpPr/>
+          <p:nvPr/>
+        </p:nvSpPr>
+        <p:spPr>
+          <a:xfrm>
+            <a:off x="5257800" y="4892040"/>
+            <a:ext cx="1828800" cy="566928"/>
+          </a:xfrm>
+          <a:prstGeom prst="roundRect">
+            <a:avLst/>
+          </a:prstGeom>
+          <a:solidFill>
+            <a:srgbClr val="DAF0ED"/>
+          </a:solidFill>
+          <a:ln w="12700">
+            <a:solidFill>
+              <a:srgbClr val="2A9D8F"/>
+            </a:solidFill>
+          </a:ln>
+          <a:effectLst/>
+        </p:spPr>
+        <p:style>
+          <a:lnRef idx="1">
+            <a:schemeClr val="accent1"/>
+          </a:lnRef>
+          <a:fillRef idx="3">
+            <a:schemeClr val="accent1"/>
+          </a:fillRef>
+          <a:effectRef idx="2">
+            <a:schemeClr val="accent1"/>
+          </a:effectRef>
+          <a:fontRef idx="minor">
+            <a:schemeClr val="lt1"/>
+          </a:fontRef>
+        </p:style>
+        <p:txBody>
+          <a:bodyPr rtlCol="0" anchor="ctr" wrap="square" lIns="38100" rIns="38100" tIns="25400" bIns="25400"/>
+          <a:lstStyle/>
+          <a:p>
+            <a:pPr algn="ctr"/>
+            <a:r>
+              <a:rPr sz="1200" b="1" i="0">
+                <a:solidFill>
+                  <a:srgbClr val="2A9D8F"/>
+                </a:solidFill>
+                <a:latin typeface="Noto Sans CJK KR"/>
+              </a:rPr>
+              <a:t>AdaDelta</a:t>
+            </a:r>
+          </a:p>
+        </p:txBody>
+      </p:sp>
+      <p:sp>
+        <p:nvSpPr>
+          <p:cNvPr id="18" name="TextBox 17"/>
+          <p:cNvSpPr txBox="1"/>
+          <p:nvPr/>
+        </p:nvSpPr>
+        <p:spPr>
+          <a:xfrm>
+            <a:off x="7178040" y="5029200"/>
+            <a:ext cx="2926080" cy="365760"/>
+          </a:xfrm>
+          <a:prstGeom prst="rect">
+            <a:avLst/>
+          </a:prstGeom>
+          <a:noFill/>
+        </p:spPr>
+        <p:txBody>
+          <a:bodyPr wrap="square" anchor="t" lIns="25400" rIns="25400" tIns="12700" bIns="12700">
+            <a:spAutoFit/>
+          </a:bodyPr>
+          <a:lstStyle/>
+          <a:p>
+            <a:pPr algn="l"/>
+            <a:r>
+              <a:rPr sz="850" b="0" i="0">
+                <a:solidFill>
+                  <a:srgbClr val="5A5F68"/>
+                </a:solidFill>
+                <a:latin typeface="Noto Sans CJK KR"/>
+              </a:rPr>
+              <a:t>η 없이 단위 보정 (곁가지)</a:t>
+            </a:r>
+          </a:p>
+        </p:txBody>
+      </p:sp>
+      <p:sp>
+        <p:nvSpPr>
+          <p:cNvPr id="19" name="Rounded Rectangle 18"/>
+          <p:cNvSpPr/>
+          <p:nvPr/>
+        </p:nvSpPr>
+        <p:spPr>
+          <a:xfrm>
+            <a:off x="7772400" y="2606040"/>
+            <a:ext cx="1828800" cy="566928"/>
+          </a:xfrm>
+          <a:prstGeom prst="roundRect">
+            <a:avLst/>
+          </a:prstGeom>
+          <a:solidFill>
+            <a:srgbClr val="F6ECC7"/>
+          </a:solidFill>
+          <a:ln w="12700">
+            <a:solidFill>
+              <a:srgbClr val="C9A227"/>
+            </a:solidFill>
+          </a:ln>
+          <a:effectLst/>
+        </p:spPr>
+        <p:style>
+          <a:lnRef idx="1">
+            <a:schemeClr val="accent1"/>
+          </a:lnRef>
+          <a:fillRef idx="3">
+            <a:schemeClr val="accent1"/>
+          </a:fillRef>
+          <a:effectRef idx="2">
+            <a:schemeClr val="accent1"/>
+          </a:effectRef>
+          <a:fontRef idx="minor">
+            <a:schemeClr val="lt1"/>
+          </a:fontRef>
+        </p:style>
+        <p:txBody>
+          <a:bodyPr rtlCol="0" anchor="ctr" wrap="square" lIns="38100" rIns="38100" tIns="25400" bIns="25400"/>
+          <a:lstStyle/>
+          <a:p>
+            <a:pPr algn="ctr"/>
+            <a:r>
+              <a:rPr sz="1300" b="1" i="0">
+                <a:solidFill>
+                  <a:srgbClr val="C9A227"/>
+                </a:solidFill>
+                <a:latin typeface="Noto Sans CJK KR"/>
+              </a:rPr>
+              <a:t>Adam</a:t>
+            </a:r>
+          </a:p>
+        </p:txBody>
+      </p:sp>
+      <p:sp>
+        <p:nvSpPr>
+          <p:cNvPr id="20" name="TextBox 19"/>
+          <p:cNvSpPr txBox="1"/>
+          <p:nvPr/>
+        </p:nvSpPr>
+        <p:spPr>
+          <a:xfrm>
+            <a:off x="7772400" y="3182112"/>
+            <a:ext cx="1828800" cy="502920"/>
+          </a:xfrm>
+          <a:prstGeom prst="rect">
+            <a:avLst/>
+          </a:prstGeom>
+          <a:noFill/>
+        </p:spPr>
+        <p:txBody>
+          <a:bodyPr wrap="square" anchor="t" lIns="25400" rIns="25400" tIns="12700" bIns="12700">
+            <a:spAutoFit/>
+          </a:bodyPr>
+          <a:lstStyle/>
+          <a:p>
+            <a:pPr algn="ctr"/>
+            <a:r>
+              <a:rPr sz="830" b="0" i="0">
+                <a:solidFill>
+                  <a:srgbClr val="5A5F68"/>
+                </a:solidFill>
+                <a:latin typeface="Noto Sans CJK KR"/>
+              </a:rPr>
+              <a:t>방향+보폭+편향보정</a:t>
+            </a:r>
+          </a:p>
+        </p:txBody>
+      </p:sp>
+      <p:sp>
+        <p:nvSpPr>
+          <p:cNvPr id="21" name="Rounded Rectangle 20"/>
+          <p:cNvSpPr/>
+          <p:nvPr/>
+        </p:nvSpPr>
+        <p:spPr>
+          <a:xfrm>
+            <a:off x="10058400" y="1417320"/>
+            <a:ext cx="1691640" cy="566928"/>
+          </a:xfrm>
+          <a:prstGeom prst="roundRect">
+            <a:avLst/>
+          </a:prstGeom>
+          <a:solidFill>
+            <a:srgbClr val="F6ECC7"/>
+          </a:solidFill>
+          <a:ln w="12700">
+            <a:solidFill>
+              <a:srgbClr val="C9A227"/>
+            </a:solidFill>
+          </a:ln>
+          <a:effectLst/>
+        </p:spPr>
+        <p:style>
+          <a:lnRef idx="1">
+            <a:schemeClr val="accent1"/>
+          </a:lnRef>
+          <a:fillRef idx="3">
+            <a:schemeClr val="accent1"/>
+          </a:fillRef>
+          <a:effectRef idx="2">
+            <a:schemeClr val="accent1"/>
+          </a:effectRef>
+          <a:fontRef idx="minor">
+            <a:schemeClr val="lt1"/>
+          </a:fontRef>
+        </p:style>
+        <p:txBody>
+          <a:bodyPr rtlCol="0" anchor="ctr" wrap="square" lIns="38100" rIns="38100" tIns="25400" bIns="25400"/>
+          <a:lstStyle/>
+          <a:p>
+            <a:pPr algn="ctr"/>
+            <a:r>
+              <a:rPr sz="1200" b="1" i="0">
+                <a:solidFill>
+                  <a:srgbClr val="C9A227"/>
+                </a:solidFill>
+                <a:latin typeface="Noto Sans CJK KR"/>
+              </a:rPr>
+              <a:t>Nadam</a:t>
+            </a:r>
+          </a:p>
+        </p:txBody>
+      </p:sp>
+      <p:sp>
+        <p:nvSpPr>
+          <p:cNvPr id="22" name="TextBox 21"/>
+          <p:cNvSpPr txBox="1"/>
+          <p:nvPr/>
+        </p:nvSpPr>
+        <p:spPr>
+          <a:xfrm>
+            <a:off x="10058400" y="1993392"/>
+            <a:ext cx="1691640" cy="502920"/>
+          </a:xfrm>
+          <a:prstGeom prst="rect">
+            <a:avLst/>
+          </a:prstGeom>
+          <a:noFill/>
+        </p:spPr>
+        <p:txBody>
+          <a:bodyPr wrap="square" anchor="t" lIns="25400" rIns="25400" tIns="12700" bIns="12700">
+            <a:spAutoFit/>
+          </a:bodyPr>
+          <a:lstStyle/>
+          <a:p>
+            <a:pPr algn="ctr"/>
+            <a:r>
+              <a:rPr sz="830" b="0" i="0">
+                <a:solidFill>
+                  <a:srgbClr val="5A5F68"/>
+                </a:solidFill>
+                <a:latin typeface="Noto Sans CJK KR"/>
+              </a:rPr>
+              <a:t>Adam + NAG</a:t>
+            </a:r>
+          </a:p>
+        </p:txBody>
+      </p:sp>
+      <p:sp>
+        <p:nvSpPr>
+          <p:cNvPr id="23" name="Rounded Rectangle 22"/>
+          <p:cNvSpPr/>
+          <p:nvPr/>
+        </p:nvSpPr>
+        <p:spPr>
+          <a:xfrm>
+            <a:off x="10058400" y="3383280"/>
+            <a:ext cx="1691640" cy="822960"/>
+          </a:xfrm>
+          <a:prstGeom prst="roundRect">
+            <a:avLst/>
+          </a:prstGeom>
+          <a:solidFill>
+            <a:srgbClr val="C9A227"/>
+          </a:solidFill>
+          <a:ln w="12700">
+            <a:solidFill>
+              <a:srgbClr val="C9A227"/>
+            </a:solidFill>
+          </a:ln>
+          <a:effectLst/>
+        </p:spPr>
+        <p:style>
+          <a:lnRef idx="1">
+            <a:schemeClr val="accent1"/>
+          </a:lnRef>
+          <a:fillRef idx="3">
+            <a:schemeClr val="accent1"/>
+          </a:fillRef>
+          <a:effectRef idx="2">
+            <a:schemeClr val="accent1"/>
+          </a:effectRef>
+          <a:fontRef idx="minor">
+            <a:schemeClr val="lt1"/>
+          </a:fontRef>
+        </p:style>
+        <p:txBody>
+          <a:bodyPr rtlCol="0" anchor="ctr" wrap="square" lIns="38100" rIns="38100" tIns="25400" bIns="25400"/>
+          <a:lstStyle/>
+          <a:p>
+            <a:pPr algn="ctr"/>
+            <a:r>
+              <a:rPr sz="1300" b="1" i="0">
+                <a:solidFill>
+                  <a:srgbClr val="FFFFFF"/>
+                </a:solidFill>
+                <a:latin typeface="Noto Sans CJK KR"/>
+              </a:rPr>
+              <a:t>AdamW ★</a:t>
+            </a:r>
+          </a:p>
+          <a:p>
+            <a:pPr algn="ctr"/>
+            <a:r>
+              <a:rPr sz="850" b="0" i="0">
+                <a:solidFill>
+                  <a:srgbClr val="FFFFFF"/>
+                </a:solidFill>
+                <a:latin typeface="Noto Sans CJK KR"/>
+              </a:rPr>
+              <a:t>decoupled decay
+= 오늘의 표준</a:t>
+            </a:r>
+          </a:p>
+        </p:txBody>
+      </p:sp>
+      <p:cxnSp>
+        <p:nvCxnSpPr>
+          <p:cNvPr id="24" name="Connector 23"/>
+          <p:cNvCxnSpPr/>
+          <p:nvPr/>
+        </p:nvCxnSpPr>
+        <p:spPr>
+          <a:xfrm>
+            <a:off x="1280160" y="1892807"/>
+            <a:ext cx="0" cy="987553"/>
+          </a:xfrm>
+          <a:prstGeom prst="line">
+            <a:avLst/>
+          </a:prstGeom>
+          <a:ln w="17780">
+            <a:solidFill>
+              <a:srgbClr val="2A6F97"/>
+            </a:solidFill>
+            <a:tailEnd type="triangle" w="med" h="med"/>
+          </a:ln>
+        </p:spPr>
+        <p:style>
+          <a:lnRef idx="2">
+            <a:schemeClr val="accent1"/>
+          </a:lnRef>
+          <a:fillRef idx="0">
+            <a:schemeClr val="accent1"/>
+          </a:fillRef>
+          <a:effectRef idx="1">
+            <a:schemeClr val="accent1"/>
+          </a:effectRef>
+          <a:fontRef idx="minor">
+            <a:schemeClr val="tx1"/>
+          </a:fontRef>
+        </p:style>
+      </p:cxnSp>
+      <p:cxnSp>
+        <p:nvCxnSpPr>
+          <p:cNvPr id="25" name="Connector 24"/>
+          <p:cNvCxnSpPr/>
+          <p:nvPr/>
+        </p:nvCxnSpPr>
+        <p:spPr>
+          <a:xfrm flipV="1">
+            <a:off x="2057400" y="1984248"/>
+            <a:ext cx="1234440" cy="896112"/>
+          </a:xfrm>
+          <a:prstGeom prst="line">
+            <a:avLst/>
+          </a:prstGeom>
+          <a:ln w="17780">
+            <a:solidFill>
+              <a:srgbClr val="2A6F97"/>
+            </a:solidFill>
+            <a:tailEnd type="triangle" w="med" h="med"/>
+          </a:ln>
+        </p:spPr>
+        <p:style>
+          <a:lnRef idx="2">
+            <a:schemeClr val="accent1"/>
+          </a:lnRef>
+          <a:fillRef idx="0">
+            <a:schemeClr val="accent1"/>
+          </a:fillRef>
+          <a:effectRef idx="1">
+            <a:schemeClr val="accent1"/>
+          </a:effectRef>
+          <a:fontRef idx="minor">
+            <a:schemeClr val="tx1"/>
+          </a:fontRef>
+        </p:style>
+      </p:cxnSp>
+      <p:cxnSp>
+        <p:nvCxnSpPr>
+          <p:cNvPr id="26" name="Connector 25"/>
+          <p:cNvCxnSpPr/>
+          <p:nvPr/>
+        </p:nvCxnSpPr>
+        <p:spPr>
+          <a:xfrm>
+            <a:off x="4617720" y="1700784"/>
+            <a:ext cx="640080" cy="0"/>
+          </a:xfrm>
+          <a:prstGeom prst="line">
+            <a:avLst/>
+          </a:prstGeom>
+          <a:ln w="17780">
+            <a:solidFill>
+              <a:srgbClr val="2A6F97"/>
+            </a:solidFill>
+            <a:tailEnd type="triangle" w="med" h="med"/>
+          </a:ln>
+        </p:spPr>
+        <p:style>
+          <a:lnRef idx="2">
+            <a:schemeClr val="accent1"/>
+          </a:lnRef>
+          <a:fillRef idx="0">
+            <a:schemeClr val="accent1"/>
+          </a:fillRef>
+          <a:effectRef idx="1">
+            <a:schemeClr val="accent1"/>
+          </a:effectRef>
+          <a:fontRef idx="minor">
+            <a:schemeClr val="tx1"/>
+          </a:fontRef>
+        </p:style>
+      </p:cxnSp>
+      <p:cxnSp>
+        <p:nvCxnSpPr>
+          <p:cNvPr id="27" name="Connector 26"/>
+          <p:cNvCxnSpPr/>
+          <p:nvPr/>
+        </p:nvCxnSpPr>
+        <p:spPr>
+          <a:xfrm>
+            <a:off x="2057400" y="3291840"/>
+            <a:ext cx="1234440" cy="685799"/>
+          </a:xfrm>
+          <a:prstGeom prst="line">
+            <a:avLst/>
+          </a:prstGeom>
+          <a:ln w="17780">
+            <a:solidFill>
+              <a:srgbClr val="2A9D8F"/>
+            </a:solidFill>
+            <a:tailEnd type="triangle" w="med" h="med"/>
+          </a:ln>
+        </p:spPr>
+        <p:style>
+          <a:lnRef idx="2">
+            <a:schemeClr val="accent1"/>
+          </a:lnRef>
+          <a:fillRef idx="0">
+            <a:schemeClr val="accent1"/>
+          </a:fillRef>
+          <a:effectRef idx="1">
+            <a:schemeClr val="accent1"/>
+          </a:effectRef>
+          <a:fontRef idx="minor">
+            <a:schemeClr val="tx1"/>
+          </a:fontRef>
+        </p:style>
+      </p:cxnSp>
+      <p:cxnSp>
+        <p:nvCxnSpPr>
+          <p:cNvPr id="28" name="Connector 27"/>
+          <p:cNvCxnSpPr/>
+          <p:nvPr/>
+        </p:nvCxnSpPr>
+        <p:spPr>
+          <a:xfrm>
+            <a:off x="4617720" y="4261104"/>
+            <a:ext cx="640080" cy="0"/>
+          </a:xfrm>
+          <a:prstGeom prst="line">
+            <a:avLst/>
+          </a:prstGeom>
+          <a:ln w="17780">
+            <a:solidFill>
+              <a:srgbClr val="2A9D8F"/>
+            </a:solidFill>
+            <a:tailEnd type="triangle" w="med" h="med"/>
+          </a:ln>
+        </p:spPr>
+        <p:style>
+          <a:lnRef idx="2">
+            <a:schemeClr val="accent1"/>
+          </a:lnRef>
+          <a:fillRef idx="0">
+            <a:schemeClr val="accent1"/>
+          </a:fillRef>
+          <a:effectRef idx="1">
+            <a:schemeClr val="accent1"/>
+          </a:effectRef>
+          <a:fontRef idx="minor">
+            <a:schemeClr val="tx1"/>
+          </a:fontRef>
+        </p:style>
+      </p:cxnSp>
+      <p:cxnSp>
+        <p:nvCxnSpPr>
+          <p:cNvPr id="29" name="Connector 28"/>
+          <p:cNvCxnSpPr/>
+          <p:nvPr/>
+        </p:nvCxnSpPr>
+        <p:spPr>
+          <a:xfrm>
+            <a:off x="6172200" y="4544568"/>
+            <a:ext cx="0" cy="347472"/>
+          </a:xfrm>
+          <a:prstGeom prst="line">
+            <a:avLst/>
+          </a:prstGeom>
+          <a:ln w="17780">
+            <a:solidFill>
+              <a:srgbClr val="2A9D8F"/>
+            </a:solidFill>
+            <a:tailEnd type="triangle" w="med" h="med"/>
+          </a:ln>
+        </p:spPr>
+        <p:style>
+          <a:lnRef idx="2">
+            <a:schemeClr val="accent1"/>
+          </a:lnRef>
+          <a:fillRef idx="0">
+            <a:schemeClr val="accent1"/>
+          </a:fillRef>
+          <a:effectRef idx="1">
+            <a:schemeClr val="accent1"/>
+          </a:effectRef>
+          <a:fontRef idx="minor">
+            <a:schemeClr val="tx1"/>
+          </a:fontRef>
+        </p:style>
+      </p:cxnSp>
+      <p:cxnSp>
+        <p:nvCxnSpPr>
+          <p:cNvPr id="30" name="Connector 29"/>
+          <p:cNvCxnSpPr/>
+          <p:nvPr/>
+        </p:nvCxnSpPr>
+        <p:spPr>
+          <a:xfrm>
+            <a:off x="4617720" y="1828800"/>
+            <a:ext cx="3154680" cy="914400"/>
+          </a:xfrm>
+          <a:prstGeom prst="line">
+            <a:avLst/>
+          </a:prstGeom>
+          <a:ln w="20320">
+            <a:solidFill>
+              <a:srgbClr val="C9A227"/>
+            </a:solidFill>
+            <a:tailEnd type="triangle" w="med" h="med"/>
+          </a:ln>
+        </p:spPr>
+        <p:style>
+          <a:lnRef idx="2">
+            <a:schemeClr val="accent1"/>
+          </a:lnRef>
+          <a:fillRef idx="0">
+            <a:schemeClr val="accent1"/>
+          </a:fillRef>
+          <a:effectRef idx="1">
+            <a:schemeClr val="accent1"/>
+          </a:effectRef>
+          <a:fontRef idx="minor">
+            <a:schemeClr val="tx1"/>
+          </a:fontRef>
+        </p:style>
+      </p:cxnSp>
+      <p:cxnSp>
+        <p:nvCxnSpPr>
+          <p:cNvPr id="31" name="Connector 30"/>
+          <p:cNvCxnSpPr/>
+          <p:nvPr/>
+        </p:nvCxnSpPr>
+        <p:spPr>
+          <a:xfrm flipV="1">
+            <a:off x="7086600" y="3172968"/>
+            <a:ext cx="868679" cy="941832"/>
+          </a:xfrm>
+          <a:prstGeom prst="line">
+            <a:avLst/>
+          </a:prstGeom>
+          <a:ln w="20320">
+            <a:solidFill>
+              <a:srgbClr val="C9A227"/>
+            </a:solidFill>
+            <a:tailEnd type="triangle" w="med" h="med"/>
+          </a:ln>
+        </p:spPr>
+        <p:style>
+          <a:lnRef idx="2">
+            <a:schemeClr val="accent1"/>
+          </a:lnRef>
+          <a:fillRef idx="0">
+            <a:schemeClr val="accent1"/>
+          </a:fillRef>
+          <a:effectRef idx="1">
+            <a:schemeClr val="accent1"/>
+          </a:effectRef>
+          <a:fontRef idx="minor">
+            <a:schemeClr val="tx1"/>
+          </a:fontRef>
+        </p:style>
+      </p:cxnSp>
+      <p:cxnSp>
+        <p:nvCxnSpPr>
+          <p:cNvPr id="32" name="Connector 31"/>
+          <p:cNvCxnSpPr/>
+          <p:nvPr/>
+        </p:nvCxnSpPr>
+        <p:spPr>
+          <a:xfrm flipV="1">
+            <a:off x="9601200" y="1920240"/>
+            <a:ext cx="457200" cy="822960"/>
+          </a:xfrm>
+          <a:prstGeom prst="line">
+            <a:avLst/>
+          </a:prstGeom>
+          <a:ln w="17780">
+            <a:solidFill>
+              <a:srgbClr val="C9A227"/>
+            </a:solidFill>
+            <a:tailEnd type="triangle" w="med" h="med"/>
+          </a:ln>
+        </p:spPr>
+        <p:style>
+          <a:lnRef idx="2">
+            <a:schemeClr val="accent1"/>
+          </a:lnRef>
+          <a:fillRef idx="0">
+            <a:schemeClr val="accent1"/>
+          </a:fillRef>
+          <a:effectRef idx="1">
+            <a:schemeClr val="accent1"/>
+          </a:effectRef>
+          <a:fontRef idx="minor">
+            <a:schemeClr val="tx1"/>
+          </a:fontRef>
+        </p:style>
+      </p:cxnSp>
+      <p:cxnSp>
+        <p:nvCxnSpPr>
+          <p:cNvPr id="33" name="Connector 32"/>
+          <p:cNvCxnSpPr/>
+          <p:nvPr/>
+        </p:nvCxnSpPr>
+        <p:spPr>
+          <a:xfrm>
+            <a:off x="9601200" y="3063240"/>
+            <a:ext cx="457200" cy="502920"/>
+          </a:xfrm>
+          <a:prstGeom prst="line">
+            <a:avLst/>
+          </a:prstGeom>
+          <a:ln w="20320">
+            <a:solidFill>
+              <a:srgbClr val="C9A227"/>
+            </a:solidFill>
+            <a:tailEnd type="triangle" w="med" h="med"/>
+          </a:ln>
+        </p:spPr>
+        <p:style>
+          <a:lnRef idx="2">
+            <a:schemeClr val="accent1"/>
+          </a:lnRef>
+          <a:fillRef idx="0">
+            <a:schemeClr val="accent1"/>
+          </a:fillRef>
+          <a:effectRef idx="1">
+            <a:schemeClr val="accent1"/>
+          </a:effectRef>
+          <a:fontRef idx="minor">
+            <a:schemeClr val="tx1"/>
+          </a:fontRef>
+        </p:style>
+      </p:cxnSp>
+      <p:sp>
+        <p:nvSpPr>
+          <p:cNvPr id="34" name="TextBox 33"/>
+          <p:cNvSpPr txBox="1"/>
+          <p:nvPr/>
+        </p:nvSpPr>
+        <p:spPr>
+          <a:xfrm>
+            <a:off x="2148840" y="2148840"/>
+            <a:ext cx="1280160" cy="274320"/>
+          </a:xfrm>
+          <a:prstGeom prst="rect">
+            <a:avLst/>
+          </a:prstGeom>
+          <a:noFill/>
+        </p:spPr>
+        <p:txBody>
+          <a:bodyPr wrap="square" anchor="t" lIns="25400" rIns="25400" tIns="12700" bIns="12700">
+            <a:spAutoFit/>
+          </a:bodyPr>
+          <a:lstStyle/>
+          <a:p>
+            <a:pPr algn="l"/>
+            <a:r>
+              <a:rPr sz="850" b="0" i="1">
+                <a:solidFill>
+                  <a:srgbClr val="2A6F97"/>
+                </a:solidFill>
+                <a:latin typeface="Noto Sans CJK KR"/>
+              </a:rPr>
+              <a:t>스텝 방향</a:t>
+            </a:r>
+          </a:p>
+        </p:txBody>
+      </p:sp>
+      <p:sp>
+        <p:nvSpPr>
+          <p:cNvPr id="35" name="TextBox 34"/>
+          <p:cNvSpPr txBox="1"/>
+          <p:nvPr/>
+        </p:nvSpPr>
+        <p:spPr>
+          <a:xfrm>
+            <a:off x="2148840" y="3566160"/>
+            <a:ext cx="1280160" cy="274320"/>
+          </a:xfrm>
+          <a:prstGeom prst="rect">
+            <a:avLst/>
+          </a:prstGeom>
+          <a:noFill/>
+        </p:spPr>
+        <p:txBody>
+          <a:bodyPr wrap="square" anchor="t" lIns="25400" rIns="25400" tIns="12700" bIns="12700">
+            <a:spAutoFit/>
+          </a:bodyPr>
+          <a:lstStyle/>
+          <a:p>
+            <a:pPr algn="l"/>
+            <a:r>
+              <a:rPr sz="850" b="0" i="1">
+                <a:solidFill>
+                  <a:srgbClr val="2A9D8F"/>
+                </a:solidFill>
+                <a:latin typeface="Noto Sans CJK KR"/>
+              </a:rPr>
+              <a:t>스텝 사이즈</a:t>
+            </a:r>
+          </a:p>
+        </p:txBody>
+      </p:sp>
+      <p:sp>
+        <p:nvSpPr>
+          <p:cNvPr id="36" name="Rounded Rectangle 35"/>
+          <p:cNvSpPr/>
+          <p:nvPr/>
+        </p:nvSpPr>
+        <p:spPr>
+          <a:xfrm>
+            <a:off x="502920" y="5989320"/>
+            <a:ext cx="11155680" cy="548640"/>
+          </a:xfrm>
+          <a:prstGeom prst="roundRect">
+            <a:avLst/>
+          </a:prstGeom>
+          <a:solidFill>
+            <a:srgbClr val="ECEEF1"/>
+          </a:solidFill>
+          <a:ln w="12700">
+            <a:solidFill>
+              <a:srgbClr val="8A8F98"/>
+            </a:solidFill>
+          </a:ln>
+          <a:effectLst/>
+        </p:spPr>
+        <p:style>
+          <a:lnRef idx="1">
+            <a:schemeClr val="accent1"/>
+          </a:lnRef>
+          <a:fillRef idx="3">
+            <a:schemeClr val="accent1"/>
+          </a:fillRef>
+          <a:effectRef idx="2">
+            <a:schemeClr val="accent1"/>
+          </a:effectRef>
+          <a:fontRef idx="minor">
+            <a:schemeClr val="lt1"/>
+          </a:fontRef>
+        </p:style>
+        <p:txBody>
+          <a:bodyPr rtlCol="0" anchor="ctr" wrap="square" lIns="38100" rIns="38100" tIns="25400" bIns="25400"/>
+          <a:lstStyle/>
+          <a:p>
+            <a:pPr algn="l"/>
+            <a:r>
+              <a:rPr sz="1100" b="1" i="0">
+                <a:solidFill>
+                  <a:srgbClr val="22252B"/>
+                </a:solidFill>
+                <a:latin typeface="Noto Sans CJK KR"/>
+              </a:rPr>
+              <a:t>읽는 법</a:t>
+            </a:r>
+          </a:p>
+          <a:p>
+            <a:pPr algn="l"/>
+            <a:r>
+              <a:rPr sz="1000" b="0" i="0">
+                <a:solidFill>
+                  <a:srgbClr val="22252B"/>
+                </a:solidFill>
+                <a:latin typeface="Noto Sans CJK KR"/>
+              </a:rPr>
+              <a:t>파란 줄기 = '어느 방향으로'(관성)를 고치는 흐름 · 초록 줄기 = '얼마나(보폭)'를 고치는 흐름. Adam이 둘을 합치고, AdamW가 정규화를 분리해 마무리. 다음 장부터 1페이지 1개씩 수식과 함께.</a:t>
+            </a:r>
+          </a:p>
+        </p:txBody>
+      </p:sp>
+    </p:spTree>
+  </p:cSld>
+  <p:clrMapOvr>
+    <a:masterClrMapping/>
+  </p:clrMapOvr>
+</p:sld>
+</file>
+
+<file path=ppt/slides/slide7.xml><?xml version="1.0" encoding="utf-8"?>
+<p:sld xmlns:a="http://schemas.openxmlformats.org/drawingml/2006/main" xmlns:p="http://schemas.openxmlformats.org/presentationml/2006/main" xmlns:r="http://schemas.openxmlformats.org/officeDocument/2006/relationships">
+  <p:cSld>
+    <p:spTree>
+      <p:nvGrpSpPr>
+        <p:cNvPr id="1" name=""/>
+        <p:cNvGrpSpPr/>
+        <p:nvPr/>
+      </p:nvGrpSpPr>
+      <p:grpSpPr/>
+      <p:sp>
+        <p:nvSpPr>
+          <p:cNvPr id="2" name="Rectangle 1"/>
+          <p:cNvSpPr/>
+          <p:nvPr/>
+        </p:nvSpPr>
+        <p:spPr>
+          <a:xfrm>
+            <a:off x="0" y="0"/>
+            <a:ext cx="12191695" cy="54864"/>
+          </a:xfrm>
+          <a:prstGeom prst="rect">
+            <a:avLst/>
+          </a:prstGeom>
+          <a:solidFill>
+            <a:srgbClr val="2A6F97"/>
+          </a:solidFill>
+          <a:ln w="12700">
+            <a:solidFill>
+              <a:srgbClr val="2A6F97"/>
+            </a:solidFill>
+          </a:ln>
+          <a:effectLst/>
+        </p:spPr>
+        <p:style>
+          <a:lnRef idx="1">
+            <a:schemeClr val="accent1"/>
+          </a:lnRef>
+          <a:fillRef idx="3">
+            <a:schemeClr val="accent1"/>
+          </a:fillRef>
+          <a:effectRef idx="2">
+            <a:schemeClr val="accent1"/>
+          </a:effectRef>
+          <a:fontRef idx="minor">
+            <a:schemeClr val="lt1"/>
+          </a:fontRef>
+        </p:style>
+        <p:txBody>
+          <a:bodyPr rtlCol="0" anchor="ctr" wrap="square" lIns="38100" rIns="38100" tIns="25400" bIns="25400"/>
+          <a:lstStyle/>
+          <a:p>
+            <a:pPr algn="ctr"/>
+            <a:r>
+              <a:rPr sz="1100" b="0" i="0">
+                <a:solidFill>
+                  <a:srgbClr val="22252B"/>
+                </a:solidFill>
+                <a:latin typeface="Noto Sans CJK KR"/>
+              </a:rPr>
+              <a:t/>
+            </a:r>
+          </a:p>
+        </p:txBody>
+      </p:sp>
+      <p:sp>
+        <p:nvSpPr>
+          <p:cNvPr id="3" name="TextBox 2"/>
+          <p:cNvSpPr txBox="1"/>
+          <p:nvPr/>
+        </p:nvSpPr>
+        <p:spPr>
+          <a:xfrm>
+            <a:off x="502920" y="164592"/>
+            <a:ext cx="11185855" cy="320040"/>
+          </a:xfrm>
+          <a:prstGeom prst="rect">
+            <a:avLst/>
+          </a:prstGeom>
+          <a:noFill/>
+        </p:spPr>
+        <p:txBody>
+          <a:bodyPr wrap="square" anchor="t" lIns="25400" rIns="25400" tIns="12700" bIns="12700">
+            <a:spAutoFit/>
+          </a:bodyPr>
+          <a:lstStyle/>
+          <a:p>
+            <a:pPr algn="l"/>
+            <a:r>
+              <a:rPr sz="1200" b="1" i="0">
+                <a:solidFill>
+                  <a:srgbClr val="2A6F97"/>
+                </a:solidFill>
+                <a:latin typeface="Noto Sans CJK KR"/>
+              </a:rPr>
+              <a:t>A2 · GD</a:t>
+            </a:r>
+          </a:p>
+        </p:txBody>
+      </p:sp>
+      <p:sp>
+        <p:nvSpPr>
+          <p:cNvPr id="4" name="TextBox 3"/>
+          <p:cNvSpPr txBox="1"/>
+          <p:nvPr/>
+        </p:nvSpPr>
+        <p:spPr>
+          <a:xfrm>
+            <a:off x="502920" y="457200"/>
+            <a:ext cx="11185855" cy="548640"/>
+          </a:xfrm>
+          <a:prstGeom prst="rect">
+            <a:avLst/>
+          </a:prstGeom>
+          <a:noFill/>
+        </p:spPr>
+        <p:txBody>
+          <a:bodyPr wrap="square" anchor="t" lIns="25400" rIns="25400" tIns="12700" bIns="12700">
+            <a:spAutoFit/>
+          </a:bodyPr>
+          <a:lstStyle/>
+          <a:p>
+            <a:pPr algn="l"/>
+            <a:r>
+              <a:rPr sz="2200" b="1" i="0">
+                <a:solidFill>
+                  <a:srgbClr val="22252B"/>
+                </a:solidFill>
+                <a:latin typeface="Noto Sans CJK KR"/>
+              </a:rPr>
+              <a:t>GD  ·  Gradient Descent (batch)</a:t>
+            </a:r>
+          </a:p>
+        </p:txBody>
+      </p:sp>
+      <p:sp>
+        <p:nvSpPr>
+          <p:cNvPr id="5" name="TextBox 4"/>
+          <p:cNvSpPr txBox="1"/>
+          <p:nvPr/>
+        </p:nvSpPr>
+        <p:spPr>
+          <a:xfrm>
+            <a:off x="502920" y="932688"/>
+            <a:ext cx="5486400" cy="274320"/>
+          </a:xfrm>
+          <a:prstGeom prst="rect">
+            <a:avLst/>
+          </a:prstGeom>
+          <a:noFill/>
+        </p:spPr>
+        <p:txBody>
+          <a:bodyPr wrap="square" anchor="t" lIns="25400" rIns="25400" tIns="12700" bIns="12700">
+            <a:spAutoFit/>
+          </a:bodyPr>
+          <a:lstStyle/>
+          <a:p>
+            <a:pPr algn="l"/>
+            <a:r>
+              <a:rPr sz="1100" b="1" i="0">
+                <a:solidFill>
+                  <a:srgbClr val="2A6F97"/>
+                </a:solidFill>
+                <a:latin typeface="Noto Sans CJK KR"/>
+              </a:rPr>
+              <a:t>뿌리 — 가장 정확한 한 걸음</a:t>
+            </a:r>
+          </a:p>
+        </p:txBody>
+      </p:sp>
+      <p:sp>
+        <p:nvSpPr>
+          <p:cNvPr id="6" name="Rounded Rectangle 5"/>
+          <p:cNvSpPr/>
+          <p:nvPr/>
+        </p:nvSpPr>
+        <p:spPr>
+          <a:xfrm>
+            <a:off x="502920" y="1298448"/>
+            <a:ext cx="11155680" cy="896112"/>
+          </a:xfrm>
+          <a:prstGeom prst="roundRect">
+            <a:avLst/>
+          </a:prstGeom>
+          <a:solidFill>
+            <a:srgbClr val="DBE7F3"/>
+          </a:solidFill>
+          <a:ln w="12700">
+            <a:solidFill>
+              <a:srgbClr val="2A6F97"/>
+            </a:solidFill>
+          </a:ln>
+          <a:effectLst/>
+        </p:spPr>
+        <p:style>
+          <a:lnRef idx="1">
+            <a:schemeClr val="accent1"/>
+          </a:lnRef>
+          <a:fillRef idx="3">
+            <a:schemeClr val="accent1"/>
+          </a:fillRef>
+          <a:effectRef idx="2">
+            <a:schemeClr val="accent1"/>
+          </a:effectRef>
+          <a:fontRef idx="minor">
+            <a:schemeClr val="lt1"/>
+          </a:fontRef>
+        </p:style>
+        <p:txBody>
+          <a:bodyPr rtlCol="0" anchor="ctr" wrap="square" lIns="38100" rIns="38100" tIns="25400" bIns="25400"/>
+          <a:lstStyle/>
+          <a:p>
+            <a:pPr algn="l"/>
+            <a:r>
+              <a:rPr sz="1150" b="1" i="0">
+                <a:solidFill>
+                  <a:srgbClr val="2A6F97"/>
+                </a:solidFill>
+                <a:latin typeface="Noto Sans CJK KR"/>
+              </a:rPr>
+              <a:t>직관 (왜 이렇게?)</a:t>
+            </a:r>
+          </a:p>
+          <a:p>
+            <a:pPr algn="l"/>
+            <a:r>
+              <a:rPr sz="1250" b="0" i="0">
+                <a:solidFill>
+                  <a:srgbClr val="22252B"/>
+                </a:solidFill>
+                <a:latin typeface="Noto Sans CJK KR"/>
+              </a:rPr>
+              <a:t>"모든 자료를 다 검토해서, 내 위치의 산 기울기를 계산해 갈 방향을 찾았다."</a:t>
+            </a:r>
+          </a:p>
+        </p:txBody>
+      </p:sp>
+      <p:sp>
+        <p:nvSpPr>
+          <p:cNvPr id="7" name="Rounded Rectangle 6"/>
+          <p:cNvSpPr/>
+          <p:nvPr/>
+        </p:nvSpPr>
+        <p:spPr>
+          <a:xfrm>
+            <a:off x="502920" y="2377440"/>
+            <a:ext cx="11155680" cy="2148840"/>
+          </a:xfrm>
+          <a:prstGeom prst="roundRect">
+            <a:avLst/>
+          </a:prstGeom>
+          <a:solidFill>
+            <a:srgbClr val="FFFFFF"/>
+          </a:solidFill>
+          <a:ln w="12700">
+            <a:solidFill>
+              <a:srgbClr val="8A8F98"/>
+            </a:solidFill>
+          </a:ln>
+          <a:effectLst/>
+        </p:spPr>
+        <p:style>
+          <a:lnRef idx="1">
+            <a:schemeClr val="accent1"/>
+          </a:lnRef>
+          <a:fillRef idx="3">
+            <a:schemeClr val="accent1"/>
+          </a:fillRef>
+          <a:effectRef idx="2">
+            <a:schemeClr val="accent1"/>
+          </a:effectRef>
+          <a:fontRef idx="minor">
+            <a:schemeClr val="lt1"/>
+          </a:fontRef>
+        </p:style>
+        <p:txBody>
+          <a:bodyPr rtlCol="0" anchor="ctr" wrap="square" lIns="38100" rIns="38100" tIns="25400" bIns="25400"/>
+          <a:lstStyle/>
+          <a:p>
+            <a:pPr algn="l"/>
+            <a:r>
+              <a:rPr sz="1150" b="1" i="0">
+                <a:solidFill>
+                  <a:srgbClr val="22252B"/>
+                </a:solidFill>
+                <a:latin typeface="Noto Sans CJK KR"/>
+              </a:rPr>
+              <a:t>갱신 규칙 (수식)</a:t>
+            </a:r>
+          </a:p>
+          <a:p>
+            <a:pPr algn="l"/>
+            <a:r>
+              <a:rPr sz="1250" b="0" i="0">
+                <a:solidFill>
+                  <a:srgbClr val="22252B"/>
+                </a:solidFill>
+                <a:latin typeface="Noto Sans Mono CJK KR"/>
+              </a:rPr>
+              <a:t>g_t = (1/N) · Σ_{i=1..N} ∇ℓ_i(θ_t)      # 전체 N개 데이터의 평균 gradient</a:t>
+            </a:r>
+          </a:p>
+          <a:p>
+            <a:pPr algn="l"/>
+            <a:r>
+              <a:rPr sz="1250" b="0" i="0">
+                <a:solidFill>
+                  <a:srgbClr val="22252B"/>
+                </a:solidFill>
+                <a:latin typeface="Noto Sans Mono CJK KR"/>
+              </a:rPr>
+              <a:t>θ_{t+1} = θ_t − η · g_t                  # η = learning rate(보폭)</a:t>
+            </a:r>
+          </a:p>
+        </p:txBody>
+      </p:sp>
+      <p:sp>
+        <p:nvSpPr>
+          <p:cNvPr id="8" name="Rounded Rectangle 7"/>
+          <p:cNvSpPr/>
+          <p:nvPr/>
+        </p:nvSpPr>
+        <p:spPr>
+          <a:xfrm>
+            <a:off x="502920" y="4709160"/>
+            <a:ext cx="5486400" cy="1737360"/>
+          </a:xfrm>
+          <a:prstGeom prst="roundRect">
+            <a:avLst/>
+          </a:prstGeom>
+          <a:solidFill>
+            <a:srgbClr val="DAF0ED"/>
+          </a:solidFill>
+          <a:ln w="12700">
+            <a:solidFill>
+              <a:srgbClr val="2A9D8F"/>
+            </a:solidFill>
+          </a:ln>
+          <a:effectLst/>
+        </p:spPr>
+        <p:style>
+          <a:lnRef idx="1">
+            <a:schemeClr val="accent1"/>
+          </a:lnRef>
+          <a:fillRef idx="3">
+            <a:schemeClr val="accent1"/>
+          </a:fillRef>
+          <a:effectRef idx="2">
+            <a:schemeClr val="accent1"/>
+          </a:effectRef>
+          <a:fontRef idx="minor">
+            <a:schemeClr val="lt1"/>
+          </a:fontRef>
+        </p:style>
+        <p:txBody>
+          <a:bodyPr rtlCol="0" anchor="ctr" wrap="square" lIns="38100" rIns="38100" tIns="25400" bIns="25400"/>
+          <a:lstStyle/>
+          <a:p>
+            <a:pPr algn="l"/>
+            <a:r>
+              <a:rPr sz="1150" b="1" i="0">
+                <a:solidFill>
+                  <a:srgbClr val="2A9D8F"/>
+                </a:solidFill>
+                <a:latin typeface="Noto Sans CJK KR"/>
+              </a:rPr>
+              <a:t>이 optimizer가 해결한 것</a:t>
+            </a:r>
+          </a:p>
+          <a:p>
+            <a:pPr algn="l"/>
+            <a:r>
+              <a:rPr sz="1150" b="0" i="0">
+                <a:solidFill>
+                  <a:srgbClr val="22252B"/>
+                </a:solidFill>
+                <a:latin typeface="Noto Sans CJK KR"/>
+              </a:rPr>
+              <a:t>손실을 가장 빨리 줄이는 방향(가장 가파른 내리막)을 데이터 전체로 정확히 계산한다.</a:t>
+            </a:r>
+          </a:p>
+        </p:txBody>
+      </p:sp>
+      <p:sp>
+        <p:nvSpPr>
+          <p:cNvPr id="9" name="Rounded Rectangle 8"/>
+          <p:cNvSpPr/>
+          <p:nvPr/>
+        </p:nvSpPr>
+        <p:spPr>
+          <a:xfrm>
+            <a:off x="6172200" y="4709160"/>
+            <a:ext cx="5486400" cy="1737360"/>
+          </a:xfrm>
+          <a:prstGeom prst="roundRect">
+            <a:avLst/>
+          </a:prstGeom>
+          <a:solidFill>
+            <a:srgbClr val="F6DDDD"/>
+          </a:solidFill>
+          <a:ln w="12700">
+            <a:solidFill>
+              <a:srgbClr val="C1121F"/>
+            </a:solidFill>
+          </a:ln>
+          <a:effectLst/>
+        </p:spPr>
+        <p:style>
+          <a:lnRef idx="1">
+            <a:schemeClr val="accent1"/>
+          </a:lnRef>
+          <a:fillRef idx="3">
+            <a:schemeClr val="accent1"/>
+          </a:fillRef>
+          <a:effectRef idx="2">
+            <a:schemeClr val="accent1"/>
+          </a:effectRef>
+          <a:fontRef idx="minor">
+            <a:schemeClr val="lt1"/>
+          </a:fontRef>
+        </p:style>
+        <p:txBody>
+          <a:bodyPr rtlCol="0" anchor="ctr" wrap="square" lIns="38100" rIns="38100" tIns="25400" bIns="25400"/>
+          <a:lstStyle/>
+          <a:p>
+            <a:pPr algn="l"/>
+            <a:r>
+              <a:rPr sz="1150" b="1" i="0">
+                <a:solidFill>
+                  <a:srgbClr val="C1121F"/>
+                </a:solidFill>
+                <a:latin typeface="Noto Sans CJK KR"/>
+              </a:rPr>
+              <a:t>남은 문제 → 다음</a:t>
+            </a:r>
+          </a:p>
+          <a:p>
+            <a:pPr algn="l"/>
+            <a:r>
+              <a:rPr sz="1150" b="0" i="0">
+                <a:solidFill>
+                  <a:srgbClr val="22252B"/>
+                </a:solidFill>
+                <a:latin typeface="Noto Sans CJK KR"/>
+              </a:rPr>
+              <a:t>한 스텝마다 데이터 N개를 전부 봐야 함 → 너무 느리다.  → SGD</a:t>
+            </a:r>
+          </a:p>
+        </p:txBody>
+      </p:sp>
+    </p:spTree>
+  </p:cSld>
+  <p:clrMapOvr>
+    <a:masterClrMapping/>
+  </p:clrMapOvr>
+</p:sld>
+</file>
+
+<file path=ppt/slides/slide8.xml><?xml version="1.0" encoding="utf-8"?>
+<p:sld xmlns:a="http://schemas.openxmlformats.org/drawingml/2006/main" xmlns:p="http://schemas.openxmlformats.org/presentationml/2006/main" xmlns:r="http://schemas.openxmlformats.org/officeDocument/2006/relationships">
+  <p:cSld>
+    <p:spTree>
+      <p:nvGrpSpPr>
+        <p:cNvPr id="1" name=""/>
+        <p:cNvGrpSpPr/>
+        <p:nvPr/>
+      </p:nvGrpSpPr>
+      <p:grpSpPr/>
+      <p:sp>
+        <p:nvSpPr>
+          <p:cNvPr id="2" name="Rectangle 1"/>
+          <p:cNvSpPr/>
+          <p:nvPr/>
+        </p:nvSpPr>
+        <p:spPr>
+          <a:xfrm>
+            <a:off x="0" y="0"/>
+            <a:ext cx="12191695" cy="54864"/>
+          </a:xfrm>
+          <a:prstGeom prst="rect">
+            <a:avLst/>
+          </a:prstGeom>
+          <a:solidFill>
+            <a:srgbClr val="2A6F97"/>
+          </a:solidFill>
+          <a:ln w="12700">
+            <a:solidFill>
+              <a:srgbClr val="2A6F97"/>
+            </a:solidFill>
+          </a:ln>
+          <a:effectLst/>
+        </p:spPr>
+        <p:style>
+          <a:lnRef idx="1">
+            <a:schemeClr val="accent1"/>
+          </a:lnRef>
+          <a:fillRef idx="3">
+            <a:schemeClr val="accent1"/>
+          </a:fillRef>
+          <a:effectRef idx="2">
+            <a:schemeClr val="accent1"/>
+          </a:effectRef>
+          <a:fontRef idx="minor">
+            <a:schemeClr val="lt1"/>
+          </a:fontRef>
+        </p:style>
+        <p:txBody>
+          <a:bodyPr rtlCol="0" anchor="ctr" wrap="square" lIns="38100" rIns="38100" tIns="25400" bIns="25400"/>
+          <a:lstStyle/>
+          <a:p>
+            <a:pPr algn="ctr"/>
+            <a:r>
+              <a:rPr sz="1100" b="0" i="0">
+                <a:solidFill>
+                  <a:srgbClr val="22252B"/>
+                </a:solidFill>
+                <a:latin typeface="Noto Sans CJK KR"/>
+              </a:rPr>
+              <a:t/>
+            </a:r>
+          </a:p>
+        </p:txBody>
+      </p:sp>
+      <p:sp>
+        <p:nvSpPr>
+          <p:cNvPr id="3" name="TextBox 2"/>
+          <p:cNvSpPr txBox="1"/>
+          <p:nvPr/>
+        </p:nvSpPr>
+        <p:spPr>
+          <a:xfrm>
+            <a:off x="502920" y="164592"/>
+            <a:ext cx="11185855" cy="320040"/>
+          </a:xfrm>
+          <a:prstGeom prst="rect">
+            <a:avLst/>
+          </a:prstGeom>
+          <a:noFill/>
+        </p:spPr>
+        <p:txBody>
+          <a:bodyPr wrap="square" anchor="t" lIns="25400" rIns="25400" tIns="12700" bIns="12700">
+            <a:spAutoFit/>
+          </a:bodyPr>
+          <a:lstStyle/>
+          <a:p>
+            <a:pPr algn="l"/>
+            <a:r>
+              <a:rPr sz="1200" b="1" i="0">
+                <a:solidFill>
+                  <a:srgbClr val="2A6F97"/>
+                </a:solidFill>
+                <a:latin typeface="Noto Sans CJK KR"/>
+              </a:rPr>
+              <a:t>A2 · SGD</a:t>
+            </a:r>
+          </a:p>
+        </p:txBody>
+      </p:sp>
+      <p:sp>
+        <p:nvSpPr>
+          <p:cNvPr id="4" name="TextBox 3"/>
+          <p:cNvSpPr txBox="1"/>
+          <p:nvPr/>
+        </p:nvSpPr>
+        <p:spPr>
+          <a:xfrm>
+            <a:off x="502920" y="457200"/>
+            <a:ext cx="11185855" cy="548640"/>
+          </a:xfrm>
+          <a:prstGeom prst="rect">
+            <a:avLst/>
+          </a:prstGeom>
+          <a:noFill/>
+        </p:spPr>
+        <p:txBody>
+          <a:bodyPr wrap="square" anchor="t" lIns="25400" rIns="25400" tIns="12700" bIns="12700">
+            <a:spAutoFit/>
+          </a:bodyPr>
+          <a:lstStyle/>
+          <a:p>
+            <a:pPr algn="l"/>
+            <a:r>
+              <a:rPr sz="2200" b="1" i="0">
+                <a:solidFill>
+                  <a:srgbClr val="22252B"/>
+                </a:solidFill>
+                <a:latin typeface="Noto Sans CJK KR"/>
+              </a:rPr>
+              <a:t>SGD  ·  Stochastic Gradient Descent</a:t>
+            </a:r>
+          </a:p>
+        </p:txBody>
+      </p:sp>
+      <p:sp>
+        <p:nvSpPr>
+          <p:cNvPr id="5" name="TextBox 4"/>
+          <p:cNvSpPr txBox="1"/>
+          <p:nvPr/>
+        </p:nvSpPr>
+        <p:spPr>
+          <a:xfrm>
+            <a:off x="502920" y="932688"/>
+            <a:ext cx="5486400" cy="274320"/>
+          </a:xfrm>
+          <a:prstGeom prst="rect">
+            <a:avLst/>
+          </a:prstGeom>
+          <a:noFill/>
+        </p:spPr>
+        <p:txBody>
+          <a:bodyPr wrap="square" anchor="t" lIns="25400" rIns="25400" tIns="12700" bIns="12700">
+            <a:spAutoFit/>
+          </a:bodyPr>
+          <a:lstStyle/>
+          <a:p>
+            <a:pPr algn="l"/>
+            <a:r>
+              <a:rPr sz="1100" b="1" i="0">
+                <a:solidFill>
+                  <a:srgbClr val="2A6F97"/>
+                </a:solidFill>
+                <a:latin typeface="Noto Sans CJK KR"/>
+              </a:rPr>
+              <a:t>파란 줄기 — 속도</a:t>
+            </a:r>
+          </a:p>
+        </p:txBody>
+      </p:sp>
+      <p:sp>
+        <p:nvSpPr>
+          <p:cNvPr id="6" name="Rounded Rectangle 5"/>
+          <p:cNvSpPr/>
+          <p:nvPr/>
+        </p:nvSpPr>
+        <p:spPr>
+          <a:xfrm>
+            <a:off x="502920" y="1298448"/>
+            <a:ext cx="11155680" cy="896112"/>
+          </a:xfrm>
+          <a:prstGeom prst="roundRect">
+            <a:avLst/>
+          </a:prstGeom>
+          <a:solidFill>
+            <a:srgbClr val="DBE7F3"/>
+          </a:solidFill>
+          <a:ln w="12700">
+            <a:solidFill>
+              <a:srgbClr val="2A6F97"/>
+            </a:solidFill>
+          </a:ln>
+          <a:effectLst/>
+        </p:spPr>
+        <p:style>
+          <a:lnRef idx="1">
+            <a:schemeClr val="accent1"/>
+          </a:lnRef>
+          <a:fillRef idx="3">
+            <a:schemeClr val="accent1"/>
+          </a:fillRef>
+          <a:effectRef idx="2">
+            <a:schemeClr val="accent1"/>
+          </a:effectRef>
+          <a:fontRef idx="minor">
+            <a:schemeClr val="lt1"/>
+          </a:fontRef>
+        </p:style>
+        <p:txBody>
+          <a:bodyPr rtlCol="0" anchor="ctr" wrap="square" lIns="38100" rIns="38100" tIns="25400" bIns="25400"/>
+          <a:lstStyle/>
+          <a:p>
+            <a:pPr algn="l"/>
+            <a:r>
+              <a:rPr sz="1150" b="1" i="0">
+                <a:solidFill>
+                  <a:srgbClr val="2A6F97"/>
+                </a:solidFill>
+                <a:latin typeface="Noto Sans CJK KR"/>
+              </a:rPr>
+              <a:t>직관 (왜 이렇게?)</a:t>
+            </a:r>
+          </a:p>
+          <a:p>
+            <a:pPr algn="l"/>
+            <a:r>
+              <a:rPr sz="1250" b="0" i="0">
+                <a:solidFill>
+                  <a:srgbClr val="22252B"/>
+                </a:solidFill>
+                <a:latin typeface="Noto Sans CJK KR"/>
+              </a:rPr>
+              <a:t>"전부 다 봐야 한 걸음은 너무 오래 걸리니까, 조금만 보고 빨리 판단한다. 같은 시간에 더 많이 간다."</a:t>
+            </a:r>
+          </a:p>
+        </p:txBody>
+      </p:sp>
+      <p:sp>
+        <p:nvSpPr>
+          <p:cNvPr id="7" name="Rounded Rectangle 6"/>
+          <p:cNvSpPr/>
+          <p:nvPr/>
+        </p:nvSpPr>
+        <p:spPr>
+          <a:xfrm>
+            <a:off x="502920" y="2377440"/>
+            <a:ext cx="11155680" cy="2148840"/>
+          </a:xfrm>
+          <a:prstGeom prst="roundRect">
+            <a:avLst/>
+          </a:prstGeom>
+          <a:solidFill>
+            <a:srgbClr val="FFFFFF"/>
+          </a:solidFill>
+          <a:ln w="12700">
+            <a:solidFill>
+              <a:srgbClr val="8A8F98"/>
+            </a:solidFill>
+          </a:ln>
+          <a:effectLst/>
+        </p:spPr>
+        <p:style>
+          <a:lnRef idx="1">
+            <a:schemeClr val="accent1"/>
+          </a:lnRef>
+          <a:fillRef idx="3">
+            <a:schemeClr val="accent1"/>
+          </a:fillRef>
+          <a:effectRef idx="2">
+            <a:schemeClr val="accent1"/>
+          </a:effectRef>
+          <a:fontRef idx="minor">
+            <a:schemeClr val="lt1"/>
+          </a:fontRef>
+        </p:style>
+        <p:txBody>
+          <a:bodyPr rtlCol="0" anchor="ctr" wrap="square" lIns="38100" rIns="38100" tIns="25400" bIns="25400"/>
+          <a:lstStyle/>
+          <a:p>
+            <a:pPr algn="l"/>
+            <a:r>
+              <a:rPr sz="1150" b="1" i="0">
+                <a:solidFill>
+                  <a:srgbClr val="22252B"/>
+                </a:solidFill>
+                <a:latin typeface="Noto Sans CJK KR"/>
+              </a:rPr>
+              <a:t>갱신 규칙 (수식)</a:t>
+            </a:r>
+          </a:p>
+          <a:p>
+            <a:pPr algn="l"/>
+            <a:r>
+              <a:rPr sz="1250" b="0" i="0">
+                <a:solidFill>
+                  <a:srgbClr val="22252B"/>
+                </a:solidFill>
+                <a:latin typeface="Noto Sans Mono CJK KR"/>
+              </a:rPr>
+              <a:t>g_t = ∇ℓ_B(θ_t)          # 미니배치 B개만 사용 (|B| ≪ N)</a:t>
+            </a:r>
+          </a:p>
+          <a:p>
+            <a:pPr algn="l"/>
+            <a:r>
+              <a:rPr sz="1250" b="0" i="0">
+                <a:solidFill>
+                  <a:srgbClr val="22252B"/>
+                </a:solidFill>
+                <a:latin typeface="Noto Sans Mono CJK KR"/>
+              </a:rPr>
+              <a:t>θ_{t+1} = θ_t − η · g_t</a:t>
+            </a:r>
+          </a:p>
+        </p:txBody>
+      </p:sp>
+      <p:sp>
+        <p:nvSpPr>
+          <p:cNvPr id="8" name="Rounded Rectangle 7"/>
+          <p:cNvSpPr/>
+          <p:nvPr/>
+        </p:nvSpPr>
+        <p:spPr>
+          <a:xfrm>
+            <a:off x="502920" y="4709160"/>
+            <a:ext cx="5486400" cy="1737360"/>
+          </a:xfrm>
+          <a:prstGeom prst="roundRect">
+            <a:avLst/>
+          </a:prstGeom>
+          <a:solidFill>
+            <a:srgbClr val="DAF0ED"/>
+          </a:solidFill>
+          <a:ln w="12700">
+            <a:solidFill>
+              <a:srgbClr val="2A9D8F"/>
+            </a:solidFill>
+          </a:ln>
+          <a:effectLst/>
+        </p:spPr>
+        <p:style>
+          <a:lnRef idx="1">
+            <a:schemeClr val="accent1"/>
+          </a:lnRef>
+          <a:fillRef idx="3">
+            <a:schemeClr val="accent1"/>
+          </a:fillRef>
+          <a:effectRef idx="2">
+            <a:schemeClr val="accent1"/>
+          </a:effectRef>
+          <a:fontRef idx="minor">
+            <a:schemeClr val="lt1"/>
+          </a:fontRef>
+        </p:style>
+        <p:txBody>
+          <a:bodyPr rtlCol="0" anchor="ctr" wrap="square" lIns="38100" rIns="38100" tIns="25400" bIns="25400"/>
+          <a:lstStyle/>
+          <a:p>
+            <a:pPr algn="l"/>
+            <a:r>
+              <a:rPr sz="1150" b="1" i="0">
+                <a:solidFill>
+                  <a:srgbClr val="2A9D8F"/>
+                </a:solidFill>
+                <a:latin typeface="Noto Sans CJK KR"/>
+              </a:rPr>
+              <a:t>이 optimizer가 해결한 것</a:t>
+            </a:r>
+          </a:p>
+          <a:p>
+            <a:pPr algn="l"/>
+            <a:r>
+              <a:rPr sz="1150" b="0" i="0">
+                <a:solidFill>
+                  <a:srgbClr val="22252B"/>
+                </a:solidFill>
+                <a:latin typeface="Noto Sans CJK KR"/>
+              </a:rPr>
+              <a:t>스텝당 비용이 급감 → 같은 시간에 훨씬 많은 스텝. gradient noise가 얕은 지역최소 탈출에도 도움.</a:t>
+            </a:r>
+          </a:p>
+        </p:txBody>
+      </p:sp>
+      <p:sp>
+        <p:nvSpPr>
+          <p:cNvPr id="9" name="Rounded Rectangle 8"/>
+          <p:cNvSpPr/>
+          <p:nvPr/>
+        </p:nvSpPr>
+        <p:spPr>
+          <a:xfrm>
+            <a:off x="6172200" y="4709160"/>
+            <a:ext cx="5486400" cy="1737360"/>
+          </a:xfrm>
+          <a:prstGeom prst="roundRect">
+            <a:avLst/>
+          </a:prstGeom>
+          <a:solidFill>
+            <a:srgbClr val="F6DDDD"/>
+          </a:solidFill>
+          <a:ln w="12700">
+            <a:solidFill>
+              <a:srgbClr val="C1121F"/>
+            </a:solidFill>
+          </a:ln>
+          <a:effectLst/>
+        </p:spPr>
+        <p:style>
+          <a:lnRef idx="1">
+            <a:schemeClr val="accent1"/>
+          </a:lnRef>
+          <a:fillRef idx="3">
+            <a:schemeClr val="accent1"/>
+          </a:fillRef>
+          <a:effectRef idx="2">
+            <a:schemeClr val="accent1"/>
+          </a:effectRef>
+          <a:fontRef idx="minor">
+            <a:schemeClr val="lt1"/>
+          </a:fontRef>
+        </p:style>
+        <p:txBody>
+          <a:bodyPr rtlCol="0" anchor="ctr" wrap="square" lIns="38100" rIns="38100" tIns="25400" bIns="25400"/>
+          <a:lstStyle/>
+          <a:p>
+            <a:pPr algn="l"/>
+            <a:r>
+              <a:rPr sz="1150" b="1" i="0">
+                <a:solidFill>
+                  <a:srgbClr val="C1121F"/>
+                </a:solidFill>
+                <a:latin typeface="Noto Sans CJK KR"/>
+              </a:rPr>
+              <a:t>남은 문제 → 다음</a:t>
+            </a:r>
+          </a:p>
+          <a:p>
+            <a:pPr algn="l"/>
+            <a:r>
+              <a:rPr sz="1150" b="0" i="0">
+                <a:solidFill>
+                  <a:srgbClr val="22252B"/>
+                </a:solidFill>
+                <a:latin typeface="Noto Sans CJK KR"/>
+              </a:rPr>
+              <a:t>gradient가 매 스텝 출렁여 지그재그. 방향도 보폭도 여전히 그대로.  → Momentum · Adagrad</a:t>
+            </a:r>
+          </a:p>
+        </p:txBody>
+      </p:sp>
+    </p:spTree>
+  </p:cSld>
+  <p:clrMapOvr>
+    <a:masterClrMapping/>
+  </p:clrMapOvr>
+</p:sld>
+</file>
+
+<file path=ppt/slides/slide9.xml><?xml version="1.0" encoding="utf-8"?>
+<p:sld xmlns:a="http://schemas.openxmlformats.org/drawingml/2006/main" xmlns:p="http://schemas.openxmlformats.org/presentationml/2006/main" xmlns:r="http://schemas.openxmlformats.org/officeDocument/2006/relationships">
+  <p:cSld>
+    <p:spTree>
+      <p:nvGrpSpPr>
+        <p:cNvPr id="1" name=""/>
+        <p:cNvGrpSpPr/>
+        <p:nvPr/>
+      </p:nvGrpSpPr>
+      <p:grpSpPr/>
+      <p:sp>
+        <p:nvSpPr>
+          <p:cNvPr id="2" name="Rectangle 1"/>
+          <p:cNvSpPr/>
+          <p:nvPr/>
+        </p:nvSpPr>
+        <p:spPr>
+          <a:xfrm>
+            <a:off x="0" y="0"/>
+            <a:ext cx="12191695" cy="54864"/>
+          </a:xfrm>
+          <a:prstGeom prst="rect">
+            <a:avLst/>
+          </a:prstGeom>
+          <a:solidFill>
+            <a:srgbClr val="2A6F97"/>
+          </a:solidFill>
+          <a:ln w="12700">
+            <a:solidFill>
+              <a:srgbClr val="2A6F97"/>
+            </a:solidFill>
+          </a:ln>
+          <a:effectLst/>
+        </p:spPr>
+        <p:style>
+          <a:lnRef idx="1">
+            <a:schemeClr val="accent1"/>
+          </a:lnRef>
+          <a:fillRef idx="3">
+            <a:schemeClr val="accent1"/>
+          </a:fillRef>
+          <a:effectRef idx="2">
+            <a:schemeClr val="accent1"/>
+          </a:effectRef>
+          <a:fontRef idx="minor">
+            <a:schemeClr val="lt1"/>
+          </a:fontRef>
+        </p:style>
+        <p:txBody>
+          <a:bodyPr rtlCol="0" anchor="ctr" wrap="square" lIns="38100" rIns="38100" tIns="25400" bIns="25400"/>
+          <a:lstStyle/>
+          <a:p>
+            <a:pPr algn="ctr"/>
+            <a:r>
+              <a:rPr sz="1100" b="0" i="0">
+                <a:solidFill>
+                  <a:srgbClr val="22252B"/>
+                </a:solidFill>
+                <a:latin typeface="Noto Sans CJK KR"/>
+              </a:rPr>
+              <a:t/>
+            </a:r>
+          </a:p>
+        </p:txBody>
+      </p:sp>
+      <p:sp>
+        <p:nvSpPr>
+          <p:cNvPr id="3" name="TextBox 2"/>
+          <p:cNvSpPr txBox="1"/>
+          <p:nvPr/>
+        </p:nvSpPr>
+        <p:spPr>
+          <a:xfrm>
+            <a:off x="502920" y="164592"/>
+            <a:ext cx="11185855" cy="320040"/>
+          </a:xfrm>
+          <a:prstGeom prst="rect">
+            <a:avLst/>
+          </a:prstGeom>
+          <a:noFill/>
+        </p:spPr>
+        <p:txBody>
+          <a:bodyPr wrap="square" anchor="t" lIns="25400" rIns="25400" tIns="12700" bIns="12700">
+            <a:spAutoFit/>
+          </a:bodyPr>
+          <a:lstStyle/>
+          <a:p>
+            <a:pPr algn="l"/>
+            <a:r>
+              <a:rPr sz="1200" b="1" i="0">
+                <a:solidFill>
+                  <a:srgbClr val="2A6F97"/>
+                </a:solidFill>
+                <a:latin typeface="Noto Sans CJK KR"/>
+              </a:rPr>
+              <a:t>A2 · Momentum</a:t>
+            </a:r>
+          </a:p>
+        </p:txBody>
+      </p:sp>
+      <p:sp>
+        <p:nvSpPr>
+          <p:cNvPr id="4" name="TextBox 3"/>
+          <p:cNvSpPr txBox="1"/>
+          <p:nvPr/>
+        </p:nvSpPr>
+        <p:spPr>
+          <a:xfrm>
+            <a:off x="502920" y="457200"/>
+            <a:ext cx="11185855" cy="548640"/>
+          </a:xfrm>
+          <a:prstGeom prst="rect">
+            <a:avLst/>
+          </a:prstGeom>
+          <a:noFill/>
+        </p:spPr>
+        <p:txBody>
+          <a:bodyPr wrap="square" anchor="t" lIns="25400" rIns="25400" tIns="12700" bIns="12700">
+            <a:spAutoFit/>
+          </a:bodyPr>
+          <a:lstStyle/>
+          <a:p>
+            <a:pPr algn="l"/>
+            <a:r>
+              <a:rPr sz="2200" b="1" i="0">
+                <a:solidFill>
+                  <a:srgbClr val="22252B"/>
+                </a:solidFill>
+                <a:latin typeface="Noto Sans CJK KR"/>
+              </a:rPr>
+              <a:t>Momentum  ·  SGD with Momentum</a:t>
+            </a:r>
+          </a:p>
+        </p:txBody>
+      </p:sp>
+      <p:sp>
+        <p:nvSpPr>
+          <p:cNvPr id="5" name="TextBox 4"/>
+          <p:cNvSpPr txBox="1"/>
+          <p:nvPr/>
+        </p:nvSpPr>
+        <p:spPr>
+          <a:xfrm>
+            <a:off x="502920" y="932688"/>
+            <a:ext cx="5486400" cy="274320"/>
+          </a:xfrm>
+          <a:prstGeom prst="rect">
+            <a:avLst/>
+          </a:prstGeom>
+          <a:noFill/>
+        </p:spPr>
+        <p:txBody>
+          <a:bodyPr wrap="square" anchor="t" lIns="25400" rIns="25400" tIns="12700" bIns="12700">
+            <a:spAutoFit/>
+          </a:bodyPr>
+          <a:lstStyle/>
+          <a:p>
+            <a:pPr algn="l"/>
+            <a:r>
+              <a:rPr sz="1100" b="1" i="0">
+                <a:solidFill>
+                  <a:srgbClr val="2A6F97"/>
+                </a:solidFill>
+                <a:latin typeface="Noto Sans CJK KR"/>
+              </a:rPr>
+              <a:t>파란 줄기 — '스텝 방향' 개선</a:t>
+            </a:r>
+          </a:p>
+        </p:txBody>
+      </p:sp>
+      <p:sp>
+        <p:nvSpPr>
+          <p:cNvPr id="6" name="Rounded Rectangle 5"/>
+          <p:cNvSpPr/>
+          <p:nvPr/>
+        </p:nvSpPr>
+        <p:spPr>
+          <a:xfrm>
+            <a:off x="502920" y="1298448"/>
+            <a:ext cx="11155680" cy="896112"/>
+          </a:xfrm>
+          <a:prstGeom prst="roundRect">
+            <a:avLst/>
+          </a:prstGeom>
+          <a:solidFill>
+            <a:srgbClr val="DBE7F3"/>
+          </a:solidFill>
+          <a:ln w="12700">
+            <a:solidFill>
+              <a:srgbClr val="2A6F97"/>
+            </a:solidFill>
+          </a:ln>
+          <a:effectLst/>
+        </p:spPr>
+        <p:style>
+          <a:lnRef idx="1">
+            <a:schemeClr val="accent1"/>
+          </a:lnRef>
+          <a:fillRef idx="3">
+            <a:schemeClr val="accent1"/>
+          </a:fillRef>
+          <a:effectRef idx="2">
+            <a:schemeClr val="accent1"/>
+          </a:effectRef>
+          <a:fontRef idx="minor">
+            <a:schemeClr val="lt1"/>
+          </a:fontRef>
+        </p:style>
+        <p:txBody>
+          <a:bodyPr rtlCol="0" anchor="ctr" wrap="square" lIns="38100" rIns="38100" tIns="25400" bIns="25400"/>
+          <a:lstStyle/>
+          <a:p>
+            <a:pPr algn="l"/>
+            <a:r>
+              <a:rPr sz="1150" b="1" i="0">
+                <a:solidFill>
+                  <a:srgbClr val="2A6F97"/>
+                </a:solidFill>
+                <a:latin typeface="Noto Sans CJK KR"/>
+              </a:rPr>
+              <a:t>직관 (왜 이렇게?)</a:t>
+            </a:r>
+          </a:p>
+          <a:p>
+            <a:pPr algn="l"/>
+            <a:r>
+              <a:rPr sz="1250" b="0" i="0">
+                <a:solidFill>
+                  <a:srgbClr val="22252B"/>
+                </a:solidFill>
+                <a:latin typeface="Noto Sans CJK KR"/>
+              </a:rPr>
+              <a:t>"스텝을 계산해서 움직인 후, 아까 내려오던 관성 방향으로 또 가자."</a:t>
+            </a:r>
+          </a:p>
+        </p:txBody>
+      </p:sp>
+      <p:sp>
+        <p:nvSpPr>
+          <p:cNvPr id="7" name="Rounded Rectangle 6"/>
+          <p:cNvSpPr/>
+          <p:nvPr/>
+        </p:nvSpPr>
+        <p:spPr>
+          <a:xfrm>
+            <a:off x="502920" y="2377440"/>
+            <a:ext cx="11155680" cy="2148840"/>
+          </a:xfrm>
+          <a:prstGeom prst="roundRect">
+            <a:avLst/>
+          </a:prstGeom>
+          <a:solidFill>
+            <a:srgbClr val="FFFFFF"/>
+          </a:solidFill>
+          <a:ln w="12700">
+            <a:solidFill>
+              <a:srgbClr val="8A8F98"/>
+            </a:solidFill>
+          </a:ln>
+          <a:effectLst/>
+        </p:spPr>
+        <p:style>
+          <a:lnRef idx="1">
+            <a:schemeClr val="accent1"/>
+          </a:lnRef>
+          <a:fillRef idx="3">
+            <a:schemeClr val="accent1"/>
+          </a:fillRef>
+          <a:effectRef idx="2">
+            <a:schemeClr val="accent1"/>
+          </a:effectRef>
+          <a:fontRef idx="minor">
+            <a:schemeClr val="lt1"/>
+          </a:fontRef>
+        </p:style>
+        <p:txBody>
+          <a:bodyPr rtlCol="0" anchor="ctr" wrap="square" lIns="38100" rIns="38100" tIns="25400" bIns="25400"/>
+          <a:lstStyle/>
+          <a:p>
+            <a:pPr algn="l"/>
+            <a:r>
+              <a:rPr sz="1150" b="1" i="0">
+                <a:solidFill>
+                  <a:srgbClr val="22252B"/>
+                </a:solidFill>
+                <a:latin typeface="Noto Sans CJK KR"/>
+              </a:rPr>
+              <a:t>갱신 규칙 (수식)</a:t>
+            </a:r>
+          </a:p>
+          <a:p>
+            <a:pPr algn="l"/>
+            <a:r>
+              <a:rPr sz="1250" b="0" i="0">
+                <a:solidFill>
+                  <a:srgbClr val="22252B"/>
+                </a:solidFill>
+                <a:latin typeface="Noto Sans Mono CJK KR"/>
+              </a:rPr>
+              <a:t>v_t = μ · v_{t-1} + g_t        # μ≈0.9, 과거 방향의 관성(누적)</a:t>
+            </a:r>
+          </a:p>
+          <a:p>
+            <a:pPr algn="l"/>
+            <a:r>
+              <a:rPr sz="1250" b="0" i="0">
+                <a:solidFill>
+                  <a:srgbClr val="22252B"/>
+                </a:solidFill>
+                <a:latin typeface="Noto Sans Mono CJK KR"/>
+              </a:rPr>
+              <a:t>θ_{t+1} = θ_t − η · v_t</a:t>
+            </a:r>
+          </a:p>
+        </p:txBody>
+      </p:sp>
+      <p:sp>
+        <p:nvSpPr>
+          <p:cNvPr id="8" name="Rounded Rectangle 7"/>
+          <p:cNvSpPr/>
+          <p:nvPr/>
+        </p:nvSpPr>
+        <p:spPr>
+          <a:xfrm>
+            <a:off x="502920" y="4709160"/>
+            <a:ext cx="5486400" cy="1737360"/>
+          </a:xfrm>
+          <a:prstGeom prst="roundRect">
+            <a:avLst/>
+          </a:prstGeom>
+          <a:solidFill>
+            <a:srgbClr val="DAF0ED"/>
+          </a:solidFill>
+          <a:ln w="12700">
+            <a:solidFill>
+              <a:srgbClr val="2A9D8F"/>
+            </a:solidFill>
+          </a:ln>
+          <a:effectLst/>
+        </p:spPr>
+        <p:style>
+          <a:lnRef idx="1">
+            <a:schemeClr val="accent1"/>
+          </a:lnRef>
+          <a:fillRef idx="3">
+            <a:schemeClr val="accent1"/>
+          </a:fillRef>
+          <a:effectRef idx="2">
+            <a:schemeClr val="accent1"/>
+          </a:effectRef>
+          <a:fontRef idx="minor">
+            <a:schemeClr val="lt1"/>
+          </a:fontRef>
+        </p:style>
+        <p:txBody>
+          <a:bodyPr rtlCol="0" anchor="ctr" wrap="square" lIns="38100" rIns="38100" tIns="25400" bIns="25400"/>
+          <a:lstStyle/>
+          <a:p>
+            <a:pPr algn="l"/>
+            <a:r>
+              <a:rPr sz="1150" b="1" i="0">
+                <a:solidFill>
+                  <a:srgbClr val="2A9D8F"/>
+                </a:solidFill>
+                <a:latin typeface="Noto Sans CJK KR"/>
+              </a:rPr>
+              <a:t>이 optimizer가 해결한 것</a:t>
+            </a:r>
+          </a:p>
+          <a:p>
+            <a:pPr algn="l"/>
+            <a:r>
+              <a:rPr sz="1150" b="0" i="0">
+                <a:solidFill>
+                  <a:srgbClr val="22252B"/>
+                </a:solidFill>
+                <a:latin typeface="Noto Sans CJK KR"/>
+              </a:rPr>
+              <a:t>일관된 방향은 누적 가속하고 출렁이는 성분은 상쇄 → 지그재그 완화, 좁은 골짜기를 빠르게 통과.</a:t>
+            </a:r>
+          </a:p>
+        </p:txBody>
+      </p:sp>
+      <p:sp>
+        <p:nvSpPr>
+          <p:cNvPr id="9" name="Rounded Rectangle 8"/>
+          <p:cNvSpPr/>
+          <p:nvPr/>
+        </p:nvSpPr>
+        <p:spPr>
+          <a:xfrm>
+            <a:off x="6172200" y="4709160"/>
+            <a:ext cx="5486400" cy="1737360"/>
+          </a:xfrm>
+          <a:prstGeom prst="roundRect">
+            <a:avLst/>
+          </a:prstGeom>
+          <a:solidFill>
+            <a:srgbClr val="F6DDDD"/>
+          </a:solidFill>
+          <a:ln w="12700">
+            <a:solidFill>
+              <a:srgbClr val="C1121F"/>
+            </a:solidFill>
+          </a:ln>
+          <a:effectLst/>
+        </p:spPr>
+        <p:style>
+          <a:lnRef idx="1">
+            <a:schemeClr val="accent1"/>
+          </a:lnRef>
+          <a:fillRef idx="3">
+            <a:schemeClr val="accent1"/>
+          </a:fillRef>
+          <a:effectRef idx="2">
+            <a:schemeClr val="accent1"/>
+          </a:effectRef>
+          <a:fontRef idx="minor">
+            <a:schemeClr val="lt1"/>
+          </a:fontRef>
+        </p:style>
+        <p:txBody>
+          <a:bodyPr rtlCol="0" anchor="ctr" wrap="square" lIns="38100" rIns="38100" tIns="25400" bIns="25400"/>
+          <a:lstStyle/>
+          <a:p>
+            <a:pPr algn="l"/>
+            <a:r>
+              <a:rPr sz="1150" b="1" i="0">
+                <a:solidFill>
+                  <a:srgbClr val="C1121F"/>
+                </a:solidFill>
+                <a:latin typeface="Noto Sans CJK KR"/>
+              </a:rPr>
+              <a:t>남은 문제 → 다음</a:t>
+            </a:r>
+          </a:p>
+          <a:p>
+            <a:pPr algn="l"/>
+            <a:r>
+              <a:rPr sz="1150" b="0" i="0">
+                <a:solidFill>
+                  <a:srgbClr val="22252B"/>
+                </a:solidFill>
+                <a:latin typeface="Noto Sans CJK KR"/>
+              </a:rPr>
+              <a:t>보폭(스케일)은 아직 모든 좌표가 동일. 관성이 과하면 최소점을 지나칠 수 있다.  → NAG</a:t>
             </a:r>
           </a:p>
         </p:txBody>

--- a/seminar/TTT-seminar.pptx
+++ b/seminar/TTT-seminar.pptx
@@ -18,9 +18,6 @@
     <p:sldId id="266" r:id="rId17"/>
     <p:sldId id="267" r:id="rId18"/>
     <p:sldId id="268" r:id="rId19"/>
-    <p:sldId id="269" r:id="rId20"/>
-    <p:sldId id="270" r:id="rId21"/>
-    <p:sldId id="271" r:id="rId22"/>
   </p:sldIdLst>
   <p:sldSz cx="12191695" cy="6858000" type="screen4x3"/>
   <p:notesSz cx="6858000" cy="9144000"/>
@@ -3142,10 +3139,20 @@
           </a:fontRef>
         </p:style>
         <p:txBody>
-          <a:bodyPr rtlCol="0" anchor="ctr" wrap="square" lIns="38100" rIns="38100" tIns="25400" bIns="25400"/>
-          <a:lstStyle/>
-          <a:p>
-            <a:pPr algn="ctr"/>
+          <a:bodyPr rtlCol="0" anchor="ctr" wrap="square" lIns="76200" rIns="76200" tIns="38100" bIns="38100"/>
+          <a:lstStyle/>
+          <a:p>
+            <a:pPr algn="ctr">
+              <a:lnSpc>
+                <a:spcPct val="118000"/>
+              </a:lnSpc>
+              <a:spcBef>
+                <a:spcPts val="0"/>
+              </a:spcBef>
+              <a:spcAft>
+                <a:spcPts val="300"/>
+              </a:spcAft>
+            </a:pPr>
             <a:r>
               <a:rPr sz="1100" b="0" i="0">
                 <a:solidFill>
@@ -3197,10 +3204,20 @@
           </a:fontRef>
         </p:style>
         <p:txBody>
-          <a:bodyPr rtlCol="0" anchor="ctr" wrap="square" lIns="38100" rIns="38100" tIns="25400" bIns="25400"/>
-          <a:lstStyle/>
-          <a:p>
-            <a:pPr algn="ctr"/>
+          <a:bodyPr rtlCol="0" anchor="ctr" wrap="square" lIns="76200" rIns="76200" tIns="38100" bIns="38100"/>
+          <a:lstStyle/>
+          <a:p>
+            <a:pPr algn="ctr">
+              <a:lnSpc>
+                <a:spcPct val="118000"/>
+              </a:lnSpc>
+              <a:spcBef>
+                <a:spcPts val="0"/>
+              </a:spcBef>
+              <a:spcAft>
+                <a:spcPts val="300"/>
+              </a:spcAft>
+            </a:pPr>
             <a:r>
               <a:rPr sz="1100" b="0" i="0">
                 <a:solidFill>
@@ -3230,12 +3247,22 @@
           <a:noFill/>
         </p:spPr>
         <p:txBody>
-          <a:bodyPr wrap="square" anchor="t" lIns="25400" rIns="25400" tIns="12700" bIns="12700">
+          <a:bodyPr wrap="square" anchor="t" lIns="38100" rIns="38100" tIns="25400" bIns="25400">
             <a:spAutoFit/>
           </a:bodyPr>
           <a:lstStyle/>
           <a:p>
-            <a:pPr algn="l"/>
+            <a:pPr algn="l">
+              <a:lnSpc>
+                <a:spcPct val="120000"/>
+              </a:lnSpc>
+              <a:spcBef>
+                <a:spcPts val="0"/>
+              </a:spcBef>
+              <a:spcAft>
+                <a:spcPts val="400"/>
+              </a:spcAft>
+            </a:pPr>
             <a:r>
               <a:rPr sz="3400" b="1" i="0">
                 <a:solidFill>
@@ -3265,12 +3292,22 @@
           <a:noFill/>
         </p:spPr>
         <p:txBody>
-          <a:bodyPr wrap="square" anchor="t" lIns="25400" rIns="25400" tIns="12700" bIns="12700">
+          <a:bodyPr wrap="square" anchor="t" lIns="38100" rIns="38100" tIns="25400" bIns="25400">
             <a:spAutoFit/>
           </a:bodyPr>
           <a:lstStyle/>
           <a:p>
-            <a:pPr algn="l"/>
+            <a:pPr algn="l">
+              <a:lnSpc>
+                <a:spcPct val="120000"/>
+              </a:lnSpc>
+              <a:spcBef>
+                <a:spcPts val="0"/>
+              </a:spcBef>
+              <a:spcAft>
+                <a:spcPts val="400"/>
+              </a:spcAft>
+            </a:pPr>
             <a:r>
               <a:rPr sz="1600" b="0" i="0">
                 <a:solidFill>
@@ -3300,12 +3337,22 @@
           <a:noFill/>
         </p:spPr>
         <p:txBody>
-          <a:bodyPr wrap="square" anchor="t" lIns="25400" rIns="25400" tIns="12700" bIns="12700">
+          <a:bodyPr wrap="square" anchor="t" lIns="38100" rIns="38100" tIns="25400" bIns="25400">
             <a:spAutoFit/>
           </a:bodyPr>
           <a:lstStyle/>
           <a:p>
-            <a:pPr algn="l"/>
+            <a:pPr algn="l">
+              <a:lnSpc>
+                <a:spcPct val="120000"/>
+              </a:lnSpc>
+              <a:spcBef>
+                <a:spcPts val="0"/>
+              </a:spcBef>
+              <a:spcAft>
+                <a:spcPts val="400"/>
+              </a:spcAft>
+            </a:pPr>
             <a:r>
               <a:rPr sz="1300" b="0" i="0">
                 <a:solidFill>
@@ -3351,11 +3398,11 @@
             <a:avLst/>
           </a:prstGeom>
           <a:solidFill>
-            <a:srgbClr val="2A6F97"/>
+            <a:srgbClr val="2A9D8F"/>
           </a:solidFill>
           <a:ln w="12700">
             <a:solidFill>
-              <a:srgbClr val="2A6F97"/>
+              <a:srgbClr val="2A9D8F"/>
             </a:solidFill>
           </a:ln>
           <a:effectLst/>
@@ -3375,10 +3422,20 @@
           </a:fontRef>
         </p:style>
         <p:txBody>
-          <a:bodyPr rtlCol="0" anchor="ctr" wrap="square" lIns="38100" rIns="38100" tIns="25400" bIns="25400"/>
-          <a:lstStyle/>
-          <a:p>
-            <a:pPr algn="ctr"/>
+          <a:bodyPr rtlCol="0" anchor="ctr" wrap="square" lIns="76200" rIns="76200" tIns="38100" bIns="38100"/>
+          <a:lstStyle/>
+          <a:p>
+            <a:pPr algn="ctr">
+              <a:lnSpc>
+                <a:spcPct val="118000"/>
+              </a:lnSpc>
+              <a:spcBef>
+                <a:spcPts val="0"/>
+              </a:spcBef>
+              <a:spcAft>
+                <a:spcPts val="300"/>
+              </a:spcAft>
+            </a:pPr>
             <a:r>
               <a:rPr sz="1100" b="0" i="0">
                 <a:solidFill>
@@ -3399,7 +3456,7 @@
         </p:nvSpPr>
         <p:spPr>
           <a:xfrm>
-            <a:off x="502920" y="164592"/>
+            <a:off x="502920" y="146304"/>
             <a:ext cx="11185855" cy="320040"/>
           </a:xfrm>
           <a:prstGeom prst="rect">
@@ -3408,20 +3465,30 @@
           <a:noFill/>
         </p:spPr>
         <p:txBody>
-          <a:bodyPr wrap="square" anchor="t" lIns="25400" rIns="25400" tIns="12700" bIns="12700">
+          <a:bodyPr wrap="square" anchor="t" lIns="38100" rIns="38100" tIns="25400" bIns="25400">
             <a:spAutoFit/>
           </a:bodyPr>
           <a:lstStyle/>
           <a:p>
-            <a:pPr algn="l"/>
-            <a:r>
-              <a:rPr sz="1200" b="1" i="0">
-                <a:solidFill>
-                  <a:srgbClr val="2A6F97"/>
-                </a:solidFill>
-                <a:latin typeface="Noto Sans CJK KR"/>
-              </a:rPr>
-              <a:t>A2 · NAG</a:t>
+            <a:pPr algn="l">
+              <a:lnSpc>
+                <a:spcPct val="120000"/>
+              </a:lnSpc>
+              <a:spcBef>
+                <a:spcPts val="0"/>
+              </a:spcBef>
+              <a:spcAft>
+                <a:spcPts val="0"/>
+              </a:spcAft>
+            </a:pPr>
+            <a:r>
+              <a:rPr sz="1350" b="1" i="0">
+                <a:solidFill>
+                  <a:srgbClr val="2A9D8F"/>
+                </a:solidFill>
+                <a:latin typeface="Noto Sans CJK KR"/>
+              </a:rPr>
+              <a:t>A2 · Adagrad</a:t>
             </a:r>
           </a:p>
         </p:txBody>
@@ -3435,7 +3502,7 @@
         <p:spPr>
           <a:xfrm>
             <a:off x="502920" y="457200"/>
-            <a:ext cx="11185855" cy="548640"/>
+            <a:ext cx="11185855" cy="566928"/>
           </a:xfrm>
           <a:prstGeom prst="rect">
             <a:avLst/>
@@ -3443,20 +3510,30 @@
           <a:noFill/>
         </p:spPr>
         <p:txBody>
-          <a:bodyPr wrap="square" anchor="t" lIns="25400" rIns="25400" tIns="12700" bIns="12700">
+          <a:bodyPr wrap="square" anchor="t" lIns="38100" rIns="38100" tIns="25400" bIns="25400">
             <a:spAutoFit/>
           </a:bodyPr>
           <a:lstStyle/>
           <a:p>
-            <a:pPr algn="l"/>
-            <a:r>
-              <a:rPr sz="2200" b="1" i="0">
+            <a:pPr algn="l">
+              <a:lnSpc>
+                <a:spcPct val="120000"/>
+              </a:lnSpc>
+              <a:spcBef>
+                <a:spcPts val="0"/>
+              </a:spcBef>
+              <a:spcAft>
+                <a:spcPts val="0"/>
+              </a:spcAft>
+            </a:pPr>
+            <a:r>
+              <a:rPr sz="2400" b="1" i="0">
                 <a:solidFill>
                   <a:srgbClr val="22252B"/>
                 </a:solidFill>
                 <a:latin typeface="Noto Sans CJK KR"/>
               </a:rPr>
-              <a:t>NAG  ·  Nesterov Accelerated Gradient</a:t>
+              <a:t>Adagrad  ·  Adaptive Gradient</a:t>
             </a:r>
           </a:p>
         </p:txBody>
@@ -3469,8 +3546,8 @@
         </p:nvSpPr>
         <p:spPr>
           <a:xfrm>
-            <a:off x="502920" y="932688"/>
-            <a:ext cx="5486400" cy="274320"/>
+            <a:off x="502920" y="1078992"/>
+            <a:ext cx="11155680" cy="310896"/>
           </a:xfrm>
           <a:prstGeom prst="rect">
             <a:avLst/>
@@ -3478,20 +3555,30 @@
           <a:noFill/>
         </p:spPr>
         <p:txBody>
-          <a:bodyPr wrap="square" anchor="t" lIns="25400" rIns="25400" tIns="12700" bIns="12700">
+          <a:bodyPr wrap="square" anchor="t" lIns="38100" rIns="38100" tIns="25400" bIns="25400">
             <a:spAutoFit/>
           </a:bodyPr>
           <a:lstStyle/>
           <a:p>
-            <a:pPr algn="l"/>
-            <a:r>
-              <a:rPr sz="1100" b="1" i="0">
-                <a:solidFill>
-                  <a:srgbClr val="2A6F97"/>
-                </a:solidFill>
-                <a:latin typeface="Noto Sans CJK KR"/>
-              </a:rPr>
-              <a:t>파란 줄기 — look-ahead</a:t>
+            <a:pPr algn="l">
+              <a:lnSpc>
+                <a:spcPct val="120000"/>
+              </a:lnSpc>
+              <a:spcBef>
+                <a:spcPts val="0"/>
+              </a:spcBef>
+              <a:spcAft>
+                <a:spcPts val="0"/>
+              </a:spcAft>
+            </a:pPr>
+            <a:r>
+              <a:rPr sz="1350" b="1" i="0">
+                <a:solidFill>
+                  <a:srgbClr val="2A9D8F"/>
+                </a:solidFill>
+                <a:latin typeface="Noto Sans CJK KR"/>
+              </a:rPr>
+              <a:t>초록 줄기 — '스텝 사이즈' 개선</a:t>
             </a:r>
           </a:p>
         </p:txBody>
@@ -3504,18 +3591,18 @@
         </p:nvSpPr>
         <p:spPr>
           <a:xfrm>
-            <a:off x="502920" y="1298448"/>
-            <a:ext cx="11155680" cy="896112"/>
+            <a:off x="502920" y="1463040"/>
+            <a:ext cx="11183112" cy="1024128"/>
           </a:xfrm>
           <a:prstGeom prst="roundRect">
             <a:avLst/>
           </a:prstGeom>
           <a:solidFill>
-            <a:srgbClr val="DBE7F3"/>
+            <a:srgbClr val="DAF0ED"/>
           </a:solidFill>
           <a:ln w="12700">
             <a:solidFill>
-              <a:srgbClr val="2A6F97"/>
+              <a:srgbClr val="2A9D8F"/>
             </a:solidFill>
           </a:ln>
           <a:effectLst/>
@@ -3535,14 +3622,24 @@
           </a:fontRef>
         </p:style>
         <p:txBody>
-          <a:bodyPr rtlCol="0" anchor="ctr" wrap="square" lIns="38100" rIns="38100" tIns="25400" bIns="25400"/>
-          <a:lstStyle/>
-          <a:p>
-            <a:pPr algn="l"/>
-            <a:r>
-              <a:rPr sz="1150" b="1" i="0">
-                <a:solidFill>
-                  <a:srgbClr val="2A6F97"/>
+          <a:bodyPr rtlCol="0" anchor="ctr" wrap="square" lIns="76200" rIns="76200" tIns="38100" bIns="38100"/>
+          <a:lstStyle/>
+          <a:p>
+            <a:pPr algn="l">
+              <a:lnSpc>
+                <a:spcPct val="118000"/>
+              </a:lnSpc>
+              <a:spcBef>
+                <a:spcPts val="0"/>
+              </a:spcBef>
+              <a:spcAft>
+                <a:spcPts val="400"/>
+              </a:spcAft>
+            </a:pPr>
+            <a:r>
+              <a:rPr sz="1400" b="1" i="0">
+                <a:solidFill>
+                  <a:srgbClr val="2A9D8F"/>
                 </a:solidFill>
                 <a:latin typeface="Noto Sans CJK KR"/>
               </a:rPr>
@@ -3550,15 +3647,25 @@
             </a:r>
           </a:p>
           <a:p>
-            <a:pPr algn="l"/>
-            <a:r>
-              <a:rPr sz="1250" b="0" i="0">
+            <a:pPr algn="l">
+              <a:lnSpc>
+                <a:spcPct val="118000"/>
+              </a:lnSpc>
+              <a:spcBef>
+                <a:spcPts val="0"/>
+              </a:spcBef>
+              <a:spcAft>
+                <a:spcPts val="300"/>
+              </a:spcAft>
+            </a:pPr>
+            <a:r>
+              <a:rPr sz="1650" b="0" i="0">
                 <a:solidFill>
                   <a:srgbClr val="22252B"/>
                 </a:solidFill>
                 <a:latin typeface="Noto Sans CJK KR"/>
               </a:rPr>
-              <a:t>"일단 관성 방향으로 먼저 움직이고, 그 자리에서 스텝을 계산하니 더 빠르더라."</a:t>
+              <a:t>"안 가 본 곳은 성큼 빠르게 훑고, 많이 가 본 곳은 잘 가니까 갈수록 보폭을 줄여 세밀히 탐색."</a:t>
             </a:r>
           </a:p>
         </p:txBody>
@@ -3571,8 +3678,8 @@
         </p:nvSpPr>
         <p:spPr>
           <a:xfrm>
-            <a:off x="502920" y="2377440"/>
-            <a:ext cx="11155680" cy="2148840"/>
+            <a:off x="502920" y="2615184"/>
+            <a:ext cx="11183112" cy="1938528"/>
           </a:xfrm>
           <a:prstGeom prst="roundRect">
             <a:avLst/>
@@ -3602,12 +3709,22 @@
           </a:fontRef>
         </p:style>
         <p:txBody>
-          <a:bodyPr rtlCol="0" anchor="ctr" wrap="square" lIns="38100" rIns="38100" tIns="25400" bIns="25400"/>
-          <a:lstStyle/>
-          <a:p>
-            <a:pPr algn="l"/>
-            <a:r>
-              <a:rPr sz="1150" b="1" i="0">
+          <a:bodyPr rtlCol="0" anchor="ctr" wrap="square" lIns="76200" rIns="76200" tIns="38100" bIns="38100"/>
+          <a:lstStyle/>
+          <a:p>
+            <a:pPr algn="l">
+              <a:lnSpc>
+                <a:spcPct val="118000"/>
+              </a:lnSpc>
+              <a:spcBef>
+                <a:spcPts val="0"/>
+              </a:spcBef>
+              <a:spcAft>
+                <a:spcPts val="600"/>
+              </a:spcAft>
+            </a:pPr>
+            <a:r>
+              <a:rPr sz="1400" b="1" i="0">
                 <a:solidFill>
                   <a:srgbClr val="22252B"/>
                 </a:solidFill>
@@ -3617,39 +3734,47 @@
             </a:r>
           </a:p>
           <a:p>
-            <a:pPr algn="l"/>
-            <a:r>
-              <a:rPr sz="1250" b="0" i="0">
+            <a:pPr algn="l">
+              <a:lnSpc>
+                <a:spcPct val="118000"/>
+              </a:lnSpc>
+              <a:spcBef>
+                <a:spcPts val="0"/>
+              </a:spcBef>
+              <a:spcAft>
+                <a:spcPts val="700"/>
+              </a:spcAft>
+            </a:pPr>
+            <a:r>
+              <a:rPr sz="1550" b="0" i="0">
                 <a:solidFill>
                   <a:srgbClr val="22252B"/>
                 </a:solidFill>
                 <a:latin typeface="Noto Sans Mono CJK KR"/>
               </a:rPr>
-              <a:t>θ_look = θ_t − η · μ · v_{t-1}      # 관성으로 미리 가 본 위치</a:t>
-            </a:r>
-          </a:p>
-          <a:p>
-            <a:pPr algn="l"/>
-            <a:r>
-              <a:rPr sz="1250" b="0" i="0">
+              <a:t>G_t = G_{t-1} + g_t²                  # 좌표별 gradient² 누적</a:t>
+            </a:r>
+          </a:p>
+          <a:p>
+            <a:pPr algn="l">
+              <a:lnSpc>
+                <a:spcPct val="118000"/>
+              </a:lnSpc>
+              <a:spcBef>
+                <a:spcPts val="0"/>
+              </a:spcBef>
+              <a:spcAft>
+                <a:spcPts val="700"/>
+              </a:spcAft>
+            </a:pPr>
+            <a:r>
+              <a:rPr sz="1550" b="0" i="0">
                 <a:solidFill>
                   <a:srgbClr val="22252B"/>
                 </a:solidFill>
                 <a:latin typeface="Noto Sans Mono CJK KR"/>
               </a:rPr>
-              <a:t>v_t = μ · v_{t-1} + ∇ℓ(θ_look)     # '가 볼 자리'의 gradient로 보정</a:t>
-            </a:r>
-          </a:p>
-          <a:p>
-            <a:pPr algn="l"/>
-            <a:r>
-              <a:rPr sz="1250" b="0" i="0">
-                <a:solidFill>
-                  <a:srgbClr val="22252B"/>
-                </a:solidFill>
-                <a:latin typeface="Noto Sans Mono CJK KR"/>
-              </a:rPr>
-              <a:t>θ_{t+1} = θ_t − η · v_t</a:t>
+              <a:t>θ_{t+1} = θ_t − η · g_t / (√G_t + ε)   # 좌표마다 다른 보폭</a:t>
             </a:r>
           </a:p>
         </p:txBody>
@@ -3662,8 +3787,8 @@
         </p:nvSpPr>
         <p:spPr>
           <a:xfrm>
-            <a:off x="502920" y="4709160"/>
-            <a:ext cx="5486400" cy="1737360"/>
+            <a:off x="502920" y="4700016"/>
+            <a:ext cx="5486400" cy="1792224"/>
           </a:xfrm>
           <a:prstGeom prst="roundRect">
             <a:avLst/>
@@ -3693,12 +3818,22 @@
           </a:fontRef>
         </p:style>
         <p:txBody>
-          <a:bodyPr rtlCol="0" anchor="ctr" wrap="square" lIns="38100" rIns="38100" tIns="25400" bIns="25400"/>
-          <a:lstStyle/>
-          <a:p>
-            <a:pPr algn="l"/>
-            <a:r>
-              <a:rPr sz="1150" b="1" i="0">
+          <a:bodyPr rtlCol="0" anchor="ctr" wrap="square" lIns="76200" rIns="76200" tIns="38100" bIns="38100"/>
+          <a:lstStyle/>
+          <a:p>
+            <a:pPr algn="l">
+              <a:lnSpc>
+                <a:spcPct val="118000"/>
+              </a:lnSpc>
+              <a:spcBef>
+                <a:spcPts val="0"/>
+              </a:spcBef>
+              <a:spcAft>
+                <a:spcPts val="500"/>
+              </a:spcAft>
+            </a:pPr>
+            <a:r>
+              <a:rPr sz="1400" b="1" i="0">
                 <a:solidFill>
                   <a:srgbClr val="2A9D8F"/>
                 </a:solidFill>
@@ -3708,15 +3843,25 @@
             </a:r>
           </a:p>
           <a:p>
-            <a:pPr algn="l"/>
-            <a:r>
-              <a:rPr sz="1150" b="0" i="0">
+            <a:pPr algn="l">
+              <a:lnSpc>
+                <a:spcPct val="118000"/>
+              </a:lnSpc>
+              <a:spcBef>
+                <a:spcPts val="0"/>
+              </a:spcBef>
+              <a:spcAft>
+                <a:spcPts val="300"/>
+              </a:spcAft>
+            </a:pPr>
+            <a:r>
+              <a:rPr sz="1450" b="0" i="0">
                 <a:solidFill>
                   <a:srgbClr val="22252B"/>
                 </a:solidFill>
                 <a:latin typeface="Noto Sans CJK KR"/>
               </a:rPr>
-              <a:t>미리 가 볼 위치의 gradient로 방향을 교정 → 과주행(overshoot)을 억제하고 수렴이 빨라진다.</a:t>
+              <a:t>좌표마다 다른 learning rate — 드물게 큰 gradient(희소 feature)는 크게, 자주 큰 좌표는 작게.</a:t>
             </a:r>
           </a:p>
         </p:txBody>
@@ -3729,8 +3874,8 @@
         </p:nvSpPr>
         <p:spPr>
           <a:xfrm>
-            <a:off x="6172200" y="4709160"/>
-            <a:ext cx="5486400" cy="1737360"/>
+            <a:off x="6199632" y="4700016"/>
+            <a:ext cx="5486400" cy="1792224"/>
           </a:xfrm>
           <a:prstGeom prst="roundRect">
             <a:avLst/>
@@ -3760,12 +3905,22 @@
           </a:fontRef>
         </p:style>
         <p:txBody>
-          <a:bodyPr rtlCol="0" anchor="ctr" wrap="square" lIns="38100" rIns="38100" tIns="25400" bIns="25400"/>
-          <a:lstStyle/>
-          <a:p>
-            <a:pPr algn="l"/>
-            <a:r>
-              <a:rPr sz="1150" b="1" i="0">
+          <a:bodyPr rtlCol="0" anchor="ctr" wrap="square" lIns="76200" rIns="76200" tIns="38100" bIns="38100"/>
+          <a:lstStyle/>
+          <a:p>
+            <a:pPr algn="l">
+              <a:lnSpc>
+                <a:spcPct val="118000"/>
+              </a:lnSpc>
+              <a:spcBef>
+                <a:spcPts val="0"/>
+              </a:spcBef>
+              <a:spcAft>
+                <a:spcPts val="500"/>
+              </a:spcAft>
+            </a:pPr>
+            <a:r>
+              <a:rPr sz="1400" b="1" i="0">
                 <a:solidFill>
                   <a:srgbClr val="C1121F"/>
                 </a:solidFill>
@@ -3775,15 +3930,25 @@
             </a:r>
           </a:p>
           <a:p>
-            <a:pPr algn="l"/>
-            <a:r>
-              <a:rPr sz="1150" b="0" i="0">
+            <a:pPr algn="l">
+              <a:lnSpc>
+                <a:spcPct val="118000"/>
+              </a:lnSpc>
+              <a:spcBef>
+                <a:spcPts val="0"/>
+              </a:spcBef>
+              <a:spcAft>
+                <a:spcPts val="300"/>
+              </a:spcAft>
+            </a:pPr>
+            <a:r>
+              <a:rPr sz="1450" b="0" i="0">
                 <a:solidFill>
                   <a:srgbClr val="22252B"/>
                 </a:solidFill>
                 <a:latin typeface="Noto Sans CJK KR"/>
               </a:rPr>
-              <a:t>여전히 보폭은 좌표 공통. '좌표별 스케일' 문제는 손대지 않았다.  → Adagrad 계열</a:t>
+              <a:t>G_t가 단조 증가 → 분모가 계속 커져 보폭이 0으로 죽는다(학습 정지).  → RMSProp</a:t>
             </a:r>
           </a:p>
         </p:txBody>
@@ -3845,10 +4010,20 @@
           </a:fontRef>
         </p:style>
         <p:txBody>
-          <a:bodyPr rtlCol="0" anchor="ctr" wrap="square" lIns="38100" rIns="38100" tIns="25400" bIns="25400"/>
-          <a:lstStyle/>
-          <a:p>
-            <a:pPr algn="ctr"/>
+          <a:bodyPr rtlCol="0" anchor="ctr" wrap="square" lIns="76200" rIns="76200" tIns="38100" bIns="38100"/>
+          <a:lstStyle/>
+          <a:p>
+            <a:pPr algn="ctr">
+              <a:lnSpc>
+                <a:spcPct val="118000"/>
+              </a:lnSpc>
+              <a:spcBef>
+                <a:spcPts val="0"/>
+              </a:spcBef>
+              <a:spcAft>
+                <a:spcPts val="300"/>
+              </a:spcAft>
+            </a:pPr>
             <a:r>
               <a:rPr sz="1100" b="0" i="0">
                 <a:solidFill>
@@ -3869,7 +4044,7 @@
         </p:nvSpPr>
         <p:spPr>
           <a:xfrm>
-            <a:off x="502920" y="164592"/>
+            <a:off x="502920" y="146304"/>
             <a:ext cx="11185855" cy="320040"/>
           </a:xfrm>
           <a:prstGeom prst="rect">
@@ -3878,20 +4053,30 @@
           <a:noFill/>
         </p:spPr>
         <p:txBody>
-          <a:bodyPr wrap="square" anchor="t" lIns="25400" rIns="25400" tIns="12700" bIns="12700">
+          <a:bodyPr wrap="square" anchor="t" lIns="38100" rIns="38100" tIns="25400" bIns="25400">
             <a:spAutoFit/>
           </a:bodyPr>
           <a:lstStyle/>
           <a:p>
-            <a:pPr algn="l"/>
-            <a:r>
-              <a:rPr sz="1200" b="1" i="0">
+            <a:pPr algn="l">
+              <a:lnSpc>
+                <a:spcPct val="120000"/>
+              </a:lnSpc>
+              <a:spcBef>
+                <a:spcPts val="0"/>
+              </a:spcBef>
+              <a:spcAft>
+                <a:spcPts val="0"/>
+              </a:spcAft>
+            </a:pPr>
+            <a:r>
+              <a:rPr sz="1350" b="1" i="0">
                 <a:solidFill>
                   <a:srgbClr val="2A9D8F"/>
                 </a:solidFill>
                 <a:latin typeface="Noto Sans CJK KR"/>
               </a:rPr>
-              <a:t>A2 · Adagrad</a:t>
+              <a:t>A2 · RMSProp</a:t>
             </a:r>
           </a:p>
         </p:txBody>
@@ -3905,7 +4090,7 @@
         <p:spPr>
           <a:xfrm>
             <a:off x="502920" y="457200"/>
-            <a:ext cx="11185855" cy="548640"/>
+            <a:ext cx="11185855" cy="566928"/>
           </a:xfrm>
           <a:prstGeom prst="rect">
             <a:avLst/>
@@ -3913,20 +4098,30 @@
           <a:noFill/>
         </p:spPr>
         <p:txBody>
-          <a:bodyPr wrap="square" anchor="t" lIns="25400" rIns="25400" tIns="12700" bIns="12700">
+          <a:bodyPr wrap="square" anchor="t" lIns="38100" rIns="38100" tIns="25400" bIns="25400">
             <a:spAutoFit/>
           </a:bodyPr>
           <a:lstStyle/>
           <a:p>
-            <a:pPr algn="l"/>
-            <a:r>
-              <a:rPr sz="2200" b="1" i="0">
+            <a:pPr algn="l">
+              <a:lnSpc>
+                <a:spcPct val="120000"/>
+              </a:lnSpc>
+              <a:spcBef>
+                <a:spcPts val="0"/>
+              </a:spcBef>
+              <a:spcAft>
+                <a:spcPts val="0"/>
+              </a:spcAft>
+            </a:pPr>
+            <a:r>
+              <a:rPr sz="2400" b="1" i="0">
                 <a:solidFill>
                   <a:srgbClr val="22252B"/>
                 </a:solidFill>
                 <a:latin typeface="Noto Sans CJK KR"/>
               </a:rPr>
-              <a:t>Adagrad  ·  Adaptive Gradient</a:t>
+              <a:t>RMSProp  ·  Root Mean Square Propagation</a:t>
             </a:r>
           </a:p>
         </p:txBody>
@@ -3939,8 +4134,8 @@
         </p:nvSpPr>
         <p:spPr>
           <a:xfrm>
-            <a:off x="502920" y="932688"/>
-            <a:ext cx="5486400" cy="274320"/>
+            <a:off x="502920" y="1078992"/>
+            <a:ext cx="11155680" cy="310896"/>
           </a:xfrm>
           <a:prstGeom prst="rect">
             <a:avLst/>
@@ -3948,20 +4143,30 @@
           <a:noFill/>
         </p:spPr>
         <p:txBody>
-          <a:bodyPr wrap="square" anchor="t" lIns="25400" rIns="25400" tIns="12700" bIns="12700">
+          <a:bodyPr wrap="square" anchor="t" lIns="38100" rIns="38100" tIns="25400" bIns="25400">
             <a:spAutoFit/>
           </a:bodyPr>
           <a:lstStyle/>
           <a:p>
-            <a:pPr algn="l"/>
-            <a:r>
-              <a:rPr sz="1100" b="1" i="0">
+            <a:pPr algn="l">
+              <a:lnSpc>
+                <a:spcPct val="120000"/>
+              </a:lnSpc>
+              <a:spcBef>
+                <a:spcPts val="0"/>
+              </a:spcBef>
+              <a:spcAft>
+                <a:spcPts val="0"/>
+              </a:spcAft>
+            </a:pPr>
+            <a:r>
+              <a:rPr sz="1350" b="1" i="0">
                 <a:solidFill>
                   <a:srgbClr val="2A9D8F"/>
                 </a:solidFill>
                 <a:latin typeface="Noto Sans CJK KR"/>
               </a:rPr>
-              <a:t>초록 줄기 — '스텝 사이즈' 개선</a:t>
+              <a:t>초록 줄기 — EMA로 보완</a:t>
             </a:r>
           </a:p>
         </p:txBody>
@@ -3974,8 +4179,8 @@
         </p:nvSpPr>
         <p:spPr>
           <a:xfrm>
-            <a:off x="502920" y="1298448"/>
-            <a:ext cx="11155680" cy="896112"/>
+            <a:off x="502920" y="1463040"/>
+            <a:ext cx="11183112" cy="1024128"/>
           </a:xfrm>
           <a:prstGeom prst="roundRect">
             <a:avLst/>
@@ -4005,12 +4210,22 @@
           </a:fontRef>
         </p:style>
         <p:txBody>
-          <a:bodyPr rtlCol="0" anchor="ctr" wrap="square" lIns="38100" rIns="38100" tIns="25400" bIns="25400"/>
-          <a:lstStyle/>
-          <a:p>
-            <a:pPr algn="l"/>
-            <a:r>
-              <a:rPr sz="1150" b="1" i="0">
+          <a:bodyPr rtlCol="0" anchor="ctr" wrap="square" lIns="76200" rIns="76200" tIns="38100" bIns="38100"/>
+          <a:lstStyle/>
+          <a:p>
+            <a:pPr algn="l">
+              <a:lnSpc>
+                <a:spcPct val="118000"/>
+              </a:lnSpc>
+              <a:spcBef>
+                <a:spcPts val="0"/>
+              </a:spcBef>
+              <a:spcAft>
+                <a:spcPts val="400"/>
+              </a:spcAft>
+            </a:pPr>
+            <a:r>
+              <a:rPr sz="1400" b="1" i="0">
                 <a:solidFill>
                   <a:srgbClr val="2A9D8F"/>
                 </a:solidFill>
@@ -4020,15 +4235,25 @@
             </a:r>
           </a:p>
           <a:p>
-            <a:pPr algn="l"/>
-            <a:r>
-              <a:rPr sz="1250" b="0" i="0">
+            <a:pPr algn="l">
+              <a:lnSpc>
+                <a:spcPct val="118000"/>
+              </a:lnSpc>
+              <a:spcBef>
+                <a:spcPts val="0"/>
+              </a:spcBef>
+              <a:spcAft>
+                <a:spcPts val="300"/>
+              </a:spcAft>
+            </a:pPr>
+            <a:r>
+              <a:rPr sz="1650" b="0" i="0">
                 <a:solidFill>
                   <a:srgbClr val="22252B"/>
                 </a:solidFill>
                 <a:latin typeface="Noto Sans CJK KR"/>
               </a:rPr>
-              <a:t>"안 가 본 곳은 성큼 빠르게 훑고, 많이 가 본 곳은 잘 가니까 갈수록 보폭을 줄여 세밀히 탐색."</a:t>
+              <a:t>"보폭을 줄이는 건 좋은데, (전부 누적하지 말고) 최근 맥락을 봐 가며 하자."</a:t>
             </a:r>
           </a:p>
         </p:txBody>
@@ -4041,8 +4266,8 @@
         </p:nvSpPr>
         <p:spPr>
           <a:xfrm>
-            <a:off x="502920" y="2377440"/>
-            <a:ext cx="11155680" cy="2148840"/>
+            <a:off x="502920" y="2615184"/>
+            <a:ext cx="11183112" cy="1938528"/>
           </a:xfrm>
           <a:prstGeom prst="roundRect">
             <a:avLst/>
@@ -4072,12 +4297,22 @@
           </a:fontRef>
         </p:style>
         <p:txBody>
-          <a:bodyPr rtlCol="0" anchor="ctr" wrap="square" lIns="38100" rIns="38100" tIns="25400" bIns="25400"/>
-          <a:lstStyle/>
-          <a:p>
-            <a:pPr algn="l"/>
-            <a:r>
-              <a:rPr sz="1150" b="1" i="0">
+          <a:bodyPr rtlCol="0" anchor="ctr" wrap="square" lIns="76200" rIns="76200" tIns="38100" bIns="38100"/>
+          <a:lstStyle/>
+          <a:p>
+            <a:pPr algn="l">
+              <a:lnSpc>
+                <a:spcPct val="118000"/>
+              </a:lnSpc>
+              <a:spcBef>
+                <a:spcPts val="0"/>
+              </a:spcBef>
+              <a:spcAft>
+                <a:spcPts val="600"/>
+              </a:spcAft>
+            </a:pPr>
+            <a:r>
+              <a:rPr sz="1400" b="1" i="0">
                 <a:solidFill>
                   <a:srgbClr val="22252B"/>
                 </a:solidFill>
@@ -4087,27 +4322,47 @@
             </a:r>
           </a:p>
           <a:p>
-            <a:pPr algn="l"/>
-            <a:r>
-              <a:rPr sz="1250" b="0" i="0">
+            <a:pPr algn="l">
+              <a:lnSpc>
+                <a:spcPct val="118000"/>
+              </a:lnSpc>
+              <a:spcBef>
+                <a:spcPts val="0"/>
+              </a:spcBef>
+              <a:spcAft>
+                <a:spcPts val="700"/>
+              </a:spcAft>
+            </a:pPr>
+            <a:r>
+              <a:rPr sz="1550" b="0" i="0">
                 <a:solidFill>
                   <a:srgbClr val="22252B"/>
                 </a:solidFill>
                 <a:latin typeface="Noto Sans Mono CJK KR"/>
               </a:rPr>
-              <a:t>G_t = G_{t-1} + g_t²                  # 좌표별 gradient² 누적</a:t>
-            </a:r>
-          </a:p>
-          <a:p>
-            <a:pPr algn="l"/>
-            <a:r>
-              <a:rPr sz="1250" b="0" i="0">
+              <a:t>E[g²]_t = ρ · E[g²]_{t-1} + (1−ρ) · g_t²   # ρ≈0.9, 최근값 지수이동평균</a:t>
+            </a:r>
+          </a:p>
+          <a:p>
+            <a:pPr algn="l">
+              <a:lnSpc>
+                <a:spcPct val="118000"/>
+              </a:lnSpc>
+              <a:spcBef>
+                <a:spcPts val="0"/>
+              </a:spcBef>
+              <a:spcAft>
+                <a:spcPts val="700"/>
+              </a:spcAft>
+            </a:pPr>
+            <a:r>
+              <a:rPr sz="1550" b="0" i="0">
                 <a:solidFill>
                   <a:srgbClr val="22252B"/>
                 </a:solidFill>
                 <a:latin typeface="Noto Sans Mono CJK KR"/>
               </a:rPr>
-              <a:t>θ_{t+1} = θ_t − η · g_t / (√G_t + ε)   # 좌표마다 다른 보폭</a:t>
+              <a:t>θ_{t+1} = θ_t − η · g_t / (√E[g²]_t + ε)</a:t>
             </a:r>
           </a:p>
         </p:txBody>
@@ -4120,8 +4375,8 @@
         </p:nvSpPr>
         <p:spPr>
           <a:xfrm>
-            <a:off x="502920" y="4709160"/>
-            <a:ext cx="5486400" cy="1737360"/>
+            <a:off x="502920" y="4700016"/>
+            <a:ext cx="5486400" cy="1792224"/>
           </a:xfrm>
           <a:prstGeom prst="roundRect">
             <a:avLst/>
@@ -4151,12 +4406,22 @@
           </a:fontRef>
         </p:style>
         <p:txBody>
-          <a:bodyPr rtlCol="0" anchor="ctr" wrap="square" lIns="38100" rIns="38100" tIns="25400" bIns="25400"/>
-          <a:lstStyle/>
-          <a:p>
-            <a:pPr algn="l"/>
-            <a:r>
-              <a:rPr sz="1150" b="1" i="0">
+          <a:bodyPr rtlCol="0" anchor="ctr" wrap="square" lIns="76200" rIns="76200" tIns="38100" bIns="38100"/>
+          <a:lstStyle/>
+          <a:p>
+            <a:pPr algn="l">
+              <a:lnSpc>
+                <a:spcPct val="118000"/>
+              </a:lnSpc>
+              <a:spcBef>
+                <a:spcPts val="0"/>
+              </a:spcBef>
+              <a:spcAft>
+                <a:spcPts val="500"/>
+              </a:spcAft>
+            </a:pPr>
+            <a:r>
+              <a:rPr sz="1400" b="1" i="0">
                 <a:solidFill>
                   <a:srgbClr val="2A9D8F"/>
                 </a:solidFill>
@@ -4166,15 +4431,25 @@
             </a:r>
           </a:p>
           <a:p>
-            <a:pPr algn="l"/>
-            <a:r>
-              <a:rPr sz="1150" b="0" i="0">
+            <a:pPr algn="l">
+              <a:lnSpc>
+                <a:spcPct val="118000"/>
+              </a:lnSpc>
+              <a:spcBef>
+                <a:spcPts val="0"/>
+              </a:spcBef>
+              <a:spcAft>
+                <a:spcPts val="300"/>
+              </a:spcAft>
+            </a:pPr>
+            <a:r>
+              <a:rPr sz="1450" b="0" i="0">
                 <a:solidFill>
                   <a:srgbClr val="22252B"/>
                 </a:solidFill>
                 <a:latin typeface="Noto Sans CJK KR"/>
               </a:rPr>
-              <a:t>좌표마다 다른 learning rate — 드물게 큰 gradient(희소 feature)는 크게, 자주 큰 좌표는 작게.</a:t>
+              <a:t>합 대신 EMA → 분모가 무한정 커지지 않아 보폭이 죽지 않는다. 비정상(non-stationary) 목표에도 안정.</a:t>
             </a:r>
           </a:p>
         </p:txBody>
@@ -4187,8 +4462,8 @@
         </p:nvSpPr>
         <p:spPr>
           <a:xfrm>
-            <a:off x="6172200" y="4709160"/>
-            <a:ext cx="5486400" cy="1737360"/>
+            <a:off x="6199632" y="4700016"/>
+            <a:ext cx="5486400" cy="1792224"/>
           </a:xfrm>
           <a:prstGeom prst="roundRect">
             <a:avLst/>
@@ -4218,12 +4493,22 @@
           </a:fontRef>
         </p:style>
         <p:txBody>
-          <a:bodyPr rtlCol="0" anchor="ctr" wrap="square" lIns="38100" rIns="38100" tIns="25400" bIns="25400"/>
-          <a:lstStyle/>
-          <a:p>
-            <a:pPr algn="l"/>
-            <a:r>
-              <a:rPr sz="1150" b="1" i="0">
+          <a:bodyPr rtlCol="0" anchor="ctr" wrap="square" lIns="76200" rIns="76200" tIns="38100" bIns="38100"/>
+          <a:lstStyle/>
+          <a:p>
+            <a:pPr algn="l">
+              <a:lnSpc>
+                <a:spcPct val="118000"/>
+              </a:lnSpc>
+              <a:spcBef>
+                <a:spcPts val="0"/>
+              </a:spcBef>
+              <a:spcAft>
+                <a:spcPts val="500"/>
+              </a:spcAft>
+            </a:pPr>
+            <a:r>
+              <a:rPr sz="1400" b="1" i="0">
                 <a:solidFill>
                   <a:srgbClr val="C1121F"/>
                 </a:solidFill>
@@ -4233,15 +4518,25 @@
             </a:r>
           </a:p>
           <a:p>
-            <a:pPr algn="l"/>
-            <a:r>
-              <a:rPr sz="1150" b="0" i="0">
+            <a:pPr algn="l">
+              <a:lnSpc>
+                <a:spcPct val="118000"/>
+              </a:lnSpc>
+              <a:spcBef>
+                <a:spcPts val="0"/>
+              </a:spcBef>
+              <a:spcAft>
+                <a:spcPts val="300"/>
+              </a:spcAft>
+            </a:pPr>
+            <a:r>
+              <a:rPr sz="1450" b="0" i="0">
                 <a:solidFill>
                   <a:srgbClr val="22252B"/>
                 </a:solidFill>
                 <a:latin typeface="Noto Sans CJK KR"/>
               </a:rPr>
-              <a:t>G_t가 단조 증가 → 분모가 계속 커져 보폭이 0으로 죽는다(학습 정지).  → RMSProp</a:t>
+              <a:t>방향(momentum)은 아직 안 씀. 초기(0에서 시작) 편향 보정도 없다.  → Adam</a:t>
             </a:r>
           </a:p>
         </p:txBody>
@@ -4279,11 +4574,11 @@
             <a:avLst/>
           </a:prstGeom>
           <a:solidFill>
-            <a:srgbClr val="2A9D8F"/>
+            <a:srgbClr val="C9A227"/>
           </a:solidFill>
           <a:ln w="12700">
             <a:solidFill>
-              <a:srgbClr val="2A9D8F"/>
+              <a:srgbClr val="C9A227"/>
             </a:solidFill>
           </a:ln>
           <a:effectLst/>
@@ -4303,10 +4598,20 @@
           </a:fontRef>
         </p:style>
         <p:txBody>
-          <a:bodyPr rtlCol="0" anchor="ctr" wrap="square" lIns="38100" rIns="38100" tIns="25400" bIns="25400"/>
-          <a:lstStyle/>
-          <a:p>
-            <a:pPr algn="ctr"/>
+          <a:bodyPr rtlCol="0" anchor="ctr" wrap="square" lIns="76200" rIns="76200" tIns="38100" bIns="38100"/>
+          <a:lstStyle/>
+          <a:p>
+            <a:pPr algn="ctr">
+              <a:lnSpc>
+                <a:spcPct val="118000"/>
+              </a:lnSpc>
+              <a:spcBef>
+                <a:spcPts val="0"/>
+              </a:spcBef>
+              <a:spcAft>
+                <a:spcPts val="300"/>
+              </a:spcAft>
+            </a:pPr>
             <a:r>
               <a:rPr sz="1100" b="0" i="0">
                 <a:solidFill>
@@ -4327,7 +4632,7 @@
         </p:nvSpPr>
         <p:spPr>
           <a:xfrm>
-            <a:off x="502920" y="164592"/>
+            <a:off x="502920" y="146304"/>
             <a:ext cx="11185855" cy="320040"/>
           </a:xfrm>
           <a:prstGeom prst="rect">
@@ -4336,20 +4641,30 @@
           <a:noFill/>
         </p:spPr>
         <p:txBody>
-          <a:bodyPr wrap="square" anchor="t" lIns="25400" rIns="25400" tIns="12700" bIns="12700">
+          <a:bodyPr wrap="square" anchor="t" lIns="38100" rIns="38100" tIns="25400" bIns="25400">
             <a:spAutoFit/>
           </a:bodyPr>
           <a:lstStyle/>
           <a:p>
-            <a:pPr algn="l"/>
-            <a:r>
-              <a:rPr sz="1200" b="1" i="0">
-                <a:solidFill>
-                  <a:srgbClr val="2A9D8F"/>
-                </a:solidFill>
-                <a:latin typeface="Noto Sans CJK KR"/>
-              </a:rPr>
-              <a:t>A2 · RMSProp</a:t>
+            <a:pPr algn="l">
+              <a:lnSpc>
+                <a:spcPct val="120000"/>
+              </a:lnSpc>
+              <a:spcBef>
+                <a:spcPts val="0"/>
+              </a:spcBef>
+              <a:spcAft>
+                <a:spcPts val="0"/>
+              </a:spcAft>
+            </a:pPr>
+            <a:r>
+              <a:rPr sz="1350" b="1" i="0">
+                <a:solidFill>
+                  <a:srgbClr val="C9A227"/>
+                </a:solidFill>
+                <a:latin typeface="Noto Sans CJK KR"/>
+              </a:rPr>
+              <a:t>A2 · Adam</a:t>
             </a:r>
           </a:p>
         </p:txBody>
@@ -4363,7 +4678,7 @@
         <p:spPr>
           <a:xfrm>
             <a:off x="502920" y="457200"/>
-            <a:ext cx="11185855" cy="548640"/>
+            <a:ext cx="11185855" cy="566928"/>
           </a:xfrm>
           <a:prstGeom prst="rect">
             <a:avLst/>
@@ -4371,20 +4686,30 @@
           <a:noFill/>
         </p:spPr>
         <p:txBody>
-          <a:bodyPr wrap="square" anchor="t" lIns="25400" rIns="25400" tIns="12700" bIns="12700">
+          <a:bodyPr wrap="square" anchor="t" lIns="38100" rIns="38100" tIns="25400" bIns="25400">
             <a:spAutoFit/>
           </a:bodyPr>
           <a:lstStyle/>
           <a:p>
-            <a:pPr algn="l"/>
-            <a:r>
-              <a:rPr sz="2200" b="1" i="0">
+            <a:pPr algn="l">
+              <a:lnSpc>
+                <a:spcPct val="120000"/>
+              </a:lnSpc>
+              <a:spcBef>
+                <a:spcPts val="0"/>
+              </a:spcBef>
+              <a:spcAft>
+                <a:spcPts val="0"/>
+              </a:spcAft>
+            </a:pPr>
+            <a:r>
+              <a:rPr sz="2400" b="1" i="0">
                 <a:solidFill>
                   <a:srgbClr val="22252B"/>
                 </a:solidFill>
                 <a:latin typeface="Noto Sans CJK KR"/>
               </a:rPr>
-              <a:t>RMSProp  ·  Root Mean Square Propagation</a:t>
+              <a:t>Adam  ·  Adaptive Moment Estimation</a:t>
             </a:r>
           </a:p>
         </p:txBody>
@@ -4397,8 +4722,8 @@
         </p:nvSpPr>
         <p:spPr>
           <a:xfrm>
-            <a:off x="502920" y="932688"/>
-            <a:ext cx="5486400" cy="274320"/>
+            <a:off x="502920" y="1078992"/>
+            <a:ext cx="11155680" cy="310896"/>
           </a:xfrm>
           <a:prstGeom prst="rect">
             <a:avLst/>
@@ -4406,20 +4731,30 @@
           <a:noFill/>
         </p:spPr>
         <p:txBody>
-          <a:bodyPr wrap="square" anchor="t" lIns="25400" rIns="25400" tIns="12700" bIns="12700">
+          <a:bodyPr wrap="square" anchor="t" lIns="38100" rIns="38100" tIns="25400" bIns="25400">
             <a:spAutoFit/>
           </a:bodyPr>
           <a:lstStyle/>
           <a:p>
-            <a:pPr algn="l"/>
-            <a:r>
-              <a:rPr sz="1100" b="1" i="0">
-                <a:solidFill>
-                  <a:srgbClr val="2A9D8F"/>
-                </a:solidFill>
-                <a:latin typeface="Noto Sans CJK KR"/>
-              </a:rPr>
-              <a:t>초록 줄기 — EMA로 보완</a:t>
+            <a:pPr algn="l">
+              <a:lnSpc>
+                <a:spcPct val="120000"/>
+              </a:lnSpc>
+              <a:spcBef>
+                <a:spcPts val="0"/>
+              </a:spcBef>
+              <a:spcAft>
+                <a:spcPts val="0"/>
+              </a:spcAft>
+            </a:pPr>
+            <a:r>
+              <a:rPr sz="1350" b="1" i="0">
+                <a:solidFill>
+                  <a:srgbClr val="C9A227"/>
+                </a:solidFill>
+                <a:latin typeface="Noto Sans CJK KR"/>
+              </a:rPr>
+              <a:t>두 줄기의 합류 ★</a:t>
             </a:r>
           </a:p>
         </p:txBody>
@@ -4432,8 +4767,248 @@
         </p:nvSpPr>
         <p:spPr>
           <a:xfrm>
-            <a:off x="502920" y="1298448"/>
-            <a:ext cx="11155680" cy="896112"/>
+            <a:off x="502920" y="1463040"/>
+            <a:ext cx="11183112" cy="1024128"/>
+          </a:xfrm>
+          <a:prstGeom prst="roundRect">
+            <a:avLst/>
+          </a:prstGeom>
+          <a:solidFill>
+            <a:srgbClr val="F6ECC7"/>
+          </a:solidFill>
+          <a:ln w="12700">
+            <a:solidFill>
+              <a:srgbClr val="C9A227"/>
+            </a:solidFill>
+          </a:ln>
+          <a:effectLst/>
+        </p:spPr>
+        <p:style>
+          <a:lnRef idx="1">
+            <a:schemeClr val="accent1"/>
+          </a:lnRef>
+          <a:fillRef idx="3">
+            <a:schemeClr val="accent1"/>
+          </a:fillRef>
+          <a:effectRef idx="2">
+            <a:schemeClr val="accent1"/>
+          </a:effectRef>
+          <a:fontRef idx="minor">
+            <a:schemeClr val="lt1"/>
+          </a:fontRef>
+        </p:style>
+        <p:txBody>
+          <a:bodyPr rtlCol="0" anchor="ctr" wrap="square" lIns="76200" rIns="76200" tIns="38100" bIns="38100"/>
+          <a:lstStyle/>
+          <a:p>
+            <a:pPr algn="l">
+              <a:lnSpc>
+                <a:spcPct val="118000"/>
+              </a:lnSpc>
+              <a:spcBef>
+                <a:spcPts val="0"/>
+              </a:spcBef>
+              <a:spcAft>
+                <a:spcPts val="400"/>
+              </a:spcAft>
+            </a:pPr>
+            <a:r>
+              <a:rPr sz="1400" b="1" i="0">
+                <a:solidFill>
+                  <a:srgbClr val="C9A227"/>
+                </a:solidFill>
+                <a:latin typeface="Noto Sans CJK KR"/>
+              </a:rPr>
+              <a:t>직관 (왜 이렇게?)</a:t>
+            </a:r>
+          </a:p>
+          <a:p>
+            <a:pPr algn="l">
+              <a:lnSpc>
+                <a:spcPct val="118000"/>
+              </a:lnSpc>
+              <a:spcBef>
+                <a:spcPts val="0"/>
+              </a:spcBef>
+              <a:spcAft>
+                <a:spcPts val="300"/>
+              </a:spcAft>
+            </a:pPr>
+            <a:r>
+              <a:rPr sz="1650" b="0" i="0">
+                <a:solidFill>
+                  <a:srgbClr val="22252B"/>
+                </a:solidFill>
+                <a:latin typeface="Noto Sans CJK KR"/>
+              </a:rPr>
+              <a:t>"RMSProp(보폭) + Momentum(방향)을 합치자 — 방향도 스텝 사이즈도 적절하게!"</a:t>
+            </a:r>
+          </a:p>
+        </p:txBody>
+      </p:sp>
+      <p:sp>
+        <p:nvSpPr>
+          <p:cNvPr id="7" name="Rounded Rectangle 6"/>
+          <p:cNvSpPr/>
+          <p:nvPr/>
+        </p:nvSpPr>
+        <p:spPr>
+          <a:xfrm>
+            <a:off x="502920" y="2615184"/>
+            <a:ext cx="11183112" cy="1938528"/>
+          </a:xfrm>
+          <a:prstGeom prst="roundRect">
+            <a:avLst/>
+          </a:prstGeom>
+          <a:solidFill>
+            <a:srgbClr val="FFFFFF"/>
+          </a:solidFill>
+          <a:ln w="12700">
+            <a:solidFill>
+              <a:srgbClr val="8A8F98"/>
+            </a:solidFill>
+          </a:ln>
+          <a:effectLst/>
+        </p:spPr>
+        <p:style>
+          <a:lnRef idx="1">
+            <a:schemeClr val="accent1"/>
+          </a:lnRef>
+          <a:fillRef idx="3">
+            <a:schemeClr val="accent1"/>
+          </a:fillRef>
+          <a:effectRef idx="2">
+            <a:schemeClr val="accent1"/>
+          </a:effectRef>
+          <a:fontRef idx="minor">
+            <a:schemeClr val="lt1"/>
+          </a:fontRef>
+        </p:style>
+        <p:txBody>
+          <a:bodyPr rtlCol="0" anchor="ctr" wrap="square" lIns="76200" rIns="76200" tIns="38100" bIns="38100"/>
+          <a:lstStyle/>
+          <a:p>
+            <a:pPr algn="l">
+              <a:lnSpc>
+                <a:spcPct val="118000"/>
+              </a:lnSpc>
+              <a:spcBef>
+                <a:spcPts val="0"/>
+              </a:spcBef>
+              <a:spcAft>
+                <a:spcPts val="600"/>
+              </a:spcAft>
+            </a:pPr>
+            <a:r>
+              <a:rPr sz="1400" b="1" i="0">
+                <a:solidFill>
+                  <a:srgbClr val="22252B"/>
+                </a:solidFill>
+                <a:latin typeface="Noto Sans CJK KR"/>
+              </a:rPr>
+              <a:t>갱신 규칙 (수식)</a:t>
+            </a:r>
+          </a:p>
+          <a:p>
+            <a:pPr algn="l">
+              <a:lnSpc>
+                <a:spcPct val="118000"/>
+              </a:lnSpc>
+              <a:spcBef>
+                <a:spcPts val="0"/>
+              </a:spcBef>
+              <a:spcAft>
+                <a:spcPts val="700"/>
+              </a:spcAft>
+            </a:pPr>
+            <a:r>
+              <a:rPr sz="1550" b="0" i="0">
+                <a:solidFill>
+                  <a:srgbClr val="22252B"/>
+                </a:solidFill>
+                <a:latin typeface="Noto Sans Mono CJK KR"/>
+              </a:rPr>
+              <a:t>m_t = β₁·m_{t-1} + (1−β₁)·g_t          # 1차 모멘텀: 방향</a:t>
+            </a:r>
+          </a:p>
+          <a:p>
+            <a:pPr algn="l">
+              <a:lnSpc>
+                <a:spcPct val="118000"/>
+              </a:lnSpc>
+              <a:spcBef>
+                <a:spcPts val="0"/>
+              </a:spcBef>
+              <a:spcAft>
+                <a:spcPts val="700"/>
+              </a:spcAft>
+            </a:pPr>
+            <a:r>
+              <a:rPr sz="1550" b="0" i="0">
+                <a:solidFill>
+                  <a:srgbClr val="22252B"/>
+                </a:solidFill>
+                <a:latin typeface="Noto Sans Mono CJK KR"/>
+              </a:rPr>
+              <a:t>v_t = β₂·v_{t-1} + (1−β₂)·g_t²         # 2차 모멘텀: 좌표별 보폭</a:t>
+            </a:r>
+          </a:p>
+          <a:p>
+            <a:pPr algn="l">
+              <a:lnSpc>
+                <a:spcPct val="118000"/>
+              </a:lnSpc>
+              <a:spcBef>
+                <a:spcPts val="0"/>
+              </a:spcBef>
+              <a:spcAft>
+                <a:spcPts val="700"/>
+              </a:spcAft>
+            </a:pPr>
+            <a:r>
+              <a:rPr sz="1550" b="0" i="0">
+                <a:solidFill>
+                  <a:srgbClr val="22252B"/>
+                </a:solidFill>
+                <a:latin typeface="Noto Sans Mono CJK KR"/>
+              </a:rPr>
+              <a:t>m̂ = m_t/(1−β₁^t),  v̂ = v_t/(1−β₂^t)     # 초기 0-편향 보정</a:t>
+            </a:r>
+          </a:p>
+          <a:p>
+            <a:pPr algn="l">
+              <a:lnSpc>
+                <a:spcPct val="118000"/>
+              </a:lnSpc>
+              <a:spcBef>
+                <a:spcPts val="0"/>
+              </a:spcBef>
+              <a:spcAft>
+                <a:spcPts val="700"/>
+              </a:spcAft>
+            </a:pPr>
+            <a:r>
+              <a:rPr sz="1550" b="0" i="0">
+                <a:solidFill>
+                  <a:srgbClr val="22252B"/>
+                </a:solidFill>
+                <a:latin typeface="Noto Sans Mono CJK KR"/>
+              </a:rPr>
+              <a:t>θ_{t+1} = θ_t − η · m̂ / (√v̂ + ε)</a:t>
+            </a:r>
+          </a:p>
+        </p:txBody>
+      </p:sp>
+      <p:sp>
+        <p:nvSpPr>
+          <p:cNvPr id="8" name="Rounded Rectangle 7"/>
+          <p:cNvSpPr/>
+          <p:nvPr/>
+        </p:nvSpPr>
+        <p:spPr>
+          <a:xfrm>
+            <a:off x="502920" y="4700016"/>
+            <a:ext cx="5486400" cy="1792224"/>
           </a:xfrm>
           <a:prstGeom prst="roundRect">
             <a:avLst/>
@@ -4463,176 +5038,50 @@
           </a:fontRef>
         </p:style>
         <p:txBody>
-          <a:bodyPr rtlCol="0" anchor="ctr" wrap="square" lIns="38100" rIns="38100" tIns="25400" bIns="25400"/>
-          <a:lstStyle/>
-          <a:p>
-            <a:pPr algn="l"/>
-            <a:r>
-              <a:rPr sz="1150" b="1" i="0">
+          <a:bodyPr rtlCol="0" anchor="ctr" wrap="square" lIns="76200" rIns="76200" tIns="38100" bIns="38100"/>
+          <a:lstStyle/>
+          <a:p>
+            <a:pPr algn="l">
+              <a:lnSpc>
+                <a:spcPct val="118000"/>
+              </a:lnSpc>
+              <a:spcBef>
+                <a:spcPts val="0"/>
+              </a:spcBef>
+              <a:spcAft>
+                <a:spcPts val="500"/>
+              </a:spcAft>
+            </a:pPr>
+            <a:r>
+              <a:rPr sz="1400" b="1" i="0">
                 <a:solidFill>
                   <a:srgbClr val="2A9D8F"/>
                 </a:solidFill>
                 <a:latin typeface="Noto Sans CJK KR"/>
               </a:rPr>
-              <a:t>직관 (왜 이렇게?)</a:t>
-            </a:r>
-          </a:p>
-          <a:p>
-            <a:pPr algn="l"/>
-            <a:r>
-              <a:rPr sz="1250" b="0" i="0">
+              <a:t>이 optimizer가 해결한 것</a:t>
+            </a:r>
+          </a:p>
+          <a:p>
+            <a:pPr algn="l">
+              <a:lnSpc>
+                <a:spcPct val="118000"/>
+              </a:lnSpc>
+              <a:spcBef>
+                <a:spcPts val="0"/>
+              </a:spcBef>
+              <a:spcAft>
+                <a:spcPts val="300"/>
+              </a:spcAft>
+            </a:pPr>
+            <a:r>
+              <a:rPr sz="1450" b="0" i="0">
                 <a:solidFill>
                   <a:srgbClr val="22252B"/>
                 </a:solidFill>
                 <a:latin typeface="Noto Sans CJK KR"/>
               </a:rPr>
-              <a:t>"보폭을 줄이는 건 좋은데, (전부 누적하지 말고) 최근 맥락을 봐 가며 하자."</a:t>
-            </a:r>
-          </a:p>
-        </p:txBody>
-      </p:sp>
-      <p:sp>
-        <p:nvSpPr>
-          <p:cNvPr id="7" name="Rounded Rectangle 6"/>
-          <p:cNvSpPr/>
-          <p:nvPr/>
-        </p:nvSpPr>
-        <p:spPr>
-          <a:xfrm>
-            <a:off x="502920" y="2377440"/>
-            <a:ext cx="11155680" cy="2148840"/>
-          </a:xfrm>
-          <a:prstGeom prst="roundRect">
-            <a:avLst/>
-          </a:prstGeom>
-          <a:solidFill>
-            <a:srgbClr val="FFFFFF"/>
-          </a:solidFill>
-          <a:ln w="12700">
-            <a:solidFill>
-              <a:srgbClr val="8A8F98"/>
-            </a:solidFill>
-          </a:ln>
-          <a:effectLst/>
-        </p:spPr>
-        <p:style>
-          <a:lnRef idx="1">
-            <a:schemeClr val="accent1"/>
-          </a:lnRef>
-          <a:fillRef idx="3">
-            <a:schemeClr val="accent1"/>
-          </a:fillRef>
-          <a:effectRef idx="2">
-            <a:schemeClr val="accent1"/>
-          </a:effectRef>
-          <a:fontRef idx="minor">
-            <a:schemeClr val="lt1"/>
-          </a:fontRef>
-        </p:style>
-        <p:txBody>
-          <a:bodyPr rtlCol="0" anchor="ctr" wrap="square" lIns="38100" rIns="38100" tIns="25400" bIns="25400"/>
-          <a:lstStyle/>
-          <a:p>
-            <a:pPr algn="l"/>
-            <a:r>
-              <a:rPr sz="1150" b="1" i="0">
-                <a:solidFill>
-                  <a:srgbClr val="22252B"/>
-                </a:solidFill>
-                <a:latin typeface="Noto Sans CJK KR"/>
-              </a:rPr>
-              <a:t>갱신 규칙 (수식)</a:t>
-            </a:r>
-          </a:p>
-          <a:p>
-            <a:pPr algn="l"/>
-            <a:r>
-              <a:rPr sz="1250" b="0" i="0">
-                <a:solidFill>
-                  <a:srgbClr val="22252B"/>
-                </a:solidFill>
-                <a:latin typeface="Noto Sans Mono CJK KR"/>
-              </a:rPr>
-              <a:t>E[g²]_t = ρ · E[g²]_{t-1} + (1−ρ) · g_t²   # ρ≈0.9, 최근값 지수이동평균</a:t>
-            </a:r>
-          </a:p>
-          <a:p>
-            <a:pPr algn="l"/>
-            <a:r>
-              <a:rPr sz="1250" b="0" i="0">
-                <a:solidFill>
-                  <a:srgbClr val="22252B"/>
-                </a:solidFill>
-                <a:latin typeface="Noto Sans Mono CJK KR"/>
-              </a:rPr>
-              <a:t>θ_{t+1} = θ_t − η · g_t / (√E[g²]_t + ε)</a:t>
-            </a:r>
-          </a:p>
-        </p:txBody>
-      </p:sp>
-      <p:sp>
-        <p:nvSpPr>
-          <p:cNvPr id="8" name="Rounded Rectangle 7"/>
-          <p:cNvSpPr/>
-          <p:nvPr/>
-        </p:nvSpPr>
-        <p:spPr>
-          <a:xfrm>
-            <a:off x="502920" y="4709160"/>
-            <a:ext cx="5486400" cy="1737360"/>
-          </a:xfrm>
-          <a:prstGeom prst="roundRect">
-            <a:avLst/>
-          </a:prstGeom>
-          <a:solidFill>
-            <a:srgbClr val="DAF0ED"/>
-          </a:solidFill>
-          <a:ln w="12700">
-            <a:solidFill>
-              <a:srgbClr val="2A9D8F"/>
-            </a:solidFill>
-          </a:ln>
-          <a:effectLst/>
-        </p:spPr>
-        <p:style>
-          <a:lnRef idx="1">
-            <a:schemeClr val="accent1"/>
-          </a:lnRef>
-          <a:fillRef idx="3">
-            <a:schemeClr val="accent1"/>
-          </a:fillRef>
-          <a:effectRef idx="2">
-            <a:schemeClr val="accent1"/>
-          </a:effectRef>
-          <a:fontRef idx="minor">
-            <a:schemeClr val="lt1"/>
-          </a:fontRef>
-        </p:style>
-        <p:txBody>
-          <a:bodyPr rtlCol="0" anchor="ctr" wrap="square" lIns="38100" rIns="38100" tIns="25400" bIns="25400"/>
-          <a:lstStyle/>
-          <a:p>
-            <a:pPr algn="l"/>
-            <a:r>
-              <a:rPr sz="1150" b="1" i="0">
-                <a:solidFill>
-                  <a:srgbClr val="2A9D8F"/>
-                </a:solidFill>
-                <a:latin typeface="Noto Sans CJK KR"/>
-              </a:rPr>
-              <a:t>이 optimizer가 해결한 것</a:t>
-            </a:r>
-          </a:p>
-          <a:p>
-            <a:pPr algn="l"/>
-            <a:r>
-              <a:rPr sz="1150" b="0" i="0">
-                <a:solidFill>
-                  <a:srgbClr val="22252B"/>
-                </a:solidFill>
-                <a:latin typeface="Noto Sans CJK KR"/>
-              </a:rPr>
-              <a:t>합 대신 EMA → 분모가 무한정 커지지 않아 보폭이 죽지 않는다. 비정상(non-stationary) 목표에도 안정.</a:t>
+              <a:t>방향(m) + 좌표별 보폭(v) + 편향 보정을 한 번에. 튜닝 거의 없이 잘 동작 → 사실상 표준.</a:t>
             </a:r>
           </a:p>
         </p:txBody>
@@ -4645,8 +5094,8 @@
         </p:nvSpPr>
         <p:spPr>
           <a:xfrm>
-            <a:off x="6172200" y="4709160"/>
-            <a:ext cx="5486400" cy="1737360"/>
+            <a:off x="6199632" y="4700016"/>
+            <a:ext cx="5486400" cy="1792224"/>
           </a:xfrm>
           <a:prstGeom prst="roundRect">
             <a:avLst/>
@@ -4676,12 +5125,22 @@
           </a:fontRef>
         </p:style>
         <p:txBody>
-          <a:bodyPr rtlCol="0" anchor="ctr" wrap="square" lIns="38100" rIns="38100" tIns="25400" bIns="25400"/>
-          <a:lstStyle/>
-          <a:p>
-            <a:pPr algn="l"/>
-            <a:r>
-              <a:rPr sz="1150" b="1" i="0">
+          <a:bodyPr rtlCol="0" anchor="ctr" wrap="square" lIns="76200" rIns="76200" tIns="38100" bIns="38100"/>
+          <a:lstStyle/>
+          <a:p>
+            <a:pPr algn="l">
+              <a:lnSpc>
+                <a:spcPct val="118000"/>
+              </a:lnSpc>
+              <a:spcBef>
+                <a:spcPts val="0"/>
+              </a:spcBef>
+              <a:spcAft>
+                <a:spcPts val="500"/>
+              </a:spcAft>
+            </a:pPr>
+            <a:r>
+              <a:rPr sz="1400" b="1" i="0">
                 <a:solidFill>
                   <a:srgbClr val="C1121F"/>
                 </a:solidFill>
@@ -4691,15 +5150,25 @@
             </a:r>
           </a:p>
           <a:p>
-            <a:pPr algn="l"/>
-            <a:r>
-              <a:rPr sz="1150" b="0" i="0">
+            <a:pPr algn="l">
+              <a:lnSpc>
+                <a:spcPct val="118000"/>
+              </a:lnSpc>
+              <a:spcBef>
+                <a:spcPts val="0"/>
+              </a:spcBef>
+              <a:spcAft>
+                <a:spcPts val="300"/>
+              </a:spcAft>
+            </a:pPr>
+            <a:r>
+              <a:rPr sz="1450" b="0" i="0">
                 <a:solidFill>
                   <a:srgbClr val="22252B"/>
                 </a:solidFill>
                 <a:latin typeface="Noto Sans CJK KR"/>
               </a:rPr>
-              <a:t>방향(momentum)은 아직 안 씀. 초기(0에서 시작) 편향 보정도 없다.  → Adam</a:t>
+              <a:t>L2 weight decay를 gradient에 더하면 1/√v̂로 나뉘어 좌표별로 왜곡된다.  → AdamW</a:t>
             </a:r>
           </a:p>
         </p:txBody>
@@ -4737,11 +5206,11 @@
             <a:avLst/>
           </a:prstGeom>
           <a:solidFill>
-            <a:srgbClr val="2A9D8F"/>
+            <a:srgbClr val="C9A227"/>
           </a:solidFill>
           <a:ln w="12700">
             <a:solidFill>
-              <a:srgbClr val="2A9D8F"/>
+              <a:srgbClr val="C9A227"/>
             </a:solidFill>
           </a:ln>
           <a:effectLst/>
@@ -4761,10 +5230,20 @@
           </a:fontRef>
         </p:style>
         <p:txBody>
-          <a:bodyPr rtlCol="0" anchor="ctr" wrap="square" lIns="38100" rIns="38100" tIns="25400" bIns="25400"/>
-          <a:lstStyle/>
-          <a:p>
-            <a:pPr algn="ctr"/>
+          <a:bodyPr rtlCol="0" anchor="ctr" wrap="square" lIns="76200" rIns="76200" tIns="38100" bIns="38100"/>
+          <a:lstStyle/>
+          <a:p>
+            <a:pPr algn="ctr">
+              <a:lnSpc>
+                <a:spcPct val="118000"/>
+              </a:lnSpc>
+              <a:spcBef>
+                <a:spcPts val="0"/>
+              </a:spcBef>
+              <a:spcAft>
+                <a:spcPts val="300"/>
+              </a:spcAft>
+            </a:pPr>
             <a:r>
               <a:rPr sz="1100" b="0" i="0">
                 <a:solidFill>
@@ -4785,7 +5264,7 @@
         </p:nvSpPr>
         <p:spPr>
           <a:xfrm>
-            <a:off x="502920" y="164592"/>
+            <a:off x="502920" y="146304"/>
             <a:ext cx="11185855" cy="320040"/>
           </a:xfrm>
           <a:prstGeom prst="rect">
@@ -4794,20 +5273,30 @@
           <a:noFill/>
         </p:spPr>
         <p:txBody>
-          <a:bodyPr wrap="square" anchor="t" lIns="25400" rIns="25400" tIns="12700" bIns="12700">
+          <a:bodyPr wrap="square" anchor="t" lIns="38100" rIns="38100" tIns="25400" bIns="25400">
             <a:spAutoFit/>
           </a:bodyPr>
           <a:lstStyle/>
           <a:p>
-            <a:pPr algn="l"/>
-            <a:r>
-              <a:rPr sz="1200" b="1" i="0">
-                <a:solidFill>
-                  <a:srgbClr val="2A9D8F"/>
-                </a:solidFill>
-                <a:latin typeface="Noto Sans CJK KR"/>
-              </a:rPr>
-              <a:t>A2 · AdaDelta</a:t>
+            <a:pPr algn="l">
+              <a:lnSpc>
+                <a:spcPct val="120000"/>
+              </a:lnSpc>
+              <a:spcBef>
+                <a:spcPts val="0"/>
+              </a:spcBef>
+              <a:spcAft>
+                <a:spcPts val="0"/>
+              </a:spcAft>
+            </a:pPr>
+            <a:r>
+              <a:rPr sz="1350" b="1" i="0">
+                <a:solidFill>
+                  <a:srgbClr val="C9A227"/>
+                </a:solidFill>
+                <a:latin typeface="Noto Sans CJK KR"/>
+              </a:rPr>
+              <a:t>A2 · AdamW</a:t>
             </a:r>
           </a:p>
         </p:txBody>
@@ -4821,7 +5310,7 @@
         <p:spPr>
           <a:xfrm>
             <a:off x="502920" y="457200"/>
-            <a:ext cx="11185855" cy="548640"/>
+            <a:ext cx="11185855" cy="566928"/>
           </a:xfrm>
           <a:prstGeom prst="rect">
             <a:avLst/>
@@ -4829,20 +5318,30 @@
           <a:noFill/>
         </p:spPr>
         <p:txBody>
-          <a:bodyPr wrap="square" anchor="t" lIns="25400" rIns="25400" tIns="12700" bIns="12700">
+          <a:bodyPr wrap="square" anchor="t" lIns="38100" rIns="38100" tIns="25400" bIns="25400">
             <a:spAutoFit/>
           </a:bodyPr>
           <a:lstStyle/>
           <a:p>
-            <a:pPr algn="l"/>
-            <a:r>
-              <a:rPr sz="2200" b="1" i="0">
+            <a:pPr algn="l">
+              <a:lnSpc>
+                <a:spcPct val="120000"/>
+              </a:lnSpc>
+              <a:spcBef>
+                <a:spcPts val="0"/>
+              </a:spcBef>
+              <a:spcAft>
+                <a:spcPts val="0"/>
+              </a:spcAft>
+            </a:pPr>
+            <a:r>
+              <a:rPr sz="2400" b="1" i="0">
                 <a:solidFill>
                   <a:srgbClr val="22252B"/>
                 </a:solidFill>
                 <a:latin typeface="Noto Sans CJK KR"/>
               </a:rPr>
-              <a:t>AdaDelta  ·  Adaptive Delta</a:t>
+              <a:t>AdamW ★  ·  Adam with decoupled Weight decay</a:t>
             </a:r>
           </a:p>
         </p:txBody>
@@ -4855,8 +5354,8 @@
         </p:nvSpPr>
         <p:spPr>
           <a:xfrm>
-            <a:off x="502920" y="932688"/>
-            <a:ext cx="5486400" cy="274320"/>
+            <a:off x="502920" y="1078992"/>
+            <a:ext cx="11155680" cy="310896"/>
           </a:xfrm>
           <a:prstGeom prst="rect">
             <a:avLst/>
@@ -4864,20 +5363,30 @@
           <a:noFill/>
         </p:spPr>
         <p:txBody>
-          <a:bodyPr wrap="square" anchor="t" lIns="25400" rIns="25400" tIns="12700" bIns="12700">
+          <a:bodyPr wrap="square" anchor="t" lIns="38100" rIns="38100" tIns="25400" bIns="25400">
             <a:spAutoFit/>
           </a:bodyPr>
           <a:lstStyle/>
           <a:p>
-            <a:pPr algn="l"/>
-            <a:r>
-              <a:rPr sz="1100" b="1" i="0">
-                <a:solidFill>
-                  <a:srgbClr val="2A9D8F"/>
-                </a:solidFill>
-                <a:latin typeface="Noto Sans CJK KR"/>
-              </a:rPr>
-              <a:t>초록 줄기 — η 제거(곁가지)</a:t>
+            <a:pPr algn="l">
+              <a:lnSpc>
+                <a:spcPct val="120000"/>
+              </a:lnSpc>
+              <a:spcBef>
+                <a:spcPts val="0"/>
+              </a:spcBef>
+              <a:spcAft>
+                <a:spcPts val="0"/>
+              </a:spcAft>
+            </a:pPr>
+            <a:r>
+              <a:rPr sz="1350" b="1" i="0">
+                <a:solidFill>
+                  <a:srgbClr val="C9A227"/>
+                </a:solidFill>
+                <a:latin typeface="Noto Sans CJK KR"/>
+              </a:rPr>
+              <a:t>종착점 — 오늘의 표준</a:t>
             </a:r>
           </a:p>
         </p:txBody>
@@ -4890,8 +5399,204 @@
         </p:nvSpPr>
         <p:spPr>
           <a:xfrm>
-            <a:off x="502920" y="1298448"/>
-            <a:ext cx="11155680" cy="896112"/>
+            <a:off x="502920" y="1463040"/>
+            <a:ext cx="11183112" cy="1024128"/>
+          </a:xfrm>
+          <a:prstGeom prst="roundRect">
+            <a:avLst/>
+          </a:prstGeom>
+          <a:solidFill>
+            <a:srgbClr val="F6ECC7"/>
+          </a:solidFill>
+          <a:ln w="12700">
+            <a:solidFill>
+              <a:srgbClr val="C9A227"/>
+            </a:solidFill>
+          </a:ln>
+          <a:effectLst/>
+        </p:spPr>
+        <p:style>
+          <a:lnRef idx="1">
+            <a:schemeClr val="accent1"/>
+          </a:lnRef>
+          <a:fillRef idx="3">
+            <a:schemeClr val="accent1"/>
+          </a:fillRef>
+          <a:effectRef idx="2">
+            <a:schemeClr val="accent1"/>
+          </a:effectRef>
+          <a:fontRef idx="minor">
+            <a:schemeClr val="lt1"/>
+          </a:fontRef>
+        </p:style>
+        <p:txBody>
+          <a:bodyPr rtlCol="0" anchor="ctr" wrap="square" lIns="76200" rIns="76200" tIns="38100" bIns="38100"/>
+          <a:lstStyle/>
+          <a:p>
+            <a:pPr algn="l">
+              <a:lnSpc>
+                <a:spcPct val="118000"/>
+              </a:lnSpc>
+              <a:spcBef>
+                <a:spcPts val="0"/>
+              </a:spcBef>
+              <a:spcAft>
+                <a:spcPts val="400"/>
+              </a:spcAft>
+            </a:pPr>
+            <a:r>
+              <a:rPr sz="1400" b="1" i="0">
+                <a:solidFill>
+                  <a:srgbClr val="C9A227"/>
+                </a:solidFill>
+                <a:latin typeface="Noto Sans CJK KR"/>
+              </a:rPr>
+              <a:t>직관 (왜 이렇게?)</a:t>
+            </a:r>
+          </a:p>
+          <a:p>
+            <a:pPr algn="l">
+              <a:lnSpc>
+                <a:spcPct val="118000"/>
+              </a:lnSpc>
+              <a:spcBef>
+                <a:spcPts val="0"/>
+              </a:spcBef>
+              <a:spcAft>
+                <a:spcPts val="300"/>
+              </a:spcAft>
+            </a:pPr>
+            <a:r>
+              <a:rPr sz="1650" b="0" i="0">
+                <a:solidFill>
+                  <a:srgbClr val="22252B"/>
+                </a:solidFill>
+                <a:latin typeface="Noto Sans CJK KR"/>
+              </a:rPr>
+              <a:t>"weight decay(정규화)를 gradient에 섞지 말고, weight에서 '직접' 빼자 — 그래야 좌표마다 똑같이 적용된다."</a:t>
+            </a:r>
+          </a:p>
+        </p:txBody>
+      </p:sp>
+      <p:sp>
+        <p:nvSpPr>
+          <p:cNvPr id="7" name="Rounded Rectangle 6"/>
+          <p:cNvSpPr/>
+          <p:nvPr/>
+        </p:nvSpPr>
+        <p:spPr>
+          <a:xfrm>
+            <a:off x="502920" y="2615184"/>
+            <a:ext cx="11183112" cy="1938528"/>
+          </a:xfrm>
+          <a:prstGeom prst="roundRect">
+            <a:avLst/>
+          </a:prstGeom>
+          <a:solidFill>
+            <a:srgbClr val="FFFFFF"/>
+          </a:solidFill>
+          <a:ln w="12700">
+            <a:solidFill>
+              <a:srgbClr val="8A8F98"/>
+            </a:solidFill>
+          </a:ln>
+          <a:effectLst/>
+        </p:spPr>
+        <p:style>
+          <a:lnRef idx="1">
+            <a:schemeClr val="accent1"/>
+          </a:lnRef>
+          <a:fillRef idx="3">
+            <a:schemeClr val="accent1"/>
+          </a:fillRef>
+          <a:effectRef idx="2">
+            <a:schemeClr val="accent1"/>
+          </a:effectRef>
+          <a:fontRef idx="minor">
+            <a:schemeClr val="lt1"/>
+          </a:fontRef>
+        </p:style>
+        <p:txBody>
+          <a:bodyPr rtlCol="0" anchor="ctr" wrap="square" lIns="76200" rIns="76200" tIns="38100" bIns="38100"/>
+          <a:lstStyle/>
+          <a:p>
+            <a:pPr algn="l">
+              <a:lnSpc>
+                <a:spcPct val="118000"/>
+              </a:lnSpc>
+              <a:spcBef>
+                <a:spcPts val="0"/>
+              </a:spcBef>
+              <a:spcAft>
+                <a:spcPts val="600"/>
+              </a:spcAft>
+            </a:pPr>
+            <a:r>
+              <a:rPr sz="1400" b="1" i="0">
+                <a:solidFill>
+                  <a:srgbClr val="22252B"/>
+                </a:solidFill>
+                <a:latin typeface="Noto Sans CJK KR"/>
+              </a:rPr>
+              <a:t>갱신 규칙 (수식)</a:t>
+            </a:r>
+          </a:p>
+          <a:p>
+            <a:pPr algn="l">
+              <a:lnSpc>
+                <a:spcPct val="118000"/>
+              </a:lnSpc>
+              <a:spcBef>
+                <a:spcPts val="0"/>
+              </a:spcBef>
+              <a:spcAft>
+                <a:spcPts val="700"/>
+              </a:spcAft>
+            </a:pPr>
+            <a:r>
+              <a:rPr sz="1550" b="0" i="0">
+                <a:solidFill>
+                  <a:srgbClr val="22252B"/>
+                </a:solidFill>
+                <a:latin typeface="Noto Sans Mono CJK KR"/>
+              </a:rPr>
+              <a:t>m_t, v_t, m̂, v̂ : Adam과 동일 (decay를 g_t에 넣지 않음)</a:t>
+            </a:r>
+          </a:p>
+          <a:p>
+            <a:pPr algn="l">
+              <a:lnSpc>
+                <a:spcPct val="118000"/>
+              </a:lnSpc>
+              <a:spcBef>
+                <a:spcPts val="0"/>
+              </a:spcBef>
+              <a:spcAft>
+                <a:spcPts val="700"/>
+              </a:spcAft>
+            </a:pPr>
+            <a:r>
+              <a:rPr sz="1550" b="0" i="0">
+                <a:solidFill>
+                  <a:srgbClr val="22252B"/>
+                </a:solidFill>
+                <a:latin typeface="Noto Sans Mono CJK KR"/>
+              </a:rPr>
+              <a:t>θ_{t+1} = θ_t − η · ( m̂/(√v̂+ε)  +  λ·θ_t )      # λ·θ 항을 분리(decoupled)</a:t>
+            </a:r>
+          </a:p>
+        </p:txBody>
+      </p:sp>
+      <p:sp>
+        <p:nvSpPr>
+          <p:cNvPr id="8" name="Rounded Rectangle 7"/>
+          <p:cNvSpPr/>
+          <p:nvPr/>
+        </p:nvSpPr>
+        <p:spPr>
+          <a:xfrm>
+            <a:off x="502920" y="4700016"/>
+            <a:ext cx="5486400" cy="1792224"/>
           </a:xfrm>
           <a:prstGeom prst="roundRect">
             <a:avLst/>
@@ -4921,188 +5626,50 @@
           </a:fontRef>
         </p:style>
         <p:txBody>
-          <a:bodyPr rtlCol="0" anchor="ctr" wrap="square" lIns="38100" rIns="38100" tIns="25400" bIns="25400"/>
-          <a:lstStyle/>
-          <a:p>
-            <a:pPr algn="l"/>
-            <a:r>
-              <a:rPr sz="1150" b="1" i="0">
+          <a:bodyPr rtlCol="0" anchor="ctr" wrap="square" lIns="76200" rIns="76200" tIns="38100" bIns="38100"/>
+          <a:lstStyle/>
+          <a:p>
+            <a:pPr algn="l">
+              <a:lnSpc>
+                <a:spcPct val="118000"/>
+              </a:lnSpc>
+              <a:spcBef>
+                <a:spcPts val="0"/>
+              </a:spcBef>
+              <a:spcAft>
+                <a:spcPts val="500"/>
+              </a:spcAft>
+            </a:pPr>
+            <a:r>
+              <a:rPr sz="1400" b="1" i="0">
                 <a:solidFill>
                   <a:srgbClr val="2A9D8F"/>
                 </a:solidFill>
                 <a:latin typeface="Noto Sans CJK KR"/>
               </a:rPr>
-              <a:t>직관 (왜 이렇게?)</a:t>
-            </a:r>
-          </a:p>
-          <a:p>
-            <a:pPr algn="l"/>
-            <a:r>
-              <a:rPr sz="1250" b="0" i="0">
+              <a:t>이 optimizer가 해결한 것</a:t>
+            </a:r>
+          </a:p>
+          <a:p>
+            <a:pPr algn="l">
+              <a:lnSpc>
+                <a:spcPct val="118000"/>
+              </a:lnSpc>
+              <a:spcBef>
+                <a:spcPts val="0"/>
+              </a:spcBef>
+              <a:spcAft>
+                <a:spcPts val="300"/>
+              </a:spcAft>
+            </a:pPr>
+            <a:r>
+              <a:rPr sz="1450" b="0" i="0">
                 <a:solidFill>
                   <a:srgbClr val="22252B"/>
                 </a:solidFill>
                 <a:latin typeface="Noto Sans CJK KR"/>
               </a:rPr>
-              <a:t>"종종걸음(보폭)이 너무 작아져 정지하는 걸 막고, learning rate η 자체도 없애 보자."</a:t>
-            </a:r>
-          </a:p>
-        </p:txBody>
-      </p:sp>
-      <p:sp>
-        <p:nvSpPr>
-          <p:cNvPr id="7" name="Rounded Rectangle 6"/>
-          <p:cNvSpPr/>
-          <p:nvPr/>
-        </p:nvSpPr>
-        <p:spPr>
-          <a:xfrm>
-            <a:off x="502920" y="2377440"/>
-            <a:ext cx="11155680" cy="2148840"/>
-          </a:xfrm>
-          <a:prstGeom prst="roundRect">
-            <a:avLst/>
-          </a:prstGeom>
-          <a:solidFill>
-            <a:srgbClr val="FFFFFF"/>
-          </a:solidFill>
-          <a:ln w="12700">
-            <a:solidFill>
-              <a:srgbClr val="8A8F98"/>
-            </a:solidFill>
-          </a:ln>
-          <a:effectLst/>
-        </p:spPr>
-        <p:style>
-          <a:lnRef idx="1">
-            <a:schemeClr val="accent1"/>
-          </a:lnRef>
-          <a:fillRef idx="3">
-            <a:schemeClr val="accent1"/>
-          </a:fillRef>
-          <a:effectRef idx="2">
-            <a:schemeClr val="accent1"/>
-          </a:effectRef>
-          <a:fontRef idx="minor">
-            <a:schemeClr val="lt1"/>
-          </a:fontRef>
-        </p:style>
-        <p:txBody>
-          <a:bodyPr rtlCol="0" anchor="ctr" wrap="square" lIns="38100" rIns="38100" tIns="25400" bIns="25400"/>
-          <a:lstStyle/>
-          <a:p>
-            <a:pPr algn="l"/>
-            <a:r>
-              <a:rPr sz="1150" b="1" i="0">
-                <a:solidFill>
-                  <a:srgbClr val="22252B"/>
-                </a:solidFill>
-                <a:latin typeface="Noto Sans CJK KR"/>
-              </a:rPr>
-              <a:t>갱신 규칙 (수식)</a:t>
-            </a:r>
-          </a:p>
-          <a:p>
-            <a:pPr algn="l"/>
-            <a:r>
-              <a:rPr sz="1250" b="0" i="0">
-                <a:solidFill>
-                  <a:srgbClr val="22252B"/>
-                </a:solidFill>
-                <a:latin typeface="Noto Sans Mono CJK KR"/>
-              </a:rPr>
-              <a:t>E[g²]_t = ρ·E[g²]_{t-1} + (1−ρ)·g_t²</a:t>
-            </a:r>
-          </a:p>
-          <a:p>
-            <a:pPr algn="l"/>
-            <a:r>
-              <a:rPr sz="1250" b="0" i="0">
-                <a:solidFill>
-                  <a:srgbClr val="22252B"/>
-                </a:solidFill>
-                <a:latin typeface="Noto Sans Mono CJK KR"/>
-              </a:rPr>
-              <a:t>Δθ_t = − ( √(E[Δθ²]_{t-1}+ε) / √(E[g²]_t+ε) ) · g_t   # 분자=과거 스텝 크기</a:t>
-            </a:r>
-          </a:p>
-          <a:p>
-            <a:pPr algn="l"/>
-            <a:r>
-              <a:rPr sz="1250" b="0" i="0">
-                <a:solidFill>
-                  <a:srgbClr val="22252B"/>
-                </a:solidFill>
-                <a:latin typeface="Noto Sans Mono CJK KR"/>
-              </a:rPr>
-              <a:t>E[Δθ²]_t = ρ·E[Δθ²]_{t-1} + (1−ρ)·Δθ_t² ;   θ_{t+1} = θ_t + Δθ_t</a:t>
-            </a:r>
-          </a:p>
-        </p:txBody>
-      </p:sp>
-      <p:sp>
-        <p:nvSpPr>
-          <p:cNvPr id="8" name="Rounded Rectangle 7"/>
-          <p:cNvSpPr/>
-          <p:nvPr/>
-        </p:nvSpPr>
-        <p:spPr>
-          <a:xfrm>
-            <a:off x="502920" y="4709160"/>
-            <a:ext cx="5486400" cy="1737360"/>
-          </a:xfrm>
-          <a:prstGeom prst="roundRect">
-            <a:avLst/>
-          </a:prstGeom>
-          <a:solidFill>
-            <a:srgbClr val="DAF0ED"/>
-          </a:solidFill>
-          <a:ln w="12700">
-            <a:solidFill>
-              <a:srgbClr val="2A9D8F"/>
-            </a:solidFill>
-          </a:ln>
-          <a:effectLst/>
-        </p:spPr>
-        <p:style>
-          <a:lnRef idx="1">
-            <a:schemeClr val="accent1"/>
-          </a:lnRef>
-          <a:fillRef idx="3">
-            <a:schemeClr val="accent1"/>
-          </a:fillRef>
-          <a:effectRef idx="2">
-            <a:schemeClr val="accent1"/>
-          </a:effectRef>
-          <a:fontRef idx="minor">
-            <a:schemeClr val="lt1"/>
-          </a:fontRef>
-        </p:style>
-        <p:txBody>
-          <a:bodyPr rtlCol="0" anchor="ctr" wrap="square" lIns="38100" rIns="38100" tIns="25400" bIns="25400"/>
-          <a:lstStyle/>
-          <a:p>
-            <a:pPr algn="l"/>
-            <a:r>
-              <a:rPr sz="1150" b="1" i="0">
-                <a:solidFill>
-                  <a:srgbClr val="2A9D8F"/>
-                </a:solidFill>
-                <a:latin typeface="Noto Sans CJK KR"/>
-              </a:rPr>
-              <a:t>이 optimizer가 해결한 것</a:t>
-            </a:r>
-          </a:p>
-          <a:p>
-            <a:pPr algn="l"/>
-            <a:r>
-              <a:rPr sz="1150" b="0" i="0">
-                <a:solidFill>
-                  <a:srgbClr val="22252B"/>
-                </a:solidFill>
-                <a:latin typeface="Noto Sans CJK KR"/>
-              </a:rPr>
-              <a:t>스텝의 '단위'를 Δθ의 EMA로 맞춰 η 없이 자동 보폭. RMSProp의 보폭 소멸도 완화.</a:t>
+              <a:t>decay가 adaptive 스케일(1/√v̂)에 섞이지 않아 정규화가 일관 → 일반화↑. 오늘날 LLM 학습의 표준.</a:t>
             </a:r>
           </a:p>
         </p:txBody>
@@ -5115,8 +5682,8 @@
         </p:nvSpPr>
         <p:spPr>
           <a:xfrm>
-            <a:off x="6172200" y="4709160"/>
-            <a:ext cx="5486400" cy="1737360"/>
+            <a:off x="6199632" y="4700016"/>
+            <a:ext cx="5486400" cy="1792224"/>
           </a:xfrm>
           <a:prstGeom prst="roundRect">
             <a:avLst/>
@@ -5146,12 +5713,22 @@
           </a:fontRef>
         </p:style>
         <p:txBody>
-          <a:bodyPr rtlCol="0" anchor="ctr" wrap="square" lIns="38100" rIns="38100" tIns="25400" bIns="25400"/>
-          <a:lstStyle/>
-          <a:p>
-            <a:pPr algn="l"/>
-            <a:r>
-              <a:rPr sz="1150" b="1" i="0">
+          <a:bodyPr rtlCol="0" anchor="ctr" wrap="square" lIns="76200" rIns="76200" tIns="38100" bIns="38100"/>
+          <a:lstStyle/>
+          <a:p>
+            <a:pPr algn="l">
+              <a:lnSpc>
+                <a:spcPct val="118000"/>
+              </a:lnSpc>
+              <a:spcBef>
+                <a:spcPts val="0"/>
+              </a:spcBef>
+              <a:spcAft>
+                <a:spcPts val="500"/>
+              </a:spcAft>
+            </a:pPr>
+            <a:r>
+              <a:rPr sz="1400" b="1" i="0">
                 <a:solidFill>
                   <a:srgbClr val="C1121F"/>
                 </a:solidFill>
@@ -5161,1407 +5738,19 @@
             </a:r>
           </a:p>
           <a:p>
-            <a:pPr algn="l"/>
-            <a:r>
-              <a:rPr sz="1150" b="0" i="0">
-                <a:solidFill>
-                  <a:srgbClr val="22252B"/>
-                </a:solidFill>
-                <a:latin typeface="Noto Sans CJK KR"/>
-              </a:rPr>
-              <a:t>방향 관성은 미결합. 실무 표준 자리는 곧 Adam이 가져간다.  → Adam</a:t>
-            </a:r>
-          </a:p>
-        </p:txBody>
-      </p:sp>
-    </p:spTree>
-  </p:cSld>
-  <p:clrMapOvr>
-    <a:masterClrMapping/>
-  </p:clrMapOvr>
-</p:sld>
-</file>
-
-<file path=ppt/slides/slide14.xml><?xml version="1.0" encoding="utf-8"?>
-<p:sld xmlns:a="http://schemas.openxmlformats.org/drawingml/2006/main" xmlns:p="http://schemas.openxmlformats.org/presentationml/2006/main" xmlns:r="http://schemas.openxmlformats.org/officeDocument/2006/relationships">
-  <p:cSld>
-    <p:spTree>
-      <p:nvGrpSpPr>
-        <p:cNvPr id="1" name=""/>
-        <p:cNvGrpSpPr/>
-        <p:nvPr/>
-      </p:nvGrpSpPr>
-      <p:grpSpPr/>
-      <p:sp>
-        <p:nvSpPr>
-          <p:cNvPr id="2" name="Rectangle 1"/>
-          <p:cNvSpPr/>
-          <p:nvPr/>
-        </p:nvSpPr>
-        <p:spPr>
-          <a:xfrm>
-            <a:off x="0" y="0"/>
-            <a:ext cx="12191695" cy="54864"/>
-          </a:xfrm>
-          <a:prstGeom prst="rect">
-            <a:avLst/>
-          </a:prstGeom>
-          <a:solidFill>
-            <a:srgbClr val="C9A227"/>
-          </a:solidFill>
-          <a:ln w="12700">
-            <a:solidFill>
-              <a:srgbClr val="C9A227"/>
-            </a:solidFill>
-          </a:ln>
-          <a:effectLst/>
-        </p:spPr>
-        <p:style>
-          <a:lnRef idx="1">
-            <a:schemeClr val="accent1"/>
-          </a:lnRef>
-          <a:fillRef idx="3">
-            <a:schemeClr val="accent1"/>
-          </a:fillRef>
-          <a:effectRef idx="2">
-            <a:schemeClr val="accent1"/>
-          </a:effectRef>
-          <a:fontRef idx="minor">
-            <a:schemeClr val="lt1"/>
-          </a:fontRef>
-        </p:style>
-        <p:txBody>
-          <a:bodyPr rtlCol="0" anchor="ctr" wrap="square" lIns="38100" rIns="38100" tIns="25400" bIns="25400"/>
-          <a:lstStyle/>
-          <a:p>
-            <a:pPr algn="ctr"/>
-            <a:r>
-              <a:rPr sz="1100" b="0" i="0">
-                <a:solidFill>
-                  <a:srgbClr val="22252B"/>
-                </a:solidFill>
-                <a:latin typeface="Noto Sans CJK KR"/>
-              </a:rPr>
-              <a:t/>
-            </a:r>
-          </a:p>
-        </p:txBody>
-      </p:sp>
-      <p:sp>
-        <p:nvSpPr>
-          <p:cNvPr id="3" name="TextBox 2"/>
-          <p:cNvSpPr txBox="1"/>
-          <p:nvPr/>
-        </p:nvSpPr>
-        <p:spPr>
-          <a:xfrm>
-            <a:off x="502920" y="164592"/>
-            <a:ext cx="11185855" cy="320040"/>
-          </a:xfrm>
-          <a:prstGeom prst="rect">
-            <a:avLst/>
-          </a:prstGeom>
-          <a:noFill/>
-        </p:spPr>
-        <p:txBody>
-          <a:bodyPr wrap="square" anchor="t" lIns="25400" rIns="25400" tIns="12700" bIns="12700">
-            <a:spAutoFit/>
-          </a:bodyPr>
-          <a:lstStyle/>
-          <a:p>
-            <a:pPr algn="l"/>
-            <a:r>
-              <a:rPr sz="1200" b="1" i="0">
-                <a:solidFill>
-                  <a:srgbClr val="C9A227"/>
-                </a:solidFill>
-                <a:latin typeface="Noto Sans CJK KR"/>
-              </a:rPr>
-              <a:t>A2 · Adam</a:t>
-            </a:r>
-          </a:p>
-        </p:txBody>
-      </p:sp>
-      <p:sp>
-        <p:nvSpPr>
-          <p:cNvPr id="4" name="TextBox 3"/>
-          <p:cNvSpPr txBox="1"/>
-          <p:nvPr/>
-        </p:nvSpPr>
-        <p:spPr>
-          <a:xfrm>
-            <a:off x="502920" y="457200"/>
-            <a:ext cx="11185855" cy="548640"/>
-          </a:xfrm>
-          <a:prstGeom prst="rect">
-            <a:avLst/>
-          </a:prstGeom>
-          <a:noFill/>
-        </p:spPr>
-        <p:txBody>
-          <a:bodyPr wrap="square" anchor="t" lIns="25400" rIns="25400" tIns="12700" bIns="12700">
-            <a:spAutoFit/>
-          </a:bodyPr>
-          <a:lstStyle/>
-          <a:p>
-            <a:pPr algn="l"/>
-            <a:r>
-              <a:rPr sz="2200" b="1" i="0">
-                <a:solidFill>
-                  <a:srgbClr val="22252B"/>
-                </a:solidFill>
-                <a:latin typeface="Noto Sans CJK KR"/>
-              </a:rPr>
-              <a:t>Adam  ·  Adaptive Moment Estimation</a:t>
-            </a:r>
-          </a:p>
-        </p:txBody>
-      </p:sp>
-      <p:sp>
-        <p:nvSpPr>
-          <p:cNvPr id="5" name="TextBox 4"/>
-          <p:cNvSpPr txBox="1"/>
-          <p:nvPr/>
-        </p:nvSpPr>
-        <p:spPr>
-          <a:xfrm>
-            <a:off x="502920" y="932688"/>
-            <a:ext cx="5486400" cy="274320"/>
-          </a:xfrm>
-          <a:prstGeom prst="rect">
-            <a:avLst/>
-          </a:prstGeom>
-          <a:noFill/>
-        </p:spPr>
-        <p:txBody>
-          <a:bodyPr wrap="square" anchor="t" lIns="25400" rIns="25400" tIns="12700" bIns="12700">
-            <a:spAutoFit/>
-          </a:bodyPr>
-          <a:lstStyle/>
-          <a:p>
-            <a:pPr algn="l"/>
-            <a:r>
-              <a:rPr sz="1100" b="1" i="0">
-                <a:solidFill>
-                  <a:srgbClr val="C9A227"/>
-                </a:solidFill>
-                <a:latin typeface="Noto Sans CJK KR"/>
-              </a:rPr>
-              <a:t>두 줄기의 합류 ★</a:t>
-            </a:r>
-          </a:p>
-        </p:txBody>
-      </p:sp>
-      <p:sp>
-        <p:nvSpPr>
-          <p:cNvPr id="6" name="Rounded Rectangle 5"/>
-          <p:cNvSpPr/>
-          <p:nvPr/>
-        </p:nvSpPr>
-        <p:spPr>
-          <a:xfrm>
-            <a:off x="502920" y="1298448"/>
-            <a:ext cx="11155680" cy="896112"/>
-          </a:xfrm>
-          <a:prstGeom prst="roundRect">
-            <a:avLst/>
-          </a:prstGeom>
-          <a:solidFill>
-            <a:srgbClr val="F6ECC7"/>
-          </a:solidFill>
-          <a:ln w="12700">
-            <a:solidFill>
-              <a:srgbClr val="C9A227"/>
-            </a:solidFill>
-          </a:ln>
-          <a:effectLst/>
-        </p:spPr>
-        <p:style>
-          <a:lnRef idx="1">
-            <a:schemeClr val="accent1"/>
-          </a:lnRef>
-          <a:fillRef idx="3">
-            <a:schemeClr val="accent1"/>
-          </a:fillRef>
-          <a:effectRef idx="2">
-            <a:schemeClr val="accent1"/>
-          </a:effectRef>
-          <a:fontRef idx="minor">
-            <a:schemeClr val="lt1"/>
-          </a:fontRef>
-        </p:style>
-        <p:txBody>
-          <a:bodyPr rtlCol="0" anchor="ctr" wrap="square" lIns="38100" rIns="38100" tIns="25400" bIns="25400"/>
-          <a:lstStyle/>
-          <a:p>
-            <a:pPr algn="l"/>
-            <a:r>
-              <a:rPr sz="1150" b="1" i="0">
-                <a:solidFill>
-                  <a:srgbClr val="C9A227"/>
-                </a:solidFill>
-                <a:latin typeface="Noto Sans CJK KR"/>
-              </a:rPr>
-              <a:t>직관 (왜 이렇게?)</a:t>
-            </a:r>
-          </a:p>
-          <a:p>
-            <a:pPr algn="l"/>
-            <a:r>
-              <a:rPr sz="1250" b="0" i="0">
-                <a:solidFill>
-                  <a:srgbClr val="22252B"/>
-                </a:solidFill>
-                <a:latin typeface="Noto Sans CJK KR"/>
-              </a:rPr>
-              <a:t>"RMSProp(보폭) + Momentum(방향)을 합치자 — 방향도 스텝 사이즈도 적절하게!"</a:t>
-            </a:r>
-          </a:p>
-        </p:txBody>
-      </p:sp>
-      <p:sp>
-        <p:nvSpPr>
-          <p:cNvPr id="7" name="Rounded Rectangle 6"/>
-          <p:cNvSpPr/>
-          <p:nvPr/>
-        </p:nvSpPr>
-        <p:spPr>
-          <a:xfrm>
-            <a:off x="502920" y="2377440"/>
-            <a:ext cx="11155680" cy="2148840"/>
-          </a:xfrm>
-          <a:prstGeom prst="roundRect">
-            <a:avLst/>
-          </a:prstGeom>
-          <a:solidFill>
-            <a:srgbClr val="FFFFFF"/>
-          </a:solidFill>
-          <a:ln w="12700">
-            <a:solidFill>
-              <a:srgbClr val="8A8F98"/>
-            </a:solidFill>
-          </a:ln>
-          <a:effectLst/>
-        </p:spPr>
-        <p:style>
-          <a:lnRef idx="1">
-            <a:schemeClr val="accent1"/>
-          </a:lnRef>
-          <a:fillRef idx="3">
-            <a:schemeClr val="accent1"/>
-          </a:fillRef>
-          <a:effectRef idx="2">
-            <a:schemeClr val="accent1"/>
-          </a:effectRef>
-          <a:fontRef idx="minor">
-            <a:schemeClr val="lt1"/>
-          </a:fontRef>
-        </p:style>
-        <p:txBody>
-          <a:bodyPr rtlCol="0" anchor="ctr" wrap="square" lIns="38100" rIns="38100" tIns="25400" bIns="25400"/>
-          <a:lstStyle/>
-          <a:p>
-            <a:pPr algn="l"/>
-            <a:r>
-              <a:rPr sz="1150" b="1" i="0">
-                <a:solidFill>
-                  <a:srgbClr val="22252B"/>
-                </a:solidFill>
-                <a:latin typeface="Noto Sans CJK KR"/>
-              </a:rPr>
-              <a:t>갱신 규칙 (수식)</a:t>
-            </a:r>
-          </a:p>
-          <a:p>
-            <a:pPr algn="l"/>
-            <a:r>
-              <a:rPr sz="1250" b="0" i="0">
-                <a:solidFill>
-                  <a:srgbClr val="22252B"/>
-                </a:solidFill>
-                <a:latin typeface="Noto Sans Mono CJK KR"/>
-              </a:rPr>
-              <a:t>m_t = β₁·m_{t-1} + (1−β₁)·g_t          # 1차 모멘텀: 방향</a:t>
-            </a:r>
-          </a:p>
-          <a:p>
-            <a:pPr algn="l"/>
-            <a:r>
-              <a:rPr sz="1250" b="0" i="0">
-                <a:solidFill>
-                  <a:srgbClr val="22252B"/>
-                </a:solidFill>
-                <a:latin typeface="Noto Sans Mono CJK KR"/>
-              </a:rPr>
-              <a:t>v_t = β₂·v_{t-1} + (1−β₂)·g_t²         # 2차 모멘텀: 좌표별 보폭</a:t>
-            </a:r>
-          </a:p>
-          <a:p>
-            <a:pPr algn="l"/>
-            <a:r>
-              <a:rPr sz="1250" b="0" i="0">
-                <a:solidFill>
-                  <a:srgbClr val="22252B"/>
-                </a:solidFill>
-                <a:latin typeface="Noto Sans Mono CJK KR"/>
-              </a:rPr>
-              <a:t>m̂ = m_t/(1−β₁^t),  v̂ = v_t/(1−β₂^t)     # 초기 0-편향 보정</a:t>
-            </a:r>
-          </a:p>
-          <a:p>
-            <a:pPr algn="l"/>
-            <a:r>
-              <a:rPr sz="1250" b="0" i="0">
-                <a:solidFill>
-                  <a:srgbClr val="22252B"/>
-                </a:solidFill>
-                <a:latin typeface="Noto Sans Mono CJK KR"/>
-              </a:rPr>
-              <a:t>θ_{t+1} = θ_t − η · m̂ / (√v̂ + ε)</a:t>
-            </a:r>
-          </a:p>
-        </p:txBody>
-      </p:sp>
-      <p:sp>
-        <p:nvSpPr>
-          <p:cNvPr id="8" name="Rounded Rectangle 7"/>
-          <p:cNvSpPr/>
-          <p:nvPr/>
-        </p:nvSpPr>
-        <p:spPr>
-          <a:xfrm>
-            <a:off x="502920" y="4709160"/>
-            <a:ext cx="5486400" cy="1737360"/>
-          </a:xfrm>
-          <a:prstGeom prst="roundRect">
-            <a:avLst/>
-          </a:prstGeom>
-          <a:solidFill>
-            <a:srgbClr val="DAF0ED"/>
-          </a:solidFill>
-          <a:ln w="12700">
-            <a:solidFill>
-              <a:srgbClr val="2A9D8F"/>
-            </a:solidFill>
-          </a:ln>
-          <a:effectLst/>
-        </p:spPr>
-        <p:style>
-          <a:lnRef idx="1">
-            <a:schemeClr val="accent1"/>
-          </a:lnRef>
-          <a:fillRef idx="3">
-            <a:schemeClr val="accent1"/>
-          </a:fillRef>
-          <a:effectRef idx="2">
-            <a:schemeClr val="accent1"/>
-          </a:effectRef>
-          <a:fontRef idx="minor">
-            <a:schemeClr val="lt1"/>
-          </a:fontRef>
-        </p:style>
-        <p:txBody>
-          <a:bodyPr rtlCol="0" anchor="ctr" wrap="square" lIns="38100" rIns="38100" tIns="25400" bIns="25400"/>
-          <a:lstStyle/>
-          <a:p>
-            <a:pPr algn="l"/>
-            <a:r>
-              <a:rPr sz="1150" b="1" i="0">
-                <a:solidFill>
-                  <a:srgbClr val="2A9D8F"/>
-                </a:solidFill>
-                <a:latin typeface="Noto Sans CJK KR"/>
-              </a:rPr>
-              <a:t>이 optimizer가 해결한 것</a:t>
-            </a:r>
-          </a:p>
-          <a:p>
-            <a:pPr algn="l"/>
-            <a:r>
-              <a:rPr sz="1150" b="0" i="0">
-                <a:solidFill>
-                  <a:srgbClr val="22252B"/>
-                </a:solidFill>
-                <a:latin typeface="Noto Sans CJK KR"/>
-              </a:rPr>
-              <a:t>방향(m) + 좌표별 보폭(v) + 편향 보정을 한 번에. 튜닝 거의 없이 잘 동작 → 사실상 표준.</a:t>
-            </a:r>
-          </a:p>
-        </p:txBody>
-      </p:sp>
-      <p:sp>
-        <p:nvSpPr>
-          <p:cNvPr id="9" name="Rounded Rectangle 8"/>
-          <p:cNvSpPr/>
-          <p:nvPr/>
-        </p:nvSpPr>
-        <p:spPr>
-          <a:xfrm>
-            <a:off x="6172200" y="4709160"/>
-            <a:ext cx="5486400" cy="1737360"/>
-          </a:xfrm>
-          <a:prstGeom prst="roundRect">
-            <a:avLst/>
-          </a:prstGeom>
-          <a:solidFill>
-            <a:srgbClr val="F6DDDD"/>
-          </a:solidFill>
-          <a:ln w="12700">
-            <a:solidFill>
-              <a:srgbClr val="C1121F"/>
-            </a:solidFill>
-          </a:ln>
-          <a:effectLst/>
-        </p:spPr>
-        <p:style>
-          <a:lnRef idx="1">
-            <a:schemeClr val="accent1"/>
-          </a:lnRef>
-          <a:fillRef idx="3">
-            <a:schemeClr val="accent1"/>
-          </a:fillRef>
-          <a:effectRef idx="2">
-            <a:schemeClr val="accent1"/>
-          </a:effectRef>
-          <a:fontRef idx="minor">
-            <a:schemeClr val="lt1"/>
-          </a:fontRef>
-        </p:style>
-        <p:txBody>
-          <a:bodyPr rtlCol="0" anchor="ctr" wrap="square" lIns="38100" rIns="38100" tIns="25400" bIns="25400"/>
-          <a:lstStyle/>
-          <a:p>
-            <a:pPr algn="l"/>
-            <a:r>
-              <a:rPr sz="1150" b="1" i="0">
-                <a:solidFill>
-                  <a:srgbClr val="C1121F"/>
-                </a:solidFill>
-                <a:latin typeface="Noto Sans CJK KR"/>
-              </a:rPr>
-              <a:t>남은 문제 → 다음</a:t>
-            </a:r>
-          </a:p>
-          <a:p>
-            <a:pPr algn="l"/>
-            <a:r>
-              <a:rPr sz="1150" b="0" i="0">
-                <a:solidFill>
-                  <a:srgbClr val="22252B"/>
-                </a:solidFill>
-                <a:latin typeface="Noto Sans CJK KR"/>
-              </a:rPr>
-              <a:t>L2 weight decay를 gradient에 더하면 1/√v̂로 나뉘어 좌표별로 왜곡된다.  → AdamW</a:t>
-            </a:r>
-          </a:p>
-        </p:txBody>
-      </p:sp>
-    </p:spTree>
-  </p:cSld>
-  <p:clrMapOvr>
-    <a:masterClrMapping/>
-  </p:clrMapOvr>
-</p:sld>
-</file>
-
-<file path=ppt/slides/slide15.xml><?xml version="1.0" encoding="utf-8"?>
-<p:sld xmlns:a="http://schemas.openxmlformats.org/drawingml/2006/main" xmlns:p="http://schemas.openxmlformats.org/presentationml/2006/main" xmlns:r="http://schemas.openxmlformats.org/officeDocument/2006/relationships">
-  <p:cSld>
-    <p:spTree>
-      <p:nvGrpSpPr>
-        <p:cNvPr id="1" name=""/>
-        <p:cNvGrpSpPr/>
-        <p:nvPr/>
-      </p:nvGrpSpPr>
-      <p:grpSpPr/>
-      <p:sp>
-        <p:nvSpPr>
-          <p:cNvPr id="2" name="Rectangle 1"/>
-          <p:cNvSpPr/>
-          <p:nvPr/>
-        </p:nvSpPr>
-        <p:spPr>
-          <a:xfrm>
-            <a:off x="0" y="0"/>
-            <a:ext cx="12191695" cy="54864"/>
-          </a:xfrm>
-          <a:prstGeom prst="rect">
-            <a:avLst/>
-          </a:prstGeom>
-          <a:solidFill>
-            <a:srgbClr val="C9A227"/>
-          </a:solidFill>
-          <a:ln w="12700">
-            <a:solidFill>
-              <a:srgbClr val="C9A227"/>
-            </a:solidFill>
-          </a:ln>
-          <a:effectLst/>
-        </p:spPr>
-        <p:style>
-          <a:lnRef idx="1">
-            <a:schemeClr val="accent1"/>
-          </a:lnRef>
-          <a:fillRef idx="3">
-            <a:schemeClr val="accent1"/>
-          </a:fillRef>
-          <a:effectRef idx="2">
-            <a:schemeClr val="accent1"/>
-          </a:effectRef>
-          <a:fontRef idx="minor">
-            <a:schemeClr val="lt1"/>
-          </a:fontRef>
-        </p:style>
-        <p:txBody>
-          <a:bodyPr rtlCol="0" anchor="ctr" wrap="square" lIns="38100" rIns="38100" tIns="25400" bIns="25400"/>
-          <a:lstStyle/>
-          <a:p>
-            <a:pPr algn="ctr"/>
-            <a:r>
-              <a:rPr sz="1100" b="0" i="0">
-                <a:solidFill>
-                  <a:srgbClr val="22252B"/>
-                </a:solidFill>
-                <a:latin typeface="Noto Sans CJK KR"/>
-              </a:rPr>
-              <a:t/>
-            </a:r>
-          </a:p>
-        </p:txBody>
-      </p:sp>
-      <p:sp>
-        <p:nvSpPr>
-          <p:cNvPr id="3" name="TextBox 2"/>
-          <p:cNvSpPr txBox="1"/>
-          <p:nvPr/>
-        </p:nvSpPr>
-        <p:spPr>
-          <a:xfrm>
-            <a:off x="502920" y="164592"/>
-            <a:ext cx="11185855" cy="320040"/>
-          </a:xfrm>
-          <a:prstGeom prst="rect">
-            <a:avLst/>
-          </a:prstGeom>
-          <a:noFill/>
-        </p:spPr>
-        <p:txBody>
-          <a:bodyPr wrap="square" anchor="t" lIns="25400" rIns="25400" tIns="12700" bIns="12700">
-            <a:spAutoFit/>
-          </a:bodyPr>
-          <a:lstStyle/>
-          <a:p>
-            <a:pPr algn="l"/>
-            <a:r>
-              <a:rPr sz="1200" b="1" i="0">
-                <a:solidFill>
-                  <a:srgbClr val="C9A227"/>
-                </a:solidFill>
-                <a:latin typeface="Noto Sans CJK KR"/>
-              </a:rPr>
-              <a:t>A2 · Nadam</a:t>
-            </a:r>
-          </a:p>
-        </p:txBody>
-      </p:sp>
-      <p:sp>
-        <p:nvSpPr>
-          <p:cNvPr id="4" name="TextBox 3"/>
-          <p:cNvSpPr txBox="1"/>
-          <p:nvPr/>
-        </p:nvSpPr>
-        <p:spPr>
-          <a:xfrm>
-            <a:off x="502920" y="457200"/>
-            <a:ext cx="11185855" cy="548640"/>
-          </a:xfrm>
-          <a:prstGeom prst="rect">
-            <a:avLst/>
-          </a:prstGeom>
-          <a:noFill/>
-        </p:spPr>
-        <p:txBody>
-          <a:bodyPr wrap="square" anchor="t" lIns="25400" rIns="25400" tIns="12700" bIns="12700">
-            <a:spAutoFit/>
-          </a:bodyPr>
-          <a:lstStyle/>
-          <a:p>
-            <a:pPr algn="l"/>
-            <a:r>
-              <a:rPr sz="2200" b="1" i="0">
-                <a:solidFill>
-                  <a:srgbClr val="22252B"/>
-                </a:solidFill>
-                <a:latin typeface="Noto Sans CJK KR"/>
-              </a:rPr>
-              <a:t>Nadam  ·  Nesterov-accelerated Adam</a:t>
-            </a:r>
-          </a:p>
-        </p:txBody>
-      </p:sp>
-      <p:sp>
-        <p:nvSpPr>
-          <p:cNvPr id="5" name="TextBox 4"/>
-          <p:cNvSpPr txBox="1"/>
-          <p:nvPr/>
-        </p:nvSpPr>
-        <p:spPr>
-          <a:xfrm>
-            <a:off x="502920" y="932688"/>
-            <a:ext cx="5486400" cy="274320"/>
-          </a:xfrm>
-          <a:prstGeom prst="rect">
-            <a:avLst/>
-          </a:prstGeom>
-          <a:noFill/>
-        </p:spPr>
-        <p:txBody>
-          <a:bodyPr wrap="square" anchor="t" lIns="25400" rIns="25400" tIns="12700" bIns="12700">
-            <a:spAutoFit/>
-          </a:bodyPr>
-          <a:lstStyle/>
-          <a:p>
-            <a:pPr algn="l"/>
-            <a:r>
-              <a:rPr sz="1100" b="1" i="0">
-                <a:solidFill>
-                  <a:srgbClr val="C9A227"/>
-                </a:solidFill>
-                <a:latin typeface="Noto Sans CJK KR"/>
-              </a:rPr>
-              <a:t>합류점의 곁가지</a:t>
-            </a:r>
-          </a:p>
-        </p:txBody>
-      </p:sp>
-      <p:sp>
-        <p:nvSpPr>
-          <p:cNvPr id="6" name="Rounded Rectangle 5"/>
-          <p:cNvSpPr/>
-          <p:nvPr/>
-        </p:nvSpPr>
-        <p:spPr>
-          <a:xfrm>
-            <a:off x="502920" y="1298448"/>
-            <a:ext cx="11155680" cy="896112"/>
-          </a:xfrm>
-          <a:prstGeom prst="roundRect">
-            <a:avLst/>
-          </a:prstGeom>
-          <a:solidFill>
-            <a:srgbClr val="F6ECC7"/>
-          </a:solidFill>
-          <a:ln w="12700">
-            <a:solidFill>
-              <a:srgbClr val="C9A227"/>
-            </a:solidFill>
-          </a:ln>
-          <a:effectLst/>
-        </p:spPr>
-        <p:style>
-          <a:lnRef idx="1">
-            <a:schemeClr val="accent1"/>
-          </a:lnRef>
-          <a:fillRef idx="3">
-            <a:schemeClr val="accent1"/>
-          </a:fillRef>
-          <a:effectRef idx="2">
-            <a:schemeClr val="accent1"/>
-          </a:effectRef>
-          <a:fontRef idx="minor">
-            <a:schemeClr val="lt1"/>
-          </a:fontRef>
-        </p:style>
-        <p:txBody>
-          <a:bodyPr rtlCol="0" anchor="ctr" wrap="square" lIns="38100" rIns="38100" tIns="25400" bIns="25400"/>
-          <a:lstStyle/>
-          <a:p>
-            <a:pPr algn="l"/>
-            <a:r>
-              <a:rPr sz="1150" b="1" i="0">
-                <a:solidFill>
-                  <a:srgbClr val="C9A227"/>
-                </a:solidFill>
-                <a:latin typeface="Noto Sans CJK KR"/>
-              </a:rPr>
-              <a:t>직관 (왜 이렇게?)</a:t>
-            </a:r>
-          </a:p>
-          <a:p>
-            <a:pPr algn="l"/>
-            <a:r>
-              <a:rPr sz="1250" b="0" i="0">
-                <a:solidFill>
-                  <a:srgbClr val="22252B"/>
-                </a:solidFill>
-                <a:latin typeface="Noto Sans CJK KR"/>
-              </a:rPr>
-              <a:t>"Adam에 (일반 Momentum 대신) NAG의 look-ahead를 붙이자."</a:t>
-            </a:r>
-          </a:p>
-        </p:txBody>
-      </p:sp>
-      <p:sp>
-        <p:nvSpPr>
-          <p:cNvPr id="7" name="Rounded Rectangle 6"/>
-          <p:cNvSpPr/>
-          <p:nvPr/>
-        </p:nvSpPr>
-        <p:spPr>
-          <a:xfrm>
-            <a:off x="502920" y="2377440"/>
-            <a:ext cx="11155680" cy="2148840"/>
-          </a:xfrm>
-          <a:prstGeom prst="roundRect">
-            <a:avLst/>
-          </a:prstGeom>
-          <a:solidFill>
-            <a:srgbClr val="FFFFFF"/>
-          </a:solidFill>
-          <a:ln w="12700">
-            <a:solidFill>
-              <a:srgbClr val="8A8F98"/>
-            </a:solidFill>
-          </a:ln>
-          <a:effectLst/>
-        </p:spPr>
-        <p:style>
-          <a:lnRef idx="1">
-            <a:schemeClr val="accent1"/>
-          </a:lnRef>
-          <a:fillRef idx="3">
-            <a:schemeClr val="accent1"/>
-          </a:fillRef>
-          <a:effectRef idx="2">
-            <a:schemeClr val="accent1"/>
-          </a:effectRef>
-          <a:fontRef idx="minor">
-            <a:schemeClr val="lt1"/>
-          </a:fontRef>
-        </p:style>
-        <p:txBody>
-          <a:bodyPr rtlCol="0" anchor="ctr" wrap="square" lIns="38100" rIns="38100" tIns="25400" bIns="25400"/>
-          <a:lstStyle/>
-          <a:p>
-            <a:pPr algn="l"/>
-            <a:r>
-              <a:rPr sz="1150" b="1" i="0">
-                <a:solidFill>
-                  <a:srgbClr val="22252B"/>
-                </a:solidFill>
-                <a:latin typeface="Noto Sans CJK KR"/>
-              </a:rPr>
-              <a:t>갱신 규칙 (수식)</a:t>
-            </a:r>
-          </a:p>
-          <a:p>
-            <a:pPr algn="l"/>
-            <a:r>
-              <a:rPr sz="1250" b="0" i="0">
-                <a:solidFill>
-                  <a:srgbClr val="22252B"/>
-                </a:solidFill>
-                <a:latin typeface="Noto Sans Mono CJK KR"/>
-              </a:rPr>
-              <a:t>m_t, v_t : Adam과 동일</a:t>
-            </a:r>
-          </a:p>
-          <a:p>
-            <a:pPr algn="l"/>
-            <a:r>
-              <a:rPr sz="1250" b="0" i="0">
-                <a:solidFill>
-                  <a:srgbClr val="22252B"/>
-                </a:solidFill>
-                <a:latin typeface="Noto Sans Mono CJK KR"/>
-              </a:rPr>
-              <a:t>θ_{t+1} = θ_t − η · ( β₁·m̂ + (1−β₁)·g_t/(1−β₁^t) ) / (√v̂ + ε)   # look-ahead 항</a:t>
-            </a:r>
-          </a:p>
-        </p:txBody>
-      </p:sp>
-      <p:sp>
-        <p:nvSpPr>
-          <p:cNvPr id="8" name="Rounded Rectangle 7"/>
-          <p:cNvSpPr/>
-          <p:nvPr/>
-        </p:nvSpPr>
-        <p:spPr>
-          <a:xfrm>
-            <a:off x="502920" y="4709160"/>
-            <a:ext cx="5486400" cy="1737360"/>
-          </a:xfrm>
-          <a:prstGeom prst="roundRect">
-            <a:avLst/>
-          </a:prstGeom>
-          <a:solidFill>
-            <a:srgbClr val="DAF0ED"/>
-          </a:solidFill>
-          <a:ln w="12700">
-            <a:solidFill>
-              <a:srgbClr val="2A9D8F"/>
-            </a:solidFill>
-          </a:ln>
-          <a:effectLst/>
-        </p:spPr>
-        <p:style>
-          <a:lnRef idx="1">
-            <a:schemeClr val="accent1"/>
-          </a:lnRef>
-          <a:fillRef idx="3">
-            <a:schemeClr val="accent1"/>
-          </a:fillRef>
-          <a:effectRef idx="2">
-            <a:schemeClr val="accent1"/>
-          </a:effectRef>
-          <a:fontRef idx="minor">
-            <a:schemeClr val="lt1"/>
-          </a:fontRef>
-        </p:style>
-        <p:txBody>
-          <a:bodyPr rtlCol="0" anchor="ctr" wrap="square" lIns="38100" rIns="38100" tIns="25400" bIns="25400"/>
-          <a:lstStyle/>
-          <a:p>
-            <a:pPr algn="l"/>
-            <a:r>
-              <a:rPr sz="1150" b="1" i="0">
-                <a:solidFill>
-                  <a:srgbClr val="2A9D8F"/>
-                </a:solidFill>
-                <a:latin typeface="Noto Sans CJK KR"/>
-              </a:rPr>
-              <a:t>이 optimizer가 해결한 것</a:t>
-            </a:r>
-          </a:p>
-          <a:p>
-            <a:pPr algn="l"/>
-            <a:r>
-              <a:rPr sz="1150" b="0" i="0">
-                <a:solidFill>
-                  <a:srgbClr val="22252B"/>
-                </a:solidFill>
-                <a:latin typeface="Noto Sans CJK KR"/>
-              </a:rPr>
-              <a:t>Adam의 방향항에 Nesterov 예측을 넣어 약간 더 빠른 수렴.</a:t>
-            </a:r>
-          </a:p>
-        </p:txBody>
-      </p:sp>
-      <p:sp>
-        <p:nvSpPr>
-          <p:cNvPr id="9" name="Rounded Rectangle 8"/>
-          <p:cNvSpPr/>
-          <p:nvPr/>
-        </p:nvSpPr>
-        <p:spPr>
-          <a:xfrm>
-            <a:off x="6172200" y="4709160"/>
-            <a:ext cx="5486400" cy="1737360"/>
-          </a:xfrm>
-          <a:prstGeom prst="roundRect">
-            <a:avLst/>
-          </a:prstGeom>
-          <a:solidFill>
-            <a:srgbClr val="F6DDDD"/>
-          </a:solidFill>
-          <a:ln w="12700">
-            <a:solidFill>
-              <a:srgbClr val="C1121F"/>
-            </a:solidFill>
-          </a:ln>
-          <a:effectLst/>
-        </p:spPr>
-        <p:style>
-          <a:lnRef idx="1">
-            <a:schemeClr val="accent1"/>
-          </a:lnRef>
-          <a:fillRef idx="3">
-            <a:schemeClr val="accent1"/>
-          </a:fillRef>
-          <a:effectRef idx="2">
-            <a:schemeClr val="accent1"/>
-          </a:effectRef>
-          <a:fontRef idx="minor">
-            <a:schemeClr val="lt1"/>
-          </a:fontRef>
-        </p:style>
-        <p:txBody>
-          <a:bodyPr rtlCol="0" anchor="ctr" wrap="square" lIns="38100" rIns="38100" tIns="25400" bIns="25400"/>
-          <a:lstStyle/>
-          <a:p>
-            <a:pPr algn="l"/>
-            <a:r>
-              <a:rPr sz="1150" b="1" i="0">
-                <a:solidFill>
-                  <a:srgbClr val="C1121F"/>
-                </a:solidFill>
-                <a:latin typeface="Noto Sans CJK KR"/>
-              </a:rPr>
-              <a:t>남은 문제 → 다음</a:t>
-            </a:r>
-          </a:p>
-          <a:p>
-            <a:pPr algn="l"/>
-            <a:r>
-              <a:rPr sz="1150" b="0" i="0">
-                <a:solidFill>
-                  <a:srgbClr val="22252B"/>
-                </a:solidFill>
-                <a:latin typeface="Noto Sans CJK KR"/>
-              </a:rPr>
-              <a:t>weight decay 왜곡은 그대로 남아 있다.  → AdamW</a:t>
-            </a:r>
-          </a:p>
-        </p:txBody>
-      </p:sp>
-    </p:spTree>
-  </p:cSld>
-  <p:clrMapOvr>
-    <a:masterClrMapping/>
-  </p:clrMapOvr>
-</p:sld>
-</file>
-
-<file path=ppt/slides/slide16.xml><?xml version="1.0" encoding="utf-8"?>
-<p:sld xmlns:a="http://schemas.openxmlformats.org/drawingml/2006/main" xmlns:p="http://schemas.openxmlformats.org/presentationml/2006/main" xmlns:r="http://schemas.openxmlformats.org/officeDocument/2006/relationships">
-  <p:cSld>
-    <p:spTree>
-      <p:nvGrpSpPr>
-        <p:cNvPr id="1" name=""/>
-        <p:cNvGrpSpPr/>
-        <p:nvPr/>
-      </p:nvGrpSpPr>
-      <p:grpSpPr/>
-      <p:sp>
-        <p:nvSpPr>
-          <p:cNvPr id="2" name="Rectangle 1"/>
-          <p:cNvSpPr/>
-          <p:nvPr/>
-        </p:nvSpPr>
-        <p:spPr>
-          <a:xfrm>
-            <a:off x="0" y="0"/>
-            <a:ext cx="12191695" cy="54864"/>
-          </a:xfrm>
-          <a:prstGeom prst="rect">
-            <a:avLst/>
-          </a:prstGeom>
-          <a:solidFill>
-            <a:srgbClr val="C9A227"/>
-          </a:solidFill>
-          <a:ln w="12700">
-            <a:solidFill>
-              <a:srgbClr val="C9A227"/>
-            </a:solidFill>
-          </a:ln>
-          <a:effectLst/>
-        </p:spPr>
-        <p:style>
-          <a:lnRef idx="1">
-            <a:schemeClr val="accent1"/>
-          </a:lnRef>
-          <a:fillRef idx="3">
-            <a:schemeClr val="accent1"/>
-          </a:fillRef>
-          <a:effectRef idx="2">
-            <a:schemeClr val="accent1"/>
-          </a:effectRef>
-          <a:fontRef idx="minor">
-            <a:schemeClr val="lt1"/>
-          </a:fontRef>
-        </p:style>
-        <p:txBody>
-          <a:bodyPr rtlCol="0" anchor="ctr" wrap="square" lIns="38100" rIns="38100" tIns="25400" bIns="25400"/>
-          <a:lstStyle/>
-          <a:p>
-            <a:pPr algn="ctr"/>
-            <a:r>
-              <a:rPr sz="1100" b="0" i="0">
-                <a:solidFill>
-                  <a:srgbClr val="22252B"/>
-                </a:solidFill>
-                <a:latin typeface="Noto Sans CJK KR"/>
-              </a:rPr>
-              <a:t/>
-            </a:r>
-          </a:p>
-        </p:txBody>
-      </p:sp>
-      <p:sp>
-        <p:nvSpPr>
-          <p:cNvPr id="3" name="TextBox 2"/>
-          <p:cNvSpPr txBox="1"/>
-          <p:nvPr/>
-        </p:nvSpPr>
-        <p:spPr>
-          <a:xfrm>
-            <a:off x="502920" y="164592"/>
-            <a:ext cx="11185855" cy="320040"/>
-          </a:xfrm>
-          <a:prstGeom prst="rect">
-            <a:avLst/>
-          </a:prstGeom>
-          <a:noFill/>
-        </p:spPr>
-        <p:txBody>
-          <a:bodyPr wrap="square" anchor="t" lIns="25400" rIns="25400" tIns="12700" bIns="12700">
-            <a:spAutoFit/>
-          </a:bodyPr>
-          <a:lstStyle/>
-          <a:p>
-            <a:pPr algn="l"/>
-            <a:r>
-              <a:rPr sz="1200" b="1" i="0">
-                <a:solidFill>
-                  <a:srgbClr val="C9A227"/>
-                </a:solidFill>
-                <a:latin typeface="Noto Sans CJK KR"/>
-              </a:rPr>
-              <a:t>A2 · AdamW</a:t>
-            </a:r>
-          </a:p>
-        </p:txBody>
-      </p:sp>
-      <p:sp>
-        <p:nvSpPr>
-          <p:cNvPr id="4" name="TextBox 3"/>
-          <p:cNvSpPr txBox="1"/>
-          <p:nvPr/>
-        </p:nvSpPr>
-        <p:spPr>
-          <a:xfrm>
-            <a:off x="502920" y="457200"/>
-            <a:ext cx="11185855" cy="548640"/>
-          </a:xfrm>
-          <a:prstGeom prst="rect">
-            <a:avLst/>
-          </a:prstGeom>
-          <a:noFill/>
-        </p:spPr>
-        <p:txBody>
-          <a:bodyPr wrap="square" anchor="t" lIns="25400" rIns="25400" tIns="12700" bIns="12700">
-            <a:spAutoFit/>
-          </a:bodyPr>
-          <a:lstStyle/>
-          <a:p>
-            <a:pPr algn="l"/>
-            <a:r>
-              <a:rPr sz="2200" b="1" i="0">
-                <a:solidFill>
-                  <a:srgbClr val="22252B"/>
-                </a:solidFill>
-                <a:latin typeface="Noto Sans CJK KR"/>
-              </a:rPr>
-              <a:t>AdamW ★  ·  Adam with decoupled Weight decay</a:t>
-            </a:r>
-          </a:p>
-        </p:txBody>
-      </p:sp>
-      <p:sp>
-        <p:nvSpPr>
-          <p:cNvPr id="5" name="TextBox 4"/>
-          <p:cNvSpPr txBox="1"/>
-          <p:nvPr/>
-        </p:nvSpPr>
-        <p:spPr>
-          <a:xfrm>
-            <a:off x="502920" y="932688"/>
-            <a:ext cx="5486400" cy="274320"/>
-          </a:xfrm>
-          <a:prstGeom prst="rect">
-            <a:avLst/>
-          </a:prstGeom>
-          <a:noFill/>
-        </p:spPr>
-        <p:txBody>
-          <a:bodyPr wrap="square" anchor="t" lIns="25400" rIns="25400" tIns="12700" bIns="12700">
-            <a:spAutoFit/>
-          </a:bodyPr>
-          <a:lstStyle/>
-          <a:p>
-            <a:pPr algn="l"/>
-            <a:r>
-              <a:rPr sz="1100" b="1" i="0">
-                <a:solidFill>
-                  <a:srgbClr val="C9A227"/>
-                </a:solidFill>
-                <a:latin typeface="Noto Sans CJK KR"/>
-              </a:rPr>
-              <a:t>종착점 — 오늘의 표준</a:t>
-            </a:r>
-          </a:p>
-        </p:txBody>
-      </p:sp>
-      <p:sp>
-        <p:nvSpPr>
-          <p:cNvPr id="6" name="Rounded Rectangle 5"/>
-          <p:cNvSpPr/>
-          <p:nvPr/>
-        </p:nvSpPr>
-        <p:spPr>
-          <a:xfrm>
-            <a:off x="502920" y="1298448"/>
-            <a:ext cx="11155680" cy="896112"/>
-          </a:xfrm>
-          <a:prstGeom prst="roundRect">
-            <a:avLst/>
-          </a:prstGeom>
-          <a:solidFill>
-            <a:srgbClr val="F6ECC7"/>
-          </a:solidFill>
-          <a:ln w="12700">
-            <a:solidFill>
-              <a:srgbClr val="C9A227"/>
-            </a:solidFill>
-          </a:ln>
-          <a:effectLst/>
-        </p:spPr>
-        <p:style>
-          <a:lnRef idx="1">
-            <a:schemeClr val="accent1"/>
-          </a:lnRef>
-          <a:fillRef idx="3">
-            <a:schemeClr val="accent1"/>
-          </a:fillRef>
-          <a:effectRef idx="2">
-            <a:schemeClr val="accent1"/>
-          </a:effectRef>
-          <a:fontRef idx="minor">
-            <a:schemeClr val="lt1"/>
-          </a:fontRef>
-        </p:style>
-        <p:txBody>
-          <a:bodyPr rtlCol="0" anchor="ctr" wrap="square" lIns="38100" rIns="38100" tIns="25400" bIns="25400"/>
-          <a:lstStyle/>
-          <a:p>
-            <a:pPr algn="l"/>
-            <a:r>
-              <a:rPr sz="1150" b="1" i="0">
-                <a:solidFill>
-                  <a:srgbClr val="C9A227"/>
-                </a:solidFill>
-                <a:latin typeface="Noto Sans CJK KR"/>
-              </a:rPr>
-              <a:t>직관 (왜 이렇게?)</a:t>
-            </a:r>
-          </a:p>
-          <a:p>
-            <a:pPr algn="l"/>
-            <a:r>
-              <a:rPr sz="1250" b="0" i="0">
-                <a:solidFill>
-                  <a:srgbClr val="22252B"/>
-                </a:solidFill>
-                <a:latin typeface="Noto Sans CJK KR"/>
-              </a:rPr>
-              <a:t>"weight decay(정규화)를 gradient에 섞지 말고, weight에서 '직접' 빼자 — 그래야 좌표마다 똑같이 적용된다."</a:t>
-            </a:r>
-          </a:p>
-        </p:txBody>
-      </p:sp>
-      <p:sp>
-        <p:nvSpPr>
-          <p:cNvPr id="7" name="Rounded Rectangle 6"/>
-          <p:cNvSpPr/>
-          <p:nvPr/>
-        </p:nvSpPr>
-        <p:spPr>
-          <a:xfrm>
-            <a:off x="502920" y="2377440"/>
-            <a:ext cx="11155680" cy="2148840"/>
-          </a:xfrm>
-          <a:prstGeom prst="roundRect">
-            <a:avLst/>
-          </a:prstGeom>
-          <a:solidFill>
-            <a:srgbClr val="FFFFFF"/>
-          </a:solidFill>
-          <a:ln w="12700">
-            <a:solidFill>
-              <a:srgbClr val="8A8F98"/>
-            </a:solidFill>
-          </a:ln>
-          <a:effectLst/>
-        </p:spPr>
-        <p:style>
-          <a:lnRef idx="1">
-            <a:schemeClr val="accent1"/>
-          </a:lnRef>
-          <a:fillRef idx="3">
-            <a:schemeClr val="accent1"/>
-          </a:fillRef>
-          <a:effectRef idx="2">
-            <a:schemeClr val="accent1"/>
-          </a:effectRef>
-          <a:fontRef idx="minor">
-            <a:schemeClr val="lt1"/>
-          </a:fontRef>
-        </p:style>
-        <p:txBody>
-          <a:bodyPr rtlCol="0" anchor="ctr" wrap="square" lIns="38100" rIns="38100" tIns="25400" bIns="25400"/>
-          <a:lstStyle/>
-          <a:p>
-            <a:pPr algn="l"/>
-            <a:r>
-              <a:rPr sz="1150" b="1" i="0">
-                <a:solidFill>
-                  <a:srgbClr val="22252B"/>
-                </a:solidFill>
-                <a:latin typeface="Noto Sans CJK KR"/>
-              </a:rPr>
-              <a:t>갱신 규칙 (수식)</a:t>
-            </a:r>
-          </a:p>
-          <a:p>
-            <a:pPr algn="l"/>
-            <a:r>
-              <a:rPr sz="1250" b="0" i="0">
-                <a:solidFill>
-                  <a:srgbClr val="22252B"/>
-                </a:solidFill>
-                <a:latin typeface="Noto Sans Mono CJK KR"/>
-              </a:rPr>
-              <a:t>m_t, v_t, m̂, v̂ : Adam과 동일 (decay를 g_t에 넣지 않음)</a:t>
-            </a:r>
-          </a:p>
-          <a:p>
-            <a:pPr algn="l"/>
-            <a:r>
-              <a:rPr sz="1250" b="0" i="0">
-                <a:solidFill>
-                  <a:srgbClr val="22252B"/>
-                </a:solidFill>
-                <a:latin typeface="Noto Sans Mono CJK KR"/>
-              </a:rPr>
-              <a:t>θ_{t+1} = θ_t − η · ( m̂/(√v̂+ε)  +  λ·θ_t )      # λ·θ 항을 분리(decoupled)</a:t>
-            </a:r>
-          </a:p>
-        </p:txBody>
-      </p:sp>
-      <p:sp>
-        <p:nvSpPr>
-          <p:cNvPr id="8" name="Rounded Rectangle 7"/>
-          <p:cNvSpPr/>
-          <p:nvPr/>
-        </p:nvSpPr>
-        <p:spPr>
-          <a:xfrm>
-            <a:off x="502920" y="4709160"/>
-            <a:ext cx="5486400" cy="1737360"/>
-          </a:xfrm>
-          <a:prstGeom prst="roundRect">
-            <a:avLst/>
-          </a:prstGeom>
-          <a:solidFill>
-            <a:srgbClr val="DAF0ED"/>
-          </a:solidFill>
-          <a:ln w="12700">
-            <a:solidFill>
-              <a:srgbClr val="2A9D8F"/>
-            </a:solidFill>
-          </a:ln>
-          <a:effectLst/>
-        </p:spPr>
-        <p:style>
-          <a:lnRef idx="1">
-            <a:schemeClr val="accent1"/>
-          </a:lnRef>
-          <a:fillRef idx="3">
-            <a:schemeClr val="accent1"/>
-          </a:fillRef>
-          <a:effectRef idx="2">
-            <a:schemeClr val="accent1"/>
-          </a:effectRef>
-          <a:fontRef idx="minor">
-            <a:schemeClr val="lt1"/>
-          </a:fontRef>
-        </p:style>
-        <p:txBody>
-          <a:bodyPr rtlCol="0" anchor="ctr" wrap="square" lIns="38100" rIns="38100" tIns="25400" bIns="25400"/>
-          <a:lstStyle/>
-          <a:p>
-            <a:pPr algn="l"/>
-            <a:r>
-              <a:rPr sz="1150" b="1" i="0">
-                <a:solidFill>
-                  <a:srgbClr val="2A9D8F"/>
-                </a:solidFill>
-                <a:latin typeface="Noto Sans CJK KR"/>
-              </a:rPr>
-              <a:t>이 optimizer가 해결한 것</a:t>
-            </a:r>
-          </a:p>
-          <a:p>
-            <a:pPr algn="l"/>
-            <a:r>
-              <a:rPr sz="1150" b="0" i="0">
-                <a:solidFill>
-                  <a:srgbClr val="22252B"/>
-                </a:solidFill>
-                <a:latin typeface="Noto Sans CJK KR"/>
-              </a:rPr>
-              <a:t>decay가 adaptive 스케일(1/√v̂)에 섞이지 않아 정규화가 일관 → 일반화↑. 오늘날 LLM 학습의 표준.</a:t>
-            </a:r>
-          </a:p>
-        </p:txBody>
-      </p:sp>
-      <p:sp>
-        <p:nvSpPr>
-          <p:cNvPr id="9" name="Rounded Rectangle 8"/>
-          <p:cNvSpPr/>
-          <p:nvPr/>
-        </p:nvSpPr>
-        <p:spPr>
-          <a:xfrm>
-            <a:off x="6172200" y="4709160"/>
-            <a:ext cx="5486400" cy="1737360"/>
-          </a:xfrm>
-          <a:prstGeom prst="roundRect">
-            <a:avLst/>
-          </a:prstGeom>
-          <a:solidFill>
-            <a:srgbClr val="F6DDDD"/>
-          </a:solidFill>
-          <a:ln w="12700">
-            <a:solidFill>
-              <a:srgbClr val="C1121F"/>
-            </a:solidFill>
-          </a:ln>
-          <a:effectLst/>
-        </p:spPr>
-        <p:style>
-          <a:lnRef idx="1">
-            <a:schemeClr val="accent1"/>
-          </a:lnRef>
-          <a:fillRef idx="3">
-            <a:schemeClr val="accent1"/>
-          </a:fillRef>
-          <a:effectRef idx="2">
-            <a:schemeClr val="accent1"/>
-          </a:effectRef>
-          <a:fontRef idx="minor">
-            <a:schemeClr val="lt1"/>
-          </a:fontRef>
-        </p:style>
-        <p:txBody>
-          <a:bodyPr rtlCol="0" anchor="ctr" wrap="square" lIns="38100" rIns="38100" tIns="25400" bIns="25400"/>
-          <a:lstStyle/>
-          <a:p>
-            <a:pPr algn="l"/>
-            <a:r>
-              <a:rPr sz="1150" b="1" i="0">
-                <a:solidFill>
-                  <a:srgbClr val="C1121F"/>
-                </a:solidFill>
-                <a:latin typeface="Noto Sans CJK KR"/>
-              </a:rPr>
-              <a:t>남은 문제 → 다음</a:t>
-            </a:r>
-          </a:p>
-          <a:p>
-            <a:pPr algn="l"/>
-            <a:r>
-              <a:rPr sz="1150" b="0" i="0">
+            <a:pPr algn="l">
+              <a:lnSpc>
+                <a:spcPct val="118000"/>
+              </a:lnSpc>
+              <a:spcBef>
+                <a:spcPts val="0"/>
+              </a:spcBef>
+              <a:spcAft>
+                <a:spcPts val="300"/>
+              </a:spcAft>
+            </a:pPr>
+            <a:r>
+              <a:rPr sz="1450" b="0" i="0">
                 <a:solidFill>
                   <a:srgbClr val="22252B"/>
                 </a:solidFill>
@@ -6629,10 +5818,20 @@
           </a:fontRef>
         </p:style>
         <p:txBody>
-          <a:bodyPr rtlCol="0" anchor="ctr" wrap="square" lIns="38100" rIns="38100" tIns="25400" bIns="25400"/>
-          <a:lstStyle/>
-          <a:p>
-            <a:pPr algn="ctr"/>
+          <a:bodyPr rtlCol="0" anchor="ctr" wrap="square" lIns="76200" rIns="76200" tIns="38100" bIns="38100"/>
+          <a:lstStyle/>
+          <a:p>
+            <a:pPr algn="ctr">
+              <a:lnSpc>
+                <a:spcPct val="118000"/>
+              </a:lnSpc>
+              <a:spcBef>
+                <a:spcPts val="0"/>
+              </a:spcBef>
+              <a:spcAft>
+                <a:spcPts val="300"/>
+              </a:spcAft>
+            </a:pPr>
             <a:r>
               <a:rPr sz="1100" b="0" i="0">
                 <a:solidFill>
@@ -6653,7 +5852,7 @@
         </p:nvSpPr>
         <p:spPr>
           <a:xfrm>
-            <a:off x="502920" y="164592"/>
+            <a:off x="502920" y="146304"/>
             <a:ext cx="11185855" cy="320040"/>
           </a:xfrm>
           <a:prstGeom prst="rect">
@@ -6662,14 +5861,24 @@
           <a:noFill/>
         </p:spPr>
         <p:txBody>
-          <a:bodyPr wrap="square" anchor="t" lIns="25400" rIns="25400" tIns="12700" bIns="12700">
+          <a:bodyPr wrap="square" anchor="t" lIns="38100" rIns="38100" tIns="25400" bIns="25400">
             <a:spAutoFit/>
           </a:bodyPr>
           <a:lstStyle/>
           <a:p>
-            <a:pPr algn="l"/>
-            <a:r>
-              <a:rPr sz="1200" b="1" i="0">
+            <a:pPr algn="l">
+              <a:lnSpc>
+                <a:spcPct val="120000"/>
+              </a:lnSpc>
+              <a:spcBef>
+                <a:spcPts val="0"/>
+              </a:spcBef>
+              <a:spcAft>
+                <a:spcPts val="0"/>
+              </a:spcAft>
+            </a:pPr>
+            <a:r>
+              <a:rPr sz="1350" b="1" i="0">
                 <a:solidFill>
                   <a:srgbClr val="2A6F97"/>
                 </a:solidFill>
@@ -6689,7 +5898,7 @@
         <p:spPr>
           <a:xfrm>
             <a:off x="502920" y="457200"/>
-            <a:ext cx="11185855" cy="548640"/>
+            <a:ext cx="11185855" cy="566928"/>
           </a:xfrm>
           <a:prstGeom prst="rect">
             <a:avLst/>
@@ -6697,14 +5906,24 @@
           <a:noFill/>
         </p:spPr>
         <p:txBody>
-          <a:bodyPr wrap="square" anchor="t" lIns="25400" rIns="25400" tIns="12700" bIns="12700">
+          <a:bodyPr wrap="square" anchor="t" lIns="38100" rIns="38100" tIns="25400" bIns="25400">
             <a:spAutoFit/>
           </a:bodyPr>
           <a:lstStyle/>
           <a:p>
-            <a:pPr algn="l"/>
-            <a:r>
-              <a:rPr sz="2200" b="1" i="0">
+            <a:pPr algn="l">
+              <a:lnSpc>
+                <a:spcPct val="120000"/>
+              </a:lnSpc>
+              <a:spcBef>
+                <a:spcPts val="0"/>
+              </a:spcBef>
+              <a:spcAft>
+                <a:spcPts val="0"/>
+              </a:spcAft>
+            </a:pPr>
+            <a:r>
+              <a:rPr sz="2400" b="1" i="0">
                 <a:solidFill>
                   <a:srgbClr val="22252B"/>
                 </a:solidFill>
@@ -6723,8 +5942,8 @@
         </p:nvSpPr>
         <p:spPr>
           <a:xfrm>
-            <a:off x="502920" y="1417320"/>
-            <a:ext cx="3657600" cy="457200"/>
+            <a:off x="502920" y="1371600"/>
+            <a:ext cx="3657600" cy="566928"/>
           </a:xfrm>
           <a:prstGeom prst="roundRect">
             <a:avLst/>
@@ -6754,12 +5973,22 @@
           </a:fontRef>
         </p:style>
         <p:txBody>
-          <a:bodyPr rtlCol="0" anchor="ctr" wrap="square" lIns="38100" rIns="38100" tIns="25400" bIns="25400"/>
-          <a:lstStyle/>
-          <a:p>
-            <a:pPr algn="ctr"/>
-            <a:r>
-              <a:rPr sz="1400" b="1" i="0">
+          <a:bodyPr rtlCol="0" anchor="ctr" wrap="square" lIns="76200" rIns="76200" tIns="38100" bIns="38100"/>
+          <a:lstStyle/>
+          <a:p>
+            <a:pPr algn="ctr">
+              <a:lnSpc>
+                <a:spcPct val="118000"/>
+              </a:lnSpc>
+              <a:spcBef>
+                <a:spcPts val="0"/>
+              </a:spcBef>
+              <a:spcAft>
+                <a:spcPts val="300"/>
+              </a:spcAft>
+            </a:pPr>
+            <a:r>
+              <a:rPr sz="1550" b="1" i="0">
                 <a:solidFill>
                   <a:srgbClr val="2A6F97"/>
                 </a:solidFill>
@@ -6778,8 +6007,8 @@
         </p:nvSpPr>
         <p:spPr>
           <a:xfrm>
-            <a:off x="594360" y="1965960"/>
-            <a:ext cx="3474720" cy="4480560"/>
+            <a:off x="594360" y="2194560"/>
+            <a:ext cx="3520440" cy="4297680"/>
           </a:xfrm>
           <a:prstGeom prst="rect">
             <a:avLst/>
@@ -6787,14 +6016,24 @@
           <a:noFill/>
         </p:spPr>
         <p:txBody>
-          <a:bodyPr wrap="square" anchor="t" lIns="25400" rIns="25400" tIns="12700" bIns="12700">
+          <a:bodyPr wrap="square" anchor="t" lIns="38100" rIns="38100" tIns="25400" bIns="25400">
             <a:spAutoFit/>
           </a:bodyPr>
           <a:lstStyle/>
           <a:p>
-            <a:pPr algn="l"/>
-            <a:r>
-              <a:rPr sz="1080" b="0" i="0">
+            <a:pPr algn="l">
+              <a:lnSpc>
+                <a:spcPct val="130000"/>
+              </a:lnSpc>
+              <a:spcBef>
+                <a:spcPts val="0"/>
+              </a:spcBef>
+              <a:spcAft>
+                <a:spcPts val="200"/>
+              </a:spcAft>
+            </a:pPr>
+            <a:r>
+              <a:rPr sz="1200" b="0" i="0">
                 <a:solidFill>
                   <a:srgbClr val="22252B"/>
                 </a:solidFill>
@@ -6804,9 +6043,19 @@
             </a:r>
           </a:p>
           <a:p>
-            <a:pPr algn="l"/>
-            <a:r>
-              <a:rPr sz="1080" b="0" i="0">
+            <a:pPr algn="l">
+              <a:lnSpc>
+                <a:spcPct val="130000"/>
+              </a:lnSpc>
+              <a:spcBef>
+                <a:spcPts val="0"/>
+              </a:spcBef>
+              <a:spcAft>
+                <a:spcPts val="200"/>
+              </a:spcAft>
+            </a:pPr>
+            <a:r>
+              <a:rPr sz="1200" b="0" i="0">
                 <a:solidFill>
                   <a:srgbClr val="22252B"/>
                 </a:solidFill>
@@ -6816,9 +6065,19 @@
             </a:r>
           </a:p>
           <a:p>
-            <a:pPr algn="l"/>
-            <a:r>
-              <a:rPr sz="1080" b="0" i="0">
+            <a:pPr algn="l">
+              <a:lnSpc>
+                <a:spcPct val="130000"/>
+              </a:lnSpc>
+              <a:spcBef>
+                <a:spcPts val="0"/>
+              </a:spcBef>
+              <a:spcAft>
+                <a:spcPts val="200"/>
+              </a:spcAft>
+            </a:pPr>
+            <a:r>
+              <a:rPr sz="1200" b="0" i="0">
                 <a:solidFill>
                   <a:srgbClr val="22252B"/>
                 </a:solidFill>
@@ -6828,45 +6087,85 @@
             </a:r>
           </a:p>
           <a:p>
-            <a:pPr algn="l"/>
-            <a:r>
-              <a:rPr sz="1080" b="0" i="0">
+            <a:pPr algn="l">
+              <a:lnSpc>
+                <a:spcPct val="130000"/>
+              </a:lnSpc>
+              <a:spcBef>
+                <a:spcPts val="0"/>
+              </a:spcBef>
+              <a:spcAft>
+                <a:spcPts val="200"/>
+              </a:spcAft>
+            </a:pPr>
+            <a:r>
+              <a:rPr sz="1200" b="0" i="0">
                 <a:solidFill>
                   <a:srgbClr val="22252B"/>
                 </a:solidFill>
                 <a:latin typeface="Noto Sans CJK KR"/>
               </a:rPr>
-              <a:t>     GD · SGD · Momentum · NAG</a:t>
-            </a:r>
-          </a:p>
-          <a:p>
-            <a:pPr algn="l"/>
-            <a:r>
-              <a:rPr sz="1080" b="0" i="0">
+              <a:t>     계보 지도(제공 이미지) →</a:t>
+            </a:r>
+          </a:p>
+          <a:p>
+            <a:pPr algn="l">
+              <a:lnSpc>
+                <a:spcPct val="130000"/>
+              </a:lnSpc>
+              <a:spcBef>
+                <a:spcPts val="0"/>
+              </a:spcBef>
+              <a:spcAft>
+                <a:spcPts val="200"/>
+              </a:spcAft>
+            </a:pPr>
+            <a:r>
+              <a:rPr sz="1200" b="0" i="0">
                 <a:solidFill>
                   <a:srgbClr val="22252B"/>
                 </a:solidFill>
                 <a:latin typeface="Noto Sans CJK KR"/>
               </a:rPr>
-              <a:t>     Adagrad · RMSProp · AdaDelta</a:t>
-            </a:r>
-          </a:p>
-          <a:p>
-            <a:pPr algn="l"/>
-            <a:r>
-              <a:rPr sz="1080" b="0" i="0">
+              <a:t>     GD · SGD · Momentum</a:t>
+            </a:r>
+          </a:p>
+          <a:p>
+            <a:pPr algn="l">
+              <a:lnSpc>
+                <a:spcPct val="130000"/>
+              </a:lnSpc>
+              <a:spcBef>
+                <a:spcPts val="0"/>
+              </a:spcBef>
+              <a:spcAft>
+                <a:spcPts val="200"/>
+              </a:spcAft>
+            </a:pPr>
+            <a:r>
+              <a:rPr sz="1200" b="0" i="0">
                 <a:solidFill>
                   <a:srgbClr val="22252B"/>
                 </a:solidFill>
                 <a:latin typeface="Noto Sans CJK KR"/>
               </a:rPr>
-              <a:t>     Adam · Nadam · AdamW</a:t>
-            </a:r>
-          </a:p>
-          <a:p>
-            <a:pPr algn="l"/>
-            <a:r>
-              <a:rPr sz="1080" b="0" i="0">
+              <a:t>     Adagrad · RMSProp · Adam · AdamW</a:t>
+            </a:r>
+          </a:p>
+          <a:p>
+            <a:pPr algn="l">
+              <a:lnSpc>
+                <a:spcPct val="130000"/>
+              </a:lnSpc>
+              <a:spcBef>
+                <a:spcPts val="0"/>
+              </a:spcBef>
+              <a:spcAft>
+                <a:spcPts val="200"/>
+              </a:spcAft>
+            </a:pPr>
+            <a:r>
+              <a:rPr sz="1200" b="0" i="0">
                 <a:solidFill>
                   <a:srgbClr val="22252B"/>
                 </a:solidFill>
@@ -6876,9 +6175,19 @@
             </a:r>
           </a:p>
           <a:p>
-            <a:pPr algn="l"/>
-            <a:r>
-              <a:rPr sz="1080" b="0" i="0">
+            <a:pPr algn="l">
+              <a:lnSpc>
+                <a:spcPct val="130000"/>
+              </a:lnSpc>
+              <a:spcBef>
+                <a:spcPts val="0"/>
+              </a:spcBef>
+              <a:spcAft>
+                <a:spcPts val="200"/>
+              </a:spcAft>
+            </a:pPr>
+            <a:r>
+              <a:rPr sz="1200" b="0" i="0">
                 <a:solidFill>
                   <a:srgbClr val="22252B"/>
                 </a:solidFill>
@@ -6888,9 +6197,19 @@
             </a:r>
           </a:p>
           <a:p>
-            <a:pPr algn="l"/>
-            <a:r>
-              <a:rPr sz="1080" b="0" i="0">
+            <a:pPr algn="l">
+              <a:lnSpc>
+                <a:spcPct val="130000"/>
+              </a:lnSpc>
+              <a:spcBef>
+                <a:spcPts val="0"/>
+              </a:spcBef>
+              <a:spcAft>
+                <a:spcPts val="200"/>
+              </a:spcAft>
+            </a:pPr>
+            <a:r>
+              <a:rPr sz="1200" b="0" i="0">
                 <a:solidFill>
                   <a:srgbClr val="22252B"/>
                 </a:solidFill>
@@ -6900,9 +6219,19 @@
             </a:r>
           </a:p>
           <a:p>
-            <a:pPr algn="l"/>
-            <a:r>
-              <a:rPr sz="1080" b="0" i="0">
+            <a:pPr algn="l">
+              <a:lnSpc>
+                <a:spcPct val="130000"/>
+              </a:lnSpc>
+              <a:spcBef>
+                <a:spcPts val="0"/>
+              </a:spcBef>
+              <a:spcAft>
+                <a:spcPts val="200"/>
+              </a:spcAft>
+            </a:pPr>
+            <a:r>
+              <a:rPr sz="1200" b="0" i="0">
                 <a:solidFill>
                   <a:srgbClr val="22252B"/>
                 </a:solidFill>
@@ -6921,8 +6250,8 @@
         </p:nvSpPr>
         <p:spPr>
           <a:xfrm>
-            <a:off x="4297680" y="1417320"/>
-            <a:ext cx="3657600" cy="457200"/>
+            <a:off x="4297680" y="1371600"/>
+            <a:ext cx="3657600" cy="566928"/>
           </a:xfrm>
           <a:prstGeom prst="roundRect">
             <a:avLst/>
@@ -6952,12 +6281,22 @@
           </a:fontRef>
         </p:style>
         <p:txBody>
-          <a:bodyPr rtlCol="0" anchor="ctr" wrap="square" lIns="38100" rIns="38100" tIns="25400" bIns="25400"/>
-          <a:lstStyle/>
-          <a:p>
-            <a:pPr algn="ctr"/>
-            <a:r>
-              <a:rPr sz="1400" b="1" i="0">
+          <a:bodyPr rtlCol="0" anchor="ctr" wrap="square" lIns="76200" rIns="76200" tIns="38100" bIns="38100"/>
+          <a:lstStyle/>
+          <a:p>
+            <a:pPr algn="ctr">
+              <a:lnSpc>
+                <a:spcPct val="118000"/>
+              </a:lnSpc>
+              <a:spcBef>
+                <a:spcPts val="0"/>
+              </a:spcBef>
+              <a:spcAft>
+                <a:spcPts val="300"/>
+              </a:spcAft>
+            </a:pPr>
+            <a:r>
+              <a:rPr sz="1550" b="1" i="0">
                 <a:solidFill>
                   <a:srgbClr val="2A9D8F"/>
                 </a:solidFill>
@@ -6976,8 +6315,8 @@
         </p:nvSpPr>
         <p:spPr>
           <a:xfrm>
-            <a:off x="4389120" y="1965960"/>
-            <a:ext cx="3474720" cy="4480560"/>
+            <a:off x="4389120" y="2194560"/>
+            <a:ext cx="3520440" cy="4297680"/>
           </a:xfrm>
           <a:prstGeom prst="rect">
             <a:avLst/>
@@ -6985,14 +6324,24 @@
           <a:noFill/>
         </p:spPr>
         <p:txBody>
-          <a:bodyPr wrap="square" anchor="t" lIns="25400" rIns="25400" tIns="12700" bIns="12700">
+          <a:bodyPr wrap="square" anchor="t" lIns="38100" rIns="38100" tIns="25400" bIns="25400">
             <a:spAutoFit/>
           </a:bodyPr>
           <a:lstStyle/>
           <a:p>
-            <a:pPr algn="l"/>
-            <a:r>
-              <a:rPr sz="1080" b="0" i="0">
+            <a:pPr algn="l">
+              <a:lnSpc>
+                <a:spcPct val="130000"/>
+              </a:lnSpc>
+              <a:spcBef>
+                <a:spcPts val="0"/>
+              </a:spcBef>
+              <a:spcAft>
+                <a:spcPts val="200"/>
+              </a:spcAft>
+            </a:pPr>
+            <a:r>
+              <a:rPr sz="1200" b="0" i="0">
                 <a:solidFill>
                   <a:srgbClr val="22252B"/>
                 </a:solidFill>
@@ -7002,9 +6351,19 @@
             </a:r>
           </a:p>
           <a:p>
-            <a:pPr algn="l"/>
-            <a:r>
-              <a:rPr sz="1080" b="0" i="0">
+            <a:pPr algn="l">
+              <a:lnSpc>
+                <a:spcPct val="130000"/>
+              </a:lnSpc>
+              <a:spcBef>
+                <a:spcPts val="0"/>
+              </a:spcBef>
+              <a:spcAft>
+                <a:spcPts val="200"/>
+              </a:spcAft>
+            </a:pPr>
+            <a:r>
+              <a:rPr sz="1200" b="0" i="0">
                 <a:solidFill>
                   <a:srgbClr val="22252B"/>
                 </a:solidFill>
@@ -7014,9 +6373,19 @@
             </a:r>
           </a:p>
           <a:p>
-            <a:pPr algn="l"/>
-            <a:r>
-              <a:rPr sz="1080" b="0" i="0">
+            <a:pPr algn="l">
+              <a:lnSpc>
+                <a:spcPct val="130000"/>
+              </a:lnSpc>
+              <a:spcBef>
+                <a:spcPts val="0"/>
+              </a:spcBef>
+              <a:spcAft>
+                <a:spcPts val="200"/>
+              </a:spcAft>
+            </a:pPr>
+            <a:r>
+              <a:rPr sz="1200" b="0" i="0">
                 <a:solidFill>
                   <a:srgbClr val="22252B"/>
                 </a:solidFill>
@@ -7026,9 +6395,19 @@
             </a:r>
           </a:p>
           <a:p>
-            <a:pPr algn="l"/>
-            <a:r>
-              <a:rPr sz="1080" b="0" i="0">
+            <a:pPr algn="l">
+              <a:lnSpc>
+                <a:spcPct val="130000"/>
+              </a:lnSpc>
+              <a:spcBef>
+                <a:spcPts val="0"/>
+              </a:spcBef>
+              <a:spcAft>
+                <a:spcPts val="200"/>
+              </a:spcAft>
+            </a:pPr>
+            <a:r>
+              <a:rPr sz="1200" b="0" i="0">
                 <a:solidFill>
                   <a:srgbClr val="22252B"/>
                 </a:solidFill>
@@ -7038,9 +6417,19 @@
             </a:r>
           </a:p>
           <a:p>
-            <a:pPr algn="l"/>
-            <a:r>
-              <a:rPr sz="1080" b="0" i="0">
+            <a:pPr algn="l">
+              <a:lnSpc>
+                <a:spcPct val="130000"/>
+              </a:lnSpc>
+              <a:spcBef>
+                <a:spcPts val="0"/>
+              </a:spcBef>
+              <a:spcAft>
+                <a:spcPts val="200"/>
+              </a:spcAft>
+            </a:pPr>
+            <a:r>
+              <a:rPr sz="1200" b="0" i="0">
                 <a:solidFill>
                   <a:srgbClr val="22252B"/>
                 </a:solidFill>
@@ -7050,9 +6439,19 @@
             </a:r>
           </a:p>
           <a:p>
-            <a:pPr algn="l"/>
-            <a:r>
-              <a:rPr sz="1080" b="0" i="0">
+            <a:pPr algn="l">
+              <a:lnSpc>
+                <a:spcPct val="130000"/>
+              </a:lnSpc>
+              <a:spcBef>
+                <a:spcPts val="0"/>
+              </a:spcBef>
+              <a:spcAft>
+                <a:spcPts val="200"/>
+              </a:spcAft>
+            </a:pPr>
+            <a:r>
+              <a:rPr sz="1200" b="0" i="0">
                 <a:solidFill>
                   <a:srgbClr val="22252B"/>
                 </a:solidFill>
@@ -7062,9 +6461,19 @@
             </a:r>
           </a:p>
           <a:p>
-            <a:pPr algn="l"/>
-            <a:r>
-              <a:rPr sz="1080" b="0" i="0">
+            <a:pPr algn="l">
+              <a:lnSpc>
+                <a:spcPct val="130000"/>
+              </a:lnSpc>
+              <a:spcBef>
+                <a:spcPts val="0"/>
+              </a:spcBef>
+              <a:spcAft>
+                <a:spcPts val="200"/>
+              </a:spcAft>
+            </a:pPr>
+            <a:r>
+              <a:rPr sz="1200" b="0" i="0">
                 <a:solidFill>
                   <a:srgbClr val="22252B"/>
                 </a:solidFill>
@@ -7074,21 +6483,41 @@
             </a:r>
           </a:p>
           <a:p>
-            <a:pPr algn="l"/>
-            <a:r>
-              <a:rPr sz="1080" b="0" i="0">
+            <a:pPr algn="l">
+              <a:lnSpc>
+                <a:spcPct val="130000"/>
+              </a:lnSpc>
+              <a:spcBef>
+                <a:spcPts val="0"/>
+              </a:spcBef>
+              <a:spcAft>
+                <a:spcPts val="200"/>
+              </a:spcAft>
+            </a:pPr>
+            <a:r>
+              <a:rPr sz="1200" b="0" i="0">
                 <a:solidFill>
                   <a:srgbClr val="22252B"/>
                 </a:solidFill>
                 <a:latin typeface="Noto Sans CJK KR"/>
               </a:rPr>
-              <a:t>     optimizer=memory·self-mod·CMS (4편 통합)</a:t>
-            </a:r>
-          </a:p>
-          <a:p>
-            <a:pPr algn="l"/>
-            <a:r>
-              <a:rPr sz="1080" b="0" i="0">
+              <a:t>     optimizer=memory · self-mod · CMS</a:t>
+            </a:r>
+          </a:p>
+          <a:p>
+            <a:pPr algn="l">
+              <a:lnSpc>
+                <a:spcPct val="130000"/>
+              </a:lnSpc>
+              <a:spcBef>
+                <a:spcPts val="0"/>
+              </a:spcBef>
+              <a:spcAft>
+                <a:spcPts val="200"/>
+              </a:spcAft>
+            </a:pPr>
+            <a:r>
+              <a:rPr sz="1200" b="0" i="0">
                 <a:solidFill>
                   <a:srgbClr val="22252B"/>
                 </a:solidFill>
@@ -7098,9 +6527,19 @@
             </a:r>
           </a:p>
           <a:p>
-            <a:pPr algn="l"/>
-            <a:r>
-              <a:rPr sz="1080" b="0" i="0">
+            <a:pPr algn="l">
+              <a:lnSpc>
+                <a:spcPct val="130000"/>
+              </a:lnSpc>
+              <a:spcBef>
+                <a:spcPts val="0"/>
+              </a:spcBef>
+              <a:spcAft>
+                <a:spcPts val="200"/>
+              </a:spcAft>
+            </a:pPr>
+            <a:r>
+              <a:rPr sz="1200" b="0" i="0">
                 <a:solidFill>
                   <a:srgbClr val="22252B"/>
                 </a:solidFill>
@@ -7119,8 +6558,8 @@
         </p:nvSpPr>
         <p:spPr>
           <a:xfrm>
-            <a:off x="8092440" y="1417320"/>
-            <a:ext cx="3566160" cy="457200"/>
+            <a:off x="8092440" y="1371600"/>
+            <a:ext cx="3566160" cy="566928"/>
           </a:xfrm>
           <a:prstGeom prst="roundRect">
             <a:avLst/>
@@ -7150,12 +6589,22 @@
           </a:fontRef>
         </p:style>
         <p:txBody>
-          <a:bodyPr rtlCol="0" anchor="ctr" wrap="square" lIns="38100" rIns="38100" tIns="25400" bIns="25400"/>
-          <a:lstStyle/>
-          <a:p>
-            <a:pPr algn="ctr"/>
-            <a:r>
-              <a:rPr sz="1400" b="1" i="0">
+          <a:bodyPr rtlCol="0" anchor="ctr" wrap="square" lIns="76200" rIns="76200" tIns="38100" bIns="38100"/>
+          <a:lstStyle/>
+          <a:p>
+            <a:pPr algn="ctr">
+              <a:lnSpc>
+                <a:spcPct val="118000"/>
+              </a:lnSpc>
+              <a:spcBef>
+                <a:spcPts val="0"/>
+              </a:spcBef>
+              <a:spcAft>
+                <a:spcPts val="300"/>
+              </a:spcAft>
+            </a:pPr>
+            <a:r>
+              <a:rPr sz="1550" b="1" i="0">
                 <a:solidFill>
                   <a:srgbClr val="C9A227"/>
                 </a:solidFill>
@@ -7174,8 +6623,8 @@
         </p:nvSpPr>
         <p:spPr>
           <a:xfrm>
-            <a:off x="8183879" y="1965960"/>
-            <a:ext cx="3383279" cy="4480560"/>
+            <a:off x="8183879" y="2194560"/>
+            <a:ext cx="3429000" cy="4297680"/>
           </a:xfrm>
           <a:prstGeom prst="rect">
             <a:avLst/>
@@ -7183,14 +6632,24 @@
           <a:noFill/>
         </p:spPr>
         <p:txBody>
-          <a:bodyPr wrap="square" anchor="t" lIns="25400" rIns="25400" tIns="12700" bIns="12700">
+          <a:bodyPr wrap="square" anchor="t" lIns="38100" rIns="38100" tIns="25400" bIns="25400">
             <a:spAutoFit/>
           </a:bodyPr>
           <a:lstStyle/>
           <a:p>
-            <a:pPr algn="l"/>
-            <a:r>
-              <a:rPr sz="1080" b="0" i="0">
+            <a:pPr algn="l">
+              <a:lnSpc>
+                <a:spcPct val="130000"/>
+              </a:lnSpc>
+              <a:spcBef>
+                <a:spcPts val="0"/>
+              </a:spcBef>
+              <a:spcAft>
+                <a:spcPts val="200"/>
+              </a:spcAft>
+            </a:pPr>
+            <a:r>
+              <a:rPr sz="1200" b="0" i="0">
                 <a:solidFill>
                   <a:srgbClr val="22252B"/>
                 </a:solidFill>
@@ -7200,9 +6659,19 @@
             </a:r>
           </a:p>
           <a:p>
-            <a:pPr algn="l"/>
-            <a:r>
-              <a:rPr sz="1080" b="0" i="0">
+            <a:pPr algn="l">
+              <a:lnSpc>
+                <a:spcPct val="130000"/>
+              </a:lnSpc>
+              <a:spcBef>
+                <a:spcPts val="0"/>
+              </a:spcBef>
+              <a:spcAft>
+                <a:spcPts val="200"/>
+              </a:spcAft>
+            </a:pPr>
+            <a:r>
+              <a:rPr sz="1200" b="0" i="0">
                 <a:solidFill>
                   <a:srgbClr val="22252B"/>
                 </a:solidFill>
@@ -7212,9 +6681,19 @@
             </a:r>
           </a:p>
           <a:p>
-            <a:pPr algn="l"/>
-            <a:r>
-              <a:rPr sz="1080" b="0" i="0">
+            <a:pPr algn="l">
+              <a:lnSpc>
+                <a:spcPct val="130000"/>
+              </a:lnSpc>
+              <a:spcBef>
+                <a:spcPts val="0"/>
+              </a:spcBef>
+              <a:spcAft>
+                <a:spcPts val="200"/>
+              </a:spcAft>
+            </a:pPr>
+            <a:r>
+              <a:rPr sz="1200" b="0" i="0">
                 <a:solidFill>
                   <a:srgbClr val="22252B"/>
                 </a:solidFill>
@@ -7224,9 +6703,19 @@
             </a:r>
           </a:p>
           <a:p>
-            <a:pPr algn="l"/>
-            <a:r>
-              <a:rPr sz="1080" b="0" i="0">
+            <a:pPr algn="l">
+              <a:lnSpc>
+                <a:spcPct val="130000"/>
+              </a:lnSpc>
+              <a:spcBef>
+                <a:spcPts val="0"/>
+              </a:spcBef>
+              <a:spcAft>
+                <a:spcPts val="200"/>
+              </a:spcAft>
+            </a:pPr>
+            <a:r>
+              <a:rPr sz="1200" b="0" i="0">
                 <a:solidFill>
                   <a:srgbClr val="22252B"/>
                 </a:solidFill>
@@ -7236,9 +6725,19 @@
             </a:r>
           </a:p>
           <a:p>
-            <a:pPr algn="l"/>
-            <a:r>
-              <a:rPr sz="1080" b="0" i="0">
+            <a:pPr algn="l">
+              <a:lnSpc>
+                <a:spcPct val="130000"/>
+              </a:lnSpc>
+              <a:spcBef>
+                <a:spcPts val="0"/>
+              </a:spcBef>
+              <a:spcAft>
+                <a:spcPts val="200"/>
+              </a:spcAft>
+            </a:pPr>
+            <a:r>
+              <a:rPr sz="1200" b="0" i="0">
                 <a:solidFill>
                   <a:srgbClr val="22252B"/>
                 </a:solidFill>
@@ -7248,9 +6747,19 @@
             </a:r>
           </a:p>
           <a:p>
-            <a:pPr algn="l"/>
-            <a:r>
-              <a:rPr sz="1080" b="0" i="0">
+            <a:pPr algn="l">
+              <a:lnSpc>
+                <a:spcPct val="130000"/>
+              </a:lnSpc>
+              <a:spcBef>
+                <a:spcPts val="0"/>
+              </a:spcBef>
+              <a:spcAft>
+                <a:spcPts val="200"/>
+              </a:spcAft>
+            </a:pPr>
+            <a:r>
+              <a:rPr sz="1200" b="0" i="0">
                 <a:solidFill>
                   <a:srgbClr val="22252B"/>
                 </a:solidFill>
@@ -7260,9 +6769,19 @@
             </a:r>
           </a:p>
           <a:p>
-            <a:pPr algn="l"/>
-            <a:r>
-              <a:rPr sz="1080" b="0" i="0">
+            <a:pPr algn="l">
+              <a:lnSpc>
+                <a:spcPct val="130000"/>
+              </a:lnSpc>
+              <a:spcBef>
+                <a:spcPts val="0"/>
+              </a:spcBef>
+              <a:spcAft>
+                <a:spcPts val="200"/>
+              </a:spcAft>
+            </a:pPr>
+            <a:r>
+              <a:rPr sz="1200" b="0" i="0">
                 <a:solidFill>
                   <a:srgbClr val="22252B"/>
                 </a:solidFill>
@@ -7330,10 +6849,20 @@
           </a:fontRef>
         </p:style>
         <p:txBody>
-          <a:bodyPr rtlCol="0" anchor="ctr" wrap="square" lIns="38100" rIns="38100" tIns="25400" bIns="25400"/>
-          <a:lstStyle/>
-          <a:p>
-            <a:pPr algn="ctr"/>
+          <a:bodyPr rtlCol="0" anchor="ctr" wrap="square" lIns="76200" rIns="76200" tIns="38100" bIns="38100"/>
+          <a:lstStyle/>
+          <a:p>
+            <a:pPr algn="ctr">
+              <a:lnSpc>
+                <a:spcPct val="118000"/>
+              </a:lnSpc>
+              <a:spcBef>
+                <a:spcPts val="0"/>
+              </a:spcBef>
+              <a:spcAft>
+                <a:spcPts val="300"/>
+              </a:spcAft>
+            </a:pPr>
             <a:r>
               <a:rPr sz="1100" b="0" i="0">
                 <a:solidFill>
@@ -7354,7 +6883,7 @@
         </p:nvSpPr>
         <p:spPr>
           <a:xfrm>
-            <a:off x="502920" y="164592"/>
+            <a:off x="502920" y="146304"/>
             <a:ext cx="11185855" cy="320040"/>
           </a:xfrm>
           <a:prstGeom prst="rect">
@@ -7363,14 +6892,24 @@
           <a:noFill/>
         </p:spPr>
         <p:txBody>
-          <a:bodyPr wrap="square" anchor="t" lIns="25400" rIns="25400" tIns="12700" bIns="12700">
+          <a:bodyPr wrap="square" anchor="t" lIns="38100" rIns="38100" tIns="25400" bIns="25400">
             <a:spAutoFit/>
           </a:bodyPr>
           <a:lstStyle/>
           <a:p>
-            <a:pPr algn="l"/>
-            <a:r>
-              <a:rPr sz="1200" b="1" i="0">
+            <a:pPr algn="l">
+              <a:lnSpc>
+                <a:spcPct val="120000"/>
+              </a:lnSpc>
+              <a:spcBef>
+                <a:spcPts val="0"/>
+              </a:spcBef>
+              <a:spcAft>
+                <a:spcPts val="0"/>
+              </a:spcAft>
+            </a:pPr>
+            <a:r>
+              <a:rPr sz="1350" b="1" i="0">
                 <a:solidFill>
                   <a:srgbClr val="2A6F97"/>
                 </a:solidFill>
@@ -7390,7 +6929,7 @@
         <p:spPr>
           <a:xfrm>
             <a:off x="502920" y="457200"/>
-            <a:ext cx="11185855" cy="548640"/>
+            <a:ext cx="11185855" cy="566928"/>
           </a:xfrm>
           <a:prstGeom prst="rect">
             <a:avLst/>
@@ -7398,14 +6937,24 @@
           <a:noFill/>
         </p:spPr>
         <p:txBody>
-          <a:bodyPr wrap="square" anchor="t" lIns="25400" rIns="25400" tIns="12700" bIns="12700">
+          <a:bodyPr wrap="square" anchor="t" lIns="38100" rIns="38100" tIns="25400" bIns="25400">
             <a:spAutoFit/>
           </a:bodyPr>
           <a:lstStyle/>
           <a:p>
-            <a:pPr algn="l"/>
-            <a:r>
-              <a:rPr sz="2200" b="1" i="0">
+            <a:pPr algn="l">
+              <a:lnSpc>
+                <a:spcPct val="120000"/>
+              </a:lnSpc>
+              <a:spcBef>
+                <a:spcPts val="0"/>
+              </a:spcBef>
+              <a:spcAft>
+                <a:spcPts val="0"/>
+              </a:spcAft>
+            </a:pPr>
+            <a:r>
+              <a:rPr sz="2400" b="1" i="0">
                 <a:solidFill>
                   <a:srgbClr val="22252B"/>
                 </a:solidFill>
@@ -7424,8 +6973,8 @@
         </p:nvSpPr>
         <p:spPr>
           <a:xfrm>
-            <a:off x="502920" y="1371600"/>
-            <a:ext cx="11155680" cy="1051560"/>
+            <a:off x="502920" y="1325880"/>
+            <a:ext cx="11183112" cy="1143000"/>
           </a:xfrm>
           <a:prstGeom prst="roundRect">
             <a:avLst/>
@@ -7455,12 +7004,22 @@
           </a:fontRef>
         </p:style>
         <p:txBody>
-          <a:bodyPr rtlCol="0" anchor="ctr" wrap="square" lIns="38100" rIns="38100" tIns="25400" bIns="25400"/>
-          <a:lstStyle/>
-          <a:p>
-            <a:pPr algn="l"/>
-            <a:r>
-              <a:rPr sz="1300" b="1" i="0">
+          <a:bodyPr rtlCol="0" anchor="ctr" wrap="square" lIns="76200" rIns="76200" tIns="38100" bIns="38100"/>
+          <a:lstStyle/>
+          <a:p>
+            <a:pPr algn="l">
+              <a:lnSpc>
+                <a:spcPct val="118000"/>
+              </a:lnSpc>
+              <a:spcBef>
+                <a:spcPts val="0"/>
+              </a:spcBef>
+              <a:spcAft>
+                <a:spcPts val="500"/>
+              </a:spcAft>
+            </a:pPr>
+            <a:r>
+              <a:rPr sz="1500" b="1" i="0">
                 <a:solidFill>
                   <a:srgbClr val="2A6F97"/>
                 </a:solidFill>
@@ -7470,9 +7029,19 @@
             </a:r>
           </a:p>
           <a:p>
-            <a:pPr algn="l"/>
-            <a:r>
-              <a:rPr sz="1200" b="0" i="0">
+            <a:pPr algn="l">
+              <a:lnSpc>
+                <a:spcPct val="118000"/>
+              </a:lnSpc>
+              <a:spcBef>
+                <a:spcPts val="0"/>
+              </a:spcBef>
+              <a:spcAft>
+                <a:spcPts val="300"/>
+              </a:spcAft>
+            </a:pPr>
+            <a:r>
+              <a:rPr sz="1400" b="0" i="0">
                 <a:solidFill>
                   <a:srgbClr val="22252B"/>
                 </a:solidFill>
@@ -7492,7 +7061,7 @@
         <p:spPr>
           <a:xfrm>
             <a:off x="502920" y="2697480"/>
-            <a:ext cx="5486400" cy="365760"/>
+            <a:ext cx="7315200" cy="365760"/>
           </a:xfrm>
           <a:prstGeom prst="rect">
             <a:avLst/>
@@ -7500,14 +7069,24 @@
           <a:noFill/>
         </p:spPr>
         <p:txBody>
-          <a:bodyPr wrap="square" anchor="t" lIns="25400" rIns="25400" tIns="12700" bIns="12700">
+          <a:bodyPr wrap="square" anchor="t" lIns="38100" rIns="38100" tIns="25400" bIns="25400">
             <a:spAutoFit/>
           </a:bodyPr>
           <a:lstStyle/>
           <a:p>
-            <a:pPr algn="l"/>
-            <a:r>
-              <a:rPr sz="1300" b="1" i="0">
+            <a:pPr algn="l">
+              <a:lnSpc>
+                <a:spcPct val="120000"/>
+              </a:lnSpc>
+              <a:spcBef>
+                <a:spcPts val="0"/>
+              </a:spcBef>
+              <a:spcAft>
+                <a:spcPts val="0"/>
+              </a:spcAft>
+            </a:pPr>
+            <a:r>
+              <a:rPr sz="1500" b="1" i="0">
                 <a:solidFill>
                   <a:srgbClr val="C1121F"/>
                 </a:solidFill>
@@ -7526,8 +7105,8 @@
         </p:nvSpPr>
         <p:spPr>
           <a:xfrm>
-            <a:off x="502920" y="3154680"/>
-            <a:ext cx="11155680" cy="960120"/>
+            <a:off x="502920" y="3200400"/>
+            <a:ext cx="11183112" cy="1051560"/>
           </a:xfrm>
           <a:prstGeom prst="roundRect">
             <a:avLst/>
@@ -7557,12 +7136,22 @@
           </a:fontRef>
         </p:style>
         <p:txBody>
-          <a:bodyPr rtlCol="0" anchor="ctr" wrap="square" lIns="38100" rIns="38100" tIns="25400" bIns="25400"/>
-          <a:lstStyle/>
-          <a:p>
-            <a:pPr algn="l"/>
-            <a:r>
-              <a:rPr sz="1250" b="1" i="0">
+          <a:bodyPr rtlCol="0" anchor="ctr" wrap="square" lIns="76200" rIns="76200" tIns="38100" bIns="38100"/>
+          <a:lstStyle/>
+          <a:p>
+            <a:pPr algn="l">
+              <a:lnSpc>
+                <a:spcPct val="118000"/>
+              </a:lnSpc>
+              <a:spcBef>
+                <a:spcPts val="0"/>
+              </a:spcBef>
+              <a:spcAft>
+                <a:spcPts val="400"/>
+              </a:spcAft>
+            </a:pPr>
+            <a:r>
+              <a:rPr sz="1450" b="1" i="0">
                 <a:solidFill>
                   <a:srgbClr val="C1121F"/>
                 </a:solidFill>
@@ -7572,9 +7161,19 @@
             </a:r>
           </a:p>
           <a:p>
-            <a:pPr algn="l"/>
-            <a:r>
-              <a:rPr sz="1100" b="0" i="0">
+            <a:pPr algn="l">
+              <a:lnSpc>
+                <a:spcPct val="118000"/>
+              </a:lnSpc>
+              <a:spcBef>
+                <a:spcPts val="0"/>
+              </a:spcBef>
+              <a:spcAft>
+                <a:spcPts val="300"/>
+              </a:spcAft>
+            </a:pPr>
+            <a:r>
+              <a:rPr sz="1300" b="0" i="0">
                 <a:solidFill>
                   <a:srgbClr val="22252B"/>
                 </a:solidFill>
@@ -7593,8 +7192,8 @@
         </p:nvSpPr>
         <p:spPr>
           <a:xfrm>
-            <a:off x="502920" y="4233672"/>
-            <a:ext cx="11155680" cy="960120"/>
+            <a:off x="502920" y="4352544"/>
+            <a:ext cx="11183112" cy="1051560"/>
           </a:xfrm>
           <a:prstGeom prst="roundRect">
             <a:avLst/>
@@ -7624,12 +7223,22 @@
           </a:fontRef>
         </p:style>
         <p:txBody>
-          <a:bodyPr rtlCol="0" anchor="ctr" wrap="square" lIns="38100" rIns="38100" tIns="25400" bIns="25400"/>
-          <a:lstStyle/>
-          <a:p>
-            <a:pPr algn="l"/>
-            <a:r>
-              <a:rPr sz="1250" b="1" i="0">
+          <a:bodyPr rtlCol="0" anchor="ctr" wrap="square" lIns="76200" rIns="76200" tIns="38100" bIns="38100"/>
+          <a:lstStyle/>
+          <a:p>
+            <a:pPr algn="l">
+              <a:lnSpc>
+                <a:spcPct val="118000"/>
+              </a:lnSpc>
+              <a:spcBef>
+                <a:spcPts val="0"/>
+              </a:spcBef>
+              <a:spcAft>
+                <a:spcPts val="400"/>
+              </a:spcAft>
+            </a:pPr>
+            <a:r>
+              <a:rPr sz="1450" b="1" i="0">
                 <a:solidFill>
                   <a:srgbClr val="C1121F"/>
                 </a:solidFill>
@@ -7639,9 +7248,19 @@
             </a:r>
           </a:p>
           <a:p>
-            <a:pPr algn="l"/>
-            <a:r>
-              <a:rPr sz="1100" b="0" i="0">
+            <a:pPr algn="l">
+              <a:lnSpc>
+                <a:spcPct val="118000"/>
+              </a:lnSpc>
+              <a:spcBef>
+                <a:spcPts val="0"/>
+              </a:spcBef>
+              <a:spcAft>
+                <a:spcPts val="300"/>
+              </a:spcAft>
+            </a:pPr>
+            <a:r>
+              <a:rPr sz="1300" b="0" i="0">
                 <a:solidFill>
                   <a:srgbClr val="22252B"/>
                 </a:solidFill>
@@ -7660,8 +7279,8 @@
         </p:nvSpPr>
         <p:spPr>
           <a:xfrm>
-            <a:off x="502920" y="5312664"/>
-            <a:ext cx="11155680" cy="960120"/>
+            <a:off x="502920" y="5504688"/>
+            <a:ext cx="11183112" cy="1051560"/>
           </a:xfrm>
           <a:prstGeom prst="roundRect">
             <a:avLst/>
@@ -7691,12 +7310,22 @@
           </a:fontRef>
         </p:style>
         <p:txBody>
-          <a:bodyPr rtlCol="0" anchor="ctr" wrap="square" lIns="38100" rIns="38100" tIns="25400" bIns="25400"/>
-          <a:lstStyle/>
-          <a:p>
-            <a:pPr algn="l"/>
-            <a:r>
-              <a:rPr sz="1250" b="1" i="0">
+          <a:bodyPr rtlCol="0" anchor="ctr" wrap="square" lIns="76200" rIns="76200" tIns="38100" bIns="38100"/>
+          <a:lstStyle/>
+          <a:p>
+            <a:pPr algn="l">
+              <a:lnSpc>
+                <a:spcPct val="118000"/>
+              </a:lnSpc>
+              <a:spcBef>
+                <a:spcPts val="0"/>
+              </a:spcBef>
+              <a:spcAft>
+                <a:spcPts val="400"/>
+              </a:spcAft>
+            </a:pPr>
+            <a:r>
+              <a:rPr sz="1450" b="1" i="0">
                 <a:solidFill>
                   <a:srgbClr val="C1121F"/>
                 </a:solidFill>
@@ -7706,9 +7335,19 @@
             </a:r>
           </a:p>
           <a:p>
-            <a:pPr algn="l"/>
-            <a:r>
-              <a:rPr sz="1100" b="0" i="0">
+            <a:pPr algn="l">
+              <a:lnSpc>
+                <a:spcPct val="118000"/>
+              </a:lnSpc>
+              <a:spcBef>
+                <a:spcPts val="0"/>
+              </a:spcBef>
+              <a:spcAft>
+                <a:spcPts val="300"/>
+              </a:spcAft>
+            </a:pPr>
+            <a:r>
+              <a:rPr sz="1300" b="0" i="0">
                 <a:solidFill>
                   <a:srgbClr val="22252B"/>
                 </a:solidFill>
@@ -7776,10 +7415,20 @@
           </a:fontRef>
         </p:style>
         <p:txBody>
-          <a:bodyPr rtlCol="0" anchor="ctr" wrap="square" lIns="38100" rIns="38100" tIns="25400" bIns="25400"/>
-          <a:lstStyle/>
-          <a:p>
-            <a:pPr algn="ctr"/>
+          <a:bodyPr rtlCol="0" anchor="ctr" wrap="square" lIns="76200" rIns="76200" tIns="38100" bIns="38100"/>
+          <a:lstStyle/>
+          <a:p>
+            <a:pPr algn="ctr">
+              <a:lnSpc>
+                <a:spcPct val="118000"/>
+              </a:lnSpc>
+              <a:spcBef>
+                <a:spcPts val="0"/>
+              </a:spcBef>
+              <a:spcAft>
+                <a:spcPts val="300"/>
+              </a:spcAft>
+            </a:pPr>
             <a:r>
               <a:rPr sz="1100" b="0" i="0">
                 <a:solidFill>
@@ -7809,12 +7458,22 @@
           <a:noFill/>
         </p:spPr>
         <p:txBody>
-          <a:bodyPr wrap="square" anchor="t" lIns="25400" rIns="25400" tIns="12700" bIns="12700">
+          <a:bodyPr wrap="square" anchor="t" lIns="38100" rIns="38100" tIns="25400" bIns="25400">
             <a:spAutoFit/>
           </a:bodyPr>
           <a:lstStyle/>
           <a:p>
-            <a:pPr algn="l"/>
+            <a:pPr algn="l">
+              <a:lnSpc>
+                <a:spcPct val="120000"/>
+              </a:lnSpc>
+              <a:spcBef>
+                <a:spcPts val="0"/>
+              </a:spcBef>
+              <a:spcAft>
+                <a:spcPts val="400"/>
+              </a:spcAft>
+            </a:pPr>
             <a:r>
               <a:rPr sz="2000" b="1" i="0">
                 <a:solidFill>
@@ -7844,12 +7503,22 @@
           <a:noFill/>
         </p:spPr>
         <p:txBody>
-          <a:bodyPr wrap="square" anchor="t" lIns="25400" rIns="25400" tIns="12700" bIns="12700">
+          <a:bodyPr wrap="square" anchor="t" lIns="38100" rIns="38100" tIns="25400" bIns="25400">
             <a:spAutoFit/>
           </a:bodyPr>
           <a:lstStyle/>
           <a:p>
-            <a:pPr algn="l"/>
+            <a:pPr algn="l">
+              <a:lnSpc>
+                <a:spcPct val="120000"/>
+              </a:lnSpc>
+              <a:spcBef>
+                <a:spcPts val="0"/>
+              </a:spcBef>
+              <a:spcAft>
+                <a:spcPts val="400"/>
+              </a:spcAft>
+            </a:pPr>
             <a:r>
               <a:rPr sz="3400" b="1" i="0">
                 <a:solidFill>
@@ -7919,10 +7588,20 @@
           </a:fontRef>
         </p:style>
         <p:txBody>
-          <a:bodyPr rtlCol="0" anchor="ctr" wrap="square" lIns="38100" rIns="38100" tIns="25400" bIns="25400"/>
-          <a:lstStyle/>
-          <a:p>
-            <a:pPr algn="ctr"/>
+          <a:bodyPr rtlCol="0" anchor="ctr" wrap="square" lIns="76200" rIns="76200" tIns="38100" bIns="38100"/>
+          <a:lstStyle/>
+          <a:p>
+            <a:pPr algn="ctr">
+              <a:lnSpc>
+                <a:spcPct val="118000"/>
+              </a:lnSpc>
+              <a:spcBef>
+                <a:spcPts val="0"/>
+              </a:spcBef>
+              <a:spcAft>
+                <a:spcPts val="300"/>
+              </a:spcAft>
+            </a:pPr>
             <a:r>
               <a:rPr sz="1100" b="0" i="0">
                 <a:solidFill>
@@ -7943,7 +7622,7 @@
         </p:nvSpPr>
         <p:spPr>
           <a:xfrm>
-            <a:off x="502920" y="164592"/>
+            <a:off x="502920" y="146304"/>
             <a:ext cx="11185855" cy="320040"/>
           </a:xfrm>
           <a:prstGeom prst="rect">
@@ -7952,14 +7631,24 @@
           <a:noFill/>
         </p:spPr>
         <p:txBody>
-          <a:bodyPr wrap="square" anchor="t" lIns="25400" rIns="25400" tIns="12700" bIns="12700">
+          <a:bodyPr wrap="square" anchor="t" lIns="38100" rIns="38100" tIns="25400" bIns="25400">
             <a:spAutoFit/>
           </a:bodyPr>
           <a:lstStyle/>
           <a:p>
-            <a:pPr algn="l"/>
-            <a:r>
-              <a:rPr sz="1200" b="1" i="0">
+            <a:pPr algn="l">
+              <a:lnSpc>
+                <a:spcPct val="120000"/>
+              </a:lnSpc>
+              <a:spcBef>
+                <a:spcPts val="0"/>
+              </a:spcBef>
+              <a:spcAft>
+                <a:spcPts val="0"/>
+              </a:spcAft>
+            </a:pPr>
+            <a:r>
+              <a:rPr sz="1350" b="1" i="0">
                 <a:solidFill>
                   <a:srgbClr val="2A6F97"/>
                 </a:solidFill>
@@ -7979,7 +7668,7 @@
         <p:spPr>
           <a:xfrm>
             <a:off x="502920" y="457200"/>
-            <a:ext cx="11185855" cy="548640"/>
+            <a:ext cx="11185855" cy="566928"/>
           </a:xfrm>
           <a:prstGeom prst="rect">
             <a:avLst/>
@@ -7987,14 +7676,24 @@
           <a:noFill/>
         </p:spPr>
         <p:txBody>
-          <a:bodyPr wrap="square" anchor="t" lIns="25400" rIns="25400" tIns="12700" bIns="12700">
+          <a:bodyPr wrap="square" anchor="t" lIns="38100" rIns="38100" tIns="25400" bIns="25400">
             <a:spAutoFit/>
           </a:bodyPr>
           <a:lstStyle/>
           <a:p>
-            <a:pPr algn="l"/>
-            <a:r>
-              <a:rPr sz="2200" b="1" i="0">
+            <a:pPr algn="l">
+              <a:lnSpc>
+                <a:spcPct val="120000"/>
+              </a:lnSpc>
+              <a:spcBef>
+                <a:spcPts val="0"/>
+              </a:spcBef>
+              <a:spcAft>
+                <a:spcPts val="0"/>
+              </a:spcAft>
+            </a:pPr>
+            <a:r>
+              <a:rPr sz="2400" b="1" i="0">
                 <a:solidFill>
                   <a:srgbClr val="22252B"/>
                 </a:solidFill>
@@ -8044,10 +7743,20 @@
           </a:fontRef>
         </p:style>
         <p:txBody>
-          <a:bodyPr rtlCol="0" anchor="ctr" wrap="square" lIns="38100" rIns="38100" tIns="25400" bIns="25400"/>
-          <a:lstStyle/>
-          <a:p>
-            <a:pPr algn="ctr"/>
+          <a:bodyPr rtlCol="0" anchor="ctr" wrap="square" lIns="76200" rIns="76200" tIns="38100" bIns="38100"/>
+          <a:lstStyle/>
+          <a:p>
+            <a:pPr algn="ctr">
+              <a:lnSpc>
+                <a:spcPct val="118000"/>
+              </a:lnSpc>
+              <a:spcBef>
+                <a:spcPts val="0"/>
+              </a:spcBef>
+              <a:spcAft>
+                <a:spcPts val="300"/>
+              </a:spcAft>
+            </a:pPr>
             <a:r>
               <a:rPr sz="1300" b="1" i="0">
                 <a:solidFill>
@@ -8059,7 +7768,17 @@
             </a:r>
           </a:p>
           <a:p>
-            <a:pPr algn="ctr"/>
+            <a:pPr algn="ctr">
+              <a:lnSpc>
+                <a:spcPct val="118000"/>
+              </a:lnSpc>
+              <a:spcBef>
+                <a:spcPts val="0"/>
+              </a:spcBef>
+              <a:spcAft>
+                <a:spcPts val="300"/>
+              </a:spcAft>
+            </a:pPr>
             <a:r>
               <a:rPr sz="1000" b="0" i="0">
                 <a:solidFill>
@@ -8111,10 +7830,20 @@
           </a:fontRef>
         </p:style>
         <p:txBody>
-          <a:bodyPr rtlCol="0" anchor="ctr" wrap="square" lIns="38100" rIns="38100" tIns="25400" bIns="25400"/>
-          <a:lstStyle/>
-          <a:p>
-            <a:pPr algn="ctr"/>
+          <a:bodyPr rtlCol="0" anchor="ctr" wrap="square" lIns="76200" rIns="76200" tIns="38100" bIns="38100"/>
+          <a:lstStyle/>
+          <a:p>
+            <a:pPr algn="ctr">
+              <a:lnSpc>
+                <a:spcPct val="118000"/>
+              </a:lnSpc>
+              <a:spcBef>
+                <a:spcPts val="0"/>
+              </a:spcBef>
+              <a:spcAft>
+                <a:spcPts val="300"/>
+              </a:spcAft>
+            </a:pPr>
             <a:r>
               <a:rPr sz="1300" b="1" i="0">
                 <a:solidFill>
@@ -8126,7 +7855,17 @@
             </a:r>
           </a:p>
           <a:p>
-            <a:pPr algn="ctr"/>
+            <a:pPr algn="ctr">
+              <a:lnSpc>
+                <a:spcPct val="118000"/>
+              </a:lnSpc>
+              <a:spcBef>
+                <a:spcPts val="0"/>
+              </a:spcBef>
+              <a:spcAft>
+                <a:spcPts val="300"/>
+              </a:spcAft>
+            </a:pPr>
             <a:r>
               <a:rPr sz="1000" b="0" i="0">
                 <a:solidFill>
@@ -8178,10 +7917,20 @@
           </a:fontRef>
         </p:style>
         <p:txBody>
-          <a:bodyPr rtlCol="0" anchor="ctr" wrap="square" lIns="38100" rIns="38100" tIns="25400" bIns="25400"/>
-          <a:lstStyle/>
-          <a:p>
-            <a:pPr algn="ctr"/>
+          <a:bodyPr rtlCol="0" anchor="ctr" wrap="square" lIns="76200" rIns="76200" tIns="38100" bIns="38100"/>
+          <a:lstStyle/>
+          <a:p>
+            <a:pPr algn="ctr">
+              <a:lnSpc>
+                <a:spcPct val="118000"/>
+              </a:lnSpc>
+              <a:spcBef>
+                <a:spcPts val="0"/>
+              </a:spcBef>
+              <a:spcAft>
+                <a:spcPts val="300"/>
+              </a:spcAft>
+            </a:pPr>
             <a:r>
               <a:rPr sz="1300" b="1" i="0">
                 <a:solidFill>
@@ -8193,7 +7942,17 @@
             </a:r>
           </a:p>
           <a:p>
-            <a:pPr algn="ctr"/>
+            <a:pPr algn="ctr">
+              <a:lnSpc>
+                <a:spcPct val="118000"/>
+              </a:lnSpc>
+              <a:spcBef>
+                <a:spcPts val="0"/>
+              </a:spcBef>
+              <a:spcAft>
+                <a:spcPts val="300"/>
+              </a:spcAft>
+            </a:pPr>
             <a:r>
               <a:rPr sz="1000" b="0" i="0">
                 <a:solidFill>
@@ -8245,10 +8004,20 @@
           </a:fontRef>
         </p:style>
         <p:txBody>
-          <a:bodyPr rtlCol="0" anchor="ctr" wrap="square" lIns="38100" rIns="38100" tIns="25400" bIns="25400"/>
-          <a:lstStyle/>
-          <a:p>
-            <a:pPr algn="ctr"/>
+          <a:bodyPr rtlCol="0" anchor="ctr" wrap="square" lIns="76200" rIns="76200" tIns="38100" bIns="38100"/>
+          <a:lstStyle/>
+          <a:p>
+            <a:pPr algn="ctr">
+              <a:lnSpc>
+                <a:spcPct val="118000"/>
+              </a:lnSpc>
+              <a:spcBef>
+                <a:spcPts val="0"/>
+              </a:spcBef>
+              <a:spcAft>
+                <a:spcPts val="300"/>
+              </a:spcAft>
+            </a:pPr>
             <a:r>
               <a:rPr sz="1300" b="1" i="0">
                 <a:solidFill>
@@ -8260,7 +8029,17 @@
             </a:r>
           </a:p>
           <a:p>
-            <a:pPr algn="ctr"/>
+            <a:pPr algn="ctr">
+              <a:lnSpc>
+                <a:spcPct val="118000"/>
+              </a:lnSpc>
+              <a:spcBef>
+                <a:spcPts val="0"/>
+              </a:spcBef>
+              <a:spcAft>
+                <a:spcPts val="300"/>
+              </a:spcAft>
+            </a:pPr>
             <a:r>
               <a:rPr sz="1000" b="0" i="0">
                 <a:solidFill>
@@ -8312,10 +8091,20 @@
           </a:fontRef>
         </p:style>
         <p:txBody>
-          <a:bodyPr rtlCol="0" anchor="ctr" wrap="square" lIns="38100" rIns="38100" tIns="25400" bIns="25400"/>
-          <a:lstStyle/>
-          <a:p>
-            <a:pPr algn="ctr"/>
+          <a:bodyPr rtlCol="0" anchor="ctr" wrap="square" lIns="76200" rIns="76200" tIns="38100" bIns="38100"/>
+          <a:lstStyle/>
+          <a:p>
+            <a:pPr algn="ctr">
+              <a:lnSpc>
+                <a:spcPct val="118000"/>
+              </a:lnSpc>
+              <a:spcBef>
+                <a:spcPts val="0"/>
+              </a:spcBef>
+              <a:spcAft>
+                <a:spcPts val="300"/>
+              </a:spcAft>
+            </a:pPr>
             <a:r>
               <a:rPr sz="1300" b="1" i="0">
                 <a:solidFill>
@@ -8327,7 +8116,17 @@
             </a:r>
           </a:p>
           <a:p>
-            <a:pPr algn="ctr"/>
+            <a:pPr algn="ctr">
+              <a:lnSpc>
+                <a:spcPct val="118000"/>
+              </a:lnSpc>
+              <a:spcBef>
+                <a:spcPts val="0"/>
+              </a:spcBef>
+              <a:spcAft>
+                <a:spcPts val="300"/>
+              </a:spcAft>
+            </a:pPr>
             <a:r>
               <a:rPr sz="1000" b="0" i="0">
                 <a:solidFill>
@@ -8379,10 +8178,20 @@
           </a:fontRef>
         </p:style>
         <p:txBody>
-          <a:bodyPr rtlCol="0" anchor="ctr" wrap="square" lIns="38100" rIns="38100" tIns="25400" bIns="25400"/>
-          <a:lstStyle/>
-          <a:p>
-            <a:pPr algn="ctr"/>
+          <a:bodyPr rtlCol="0" anchor="ctr" wrap="square" lIns="76200" rIns="76200" tIns="38100" bIns="38100"/>
+          <a:lstStyle/>
+          <a:p>
+            <a:pPr algn="ctr">
+              <a:lnSpc>
+                <a:spcPct val="118000"/>
+              </a:lnSpc>
+              <a:spcBef>
+                <a:spcPts val="0"/>
+              </a:spcBef>
+              <a:spcAft>
+                <a:spcPts val="300"/>
+              </a:spcAft>
+            </a:pPr>
             <a:r>
               <a:rPr sz="1300" b="1" i="0">
                 <a:solidFill>
@@ -8394,7 +8203,17 @@
             </a:r>
           </a:p>
           <a:p>
-            <a:pPr algn="ctr"/>
+            <a:pPr algn="ctr">
+              <a:lnSpc>
+                <a:spcPct val="118000"/>
+              </a:lnSpc>
+              <a:spcBef>
+                <a:spcPts val="0"/>
+              </a:spcBef>
+              <a:spcAft>
+                <a:spcPts val="300"/>
+              </a:spcAft>
+            </a:pPr>
             <a:r>
               <a:rPr sz="1000" b="0" i="0">
                 <a:solidFill>
@@ -8460,12 +8279,22 @@
           <a:noFill/>
         </p:spPr>
         <p:txBody>
-          <a:bodyPr wrap="square" anchor="t" lIns="25400" rIns="25400" tIns="12700" bIns="12700">
+          <a:bodyPr wrap="square" anchor="t" lIns="38100" rIns="38100" tIns="25400" bIns="25400">
             <a:spAutoFit/>
           </a:bodyPr>
           <a:lstStyle/>
           <a:p>
-            <a:pPr algn="ctr"/>
+            <a:pPr algn="ctr">
+              <a:lnSpc>
+                <a:spcPct val="120000"/>
+              </a:lnSpc>
+              <a:spcBef>
+                <a:spcPts val="0"/>
+              </a:spcBef>
+              <a:spcAft>
+                <a:spcPts val="400"/>
+              </a:spcAft>
+            </a:pPr>
             <a:r>
               <a:rPr sz="900" b="0" i="0">
                 <a:solidFill>
@@ -8531,12 +8360,22 @@
           <a:noFill/>
         </p:spPr>
         <p:txBody>
-          <a:bodyPr wrap="square" anchor="t" lIns="25400" rIns="25400" tIns="12700" bIns="12700">
+          <a:bodyPr wrap="square" anchor="t" lIns="38100" rIns="38100" tIns="25400" bIns="25400">
             <a:spAutoFit/>
           </a:bodyPr>
           <a:lstStyle/>
           <a:p>
-            <a:pPr algn="ctr"/>
+            <a:pPr algn="ctr">
+              <a:lnSpc>
+                <a:spcPct val="120000"/>
+              </a:lnSpc>
+              <a:spcBef>
+                <a:spcPts val="0"/>
+              </a:spcBef>
+              <a:spcAft>
+                <a:spcPts val="400"/>
+              </a:spcAft>
+            </a:pPr>
             <a:r>
               <a:rPr sz="900" b="0" i="0">
                 <a:solidFill>
@@ -8602,12 +8441,22 @@
           <a:noFill/>
         </p:spPr>
         <p:txBody>
-          <a:bodyPr wrap="square" anchor="t" lIns="25400" rIns="25400" tIns="12700" bIns="12700">
+          <a:bodyPr wrap="square" anchor="t" lIns="38100" rIns="38100" tIns="25400" bIns="25400">
             <a:spAutoFit/>
           </a:bodyPr>
           <a:lstStyle/>
           <a:p>
-            <a:pPr algn="ctr"/>
+            <a:pPr algn="ctr">
+              <a:lnSpc>
+                <a:spcPct val="120000"/>
+              </a:lnSpc>
+              <a:spcBef>
+                <a:spcPts val="0"/>
+              </a:spcBef>
+              <a:spcAft>
+                <a:spcPts val="400"/>
+              </a:spcAft>
+            </a:pPr>
             <a:r>
               <a:rPr sz="900" b="0" i="0">
                 <a:solidFill>
@@ -8673,12 +8522,22 @@
           <a:noFill/>
         </p:spPr>
         <p:txBody>
-          <a:bodyPr wrap="square" anchor="t" lIns="25400" rIns="25400" tIns="12700" bIns="12700">
+          <a:bodyPr wrap="square" anchor="t" lIns="38100" rIns="38100" tIns="25400" bIns="25400">
             <a:spAutoFit/>
           </a:bodyPr>
           <a:lstStyle/>
           <a:p>
-            <a:pPr algn="ctr"/>
+            <a:pPr algn="ctr">
+              <a:lnSpc>
+                <a:spcPct val="120000"/>
+              </a:lnSpc>
+              <a:spcBef>
+                <a:spcPts val="0"/>
+              </a:spcBef>
+              <a:spcAft>
+                <a:spcPts val="400"/>
+              </a:spcAft>
+            </a:pPr>
             <a:r>
               <a:rPr sz="900" b="0" i="0">
                 <a:solidFill>
@@ -8744,12 +8603,22 @@
           <a:noFill/>
         </p:spPr>
         <p:txBody>
-          <a:bodyPr wrap="square" anchor="t" lIns="25400" rIns="25400" tIns="12700" bIns="12700">
+          <a:bodyPr wrap="square" anchor="t" lIns="38100" rIns="38100" tIns="25400" bIns="25400">
             <a:spAutoFit/>
           </a:bodyPr>
           <a:lstStyle/>
           <a:p>
-            <a:pPr algn="ctr"/>
+            <a:pPr algn="ctr">
+              <a:lnSpc>
+                <a:spcPct val="120000"/>
+              </a:lnSpc>
+              <a:spcBef>
+                <a:spcPts val="0"/>
+              </a:spcBef>
+              <a:spcAft>
+                <a:spcPts val="400"/>
+              </a:spcAft>
+            </a:pPr>
             <a:r>
               <a:rPr sz="900" b="0" i="0">
                 <a:solidFill>
@@ -8779,12 +8648,22 @@
           <a:noFill/>
         </p:spPr>
         <p:txBody>
-          <a:bodyPr wrap="square" anchor="t" lIns="25400" rIns="25400" tIns="12700" bIns="12700">
+          <a:bodyPr wrap="square" anchor="t" lIns="38100" rIns="38100" tIns="25400" bIns="25400">
             <a:spAutoFit/>
           </a:bodyPr>
           <a:lstStyle/>
           <a:p>
-            <a:pPr algn="l"/>
+            <a:pPr algn="l">
+              <a:lnSpc>
+                <a:spcPct val="120000"/>
+              </a:lnSpc>
+              <a:spcBef>
+                <a:spcPts val="0"/>
+              </a:spcBef>
+              <a:spcAft>
+                <a:spcPts val="400"/>
+              </a:spcAft>
+            </a:pPr>
             <a:r>
               <a:rPr sz="1200" b="1" i="0">
                 <a:solidFill>
@@ -8814,12 +8693,22 @@
           <a:noFill/>
         </p:spPr>
         <p:txBody>
-          <a:bodyPr wrap="square" anchor="t" lIns="25400" rIns="25400" tIns="12700" bIns="12700">
+          <a:bodyPr wrap="square" anchor="t" lIns="38100" rIns="38100" tIns="25400" bIns="25400">
             <a:spAutoFit/>
           </a:bodyPr>
           <a:lstStyle/>
           <a:p>
-            <a:pPr algn="l"/>
+            <a:pPr algn="l">
+              <a:lnSpc>
+                <a:spcPct val="120000"/>
+              </a:lnSpc>
+              <a:spcBef>
+                <a:spcPts val="0"/>
+              </a:spcBef>
+              <a:spcAft>
+                <a:spcPts val="400"/>
+              </a:spcAft>
+            </a:pPr>
             <a:r>
               <a:rPr sz="1050" b="0" i="1">
                 <a:solidFill>
@@ -8871,10 +8760,20 @@
           </a:fontRef>
         </p:style>
         <p:txBody>
-          <a:bodyPr rtlCol="0" anchor="ctr" wrap="square" lIns="38100" rIns="38100" tIns="25400" bIns="25400"/>
-          <a:lstStyle/>
-          <a:p>
-            <a:pPr algn="l"/>
+          <a:bodyPr rtlCol="0" anchor="ctr" wrap="square" lIns="76200" rIns="76200" tIns="38100" bIns="38100"/>
+          <a:lstStyle/>
+          <a:p>
+            <a:pPr algn="l">
+              <a:lnSpc>
+                <a:spcPct val="118000"/>
+              </a:lnSpc>
+              <a:spcBef>
+                <a:spcPts val="0"/>
+              </a:spcBef>
+              <a:spcAft>
+                <a:spcPts val="300"/>
+              </a:spcAft>
+            </a:pPr>
             <a:r>
               <a:rPr sz="1250" b="1" i="0">
                 <a:solidFill>
@@ -8886,7 +8785,17 @@
             </a:r>
           </a:p>
           <a:p>
-            <a:pPr algn="l"/>
+            <a:pPr algn="l">
+              <a:lnSpc>
+                <a:spcPct val="118000"/>
+              </a:lnSpc>
+              <a:spcBef>
+                <a:spcPts val="0"/>
+              </a:spcBef>
+              <a:spcAft>
+                <a:spcPts val="300"/>
+              </a:spcAft>
+            </a:pPr>
             <a:r>
               <a:rPr sz="1100" b="0" i="0">
                 <a:solidFill>
@@ -8975,10 +8884,20 @@
           </a:fontRef>
         </p:style>
         <p:txBody>
-          <a:bodyPr rtlCol="0" anchor="ctr" wrap="square" lIns="38100" rIns="38100" tIns="25400" bIns="25400"/>
-          <a:lstStyle/>
-          <a:p>
-            <a:pPr algn="l"/>
+          <a:bodyPr rtlCol="0" anchor="ctr" wrap="square" lIns="76200" rIns="76200" tIns="38100" bIns="38100"/>
+          <a:lstStyle/>
+          <a:p>
+            <a:pPr algn="l">
+              <a:lnSpc>
+                <a:spcPct val="118000"/>
+              </a:lnSpc>
+              <a:spcBef>
+                <a:spcPts val="0"/>
+              </a:spcBef>
+              <a:spcAft>
+                <a:spcPts val="300"/>
+              </a:spcAft>
+            </a:pPr>
             <a:r>
               <a:rPr sz="1250" b="1" i="0">
                 <a:solidFill>
@@ -8990,7 +8909,17 @@
             </a:r>
           </a:p>
           <a:p>
-            <a:pPr algn="l"/>
+            <a:pPr algn="l">
+              <a:lnSpc>
+                <a:spcPct val="118000"/>
+              </a:lnSpc>
+              <a:spcBef>
+                <a:spcPts val="0"/>
+              </a:spcBef>
+              <a:spcAft>
+                <a:spcPts val="300"/>
+              </a:spcAft>
+            </a:pPr>
             <a:r>
               <a:rPr sz="1100" b="0" i="0">
                 <a:solidFill>
@@ -9002,7 +8931,17 @@
             </a:r>
           </a:p>
           <a:p>
-            <a:pPr algn="l"/>
+            <a:pPr algn="l">
+              <a:lnSpc>
+                <a:spcPct val="118000"/>
+              </a:lnSpc>
+              <a:spcBef>
+                <a:spcPts val="0"/>
+              </a:spcBef>
+              <a:spcAft>
+                <a:spcPts val="300"/>
+              </a:spcAft>
+            </a:pPr>
             <a:r>
               <a:rPr sz="1100" b="0" i="0">
                 <a:solidFill>
@@ -9014,7 +8953,17 @@
             </a:r>
           </a:p>
           <a:p>
-            <a:pPr algn="l"/>
+            <a:pPr algn="l">
+              <a:lnSpc>
+                <a:spcPct val="118000"/>
+              </a:lnSpc>
+              <a:spcBef>
+                <a:spcPts val="0"/>
+              </a:spcBef>
+              <a:spcAft>
+                <a:spcPts val="300"/>
+              </a:spcAft>
+            </a:pPr>
             <a:r>
               <a:rPr sz="1100" b="0" i="0">
                 <a:solidFill>
@@ -9066,10 +9015,20 @@
           </a:fontRef>
         </p:style>
         <p:txBody>
-          <a:bodyPr rtlCol="0" anchor="ctr" wrap="square" lIns="38100" rIns="38100" tIns="25400" bIns="25400"/>
-          <a:lstStyle/>
-          <a:p>
-            <a:pPr algn="ctr"/>
+          <a:bodyPr rtlCol="0" anchor="ctr" wrap="square" lIns="76200" rIns="76200" tIns="38100" bIns="38100"/>
+          <a:lstStyle/>
+          <a:p>
+            <a:pPr algn="ctr">
+              <a:lnSpc>
+                <a:spcPct val="118000"/>
+              </a:lnSpc>
+              <a:spcBef>
+                <a:spcPts val="0"/>
+              </a:spcBef>
+              <a:spcAft>
+                <a:spcPts val="300"/>
+              </a:spcAft>
+            </a:pPr>
             <a:r>
               <a:rPr sz="1300" b="1" i="0">
                 <a:solidFill>
@@ -9081,7 +9040,17 @@
             </a:r>
           </a:p>
           <a:p>
-            <a:pPr algn="ctr"/>
+            <a:pPr algn="ctr">
+              <a:lnSpc>
+                <a:spcPct val="118000"/>
+              </a:lnSpc>
+              <a:spcBef>
+                <a:spcPts val="0"/>
+              </a:spcBef>
+              <a:spcAft>
+                <a:spcPts val="300"/>
+              </a:spcAft>
+            </a:pPr>
             <a:r>
               <a:rPr sz="1100" b="0" i="0">
                 <a:solidFill>
@@ -9093,7 +9062,17 @@
             </a:r>
           </a:p>
           <a:p>
-            <a:pPr algn="ctr"/>
+            <a:pPr algn="ctr">
+              <a:lnSpc>
+                <a:spcPct val="118000"/>
+              </a:lnSpc>
+              <a:spcBef>
+                <a:spcPts val="0"/>
+              </a:spcBef>
+              <a:spcAft>
+                <a:spcPts val="300"/>
+              </a:spcAft>
+            </a:pPr>
             <a:r>
               <a:rPr sz="1050" b="0" i="0">
                 <a:solidFill>
@@ -9105,7 +9084,17 @@
             </a:r>
           </a:p>
           <a:p>
-            <a:pPr algn="ctr"/>
+            <a:pPr algn="ctr">
+              <a:lnSpc>
+                <a:spcPct val="118000"/>
+              </a:lnSpc>
+              <a:spcBef>
+                <a:spcPts val="0"/>
+              </a:spcBef>
+              <a:spcAft>
+                <a:spcPts val="300"/>
+              </a:spcAft>
+            </a:pPr>
             <a:r>
               <a:rPr sz="1050" b="0" i="0">
                 <a:solidFill>
@@ -9157,10 +9146,20 @@
           </a:fontRef>
         </p:style>
         <p:txBody>
-          <a:bodyPr rtlCol="0" anchor="ctr" wrap="square" lIns="38100" rIns="38100" tIns="25400" bIns="25400"/>
-          <a:lstStyle/>
-          <a:p>
-            <a:pPr algn="l"/>
+          <a:bodyPr rtlCol="0" anchor="ctr" wrap="square" lIns="76200" rIns="76200" tIns="38100" bIns="38100"/>
+          <a:lstStyle/>
+          <a:p>
+            <a:pPr algn="l">
+              <a:lnSpc>
+                <a:spcPct val="118000"/>
+              </a:lnSpc>
+              <a:spcBef>
+                <a:spcPts val="0"/>
+              </a:spcBef>
+              <a:spcAft>
+                <a:spcPts val="300"/>
+              </a:spcAft>
+            </a:pPr>
             <a:r>
               <a:rPr sz="1150" b="1" i="0">
                 <a:solidFill>
@@ -9172,7 +9171,17 @@
             </a:r>
           </a:p>
           <a:p>
-            <a:pPr algn="l"/>
+            <a:pPr algn="l">
+              <a:lnSpc>
+                <a:spcPct val="118000"/>
+              </a:lnSpc>
+              <a:spcBef>
+                <a:spcPts val="0"/>
+              </a:spcBef>
+              <a:spcAft>
+                <a:spcPts val="300"/>
+              </a:spcAft>
+            </a:pPr>
             <a:r>
               <a:rPr sz="1100" b="0" i="0">
                 <a:solidFill>
@@ -9242,10 +9251,20 @@
           </a:fontRef>
         </p:style>
         <p:txBody>
-          <a:bodyPr rtlCol="0" anchor="ctr" wrap="square" lIns="38100" rIns="38100" tIns="25400" bIns="25400"/>
-          <a:lstStyle/>
-          <a:p>
-            <a:pPr algn="ctr"/>
+          <a:bodyPr rtlCol="0" anchor="ctr" wrap="square" lIns="76200" rIns="76200" tIns="38100" bIns="38100"/>
+          <a:lstStyle/>
+          <a:p>
+            <a:pPr algn="ctr">
+              <a:lnSpc>
+                <a:spcPct val="118000"/>
+              </a:lnSpc>
+              <a:spcBef>
+                <a:spcPts val="0"/>
+              </a:spcBef>
+              <a:spcAft>
+                <a:spcPts val="300"/>
+              </a:spcAft>
+            </a:pPr>
             <a:r>
               <a:rPr sz="1100" b="0" i="0">
                 <a:solidFill>
@@ -9266,7 +9285,7 @@
         </p:nvSpPr>
         <p:spPr>
           <a:xfrm>
-            <a:off x="502920" y="164592"/>
+            <a:off x="502920" y="146304"/>
             <a:ext cx="11185855" cy="320040"/>
           </a:xfrm>
           <a:prstGeom prst="rect">
@@ -9275,14 +9294,24 @@
           <a:noFill/>
         </p:spPr>
         <p:txBody>
-          <a:bodyPr wrap="square" anchor="t" lIns="25400" rIns="25400" tIns="12700" bIns="12700">
+          <a:bodyPr wrap="square" anchor="t" lIns="38100" rIns="38100" tIns="25400" bIns="25400">
             <a:spAutoFit/>
           </a:bodyPr>
           <a:lstStyle/>
           <a:p>
-            <a:pPr algn="l"/>
-            <a:r>
-              <a:rPr sz="1200" b="1" i="0">
+            <a:pPr algn="l">
+              <a:lnSpc>
+                <a:spcPct val="120000"/>
+              </a:lnSpc>
+              <a:spcBef>
+                <a:spcPts val="0"/>
+              </a:spcBef>
+              <a:spcAft>
+                <a:spcPts val="0"/>
+              </a:spcAft>
+            </a:pPr>
+            <a:r>
+              <a:rPr sz="1350" b="1" i="0">
                 <a:solidFill>
                   <a:srgbClr val="2A6F97"/>
                 </a:solidFill>
@@ -9302,7 +9331,7 @@
         <p:spPr>
           <a:xfrm>
             <a:off x="502920" y="457200"/>
-            <a:ext cx="11185855" cy="548640"/>
+            <a:ext cx="11185855" cy="566928"/>
           </a:xfrm>
           <a:prstGeom prst="rect">
             <a:avLst/>
@@ -9310,1347 +9339,68 @@
           <a:noFill/>
         </p:spPr>
         <p:txBody>
-          <a:bodyPr wrap="square" anchor="t" lIns="25400" rIns="25400" tIns="12700" bIns="12700">
+          <a:bodyPr wrap="square" anchor="t" lIns="38100" rIns="38100" tIns="25400" bIns="25400">
             <a:spAutoFit/>
           </a:bodyPr>
           <a:lstStyle/>
           <a:p>
-            <a:pPr algn="l"/>
-            <a:r>
-              <a:rPr sz="2200" b="1" i="0">
+            <a:pPr algn="l">
+              <a:lnSpc>
+                <a:spcPct val="120000"/>
+              </a:lnSpc>
+              <a:spcBef>
+                <a:spcPts val="0"/>
+              </a:spcBef>
+              <a:spcAft>
+                <a:spcPts val="0"/>
+              </a:spcAft>
+            </a:pPr>
+            <a:r>
+              <a:rPr sz="2400" b="1" i="0">
                 <a:solidFill>
                   <a:srgbClr val="22252B"/>
                 </a:solidFill>
                 <a:latin typeface="Noto Sans CJK KR"/>
               </a:rPr>
-              <a:t>한 장으로 보는 계보 — 문제 → 다음이 해결</a:t>
-            </a:r>
-          </a:p>
-        </p:txBody>
-      </p:sp>
-      <p:sp>
-        <p:nvSpPr>
-          <p:cNvPr id="5" name="Rounded Rectangle 4"/>
+              <a:t>한 장으로 보는 직관 지도</a:t>
+            </a:r>
+          </a:p>
+        </p:txBody>
+      </p:sp>
+      <p:pic>
+        <p:nvPicPr>
+          <p:cNvPr id="5" name="Picture 4" descr="optimizer-map.png"/>
+          <p:cNvPicPr>
+            <a:picLocks noChangeAspect="1"/>
+          </p:cNvPicPr>
+          <p:nvPr/>
+        </p:nvPicPr>
+        <p:blipFill>
+          <a:blip r:embed="rId2"/>
+          <a:stretch>
+            <a:fillRect/>
+          </a:stretch>
+        </p:blipFill>
+        <p:spPr>
+          <a:xfrm>
+            <a:off x="1112367" y="1234440"/>
+            <a:ext cx="9966960" cy="4827746"/>
+          </a:xfrm>
+          <a:prstGeom prst="rect">
+            <a:avLst/>
+          </a:prstGeom>
+        </p:spPr>
+      </p:pic>
+      <p:sp>
+        <p:nvSpPr>
+          <p:cNvPr id="6" name="Rounded Rectangle 5"/>
           <p:cNvSpPr/>
           <p:nvPr/>
         </p:nvSpPr>
         <p:spPr>
           <a:xfrm>
-            <a:off x="502920" y="1325880"/>
-            <a:ext cx="1554480" cy="566928"/>
-          </a:xfrm>
-          <a:prstGeom prst="roundRect">
-            <a:avLst/>
-          </a:prstGeom>
-          <a:solidFill>
-            <a:srgbClr val="DBE7F3"/>
-          </a:solidFill>
-          <a:ln w="12700">
-            <a:solidFill>
-              <a:srgbClr val="2A6F97"/>
-            </a:solidFill>
-          </a:ln>
-          <a:effectLst/>
-        </p:spPr>
-        <p:style>
-          <a:lnRef idx="1">
-            <a:schemeClr val="accent1"/>
-          </a:lnRef>
-          <a:fillRef idx="3">
-            <a:schemeClr val="accent1"/>
-          </a:fillRef>
-          <a:effectRef idx="2">
-            <a:schemeClr val="accent1"/>
-          </a:effectRef>
-          <a:fontRef idx="minor">
-            <a:schemeClr val="lt1"/>
-          </a:fontRef>
-        </p:style>
-        <p:txBody>
-          <a:bodyPr rtlCol="0" anchor="ctr" wrap="square" lIns="38100" rIns="38100" tIns="25400" bIns="25400"/>
-          <a:lstStyle/>
-          <a:p>
-            <a:pPr algn="ctr"/>
-            <a:r>
-              <a:rPr sz="1200" b="1" i="0">
-                <a:solidFill>
-                  <a:srgbClr val="2A6F97"/>
-                </a:solidFill>
-                <a:latin typeface="Noto Sans CJK KR"/>
-              </a:rPr>
-              <a:t>GD</a:t>
-            </a:r>
-          </a:p>
-        </p:txBody>
-      </p:sp>
-      <p:sp>
-        <p:nvSpPr>
-          <p:cNvPr id="6" name="TextBox 5"/>
-          <p:cNvSpPr txBox="1"/>
-          <p:nvPr/>
-        </p:nvSpPr>
-        <p:spPr>
-          <a:xfrm>
-            <a:off x="502920" y="1901952"/>
-            <a:ext cx="1554480" cy="502920"/>
-          </a:xfrm>
-          <a:prstGeom prst="rect">
-            <a:avLst/>
-          </a:prstGeom>
-          <a:noFill/>
-        </p:spPr>
-        <p:txBody>
-          <a:bodyPr wrap="square" anchor="t" lIns="25400" rIns="25400" tIns="12700" bIns="12700">
-            <a:spAutoFit/>
-          </a:bodyPr>
-          <a:lstStyle/>
-          <a:p>
-            <a:pPr algn="ctr"/>
-            <a:r>
-              <a:rPr sz="830" b="0" i="0">
-                <a:solidFill>
-                  <a:srgbClr val="5A5F68"/>
-                </a:solidFill>
-                <a:latin typeface="Noto Sans CJK KR"/>
-              </a:rPr>
-              <a:t>전체 데이터로
-정확한 방향</a:t>
-            </a:r>
-          </a:p>
-        </p:txBody>
-      </p:sp>
-      <p:sp>
-        <p:nvSpPr>
-          <p:cNvPr id="7" name="Rounded Rectangle 6"/>
-          <p:cNvSpPr/>
-          <p:nvPr/>
-        </p:nvSpPr>
-        <p:spPr>
-          <a:xfrm>
-            <a:off x="502920" y="2880360"/>
-            <a:ext cx="1554480" cy="566928"/>
-          </a:xfrm>
-          <a:prstGeom prst="roundRect">
-            <a:avLst/>
-          </a:prstGeom>
-          <a:solidFill>
-            <a:srgbClr val="DBE7F3"/>
-          </a:solidFill>
-          <a:ln w="12700">
-            <a:solidFill>
-              <a:srgbClr val="2A6F97"/>
-            </a:solidFill>
-          </a:ln>
-          <a:effectLst/>
-        </p:spPr>
-        <p:style>
-          <a:lnRef idx="1">
-            <a:schemeClr val="accent1"/>
-          </a:lnRef>
-          <a:fillRef idx="3">
-            <a:schemeClr val="accent1"/>
-          </a:fillRef>
-          <a:effectRef idx="2">
-            <a:schemeClr val="accent1"/>
-          </a:effectRef>
-          <a:fontRef idx="minor">
-            <a:schemeClr val="lt1"/>
-          </a:fontRef>
-        </p:style>
-        <p:txBody>
-          <a:bodyPr rtlCol="0" anchor="ctr" wrap="square" lIns="38100" rIns="38100" tIns="25400" bIns="25400"/>
-          <a:lstStyle/>
-          <a:p>
-            <a:pPr algn="ctr"/>
-            <a:r>
-              <a:rPr sz="1200" b="1" i="0">
-                <a:solidFill>
-                  <a:srgbClr val="2A6F97"/>
-                </a:solidFill>
-                <a:latin typeface="Noto Sans CJK KR"/>
-              </a:rPr>
-              <a:t>SGD</a:t>
-            </a:r>
-          </a:p>
-        </p:txBody>
-      </p:sp>
-      <p:sp>
-        <p:nvSpPr>
-          <p:cNvPr id="8" name="TextBox 7"/>
-          <p:cNvSpPr txBox="1"/>
-          <p:nvPr/>
-        </p:nvSpPr>
-        <p:spPr>
-          <a:xfrm>
-            <a:off x="502920" y="3456432"/>
-            <a:ext cx="1554480" cy="502920"/>
-          </a:xfrm>
-          <a:prstGeom prst="rect">
-            <a:avLst/>
-          </a:prstGeom>
-          <a:noFill/>
-        </p:spPr>
-        <p:txBody>
-          <a:bodyPr wrap="square" anchor="t" lIns="25400" rIns="25400" tIns="12700" bIns="12700">
-            <a:spAutoFit/>
-          </a:bodyPr>
-          <a:lstStyle/>
-          <a:p>
-            <a:pPr algn="ctr"/>
-            <a:r>
-              <a:rPr sz="830" b="0" i="0">
-                <a:solidFill>
-                  <a:srgbClr val="5A5F68"/>
-                </a:solidFill>
-                <a:latin typeface="Noto Sans CJK KR"/>
-              </a:rPr>
-              <a:t>미니배치로
-빠르게 자주</a:t>
-            </a:r>
-          </a:p>
-        </p:txBody>
-      </p:sp>
-      <p:sp>
-        <p:nvSpPr>
-          <p:cNvPr id="9" name="Rounded Rectangle 8"/>
-          <p:cNvSpPr/>
-          <p:nvPr/>
-        </p:nvSpPr>
-        <p:spPr>
-          <a:xfrm>
-            <a:off x="2788920" y="1417320"/>
-            <a:ext cx="1828800" cy="566928"/>
-          </a:xfrm>
-          <a:prstGeom prst="roundRect">
-            <a:avLst/>
-          </a:prstGeom>
-          <a:solidFill>
-            <a:srgbClr val="DBE7F3"/>
-          </a:solidFill>
-          <a:ln w="12700">
-            <a:solidFill>
-              <a:srgbClr val="2A6F97"/>
-            </a:solidFill>
-          </a:ln>
-          <a:effectLst/>
-        </p:spPr>
-        <p:style>
-          <a:lnRef idx="1">
-            <a:schemeClr val="accent1"/>
-          </a:lnRef>
-          <a:fillRef idx="3">
-            <a:schemeClr val="accent1"/>
-          </a:fillRef>
-          <a:effectRef idx="2">
-            <a:schemeClr val="accent1"/>
-          </a:effectRef>
-          <a:fontRef idx="minor">
-            <a:schemeClr val="lt1"/>
-          </a:fontRef>
-        </p:style>
-        <p:txBody>
-          <a:bodyPr rtlCol="0" anchor="ctr" wrap="square" lIns="38100" rIns="38100" tIns="25400" bIns="25400"/>
-          <a:lstStyle/>
-          <a:p>
-            <a:pPr algn="ctr"/>
-            <a:r>
-              <a:rPr sz="1200" b="1" i="0">
-                <a:solidFill>
-                  <a:srgbClr val="2A6F97"/>
-                </a:solidFill>
-                <a:latin typeface="Noto Sans CJK KR"/>
-              </a:rPr>
-              <a:t>Momentum</a:t>
-            </a:r>
-          </a:p>
-        </p:txBody>
-      </p:sp>
-      <p:sp>
-        <p:nvSpPr>
-          <p:cNvPr id="10" name="TextBox 9"/>
-          <p:cNvSpPr txBox="1"/>
-          <p:nvPr/>
-        </p:nvSpPr>
-        <p:spPr>
-          <a:xfrm>
-            <a:off x="2788920" y="1993392"/>
-            <a:ext cx="1828800" cy="502920"/>
-          </a:xfrm>
-          <a:prstGeom prst="rect">
-            <a:avLst/>
-          </a:prstGeom>
-          <a:noFill/>
-        </p:spPr>
-        <p:txBody>
-          <a:bodyPr wrap="square" anchor="t" lIns="25400" rIns="25400" tIns="12700" bIns="12700">
-            <a:spAutoFit/>
-          </a:bodyPr>
-          <a:lstStyle/>
-          <a:p>
-            <a:pPr algn="ctr"/>
-            <a:r>
-              <a:rPr sz="830" b="0" i="0">
-                <a:solidFill>
-                  <a:srgbClr val="5A5F68"/>
-                </a:solidFill>
-                <a:latin typeface="Noto Sans CJK KR"/>
-              </a:rPr>
-              <a:t>관성으로 방향 안정</a:t>
-            </a:r>
-          </a:p>
-        </p:txBody>
-      </p:sp>
-      <p:sp>
-        <p:nvSpPr>
-          <p:cNvPr id="11" name="Rounded Rectangle 10"/>
-          <p:cNvSpPr/>
-          <p:nvPr/>
-        </p:nvSpPr>
-        <p:spPr>
-          <a:xfrm>
-            <a:off x="5257800" y="1417320"/>
-            <a:ext cx="1828800" cy="566928"/>
-          </a:xfrm>
-          <a:prstGeom prst="roundRect">
-            <a:avLst/>
-          </a:prstGeom>
-          <a:solidFill>
-            <a:srgbClr val="DBE7F3"/>
-          </a:solidFill>
-          <a:ln w="12700">
-            <a:solidFill>
-              <a:srgbClr val="2A6F97"/>
-            </a:solidFill>
-          </a:ln>
-          <a:effectLst/>
-        </p:spPr>
-        <p:style>
-          <a:lnRef idx="1">
-            <a:schemeClr val="accent1"/>
-          </a:lnRef>
-          <a:fillRef idx="3">
-            <a:schemeClr val="accent1"/>
-          </a:fillRef>
-          <a:effectRef idx="2">
-            <a:schemeClr val="accent1"/>
-          </a:effectRef>
-          <a:fontRef idx="minor">
-            <a:schemeClr val="lt1"/>
-          </a:fontRef>
-        </p:style>
-        <p:txBody>
-          <a:bodyPr rtlCol="0" anchor="ctr" wrap="square" lIns="38100" rIns="38100" tIns="25400" bIns="25400"/>
-          <a:lstStyle/>
-          <a:p>
-            <a:pPr algn="ctr"/>
-            <a:r>
-              <a:rPr sz="1200" b="1" i="0">
-                <a:solidFill>
-                  <a:srgbClr val="2A6F97"/>
-                </a:solidFill>
-                <a:latin typeface="Noto Sans CJK KR"/>
-              </a:rPr>
-              <a:t>NAG</a:t>
-            </a:r>
-          </a:p>
-        </p:txBody>
-      </p:sp>
-      <p:sp>
-        <p:nvSpPr>
-          <p:cNvPr id="12" name="TextBox 11"/>
-          <p:cNvSpPr txBox="1"/>
-          <p:nvPr/>
-        </p:nvSpPr>
-        <p:spPr>
-          <a:xfrm>
-            <a:off x="5257800" y="1993392"/>
-            <a:ext cx="1828800" cy="502920"/>
-          </a:xfrm>
-          <a:prstGeom prst="rect">
-            <a:avLst/>
-          </a:prstGeom>
-          <a:noFill/>
-        </p:spPr>
-        <p:txBody>
-          <a:bodyPr wrap="square" anchor="t" lIns="25400" rIns="25400" tIns="12700" bIns="12700">
-            <a:spAutoFit/>
-          </a:bodyPr>
-          <a:lstStyle/>
-          <a:p>
-            <a:pPr algn="ctr"/>
-            <a:r>
-              <a:rPr sz="830" b="0" i="0">
-                <a:solidFill>
-                  <a:srgbClr val="5A5F68"/>
-                </a:solidFill>
-                <a:latin typeface="Noto Sans CJK KR"/>
-              </a:rPr>
-              <a:t>관성 자리서
-미리 보정</a:t>
-            </a:r>
-          </a:p>
-        </p:txBody>
-      </p:sp>
-      <p:sp>
-        <p:nvSpPr>
-          <p:cNvPr id="13" name="Rounded Rectangle 12"/>
-          <p:cNvSpPr/>
-          <p:nvPr/>
-        </p:nvSpPr>
-        <p:spPr>
-          <a:xfrm>
-            <a:off x="2788920" y="3977639"/>
-            <a:ext cx="1828800" cy="566928"/>
-          </a:xfrm>
-          <a:prstGeom prst="roundRect">
-            <a:avLst/>
-          </a:prstGeom>
-          <a:solidFill>
-            <a:srgbClr val="DAF0ED"/>
-          </a:solidFill>
-          <a:ln w="12700">
-            <a:solidFill>
-              <a:srgbClr val="2A9D8F"/>
-            </a:solidFill>
-          </a:ln>
-          <a:effectLst/>
-        </p:spPr>
-        <p:style>
-          <a:lnRef idx="1">
-            <a:schemeClr val="accent1"/>
-          </a:lnRef>
-          <a:fillRef idx="3">
-            <a:schemeClr val="accent1"/>
-          </a:fillRef>
-          <a:effectRef idx="2">
-            <a:schemeClr val="accent1"/>
-          </a:effectRef>
-          <a:fontRef idx="minor">
-            <a:schemeClr val="lt1"/>
-          </a:fontRef>
-        </p:style>
-        <p:txBody>
-          <a:bodyPr rtlCol="0" anchor="ctr" wrap="square" lIns="38100" rIns="38100" tIns="25400" bIns="25400"/>
-          <a:lstStyle/>
-          <a:p>
-            <a:pPr algn="ctr"/>
-            <a:r>
-              <a:rPr sz="1200" b="1" i="0">
-                <a:solidFill>
-                  <a:srgbClr val="2A9D8F"/>
-                </a:solidFill>
-                <a:latin typeface="Noto Sans CJK KR"/>
-              </a:rPr>
-              <a:t>Adagrad</a:t>
-            </a:r>
-          </a:p>
-        </p:txBody>
-      </p:sp>
-      <p:sp>
-        <p:nvSpPr>
-          <p:cNvPr id="14" name="TextBox 13"/>
-          <p:cNvSpPr txBox="1"/>
-          <p:nvPr/>
-        </p:nvSpPr>
-        <p:spPr>
-          <a:xfrm>
-            <a:off x="2788920" y="4553712"/>
-            <a:ext cx="1828800" cy="502920"/>
-          </a:xfrm>
-          <a:prstGeom prst="rect">
-            <a:avLst/>
-          </a:prstGeom>
-          <a:noFill/>
-        </p:spPr>
-        <p:txBody>
-          <a:bodyPr wrap="square" anchor="t" lIns="25400" rIns="25400" tIns="12700" bIns="12700">
-            <a:spAutoFit/>
-          </a:bodyPr>
-          <a:lstStyle/>
-          <a:p>
-            <a:pPr algn="ctr"/>
-            <a:r>
-              <a:rPr sz="830" b="0" i="0">
-                <a:solidFill>
-                  <a:srgbClr val="5A5F68"/>
-                </a:solidFill>
-                <a:latin typeface="Noto Sans CJK KR"/>
-              </a:rPr>
-              <a:t>좌표별 보폭
-(누적 g²)</a:t>
-            </a:r>
-          </a:p>
-        </p:txBody>
-      </p:sp>
-      <p:sp>
-        <p:nvSpPr>
-          <p:cNvPr id="15" name="Rounded Rectangle 14"/>
-          <p:cNvSpPr/>
-          <p:nvPr/>
-        </p:nvSpPr>
-        <p:spPr>
-          <a:xfrm>
-            <a:off x="5257800" y="3977639"/>
-            <a:ext cx="1828800" cy="566928"/>
-          </a:xfrm>
-          <a:prstGeom prst="roundRect">
-            <a:avLst/>
-          </a:prstGeom>
-          <a:solidFill>
-            <a:srgbClr val="DAF0ED"/>
-          </a:solidFill>
-          <a:ln w="12700">
-            <a:solidFill>
-              <a:srgbClr val="2A9D8F"/>
-            </a:solidFill>
-          </a:ln>
-          <a:effectLst/>
-        </p:spPr>
-        <p:style>
-          <a:lnRef idx="1">
-            <a:schemeClr val="accent1"/>
-          </a:lnRef>
-          <a:fillRef idx="3">
-            <a:schemeClr val="accent1"/>
-          </a:fillRef>
-          <a:effectRef idx="2">
-            <a:schemeClr val="accent1"/>
-          </a:effectRef>
-          <a:fontRef idx="minor">
-            <a:schemeClr val="lt1"/>
-          </a:fontRef>
-        </p:style>
-        <p:txBody>
-          <a:bodyPr rtlCol="0" anchor="ctr" wrap="square" lIns="38100" rIns="38100" tIns="25400" bIns="25400"/>
-          <a:lstStyle/>
-          <a:p>
-            <a:pPr algn="ctr"/>
-            <a:r>
-              <a:rPr sz="1200" b="1" i="0">
-                <a:solidFill>
-                  <a:srgbClr val="2A9D8F"/>
-                </a:solidFill>
-                <a:latin typeface="Noto Sans CJK KR"/>
-              </a:rPr>
-              <a:t>RMSProp</a:t>
-            </a:r>
-          </a:p>
-        </p:txBody>
-      </p:sp>
-      <p:sp>
-        <p:nvSpPr>
-          <p:cNvPr id="16" name="TextBox 15"/>
-          <p:cNvSpPr txBox="1"/>
-          <p:nvPr/>
-        </p:nvSpPr>
-        <p:spPr>
-          <a:xfrm>
-            <a:off x="5257800" y="4553712"/>
-            <a:ext cx="1828800" cy="502920"/>
-          </a:xfrm>
-          <a:prstGeom prst="rect">
-            <a:avLst/>
-          </a:prstGeom>
-          <a:noFill/>
-        </p:spPr>
-        <p:txBody>
-          <a:bodyPr wrap="square" anchor="t" lIns="25400" rIns="25400" tIns="12700" bIns="12700">
-            <a:spAutoFit/>
-          </a:bodyPr>
-          <a:lstStyle/>
-          <a:p>
-            <a:pPr algn="ctr"/>
-            <a:r>
-              <a:rPr sz="830" b="0" i="0">
-                <a:solidFill>
-                  <a:srgbClr val="5A5F68"/>
-                </a:solidFill>
-                <a:latin typeface="Noto Sans CJK KR"/>
-              </a:rPr>
-              <a:t>누적 대신
-EMA(안 죽음)</a:t>
-            </a:r>
-          </a:p>
-        </p:txBody>
-      </p:sp>
-      <p:sp>
-        <p:nvSpPr>
-          <p:cNvPr id="17" name="Rounded Rectangle 16"/>
-          <p:cNvSpPr/>
-          <p:nvPr/>
-        </p:nvSpPr>
-        <p:spPr>
-          <a:xfrm>
-            <a:off x="5257800" y="4892040"/>
-            <a:ext cx="1828800" cy="566928"/>
-          </a:xfrm>
-          <a:prstGeom prst="roundRect">
-            <a:avLst/>
-          </a:prstGeom>
-          <a:solidFill>
-            <a:srgbClr val="DAF0ED"/>
-          </a:solidFill>
-          <a:ln w="12700">
-            <a:solidFill>
-              <a:srgbClr val="2A9D8F"/>
-            </a:solidFill>
-          </a:ln>
-          <a:effectLst/>
-        </p:spPr>
-        <p:style>
-          <a:lnRef idx="1">
-            <a:schemeClr val="accent1"/>
-          </a:lnRef>
-          <a:fillRef idx="3">
-            <a:schemeClr val="accent1"/>
-          </a:fillRef>
-          <a:effectRef idx="2">
-            <a:schemeClr val="accent1"/>
-          </a:effectRef>
-          <a:fontRef idx="minor">
-            <a:schemeClr val="lt1"/>
-          </a:fontRef>
-        </p:style>
-        <p:txBody>
-          <a:bodyPr rtlCol="0" anchor="ctr" wrap="square" lIns="38100" rIns="38100" tIns="25400" bIns="25400"/>
-          <a:lstStyle/>
-          <a:p>
-            <a:pPr algn="ctr"/>
-            <a:r>
-              <a:rPr sz="1200" b="1" i="0">
-                <a:solidFill>
-                  <a:srgbClr val="2A9D8F"/>
-                </a:solidFill>
-                <a:latin typeface="Noto Sans CJK KR"/>
-              </a:rPr>
-              <a:t>AdaDelta</a:t>
-            </a:r>
-          </a:p>
-        </p:txBody>
-      </p:sp>
-      <p:sp>
-        <p:nvSpPr>
-          <p:cNvPr id="18" name="TextBox 17"/>
-          <p:cNvSpPr txBox="1"/>
-          <p:nvPr/>
-        </p:nvSpPr>
-        <p:spPr>
-          <a:xfrm>
-            <a:off x="7178040" y="5029200"/>
-            <a:ext cx="2926080" cy="365760"/>
-          </a:xfrm>
-          <a:prstGeom prst="rect">
-            <a:avLst/>
-          </a:prstGeom>
-          <a:noFill/>
-        </p:spPr>
-        <p:txBody>
-          <a:bodyPr wrap="square" anchor="t" lIns="25400" rIns="25400" tIns="12700" bIns="12700">
-            <a:spAutoFit/>
-          </a:bodyPr>
-          <a:lstStyle/>
-          <a:p>
-            <a:pPr algn="l"/>
-            <a:r>
-              <a:rPr sz="850" b="0" i="0">
-                <a:solidFill>
-                  <a:srgbClr val="5A5F68"/>
-                </a:solidFill>
-                <a:latin typeface="Noto Sans CJK KR"/>
-              </a:rPr>
-              <a:t>η 없이 단위 보정 (곁가지)</a:t>
-            </a:r>
-          </a:p>
-        </p:txBody>
-      </p:sp>
-      <p:sp>
-        <p:nvSpPr>
-          <p:cNvPr id="19" name="Rounded Rectangle 18"/>
-          <p:cNvSpPr/>
-          <p:nvPr/>
-        </p:nvSpPr>
-        <p:spPr>
-          <a:xfrm>
-            <a:off x="7772400" y="2606040"/>
-            <a:ext cx="1828800" cy="566928"/>
-          </a:xfrm>
-          <a:prstGeom prst="roundRect">
-            <a:avLst/>
-          </a:prstGeom>
-          <a:solidFill>
-            <a:srgbClr val="F6ECC7"/>
-          </a:solidFill>
-          <a:ln w="12700">
-            <a:solidFill>
-              <a:srgbClr val="C9A227"/>
-            </a:solidFill>
-          </a:ln>
-          <a:effectLst/>
-        </p:spPr>
-        <p:style>
-          <a:lnRef idx="1">
-            <a:schemeClr val="accent1"/>
-          </a:lnRef>
-          <a:fillRef idx="3">
-            <a:schemeClr val="accent1"/>
-          </a:fillRef>
-          <a:effectRef idx="2">
-            <a:schemeClr val="accent1"/>
-          </a:effectRef>
-          <a:fontRef idx="minor">
-            <a:schemeClr val="lt1"/>
-          </a:fontRef>
-        </p:style>
-        <p:txBody>
-          <a:bodyPr rtlCol="0" anchor="ctr" wrap="square" lIns="38100" rIns="38100" tIns="25400" bIns="25400"/>
-          <a:lstStyle/>
-          <a:p>
-            <a:pPr algn="ctr"/>
-            <a:r>
-              <a:rPr sz="1300" b="1" i="0">
-                <a:solidFill>
-                  <a:srgbClr val="C9A227"/>
-                </a:solidFill>
-                <a:latin typeface="Noto Sans CJK KR"/>
-              </a:rPr>
-              <a:t>Adam</a:t>
-            </a:r>
-          </a:p>
-        </p:txBody>
-      </p:sp>
-      <p:sp>
-        <p:nvSpPr>
-          <p:cNvPr id="20" name="TextBox 19"/>
-          <p:cNvSpPr txBox="1"/>
-          <p:nvPr/>
-        </p:nvSpPr>
-        <p:spPr>
-          <a:xfrm>
-            <a:off x="7772400" y="3182112"/>
-            <a:ext cx="1828800" cy="502920"/>
-          </a:xfrm>
-          <a:prstGeom prst="rect">
-            <a:avLst/>
-          </a:prstGeom>
-          <a:noFill/>
-        </p:spPr>
-        <p:txBody>
-          <a:bodyPr wrap="square" anchor="t" lIns="25400" rIns="25400" tIns="12700" bIns="12700">
-            <a:spAutoFit/>
-          </a:bodyPr>
-          <a:lstStyle/>
-          <a:p>
-            <a:pPr algn="ctr"/>
-            <a:r>
-              <a:rPr sz="830" b="0" i="0">
-                <a:solidFill>
-                  <a:srgbClr val="5A5F68"/>
-                </a:solidFill>
-                <a:latin typeface="Noto Sans CJK KR"/>
-              </a:rPr>
-              <a:t>방향+보폭+편향보정</a:t>
-            </a:r>
-          </a:p>
-        </p:txBody>
-      </p:sp>
-      <p:sp>
-        <p:nvSpPr>
-          <p:cNvPr id="21" name="Rounded Rectangle 20"/>
-          <p:cNvSpPr/>
-          <p:nvPr/>
-        </p:nvSpPr>
-        <p:spPr>
-          <a:xfrm>
-            <a:off x="10058400" y="1417320"/>
-            <a:ext cx="1691640" cy="566928"/>
-          </a:xfrm>
-          <a:prstGeom prst="roundRect">
-            <a:avLst/>
-          </a:prstGeom>
-          <a:solidFill>
-            <a:srgbClr val="F6ECC7"/>
-          </a:solidFill>
-          <a:ln w="12700">
-            <a:solidFill>
-              <a:srgbClr val="C9A227"/>
-            </a:solidFill>
-          </a:ln>
-          <a:effectLst/>
-        </p:spPr>
-        <p:style>
-          <a:lnRef idx="1">
-            <a:schemeClr val="accent1"/>
-          </a:lnRef>
-          <a:fillRef idx="3">
-            <a:schemeClr val="accent1"/>
-          </a:fillRef>
-          <a:effectRef idx="2">
-            <a:schemeClr val="accent1"/>
-          </a:effectRef>
-          <a:fontRef idx="minor">
-            <a:schemeClr val="lt1"/>
-          </a:fontRef>
-        </p:style>
-        <p:txBody>
-          <a:bodyPr rtlCol="0" anchor="ctr" wrap="square" lIns="38100" rIns="38100" tIns="25400" bIns="25400"/>
-          <a:lstStyle/>
-          <a:p>
-            <a:pPr algn="ctr"/>
-            <a:r>
-              <a:rPr sz="1200" b="1" i="0">
-                <a:solidFill>
-                  <a:srgbClr val="C9A227"/>
-                </a:solidFill>
-                <a:latin typeface="Noto Sans CJK KR"/>
-              </a:rPr>
-              <a:t>Nadam</a:t>
-            </a:r>
-          </a:p>
-        </p:txBody>
-      </p:sp>
-      <p:sp>
-        <p:nvSpPr>
-          <p:cNvPr id="22" name="TextBox 21"/>
-          <p:cNvSpPr txBox="1"/>
-          <p:nvPr/>
-        </p:nvSpPr>
-        <p:spPr>
-          <a:xfrm>
-            <a:off x="10058400" y="1993392"/>
-            <a:ext cx="1691640" cy="502920"/>
-          </a:xfrm>
-          <a:prstGeom prst="rect">
-            <a:avLst/>
-          </a:prstGeom>
-          <a:noFill/>
-        </p:spPr>
-        <p:txBody>
-          <a:bodyPr wrap="square" anchor="t" lIns="25400" rIns="25400" tIns="12700" bIns="12700">
-            <a:spAutoFit/>
-          </a:bodyPr>
-          <a:lstStyle/>
-          <a:p>
-            <a:pPr algn="ctr"/>
-            <a:r>
-              <a:rPr sz="830" b="0" i="0">
-                <a:solidFill>
-                  <a:srgbClr val="5A5F68"/>
-                </a:solidFill>
-                <a:latin typeface="Noto Sans CJK KR"/>
-              </a:rPr>
-              <a:t>Adam + NAG</a:t>
-            </a:r>
-          </a:p>
-        </p:txBody>
-      </p:sp>
-      <p:sp>
-        <p:nvSpPr>
-          <p:cNvPr id="23" name="Rounded Rectangle 22"/>
-          <p:cNvSpPr/>
-          <p:nvPr/>
-        </p:nvSpPr>
-        <p:spPr>
-          <a:xfrm>
-            <a:off x="10058400" y="3383280"/>
-            <a:ext cx="1691640" cy="822960"/>
-          </a:xfrm>
-          <a:prstGeom prst="roundRect">
-            <a:avLst/>
-          </a:prstGeom>
-          <a:solidFill>
-            <a:srgbClr val="C9A227"/>
-          </a:solidFill>
-          <a:ln w="12700">
-            <a:solidFill>
-              <a:srgbClr val="C9A227"/>
-            </a:solidFill>
-          </a:ln>
-          <a:effectLst/>
-        </p:spPr>
-        <p:style>
-          <a:lnRef idx="1">
-            <a:schemeClr val="accent1"/>
-          </a:lnRef>
-          <a:fillRef idx="3">
-            <a:schemeClr val="accent1"/>
-          </a:fillRef>
-          <a:effectRef idx="2">
-            <a:schemeClr val="accent1"/>
-          </a:effectRef>
-          <a:fontRef idx="minor">
-            <a:schemeClr val="lt1"/>
-          </a:fontRef>
-        </p:style>
-        <p:txBody>
-          <a:bodyPr rtlCol="0" anchor="ctr" wrap="square" lIns="38100" rIns="38100" tIns="25400" bIns="25400"/>
-          <a:lstStyle/>
-          <a:p>
-            <a:pPr algn="ctr"/>
-            <a:r>
-              <a:rPr sz="1300" b="1" i="0">
-                <a:solidFill>
-                  <a:srgbClr val="FFFFFF"/>
-                </a:solidFill>
-                <a:latin typeface="Noto Sans CJK KR"/>
-              </a:rPr>
-              <a:t>AdamW ★</a:t>
-            </a:r>
-          </a:p>
-          <a:p>
-            <a:pPr algn="ctr"/>
-            <a:r>
-              <a:rPr sz="850" b="0" i="0">
-                <a:solidFill>
-                  <a:srgbClr val="FFFFFF"/>
-                </a:solidFill>
-                <a:latin typeface="Noto Sans CJK KR"/>
-              </a:rPr>
-              <a:t>decoupled decay
-= 오늘의 표준</a:t>
-            </a:r>
-          </a:p>
-        </p:txBody>
-      </p:sp>
-      <p:cxnSp>
-        <p:nvCxnSpPr>
-          <p:cNvPr id="24" name="Connector 23"/>
-          <p:cNvCxnSpPr/>
-          <p:nvPr/>
-        </p:nvCxnSpPr>
-        <p:spPr>
-          <a:xfrm>
-            <a:off x="1280160" y="1892807"/>
-            <a:ext cx="0" cy="987553"/>
-          </a:xfrm>
-          <a:prstGeom prst="line">
-            <a:avLst/>
-          </a:prstGeom>
-          <a:ln w="17780">
-            <a:solidFill>
-              <a:srgbClr val="2A6F97"/>
-            </a:solidFill>
-            <a:tailEnd type="triangle" w="med" h="med"/>
-          </a:ln>
-        </p:spPr>
-        <p:style>
-          <a:lnRef idx="2">
-            <a:schemeClr val="accent1"/>
-          </a:lnRef>
-          <a:fillRef idx="0">
-            <a:schemeClr val="accent1"/>
-          </a:fillRef>
-          <a:effectRef idx="1">
-            <a:schemeClr val="accent1"/>
-          </a:effectRef>
-          <a:fontRef idx="minor">
-            <a:schemeClr val="tx1"/>
-          </a:fontRef>
-        </p:style>
-      </p:cxnSp>
-      <p:cxnSp>
-        <p:nvCxnSpPr>
-          <p:cNvPr id="25" name="Connector 24"/>
-          <p:cNvCxnSpPr/>
-          <p:nvPr/>
-        </p:nvCxnSpPr>
-        <p:spPr>
-          <a:xfrm flipV="1">
-            <a:off x="2057400" y="1984248"/>
-            <a:ext cx="1234440" cy="896112"/>
-          </a:xfrm>
-          <a:prstGeom prst="line">
-            <a:avLst/>
-          </a:prstGeom>
-          <a:ln w="17780">
-            <a:solidFill>
-              <a:srgbClr val="2A6F97"/>
-            </a:solidFill>
-            <a:tailEnd type="triangle" w="med" h="med"/>
-          </a:ln>
-        </p:spPr>
-        <p:style>
-          <a:lnRef idx="2">
-            <a:schemeClr val="accent1"/>
-          </a:lnRef>
-          <a:fillRef idx="0">
-            <a:schemeClr val="accent1"/>
-          </a:fillRef>
-          <a:effectRef idx="1">
-            <a:schemeClr val="accent1"/>
-          </a:effectRef>
-          <a:fontRef idx="minor">
-            <a:schemeClr val="tx1"/>
-          </a:fontRef>
-        </p:style>
-      </p:cxnSp>
-      <p:cxnSp>
-        <p:nvCxnSpPr>
-          <p:cNvPr id="26" name="Connector 25"/>
-          <p:cNvCxnSpPr/>
-          <p:nvPr/>
-        </p:nvCxnSpPr>
-        <p:spPr>
-          <a:xfrm>
-            <a:off x="4617720" y="1700784"/>
-            <a:ext cx="640080" cy="0"/>
-          </a:xfrm>
-          <a:prstGeom prst="line">
-            <a:avLst/>
-          </a:prstGeom>
-          <a:ln w="17780">
-            <a:solidFill>
-              <a:srgbClr val="2A6F97"/>
-            </a:solidFill>
-            <a:tailEnd type="triangle" w="med" h="med"/>
-          </a:ln>
-        </p:spPr>
-        <p:style>
-          <a:lnRef idx="2">
-            <a:schemeClr val="accent1"/>
-          </a:lnRef>
-          <a:fillRef idx="0">
-            <a:schemeClr val="accent1"/>
-          </a:fillRef>
-          <a:effectRef idx="1">
-            <a:schemeClr val="accent1"/>
-          </a:effectRef>
-          <a:fontRef idx="minor">
-            <a:schemeClr val="tx1"/>
-          </a:fontRef>
-        </p:style>
-      </p:cxnSp>
-      <p:cxnSp>
-        <p:nvCxnSpPr>
-          <p:cNvPr id="27" name="Connector 26"/>
-          <p:cNvCxnSpPr/>
-          <p:nvPr/>
-        </p:nvCxnSpPr>
-        <p:spPr>
-          <a:xfrm>
-            <a:off x="2057400" y="3291840"/>
-            <a:ext cx="1234440" cy="685799"/>
-          </a:xfrm>
-          <a:prstGeom prst="line">
-            <a:avLst/>
-          </a:prstGeom>
-          <a:ln w="17780">
-            <a:solidFill>
-              <a:srgbClr val="2A9D8F"/>
-            </a:solidFill>
-            <a:tailEnd type="triangle" w="med" h="med"/>
-          </a:ln>
-        </p:spPr>
-        <p:style>
-          <a:lnRef idx="2">
-            <a:schemeClr val="accent1"/>
-          </a:lnRef>
-          <a:fillRef idx="0">
-            <a:schemeClr val="accent1"/>
-          </a:fillRef>
-          <a:effectRef idx="1">
-            <a:schemeClr val="accent1"/>
-          </a:effectRef>
-          <a:fontRef idx="minor">
-            <a:schemeClr val="tx1"/>
-          </a:fontRef>
-        </p:style>
-      </p:cxnSp>
-      <p:cxnSp>
-        <p:nvCxnSpPr>
-          <p:cNvPr id="28" name="Connector 27"/>
-          <p:cNvCxnSpPr/>
-          <p:nvPr/>
-        </p:nvCxnSpPr>
-        <p:spPr>
-          <a:xfrm>
-            <a:off x="4617720" y="4261104"/>
-            <a:ext cx="640080" cy="0"/>
-          </a:xfrm>
-          <a:prstGeom prst="line">
-            <a:avLst/>
-          </a:prstGeom>
-          <a:ln w="17780">
-            <a:solidFill>
-              <a:srgbClr val="2A9D8F"/>
-            </a:solidFill>
-            <a:tailEnd type="triangle" w="med" h="med"/>
-          </a:ln>
-        </p:spPr>
-        <p:style>
-          <a:lnRef idx="2">
-            <a:schemeClr val="accent1"/>
-          </a:lnRef>
-          <a:fillRef idx="0">
-            <a:schemeClr val="accent1"/>
-          </a:fillRef>
-          <a:effectRef idx="1">
-            <a:schemeClr val="accent1"/>
-          </a:effectRef>
-          <a:fontRef idx="minor">
-            <a:schemeClr val="tx1"/>
-          </a:fontRef>
-        </p:style>
-      </p:cxnSp>
-      <p:cxnSp>
-        <p:nvCxnSpPr>
-          <p:cNvPr id="29" name="Connector 28"/>
-          <p:cNvCxnSpPr/>
-          <p:nvPr/>
-        </p:nvCxnSpPr>
-        <p:spPr>
-          <a:xfrm>
-            <a:off x="6172200" y="4544568"/>
-            <a:ext cx="0" cy="347472"/>
-          </a:xfrm>
-          <a:prstGeom prst="line">
-            <a:avLst/>
-          </a:prstGeom>
-          <a:ln w="17780">
-            <a:solidFill>
-              <a:srgbClr val="2A9D8F"/>
-            </a:solidFill>
-            <a:tailEnd type="triangle" w="med" h="med"/>
-          </a:ln>
-        </p:spPr>
-        <p:style>
-          <a:lnRef idx="2">
-            <a:schemeClr val="accent1"/>
-          </a:lnRef>
-          <a:fillRef idx="0">
-            <a:schemeClr val="accent1"/>
-          </a:fillRef>
-          <a:effectRef idx="1">
-            <a:schemeClr val="accent1"/>
-          </a:effectRef>
-          <a:fontRef idx="minor">
-            <a:schemeClr val="tx1"/>
-          </a:fontRef>
-        </p:style>
-      </p:cxnSp>
-      <p:cxnSp>
-        <p:nvCxnSpPr>
-          <p:cNvPr id="30" name="Connector 29"/>
-          <p:cNvCxnSpPr/>
-          <p:nvPr/>
-        </p:nvCxnSpPr>
-        <p:spPr>
-          <a:xfrm>
-            <a:off x="4617720" y="1828800"/>
-            <a:ext cx="3154680" cy="914400"/>
-          </a:xfrm>
-          <a:prstGeom prst="line">
-            <a:avLst/>
-          </a:prstGeom>
-          <a:ln w="20320">
-            <a:solidFill>
-              <a:srgbClr val="C9A227"/>
-            </a:solidFill>
-            <a:tailEnd type="triangle" w="med" h="med"/>
-          </a:ln>
-        </p:spPr>
-        <p:style>
-          <a:lnRef idx="2">
-            <a:schemeClr val="accent1"/>
-          </a:lnRef>
-          <a:fillRef idx="0">
-            <a:schemeClr val="accent1"/>
-          </a:fillRef>
-          <a:effectRef idx="1">
-            <a:schemeClr val="accent1"/>
-          </a:effectRef>
-          <a:fontRef idx="minor">
-            <a:schemeClr val="tx1"/>
-          </a:fontRef>
-        </p:style>
-      </p:cxnSp>
-      <p:cxnSp>
-        <p:nvCxnSpPr>
-          <p:cNvPr id="31" name="Connector 30"/>
-          <p:cNvCxnSpPr/>
-          <p:nvPr/>
-        </p:nvCxnSpPr>
-        <p:spPr>
-          <a:xfrm flipV="1">
-            <a:off x="7086600" y="3172968"/>
-            <a:ext cx="868679" cy="941832"/>
-          </a:xfrm>
-          <a:prstGeom prst="line">
-            <a:avLst/>
-          </a:prstGeom>
-          <a:ln w="20320">
-            <a:solidFill>
-              <a:srgbClr val="C9A227"/>
-            </a:solidFill>
-            <a:tailEnd type="triangle" w="med" h="med"/>
-          </a:ln>
-        </p:spPr>
-        <p:style>
-          <a:lnRef idx="2">
-            <a:schemeClr val="accent1"/>
-          </a:lnRef>
-          <a:fillRef idx="0">
-            <a:schemeClr val="accent1"/>
-          </a:fillRef>
-          <a:effectRef idx="1">
-            <a:schemeClr val="accent1"/>
-          </a:effectRef>
-          <a:fontRef idx="minor">
-            <a:schemeClr val="tx1"/>
-          </a:fontRef>
-        </p:style>
-      </p:cxnSp>
-      <p:cxnSp>
-        <p:nvCxnSpPr>
-          <p:cNvPr id="32" name="Connector 31"/>
-          <p:cNvCxnSpPr/>
-          <p:nvPr/>
-        </p:nvCxnSpPr>
-        <p:spPr>
-          <a:xfrm flipV="1">
-            <a:off x="9601200" y="1920240"/>
-            <a:ext cx="457200" cy="822960"/>
-          </a:xfrm>
-          <a:prstGeom prst="line">
-            <a:avLst/>
-          </a:prstGeom>
-          <a:ln w="17780">
-            <a:solidFill>
-              <a:srgbClr val="C9A227"/>
-            </a:solidFill>
-            <a:tailEnd type="triangle" w="med" h="med"/>
-          </a:ln>
-        </p:spPr>
-        <p:style>
-          <a:lnRef idx="2">
-            <a:schemeClr val="accent1"/>
-          </a:lnRef>
-          <a:fillRef idx="0">
-            <a:schemeClr val="accent1"/>
-          </a:fillRef>
-          <a:effectRef idx="1">
-            <a:schemeClr val="accent1"/>
-          </a:effectRef>
-          <a:fontRef idx="minor">
-            <a:schemeClr val="tx1"/>
-          </a:fontRef>
-        </p:style>
-      </p:cxnSp>
-      <p:cxnSp>
-        <p:nvCxnSpPr>
-          <p:cNvPr id="33" name="Connector 32"/>
-          <p:cNvCxnSpPr/>
-          <p:nvPr/>
-        </p:nvCxnSpPr>
-        <p:spPr>
-          <a:xfrm>
-            <a:off x="9601200" y="3063240"/>
-            <a:ext cx="457200" cy="502920"/>
-          </a:xfrm>
-          <a:prstGeom prst="line">
-            <a:avLst/>
-          </a:prstGeom>
-          <a:ln w="20320">
-            <a:solidFill>
-              <a:srgbClr val="C9A227"/>
-            </a:solidFill>
-            <a:tailEnd type="triangle" w="med" h="med"/>
-          </a:ln>
-        </p:spPr>
-        <p:style>
-          <a:lnRef idx="2">
-            <a:schemeClr val="accent1"/>
-          </a:lnRef>
-          <a:fillRef idx="0">
-            <a:schemeClr val="accent1"/>
-          </a:fillRef>
-          <a:effectRef idx="1">
-            <a:schemeClr val="accent1"/>
-          </a:effectRef>
-          <a:fontRef idx="minor">
-            <a:schemeClr val="tx1"/>
-          </a:fontRef>
-        </p:style>
-      </p:cxnSp>
-      <p:sp>
-        <p:nvSpPr>
-          <p:cNvPr id="34" name="TextBox 33"/>
-          <p:cNvSpPr txBox="1"/>
-          <p:nvPr/>
-        </p:nvSpPr>
-        <p:spPr>
-          <a:xfrm>
-            <a:off x="2148840" y="2148840"/>
-            <a:ext cx="1280160" cy="274320"/>
-          </a:xfrm>
-          <a:prstGeom prst="rect">
-            <a:avLst/>
-          </a:prstGeom>
-          <a:noFill/>
-        </p:spPr>
-        <p:txBody>
-          <a:bodyPr wrap="square" anchor="t" lIns="25400" rIns="25400" tIns="12700" bIns="12700">
-            <a:spAutoFit/>
-          </a:bodyPr>
-          <a:lstStyle/>
-          <a:p>
-            <a:pPr algn="l"/>
-            <a:r>
-              <a:rPr sz="850" b="0" i="1">
-                <a:solidFill>
-                  <a:srgbClr val="2A6F97"/>
-                </a:solidFill>
-                <a:latin typeface="Noto Sans CJK KR"/>
-              </a:rPr>
-              <a:t>스텝 방향</a:t>
-            </a:r>
-          </a:p>
-        </p:txBody>
-      </p:sp>
-      <p:sp>
-        <p:nvSpPr>
-          <p:cNvPr id="35" name="TextBox 34"/>
-          <p:cNvSpPr txBox="1"/>
-          <p:nvPr/>
-        </p:nvSpPr>
-        <p:spPr>
-          <a:xfrm>
-            <a:off x="2148840" y="3566160"/>
-            <a:ext cx="1280160" cy="274320"/>
-          </a:xfrm>
-          <a:prstGeom prst="rect">
-            <a:avLst/>
-          </a:prstGeom>
-          <a:noFill/>
-        </p:spPr>
-        <p:txBody>
-          <a:bodyPr wrap="square" anchor="t" lIns="25400" rIns="25400" tIns="12700" bIns="12700">
-            <a:spAutoFit/>
-          </a:bodyPr>
-          <a:lstStyle/>
-          <a:p>
-            <a:pPr algn="l"/>
-            <a:r>
-              <a:rPr sz="850" b="0" i="1">
-                <a:solidFill>
-                  <a:srgbClr val="2A9D8F"/>
-                </a:solidFill>
-                <a:latin typeface="Noto Sans CJK KR"/>
-              </a:rPr>
-              <a:t>스텝 사이즈</a:t>
-            </a:r>
-          </a:p>
-        </p:txBody>
-      </p:sp>
-      <p:sp>
-        <p:nvSpPr>
-          <p:cNvPr id="36" name="Rounded Rectangle 35"/>
-          <p:cNvSpPr/>
-          <p:nvPr/>
-        </p:nvSpPr>
-        <p:spPr>
-          <a:xfrm>
-            <a:off x="502920" y="5989320"/>
-            <a:ext cx="11155680" cy="548640"/>
+            <a:off x="502920" y="6199632"/>
+            <a:ext cx="11155680" cy="502920"/>
           </a:xfrm>
           <a:prstGeom prst="roundRect">
             <a:avLst/>
@@ -10680,30 +9430,28 @@
           </a:fontRef>
         </p:style>
         <p:txBody>
-          <a:bodyPr rtlCol="0" anchor="ctr" wrap="square" lIns="38100" rIns="38100" tIns="25400" bIns="25400"/>
-          <a:lstStyle/>
-          <a:p>
-            <a:pPr algn="l"/>
-            <a:r>
-              <a:rPr sz="1100" b="1" i="0">
+          <a:bodyPr rtlCol="0" anchor="ctr" wrap="square" lIns="76200" rIns="76200" tIns="38100" bIns="38100"/>
+          <a:lstStyle/>
+          <a:p>
+            <a:pPr algn="l">
+              <a:lnSpc>
+                <a:spcPct val="118000"/>
+              </a:lnSpc>
+              <a:spcBef>
+                <a:spcPts val="0"/>
+              </a:spcBef>
+              <a:spcAft>
+                <a:spcPts val="300"/>
+              </a:spcAft>
+            </a:pPr>
+            <a:r>
+              <a:rPr sz="1250" b="0" i="0">
                 <a:solidFill>
                   <a:srgbClr val="22252B"/>
                 </a:solidFill>
                 <a:latin typeface="Noto Sans CJK KR"/>
               </a:rPr>
-              <a:t>읽는 법</a:t>
-            </a:r>
-          </a:p>
-          <a:p>
-            <a:pPr algn="l"/>
-            <a:r>
-              <a:rPr sz="1000" b="0" i="0">
-                <a:solidFill>
-                  <a:srgbClr val="22252B"/>
-                </a:solidFill>
-                <a:latin typeface="Noto Sans CJK KR"/>
-              </a:rPr>
-              <a:t>파란 줄기 = '어느 방향으로'(관성)를 고치는 흐름 · 초록 줄기 = '얼마나(보폭)'를 고치는 흐름. Adam이 둘을 합치고, AdamW가 정규화를 분리해 마무리. 다음 장부터 1페이지 1개씩 수식과 함께.</a:t>
+              <a:t>파란 줄기 = '어느 방향으로'(관성)를 고치는 흐름 · 초록 줄기 = '얼마나(보폭)'를 고치는 흐름 → Adam이 둘을 합침. 다음 장부터 이 중 GD·SGD·Momentum·Adagrad·RMSProp·Adam·AdamW를 1페이지씩 수식과 함께.</a:t>
             </a:r>
           </a:p>
         </p:txBody>
@@ -10765,10 +9513,20 @@
           </a:fontRef>
         </p:style>
         <p:txBody>
-          <a:bodyPr rtlCol="0" anchor="ctr" wrap="square" lIns="38100" rIns="38100" tIns="25400" bIns="25400"/>
-          <a:lstStyle/>
-          <a:p>
-            <a:pPr algn="ctr"/>
+          <a:bodyPr rtlCol="0" anchor="ctr" wrap="square" lIns="76200" rIns="76200" tIns="38100" bIns="38100"/>
+          <a:lstStyle/>
+          <a:p>
+            <a:pPr algn="ctr">
+              <a:lnSpc>
+                <a:spcPct val="118000"/>
+              </a:lnSpc>
+              <a:spcBef>
+                <a:spcPts val="0"/>
+              </a:spcBef>
+              <a:spcAft>
+                <a:spcPts val="300"/>
+              </a:spcAft>
+            </a:pPr>
             <a:r>
               <a:rPr sz="1100" b="0" i="0">
                 <a:solidFill>
@@ -10789,7 +9547,7 @@
         </p:nvSpPr>
         <p:spPr>
           <a:xfrm>
-            <a:off x="502920" y="164592"/>
+            <a:off x="502920" y="146304"/>
             <a:ext cx="11185855" cy="320040"/>
           </a:xfrm>
           <a:prstGeom prst="rect">
@@ -10798,14 +9556,24 @@
           <a:noFill/>
         </p:spPr>
         <p:txBody>
-          <a:bodyPr wrap="square" anchor="t" lIns="25400" rIns="25400" tIns="12700" bIns="12700">
+          <a:bodyPr wrap="square" anchor="t" lIns="38100" rIns="38100" tIns="25400" bIns="25400">
             <a:spAutoFit/>
           </a:bodyPr>
           <a:lstStyle/>
           <a:p>
-            <a:pPr algn="l"/>
-            <a:r>
-              <a:rPr sz="1200" b="1" i="0">
+            <a:pPr algn="l">
+              <a:lnSpc>
+                <a:spcPct val="120000"/>
+              </a:lnSpc>
+              <a:spcBef>
+                <a:spcPts val="0"/>
+              </a:spcBef>
+              <a:spcAft>
+                <a:spcPts val="0"/>
+              </a:spcAft>
+            </a:pPr>
+            <a:r>
+              <a:rPr sz="1350" b="1" i="0">
                 <a:solidFill>
                   <a:srgbClr val="2A6F97"/>
                 </a:solidFill>
@@ -10825,7 +9593,7 @@
         <p:spPr>
           <a:xfrm>
             <a:off x="502920" y="457200"/>
-            <a:ext cx="11185855" cy="548640"/>
+            <a:ext cx="11185855" cy="566928"/>
           </a:xfrm>
           <a:prstGeom prst="rect">
             <a:avLst/>
@@ -10833,14 +9601,24 @@
           <a:noFill/>
         </p:spPr>
         <p:txBody>
-          <a:bodyPr wrap="square" anchor="t" lIns="25400" rIns="25400" tIns="12700" bIns="12700">
+          <a:bodyPr wrap="square" anchor="t" lIns="38100" rIns="38100" tIns="25400" bIns="25400">
             <a:spAutoFit/>
           </a:bodyPr>
           <a:lstStyle/>
           <a:p>
-            <a:pPr algn="l"/>
-            <a:r>
-              <a:rPr sz="2200" b="1" i="0">
+            <a:pPr algn="l">
+              <a:lnSpc>
+                <a:spcPct val="120000"/>
+              </a:lnSpc>
+              <a:spcBef>
+                <a:spcPts val="0"/>
+              </a:spcBef>
+              <a:spcAft>
+                <a:spcPts val="0"/>
+              </a:spcAft>
+            </a:pPr>
+            <a:r>
+              <a:rPr sz="2400" b="1" i="0">
                 <a:solidFill>
                   <a:srgbClr val="22252B"/>
                 </a:solidFill>
@@ -10859,8 +9637,8 @@
         </p:nvSpPr>
         <p:spPr>
           <a:xfrm>
-            <a:off x="502920" y="932688"/>
-            <a:ext cx="5486400" cy="274320"/>
+            <a:off x="502920" y="1078992"/>
+            <a:ext cx="11155680" cy="310896"/>
           </a:xfrm>
           <a:prstGeom prst="rect">
             <a:avLst/>
@@ -10868,14 +9646,24 @@
           <a:noFill/>
         </p:spPr>
         <p:txBody>
-          <a:bodyPr wrap="square" anchor="t" lIns="25400" rIns="25400" tIns="12700" bIns="12700">
+          <a:bodyPr wrap="square" anchor="t" lIns="38100" rIns="38100" tIns="25400" bIns="25400">
             <a:spAutoFit/>
           </a:bodyPr>
           <a:lstStyle/>
           <a:p>
-            <a:pPr algn="l"/>
-            <a:r>
-              <a:rPr sz="1100" b="1" i="0">
+            <a:pPr algn="l">
+              <a:lnSpc>
+                <a:spcPct val="120000"/>
+              </a:lnSpc>
+              <a:spcBef>
+                <a:spcPts val="0"/>
+              </a:spcBef>
+              <a:spcAft>
+                <a:spcPts val="0"/>
+              </a:spcAft>
+            </a:pPr>
+            <a:r>
+              <a:rPr sz="1350" b="1" i="0">
                 <a:solidFill>
                   <a:srgbClr val="2A6F97"/>
                 </a:solidFill>
@@ -10894,8 +9682,8 @@
         </p:nvSpPr>
         <p:spPr>
           <a:xfrm>
-            <a:off x="502920" y="1298448"/>
-            <a:ext cx="11155680" cy="896112"/>
+            <a:off x="502920" y="1463040"/>
+            <a:ext cx="11183112" cy="1024128"/>
           </a:xfrm>
           <a:prstGeom prst="roundRect">
             <a:avLst/>
@@ -10925,12 +9713,22 @@
           </a:fontRef>
         </p:style>
         <p:txBody>
-          <a:bodyPr rtlCol="0" anchor="ctr" wrap="square" lIns="38100" rIns="38100" tIns="25400" bIns="25400"/>
-          <a:lstStyle/>
-          <a:p>
-            <a:pPr algn="l"/>
-            <a:r>
-              <a:rPr sz="1150" b="1" i="0">
+          <a:bodyPr rtlCol="0" anchor="ctr" wrap="square" lIns="76200" rIns="76200" tIns="38100" bIns="38100"/>
+          <a:lstStyle/>
+          <a:p>
+            <a:pPr algn="l">
+              <a:lnSpc>
+                <a:spcPct val="118000"/>
+              </a:lnSpc>
+              <a:spcBef>
+                <a:spcPts val="0"/>
+              </a:spcBef>
+              <a:spcAft>
+                <a:spcPts val="400"/>
+              </a:spcAft>
+            </a:pPr>
+            <a:r>
+              <a:rPr sz="1400" b="1" i="0">
                 <a:solidFill>
                   <a:srgbClr val="2A6F97"/>
                 </a:solidFill>
@@ -10940,9 +9738,19 @@
             </a:r>
           </a:p>
           <a:p>
-            <a:pPr algn="l"/>
-            <a:r>
-              <a:rPr sz="1250" b="0" i="0">
+            <a:pPr algn="l">
+              <a:lnSpc>
+                <a:spcPct val="118000"/>
+              </a:lnSpc>
+              <a:spcBef>
+                <a:spcPts val="0"/>
+              </a:spcBef>
+              <a:spcAft>
+                <a:spcPts val="300"/>
+              </a:spcAft>
+            </a:pPr>
+            <a:r>
+              <a:rPr sz="1650" b="0" i="0">
                 <a:solidFill>
                   <a:srgbClr val="22252B"/>
                 </a:solidFill>
@@ -10961,8 +9769,8 @@
         </p:nvSpPr>
         <p:spPr>
           <a:xfrm>
-            <a:off x="502920" y="2377440"/>
-            <a:ext cx="11155680" cy="2148840"/>
+            <a:off x="502920" y="2615184"/>
+            <a:ext cx="11183112" cy="1938528"/>
           </a:xfrm>
           <a:prstGeom prst="roundRect">
             <a:avLst/>
@@ -10992,12 +9800,22 @@
           </a:fontRef>
         </p:style>
         <p:txBody>
-          <a:bodyPr rtlCol="0" anchor="ctr" wrap="square" lIns="38100" rIns="38100" tIns="25400" bIns="25400"/>
-          <a:lstStyle/>
-          <a:p>
-            <a:pPr algn="l"/>
-            <a:r>
-              <a:rPr sz="1150" b="1" i="0">
+          <a:bodyPr rtlCol="0" anchor="ctr" wrap="square" lIns="76200" rIns="76200" tIns="38100" bIns="38100"/>
+          <a:lstStyle/>
+          <a:p>
+            <a:pPr algn="l">
+              <a:lnSpc>
+                <a:spcPct val="118000"/>
+              </a:lnSpc>
+              <a:spcBef>
+                <a:spcPts val="0"/>
+              </a:spcBef>
+              <a:spcAft>
+                <a:spcPts val="600"/>
+              </a:spcAft>
+            </a:pPr>
+            <a:r>
+              <a:rPr sz="1400" b="1" i="0">
                 <a:solidFill>
                   <a:srgbClr val="22252B"/>
                 </a:solidFill>
@@ -11007,9 +9825,19 @@
             </a:r>
           </a:p>
           <a:p>
-            <a:pPr algn="l"/>
-            <a:r>
-              <a:rPr sz="1250" b="0" i="0">
+            <a:pPr algn="l">
+              <a:lnSpc>
+                <a:spcPct val="118000"/>
+              </a:lnSpc>
+              <a:spcBef>
+                <a:spcPts val="0"/>
+              </a:spcBef>
+              <a:spcAft>
+                <a:spcPts val="700"/>
+              </a:spcAft>
+            </a:pPr>
+            <a:r>
+              <a:rPr sz="1550" b="0" i="0">
                 <a:solidFill>
                   <a:srgbClr val="22252B"/>
                 </a:solidFill>
@@ -11019,9 +9847,19 @@
             </a:r>
           </a:p>
           <a:p>
-            <a:pPr algn="l"/>
-            <a:r>
-              <a:rPr sz="1250" b="0" i="0">
+            <a:pPr algn="l">
+              <a:lnSpc>
+                <a:spcPct val="118000"/>
+              </a:lnSpc>
+              <a:spcBef>
+                <a:spcPts val="0"/>
+              </a:spcBef>
+              <a:spcAft>
+                <a:spcPts val="700"/>
+              </a:spcAft>
+            </a:pPr>
+            <a:r>
+              <a:rPr sz="1550" b="0" i="0">
                 <a:solidFill>
                   <a:srgbClr val="22252B"/>
                 </a:solidFill>
@@ -11040,8 +9878,8 @@
         </p:nvSpPr>
         <p:spPr>
           <a:xfrm>
-            <a:off x="502920" y="4709160"/>
-            <a:ext cx="5486400" cy="1737360"/>
+            <a:off x="502920" y="4700016"/>
+            <a:ext cx="5486400" cy="1792224"/>
           </a:xfrm>
           <a:prstGeom prst="roundRect">
             <a:avLst/>
@@ -11071,12 +9909,22 @@
           </a:fontRef>
         </p:style>
         <p:txBody>
-          <a:bodyPr rtlCol="0" anchor="ctr" wrap="square" lIns="38100" rIns="38100" tIns="25400" bIns="25400"/>
-          <a:lstStyle/>
-          <a:p>
-            <a:pPr algn="l"/>
-            <a:r>
-              <a:rPr sz="1150" b="1" i="0">
+          <a:bodyPr rtlCol="0" anchor="ctr" wrap="square" lIns="76200" rIns="76200" tIns="38100" bIns="38100"/>
+          <a:lstStyle/>
+          <a:p>
+            <a:pPr algn="l">
+              <a:lnSpc>
+                <a:spcPct val="118000"/>
+              </a:lnSpc>
+              <a:spcBef>
+                <a:spcPts val="0"/>
+              </a:spcBef>
+              <a:spcAft>
+                <a:spcPts val="500"/>
+              </a:spcAft>
+            </a:pPr>
+            <a:r>
+              <a:rPr sz="1400" b="1" i="0">
                 <a:solidFill>
                   <a:srgbClr val="2A9D8F"/>
                 </a:solidFill>
@@ -11086,9 +9934,19 @@
             </a:r>
           </a:p>
           <a:p>
-            <a:pPr algn="l"/>
-            <a:r>
-              <a:rPr sz="1150" b="0" i="0">
+            <a:pPr algn="l">
+              <a:lnSpc>
+                <a:spcPct val="118000"/>
+              </a:lnSpc>
+              <a:spcBef>
+                <a:spcPts val="0"/>
+              </a:spcBef>
+              <a:spcAft>
+                <a:spcPts val="300"/>
+              </a:spcAft>
+            </a:pPr>
+            <a:r>
+              <a:rPr sz="1450" b="0" i="0">
                 <a:solidFill>
                   <a:srgbClr val="22252B"/>
                 </a:solidFill>
@@ -11107,8 +9965,8 @@
         </p:nvSpPr>
         <p:spPr>
           <a:xfrm>
-            <a:off x="6172200" y="4709160"/>
-            <a:ext cx="5486400" cy="1737360"/>
+            <a:off x="6199632" y="4700016"/>
+            <a:ext cx="5486400" cy="1792224"/>
           </a:xfrm>
           <a:prstGeom prst="roundRect">
             <a:avLst/>
@@ -11138,12 +9996,22 @@
           </a:fontRef>
         </p:style>
         <p:txBody>
-          <a:bodyPr rtlCol="0" anchor="ctr" wrap="square" lIns="38100" rIns="38100" tIns="25400" bIns="25400"/>
-          <a:lstStyle/>
-          <a:p>
-            <a:pPr algn="l"/>
-            <a:r>
-              <a:rPr sz="1150" b="1" i="0">
+          <a:bodyPr rtlCol="0" anchor="ctr" wrap="square" lIns="76200" rIns="76200" tIns="38100" bIns="38100"/>
+          <a:lstStyle/>
+          <a:p>
+            <a:pPr algn="l">
+              <a:lnSpc>
+                <a:spcPct val="118000"/>
+              </a:lnSpc>
+              <a:spcBef>
+                <a:spcPts val="0"/>
+              </a:spcBef>
+              <a:spcAft>
+                <a:spcPts val="500"/>
+              </a:spcAft>
+            </a:pPr>
+            <a:r>
+              <a:rPr sz="1400" b="1" i="0">
                 <a:solidFill>
                   <a:srgbClr val="C1121F"/>
                 </a:solidFill>
@@ -11153,9 +10021,19 @@
             </a:r>
           </a:p>
           <a:p>
-            <a:pPr algn="l"/>
-            <a:r>
-              <a:rPr sz="1150" b="0" i="0">
+            <a:pPr algn="l">
+              <a:lnSpc>
+                <a:spcPct val="118000"/>
+              </a:lnSpc>
+              <a:spcBef>
+                <a:spcPts val="0"/>
+              </a:spcBef>
+              <a:spcAft>
+                <a:spcPts val="300"/>
+              </a:spcAft>
+            </a:pPr>
+            <a:r>
+              <a:rPr sz="1450" b="0" i="0">
                 <a:solidFill>
                   <a:srgbClr val="22252B"/>
                 </a:solidFill>
@@ -11223,10 +10101,20 @@
           </a:fontRef>
         </p:style>
         <p:txBody>
-          <a:bodyPr rtlCol="0" anchor="ctr" wrap="square" lIns="38100" rIns="38100" tIns="25400" bIns="25400"/>
-          <a:lstStyle/>
-          <a:p>
-            <a:pPr algn="ctr"/>
+          <a:bodyPr rtlCol="0" anchor="ctr" wrap="square" lIns="76200" rIns="76200" tIns="38100" bIns="38100"/>
+          <a:lstStyle/>
+          <a:p>
+            <a:pPr algn="ctr">
+              <a:lnSpc>
+                <a:spcPct val="118000"/>
+              </a:lnSpc>
+              <a:spcBef>
+                <a:spcPts val="0"/>
+              </a:spcBef>
+              <a:spcAft>
+                <a:spcPts val="300"/>
+              </a:spcAft>
+            </a:pPr>
             <a:r>
               <a:rPr sz="1100" b="0" i="0">
                 <a:solidFill>
@@ -11247,7 +10135,7 @@
         </p:nvSpPr>
         <p:spPr>
           <a:xfrm>
-            <a:off x="502920" y="164592"/>
+            <a:off x="502920" y="146304"/>
             <a:ext cx="11185855" cy="320040"/>
           </a:xfrm>
           <a:prstGeom prst="rect">
@@ -11256,14 +10144,24 @@
           <a:noFill/>
         </p:spPr>
         <p:txBody>
-          <a:bodyPr wrap="square" anchor="t" lIns="25400" rIns="25400" tIns="12700" bIns="12700">
+          <a:bodyPr wrap="square" anchor="t" lIns="38100" rIns="38100" tIns="25400" bIns="25400">
             <a:spAutoFit/>
           </a:bodyPr>
           <a:lstStyle/>
           <a:p>
-            <a:pPr algn="l"/>
-            <a:r>
-              <a:rPr sz="1200" b="1" i="0">
+            <a:pPr algn="l">
+              <a:lnSpc>
+                <a:spcPct val="120000"/>
+              </a:lnSpc>
+              <a:spcBef>
+                <a:spcPts val="0"/>
+              </a:spcBef>
+              <a:spcAft>
+                <a:spcPts val="0"/>
+              </a:spcAft>
+            </a:pPr>
+            <a:r>
+              <a:rPr sz="1350" b="1" i="0">
                 <a:solidFill>
                   <a:srgbClr val="2A6F97"/>
                 </a:solidFill>
@@ -11283,7 +10181,7 @@
         <p:spPr>
           <a:xfrm>
             <a:off x="502920" y="457200"/>
-            <a:ext cx="11185855" cy="548640"/>
+            <a:ext cx="11185855" cy="566928"/>
           </a:xfrm>
           <a:prstGeom prst="rect">
             <a:avLst/>
@@ -11291,14 +10189,24 @@
           <a:noFill/>
         </p:spPr>
         <p:txBody>
-          <a:bodyPr wrap="square" anchor="t" lIns="25400" rIns="25400" tIns="12700" bIns="12700">
+          <a:bodyPr wrap="square" anchor="t" lIns="38100" rIns="38100" tIns="25400" bIns="25400">
             <a:spAutoFit/>
           </a:bodyPr>
           <a:lstStyle/>
           <a:p>
-            <a:pPr algn="l"/>
-            <a:r>
-              <a:rPr sz="2200" b="1" i="0">
+            <a:pPr algn="l">
+              <a:lnSpc>
+                <a:spcPct val="120000"/>
+              </a:lnSpc>
+              <a:spcBef>
+                <a:spcPts val="0"/>
+              </a:spcBef>
+              <a:spcAft>
+                <a:spcPts val="0"/>
+              </a:spcAft>
+            </a:pPr>
+            <a:r>
+              <a:rPr sz="2400" b="1" i="0">
                 <a:solidFill>
                   <a:srgbClr val="22252B"/>
                 </a:solidFill>
@@ -11317,8 +10225,8 @@
         </p:nvSpPr>
         <p:spPr>
           <a:xfrm>
-            <a:off x="502920" y="932688"/>
-            <a:ext cx="5486400" cy="274320"/>
+            <a:off x="502920" y="1078992"/>
+            <a:ext cx="11155680" cy="310896"/>
           </a:xfrm>
           <a:prstGeom prst="rect">
             <a:avLst/>
@@ -11326,14 +10234,24 @@
           <a:noFill/>
         </p:spPr>
         <p:txBody>
-          <a:bodyPr wrap="square" anchor="t" lIns="25400" rIns="25400" tIns="12700" bIns="12700">
+          <a:bodyPr wrap="square" anchor="t" lIns="38100" rIns="38100" tIns="25400" bIns="25400">
             <a:spAutoFit/>
           </a:bodyPr>
           <a:lstStyle/>
           <a:p>
-            <a:pPr algn="l"/>
-            <a:r>
-              <a:rPr sz="1100" b="1" i="0">
+            <a:pPr algn="l">
+              <a:lnSpc>
+                <a:spcPct val="120000"/>
+              </a:lnSpc>
+              <a:spcBef>
+                <a:spcPts val="0"/>
+              </a:spcBef>
+              <a:spcAft>
+                <a:spcPts val="0"/>
+              </a:spcAft>
+            </a:pPr>
+            <a:r>
+              <a:rPr sz="1350" b="1" i="0">
                 <a:solidFill>
                   <a:srgbClr val="2A6F97"/>
                 </a:solidFill>
@@ -11352,8 +10270,8 @@
         </p:nvSpPr>
         <p:spPr>
           <a:xfrm>
-            <a:off x="502920" y="1298448"/>
-            <a:ext cx="11155680" cy="896112"/>
+            <a:off x="502920" y="1463040"/>
+            <a:ext cx="11183112" cy="1024128"/>
           </a:xfrm>
           <a:prstGeom prst="roundRect">
             <a:avLst/>
@@ -11383,12 +10301,22 @@
           </a:fontRef>
         </p:style>
         <p:txBody>
-          <a:bodyPr rtlCol="0" anchor="ctr" wrap="square" lIns="38100" rIns="38100" tIns="25400" bIns="25400"/>
-          <a:lstStyle/>
-          <a:p>
-            <a:pPr algn="l"/>
-            <a:r>
-              <a:rPr sz="1150" b="1" i="0">
+          <a:bodyPr rtlCol="0" anchor="ctr" wrap="square" lIns="76200" rIns="76200" tIns="38100" bIns="38100"/>
+          <a:lstStyle/>
+          <a:p>
+            <a:pPr algn="l">
+              <a:lnSpc>
+                <a:spcPct val="118000"/>
+              </a:lnSpc>
+              <a:spcBef>
+                <a:spcPts val="0"/>
+              </a:spcBef>
+              <a:spcAft>
+                <a:spcPts val="400"/>
+              </a:spcAft>
+            </a:pPr>
+            <a:r>
+              <a:rPr sz="1400" b="1" i="0">
                 <a:solidFill>
                   <a:srgbClr val="2A6F97"/>
                 </a:solidFill>
@@ -11398,9 +10326,19 @@
             </a:r>
           </a:p>
           <a:p>
-            <a:pPr algn="l"/>
-            <a:r>
-              <a:rPr sz="1250" b="0" i="0">
+            <a:pPr algn="l">
+              <a:lnSpc>
+                <a:spcPct val="118000"/>
+              </a:lnSpc>
+              <a:spcBef>
+                <a:spcPts val="0"/>
+              </a:spcBef>
+              <a:spcAft>
+                <a:spcPts val="300"/>
+              </a:spcAft>
+            </a:pPr>
+            <a:r>
+              <a:rPr sz="1650" b="0" i="0">
                 <a:solidFill>
                   <a:srgbClr val="22252B"/>
                 </a:solidFill>
@@ -11419,8 +10357,8 @@
         </p:nvSpPr>
         <p:spPr>
           <a:xfrm>
-            <a:off x="502920" y="2377440"/>
-            <a:ext cx="11155680" cy="2148840"/>
+            <a:off x="502920" y="2615184"/>
+            <a:ext cx="11183112" cy="1938528"/>
           </a:xfrm>
           <a:prstGeom prst="roundRect">
             <a:avLst/>
@@ -11450,12 +10388,22 @@
           </a:fontRef>
         </p:style>
         <p:txBody>
-          <a:bodyPr rtlCol="0" anchor="ctr" wrap="square" lIns="38100" rIns="38100" tIns="25400" bIns="25400"/>
-          <a:lstStyle/>
-          <a:p>
-            <a:pPr algn="l"/>
-            <a:r>
-              <a:rPr sz="1150" b="1" i="0">
+          <a:bodyPr rtlCol="0" anchor="ctr" wrap="square" lIns="76200" rIns="76200" tIns="38100" bIns="38100"/>
+          <a:lstStyle/>
+          <a:p>
+            <a:pPr algn="l">
+              <a:lnSpc>
+                <a:spcPct val="118000"/>
+              </a:lnSpc>
+              <a:spcBef>
+                <a:spcPts val="0"/>
+              </a:spcBef>
+              <a:spcAft>
+                <a:spcPts val="600"/>
+              </a:spcAft>
+            </a:pPr>
+            <a:r>
+              <a:rPr sz="1400" b="1" i="0">
                 <a:solidFill>
                   <a:srgbClr val="22252B"/>
                 </a:solidFill>
@@ -11465,9 +10413,19 @@
             </a:r>
           </a:p>
           <a:p>
-            <a:pPr algn="l"/>
-            <a:r>
-              <a:rPr sz="1250" b="0" i="0">
+            <a:pPr algn="l">
+              <a:lnSpc>
+                <a:spcPct val="118000"/>
+              </a:lnSpc>
+              <a:spcBef>
+                <a:spcPts val="0"/>
+              </a:spcBef>
+              <a:spcAft>
+                <a:spcPts val="700"/>
+              </a:spcAft>
+            </a:pPr>
+            <a:r>
+              <a:rPr sz="1550" b="0" i="0">
                 <a:solidFill>
                   <a:srgbClr val="22252B"/>
                 </a:solidFill>
@@ -11477,9 +10435,19 @@
             </a:r>
           </a:p>
           <a:p>
-            <a:pPr algn="l"/>
-            <a:r>
-              <a:rPr sz="1250" b="0" i="0">
+            <a:pPr algn="l">
+              <a:lnSpc>
+                <a:spcPct val="118000"/>
+              </a:lnSpc>
+              <a:spcBef>
+                <a:spcPts val="0"/>
+              </a:spcBef>
+              <a:spcAft>
+                <a:spcPts val="700"/>
+              </a:spcAft>
+            </a:pPr>
+            <a:r>
+              <a:rPr sz="1550" b="0" i="0">
                 <a:solidFill>
                   <a:srgbClr val="22252B"/>
                 </a:solidFill>
@@ -11498,8 +10466,8 @@
         </p:nvSpPr>
         <p:spPr>
           <a:xfrm>
-            <a:off x="502920" y="4709160"/>
-            <a:ext cx="5486400" cy="1737360"/>
+            <a:off x="502920" y="4700016"/>
+            <a:ext cx="5486400" cy="1792224"/>
           </a:xfrm>
           <a:prstGeom prst="roundRect">
             <a:avLst/>
@@ -11529,12 +10497,22 @@
           </a:fontRef>
         </p:style>
         <p:txBody>
-          <a:bodyPr rtlCol="0" anchor="ctr" wrap="square" lIns="38100" rIns="38100" tIns="25400" bIns="25400"/>
-          <a:lstStyle/>
-          <a:p>
-            <a:pPr algn="l"/>
-            <a:r>
-              <a:rPr sz="1150" b="1" i="0">
+          <a:bodyPr rtlCol="0" anchor="ctr" wrap="square" lIns="76200" rIns="76200" tIns="38100" bIns="38100"/>
+          <a:lstStyle/>
+          <a:p>
+            <a:pPr algn="l">
+              <a:lnSpc>
+                <a:spcPct val="118000"/>
+              </a:lnSpc>
+              <a:spcBef>
+                <a:spcPts val="0"/>
+              </a:spcBef>
+              <a:spcAft>
+                <a:spcPts val="500"/>
+              </a:spcAft>
+            </a:pPr>
+            <a:r>
+              <a:rPr sz="1400" b="1" i="0">
                 <a:solidFill>
                   <a:srgbClr val="2A9D8F"/>
                 </a:solidFill>
@@ -11544,9 +10522,19 @@
             </a:r>
           </a:p>
           <a:p>
-            <a:pPr algn="l"/>
-            <a:r>
-              <a:rPr sz="1150" b="0" i="0">
+            <a:pPr algn="l">
+              <a:lnSpc>
+                <a:spcPct val="118000"/>
+              </a:lnSpc>
+              <a:spcBef>
+                <a:spcPts val="0"/>
+              </a:spcBef>
+              <a:spcAft>
+                <a:spcPts val="300"/>
+              </a:spcAft>
+            </a:pPr>
+            <a:r>
+              <a:rPr sz="1450" b="0" i="0">
                 <a:solidFill>
                   <a:srgbClr val="22252B"/>
                 </a:solidFill>
@@ -11565,8 +10553,8 @@
         </p:nvSpPr>
         <p:spPr>
           <a:xfrm>
-            <a:off x="6172200" y="4709160"/>
-            <a:ext cx="5486400" cy="1737360"/>
+            <a:off x="6199632" y="4700016"/>
+            <a:ext cx="5486400" cy="1792224"/>
           </a:xfrm>
           <a:prstGeom prst="roundRect">
             <a:avLst/>
@@ -11596,12 +10584,22 @@
           </a:fontRef>
         </p:style>
         <p:txBody>
-          <a:bodyPr rtlCol="0" anchor="ctr" wrap="square" lIns="38100" rIns="38100" tIns="25400" bIns="25400"/>
-          <a:lstStyle/>
-          <a:p>
-            <a:pPr algn="l"/>
-            <a:r>
-              <a:rPr sz="1150" b="1" i="0">
+          <a:bodyPr rtlCol="0" anchor="ctr" wrap="square" lIns="76200" rIns="76200" tIns="38100" bIns="38100"/>
+          <a:lstStyle/>
+          <a:p>
+            <a:pPr algn="l">
+              <a:lnSpc>
+                <a:spcPct val="118000"/>
+              </a:lnSpc>
+              <a:spcBef>
+                <a:spcPts val="0"/>
+              </a:spcBef>
+              <a:spcAft>
+                <a:spcPts val="500"/>
+              </a:spcAft>
+            </a:pPr>
+            <a:r>
+              <a:rPr sz="1400" b="1" i="0">
                 <a:solidFill>
                   <a:srgbClr val="C1121F"/>
                 </a:solidFill>
@@ -11611,9 +10609,19 @@
             </a:r>
           </a:p>
           <a:p>
-            <a:pPr algn="l"/>
-            <a:r>
-              <a:rPr sz="1150" b="0" i="0">
+            <a:pPr algn="l">
+              <a:lnSpc>
+                <a:spcPct val="118000"/>
+              </a:lnSpc>
+              <a:spcBef>
+                <a:spcPts val="0"/>
+              </a:spcBef>
+              <a:spcAft>
+                <a:spcPts val="300"/>
+              </a:spcAft>
+            </a:pPr>
+            <a:r>
+              <a:rPr sz="1450" b="0" i="0">
                 <a:solidFill>
                   <a:srgbClr val="22252B"/>
                 </a:solidFill>
@@ -11681,10 +10689,20 @@
           </a:fontRef>
         </p:style>
         <p:txBody>
-          <a:bodyPr rtlCol="0" anchor="ctr" wrap="square" lIns="38100" rIns="38100" tIns="25400" bIns="25400"/>
-          <a:lstStyle/>
-          <a:p>
-            <a:pPr algn="ctr"/>
+          <a:bodyPr rtlCol="0" anchor="ctr" wrap="square" lIns="76200" rIns="76200" tIns="38100" bIns="38100"/>
+          <a:lstStyle/>
+          <a:p>
+            <a:pPr algn="ctr">
+              <a:lnSpc>
+                <a:spcPct val="118000"/>
+              </a:lnSpc>
+              <a:spcBef>
+                <a:spcPts val="0"/>
+              </a:spcBef>
+              <a:spcAft>
+                <a:spcPts val="300"/>
+              </a:spcAft>
+            </a:pPr>
             <a:r>
               <a:rPr sz="1100" b="0" i="0">
                 <a:solidFill>
@@ -11705,7 +10723,7 @@
         </p:nvSpPr>
         <p:spPr>
           <a:xfrm>
-            <a:off x="502920" y="164592"/>
+            <a:off x="502920" y="146304"/>
             <a:ext cx="11185855" cy="320040"/>
           </a:xfrm>
           <a:prstGeom prst="rect">
@@ -11714,14 +10732,24 @@
           <a:noFill/>
         </p:spPr>
         <p:txBody>
-          <a:bodyPr wrap="square" anchor="t" lIns="25400" rIns="25400" tIns="12700" bIns="12700">
+          <a:bodyPr wrap="square" anchor="t" lIns="38100" rIns="38100" tIns="25400" bIns="25400">
             <a:spAutoFit/>
           </a:bodyPr>
           <a:lstStyle/>
           <a:p>
-            <a:pPr algn="l"/>
-            <a:r>
-              <a:rPr sz="1200" b="1" i="0">
+            <a:pPr algn="l">
+              <a:lnSpc>
+                <a:spcPct val="120000"/>
+              </a:lnSpc>
+              <a:spcBef>
+                <a:spcPts val="0"/>
+              </a:spcBef>
+              <a:spcAft>
+                <a:spcPts val="0"/>
+              </a:spcAft>
+            </a:pPr>
+            <a:r>
+              <a:rPr sz="1350" b="1" i="0">
                 <a:solidFill>
                   <a:srgbClr val="2A6F97"/>
                 </a:solidFill>
@@ -11741,7 +10769,7 @@
         <p:spPr>
           <a:xfrm>
             <a:off x="502920" y="457200"/>
-            <a:ext cx="11185855" cy="548640"/>
+            <a:ext cx="11185855" cy="566928"/>
           </a:xfrm>
           <a:prstGeom prst="rect">
             <a:avLst/>
@@ -11749,14 +10777,24 @@
           <a:noFill/>
         </p:spPr>
         <p:txBody>
-          <a:bodyPr wrap="square" anchor="t" lIns="25400" rIns="25400" tIns="12700" bIns="12700">
+          <a:bodyPr wrap="square" anchor="t" lIns="38100" rIns="38100" tIns="25400" bIns="25400">
             <a:spAutoFit/>
           </a:bodyPr>
           <a:lstStyle/>
           <a:p>
-            <a:pPr algn="l"/>
-            <a:r>
-              <a:rPr sz="2200" b="1" i="0">
+            <a:pPr algn="l">
+              <a:lnSpc>
+                <a:spcPct val="120000"/>
+              </a:lnSpc>
+              <a:spcBef>
+                <a:spcPts val="0"/>
+              </a:spcBef>
+              <a:spcAft>
+                <a:spcPts val="0"/>
+              </a:spcAft>
+            </a:pPr>
+            <a:r>
+              <a:rPr sz="2400" b="1" i="0">
                 <a:solidFill>
                   <a:srgbClr val="22252B"/>
                 </a:solidFill>
@@ -11775,8 +10813,8 @@
         </p:nvSpPr>
         <p:spPr>
           <a:xfrm>
-            <a:off x="502920" y="932688"/>
-            <a:ext cx="5486400" cy="274320"/>
+            <a:off x="502920" y="1078992"/>
+            <a:ext cx="11155680" cy="310896"/>
           </a:xfrm>
           <a:prstGeom prst="rect">
             <a:avLst/>
@@ -11784,14 +10822,24 @@
           <a:noFill/>
         </p:spPr>
         <p:txBody>
-          <a:bodyPr wrap="square" anchor="t" lIns="25400" rIns="25400" tIns="12700" bIns="12700">
+          <a:bodyPr wrap="square" anchor="t" lIns="38100" rIns="38100" tIns="25400" bIns="25400">
             <a:spAutoFit/>
           </a:bodyPr>
           <a:lstStyle/>
           <a:p>
-            <a:pPr algn="l"/>
-            <a:r>
-              <a:rPr sz="1100" b="1" i="0">
+            <a:pPr algn="l">
+              <a:lnSpc>
+                <a:spcPct val="120000"/>
+              </a:lnSpc>
+              <a:spcBef>
+                <a:spcPts val="0"/>
+              </a:spcBef>
+              <a:spcAft>
+                <a:spcPts val="0"/>
+              </a:spcAft>
+            </a:pPr>
+            <a:r>
+              <a:rPr sz="1350" b="1" i="0">
                 <a:solidFill>
                   <a:srgbClr val="2A6F97"/>
                 </a:solidFill>
@@ -11810,8 +10858,8 @@
         </p:nvSpPr>
         <p:spPr>
           <a:xfrm>
-            <a:off x="502920" y="1298448"/>
-            <a:ext cx="11155680" cy="896112"/>
+            <a:off x="502920" y="1463040"/>
+            <a:ext cx="11183112" cy="1024128"/>
           </a:xfrm>
           <a:prstGeom prst="roundRect">
             <a:avLst/>
@@ -11841,12 +10889,22 @@
           </a:fontRef>
         </p:style>
         <p:txBody>
-          <a:bodyPr rtlCol="0" anchor="ctr" wrap="square" lIns="38100" rIns="38100" tIns="25400" bIns="25400"/>
-          <a:lstStyle/>
-          <a:p>
-            <a:pPr algn="l"/>
-            <a:r>
-              <a:rPr sz="1150" b="1" i="0">
+          <a:bodyPr rtlCol="0" anchor="ctr" wrap="square" lIns="76200" rIns="76200" tIns="38100" bIns="38100"/>
+          <a:lstStyle/>
+          <a:p>
+            <a:pPr algn="l">
+              <a:lnSpc>
+                <a:spcPct val="118000"/>
+              </a:lnSpc>
+              <a:spcBef>
+                <a:spcPts val="0"/>
+              </a:spcBef>
+              <a:spcAft>
+                <a:spcPts val="400"/>
+              </a:spcAft>
+            </a:pPr>
+            <a:r>
+              <a:rPr sz="1400" b="1" i="0">
                 <a:solidFill>
                   <a:srgbClr val="2A6F97"/>
                 </a:solidFill>
@@ -11856,9 +10914,19 @@
             </a:r>
           </a:p>
           <a:p>
-            <a:pPr algn="l"/>
-            <a:r>
-              <a:rPr sz="1250" b="0" i="0">
+            <a:pPr algn="l">
+              <a:lnSpc>
+                <a:spcPct val="118000"/>
+              </a:lnSpc>
+              <a:spcBef>
+                <a:spcPts val="0"/>
+              </a:spcBef>
+              <a:spcAft>
+                <a:spcPts val="300"/>
+              </a:spcAft>
+            </a:pPr>
+            <a:r>
+              <a:rPr sz="1650" b="0" i="0">
                 <a:solidFill>
                   <a:srgbClr val="22252B"/>
                 </a:solidFill>
@@ -11877,8 +10945,8 @@
         </p:nvSpPr>
         <p:spPr>
           <a:xfrm>
-            <a:off x="502920" y="2377440"/>
-            <a:ext cx="11155680" cy="2148840"/>
+            <a:off x="502920" y="2615184"/>
+            <a:ext cx="11183112" cy="1938528"/>
           </a:xfrm>
           <a:prstGeom prst="roundRect">
             <a:avLst/>
@@ -11908,12 +10976,22 @@
           </a:fontRef>
         </p:style>
         <p:txBody>
-          <a:bodyPr rtlCol="0" anchor="ctr" wrap="square" lIns="38100" rIns="38100" tIns="25400" bIns="25400"/>
-          <a:lstStyle/>
-          <a:p>
-            <a:pPr algn="l"/>
-            <a:r>
-              <a:rPr sz="1150" b="1" i="0">
+          <a:bodyPr rtlCol="0" anchor="ctr" wrap="square" lIns="76200" rIns="76200" tIns="38100" bIns="38100"/>
+          <a:lstStyle/>
+          <a:p>
+            <a:pPr algn="l">
+              <a:lnSpc>
+                <a:spcPct val="118000"/>
+              </a:lnSpc>
+              <a:spcBef>
+                <a:spcPts val="0"/>
+              </a:spcBef>
+              <a:spcAft>
+                <a:spcPts val="600"/>
+              </a:spcAft>
+            </a:pPr>
+            <a:r>
+              <a:rPr sz="1400" b="1" i="0">
                 <a:solidFill>
                   <a:srgbClr val="22252B"/>
                 </a:solidFill>
@@ -11923,9 +11001,19 @@
             </a:r>
           </a:p>
           <a:p>
-            <a:pPr algn="l"/>
-            <a:r>
-              <a:rPr sz="1250" b="0" i="0">
+            <a:pPr algn="l">
+              <a:lnSpc>
+                <a:spcPct val="118000"/>
+              </a:lnSpc>
+              <a:spcBef>
+                <a:spcPts val="0"/>
+              </a:spcBef>
+              <a:spcAft>
+                <a:spcPts val="700"/>
+              </a:spcAft>
+            </a:pPr>
+            <a:r>
+              <a:rPr sz="1550" b="0" i="0">
                 <a:solidFill>
                   <a:srgbClr val="22252B"/>
                 </a:solidFill>
@@ -11935,9 +11023,19 @@
             </a:r>
           </a:p>
           <a:p>
-            <a:pPr algn="l"/>
-            <a:r>
-              <a:rPr sz="1250" b="0" i="0">
+            <a:pPr algn="l">
+              <a:lnSpc>
+                <a:spcPct val="118000"/>
+              </a:lnSpc>
+              <a:spcBef>
+                <a:spcPts val="0"/>
+              </a:spcBef>
+              <a:spcAft>
+                <a:spcPts val="700"/>
+              </a:spcAft>
+            </a:pPr>
+            <a:r>
+              <a:rPr sz="1550" b="0" i="0">
                 <a:solidFill>
                   <a:srgbClr val="22252B"/>
                 </a:solidFill>
@@ -11956,8 +11054,8 @@
         </p:nvSpPr>
         <p:spPr>
           <a:xfrm>
-            <a:off x="502920" y="4709160"/>
-            <a:ext cx="5486400" cy="1737360"/>
+            <a:off x="502920" y="4700016"/>
+            <a:ext cx="5486400" cy="1792224"/>
           </a:xfrm>
           <a:prstGeom prst="roundRect">
             <a:avLst/>
@@ -11987,12 +11085,22 @@
           </a:fontRef>
         </p:style>
         <p:txBody>
-          <a:bodyPr rtlCol="0" anchor="ctr" wrap="square" lIns="38100" rIns="38100" tIns="25400" bIns="25400"/>
-          <a:lstStyle/>
-          <a:p>
-            <a:pPr algn="l"/>
-            <a:r>
-              <a:rPr sz="1150" b="1" i="0">
+          <a:bodyPr rtlCol="0" anchor="ctr" wrap="square" lIns="76200" rIns="76200" tIns="38100" bIns="38100"/>
+          <a:lstStyle/>
+          <a:p>
+            <a:pPr algn="l">
+              <a:lnSpc>
+                <a:spcPct val="118000"/>
+              </a:lnSpc>
+              <a:spcBef>
+                <a:spcPts val="0"/>
+              </a:spcBef>
+              <a:spcAft>
+                <a:spcPts val="500"/>
+              </a:spcAft>
+            </a:pPr>
+            <a:r>
+              <a:rPr sz="1400" b="1" i="0">
                 <a:solidFill>
                   <a:srgbClr val="2A9D8F"/>
                 </a:solidFill>
@@ -12002,9 +11110,19 @@
             </a:r>
           </a:p>
           <a:p>
-            <a:pPr algn="l"/>
-            <a:r>
-              <a:rPr sz="1150" b="0" i="0">
+            <a:pPr algn="l">
+              <a:lnSpc>
+                <a:spcPct val="118000"/>
+              </a:lnSpc>
+              <a:spcBef>
+                <a:spcPts val="0"/>
+              </a:spcBef>
+              <a:spcAft>
+                <a:spcPts val="300"/>
+              </a:spcAft>
+            </a:pPr>
+            <a:r>
+              <a:rPr sz="1450" b="0" i="0">
                 <a:solidFill>
                   <a:srgbClr val="22252B"/>
                 </a:solidFill>
@@ -12023,8 +11141,8 @@
         </p:nvSpPr>
         <p:spPr>
           <a:xfrm>
-            <a:off x="6172200" y="4709160"/>
-            <a:ext cx="5486400" cy="1737360"/>
+            <a:off x="6199632" y="4700016"/>
+            <a:ext cx="5486400" cy="1792224"/>
           </a:xfrm>
           <a:prstGeom prst="roundRect">
             <a:avLst/>
@@ -12054,12 +11172,22 @@
           </a:fontRef>
         </p:style>
         <p:txBody>
-          <a:bodyPr rtlCol="0" anchor="ctr" wrap="square" lIns="38100" rIns="38100" tIns="25400" bIns="25400"/>
-          <a:lstStyle/>
-          <a:p>
-            <a:pPr algn="l"/>
-            <a:r>
-              <a:rPr sz="1150" b="1" i="0">
+          <a:bodyPr rtlCol="0" anchor="ctr" wrap="square" lIns="76200" rIns="76200" tIns="38100" bIns="38100"/>
+          <a:lstStyle/>
+          <a:p>
+            <a:pPr algn="l">
+              <a:lnSpc>
+                <a:spcPct val="118000"/>
+              </a:lnSpc>
+              <a:spcBef>
+                <a:spcPts val="0"/>
+              </a:spcBef>
+              <a:spcAft>
+                <a:spcPts val="500"/>
+              </a:spcAft>
+            </a:pPr>
+            <a:r>
+              <a:rPr sz="1400" b="1" i="0">
                 <a:solidFill>
                   <a:srgbClr val="C1121F"/>
                 </a:solidFill>
@@ -12069,15 +11197,25 @@
             </a:r>
           </a:p>
           <a:p>
-            <a:pPr algn="l"/>
-            <a:r>
-              <a:rPr sz="1150" b="0" i="0">
+            <a:pPr algn="l">
+              <a:lnSpc>
+                <a:spcPct val="118000"/>
+              </a:lnSpc>
+              <a:spcBef>
+                <a:spcPts val="0"/>
+              </a:spcBef>
+              <a:spcAft>
+                <a:spcPts val="300"/>
+              </a:spcAft>
+            </a:pPr>
+            <a:r>
+              <a:rPr sz="1450" b="0" i="0">
                 <a:solidFill>
                   <a:srgbClr val="22252B"/>
                 </a:solidFill>
                 <a:latin typeface="Noto Sans CJK KR"/>
               </a:rPr>
-              <a:t>보폭(스케일)은 아직 모든 좌표가 동일. 관성이 과하면 최소점을 지나칠 수 있다.  → NAG</a:t>
+              <a:t>보폭(스케일)은 아직 모든 좌표가 동일. '좌표별 보폭'은 아래 초록 줄기(Adagrad→RMSProp)가 맡고, 뒤에서 Adam이 방향과 합친다.</a:t>
             </a:r>
           </a:p>
         </p:txBody>

--- a/seminar/TTT-seminar.pptx
+++ b/seminar/TTT-seminar.pptx
@@ -3678,8 +3678,8 @@
         </p:nvSpPr>
         <p:spPr>
           <a:xfrm>
-            <a:off x="502920" y="2615184"/>
-            <a:ext cx="11183112" cy="1938528"/>
+            <a:off x="502920" y="2596896"/>
+            <a:ext cx="11183112" cy="2212848"/>
           </a:xfrm>
           <a:prstGeom prst="roundRect">
             <a:avLst/>
@@ -3712,7 +3712,7 @@
           <a:bodyPr rtlCol="0" anchor="ctr" wrap="square" lIns="76200" rIns="76200" tIns="38100" bIns="38100"/>
           <a:lstStyle/>
           <a:p>
-            <a:pPr algn="l">
+            <a:pPr algn="ctr">
               <a:lnSpc>
                 <a:spcPct val="118000"/>
               </a:lnSpc>
@@ -3720,75 +3720,214 @@
                 <a:spcPts val="0"/>
               </a:spcBef>
               <a:spcAft>
-                <a:spcPts val="600"/>
-              </a:spcAft>
-            </a:pPr>
-            <a:r>
-              <a:rPr sz="1400" b="1" i="0">
+                <a:spcPts val="300"/>
+              </a:spcAft>
+            </a:pPr>
+            <a:r>
+              <a:rPr sz="1100" b="0" i="0">
                 <a:solidFill>
                   <a:srgbClr val="22252B"/>
                 </a:solidFill>
                 <a:latin typeface="Noto Sans CJK KR"/>
               </a:rPr>
+              <a:t/>
+            </a:r>
+          </a:p>
+        </p:txBody>
+      </p:sp>
+      <p:sp>
+        <p:nvSpPr>
+          <p:cNvPr id="8" name="TextBox 7"/>
+          <p:cNvSpPr txBox="1"/>
+          <p:nvPr/>
+        </p:nvSpPr>
+        <p:spPr>
+          <a:xfrm>
+            <a:off x="704088" y="2679191"/>
+            <a:ext cx="3657600" cy="274320"/>
+          </a:xfrm>
+          <a:prstGeom prst="rect">
+            <a:avLst/>
+          </a:prstGeom>
+          <a:noFill/>
+        </p:spPr>
+        <p:txBody>
+          <a:bodyPr wrap="square" anchor="t" lIns="38100" rIns="38100" tIns="25400" bIns="25400">
+            <a:spAutoFit/>
+          </a:bodyPr>
+          <a:lstStyle/>
+          <a:p>
+            <a:pPr algn="l">
+              <a:lnSpc>
+                <a:spcPct val="120000"/>
+              </a:lnSpc>
+              <a:spcBef>
+                <a:spcPts val="0"/>
+              </a:spcBef>
+              <a:spcAft>
+                <a:spcPts val="0"/>
+              </a:spcAft>
+            </a:pPr>
+            <a:r>
+              <a:rPr sz="1350" b="1" i="0">
+                <a:solidFill>
+                  <a:srgbClr val="22252B"/>
+                </a:solidFill>
+                <a:latin typeface="Noto Sans CJK KR"/>
+              </a:rPr>
               <a:t>갱신 규칙 (수식)</a:t>
             </a:r>
           </a:p>
-          <a:p>
-            <a:pPr algn="l">
-              <a:lnSpc>
-                <a:spcPct val="118000"/>
-              </a:lnSpc>
-              <a:spcBef>
-                <a:spcPts val="0"/>
-              </a:spcBef>
-              <a:spcAft>
-                <a:spcPts val="700"/>
-              </a:spcAft>
-            </a:pPr>
-            <a:r>
-              <a:rPr sz="1550" b="0" i="0">
-                <a:solidFill>
-                  <a:srgbClr val="22252B"/>
-                </a:solidFill>
-                <a:latin typeface="Noto Sans Mono CJK KR"/>
-              </a:rPr>
-              <a:t>G_t = G_{t-1} + g_t²                  # 좌표별 gradient² 누적</a:t>
-            </a:r>
-          </a:p>
-          <a:p>
-            <a:pPr algn="l">
-              <a:lnSpc>
-                <a:spcPct val="118000"/>
-              </a:lnSpc>
-              <a:spcBef>
-                <a:spcPts val="0"/>
-              </a:spcBef>
-              <a:spcAft>
-                <a:spcPts val="700"/>
-              </a:spcAft>
-            </a:pPr>
-            <a:r>
-              <a:rPr sz="1550" b="0" i="0">
-                <a:solidFill>
-                  <a:srgbClr val="22252B"/>
-                </a:solidFill>
-                <a:latin typeface="Noto Sans Mono CJK KR"/>
-              </a:rPr>
-              <a:t>θ_{t+1} = θ_t − η · g_t / (√G_t + ε)   # 좌표마다 다른 보폭</a:t>
-            </a:r>
-          </a:p>
-        </p:txBody>
-      </p:sp>
-      <p:sp>
-        <p:nvSpPr>
-          <p:cNvPr id="8" name="Rounded Rectangle 7"/>
+        </p:txBody>
+      </p:sp>
+      <p:pic>
+        <p:nvPicPr>
+          <p:cNvPr id="9" name="Picture 8" descr="f63d51081b10affb.png"/>
+          <p:cNvPicPr>
+            <a:picLocks noChangeAspect="1"/>
+          </p:cNvPicPr>
+          <p:nvPr/>
+        </p:nvPicPr>
+        <p:blipFill>
+          <a:blip r:embed="rId2"/>
+          <a:stretch>
+            <a:fillRect/>
+          </a:stretch>
+        </p:blipFill>
+        <p:spPr>
+          <a:xfrm>
+            <a:off x="914400" y="3509771"/>
+            <a:ext cx="1353312" cy="246888"/>
+          </a:xfrm>
+          <a:prstGeom prst="rect">
+            <a:avLst/>
+          </a:prstGeom>
+        </p:spPr>
+      </p:pic>
+      <p:sp>
+        <p:nvSpPr>
+          <p:cNvPr id="10" name="TextBox 9"/>
+          <p:cNvSpPr txBox="1"/>
+          <p:nvPr/>
+        </p:nvSpPr>
+        <p:spPr>
+          <a:xfrm>
+            <a:off x="2651760" y="3482340"/>
+            <a:ext cx="8503920" cy="301752"/>
+          </a:xfrm>
+          <a:prstGeom prst="rect">
+            <a:avLst/>
+          </a:prstGeom>
+          <a:noFill/>
+        </p:spPr>
+        <p:txBody>
+          <a:bodyPr wrap="square" anchor="ctr" lIns="38100" rIns="38100" tIns="25400" bIns="25400">
+            <a:spAutoFit/>
+          </a:bodyPr>
+          <a:lstStyle/>
+          <a:p>
+            <a:pPr algn="l">
+              <a:lnSpc>
+                <a:spcPct val="120000"/>
+              </a:lnSpc>
+              <a:spcBef>
+                <a:spcPts val="0"/>
+              </a:spcBef>
+              <a:spcAft>
+                <a:spcPts val="0"/>
+              </a:spcAft>
+            </a:pPr>
+            <a:r>
+              <a:rPr sz="1300" b="0" i="0">
+                <a:solidFill>
+                  <a:srgbClr val="5A5F68"/>
+                </a:solidFill>
+                <a:latin typeface="Noto Sans CJK KR"/>
+              </a:rPr>
+              <a:t>좌표별 gradient² 누적</a:t>
+            </a:r>
+          </a:p>
+        </p:txBody>
+      </p:sp>
+      <p:pic>
+        <p:nvPicPr>
+          <p:cNvPr id="11" name="Picture 10" descr="4a2f662dc5183da7.png"/>
+          <p:cNvPicPr>
+            <a:picLocks noChangeAspect="1"/>
+          </p:cNvPicPr>
+          <p:nvPr/>
+        </p:nvPicPr>
+        <p:blipFill>
+          <a:blip r:embed="rId3"/>
+          <a:stretch>
+            <a:fillRect/>
+          </a:stretch>
+        </p:blipFill>
+        <p:spPr>
+          <a:xfrm>
+            <a:off x="914400" y="3902963"/>
+            <a:ext cx="1965960" cy="451104"/>
+          </a:xfrm>
+          <a:prstGeom prst="rect">
+            <a:avLst/>
+          </a:prstGeom>
+        </p:spPr>
+      </p:pic>
+      <p:sp>
+        <p:nvSpPr>
+          <p:cNvPr id="12" name="TextBox 11"/>
+          <p:cNvSpPr txBox="1"/>
+          <p:nvPr/>
+        </p:nvSpPr>
+        <p:spPr>
+          <a:xfrm>
+            <a:off x="3264408" y="3875531"/>
+            <a:ext cx="7891272" cy="505968"/>
+          </a:xfrm>
+          <a:prstGeom prst="rect">
+            <a:avLst/>
+          </a:prstGeom>
+          <a:noFill/>
+        </p:spPr>
+        <p:txBody>
+          <a:bodyPr wrap="square" anchor="ctr" lIns="38100" rIns="38100" tIns="25400" bIns="25400">
+            <a:spAutoFit/>
+          </a:bodyPr>
+          <a:lstStyle/>
+          <a:p>
+            <a:pPr algn="l">
+              <a:lnSpc>
+                <a:spcPct val="120000"/>
+              </a:lnSpc>
+              <a:spcBef>
+                <a:spcPts val="0"/>
+              </a:spcBef>
+              <a:spcAft>
+                <a:spcPts val="0"/>
+              </a:spcAft>
+            </a:pPr>
+            <a:r>
+              <a:rPr sz="1300" b="0" i="0">
+                <a:solidFill>
+                  <a:srgbClr val="5A5F68"/>
+                </a:solidFill>
+                <a:latin typeface="Noto Sans CJK KR"/>
+              </a:rPr>
+              <a:t>좌표마다 다른 보폭</a:t>
+            </a:r>
+          </a:p>
+        </p:txBody>
+      </p:sp>
+      <p:sp>
+        <p:nvSpPr>
+          <p:cNvPr id="13" name="Rounded Rectangle 12"/>
           <p:cNvSpPr/>
           <p:nvPr/>
         </p:nvSpPr>
         <p:spPr>
           <a:xfrm>
-            <a:off x="502920" y="4700016"/>
-            <a:ext cx="5486400" cy="1792224"/>
+            <a:off x="502920" y="4937760"/>
+            <a:ext cx="5486400" cy="1673352"/>
           </a:xfrm>
           <a:prstGeom prst="roundRect">
             <a:avLst/>
@@ -3855,7 +3994,7 @@
               </a:spcAft>
             </a:pPr>
             <a:r>
-              <a:rPr sz="1450" b="0" i="0">
+              <a:rPr sz="1400" b="0" i="0">
                 <a:solidFill>
                   <a:srgbClr val="22252B"/>
                 </a:solidFill>
@@ -3868,14 +4007,14 @@
       </p:sp>
       <p:sp>
         <p:nvSpPr>
-          <p:cNvPr id="9" name="Rounded Rectangle 8"/>
+          <p:cNvPr id="14" name="Rounded Rectangle 13"/>
           <p:cNvSpPr/>
           <p:nvPr/>
         </p:nvSpPr>
         <p:spPr>
           <a:xfrm>
-            <a:off x="6199632" y="4700016"/>
-            <a:ext cx="5486400" cy="1792224"/>
+            <a:off x="6199632" y="4937760"/>
+            <a:ext cx="5486400" cy="1673352"/>
           </a:xfrm>
           <a:prstGeom prst="roundRect">
             <a:avLst/>
@@ -3942,7 +4081,7 @@
               </a:spcAft>
             </a:pPr>
             <a:r>
-              <a:rPr sz="1450" b="0" i="0">
+              <a:rPr sz="1400" b="0" i="0">
                 <a:solidFill>
                   <a:srgbClr val="22252B"/>
                 </a:solidFill>
@@ -4266,8 +4405,8 @@
         </p:nvSpPr>
         <p:spPr>
           <a:xfrm>
-            <a:off x="502920" y="2615184"/>
-            <a:ext cx="11183112" cy="1938528"/>
+            <a:off x="502920" y="2596896"/>
+            <a:ext cx="11183112" cy="2212848"/>
           </a:xfrm>
           <a:prstGeom prst="roundRect">
             <a:avLst/>
@@ -4300,7 +4439,7 @@
           <a:bodyPr rtlCol="0" anchor="ctr" wrap="square" lIns="76200" rIns="76200" tIns="38100" bIns="38100"/>
           <a:lstStyle/>
           <a:p>
-            <a:pPr algn="l">
+            <a:pPr algn="ctr">
               <a:lnSpc>
                 <a:spcPct val="118000"/>
               </a:lnSpc>
@@ -4308,75 +4447,214 @@
                 <a:spcPts val="0"/>
               </a:spcBef>
               <a:spcAft>
-                <a:spcPts val="600"/>
-              </a:spcAft>
-            </a:pPr>
-            <a:r>
-              <a:rPr sz="1400" b="1" i="0">
+                <a:spcPts val="300"/>
+              </a:spcAft>
+            </a:pPr>
+            <a:r>
+              <a:rPr sz="1100" b="0" i="0">
                 <a:solidFill>
                   <a:srgbClr val="22252B"/>
                 </a:solidFill>
                 <a:latin typeface="Noto Sans CJK KR"/>
               </a:rPr>
+              <a:t/>
+            </a:r>
+          </a:p>
+        </p:txBody>
+      </p:sp>
+      <p:sp>
+        <p:nvSpPr>
+          <p:cNvPr id="8" name="TextBox 7"/>
+          <p:cNvSpPr txBox="1"/>
+          <p:nvPr/>
+        </p:nvSpPr>
+        <p:spPr>
+          <a:xfrm>
+            <a:off x="704088" y="2679191"/>
+            <a:ext cx="3657600" cy="274320"/>
+          </a:xfrm>
+          <a:prstGeom prst="rect">
+            <a:avLst/>
+          </a:prstGeom>
+          <a:noFill/>
+        </p:spPr>
+        <p:txBody>
+          <a:bodyPr wrap="square" anchor="t" lIns="38100" rIns="38100" tIns="25400" bIns="25400">
+            <a:spAutoFit/>
+          </a:bodyPr>
+          <a:lstStyle/>
+          <a:p>
+            <a:pPr algn="l">
+              <a:lnSpc>
+                <a:spcPct val="120000"/>
+              </a:lnSpc>
+              <a:spcBef>
+                <a:spcPts val="0"/>
+              </a:spcBef>
+              <a:spcAft>
+                <a:spcPts val="0"/>
+              </a:spcAft>
+            </a:pPr>
+            <a:r>
+              <a:rPr sz="1350" b="1" i="0">
+                <a:solidFill>
+                  <a:srgbClr val="22252B"/>
+                </a:solidFill>
+                <a:latin typeface="Noto Sans CJK KR"/>
+              </a:rPr>
               <a:t>갱신 규칙 (수식)</a:t>
             </a:r>
           </a:p>
-          <a:p>
-            <a:pPr algn="l">
-              <a:lnSpc>
-                <a:spcPct val="118000"/>
-              </a:lnSpc>
-              <a:spcBef>
-                <a:spcPts val="0"/>
-              </a:spcBef>
-              <a:spcAft>
-                <a:spcPts val="700"/>
-              </a:spcAft>
-            </a:pPr>
-            <a:r>
-              <a:rPr sz="1550" b="0" i="0">
-                <a:solidFill>
-                  <a:srgbClr val="22252B"/>
-                </a:solidFill>
-                <a:latin typeface="Noto Sans Mono CJK KR"/>
-              </a:rPr>
-              <a:t>E[g²]_t = ρ · E[g²]_{t-1} + (1−ρ) · g_t²   # ρ≈0.9, 최근값 지수이동평균</a:t>
-            </a:r>
-          </a:p>
-          <a:p>
-            <a:pPr algn="l">
-              <a:lnSpc>
-                <a:spcPct val="118000"/>
-              </a:lnSpc>
-              <a:spcBef>
-                <a:spcPts val="0"/>
-              </a:spcBef>
-              <a:spcAft>
-                <a:spcPts val="700"/>
-              </a:spcAft>
-            </a:pPr>
-            <a:r>
-              <a:rPr sz="1550" b="0" i="0">
-                <a:solidFill>
-                  <a:srgbClr val="22252B"/>
-                </a:solidFill>
-                <a:latin typeface="Noto Sans Mono CJK KR"/>
-              </a:rPr>
-              <a:t>θ_{t+1} = θ_t − η · g_t / (√E[g²]_t + ε)</a:t>
-            </a:r>
-          </a:p>
-        </p:txBody>
-      </p:sp>
-      <p:sp>
-        <p:nvSpPr>
-          <p:cNvPr id="8" name="Rounded Rectangle 7"/>
+        </p:txBody>
+      </p:sp>
+      <p:pic>
+        <p:nvPicPr>
+          <p:cNvPr id="9" name="Picture 8" descr="ba22d2d980d3a6b4.png"/>
+          <p:cNvPicPr>
+            <a:picLocks noChangeAspect="1"/>
+          </p:cNvPicPr>
+          <p:nvPr/>
+        </p:nvPicPr>
+        <p:blipFill>
+          <a:blip r:embed="rId2"/>
+          <a:stretch>
+            <a:fillRect/>
+          </a:stretch>
+        </p:blipFill>
+        <p:spPr>
+          <a:xfrm>
+            <a:off x="914400" y="3482340"/>
+            <a:ext cx="2743200" cy="246888"/>
+          </a:xfrm>
+          <a:prstGeom prst="rect">
+            <a:avLst/>
+          </a:prstGeom>
+        </p:spPr>
+      </p:pic>
+      <p:sp>
+        <p:nvSpPr>
+          <p:cNvPr id="10" name="TextBox 9"/>
+          <p:cNvSpPr txBox="1"/>
+          <p:nvPr/>
+        </p:nvSpPr>
+        <p:spPr>
+          <a:xfrm>
+            <a:off x="4041648" y="3454908"/>
+            <a:ext cx="7114032" cy="301752"/>
+          </a:xfrm>
+          <a:prstGeom prst="rect">
+            <a:avLst/>
+          </a:prstGeom>
+          <a:noFill/>
+        </p:spPr>
+        <p:txBody>
+          <a:bodyPr wrap="square" anchor="ctr" lIns="38100" rIns="38100" tIns="25400" bIns="25400">
+            <a:spAutoFit/>
+          </a:bodyPr>
+          <a:lstStyle/>
+          <a:p>
+            <a:pPr algn="l">
+              <a:lnSpc>
+                <a:spcPct val="120000"/>
+              </a:lnSpc>
+              <a:spcBef>
+                <a:spcPts val="0"/>
+              </a:spcBef>
+              <a:spcAft>
+                <a:spcPts val="0"/>
+              </a:spcAft>
+            </a:pPr>
+            <a:r>
+              <a:rPr sz="1300" b="0" i="0">
+                <a:solidFill>
+                  <a:srgbClr val="5A5F68"/>
+                </a:solidFill>
+                <a:latin typeface="Noto Sans CJK KR"/>
+              </a:rPr>
+              <a:t>ρ≈0.9, 최근값 지수이동평균(EMA)</a:t>
+            </a:r>
+          </a:p>
+        </p:txBody>
+      </p:sp>
+      <p:pic>
+        <p:nvPicPr>
+          <p:cNvPr id="11" name="Picture 10" descr="b73f5e009c6b9b33.png"/>
+          <p:cNvPicPr>
+            <a:picLocks noChangeAspect="1"/>
+          </p:cNvPicPr>
+          <p:nvPr/>
+        </p:nvPicPr>
+        <p:blipFill>
+          <a:blip r:embed="rId3"/>
+          <a:stretch>
+            <a:fillRect/>
+          </a:stretch>
+        </p:blipFill>
+        <p:spPr>
+          <a:xfrm>
+            <a:off x="914400" y="3875532"/>
+            <a:ext cx="2295144" cy="505968"/>
+          </a:xfrm>
+          <a:prstGeom prst="rect">
+            <a:avLst/>
+          </a:prstGeom>
+        </p:spPr>
+      </p:pic>
+      <p:sp>
+        <p:nvSpPr>
+          <p:cNvPr id="12" name="TextBox 11"/>
+          <p:cNvSpPr txBox="1"/>
+          <p:nvPr/>
+        </p:nvSpPr>
+        <p:spPr>
+          <a:xfrm>
+            <a:off x="3593591" y="3848099"/>
+            <a:ext cx="7562088" cy="560832"/>
+          </a:xfrm>
+          <a:prstGeom prst="rect">
+            <a:avLst/>
+          </a:prstGeom>
+          <a:noFill/>
+        </p:spPr>
+        <p:txBody>
+          <a:bodyPr wrap="square" anchor="ctr" lIns="38100" rIns="38100" tIns="25400" bIns="25400">
+            <a:spAutoFit/>
+          </a:bodyPr>
+          <a:lstStyle/>
+          <a:p>
+            <a:pPr algn="l">
+              <a:lnSpc>
+                <a:spcPct val="120000"/>
+              </a:lnSpc>
+              <a:spcBef>
+                <a:spcPts val="0"/>
+              </a:spcBef>
+              <a:spcAft>
+                <a:spcPts val="0"/>
+              </a:spcAft>
+            </a:pPr>
+            <a:r>
+              <a:rPr sz="1300" b="0" i="0">
+                <a:solidFill>
+                  <a:srgbClr val="5A5F68"/>
+                </a:solidFill>
+                <a:latin typeface="Noto Sans CJK KR"/>
+              </a:rPr>
+              <a:t>분모가 무한정 커지지 않음</a:t>
+            </a:r>
+          </a:p>
+        </p:txBody>
+      </p:sp>
+      <p:sp>
+        <p:nvSpPr>
+          <p:cNvPr id="13" name="Rounded Rectangle 12"/>
           <p:cNvSpPr/>
           <p:nvPr/>
         </p:nvSpPr>
         <p:spPr>
           <a:xfrm>
-            <a:off x="502920" y="4700016"/>
-            <a:ext cx="5486400" cy="1792224"/>
+            <a:off x="502920" y="4937760"/>
+            <a:ext cx="5486400" cy="1673352"/>
           </a:xfrm>
           <a:prstGeom prst="roundRect">
             <a:avLst/>
@@ -4443,7 +4721,7 @@
               </a:spcAft>
             </a:pPr>
             <a:r>
-              <a:rPr sz="1450" b="0" i="0">
+              <a:rPr sz="1400" b="0" i="0">
                 <a:solidFill>
                   <a:srgbClr val="22252B"/>
                 </a:solidFill>
@@ -4456,14 +4734,14 @@
       </p:sp>
       <p:sp>
         <p:nvSpPr>
-          <p:cNvPr id="9" name="Rounded Rectangle 8"/>
+          <p:cNvPr id="14" name="Rounded Rectangle 13"/>
           <p:cNvSpPr/>
           <p:nvPr/>
         </p:nvSpPr>
         <p:spPr>
           <a:xfrm>
-            <a:off x="6199632" y="4700016"/>
-            <a:ext cx="5486400" cy="1792224"/>
+            <a:off x="6199632" y="4937760"/>
+            <a:ext cx="5486400" cy="1673352"/>
           </a:xfrm>
           <a:prstGeom prst="roundRect">
             <a:avLst/>
@@ -4530,7 +4808,7 @@
               </a:spcAft>
             </a:pPr>
             <a:r>
-              <a:rPr sz="1450" b="0" i="0">
+              <a:rPr sz="1400" b="0" i="0">
                 <a:solidFill>
                   <a:srgbClr val="22252B"/>
                 </a:solidFill>
@@ -4854,8 +5132,8 @@
         </p:nvSpPr>
         <p:spPr>
           <a:xfrm>
-            <a:off x="502920" y="2615184"/>
-            <a:ext cx="11183112" cy="1938528"/>
+            <a:off x="502920" y="2596896"/>
+            <a:ext cx="11183112" cy="2212848"/>
           </a:xfrm>
           <a:prstGeom prst="roundRect">
             <a:avLst/>
@@ -4888,7 +5166,7 @@
           <a:bodyPr rtlCol="0" anchor="ctr" wrap="square" lIns="76200" rIns="76200" tIns="38100" bIns="38100"/>
           <a:lstStyle/>
           <a:p>
-            <a:pPr algn="l">
+            <a:pPr algn="ctr">
               <a:lnSpc>
                 <a:spcPct val="118000"/>
               </a:lnSpc>
@@ -4896,119 +5174,307 @@
                 <a:spcPts val="0"/>
               </a:spcBef>
               <a:spcAft>
-                <a:spcPts val="600"/>
-              </a:spcAft>
-            </a:pPr>
-            <a:r>
-              <a:rPr sz="1400" b="1" i="0">
+                <a:spcPts val="300"/>
+              </a:spcAft>
+            </a:pPr>
+            <a:r>
+              <a:rPr sz="1100" b="0" i="0">
                 <a:solidFill>
                   <a:srgbClr val="22252B"/>
                 </a:solidFill>
                 <a:latin typeface="Noto Sans CJK KR"/>
               </a:rPr>
+              <a:t/>
+            </a:r>
+          </a:p>
+        </p:txBody>
+      </p:sp>
+      <p:sp>
+        <p:nvSpPr>
+          <p:cNvPr id="8" name="TextBox 7"/>
+          <p:cNvSpPr txBox="1"/>
+          <p:nvPr/>
+        </p:nvSpPr>
+        <p:spPr>
+          <a:xfrm>
+            <a:off x="704088" y="2679191"/>
+            <a:ext cx="3657600" cy="274320"/>
+          </a:xfrm>
+          <a:prstGeom prst="rect">
+            <a:avLst/>
+          </a:prstGeom>
+          <a:noFill/>
+        </p:spPr>
+        <p:txBody>
+          <a:bodyPr wrap="square" anchor="t" lIns="38100" rIns="38100" tIns="25400" bIns="25400">
+            <a:spAutoFit/>
+          </a:bodyPr>
+          <a:lstStyle/>
+          <a:p>
+            <a:pPr algn="l">
+              <a:lnSpc>
+                <a:spcPct val="120000"/>
+              </a:lnSpc>
+              <a:spcBef>
+                <a:spcPts val="0"/>
+              </a:spcBef>
+              <a:spcAft>
+                <a:spcPts val="0"/>
+              </a:spcAft>
+            </a:pPr>
+            <a:r>
+              <a:rPr sz="1350" b="1" i="0">
+                <a:solidFill>
+                  <a:srgbClr val="22252B"/>
+                </a:solidFill>
+                <a:latin typeface="Noto Sans CJK KR"/>
+              </a:rPr>
               <a:t>갱신 규칙 (수식)</a:t>
             </a:r>
           </a:p>
-          <a:p>
-            <a:pPr algn="l">
-              <a:lnSpc>
-                <a:spcPct val="118000"/>
-              </a:lnSpc>
-              <a:spcBef>
-                <a:spcPts val="0"/>
-              </a:spcBef>
-              <a:spcAft>
-                <a:spcPts val="700"/>
-              </a:spcAft>
-            </a:pPr>
-            <a:r>
-              <a:rPr sz="1550" b="0" i="0">
-                <a:solidFill>
-                  <a:srgbClr val="22252B"/>
-                </a:solidFill>
-                <a:latin typeface="Noto Sans Mono CJK KR"/>
-              </a:rPr>
-              <a:t>m_t = β₁·m_{t-1} + (1−β₁)·g_t          # 1차 모멘텀: 방향</a:t>
-            </a:r>
-          </a:p>
-          <a:p>
-            <a:pPr algn="l">
-              <a:lnSpc>
-                <a:spcPct val="118000"/>
-              </a:lnSpc>
-              <a:spcBef>
-                <a:spcPts val="0"/>
-              </a:spcBef>
-              <a:spcAft>
-                <a:spcPts val="700"/>
-              </a:spcAft>
-            </a:pPr>
-            <a:r>
-              <a:rPr sz="1550" b="0" i="0">
-                <a:solidFill>
-                  <a:srgbClr val="22252B"/>
-                </a:solidFill>
-                <a:latin typeface="Noto Sans Mono CJK KR"/>
-              </a:rPr>
-              <a:t>v_t = β₂·v_{t-1} + (1−β₂)·g_t²         # 2차 모멘텀: 좌표별 보폭</a:t>
-            </a:r>
-          </a:p>
-          <a:p>
-            <a:pPr algn="l">
-              <a:lnSpc>
-                <a:spcPct val="118000"/>
-              </a:lnSpc>
-              <a:spcBef>
-                <a:spcPts val="0"/>
-              </a:spcBef>
-              <a:spcAft>
-                <a:spcPts val="700"/>
-              </a:spcAft>
-            </a:pPr>
-            <a:r>
-              <a:rPr sz="1550" b="0" i="0">
-                <a:solidFill>
-                  <a:srgbClr val="22252B"/>
-                </a:solidFill>
-                <a:latin typeface="Noto Sans Mono CJK KR"/>
-              </a:rPr>
-              <a:t>m̂ = m_t/(1−β₁^t),  v̂ = v_t/(1−β₂^t)     # 초기 0-편향 보정</a:t>
-            </a:r>
-          </a:p>
-          <a:p>
-            <a:pPr algn="l">
-              <a:lnSpc>
-                <a:spcPct val="118000"/>
-              </a:lnSpc>
-              <a:spcBef>
-                <a:spcPts val="0"/>
-              </a:spcBef>
-              <a:spcAft>
-                <a:spcPts val="700"/>
-              </a:spcAft>
-            </a:pPr>
-            <a:r>
-              <a:rPr sz="1550" b="0" i="0">
-                <a:solidFill>
-                  <a:srgbClr val="22252B"/>
-                </a:solidFill>
-                <a:latin typeface="Noto Sans Mono CJK KR"/>
-              </a:rPr>
-              <a:t>θ_{t+1} = θ_t − η · m̂ / (√v̂ + ε)</a:t>
-            </a:r>
-          </a:p>
-        </p:txBody>
-      </p:sp>
-      <p:sp>
-        <p:nvSpPr>
-          <p:cNvPr id="8" name="Rounded Rectangle 7"/>
+        </p:txBody>
+      </p:sp>
+      <p:pic>
+        <p:nvPicPr>
+          <p:cNvPr id="9" name="Picture 8" descr="e70f05018bd2fff6.png"/>
+          <p:cNvPicPr>
+            <a:picLocks noChangeAspect="1"/>
+          </p:cNvPicPr>
+          <p:nvPr/>
+        </p:nvPicPr>
+        <p:blipFill>
+          <a:blip r:embed="rId2"/>
+          <a:stretch>
+            <a:fillRect/>
+          </a:stretch>
+        </p:blipFill>
+        <p:spPr>
+          <a:xfrm>
+            <a:off x="914400" y="3108960"/>
+            <a:ext cx="2054704" cy="193637"/>
+          </a:xfrm>
+          <a:prstGeom prst="rect">
+            <a:avLst/>
+          </a:prstGeom>
+        </p:spPr>
+      </p:pic>
+      <p:sp>
+        <p:nvSpPr>
+          <p:cNvPr id="10" name="TextBox 9"/>
+          <p:cNvSpPr txBox="1"/>
+          <p:nvPr/>
+        </p:nvSpPr>
+        <p:spPr>
+          <a:xfrm>
+            <a:off x="3353158" y="3081528"/>
+            <a:ext cx="7802521" cy="248501"/>
+          </a:xfrm>
+          <a:prstGeom prst="rect">
+            <a:avLst/>
+          </a:prstGeom>
+          <a:noFill/>
+        </p:spPr>
+        <p:txBody>
+          <a:bodyPr wrap="square" anchor="ctr" lIns="38100" rIns="38100" tIns="25400" bIns="25400">
+            <a:spAutoFit/>
+          </a:bodyPr>
+          <a:lstStyle/>
+          <a:p>
+            <a:pPr algn="l">
+              <a:lnSpc>
+                <a:spcPct val="120000"/>
+              </a:lnSpc>
+              <a:spcBef>
+                <a:spcPts val="0"/>
+              </a:spcBef>
+              <a:spcAft>
+                <a:spcPts val="0"/>
+              </a:spcAft>
+            </a:pPr>
+            <a:r>
+              <a:rPr sz="1300" b="0" i="0">
+                <a:solidFill>
+                  <a:srgbClr val="5A5F68"/>
+                </a:solidFill>
+                <a:latin typeface="Noto Sans CJK KR"/>
+              </a:rPr>
+              <a:t>1차 모멘텀: 방향</a:t>
+            </a:r>
+          </a:p>
+        </p:txBody>
+      </p:sp>
+      <p:pic>
+        <p:nvPicPr>
+          <p:cNvPr id="11" name="Picture 10" descr="60ccb0aa032c3bc9.png"/>
+          <p:cNvPicPr>
+            <a:picLocks noChangeAspect="1"/>
+          </p:cNvPicPr>
+          <p:nvPr/>
+        </p:nvPicPr>
+        <p:blipFill>
+          <a:blip r:embed="rId3"/>
+          <a:stretch>
+            <a:fillRect/>
+          </a:stretch>
+        </p:blipFill>
+        <p:spPr>
+          <a:xfrm>
+            <a:off x="914400" y="3448901"/>
+            <a:ext cx="1930995" cy="217842"/>
+          </a:xfrm>
+          <a:prstGeom prst="rect">
+            <a:avLst/>
+          </a:prstGeom>
+        </p:spPr>
+      </p:pic>
+      <p:sp>
+        <p:nvSpPr>
+          <p:cNvPr id="12" name="TextBox 11"/>
+          <p:cNvSpPr txBox="1"/>
+          <p:nvPr/>
+        </p:nvSpPr>
+        <p:spPr>
+          <a:xfrm>
+            <a:off x="3229445" y="3421469"/>
+            <a:ext cx="7926234" cy="272706"/>
+          </a:xfrm>
+          <a:prstGeom prst="rect">
+            <a:avLst/>
+          </a:prstGeom>
+          <a:noFill/>
+        </p:spPr>
+        <p:txBody>
+          <a:bodyPr wrap="square" anchor="ctr" lIns="38100" rIns="38100" tIns="25400" bIns="25400">
+            <a:spAutoFit/>
+          </a:bodyPr>
+          <a:lstStyle/>
+          <a:p>
+            <a:pPr algn="l">
+              <a:lnSpc>
+                <a:spcPct val="120000"/>
+              </a:lnSpc>
+              <a:spcBef>
+                <a:spcPts val="0"/>
+              </a:spcBef>
+              <a:spcAft>
+                <a:spcPts val="0"/>
+              </a:spcAft>
+            </a:pPr>
+            <a:r>
+              <a:rPr sz="1300" b="0" i="0">
+                <a:solidFill>
+                  <a:srgbClr val="5A5F68"/>
+                </a:solidFill>
+                <a:latin typeface="Noto Sans CJK KR"/>
+              </a:rPr>
+              <a:t>2차 모멘텀: 좌표별 보폭</a:t>
+            </a:r>
+          </a:p>
+        </p:txBody>
+      </p:sp>
+      <p:pic>
+        <p:nvPicPr>
+          <p:cNvPr id="13" name="Picture 12" descr="0ecce77be0963cc4.png"/>
+          <p:cNvPicPr>
+            <a:picLocks noChangeAspect="1"/>
+          </p:cNvPicPr>
+          <p:nvPr/>
+        </p:nvPicPr>
+        <p:blipFill>
+          <a:blip r:embed="rId4"/>
+          <a:stretch>
+            <a:fillRect/>
+          </a:stretch>
+        </p:blipFill>
+        <p:spPr>
+          <a:xfrm>
+            <a:off x="914400" y="3813048"/>
+            <a:ext cx="2057398" cy="400722"/>
+          </a:xfrm>
+          <a:prstGeom prst="rect">
+            <a:avLst/>
+          </a:prstGeom>
+        </p:spPr>
+      </p:pic>
+      <p:sp>
+        <p:nvSpPr>
+          <p:cNvPr id="14" name="TextBox 13"/>
+          <p:cNvSpPr txBox="1"/>
+          <p:nvPr/>
+        </p:nvSpPr>
+        <p:spPr>
+          <a:xfrm>
+            <a:off x="3355847" y="3785615"/>
+            <a:ext cx="7799832" cy="455586"/>
+          </a:xfrm>
+          <a:prstGeom prst="rect">
+            <a:avLst/>
+          </a:prstGeom>
+          <a:noFill/>
+        </p:spPr>
+        <p:txBody>
+          <a:bodyPr wrap="square" anchor="ctr" lIns="38100" rIns="38100" tIns="25400" bIns="25400">
+            <a:spAutoFit/>
+          </a:bodyPr>
+          <a:lstStyle/>
+          <a:p>
+            <a:pPr algn="l">
+              <a:lnSpc>
+                <a:spcPct val="120000"/>
+              </a:lnSpc>
+              <a:spcBef>
+                <a:spcPts val="0"/>
+              </a:spcBef>
+              <a:spcAft>
+                <a:spcPts val="0"/>
+              </a:spcAft>
+            </a:pPr>
+            <a:r>
+              <a:rPr sz="1300" b="0" i="0">
+                <a:solidFill>
+                  <a:srgbClr val="5A5F68"/>
+                </a:solidFill>
+                <a:latin typeface="Noto Sans CJK KR"/>
+              </a:rPr>
+              <a:t>초기 0-편향 보정</a:t>
+            </a:r>
+          </a:p>
+        </p:txBody>
+      </p:sp>
+      <p:pic>
+        <p:nvPicPr>
+          <p:cNvPr id="15" name="Picture 14" descr="7ca4e21dc098283d.png"/>
+          <p:cNvPicPr>
+            <a:picLocks noChangeAspect="1"/>
+          </p:cNvPicPr>
+          <p:nvPr/>
+        </p:nvPicPr>
+        <p:blipFill>
+          <a:blip r:embed="rId5"/>
+          <a:stretch>
+            <a:fillRect/>
+          </a:stretch>
+        </p:blipFill>
+        <p:spPr>
+          <a:xfrm>
+            <a:off x="914400" y="4360074"/>
+            <a:ext cx="1629782" cy="446442"/>
+          </a:xfrm>
+          <a:prstGeom prst="rect">
+            <a:avLst/>
+          </a:prstGeom>
+        </p:spPr>
+      </p:pic>
+      <p:sp>
+        <p:nvSpPr>
+          <p:cNvPr id="16" name="Rounded Rectangle 15"/>
           <p:cNvSpPr/>
           <p:nvPr/>
         </p:nvSpPr>
         <p:spPr>
           <a:xfrm>
-            <a:off x="502920" y="4700016"/>
-            <a:ext cx="5486400" cy="1792224"/>
+            <a:off x="502920" y="4937760"/>
+            <a:ext cx="5486400" cy="1673352"/>
           </a:xfrm>
           <a:prstGeom prst="roundRect">
             <a:avLst/>
@@ -5075,7 +5541,7 @@
               </a:spcAft>
             </a:pPr>
             <a:r>
-              <a:rPr sz="1450" b="0" i="0">
+              <a:rPr sz="1400" b="0" i="0">
                 <a:solidFill>
                   <a:srgbClr val="22252B"/>
                 </a:solidFill>
@@ -5088,14 +5554,14 @@
       </p:sp>
       <p:sp>
         <p:nvSpPr>
-          <p:cNvPr id="9" name="Rounded Rectangle 8"/>
+          <p:cNvPr id="17" name="Rounded Rectangle 16"/>
           <p:cNvSpPr/>
           <p:nvPr/>
         </p:nvSpPr>
         <p:spPr>
           <a:xfrm>
-            <a:off x="6199632" y="4700016"/>
-            <a:ext cx="5486400" cy="1792224"/>
+            <a:off x="6199632" y="4937760"/>
+            <a:ext cx="5486400" cy="1673352"/>
           </a:xfrm>
           <a:prstGeom prst="roundRect">
             <a:avLst/>
@@ -5162,7 +5628,7 @@
               </a:spcAft>
             </a:pPr>
             <a:r>
-              <a:rPr sz="1450" b="0" i="0">
+              <a:rPr sz="1400" b="0" i="0">
                 <a:solidFill>
                   <a:srgbClr val="22252B"/>
                 </a:solidFill>
@@ -5486,8 +5952,8 @@
         </p:nvSpPr>
         <p:spPr>
           <a:xfrm>
-            <a:off x="502920" y="2615184"/>
-            <a:ext cx="11183112" cy="1938528"/>
+            <a:off x="502920" y="2596896"/>
+            <a:ext cx="11183112" cy="2212848"/>
           </a:xfrm>
           <a:prstGeom prst="roundRect">
             <a:avLst/>
@@ -5520,7 +5986,7 @@
           <a:bodyPr rtlCol="0" anchor="ctr" wrap="square" lIns="76200" rIns="76200" tIns="38100" bIns="38100"/>
           <a:lstStyle/>
           <a:p>
-            <a:pPr algn="l">
+            <a:pPr algn="ctr">
               <a:lnSpc>
                 <a:spcPct val="118000"/>
               </a:lnSpc>
@@ -5528,75 +5994,214 @@
                 <a:spcPts val="0"/>
               </a:spcBef>
               <a:spcAft>
-                <a:spcPts val="600"/>
-              </a:spcAft>
-            </a:pPr>
-            <a:r>
-              <a:rPr sz="1400" b="1" i="0">
+                <a:spcPts val="300"/>
+              </a:spcAft>
+            </a:pPr>
+            <a:r>
+              <a:rPr sz="1100" b="0" i="0">
                 <a:solidFill>
                   <a:srgbClr val="22252B"/>
                 </a:solidFill>
                 <a:latin typeface="Noto Sans CJK KR"/>
               </a:rPr>
+              <a:t/>
+            </a:r>
+          </a:p>
+        </p:txBody>
+      </p:sp>
+      <p:sp>
+        <p:nvSpPr>
+          <p:cNvPr id="8" name="TextBox 7"/>
+          <p:cNvSpPr txBox="1"/>
+          <p:nvPr/>
+        </p:nvSpPr>
+        <p:spPr>
+          <a:xfrm>
+            <a:off x="704088" y="2679191"/>
+            <a:ext cx="3657600" cy="274320"/>
+          </a:xfrm>
+          <a:prstGeom prst="rect">
+            <a:avLst/>
+          </a:prstGeom>
+          <a:noFill/>
+        </p:spPr>
+        <p:txBody>
+          <a:bodyPr wrap="square" anchor="t" lIns="38100" rIns="38100" tIns="25400" bIns="25400">
+            <a:spAutoFit/>
+          </a:bodyPr>
+          <a:lstStyle/>
+          <a:p>
+            <a:pPr algn="l">
+              <a:lnSpc>
+                <a:spcPct val="120000"/>
+              </a:lnSpc>
+              <a:spcBef>
+                <a:spcPts val="0"/>
+              </a:spcBef>
+              <a:spcAft>
+                <a:spcPts val="0"/>
+              </a:spcAft>
+            </a:pPr>
+            <a:r>
+              <a:rPr sz="1350" b="1" i="0">
+                <a:solidFill>
+                  <a:srgbClr val="22252B"/>
+                </a:solidFill>
+                <a:latin typeface="Noto Sans CJK KR"/>
+              </a:rPr>
               <a:t>갱신 규칙 (수식)</a:t>
             </a:r>
           </a:p>
-          <a:p>
-            <a:pPr algn="l">
-              <a:lnSpc>
-                <a:spcPct val="118000"/>
-              </a:lnSpc>
-              <a:spcBef>
-                <a:spcPts val="0"/>
-              </a:spcBef>
-              <a:spcAft>
-                <a:spcPts val="700"/>
-              </a:spcAft>
-            </a:pPr>
-            <a:r>
-              <a:rPr sz="1550" b="0" i="0">
-                <a:solidFill>
-                  <a:srgbClr val="22252B"/>
-                </a:solidFill>
-                <a:latin typeface="Noto Sans Mono CJK KR"/>
-              </a:rPr>
-              <a:t>m_t, v_t, m̂, v̂ : Adam과 동일 (decay를 g_t에 넣지 않음)</a:t>
-            </a:r>
-          </a:p>
-          <a:p>
-            <a:pPr algn="l">
-              <a:lnSpc>
-                <a:spcPct val="118000"/>
-              </a:lnSpc>
-              <a:spcBef>
-                <a:spcPts val="0"/>
-              </a:spcBef>
-              <a:spcAft>
-                <a:spcPts val="700"/>
-              </a:spcAft>
-            </a:pPr>
-            <a:r>
-              <a:rPr sz="1550" b="0" i="0">
-                <a:solidFill>
-                  <a:srgbClr val="22252B"/>
-                </a:solidFill>
-                <a:latin typeface="Noto Sans Mono CJK KR"/>
-              </a:rPr>
-              <a:t>θ_{t+1} = θ_t − η · ( m̂/(√v̂+ε)  +  λ·θ_t )      # λ·θ 항을 분리(decoupled)</a:t>
-            </a:r>
-          </a:p>
-        </p:txBody>
-      </p:sp>
-      <p:sp>
-        <p:nvSpPr>
-          <p:cNvPr id="8" name="Rounded Rectangle 7"/>
+        </p:txBody>
+      </p:sp>
+      <p:pic>
+        <p:nvPicPr>
+          <p:cNvPr id="9" name="Picture 8" descr="fd2c02d1471c4bec.png"/>
+          <p:cNvPicPr>
+            <a:picLocks noChangeAspect="1"/>
+          </p:cNvPicPr>
+          <p:nvPr/>
+        </p:nvPicPr>
+        <p:blipFill>
+          <a:blip r:embed="rId2"/>
+          <a:stretch>
+            <a:fillRect/>
+          </a:stretch>
+        </p:blipFill>
+        <p:spPr>
+          <a:xfrm>
+            <a:off x="914400" y="3474720"/>
+            <a:ext cx="2468880" cy="219456"/>
+          </a:xfrm>
+          <a:prstGeom prst="rect">
+            <a:avLst/>
+          </a:prstGeom>
+        </p:spPr>
+      </p:pic>
+      <p:sp>
+        <p:nvSpPr>
+          <p:cNvPr id="10" name="TextBox 9"/>
+          <p:cNvSpPr txBox="1"/>
+          <p:nvPr/>
+        </p:nvSpPr>
+        <p:spPr>
+          <a:xfrm>
+            <a:off x="3767328" y="3447288"/>
+            <a:ext cx="7388352" cy="274320"/>
+          </a:xfrm>
+          <a:prstGeom prst="rect">
+            <a:avLst/>
+          </a:prstGeom>
+          <a:noFill/>
+        </p:spPr>
+        <p:txBody>
+          <a:bodyPr wrap="square" anchor="ctr" lIns="38100" rIns="38100" tIns="25400" bIns="25400">
+            <a:spAutoFit/>
+          </a:bodyPr>
+          <a:lstStyle/>
+          <a:p>
+            <a:pPr algn="l">
+              <a:lnSpc>
+                <a:spcPct val="120000"/>
+              </a:lnSpc>
+              <a:spcBef>
+                <a:spcPts val="0"/>
+              </a:spcBef>
+              <a:spcAft>
+                <a:spcPts val="0"/>
+              </a:spcAft>
+            </a:pPr>
+            <a:r>
+              <a:rPr sz="1300" b="0" i="0">
+                <a:solidFill>
+                  <a:srgbClr val="5A5F68"/>
+                </a:solidFill>
+                <a:latin typeface="Noto Sans CJK KR"/>
+              </a:rPr>
+              <a:t>decay를 gradient에 넣지 않음</a:t>
+            </a:r>
+          </a:p>
+        </p:txBody>
+      </p:sp>
+      <p:pic>
+        <p:nvPicPr>
+          <p:cNvPr id="11" name="Picture 10" descr="ce7d435624c42201.png"/>
+          <p:cNvPicPr>
+            <a:picLocks noChangeAspect="1"/>
+          </p:cNvPicPr>
+          <p:nvPr/>
+        </p:nvPicPr>
+        <p:blipFill>
+          <a:blip r:embed="rId3"/>
+          <a:stretch>
+            <a:fillRect/>
+          </a:stretch>
+        </p:blipFill>
+        <p:spPr>
+          <a:xfrm>
+            <a:off x="914400" y="3840480"/>
+            <a:ext cx="2691384" cy="548640"/>
+          </a:xfrm>
+          <a:prstGeom prst="rect">
+            <a:avLst/>
+          </a:prstGeom>
+        </p:spPr>
+      </p:pic>
+      <p:sp>
+        <p:nvSpPr>
+          <p:cNvPr id="12" name="TextBox 11"/>
+          <p:cNvSpPr txBox="1"/>
+          <p:nvPr/>
+        </p:nvSpPr>
+        <p:spPr>
+          <a:xfrm>
+            <a:off x="3989832" y="3813048"/>
+            <a:ext cx="7165848" cy="603503"/>
+          </a:xfrm>
+          <a:prstGeom prst="rect">
+            <a:avLst/>
+          </a:prstGeom>
+          <a:noFill/>
+        </p:spPr>
+        <p:txBody>
+          <a:bodyPr wrap="square" anchor="ctr" lIns="38100" rIns="38100" tIns="25400" bIns="25400">
+            <a:spAutoFit/>
+          </a:bodyPr>
+          <a:lstStyle/>
+          <a:p>
+            <a:pPr algn="l">
+              <a:lnSpc>
+                <a:spcPct val="120000"/>
+              </a:lnSpc>
+              <a:spcBef>
+                <a:spcPts val="0"/>
+              </a:spcBef>
+              <a:spcAft>
+                <a:spcPts val="0"/>
+              </a:spcAft>
+            </a:pPr>
+            <a:r>
+              <a:rPr sz="1300" b="0" i="0">
+                <a:solidFill>
+                  <a:srgbClr val="5A5F68"/>
+                </a:solidFill>
+                <a:latin typeface="Noto Sans CJK KR"/>
+              </a:rPr>
+              <a:t>λθ 항을 분리 (decoupled)</a:t>
+            </a:r>
+          </a:p>
+        </p:txBody>
+      </p:sp>
+      <p:sp>
+        <p:nvSpPr>
+          <p:cNvPr id="13" name="Rounded Rectangle 12"/>
           <p:cNvSpPr/>
           <p:nvPr/>
         </p:nvSpPr>
         <p:spPr>
           <a:xfrm>
-            <a:off x="502920" y="4700016"/>
-            <a:ext cx="5486400" cy="1792224"/>
+            <a:off x="502920" y="4937760"/>
+            <a:ext cx="5486400" cy="1673352"/>
           </a:xfrm>
           <a:prstGeom prst="roundRect">
             <a:avLst/>
@@ -5663,7 +6268,7 @@
               </a:spcAft>
             </a:pPr>
             <a:r>
-              <a:rPr sz="1450" b="0" i="0">
+              <a:rPr sz="1400" b="0" i="0">
                 <a:solidFill>
                   <a:srgbClr val="22252B"/>
                 </a:solidFill>
@@ -5676,14 +6281,14 @@
       </p:sp>
       <p:sp>
         <p:nvSpPr>
-          <p:cNvPr id="9" name="Rounded Rectangle 8"/>
+          <p:cNvPr id="14" name="Rounded Rectangle 13"/>
           <p:cNvSpPr/>
           <p:nvPr/>
         </p:nvSpPr>
         <p:spPr>
           <a:xfrm>
-            <a:off x="6199632" y="4700016"/>
-            <a:ext cx="5486400" cy="1792224"/>
+            <a:off x="6199632" y="4937760"/>
+            <a:ext cx="5486400" cy="1673352"/>
           </a:xfrm>
           <a:prstGeom prst="roundRect">
             <a:avLst/>
@@ -5750,7 +6355,7 @@
               </a:spcAft>
             </a:pPr>
             <a:r>
-              <a:rPr sz="1450" b="0" i="0">
+              <a:rPr sz="1400" b="0" i="0">
                 <a:solidFill>
                   <a:srgbClr val="22252B"/>
                 </a:solidFill>
@@ -9769,8 +10374,8 @@
         </p:nvSpPr>
         <p:spPr>
           <a:xfrm>
-            <a:off x="502920" y="2615184"/>
-            <a:ext cx="11183112" cy="1938528"/>
+            <a:off x="502920" y="2596896"/>
+            <a:ext cx="11183112" cy="2212848"/>
           </a:xfrm>
           <a:prstGeom prst="roundRect">
             <a:avLst/>
@@ -9803,7 +10408,7 @@
           <a:bodyPr rtlCol="0" anchor="ctr" wrap="square" lIns="76200" rIns="76200" tIns="38100" bIns="38100"/>
           <a:lstStyle/>
           <a:p>
-            <a:pPr algn="l">
+            <a:pPr algn="ctr">
               <a:lnSpc>
                 <a:spcPct val="118000"/>
               </a:lnSpc>
@@ -9811,75 +10416,214 @@
                 <a:spcPts val="0"/>
               </a:spcBef>
               <a:spcAft>
-                <a:spcPts val="600"/>
-              </a:spcAft>
-            </a:pPr>
-            <a:r>
-              <a:rPr sz="1400" b="1" i="0">
+                <a:spcPts val="300"/>
+              </a:spcAft>
+            </a:pPr>
+            <a:r>
+              <a:rPr sz="1100" b="0" i="0">
                 <a:solidFill>
                   <a:srgbClr val="22252B"/>
                 </a:solidFill>
                 <a:latin typeface="Noto Sans CJK KR"/>
               </a:rPr>
+              <a:t/>
+            </a:r>
+          </a:p>
+        </p:txBody>
+      </p:sp>
+      <p:sp>
+        <p:nvSpPr>
+          <p:cNvPr id="8" name="TextBox 7"/>
+          <p:cNvSpPr txBox="1"/>
+          <p:nvPr/>
+        </p:nvSpPr>
+        <p:spPr>
+          <a:xfrm>
+            <a:off x="704088" y="2679191"/>
+            <a:ext cx="3657600" cy="274320"/>
+          </a:xfrm>
+          <a:prstGeom prst="rect">
+            <a:avLst/>
+          </a:prstGeom>
+          <a:noFill/>
+        </p:spPr>
+        <p:txBody>
+          <a:bodyPr wrap="square" anchor="t" lIns="38100" rIns="38100" tIns="25400" bIns="25400">
+            <a:spAutoFit/>
+          </a:bodyPr>
+          <a:lstStyle/>
+          <a:p>
+            <a:pPr algn="l">
+              <a:lnSpc>
+                <a:spcPct val="120000"/>
+              </a:lnSpc>
+              <a:spcBef>
+                <a:spcPts val="0"/>
+              </a:spcBef>
+              <a:spcAft>
+                <a:spcPts val="0"/>
+              </a:spcAft>
+            </a:pPr>
+            <a:r>
+              <a:rPr sz="1350" b="1" i="0">
+                <a:solidFill>
+                  <a:srgbClr val="22252B"/>
+                </a:solidFill>
+                <a:latin typeface="Noto Sans CJK KR"/>
+              </a:rPr>
               <a:t>갱신 규칙 (수식)</a:t>
             </a:r>
           </a:p>
-          <a:p>
-            <a:pPr algn="l">
-              <a:lnSpc>
-                <a:spcPct val="118000"/>
-              </a:lnSpc>
-              <a:spcBef>
-                <a:spcPts val="0"/>
-              </a:spcBef>
-              <a:spcAft>
-                <a:spcPts val="700"/>
-              </a:spcAft>
-            </a:pPr>
-            <a:r>
-              <a:rPr sz="1550" b="0" i="0">
-                <a:solidFill>
-                  <a:srgbClr val="22252B"/>
-                </a:solidFill>
-                <a:latin typeface="Noto Sans Mono CJK KR"/>
-              </a:rPr>
-              <a:t>g_t = (1/N) · Σ_{i=1..N} ∇ℓ_i(θ_t)      # 전체 N개 데이터의 평균 gradient</a:t>
-            </a:r>
-          </a:p>
-          <a:p>
-            <a:pPr algn="l">
-              <a:lnSpc>
-                <a:spcPct val="118000"/>
-              </a:lnSpc>
-              <a:spcBef>
-                <a:spcPts val="0"/>
-              </a:spcBef>
-              <a:spcAft>
-                <a:spcPts val="700"/>
-              </a:spcAft>
-            </a:pPr>
-            <a:r>
-              <a:rPr sz="1550" b="0" i="0">
-                <a:solidFill>
-                  <a:srgbClr val="22252B"/>
-                </a:solidFill>
-                <a:latin typeface="Noto Sans Mono CJK KR"/>
-              </a:rPr>
-              <a:t>θ_{t+1} = θ_t − η · g_t                  # η = learning rate(보폭)</a:t>
-            </a:r>
-          </a:p>
-        </p:txBody>
-      </p:sp>
-      <p:sp>
-        <p:nvSpPr>
-          <p:cNvPr id="8" name="Rounded Rectangle 7"/>
+        </p:txBody>
+      </p:sp>
+      <p:pic>
+        <p:nvPicPr>
+          <p:cNvPr id="9" name="Picture 8" descr="5fbcf593e3d630ee.png"/>
+          <p:cNvPicPr>
+            <a:picLocks noChangeAspect="1"/>
+          </p:cNvPicPr>
+          <p:nvPr/>
+        </p:nvPicPr>
+        <p:blipFill>
+          <a:blip r:embed="rId2"/>
+          <a:stretch>
+            <a:fillRect/>
+          </a:stretch>
+        </p:blipFill>
+        <p:spPr>
+          <a:xfrm>
+            <a:off x="914400" y="3429000"/>
+            <a:ext cx="1691640" cy="655320"/>
+          </a:xfrm>
+          <a:prstGeom prst="rect">
+            <a:avLst/>
+          </a:prstGeom>
+        </p:spPr>
+      </p:pic>
+      <p:sp>
+        <p:nvSpPr>
+          <p:cNvPr id="10" name="TextBox 9"/>
+          <p:cNvSpPr txBox="1"/>
+          <p:nvPr/>
+        </p:nvSpPr>
+        <p:spPr>
+          <a:xfrm>
+            <a:off x="2990088" y="3401568"/>
+            <a:ext cx="8165592" cy="710184"/>
+          </a:xfrm>
+          <a:prstGeom prst="rect">
+            <a:avLst/>
+          </a:prstGeom>
+          <a:noFill/>
+        </p:spPr>
+        <p:txBody>
+          <a:bodyPr wrap="square" anchor="ctr" lIns="38100" rIns="38100" tIns="25400" bIns="25400">
+            <a:spAutoFit/>
+          </a:bodyPr>
+          <a:lstStyle/>
+          <a:p>
+            <a:pPr algn="l">
+              <a:lnSpc>
+                <a:spcPct val="120000"/>
+              </a:lnSpc>
+              <a:spcBef>
+                <a:spcPts val="0"/>
+              </a:spcBef>
+              <a:spcAft>
+                <a:spcPts val="0"/>
+              </a:spcAft>
+            </a:pPr>
+            <a:r>
+              <a:rPr sz="1300" b="0" i="0">
+                <a:solidFill>
+                  <a:srgbClr val="5A5F68"/>
+                </a:solidFill>
+                <a:latin typeface="Noto Sans CJK KR"/>
+              </a:rPr>
+              <a:t>전체 N개 데이터의 평균 gradient</a:t>
+            </a:r>
+          </a:p>
+        </p:txBody>
+      </p:sp>
+      <p:pic>
+        <p:nvPicPr>
+          <p:cNvPr id="11" name="Picture 10" descr="e4232876b3532890.png"/>
+          <p:cNvPicPr>
+            <a:picLocks noChangeAspect="1"/>
+          </p:cNvPicPr>
+          <p:nvPr/>
+        </p:nvPicPr>
+        <p:blipFill>
+          <a:blip r:embed="rId3"/>
+          <a:stretch>
+            <a:fillRect/>
+          </a:stretch>
+        </p:blipFill>
+        <p:spPr>
+          <a:xfrm>
+            <a:off x="914400" y="4230624"/>
+            <a:ext cx="1350264" cy="204216"/>
+          </a:xfrm>
+          <a:prstGeom prst="rect">
+            <a:avLst/>
+          </a:prstGeom>
+        </p:spPr>
+      </p:pic>
+      <p:sp>
+        <p:nvSpPr>
+          <p:cNvPr id="12" name="TextBox 11"/>
+          <p:cNvSpPr txBox="1"/>
+          <p:nvPr/>
+        </p:nvSpPr>
+        <p:spPr>
+          <a:xfrm>
+            <a:off x="2648712" y="4203192"/>
+            <a:ext cx="8506968" cy="259080"/>
+          </a:xfrm>
+          <a:prstGeom prst="rect">
+            <a:avLst/>
+          </a:prstGeom>
+          <a:noFill/>
+        </p:spPr>
+        <p:txBody>
+          <a:bodyPr wrap="square" anchor="ctr" lIns="38100" rIns="38100" tIns="25400" bIns="25400">
+            <a:spAutoFit/>
+          </a:bodyPr>
+          <a:lstStyle/>
+          <a:p>
+            <a:pPr algn="l">
+              <a:lnSpc>
+                <a:spcPct val="120000"/>
+              </a:lnSpc>
+              <a:spcBef>
+                <a:spcPts val="0"/>
+              </a:spcBef>
+              <a:spcAft>
+                <a:spcPts val="0"/>
+              </a:spcAft>
+            </a:pPr>
+            <a:r>
+              <a:rPr sz="1300" b="0" i="0">
+                <a:solidFill>
+                  <a:srgbClr val="5A5F68"/>
+                </a:solidFill>
+                <a:latin typeface="Noto Sans CJK KR"/>
+              </a:rPr>
+              <a:t>η = learning rate (보폭)</a:t>
+            </a:r>
+          </a:p>
+        </p:txBody>
+      </p:sp>
+      <p:sp>
+        <p:nvSpPr>
+          <p:cNvPr id="13" name="Rounded Rectangle 12"/>
           <p:cNvSpPr/>
           <p:nvPr/>
         </p:nvSpPr>
         <p:spPr>
           <a:xfrm>
-            <a:off x="502920" y="4700016"/>
-            <a:ext cx="5486400" cy="1792224"/>
+            <a:off x="502920" y="4937760"/>
+            <a:ext cx="5486400" cy="1673352"/>
           </a:xfrm>
           <a:prstGeom prst="roundRect">
             <a:avLst/>
@@ -9946,7 +10690,7 @@
               </a:spcAft>
             </a:pPr>
             <a:r>
-              <a:rPr sz="1450" b="0" i="0">
+              <a:rPr sz="1400" b="0" i="0">
                 <a:solidFill>
                   <a:srgbClr val="22252B"/>
                 </a:solidFill>
@@ -9959,14 +10703,14 @@
       </p:sp>
       <p:sp>
         <p:nvSpPr>
-          <p:cNvPr id="9" name="Rounded Rectangle 8"/>
+          <p:cNvPr id="14" name="Rounded Rectangle 13"/>
           <p:cNvSpPr/>
           <p:nvPr/>
         </p:nvSpPr>
         <p:spPr>
           <a:xfrm>
-            <a:off x="6199632" y="4700016"/>
-            <a:ext cx="5486400" cy="1792224"/>
+            <a:off x="6199632" y="4937760"/>
+            <a:ext cx="5486400" cy="1673352"/>
           </a:xfrm>
           <a:prstGeom prst="roundRect">
             <a:avLst/>
@@ -10033,7 +10777,7 @@
               </a:spcAft>
             </a:pPr>
             <a:r>
-              <a:rPr sz="1450" b="0" i="0">
+              <a:rPr sz="1400" b="0" i="0">
                 <a:solidFill>
                   <a:srgbClr val="22252B"/>
                 </a:solidFill>
@@ -10357,8 +11101,8 @@
         </p:nvSpPr>
         <p:spPr>
           <a:xfrm>
-            <a:off x="502920" y="2615184"/>
-            <a:ext cx="11183112" cy="1938528"/>
+            <a:off x="502920" y="2596896"/>
+            <a:ext cx="11183112" cy="2212848"/>
           </a:xfrm>
           <a:prstGeom prst="roundRect">
             <a:avLst/>
@@ -10391,7 +11135,7 @@
           <a:bodyPr rtlCol="0" anchor="ctr" wrap="square" lIns="76200" rIns="76200" tIns="38100" bIns="38100"/>
           <a:lstStyle/>
           <a:p>
-            <a:pPr algn="l">
+            <a:pPr algn="ctr">
               <a:lnSpc>
                 <a:spcPct val="118000"/>
               </a:lnSpc>
@@ -10399,75 +11143,169 @@
                 <a:spcPts val="0"/>
               </a:spcBef>
               <a:spcAft>
-                <a:spcPts val="600"/>
-              </a:spcAft>
-            </a:pPr>
-            <a:r>
-              <a:rPr sz="1400" b="1" i="0">
+                <a:spcPts val="300"/>
+              </a:spcAft>
+            </a:pPr>
+            <a:r>
+              <a:rPr sz="1100" b="0" i="0">
                 <a:solidFill>
                   <a:srgbClr val="22252B"/>
                 </a:solidFill>
                 <a:latin typeface="Noto Sans CJK KR"/>
               </a:rPr>
+              <a:t/>
+            </a:r>
+          </a:p>
+        </p:txBody>
+      </p:sp>
+      <p:sp>
+        <p:nvSpPr>
+          <p:cNvPr id="8" name="TextBox 7"/>
+          <p:cNvSpPr txBox="1"/>
+          <p:nvPr/>
+        </p:nvSpPr>
+        <p:spPr>
+          <a:xfrm>
+            <a:off x="704088" y="2679191"/>
+            <a:ext cx="3657600" cy="274320"/>
+          </a:xfrm>
+          <a:prstGeom prst="rect">
+            <a:avLst/>
+          </a:prstGeom>
+          <a:noFill/>
+        </p:spPr>
+        <p:txBody>
+          <a:bodyPr wrap="square" anchor="t" lIns="38100" rIns="38100" tIns="25400" bIns="25400">
+            <a:spAutoFit/>
+          </a:bodyPr>
+          <a:lstStyle/>
+          <a:p>
+            <a:pPr algn="l">
+              <a:lnSpc>
+                <a:spcPct val="120000"/>
+              </a:lnSpc>
+              <a:spcBef>
+                <a:spcPts val="0"/>
+              </a:spcBef>
+              <a:spcAft>
+                <a:spcPts val="0"/>
+              </a:spcAft>
+            </a:pPr>
+            <a:r>
+              <a:rPr sz="1350" b="1" i="0">
+                <a:solidFill>
+                  <a:srgbClr val="22252B"/>
+                </a:solidFill>
+                <a:latin typeface="Noto Sans CJK KR"/>
+              </a:rPr>
               <a:t>갱신 규칙 (수식)</a:t>
             </a:r>
           </a:p>
-          <a:p>
-            <a:pPr algn="l">
-              <a:lnSpc>
-                <a:spcPct val="118000"/>
-              </a:lnSpc>
-              <a:spcBef>
-                <a:spcPts val="0"/>
-              </a:spcBef>
-              <a:spcAft>
-                <a:spcPts val="700"/>
-              </a:spcAft>
-            </a:pPr>
-            <a:r>
-              <a:rPr sz="1550" b="0" i="0">
-                <a:solidFill>
-                  <a:srgbClr val="22252B"/>
-                </a:solidFill>
-                <a:latin typeface="Noto Sans Mono CJK KR"/>
-              </a:rPr>
-              <a:t>g_t = ∇ℓ_B(θ_t)          # 미니배치 B개만 사용 (|B| ≪ N)</a:t>
-            </a:r>
-          </a:p>
-          <a:p>
-            <a:pPr algn="l">
-              <a:lnSpc>
-                <a:spcPct val="118000"/>
-              </a:lnSpc>
-              <a:spcBef>
-                <a:spcPts val="0"/>
-              </a:spcBef>
-              <a:spcAft>
-                <a:spcPts val="700"/>
-              </a:spcAft>
-            </a:pPr>
-            <a:r>
-              <a:rPr sz="1550" b="0" i="0">
-                <a:solidFill>
-                  <a:srgbClr val="22252B"/>
-                </a:solidFill>
-                <a:latin typeface="Noto Sans Mono CJK KR"/>
-              </a:rPr>
-              <a:t>θ_{t+1} = θ_t − η · g_t</a:t>
-            </a:r>
-          </a:p>
-        </p:txBody>
-      </p:sp>
-      <p:sp>
-        <p:nvSpPr>
-          <p:cNvPr id="8" name="Rounded Rectangle 7"/>
+        </p:txBody>
+      </p:sp>
+      <p:pic>
+        <p:nvPicPr>
+          <p:cNvPr id="9" name="Picture 8" descr="59adb2427c3a6837.png"/>
+          <p:cNvPicPr>
+            <a:picLocks noChangeAspect="1"/>
+          </p:cNvPicPr>
+          <p:nvPr/>
+        </p:nvPicPr>
+        <p:blipFill>
+          <a:blip r:embed="rId2"/>
+          <a:stretch>
+            <a:fillRect/>
+          </a:stretch>
+        </p:blipFill>
+        <p:spPr>
+          <a:xfrm>
+            <a:off x="914400" y="3646932"/>
+            <a:ext cx="1118616" cy="219456"/>
+          </a:xfrm>
+          <a:prstGeom prst="rect">
+            <a:avLst/>
+          </a:prstGeom>
+        </p:spPr>
+      </p:pic>
+      <p:sp>
+        <p:nvSpPr>
+          <p:cNvPr id="10" name="TextBox 9"/>
+          <p:cNvSpPr txBox="1"/>
+          <p:nvPr/>
+        </p:nvSpPr>
+        <p:spPr>
+          <a:xfrm>
+            <a:off x="2417064" y="3619500"/>
+            <a:ext cx="8738616" cy="274320"/>
+          </a:xfrm>
+          <a:prstGeom prst="rect">
+            <a:avLst/>
+          </a:prstGeom>
+          <a:noFill/>
+        </p:spPr>
+        <p:txBody>
+          <a:bodyPr wrap="square" anchor="ctr" lIns="38100" rIns="38100" tIns="25400" bIns="25400">
+            <a:spAutoFit/>
+          </a:bodyPr>
+          <a:lstStyle/>
+          <a:p>
+            <a:pPr algn="l">
+              <a:lnSpc>
+                <a:spcPct val="120000"/>
+              </a:lnSpc>
+              <a:spcBef>
+                <a:spcPts val="0"/>
+              </a:spcBef>
+              <a:spcAft>
+                <a:spcPts val="0"/>
+              </a:spcAft>
+            </a:pPr>
+            <a:r>
+              <a:rPr sz="1300" b="0" i="0">
+                <a:solidFill>
+                  <a:srgbClr val="5A5F68"/>
+                </a:solidFill>
+                <a:latin typeface="Noto Sans CJK KR"/>
+              </a:rPr>
+              <a:t>미니배치 B개만 사용 (|B| ≪ N)</a:t>
+            </a:r>
+          </a:p>
+        </p:txBody>
+      </p:sp>
+      <p:pic>
+        <p:nvPicPr>
+          <p:cNvPr id="11" name="Picture 10" descr="e4232876b3532890.png"/>
+          <p:cNvPicPr>
+            <a:picLocks noChangeAspect="1"/>
+          </p:cNvPicPr>
+          <p:nvPr/>
+        </p:nvPicPr>
+        <p:blipFill>
+          <a:blip r:embed="rId3"/>
+          <a:stretch>
+            <a:fillRect/>
+          </a:stretch>
+        </p:blipFill>
+        <p:spPr>
+          <a:xfrm>
+            <a:off x="914400" y="4012692"/>
+            <a:ext cx="1350264" cy="204216"/>
+          </a:xfrm>
+          <a:prstGeom prst="rect">
+            <a:avLst/>
+          </a:prstGeom>
+        </p:spPr>
+      </p:pic>
+      <p:sp>
+        <p:nvSpPr>
+          <p:cNvPr id="12" name="Rounded Rectangle 11"/>
           <p:cNvSpPr/>
           <p:nvPr/>
         </p:nvSpPr>
         <p:spPr>
           <a:xfrm>
-            <a:off x="502920" y="4700016"/>
-            <a:ext cx="5486400" cy="1792224"/>
+            <a:off x="502920" y="4937760"/>
+            <a:ext cx="5486400" cy="1673352"/>
           </a:xfrm>
           <a:prstGeom prst="roundRect">
             <a:avLst/>
@@ -10534,7 +11372,7 @@
               </a:spcAft>
             </a:pPr>
             <a:r>
-              <a:rPr sz="1450" b="0" i="0">
+              <a:rPr sz="1400" b="0" i="0">
                 <a:solidFill>
                   <a:srgbClr val="22252B"/>
                 </a:solidFill>
@@ -10547,14 +11385,14 @@
       </p:sp>
       <p:sp>
         <p:nvSpPr>
-          <p:cNvPr id="9" name="Rounded Rectangle 8"/>
+          <p:cNvPr id="13" name="Rounded Rectangle 12"/>
           <p:cNvSpPr/>
           <p:nvPr/>
         </p:nvSpPr>
         <p:spPr>
           <a:xfrm>
-            <a:off x="6199632" y="4700016"/>
-            <a:ext cx="5486400" cy="1792224"/>
+            <a:off x="6199632" y="4937760"/>
+            <a:ext cx="5486400" cy="1673352"/>
           </a:xfrm>
           <a:prstGeom prst="roundRect">
             <a:avLst/>
@@ -10621,7 +11459,7 @@
               </a:spcAft>
             </a:pPr>
             <a:r>
-              <a:rPr sz="1450" b="0" i="0">
+              <a:rPr sz="1400" b="0" i="0">
                 <a:solidFill>
                   <a:srgbClr val="22252B"/>
                 </a:solidFill>
@@ -10945,8 +11783,8 @@
         </p:nvSpPr>
         <p:spPr>
           <a:xfrm>
-            <a:off x="502920" y="2615184"/>
-            <a:ext cx="11183112" cy="1938528"/>
+            <a:off x="502920" y="2596896"/>
+            <a:ext cx="11183112" cy="2212848"/>
           </a:xfrm>
           <a:prstGeom prst="roundRect">
             <a:avLst/>
@@ -10979,7 +11817,7 @@
           <a:bodyPr rtlCol="0" anchor="ctr" wrap="square" lIns="76200" rIns="76200" tIns="38100" bIns="38100"/>
           <a:lstStyle/>
           <a:p>
-            <a:pPr algn="l">
+            <a:pPr algn="ctr">
               <a:lnSpc>
                 <a:spcPct val="118000"/>
               </a:lnSpc>
@@ -10987,75 +11825,169 @@
                 <a:spcPts val="0"/>
               </a:spcBef>
               <a:spcAft>
-                <a:spcPts val="600"/>
-              </a:spcAft>
-            </a:pPr>
-            <a:r>
-              <a:rPr sz="1400" b="1" i="0">
+                <a:spcPts val="300"/>
+              </a:spcAft>
+            </a:pPr>
+            <a:r>
+              <a:rPr sz="1100" b="0" i="0">
                 <a:solidFill>
                   <a:srgbClr val="22252B"/>
                 </a:solidFill>
                 <a:latin typeface="Noto Sans CJK KR"/>
               </a:rPr>
+              <a:t/>
+            </a:r>
+          </a:p>
+        </p:txBody>
+      </p:sp>
+      <p:sp>
+        <p:nvSpPr>
+          <p:cNvPr id="8" name="TextBox 7"/>
+          <p:cNvSpPr txBox="1"/>
+          <p:nvPr/>
+        </p:nvSpPr>
+        <p:spPr>
+          <a:xfrm>
+            <a:off x="704088" y="2679191"/>
+            <a:ext cx="3657600" cy="274320"/>
+          </a:xfrm>
+          <a:prstGeom prst="rect">
+            <a:avLst/>
+          </a:prstGeom>
+          <a:noFill/>
+        </p:spPr>
+        <p:txBody>
+          <a:bodyPr wrap="square" anchor="t" lIns="38100" rIns="38100" tIns="25400" bIns="25400">
+            <a:spAutoFit/>
+          </a:bodyPr>
+          <a:lstStyle/>
+          <a:p>
+            <a:pPr algn="l">
+              <a:lnSpc>
+                <a:spcPct val="120000"/>
+              </a:lnSpc>
+              <a:spcBef>
+                <a:spcPts val="0"/>
+              </a:spcBef>
+              <a:spcAft>
+                <a:spcPts val="0"/>
+              </a:spcAft>
+            </a:pPr>
+            <a:r>
+              <a:rPr sz="1350" b="1" i="0">
+                <a:solidFill>
+                  <a:srgbClr val="22252B"/>
+                </a:solidFill>
+                <a:latin typeface="Noto Sans CJK KR"/>
+              </a:rPr>
               <a:t>갱신 규칙 (수식)</a:t>
             </a:r>
           </a:p>
-          <a:p>
-            <a:pPr algn="l">
-              <a:lnSpc>
-                <a:spcPct val="118000"/>
-              </a:lnSpc>
-              <a:spcBef>
-                <a:spcPts val="0"/>
-              </a:spcBef>
-              <a:spcAft>
-                <a:spcPts val="700"/>
-              </a:spcAft>
-            </a:pPr>
-            <a:r>
-              <a:rPr sz="1550" b="0" i="0">
-                <a:solidFill>
-                  <a:srgbClr val="22252B"/>
-                </a:solidFill>
-                <a:latin typeface="Noto Sans Mono CJK KR"/>
-              </a:rPr>
-              <a:t>v_t = μ · v_{t-1} + g_t        # μ≈0.9, 과거 방향의 관성(누적)</a:t>
-            </a:r>
-          </a:p>
-          <a:p>
-            <a:pPr algn="l">
-              <a:lnSpc>
-                <a:spcPct val="118000"/>
-              </a:lnSpc>
-              <a:spcBef>
-                <a:spcPts val="0"/>
-              </a:spcBef>
-              <a:spcAft>
-                <a:spcPts val="700"/>
-              </a:spcAft>
-            </a:pPr>
-            <a:r>
-              <a:rPr sz="1550" b="0" i="0">
-                <a:solidFill>
-                  <a:srgbClr val="22252B"/>
-                </a:solidFill>
-                <a:latin typeface="Noto Sans Mono CJK KR"/>
-              </a:rPr>
-              <a:t>θ_{t+1} = θ_t − η · v_t</a:t>
-            </a:r>
-          </a:p>
-        </p:txBody>
-      </p:sp>
-      <p:sp>
-        <p:nvSpPr>
-          <p:cNvPr id="8" name="Rounded Rectangle 7"/>
+        </p:txBody>
+      </p:sp>
+      <p:pic>
+        <p:nvPicPr>
+          <p:cNvPr id="9" name="Picture 8" descr="58cc304237f13123.png"/>
+          <p:cNvPicPr>
+            <a:picLocks noChangeAspect="1"/>
+          </p:cNvPicPr>
+          <p:nvPr/>
+        </p:nvPicPr>
+        <p:blipFill>
+          <a:blip r:embed="rId2"/>
+          <a:stretch>
+            <a:fillRect/>
+          </a:stretch>
+        </p:blipFill>
+        <p:spPr>
+          <a:xfrm>
+            <a:off x="914400" y="3671315"/>
+            <a:ext cx="1365504" cy="170688"/>
+          </a:xfrm>
+          <a:prstGeom prst="rect">
+            <a:avLst/>
+          </a:prstGeom>
+        </p:spPr>
+      </p:pic>
+      <p:sp>
+        <p:nvSpPr>
+          <p:cNvPr id="10" name="TextBox 9"/>
+          <p:cNvSpPr txBox="1"/>
+          <p:nvPr/>
+        </p:nvSpPr>
+        <p:spPr>
+          <a:xfrm>
+            <a:off x="2663952" y="3643884"/>
+            <a:ext cx="8491728" cy="225552"/>
+          </a:xfrm>
+          <a:prstGeom prst="rect">
+            <a:avLst/>
+          </a:prstGeom>
+          <a:noFill/>
+        </p:spPr>
+        <p:txBody>
+          <a:bodyPr wrap="square" anchor="ctr" lIns="38100" rIns="38100" tIns="25400" bIns="25400">
+            <a:spAutoFit/>
+          </a:bodyPr>
+          <a:lstStyle/>
+          <a:p>
+            <a:pPr algn="l">
+              <a:lnSpc>
+                <a:spcPct val="120000"/>
+              </a:lnSpc>
+              <a:spcBef>
+                <a:spcPts val="0"/>
+              </a:spcBef>
+              <a:spcAft>
+                <a:spcPts val="0"/>
+              </a:spcAft>
+            </a:pPr>
+            <a:r>
+              <a:rPr sz="1300" b="0" i="0">
+                <a:solidFill>
+                  <a:srgbClr val="5A5F68"/>
+                </a:solidFill>
+                <a:latin typeface="Noto Sans CJK KR"/>
+              </a:rPr>
+              <a:t>μ≈0.9, 과거 방향의 관성(누적)</a:t>
+            </a:r>
+          </a:p>
+        </p:txBody>
+      </p:sp>
+      <p:pic>
+        <p:nvPicPr>
+          <p:cNvPr id="11" name="Picture 10" descr="048f9f953b7deccb.png"/>
+          <p:cNvPicPr>
+            <a:picLocks noChangeAspect="1"/>
+          </p:cNvPicPr>
+          <p:nvPr/>
+        </p:nvPicPr>
+        <p:blipFill>
+          <a:blip r:embed="rId3"/>
+          <a:stretch>
+            <a:fillRect/>
+          </a:stretch>
+        </p:blipFill>
+        <p:spPr>
+          <a:xfrm>
+            <a:off x="914400" y="3988307"/>
+            <a:ext cx="1350264" cy="204216"/>
+          </a:xfrm>
+          <a:prstGeom prst="rect">
+            <a:avLst/>
+          </a:prstGeom>
+        </p:spPr>
+      </p:pic>
+      <p:sp>
+        <p:nvSpPr>
+          <p:cNvPr id="12" name="Rounded Rectangle 11"/>
           <p:cNvSpPr/>
           <p:nvPr/>
         </p:nvSpPr>
         <p:spPr>
           <a:xfrm>
-            <a:off x="502920" y="4700016"/>
-            <a:ext cx="5486400" cy="1792224"/>
+            <a:off x="502920" y="4937760"/>
+            <a:ext cx="5486400" cy="1673352"/>
           </a:xfrm>
           <a:prstGeom prst="roundRect">
             <a:avLst/>
@@ -11122,7 +12054,7 @@
               </a:spcAft>
             </a:pPr>
             <a:r>
-              <a:rPr sz="1450" b="0" i="0">
+              <a:rPr sz="1400" b="0" i="0">
                 <a:solidFill>
                   <a:srgbClr val="22252B"/>
                 </a:solidFill>
@@ -11135,14 +12067,14 @@
       </p:sp>
       <p:sp>
         <p:nvSpPr>
-          <p:cNvPr id="9" name="Rounded Rectangle 8"/>
+          <p:cNvPr id="13" name="Rounded Rectangle 12"/>
           <p:cNvSpPr/>
           <p:nvPr/>
         </p:nvSpPr>
         <p:spPr>
           <a:xfrm>
-            <a:off x="6199632" y="4700016"/>
-            <a:ext cx="5486400" cy="1792224"/>
+            <a:off x="6199632" y="4937760"/>
+            <a:ext cx="5486400" cy="1673352"/>
           </a:xfrm>
           <a:prstGeom prst="roundRect">
             <a:avLst/>
@@ -11209,7 +12141,7 @@
               </a:spcAft>
             </a:pPr>
             <a:r>
-              <a:rPr sz="1450" b="0" i="0">
+              <a:rPr sz="1400" b="0" i="0">
                 <a:solidFill>
                   <a:srgbClr val="22252B"/>
                 </a:solidFill>

--- a/seminar/TTT-seminar.pptx
+++ b/seminar/TTT-seminar.pptx
@@ -41,6 +41,17 @@
     <p:sldId id="289" r:id="rId40"/>
     <p:sldId id="290" r:id="rId41"/>
     <p:sldId id="291" r:id="rId42"/>
+    <p:sldId id="292" r:id="rId43"/>
+    <p:sldId id="293" r:id="rId44"/>
+    <p:sldId id="294" r:id="rId45"/>
+    <p:sldId id="295" r:id="rId46"/>
+    <p:sldId id="296" r:id="rId47"/>
+    <p:sldId id="297" r:id="rId48"/>
+    <p:sldId id="298" r:id="rId49"/>
+    <p:sldId id="299" r:id="rId50"/>
+    <p:sldId id="300" r:id="rId51"/>
+    <p:sldId id="301" r:id="rId52"/>
+    <p:sldId id="302" r:id="rId53"/>
   </p:sldIdLst>
   <p:sldSz cx="12191695" cy="6858000" type="screen4x3"/>
   <p:notesSz cx="6858000" cy="9144000"/>
@@ -23974,6 +23985,2349 @@
 </p:sld>
 </file>
 
+<file path=ppt/slides/slide37.xml><?xml version="1.0" encoding="utf-8"?>
+<p:sld xmlns:a="http://schemas.openxmlformats.org/drawingml/2006/main" xmlns:p="http://schemas.openxmlformats.org/presentationml/2006/main" xmlns:r="http://schemas.openxmlformats.org/officeDocument/2006/relationships">
+  <p:cSld>
+    <p:spTree>
+      <p:nvGrpSpPr>
+        <p:cNvPr id="1" name=""/>
+        <p:cNvGrpSpPr/>
+        <p:nvPr/>
+      </p:nvGrpSpPr>
+      <p:grpSpPr/>
+      <p:sp>
+        <p:nvSpPr>
+          <p:cNvPr id="2" name="Rectangle 1"/>
+          <p:cNvSpPr/>
+          <p:nvPr/>
+        </p:nvSpPr>
+        <p:spPr>
+          <a:xfrm>
+            <a:off x="0" y="0"/>
+            <a:ext cx="12191695" cy="54864"/>
+          </a:xfrm>
+          <a:prstGeom prst="rect">
+            <a:avLst/>
+          </a:prstGeom>
+          <a:solidFill>
+            <a:srgbClr val="2A9D8F"/>
+          </a:solidFill>
+          <a:ln w="12700">
+            <a:solidFill>
+              <a:srgbClr val="2A9D8F"/>
+            </a:solidFill>
+          </a:ln>
+          <a:effectLst/>
+        </p:spPr>
+        <p:style>
+          <a:lnRef idx="1">
+            <a:schemeClr val="accent1"/>
+          </a:lnRef>
+          <a:fillRef idx="3">
+            <a:schemeClr val="accent1"/>
+          </a:fillRef>
+          <a:effectRef idx="2">
+            <a:schemeClr val="accent1"/>
+          </a:effectRef>
+          <a:fontRef idx="minor">
+            <a:schemeClr val="lt1"/>
+          </a:fontRef>
+        </p:style>
+        <p:txBody>
+          <a:bodyPr rtlCol="0" anchor="ctr" wrap="square" lIns="76200" rIns="76200" tIns="38100" bIns="38100"/>
+          <a:lstStyle/>
+          <a:p>
+            <a:pPr algn="ctr">
+              <a:lnSpc>
+                <a:spcPct val="118000"/>
+              </a:lnSpc>
+              <a:spcBef>
+                <a:spcPts val="0"/>
+              </a:spcBef>
+              <a:spcAft>
+                <a:spcPts val="300"/>
+              </a:spcAft>
+            </a:pPr>
+            <a:r>
+              <a:rPr sz="1100" b="0" i="0">
+                <a:solidFill>
+                  <a:srgbClr val="22252B"/>
+                </a:solidFill>
+                <a:latin typeface="Noto Sans CJK KR"/>
+              </a:rPr>
+              <a:t/>
+            </a:r>
+          </a:p>
+        </p:txBody>
+      </p:sp>
+      <p:sp>
+        <p:nvSpPr>
+          <p:cNvPr id="3" name="TextBox 2"/>
+          <p:cNvSpPr txBox="1"/>
+          <p:nvPr/>
+        </p:nvSpPr>
+        <p:spPr>
+          <a:xfrm>
+            <a:off x="502920" y="146304"/>
+            <a:ext cx="11185855" cy="320040"/>
+          </a:xfrm>
+          <a:prstGeom prst="rect">
+            <a:avLst/>
+          </a:prstGeom>
+          <a:noFill/>
+        </p:spPr>
+        <p:txBody>
+          <a:bodyPr wrap="square" anchor="t" lIns="38100" rIns="38100" tIns="25400" bIns="25400">
+            <a:spAutoFit/>
+          </a:bodyPr>
+          <a:lstStyle/>
+          <a:p>
+            <a:pPr algn="l">
+              <a:lnSpc>
+                <a:spcPct val="120000"/>
+              </a:lnSpc>
+              <a:spcBef>
+                <a:spcPts val="0"/>
+              </a:spcBef>
+              <a:spcAft>
+                <a:spcPts val="0"/>
+              </a:spcAft>
+            </a:pPr>
+            <a:r>
+              <a:rPr sz="1350" b="1" i="0">
+                <a:solidFill>
+                  <a:srgbClr val="2A9D8F"/>
+                </a:solidFill>
+                <a:latin typeface="Noto Sans CJK KR"/>
+              </a:rPr>
+              <a:t>B6 · Sleep (2606.03979)</a:t>
+            </a:r>
+          </a:p>
+        </p:txBody>
+      </p:sp>
+      <p:sp>
+        <p:nvSpPr>
+          <p:cNvPr id="4" name="TextBox 3"/>
+          <p:cNvSpPr txBox="1"/>
+          <p:nvPr/>
+        </p:nvSpPr>
+        <p:spPr>
+          <a:xfrm>
+            <a:off x="502920" y="457200"/>
+            <a:ext cx="11185855" cy="566928"/>
+          </a:xfrm>
+          <a:prstGeom prst="rect">
+            <a:avLst/>
+          </a:prstGeom>
+          <a:noFill/>
+        </p:spPr>
+        <p:txBody>
+          <a:bodyPr wrap="square" anchor="t" lIns="38100" rIns="38100" tIns="25400" bIns="25400">
+            <a:spAutoFit/>
+          </a:bodyPr>
+          <a:lstStyle/>
+          <a:p>
+            <a:pPr algn="l">
+              <a:lnSpc>
+                <a:spcPct val="120000"/>
+              </a:lnSpc>
+              <a:spcBef>
+                <a:spcPts val="0"/>
+              </a:spcBef>
+              <a:spcAft>
+                <a:spcPts val="0"/>
+              </a:spcAft>
+            </a:pPr>
+            <a:r>
+              <a:rPr sz="2400" b="1" i="0">
+                <a:solidFill>
+                  <a:srgbClr val="22252B"/>
+                </a:solidFill>
+                <a:latin typeface="Noto Sans CJK KR"/>
+              </a:rPr>
+              <a:t>Sleep — 자는 동안 지식을 '위로' 옮겨 파라미터를 키운다</a:t>
+            </a:r>
+          </a:p>
+        </p:txBody>
+      </p:sp>
+      <p:sp>
+        <p:nvSpPr>
+          <p:cNvPr id="5" name="TextBox 4"/>
+          <p:cNvSpPr txBox="1"/>
+          <p:nvPr/>
+        </p:nvSpPr>
+        <p:spPr>
+          <a:xfrm>
+            <a:off x="502920" y="1024128"/>
+            <a:ext cx="10972800" cy="292608"/>
+          </a:xfrm>
+          <a:prstGeom prst="rect">
+            <a:avLst/>
+          </a:prstGeom>
+          <a:noFill/>
+        </p:spPr>
+        <p:txBody>
+          <a:bodyPr wrap="square" anchor="t" lIns="38100" rIns="38100" tIns="25400" bIns="25400">
+            <a:spAutoFit/>
+          </a:bodyPr>
+          <a:lstStyle/>
+          <a:p>
+            <a:pPr algn="l">
+              <a:lnSpc>
+                <a:spcPct val="120000"/>
+              </a:lnSpc>
+              <a:spcBef>
+                <a:spcPts val="0"/>
+              </a:spcBef>
+              <a:spcAft>
+                <a:spcPts val="0"/>
+              </a:spcAft>
+            </a:pPr>
+            <a:r>
+              <a:rPr sz="1400" b="1" i="0">
+                <a:solidFill>
+                  <a:srgbClr val="2A9D8F"/>
+                </a:solidFill>
+                <a:latin typeface="Noto Sans CJK KR"/>
+              </a:rPr>
+              <a:t>핵심 발명 / 주장</a:t>
+            </a:r>
+          </a:p>
+        </p:txBody>
+      </p:sp>
+      <p:sp>
+        <p:nvSpPr>
+          <p:cNvPr id="6" name="Rounded Rectangle 5"/>
+          <p:cNvSpPr/>
+          <p:nvPr/>
+        </p:nvSpPr>
+        <p:spPr>
+          <a:xfrm>
+            <a:off x="502920" y="1463040"/>
+            <a:ext cx="548640" cy="658368"/>
+          </a:xfrm>
+          <a:prstGeom prst="roundRect">
+            <a:avLst/>
+          </a:prstGeom>
+          <a:solidFill>
+            <a:srgbClr val="2A9D8F"/>
+          </a:solidFill>
+          <a:ln w="12700">
+            <a:solidFill>
+              <a:srgbClr val="2A9D8F"/>
+            </a:solidFill>
+          </a:ln>
+          <a:effectLst/>
+        </p:spPr>
+        <p:style>
+          <a:lnRef idx="1">
+            <a:schemeClr val="accent1"/>
+          </a:lnRef>
+          <a:fillRef idx="3">
+            <a:schemeClr val="accent1"/>
+          </a:fillRef>
+          <a:effectRef idx="2">
+            <a:schemeClr val="accent1"/>
+          </a:effectRef>
+          <a:fontRef idx="minor">
+            <a:schemeClr val="lt1"/>
+          </a:fontRef>
+        </p:style>
+        <p:txBody>
+          <a:bodyPr rtlCol="0" anchor="ctr" wrap="square" lIns="76200" rIns="76200" tIns="38100" bIns="38100"/>
+          <a:lstStyle/>
+          <a:p>
+            <a:pPr algn="ctr">
+              <a:lnSpc>
+                <a:spcPct val="118000"/>
+              </a:lnSpc>
+              <a:spcBef>
+                <a:spcPts val="0"/>
+              </a:spcBef>
+              <a:spcAft>
+                <a:spcPts val="300"/>
+              </a:spcAft>
+            </a:pPr>
+            <a:r>
+              <a:rPr sz="1700" b="1" i="0">
+                <a:solidFill>
+                  <a:srgbClr val="FFFFFF"/>
+                </a:solidFill>
+                <a:latin typeface="Noto Sans CJK KR"/>
+              </a:rPr>
+              <a:t>1</a:t>
+            </a:r>
+          </a:p>
+        </p:txBody>
+      </p:sp>
+      <p:sp>
+        <p:nvSpPr>
+          <p:cNvPr id="7" name="Rounded Rectangle 6"/>
+          <p:cNvSpPr/>
+          <p:nvPr/>
+        </p:nvSpPr>
+        <p:spPr>
+          <a:xfrm>
+            <a:off x="1170432" y="1463040"/>
+            <a:ext cx="10488168" cy="658368"/>
+          </a:xfrm>
+          <a:prstGeom prst="roundRect">
+            <a:avLst/>
+          </a:prstGeom>
+          <a:solidFill>
+            <a:srgbClr val="FFFFFF"/>
+          </a:solidFill>
+          <a:ln w="12700">
+            <a:solidFill>
+              <a:srgbClr val="8A8F98"/>
+            </a:solidFill>
+          </a:ln>
+          <a:effectLst/>
+        </p:spPr>
+        <p:style>
+          <a:lnRef idx="1">
+            <a:schemeClr val="accent1"/>
+          </a:lnRef>
+          <a:fillRef idx="3">
+            <a:schemeClr val="accent1"/>
+          </a:fillRef>
+          <a:effectRef idx="2">
+            <a:schemeClr val="accent1"/>
+          </a:effectRef>
+          <a:fontRef idx="minor">
+            <a:schemeClr val="lt1"/>
+          </a:fontRef>
+        </p:style>
+        <p:txBody>
+          <a:bodyPr rtlCol="0" anchor="ctr" wrap="square" lIns="76200" rIns="76200" tIns="38100" bIns="38100"/>
+          <a:lstStyle/>
+          <a:p>
+            <a:pPr algn="l">
+              <a:lnSpc>
+                <a:spcPct val="118000"/>
+              </a:lnSpc>
+              <a:spcBef>
+                <a:spcPts val="0"/>
+              </a:spcBef>
+              <a:spcAft>
+                <a:spcPts val="300"/>
+              </a:spcAft>
+            </a:pPr>
+            <a:r>
+              <a:rPr sz="1350" b="1" i="0">
+                <a:solidFill>
+                  <a:srgbClr val="2A9D8F"/>
+                </a:solidFill>
+                <a:latin typeface="Noto Sans CJK KR"/>
+              </a:rPr>
+              <a:t>wake/sleep lifecycle: 추론(wake)과 오프라인 통합(sleep)을 분리</a:t>
+            </a:r>
+          </a:p>
+          <a:p>
+            <a:pPr algn="l">
+              <a:lnSpc>
+                <a:spcPct val="118000"/>
+              </a:lnSpc>
+              <a:spcBef>
+                <a:spcPts val="0"/>
+              </a:spcBef>
+              <a:spcAft>
+                <a:spcPts val="300"/>
+              </a:spcAft>
+            </a:pPr>
+            <a:r>
+              <a:rPr sz="1200" b="0" i="0">
+                <a:solidFill>
+                  <a:srgbClr val="22252B"/>
+                </a:solidFill>
+                <a:latin typeface="Noto Sans CJK KR"/>
+              </a:rPr>
+              <a:t>sleep은 별도 오프라인 단계 — 이때는 서빙하지 않고 그동안 배운 것을 정리·통합한다</a:t>
+            </a:r>
+          </a:p>
+        </p:txBody>
+      </p:sp>
+      <p:sp>
+        <p:nvSpPr>
+          <p:cNvPr id="8" name="Rounded Rectangle 7"/>
+          <p:cNvSpPr/>
+          <p:nvPr/>
+        </p:nvSpPr>
+        <p:spPr>
+          <a:xfrm>
+            <a:off x="502920" y="2231136"/>
+            <a:ext cx="548640" cy="658368"/>
+          </a:xfrm>
+          <a:prstGeom prst="roundRect">
+            <a:avLst/>
+          </a:prstGeom>
+          <a:solidFill>
+            <a:srgbClr val="2A9D8F"/>
+          </a:solidFill>
+          <a:ln w="12700">
+            <a:solidFill>
+              <a:srgbClr val="2A9D8F"/>
+            </a:solidFill>
+          </a:ln>
+          <a:effectLst/>
+        </p:spPr>
+        <p:style>
+          <a:lnRef idx="1">
+            <a:schemeClr val="accent1"/>
+          </a:lnRef>
+          <a:fillRef idx="3">
+            <a:schemeClr val="accent1"/>
+          </a:fillRef>
+          <a:effectRef idx="2">
+            <a:schemeClr val="accent1"/>
+          </a:effectRef>
+          <a:fontRef idx="minor">
+            <a:schemeClr val="lt1"/>
+          </a:fontRef>
+        </p:style>
+        <p:txBody>
+          <a:bodyPr rtlCol="0" anchor="ctr" wrap="square" lIns="76200" rIns="76200" tIns="38100" bIns="38100"/>
+          <a:lstStyle/>
+          <a:p>
+            <a:pPr algn="ctr">
+              <a:lnSpc>
+                <a:spcPct val="118000"/>
+              </a:lnSpc>
+              <a:spcBef>
+                <a:spcPts val="0"/>
+              </a:spcBef>
+              <a:spcAft>
+                <a:spcPts val="300"/>
+              </a:spcAft>
+            </a:pPr>
+            <a:r>
+              <a:rPr sz="1700" b="1" i="0">
+                <a:solidFill>
+                  <a:srgbClr val="FFFFFF"/>
+                </a:solidFill>
+                <a:latin typeface="Noto Sans CJK KR"/>
+              </a:rPr>
+              <a:t>2</a:t>
+            </a:r>
+          </a:p>
+        </p:txBody>
+      </p:sp>
+      <p:sp>
+        <p:nvSpPr>
+          <p:cNvPr id="9" name="Rounded Rectangle 8"/>
+          <p:cNvSpPr/>
+          <p:nvPr/>
+        </p:nvSpPr>
+        <p:spPr>
+          <a:xfrm>
+            <a:off x="1170432" y="2231136"/>
+            <a:ext cx="10488168" cy="658368"/>
+          </a:xfrm>
+          <a:prstGeom prst="roundRect">
+            <a:avLst/>
+          </a:prstGeom>
+          <a:solidFill>
+            <a:srgbClr val="FFFFFF"/>
+          </a:solidFill>
+          <a:ln w="12700">
+            <a:solidFill>
+              <a:srgbClr val="8A8F98"/>
+            </a:solidFill>
+          </a:ln>
+          <a:effectLst/>
+        </p:spPr>
+        <p:style>
+          <a:lnRef idx="1">
+            <a:schemeClr val="accent1"/>
+          </a:lnRef>
+          <a:fillRef idx="3">
+            <a:schemeClr val="accent1"/>
+          </a:fillRef>
+          <a:effectRef idx="2">
+            <a:schemeClr val="accent1"/>
+          </a:effectRef>
+          <a:fontRef idx="minor">
+            <a:schemeClr val="lt1"/>
+          </a:fontRef>
+        </p:style>
+        <p:txBody>
+          <a:bodyPr rtlCol="0" anchor="ctr" wrap="square" lIns="76200" rIns="76200" tIns="38100" bIns="38100"/>
+          <a:lstStyle/>
+          <a:p>
+            <a:pPr algn="l">
+              <a:lnSpc>
+                <a:spcPct val="118000"/>
+              </a:lnSpc>
+              <a:spcBef>
+                <a:spcPts val="0"/>
+              </a:spcBef>
+              <a:spcAft>
+                <a:spcPts val="300"/>
+              </a:spcAft>
+            </a:pPr>
+            <a:r>
+              <a:rPr sz="1350" b="1" i="0">
+                <a:solidFill>
+                  <a:srgbClr val="2A9D8F"/>
+                </a:solidFill>
+                <a:latin typeface="Noto Sans CJK KR"/>
+              </a:rPr>
+              <a:t>Memory Consolidation = Knowledge Seeding: 배운 지식을 상위로 distill해 low-rank expert를 '성장'</a:t>
+            </a:r>
+          </a:p>
+          <a:p>
+            <a:pPr algn="l">
+              <a:lnSpc>
+                <a:spcPct val="118000"/>
+              </a:lnSpc>
+              <a:spcBef>
+                <a:spcPts val="0"/>
+              </a:spcBef>
+              <a:spcAft>
+                <a:spcPts val="300"/>
+              </a:spcAft>
+            </a:pPr>
+            <a:r>
+              <a:rPr sz="1200" b="0" i="0">
+                <a:solidFill>
+                  <a:srgbClr val="22252B"/>
+                </a:solidFill>
+                <a:latin typeface="Noto Sans CJK KR"/>
+              </a:rPr>
+              <a:t>NL의 online consolidation은 초기상태(reset)만 meta-learn — '학습된 diff의 위쪽 전달'은 못 했다. Sleep가 그것을 함</a:t>
+            </a:r>
+          </a:p>
+        </p:txBody>
+      </p:sp>
+      <p:sp>
+        <p:nvSpPr>
+          <p:cNvPr id="10" name="Rounded Rectangle 9"/>
+          <p:cNvSpPr/>
+          <p:nvPr/>
+        </p:nvSpPr>
+        <p:spPr>
+          <a:xfrm>
+            <a:off x="502920" y="2999232"/>
+            <a:ext cx="548640" cy="658368"/>
+          </a:xfrm>
+          <a:prstGeom prst="roundRect">
+            <a:avLst/>
+          </a:prstGeom>
+          <a:solidFill>
+            <a:srgbClr val="2A9D8F"/>
+          </a:solidFill>
+          <a:ln w="12700">
+            <a:solidFill>
+              <a:srgbClr val="2A9D8F"/>
+            </a:solidFill>
+          </a:ln>
+          <a:effectLst/>
+        </p:spPr>
+        <p:style>
+          <a:lnRef idx="1">
+            <a:schemeClr val="accent1"/>
+          </a:lnRef>
+          <a:fillRef idx="3">
+            <a:schemeClr val="accent1"/>
+          </a:fillRef>
+          <a:effectRef idx="2">
+            <a:schemeClr val="accent1"/>
+          </a:effectRef>
+          <a:fontRef idx="minor">
+            <a:schemeClr val="lt1"/>
+          </a:fontRef>
+        </p:style>
+        <p:txBody>
+          <a:bodyPr rtlCol="0" anchor="ctr" wrap="square" lIns="76200" rIns="76200" tIns="38100" bIns="38100"/>
+          <a:lstStyle/>
+          <a:p>
+            <a:pPr algn="ctr">
+              <a:lnSpc>
+                <a:spcPct val="118000"/>
+              </a:lnSpc>
+              <a:spcBef>
+                <a:spcPts val="0"/>
+              </a:spcBef>
+              <a:spcAft>
+                <a:spcPts val="300"/>
+              </a:spcAft>
+            </a:pPr>
+            <a:r>
+              <a:rPr sz="1700" b="1" i="0">
+                <a:solidFill>
+                  <a:srgbClr val="FFFFFF"/>
+                </a:solidFill>
+                <a:latin typeface="Noto Sans CJK KR"/>
+              </a:rPr>
+              <a:t>3</a:t>
+            </a:r>
+          </a:p>
+        </p:txBody>
+      </p:sp>
+      <p:sp>
+        <p:nvSpPr>
+          <p:cNvPr id="11" name="Rounded Rectangle 10"/>
+          <p:cNvSpPr/>
+          <p:nvPr/>
+        </p:nvSpPr>
+        <p:spPr>
+          <a:xfrm>
+            <a:off x="1170432" y="2999232"/>
+            <a:ext cx="10488168" cy="658368"/>
+          </a:xfrm>
+          <a:prstGeom prst="roundRect">
+            <a:avLst/>
+          </a:prstGeom>
+          <a:solidFill>
+            <a:srgbClr val="FFFFFF"/>
+          </a:solidFill>
+          <a:ln w="12700">
+            <a:solidFill>
+              <a:srgbClr val="8A8F98"/>
+            </a:solidFill>
+          </a:ln>
+          <a:effectLst/>
+        </p:spPr>
+        <p:style>
+          <a:lnRef idx="1">
+            <a:schemeClr val="accent1"/>
+          </a:lnRef>
+          <a:fillRef idx="3">
+            <a:schemeClr val="accent1"/>
+          </a:fillRef>
+          <a:effectRef idx="2">
+            <a:schemeClr val="accent1"/>
+          </a:effectRef>
+          <a:fontRef idx="minor">
+            <a:schemeClr val="lt1"/>
+          </a:fontRef>
+        </p:style>
+        <p:txBody>
+          <a:bodyPr rtlCol="0" anchor="ctr" wrap="square" lIns="76200" rIns="76200" tIns="38100" bIns="38100"/>
+          <a:lstStyle/>
+          <a:p>
+            <a:pPr algn="l">
+              <a:lnSpc>
+                <a:spcPct val="118000"/>
+              </a:lnSpc>
+              <a:spcBef>
+                <a:spcPts val="0"/>
+              </a:spcBef>
+              <a:spcAft>
+                <a:spcPts val="300"/>
+              </a:spcAft>
+            </a:pPr>
+            <a:r>
+              <a:rPr sz="1350" b="1" i="0">
+                <a:solidFill>
+                  <a:srgbClr val="2A9D8F"/>
+                </a:solidFill>
+                <a:latin typeface="Noto Sans CJK KR"/>
+              </a:rPr>
+              <a:t>Dreaming: 스스로 만든 데이터로 자기개선(SEAL식 RL)</a:t>
+            </a:r>
+          </a:p>
+          <a:p>
+            <a:pPr algn="l">
+              <a:lnSpc>
+                <a:spcPct val="118000"/>
+              </a:lnSpc>
+              <a:spcBef>
+                <a:spcPts val="0"/>
+              </a:spcBef>
+              <a:spcAft>
+                <a:spcPts val="300"/>
+              </a:spcAft>
+            </a:pPr>
+            <a:r>
+              <a:rPr sz="1200" b="0" i="0">
+                <a:solidFill>
+                  <a:srgbClr val="22252B"/>
+                </a:solidFill>
+                <a:latin typeface="Noto Sans CJK KR"/>
+              </a:rPr>
+              <a:t>teacher가 '꿈'(자기 생성 시퀀스)을 만들고 RL로 강화 — 외부 데이터 없이 능력 향상</a:t>
+            </a:r>
+          </a:p>
+        </p:txBody>
+      </p:sp>
+      <p:sp>
+        <p:nvSpPr>
+          <p:cNvPr id="12" name="Rounded Rectangle 11"/>
+          <p:cNvSpPr/>
+          <p:nvPr/>
+        </p:nvSpPr>
+        <p:spPr>
+          <a:xfrm>
+            <a:off x="502920" y="3813048"/>
+            <a:ext cx="11155680" cy="749808"/>
+          </a:xfrm>
+          <a:prstGeom prst="roundRect">
+            <a:avLst/>
+          </a:prstGeom>
+          <a:solidFill>
+            <a:srgbClr val="DBE7F3"/>
+          </a:solidFill>
+          <a:ln w="12700">
+            <a:solidFill>
+              <a:srgbClr val="2A6F97"/>
+            </a:solidFill>
+          </a:ln>
+          <a:effectLst/>
+        </p:spPr>
+        <p:style>
+          <a:lnRef idx="1">
+            <a:schemeClr val="accent1"/>
+          </a:lnRef>
+          <a:fillRef idx="3">
+            <a:schemeClr val="accent1"/>
+          </a:fillRef>
+          <a:effectRef idx="2">
+            <a:schemeClr val="accent1"/>
+          </a:effectRef>
+          <a:fontRef idx="minor">
+            <a:schemeClr val="lt1"/>
+          </a:fontRef>
+        </p:style>
+        <p:txBody>
+          <a:bodyPr rtlCol="0" anchor="ctr" wrap="square" lIns="76200" rIns="76200" tIns="38100" bIns="38100"/>
+          <a:lstStyle/>
+          <a:p>
+            <a:pPr algn="l">
+              <a:lnSpc>
+                <a:spcPct val="118000"/>
+              </a:lnSpc>
+              <a:spcBef>
+                <a:spcPts val="0"/>
+              </a:spcBef>
+              <a:spcAft>
+                <a:spcPts val="300"/>
+              </a:spcAft>
+            </a:pPr>
+            <a:r>
+              <a:rPr sz="1250" b="1" i="0">
+                <a:solidFill>
+                  <a:srgbClr val="22252B"/>
+                </a:solidFill>
+                <a:latin typeface="Noto Sans CJK KR"/>
+              </a:rPr>
+              <a:t>논거 흐름</a:t>
+            </a:r>
+          </a:p>
+          <a:p>
+            <a:pPr algn="l">
+              <a:lnSpc>
+                <a:spcPct val="118000"/>
+              </a:lnSpc>
+              <a:spcBef>
+                <a:spcPts val="0"/>
+              </a:spcBef>
+              <a:spcAft>
+                <a:spcPts val="300"/>
+              </a:spcAft>
+            </a:pPr>
+            <a:r>
+              <a:rPr sz="1200" b="0" i="0">
+                <a:solidFill>
+                  <a:srgbClr val="22252B"/>
+                </a:solidFill>
+                <a:latin typeface="Noto Sans CJK KR"/>
+              </a:rPr>
+              <a:t>NL online consolidation(초기상태 meta-learn + circle-back)은 고정 용량 한계 → 오프라인으로 파라미터 성장 → GKD(on-policy)+LTI(RL) → 새 low-rank expert만 학습(나머지 freeze) → synaptic pruning → Dreaming 자기개선</a:t>
+            </a:r>
+          </a:p>
+        </p:txBody>
+      </p:sp>
+      <p:sp>
+        <p:nvSpPr>
+          <p:cNvPr id="13" name="Rounded Rectangle 12"/>
+          <p:cNvSpPr/>
+          <p:nvPr/>
+        </p:nvSpPr>
+        <p:spPr>
+          <a:xfrm>
+            <a:off x="502920" y="4654296"/>
+            <a:ext cx="11155680" cy="658368"/>
+          </a:xfrm>
+          <a:prstGeom prst="roundRect">
+            <a:avLst/>
+          </a:prstGeom>
+          <a:solidFill>
+            <a:srgbClr val="DAF0ED"/>
+          </a:solidFill>
+          <a:ln w="12700">
+            <a:solidFill>
+              <a:srgbClr val="2A9D8F"/>
+            </a:solidFill>
+          </a:ln>
+          <a:effectLst/>
+        </p:spPr>
+        <p:style>
+          <a:lnRef idx="1">
+            <a:schemeClr val="accent1"/>
+          </a:lnRef>
+          <a:fillRef idx="3">
+            <a:schemeClr val="accent1"/>
+          </a:fillRef>
+          <a:effectRef idx="2">
+            <a:schemeClr val="accent1"/>
+          </a:effectRef>
+          <a:fontRef idx="minor">
+            <a:schemeClr val="lt1"/>
+          </a:fontRef>
+        </p:style>
+        <p:txBody>
+          <a:bodyPr rtlCol="0" anchor="ctr" wrap="square" lIns="76200" rIns="76200" tIns="38100" bIns="38100"/>
+          <a:lstStyle/>
+          <a:p>
+            <a:pPr algn="l">
+              <a:lnSpc>
+                <a:spcPct val="118000"/>
+              </a:lnSpc>
+              <a:spcBef>
+                <a:spcPts val="0"/>
+              </a:spcBef>
+              <a:spcAft>
+                <a:spcPts val="300"/>
+              </a:spcAft>
+            </a:pPr>
+            <a:r>
+              <a:rPr sz="1250" b="1" i="0">
+                <a:solidFill>
+                  <a:srgbClr val="2A9D8F"/>
+                </a:solidFill>
+                <a:latin typeface="Noto Sans CJK KR"/>
+              </a:rPr>
+              <a:t>증명 (뒤에서 논문 그림·표로)</a:t>
+            </a:r>
+          </a:p>
+          <a:p>
+            <a:pPr algn="l">
+              <a:lnSpc>
+                <a:spcPct val="118000"/>
+              </a:lnSpc>
+              <a:spcBef>
+                <a:spcPts val="0"/>
+              </a:spcBef>
+              <a:spcAft>
+                <a:spcPts val="300"/>
+              </a:spcAft>
+            </a:pPr>
+            <a:r>
+              <a:rPr sz="1200" b="0" i="0">
+                <a:solidFill>
+                  <a:srgbClr val="22252B"/>
+                </a:solidFill>
+                <a:latin typeface="Noto Sans CJK KR"/>
+              </a:rPr>
+              <a:t>class-incremental(CLINC/Banking/DBpedia) 지속학습, 메모리 레벨 효과, BABILong 등으로 통합 효과 입증</a:t>
+            </a:r>
+          </a:p>
+        </p:txBody>
+      </p:sp>
+    </p:spTree>
+  </p:cSld>
+  <p:clrMapOvr>
+    <a:masterClrMapping/>
+  </p:clrMapOvr>
+</p:sld>
+</file>
+
+<file path=ppt/slides/slide38.xml><?xml version="1.0" encoding="utf-8"?>
+<p:sld xmlns:a="http://schemas.openxmlformats.org/drawingml/2006/main" xmlns:p="http://schemas.openxmlformats.org/presentationml/2006/main" xmlns:r="http://schemas.openxmlformats.org/officeDocument/2006/relationships">
+  <p:cSld>
+    <p:spTree>
+      <p:nvGrpSpPr>
+        <p:cNvPr id="1" name=""/>
+        <p:cNvGrpSpPr/>
+        <p:nvPr/>
+      </p:nvGrpSpPr>
+      <p:grpSpPr/>
+      <p:sp>
+        <p:nvSpPr>
+          <p:cNvPr id="2" name="Rectangle 1"/>
+          <p:cNvSpPr/>
+          <p:nvPr/>
+        </p:nvSpPr>
+        <p:spPr>
+          <a:xfrm>
+            <a:off x="0" y="0"/>
+            <a:ext cx="12191695" cy="54864"/>
+          </a:xfrm>
+          <a:prstGeom prst="rect">
+            <a:avLst/>
+          </a:prstGeom>
+          <a:solidFill>
+            <a:srgbClr val="2A9D8F"/>
+          </a:solidFill>
+          <a:ln w="12700">
+            <a:solidFill>
+              <a:srgbClr val="2A9D8F"/>
+            </a:solidFill>
+          </a:ln>
+          <a:effectLst/>
+        </p:spPr>
+        <p:style>
+          <a:lnRef idx="1">
+            <a:schemeClr val="accent1"/>
+          </a:lnRef>
+          <a:fillRef idx="3">
+            <a:schemeClr val="accent1"/>
+          </a:fillRef>
+          <a:effectRef idx="2">
+            <a:schemeClr val="accent1"/>
+          </a:effectRef>
+          <a:fontRef idx="minor">
+            <a:schemeClr val="lt1"/>
+          </a:fontRef>
+        </p:style>
+        <p:txBody>
+          <a:bodyPr rtlCol="0" anchor="ctr" wrap="square" lIns="76200" rIns="76200" tIns="38100" bIns="38100"/>
+          <a:lstStyle/>
+          <a:p>
+            <a:pPr algn="ctr">
+              <a:lnSpc>
+                <a:spcPct val="118000"/>
+              </a:lnSpc>
+              <a:spcBef>
+                <a:spcPts val="0"/>
+              </a:spcBef>
+              <a:spcAft>
+                <a:spcPts val="300"/>
+              </a:spcAft>
+            </a:pPr>
+            <a:r>
+              <a:rPr sz="1100" b="0" i="0">
+                <a:solidFill>
+                  <a:srgbClr val="22252B"/>
+                </a:solidFill>
+                <a:latin typeface="Noto Sans CJK KR"/>
+              </a:rPr>
+              <a:t/>
+            </a:r>
+          </a:p>
+        </p:txBody>
+      </p:sp>
+      <p:sp>
+        <p:nvSpPr>
+          <p:cNvPr id="3" name="TextBox 2"/>
+          <p:cNvSpPr txBox="1"/>
+          <p:nvPr/>
+        </p:nvSpPr>
+        <p:spPr>
+          <a:xfrm>
+            <a:off x="502920" y="146304"/>
+            <a:ext cx="11185855" cy="320040"/>
+          </a:xfrm>
+          <a:prstGeom prst="rect">
+            <a:avLst/>
+          </a:prstGeom>
+          <a:noFill/>
+        </p:spPr>
+        <p:txBody>
+          <a:bodyPr wrap="square" anchor="t" lIns="38100" rIns="38100" tIns="25400" bIns="25400">
+            <a:spAutoFit/>
+          </a:bodyPr>
+          <a:lstStyle/>
+          <a:p>
+            <a:pPr algn="l">
+              <a:lnSpc>
+                <a:spcPct val="120000"/>
+              </a:lnSpc>
+              <a:spcBef>
+                <a:spcPts val="0"/>
+              </a:spcBef>
+              <a:spcAft>
+                <a:spcPts val="0"/>
+              </a:spcAft>
+            </a:pPr>
+            <a:r>
+              <a:rPr sz="1350" b="1" i="0">
+                <a:solidFill>
+                  <a:srgbClr val="2A9D8F"/>
+                </a:solidFill>
+                <a:latin typeface="Noto Sans CJK KR"/>
+              </a:rPr>
+              <a:t>B6 · Sleep — 통합 메커니즘</a:t>
+            </a:r>
+          </a:p>
+        </p:txBody>
+      </p:sp>
+      <p:sp>
+        <p:nvSpPr>
+          <p:cNvPr id="4" name="TextBox 3"/>
+          <p:cNvSpPr txBox="1"/>
+          <p:nvPr/>
+        </p:nvSpPr>
+        <p:spPr>
+          <a:xfrm>
+            <a:off x="502920" y="457200"/>
+            <a:ext cx="11185855" cy="566928"/>
+          </a:xfrm>
+          <a:prstGeom prst="rect">
+            <a:avLst/>
+          </a:prstGeom>
+          <a:noFill/>
+        </p:spPr>
+        <p:txBody>
+          <a:bodyPr wrap="square" anchor="t" lIns="38100" rIns="38100" tIns="25400" bIns="25400">
+            <a:spAutoFit/>
+          </a:bodyPr>
+          <a:lstStyle/>
+          <a:p>
+            <a:pPr algn="l">
+              <a:lnSpc>
+                <a:spcPct val="120000"/>
+              </a:lnSpc>
+              <a:spcBef>
+                <a:spcPts val="0"/>
+              </a:spcBef>
+              <a:spcAft>
+                <a:spcPts val="0"/>
+              </a:spcAft>
+            </a:pPr>
+            <a:r>
+              <a:rPr sz="2400" b="1" i="0">
+                <a:solidFill>
+                  <a:srgbClr val="22252B"/>
+                </a:solidFill>
+                <a:latin typeface="Noto Sans CJK KR"/>
+              </a:rPr>
+              <a:t>느린 블록에 새 저차원 expert를 키워 지식을 위로 옮긴다</a:t>
+            </a:r>
+          </a:p>
+        </p:txBody>
+      </p:sp>
+      <p:sp>
+        <p:nvSpPr>
+          <p:cNvPr id="5" name="Rectangle 4"/>
+          <p:cNvSpPr/>
+          <p:nvPr/>
+        </p:nvSpPr>
+        <p:spPr>
+          <a:xfrm>
+            <a:off x="466344" y="2006828"/>
+            <a:ext cx="5559552" cy="1472743"/>
+          </a:xfrm>
+          <a:prstGeom prst="rect">
+            <a:avLst/>
+          </a:prstGeom>
+          <a:noFill/>
+          <a:ln w="9525">
+            <a:solidFill>
+              <a:srgbClr val="8A8F98"/>
+            </a:solidFill>
+          </a:ln>
+          <a:effectLst/>
+        </p:spPr>
+        <p:style>
+          <a:lnRef idx="1">
+            <a:schemeClr val="accent1"/>
+          </a:lnRef>
+          <a:fillRef idx="3">
+            <a:schemeClr val="accent1"/>
+          </a:fillRef>
+          <a:effectRef idx="2">
+            <a:schemeClr val="accent1"/>
+          </a:effectRef>
+          <a:fontRef idx="minor">
+            <a:schemeClr val="lt1"/>
+          </a:fontRef>
+        </p:style>
+        <p:txBody>
+          <a:bodyPr rtlCol="0" anchor="ctr"/>
+          <a:lstStyle/>
+          <a:p>
+            <a:pPr algn="ctr"/>
+          </a:p>
+        </p:txBody>
+      </p:sp>
+      <p:pic>
+        <p:nvPicPr>
+          <p:cNvPr id="6" name="Picture 5" descr="fig2.png"/>
+          <p:cNvPicPr>
+            <a:picLocks noChangeAspect="1"/>
+          </p:cNvPicPr>
+          <p:nvPr/>
+        </p:nvPicPr>
+        <p:blipFill>
+          <a:blip r:embed="rId2"/>
+          <a:stretch>
+            <a:fillRect/>
+          </a:stretch>
+        </p:blipFill>
+        <p:spPr>
+          <a:xfrm>
+            <a:off x="502920" y="2043404"/>
+            <a:ext cx="5486400" cy="1399591"/>
+          </a:xfrm>
+          <a:prstGeom prst="rect">
+            <a:avLst/>
+          </a:prstGeom>
+        </p:spPr>
+      </p:pic>
+      <p:sp>
+        <p:nvSpPr>
+          <p:cNvPr id="7" name="TextBox 6"/>
+          <p:cNvSpPr txBox="1"/>
+          <p:nvPr/>
+        </p:nvSpPr>
+        <p:spPr>
+          <a:xfrm>
+            <a:off x="502920" y="4151376"/>
+            <a:ext cx="5486400" cy="420624"/>
+          </a:xfrm>
+          <a:prstGeom prst="rect">
+            <a:avLst/>
+          </a:prstGeom>
+          <a:noFill/>
+        </p:spPr>
+        <p:txBody>
+          <a:bodyPr wrap="square" anchor="t" lIns="38100" rIns="38100" tIns="25400" bIns="25400">
+            <a:spAutoFit/>
+          </a:bodyPr>
+          <a:lstStyle/>
+          <a:p>
+            <a:pPr algn="ctr">
+              <a:lnSpc>
+                <a:spcPct val="120000"/>
+              </a:lnSpc>
+              <a:spcBef>
+                <a:spcPts val="0"/>
+              </a:spcBef>
+              <a:spcAft>
+                <a:spcPts val="100"/>
+              </a:spcAft>
+            </a:pPr>
+            <a:r>
+              <a:rPr sz="1050" b="0" i="0">
+                <a:solidFill>
+                  <a:srgbClr val="22252B"/>
+                </a:solidFill>
+                <a:latin typeface="Noto Sans CJK KR"/>
+              </a:rPr>
+              <a:t>Memory Consolidation: 모델이 스스로 파라미터 수를 늘려 용량을 확장</a:t>
+            </a:r>
+          </a:p>
+          <a:p>
+            <a:pPr algn="ctr">
+              <a:lnSpc>
+                <a:spcPct val="120000"/>
+              </a:lnSpc>
+              <a:spcBef>
+                <a:spcPts val="0"/>
+              </a:spcBef>
+              <a:spcAft>
+                <a:spcPts val="100"/>
+              </a:spcAft>
+            </a:pPr>
+            <a:r>
+              <a:rPr sz="850" b="0" i="1">
+                <a:solidFill>
+                  <a:srgbClr val="5A5F68"/>
+                </a:solidFill>
+                <a:latin typeface="Noto Sans CJK KR"/>
+              </a:rPr>
+              <a:t>출처: 2606.03979 Fig.2</a:t>
+            </a:r>
+          </a:p>
+        </p:txBody>
+      </p:sp>
+      <p:sp>
+        <p:nvSpPr>
+          <p:cNvPr id="8" name="Rectangle 7"/>
+          <p:cNvSpPr/>
+          <p:nvPr/>
+        </p:nvSpPr>
+        <p:spPr>
+          <a:xfrm>
+            <a:off x="6967967" y="1335024"/>
+            <a:ext cx="3986304" cy="2816352"/>
+          </a:xfrm>
+          <a:prstGeom prst="rect">
+            <a:avLst/>
+          </a:prstGeom>
+          <a:noFill/>
+          <a:ln w="9525">
+            <a:solidFill>
+              <a:srgbClr val="8A8F98"/>
+            </a:solidFill>
+          </a:ln>
+          <a:effectLst/>
+        </p:spPr>
+        <p:style>
+          <a:lnRef idx="1">
+            <a:schemeClr val="accent1"/>
+          </a:lnRef>
+          <a:fillRef idx="3">
+            <a:schemeClr val="accent1"/>
+          </a:fillRef>
+          <a:effectRef idx="2">
+            <a:schemeClr val="accent1"/>
+          </a:effectRef>
+          <a:fontRef idx="minor">
+            <a:schemeClr val="lt1"/>
+          </a:fontRef>
+        </p:style>
+        <p:txBody>
+          <a:bodyPr rtlCol="0" anchor="ctr"/>
+          <a:lstStyle/>
+          <a:p>
+            <a:pPr algn="ctr"/>
+          </a:p>
+        </p:txBody>
+      </p:sp>
+      <p:pic>
+        <p:nvPicPr>
+          <p:cNvPr id="9" name="Picture 8" descr="fig8.png"/>
+          <p:cNvPicPr>
+            <a:picLocks noChangeAspect="1"/>
+          </p:cNvPicPr>
+          <p:nvPr/>
+        </p:nvPicPr>
+        <p:blipFill>
+          <a:blip r:embed="rId3"/>
+          <a:stretch>
+            <a:fillRect/>
+          </a:stretch>
+        </p:blipFill>
+        <p:spPr>
+          <a:xfrm>
+            <a:off x="7004543" y="1371600"/>
+            <a:ext cx="3913152" cy="2743200"/>
+          </a:xfrm>
+          <a:prstGeom prst="rect">
+            <a:avLst/>
+          </a:prstGeom>
+        </p:spPr>
+      </p:pic>
+      <p:sp>
+        <p:nvSpPr>
+          <p:cNvPr id="10" name="TextBox 9"/>
+          <p:cNvSpPr txBox="1"/>
+          <p:nvPr/>
+        </p:nvSpPr>
+        <p:spPr>
+          <a:xfrm>
+            <a:off x="6263640" y="4151376"/>
+            <a:ext cx="5394960" cy="420624"/>
+          </a:xfrm>
+          <a:prstGeom prst="rect">
+            <a:avLst/>
+          </a:prstGeom>
+          <a:noFill/>
+        </p:spPr>
+        <p:txBody>
+          <a:bodyPr wrap="square" anchor="t" lIns="38100" rIns="38100" tIns="25400" bIns="25400">
+            <a:spAutoFit/>
+          </a:bodyPr>
+          <a:lstStyle/>
+          <a:p>
+            <a:pPr algn="ctr">
+              <a:lnSpc>
+                <a:spcPct val="120000"/>
+              </a:lnSpc>
+              <a:spcBef>
+                <a:spcPts val="0"/>
+              </a:spcBef>
+              <a:spcAft>
+                <a:spcPts val="100"/>
+              </a:spcAft>
+            </a:pPr>
+            <a:r>
+              <a:rPr sz="1050" b="0" i="0">
+                <a:solidFill>
+                  <a:srgbClr val="22252B"/>
+                </a:solidFill>
+                <a:latin typeface="Noto Sans CJK KR"/>
+              </a:rPr>
+              <a:t>Sleep cycle마다 router가 새 expert를 선택·갱신(왼→오른쪽)</a:t>
+            </a:r>
+          </a:p>
+          <a:p>
+            <a:pPr algn="ctr">
+              <a:lnSpc>
+                <a:spcPct val="120000"/>
+              </a:lnSpc>
+              <a:spcBef>
+                <a:spcPts val="0"/>
+              </a:spcBef>
+              <a:spcAft>
+                <a:spcPts val="100"/>
+              </a:spcAft>
+            </a:pPr>
+            <a:r>
+              <a:rPr sz="850" b="0" i="1">
+                <a:solidFill>
+                  <a:srgbClr val="5A5F68"/>
+                </a:solidFill>
+                <a:latin typeface="Noto Sans CJK KR"/>
+              </a:rPr>
+              <a:t>출처: 2606.03979 Fig.8</a:t>
+            </a:r>
+          </a:p>
+        </p:txBody>
+      </p:sp>
+      <p:sp>
+        <p:nvSpPr>
+          <p:cNvPr id="11" name="Rounded Rectangle 10"/>
+          <p:cNvSpPr/>
+          <p:nvPr/>
+        </p:nvSpPr>
+        <p:spPr>
+          <a:xfrm>
+            <a:off x="502920" y="4709160"/>
+            <a:ext cx="11155680" cy="960120"/>
+          </a:xfrm>
+          <a:prstGeom prst="roundRect">
+            <a:avLst/>
+          </a:prstGeom>
+          <a:solidFill>
+            <a:srgbClr val="DBE7F3"/>
+          </a:solidFill>
+          <a:ln w="12700">
+            <a:solidFill>
+              <a:srgbClr val="2A6F97"/>
+            </a:solidFill>
+          </a:ln>
+          <a:effectLst/>
+        </p:spPr>
+        <p:style>
+          <a:lnRef idx="1">
+            <a:schemeClr val="accent1"/>
+          </a:lnRef>
+          <a:fillRef idx="3">
+            <a:schemeClr val="accent1"/>
+          </a:fillRef>
+          <a:effectRef idx="2">
+            <a:schemeClr val="accent1"/>
+          </a:effectRef>
+          <a:fontRef idx="minor">
+            <a:schemeClr val="lt1"/>
+          </a:fontRef>
+        </p:style>
+        <p:txBody>
+          <a:bodyPr rtlCol="0" anchor="ctr" wrap="square" lIns="76200" rIns="76200" tIns="38100" bIns="38100"/>
+          <a:lstStyle/>
+          <a:p>
+            <a:pPr algn="l">
+              <a:lnSpc>
+                <a:spcPct val="118000"/>
+              </a:lnSpc>
+              <a:spcBef>
+                <a:spcPts val="0"/>
+              </a:spcBef>
+              <a:spcAft>
+                <a:spcPts val="200"/>
+              </a:spcAft>
+            </a:pPr>
+            <a:r>
+              <a:rPr sz="1250" b="1" i="0">
+                <a:solidFill>
+                  <a:srgbClr val="2A6F97"/>
+                </a:solidFill>
+                <a:latin typeface="Noto Sans CJK KR"/>
+              </a:rPr>
+              <a:t>B5(HOPE)와의 연결 — 빠진 조각</a:t>
+            </a:r>
+          </a:p>
+          <a:p>
+            <a:pPr algn="l">
+              <a:lnSpc>
+                <a:spcPct val="118000"/>
+              </a:lnSpc>
+              <a:spcBef>
+                <a:spcPts val="0"/>
+              </a:spcBef>
+              <a:spcAft>
+                <a:spcPts val="300"/>
+              </a:spcAft>
+            </a:pPr>
+            <a:r>
+              <a:rPr sz="1200" b="0" i="0">
+                <a:solidFill>
+                  <a:srgbClr val="22252B"/>
+                </a:solidFill>
+                <a:latin typeface="Noto Sans CJK KR"/>
+              </a:rPr>
+              <a:t>HOPE의 CMS는 '느린 블록이 빠른 블록의 리셋 초기값'을 줄 뿐(런타임 diff 전달 아님). Sleep는 오프라인에서 빠른(고주파) 메모리가 배운 것을 새 low-rank expert로 만들어 느린 블록에 '실제로' 얹는다 = 위쪽 전달.</a:t>
+            </a:r>
+          </a:p>
+        </p:txBody>
+      </p:sp>
+    </p:spTree>
+  </p:cSld>
+  <p:clrMapOvr>
+    <a:masterClrMapping/>
+  </p:clrMapOvr>
+</p:sld>
+</file>
+
+<file path=ppt/slides/slide39.xml><?xml version="1.0" encoding="utf-8"?>
+<p:sld xmlns:a="http://schemas.openxmlformats.org/drawingml/2006/main" xmlns:p="http://schemas.openxmlformats.org/presentationml/2006/main" xmlns:r="http://schemas.openxmlformats.org/officeDocument/2006/relationships">
+  <p:cSld>
+    <p:spTree>
+      <p:nvGrpSpPr>
+        <p:cNvPr id="1" name=""/>
+        <p:cNvGrpSpPr/>
+        <p:nvPr/>
+      </p:nvGrpSpPr>
+      <p:grpSpPr/>
+      <p:sp>
+        <p:nvSpPr>
+          <p:cNvPr id="2" name="Rectangle 1"/>
+          <p:cNvSpPr/>
+          <p:nvPr/>
+        </p:nvSpPr>
+        <p:spPr>
+          <a:xfrm>
+            <a:off x="0" y="0"/>
+            <a:ext cx="12191695" cy="54864"/>
+          </a:xfrm>
+          <a:prstGeom prst="rect">
+            <a:avLst/>
+          </a:prstGeom>
+          <a:solidFill>
+            <a:srgbClr val="2A9D8F"/>
+          </a:solidFill>
+          <a:ln w="12700">
+            <a:solidFill>
+              <a:srgbClr val="2A9D8F"/>
+            </a:solidFill>
+          </a:ln>
+          <a:effectLst/>
+        </p:spPr>
+        <p:style>
+          <a:lnRef idx="1">
+            <a:schemeClr val="accent1"/>
+          </a:lnRef>
+          <a:fillRef idx="3">
+            <a:schemeClr val="accent1"/>
+          </a:fillRef>
+          <a:effectRef idx="2">
+            <a:schemeClr val="accent1"/>
+          </a:effectRef>
+          <a:fontRef idx="minor">
+            <a:schemeClr val="lt1"/>
+          </a:fontRef>
+        </p:style>
+        <p:txBody>
+          <a:bodyPr rtlCol="0" anchor="ctr" wrap="square" lIns="76200" rIns="76200" tIns="38100" bIns="38100"/>
+          <a:lstStyle/>
+          <a:p>
+            <a:pPr algn="ctr">
+              <a:lnSpc>
+                <a:spcPct val="118000"/>
+              </a:lnSpc>
+              <a:spcBef>
+                <a:spcPts val="0"/>
+              </a:spcBef>
+              <a:spcAft>
+                <a:spcPts val="300"/>
+              </a:spcAft>
+            </a:pPr>
+            <a:r>
+              <a:rPr sz="1100" b="0" i="0">
+                <a:solidFill>
+                  <a:srgbClr val="22252B"/>
+                </a:solidFill>
+                <a:latin typeface="Noto Sans CJK KR"/>
+              </a:rPr>
+              <a:t/>
+            </a:r>
+          </a:p>
+        </p:txBody>
+      </p:sp>
+      <p:sp>
+        <p:nvSpPr>
+          <p:cNvPr id="3" name="TextBox 2"/>
+          <p:cNvSpPr txBox="1"/>
+          <p:nvPr/>
+        </p:nvSpPr>
+        <p:spPr>
+          <a:xfrm>
+            <a:off x="502920" y="146304"/>
+            <a:ext cx="11185855" cy="320040"/>
+          </a:xfrm>
+          <a:prstGeom prst="rect">
+            <a:avLst/>
+          </a:prstGeom>
+          <a:noFill/>
+        </p:spPr>
+        <p:txBody>
+          <a:bodyPr wrap="square" anchor="t" lIns="38100" rIns="38100" tIns="25400" bIns="25400">
+            <a:spAutoFit/>
+          </a:bodyPr>
+          <a:lstStyle/>
+          <a:p>
+            <a:pPr algn="l">
+              <a:lnSpc>
+                <a:spcPct val="120000"/>
+              </a:lnSpc>
+              <a:spcBef>
+                <a:spcPts val="0"/>
+              </a:spcBef>
+              <a:spcAft>
+                <a:spcPts val="0"/>
+              </a:spcAft>
+            </a:pPr>
+            <a:r>
+              <a:rPr sz="1350" b="1" i="0">
+                <a:solidFill>
+                  <a:srgbClr val="2A9D8F"/>
+                </a:solidFill>
+                <a:latin typeface="Noto Sans CJK KR"/>
+              </a:rPr>
+              <a:t>B6 · Sleep — 데이터는 어떻게 만드나</a:t>
+            </a:r>
+          </a:p>
+        </p:txBody>
+      </p:sp>
+      <p:sp>
+        <p:nvSpPr>
+          <p:cNvPr id="4" name="TextBox 3"/>
+          <p:cNvSpPr txBox="1"/>
+          <p:nvPr/>
+        </p:nvSpPr>
+        <p:spPr>
+          <a:xfrm>
+            <a:off x="502920" y="457200"/>
+            <a:ext cx="11185855" cy="566928"/>
+          </a:xfrm>
+          <a:prstGeom prst="rect">
+            <a:avLst/>
+          </a:prstGeom>
+          <a:noFill/>
+        </p:spPr>
+        <p:txBody>
+          <a:bodyPr wrap="square" anchor="t" lIns="38100" rIns="38100" tIns="25400" bIns="25400">
+            <a:spAutoFit/>
+          </a:bodyPr>
+          <a:lstStyle/>
+          <a:p>
+            <a:pPr algn="l">
+              <a:lnSpc>
+                <a:spcPct val="120000"/>
+              </a:lnSpc>
+              <a:spcBef>
+                <a:spcPts val="0"/>
+              </a:spcBef>
+              <a:spcAft>
+                <a:spcPts val="0"/>
+              </a:spcAft>
+            </a:pPr>
+            <a:r>
+              <a:rPr sz="2400" b="1" i="0">
+                <a:solidFill>
+                  <a:srgbClr val="22252B"/>
+                </a:solidFill>
+                <a:latin typeface="Noto Sans CJK KR"/>
+              </a:rPr>
+              <a:t>전부 오프라인·자기생성: teacher→student, GKD + RL</a:t>
+            </a:r>
+          </a:p>
+        </p:txBody>
+      </p:sp>
+      <p:sp>
+        <p:nvSpPr>
+          <p:cNvPr id="5" name="Rounded Rectangle 4"/>
+          <p:cNvSpPr/>
+          <p:nvPr/>
+        </p:nvSpPr>
+        <p:spPr>
+          <a:xfrm>
+            <a:off x="502920" y="1463040"/>
+            <a:ext cx="2468880" cy="1097280"/>
+          </a:xfrm>
+          <a:prstGeom prst="roundRect">
+            <a:avLst/>
+          </a:prstGeom>
+          <a:solidFill>
+            <a:srgbClr val="DAF0ED"/>
+          </a:solidFill>
+          <a:ln w="12700">
+            <a:solidFill>
+              <a:srgbClr val="2A9D8F"/>
+            </a:solidFill>
+          </a:ln>
+          <a:effectLst/>
+        </p:spPr>
+        <p:style>
+          <a:lnRef idx="1">
+            <a:schemeClr val="accent1"/>
+          </a:lnRef>
+          <a:fillRef idx="3">
+            <a:schemeClr val="accent1"/>
+          </a:fillRef>
+          <a:effectRef idx="2">
+            <a:schemeClr val="accent1"/>
+          </a:effectRef>
+          <a:fontRef idx="minor">
+            <a:schemeClr val="lt1"/>
+          </a:fontRef>
+        </p:style>
+        <p:txBody>
+          <a:bodyPr rtlCol="0" anchor="ctr" wrap="square" lIns="76200" rIns="76200" tIns="38100" bIns="38100"/>
+          <a:lstStyle/>
+          <a:p>
+            <a:pPr algn="ctr">
+              <a:lnSpc>
+                <a:spcPct val="118000"/>
+              </a:lnSpc>
+              <a:spcBef>
+                <a:spcPts val="0"/>
+              </a:spcBef>
+              <a:spcAft>
+                <a:spcPts val="300"/>
+              </a:spcAft>
+            </a:pPr>
+            <a:r>
+              <a:rPr sz="1400" b="1" i="0">
+                <a:solidFill>
+                  <a:srgbClr val="2A9D8F"/>
+                </a:solidFill>
+                <a:latin typeface="Noto Sans CJK KR"/>
+              </a:rPr>
+              <a:t>Teacher</a:t>
+            </a:r>
+          </a:p>
+          <a:p>
+            <a:pPr algn="ctr">
+              <a:lnSpc>
+                <a:spcPct val="118000"/>
+              </a:lnSpc>
+              <a:spcBef>
+                <a:spcPts val="0"/>
+              </a:spcBef>
+              <a:spcAft>
+                <a:spcPts val="300"/>
+              </a:spcAft>
+            </a:pPr>
+            <a:r>
+              <a:rPr sz="1100" b="0" i="0">
+                <a:solidFill>
+                  <a:srgbClr val="22252B"/>
+                </a:solidFill>
+                <a:latin typeface="Noto Sans CJK KR"/>
+              </a:rPr>
+              <a:t>현재 모델 LM_θ</a:t>
+            </a:r>
+          </a:p>
+          <a:p>
+            <a:pPr algn="ctr">
+              <a:lnSpc>
+                <a:spcPct val="118000"/>
+              </a:lnSpc>
+              <a:spcBef>
+                <a:spcPts val="0"/>
+              </a:spcBef>
+              <a:spcAft>
+                <a:spcPts val="300"/>
+              </a:spcAft>
+            </a:pPr>
+            <a:r>
+              <a:rPr sz="1100" b="0" i="0">
+                <a:solidFill>
+                  <a:srgbClr val="5A5F68"/>
+                </a:solidFill>
+                <a:latin typeface="Noto Sans CJK KR"/>
+              </a:rPr>
+              <a:t>샘플·'꿈' 생성</a:t>
+            </a:r>
+          </a:p>
+        </p:txBody>
+      </p:sp>
+      <p:cxnSp>
+        <p:nvCxnSpPr>
+          <p:cNvPr id="6" name="Connector 5"/>
+          <p:cNvCxnSpPr/>
+          <p:nvPr/>
+        </p:nvCxnSpPr>
+        <p:spPr>
+          <a:xfrm>
+            <a:off x="3017520" y="2011680"/>
+            <a:ext cx="868680" cy="0"/>
+          </a:xfrm>
+          <a:prstGeom prst="line">
+            <a:avLst/>
+          </a:prstGeom>
+          <a:ln w="22860">
+            <a:solidFill>
+              <a:srgbClr val="22252B"/>
+            </a:solidFill>
+            <a:tailEnd type="triangle" w="med" h="med"/>
+          </a:ln>
+        </p:spPr>
+        <p:style>
+          <a:lnRef idx="2">
+            <a:schemeClr val="accent1"/>
+          </a:lnRef>
+          <a:fillRef idx="0">
+            <a:schemeClr val="accent1"/>
+          </a:fillRef>
+          <a:effectRef idx="1">
+            <a:schemeClr val="accent1"/>
+          </a:effectRef>
+          <a:fontRef idx="minor">
+            <a:schemeClr val="tx1"/>
+          </a:fontRef>
+        </p:style>
+      </p:cxnSp>
+      <p:sp>
+        <p:nvSpPr>
+          <p:cNvPr id="7" name="Rounded Rectangle 6"/>
+          <p:cNvSpPr/>
+          <p:nvPr/>
+        </p:nvSpPr>
+        <p:spPr>
+          <a:xfrm>
+            <a:off x="3977639" y="1463040"/>
+            <a:ext cx="2468880" cy="1097280"/>
+          </a:xfrm>
+          <a:prstGeom prst="roundRect">
+            <a:avLst/>
+          </a:prstGeom>
+          <a:solidFill>
+            <a:srgbClr val="F6ECC7"/>
+          </a:solidFill>
+          <a:ln w="12700">
+            <a:solidFill>
+              <a:srgbClr val="C9A227"/>
+            </a:solidFill>
+          </a:ln>
+          <a:effectLst/>
+        </p:spPr>
+        <p:style>
+          <a:lnRef idx="1">
+            <a:schemeClr val="accent1"/>
+          </a:lnRef>
+          <a:fillRef idx="3">
+            <a:schemeClr val="accent1"/>
+          </a:fillRef>
+          <a:effectRef idx="2">
+            <a:schemeClr val="accent1"/>
+          </a:effectRef>
+          <a:fontRef idx="minor">
+            <a:schemeClr val="lt1"/>
+          </a:fontRef>
+        </p:style>
+        <p:txBody>
+          <a:bodyPr rtlCol="0" anchor="ctr" wrap="square" lIns="76200" rIns="76200" tIns="38100" bIns="38100"/>
+          <a:lstStyle/>
+          <a:p>
+            <a:pPr algn="ctr">
+              <a:lnSpc>
+                <a:spcPct val="118000"/>
+              </a:lnSpc>
+              <a:spcBef>
+                <a:spcPts val="0"/>
+              </a:spcBef>
+              <a:spcAft>
+                <a:spcPts val="300"/>
+              </a:spcAft>
+            </a:pPr>
+            <a:r>
+              <a:rPr sz="1400" b="1" i="0">
+                <a:solidFill>
+                  <a:srgbClr val="C9A227"/>
+                </a:solidFill>
+                <a:latin typeface="Noto Sans CJK KR"/>
+              </a:rPr>
+              <a:t>Student</a:t>
+            </a:r>
+          </a:p>
+          <a:p>
+            <a:pPr algn="ctr">
+              <a:lnSpc>
+                <a:spcPct val="118000"/>
+              </a:lnSpc>
+              <a:spcBef>
+                <a:spcPts val="0"/>
+              </a:spcBef>
+              <a:spcAft>
+                <a:spcPts val="300"/>
+              </a:spcAft>
+            </a:pPr>
+            <a:r>
+              <a:rPr sz="1100" b="0" i="0">
+                <a:solidFill>
+                  <a:srgbClr val="22252B"/>
+                </a:solidFill>
+                <a:latin typeface="Noto Sans CJK KR"/>
+              </a:rPr>
+              <a:t>새 low-rank expert</a:t>
+            </a:r>
+          </a:p>
+          <a:p>
+            <a:pPr algn="ctr">
+              <a:lnSpc>
+                <a:spcPct val="118000"/>
+              </a:lnSpc>
+              <a:spcBef>
+                <a:spcPts val="0"/>
+              </a:spcBef>
+              <a:spcAft>
+                <a:spcPts val="300"/>
+              </a:spcAft>
+            </a:pPr>
+            <a:r>
+              <a:rPr sz="1100" b="0" i="0">
+                <a:solidFill>
+                  <a:srgbClr val="5A5F68"/>
+                </a:solidFill>
+                <a:latin typeface="Noto Sans Mono CJK KR"/>
+              </a:rPr>
+              <a:t>{A: d×r, B: r×d}</a:t>
+            </a:r>
+          </a:p>
+        </p:txBody>
+      </p:sp>
+      <p:cxnSp>
+        <p:nvCxnSpPr>
+          <p:cNvPr id="8" name="Connector 7"/>
+          <p:cNvCxnSpPr/>
+          <p:nvPr/>
+        </p:nvCxnSpPr>
+        <p:spPr>
+          <a:xfrm>
+            <a:off x="6492240" y="2011680"/>
+            <a:ext cx="868680" cy="0"/>
+          </a:xfrm>
+          <a:prstGeom prst="line">
+            <a:avLst/>
+          </a:prstGeom>
+          <a:ln w="22860">
+            <a:solidFill>
+              <a:srgbClr val="22252B"/>
+            </a:solidFill>
+            <a:tailEnd type="triangle" w="med" h="med"/>
+          </a:ln>
+        </p:spPr>
+        <p:style>
+          <a:lnRef idx="2">
+            <a:schemeClr val="accent1"/>
+          </a:lnRef>
+          <a:fillRef idx="0">
+            <a:schemeClr val="accent1"/>
+          </a:fillRef>
+          <a:effectRef idx="1">
+            <a:schemeClr val="accent1"/>
+          </a:effectRef>
+          <a:fontRef idx="minor">
+            <a:schemeClr val="tx1"/>
+          </a:fontRef>
+        </p:style>
+      </p:cxnSp>
+      <p:sp>
+        <p:nvSpPr>
+          <p:cNvPr id="9" name="Rounded Rectangle 8"/>
+          <p:cNvSpPr/>
+          <p:nvPr/>
+        </p:nvSpPr>
+        <p:spPr>
+          <a:xfrm>
+            <a:off x="7452360" y="1463040"/>
+            <a:ext cx="4206240" cy="1097280"/>
+          </a:xfrm>
+          <a:prstGeom prst="roundRect">
+            <a:avLst/>
+          </a:prstGeom>
+          <a:solidFill>
+            <a:srgbClr val="F6DDDD"/>
+          </a:solidFill>
+          <a:ln w="12700">
+            <a:solidFill>
+              <a:srgbClr val="C1121F"/>
+            </a:solidFill>
+          </a:ln>
+          <a:effectLst/>
+        </p:spPr>
+        <p:style>
+          <a:lnRef idx="1">
+            <a:schemeClr val="accent1"/>
+          </a:lnRef>
+          <a:fillRef idx="3">
+            <a:schemeClr val="accent1"/>
+          </a:fillRef>
+          <a:effectRef idx="2">
+            <a:schemeClr val="accent1"/>
+          </a:effectRef>
+          <a:fontRef idx="minor">
+            <a:schemeClr val="lt1"/>
+          </a:fontRef>
+        </p:style>
+        <p:txBody>
+          <a:bodyPr rtlCol="0" anchor="ctr" wrap="square" lIns="76200" rIns="76200" tIns="38100" bIns="38100"/>
+          <a:lstStyle/>
+          <a:p>
+            <a:pPr algn="ctr">
+              <a:lnSpc>
+                <a:spcPct val="118000"/>
+              </a:lnSpc>
+              <a:spcBef>
+                <a:spcPts val="0"/>
+              </a:spcBef>
+              <a:spcAft>
+                <a:spcPts val="300"/>
+              </a:spcAft>
+            </a:pPr>
+            <a:r>
+              <a:rPr sz="1400" b="1" i="0">
+                <a:solidFill>
+                  <a:srgbClr val="C1121F"/>
+                </a:solidFill>
+                <a:latin typeface="Noto Sans CJK KR"/>
+              </a:rPr>
+              <a:t>학습 신호</a:t>
+            </a:r>
+          </a:p>
+          <a:p>
+            <a:pPr algn="ctr">
+              <a:lnSpc>
+                <a:spcPct val="118000"/>
+              </a:lnSpc>
+              <a:spcBef>
+                <a:spcPts val="0"/>
+              </a:spcBef>
+              <a:spcAft>
+                <a:spcPts val="300"/>
+              </a:spcAft>
+            </a:pPr>
+            <a:r>
+              <a:rPr sz="1100" b="0" i="0">
+                <a:solidFill>
+                  <a:srgbClr val="22252B"/>
+                </a:solidFill>
+                <a:latin typeface="Noto Sans CJK KR"/>
+              </a:rPr>
+              <a:t>GKD(on-policy rollout) + RL(LTI)</a:t>
+            </a:r>
+          </a:p>
+          <a:p>
+            <a:pPr algn="ctr">
+              <a:lnSpc>
+                <a:spcPct val="118000"/>
+              </a:lnSpc>
+              <a:spcBef>
+                <a:spcPts val="0"/>
+              </a:spcBef>
+              <a:spcAft>
+                <a:spcPts val="300"/>
+              </a:spcAft>
+            </a:pPr>
+            <a:r>
+              <a:rPr sz="1100" b="0" i="0">
+                <a:solidFill>
+                  <a:srgbClr val="5A5F68"/>
+                </a:solidFill>
+                <a:latin typeface="Noto Sans CJK KR"/>
+              </a:rPr>
+              <a:t>보상=Levenshtein·의미 유사도</a:t>
+            </a:r>
+          </a:p>
+        </p:txBody>
+      </p:sp>
+      <p:sp>
+        <p:nvSpPr>
+          <p:cNvPr id="10" name="Rounded Rectangle 9"/>
+          <p:cNvSpPr/>
+          <p:nvPr/>
+        </p:nvSpPr>
+        <p:spPr>
+          <a:xfrm>
+            <a:off x="502920" y="2880360"/>
+            <a:ext cx="11155680" cy="749808"/>
+          </a:xfrm>
+          <a:prstGeom prst="roundRect">
+            <a:avLst/>
+          </a:prstGeom>
+          <a:solidFill>
+            <a:srgbClr val="FFFFFF"/>
+          </a:solidFill>
+          <a:ln w="12700">
+            <a:solidFill>
+              <a:srgbClr val="8A8F98"/>
+            </a:solidFill>
+          </a:ln>
+          <a:effectLst/>
+        </p:spPr>
+        <p:style>
+          <a:lnRef idx="1">
+            <a:schemeClr val="accent1"/>
+          </a:lnRef>
+          <a:fillRef idx="3">
+            <a:schemeClr val="accent1"/>
+          </a:fillRef>
+          <a:effectRef idx="2">
+            <a:schemeClr val="accent1"/>
+          </a:effectRef>
+          <a:fontRef idx="minor">
+            <a:schemeClr val="lt1"/>
+          </a:fontRef>
+        </p:style>
+        <p:txBody>
+          <a:bodyPr rtlCol="0" anchor="ctr" wrap="square" lIns="76200" rIns="76200" tIns="38100" bIns="38100"/>
+          <a:lstStyle/>
+          <a:p>
+            <a:pPr algn="l">
+              <a:lnSpc>
+                <a:spcPct val="118000"/>
+              </a:lnSpc>
+              <a:spcBef>
+                <a:spcPts val="0"/>
+              </a:spcBef>
+              <a:spcAft>
+                <a:spcPts val="300"/>
+              </a:spcAft>
+            </a:pPr>
+            <a:r>
+              <a:rPr sz="1250" b="1" i="0">
+                <a:solidFill>
+                  <a:srgbClr val="2A9D8F"/>
+                </a:solidFill>
+                <a:latin typeface="Noto Sans CJK KR"/>
+              </a:rPr>
+              <a:t>Knowledge Seeding (통합)  </a:t>
+            </a:r>
+          </a:p>
+          <a:p>
+            <a:pPr algn="l">
+              <a:lnSpc>
+                <a:spcPct val="118000"/>
+              </a:lnSpc>
+              <a:spcBef>
+                <a:spcPts val="0"/>
+              </a:spcBef>
+              <a:spcAft>
+                <a:spcPts val="300"/>
+              </a:spcAft>
+            </a:pPr>
+            <a:r>
+              <a:rPr sz="1150" b="0" i="0">
+                <a:solidFill>
+                  <a:srgbClr val="22252B"/>
+                </a:solidFill>
+                <a:latin typeface="Noto Sans CJK KR"/>
+              </a:rPr>
+              <a:t>teacher가 만든 on-policy 데이터로 student를 GKD. 새 expert만 backward(나머지 freeze). router가 새 expert를 활성화.</a:t>
+            </a:r>
+          </a:p>
+        </p:txBody>
+      </p:sp>
+      <p:sp>
+        <p:nvSpPr>
+          <p:cNvPr id="11" name="Rounded Rectangle 10"/>
+          <p:cNvSpPr/>
+          <p:nvPr/>
+        </p:nvSpPr>
+        <p:spPr>
+          <a:xfrm>
+            <a:off x="502920" y="3703320"/>
+            <a:ext cx="11155680" cy="749808"/>
+          </a:xfrm>
+          <a:prstGeom prst="roundRect">
+            <a:avLst/>
+          </a:prstGeom>
+          <a:solidFill>
+            <a:srgbClr val="FFFFFF"/>
+          </a:solidFill>
+          <a:ln w="12700">
+            <a:solidFill>
+              <a:srgbClr val="8A8F98"/>
+            </a:solidFill>
+          </a:ln>
+          <a:effectLst/>
+        </p:spPr>
+        <p:style>
+          <a:lnRef idx="1">
+            <a:schemeClr val="accent1"/>
+          </a:lnRef>
+          <a:fillRef idx="3">
+            <a:schemeClr val="accent1"/>
+          </a:fillRef>
+          <a:effectRef idx="2">
+            <a:schemeClr val="accent1"/>
+          </a:effectRef>
+          <a:fontRef idx="minor">
+            <a:schemeClr val="lt1"/>
+          </a:fontRef>
+        </p:style>
+        <p:txBody>
+          <a:bodyPr rtlCol="0" anchor="ctr" wrap="square" lIns="76200" rIns="76200" tIns="38100" bIns="38100"/>
+          <a:lstStyle/>
+          <a:p>
+            <a:pPr algn="l">
+              <a:lnSpc>
+                <a:spcPct val="118000"/>
+              </a:lnSpc>
+              <a:spcBef>
+                <a:spcPts val="0"/>
+              </a:spcBef>
+              <a:spcAft>
+                <a:spcPts val="300"/>
+              </a:spcAft>
+            </a:pPr>
+            <a:r>
+              <a:rPr sz="1250" b="1" i="0">
+                <a:solidFill>
+                  <a:srgbClr val="2A9D8F"/>
+                </a:solidFill>
+                <a:latin typeface="Noto Sans CJK KR"/>
+              </a:rPr>
+              <a:t>LTI — RL 파트  </a:t>
+            </a:r>
+          </a:p>
+          <a:p>
+            <a:pPr algn="l">
+              <a:lnSpc>
+                <a:spcPct val="118000"/>
+              </a:lnSpc>
+              <a:spcBef>
+                <a:spcPts val="0"/>
+              </a:spcBef>
+              <a:spcAft>
+                <a:spcPts val="300"/>
+              </a:spcAft>
+            </a:pPr>
+            <a:r>
+              <a:rPr sz="1150" b="0" i="0">
+                <a:solidFill>
+                  <a:srgbClr val="22252B"/>
+                </a:solidFill>
+                <a:latin typeface="Noto Sans CJK KR"/>
+              </a:rPr>
+              <a:t>정답 시퀀스와의 Levenshtein/의미 보상으로 policy-gradient. 미분 불가한 목표를 RL로.</a:t>
+            </a:r>
+          </a:p>
+        </p:txBody>
+      </p:sp>
+      <p:sp>
+        <p:nvSpPr>
+          <p:cNvPr id="12" name="Rounded Rectangle 11"/>
+          <p:cNvSpPr/>
+          <p:nvPr/>
+        </p:nvSpPr>
+        <p:spPr>
+          <a:xfrm>
+            <a:off x="502920" y="4526280"/>
+            <a:ext cx="11155680" cy="749808"/>
+          </a:xfrm>
+          <a:prstGeom prst="roundRect">
+            <a:avLst/>
+          </a:prstGeom>
+          <a:solidFill>
+            <a:srgbClr val="FFFFFF"/>
+          </a:solidFill>
+          <a:ln w="12700">
+            <a:solidFill>
+              <a:srgbClr val="8A8F98"/>
+            </a:solidFill>
+          </a:ln>
+          <a:effectLst/>
+        </p:spPr>
+        <p:style>
+          <a:lnRef idx="1">
+            <a:schemeClr val="accent1"/>
+          </a:lnRef>
+          <a:fillRef idx="3">
+            <a:schemeClr val="accent1"/>
+          </a:fillRef>
+          <a:effectRef idx="2">
+            <a:schemeClr val="accent1"/>
+          </a:effectRef>
+          <a:fontRef idx="minor">
+            <a:schemeClr val="lt1"/>
+          </a:fontRef>
+        </p:style>
+        <p:txBody>
+          <a:bodyPr rtlCol="0" anchor="ctr" wrap="square" lIns="76200" rIns="76200" tIns="38100" bIns="38100"/>
+          <a:lstStyle/>
+          <a:p>
+            <a:pPr algn="l">
+              <a:lnSpc>
+                <a:spcPct val="118000"/>
+              </a:lnSpc>
+              <a:spcBef>
+                <a:spcPts val="0"/>
+              </a:spcBef>
+              <a:spcAft>
+                <a:spcPts val="300"/>
+              </a:spcAft>
+            </a:pPr>
+            <a:r>
+              <a:rPr sz="1250" b="1" i="0">
+                <a:solidFill>
+                  <a:srgbClr val="2A9D8F"/>
+                </a:solidFill>
+                <a:latin typeface="Noto Sans CJK KR"/>
+              </a:rPr>
+              <a:t>Dreaming (자기개선)  </a:t>
+            </a:r>
+          </a:p>
+          <a:p>
+            <a:pPr algn="l">
+              <a:lnSpc>
+                <a:spcPct val="118000"/>
+              </a:lnSpc>
+              <a:spcBef>
+                <a:spcPts val="0"/>
+              </a:spcBef>
+              <a:spcAft>
+                <a:spcPts val="300"/>
+              </a:spcAft>
+            </a:pPr>
+            <a:r>
+              <a:rPr sz="1150" b="0" i="0">
+                <a:solidFill>
+                  <a:srgbClr val="22252B"/>
+                </a:solidFill>
+                <a:latin typeface="Noto Sans CJK KR"/>
+              </a:rPr>
+              <a:t>teacher가 자기 생성한 '꿈'으로 SEAL식 편집·강화 — 외부 라벨 없이 능력을 끌어올림.</a:t>
+            </a:r>
+          </a:p>
+        </p:txBody>
+      </p:sp>
+      <p:sp>
+        <p:nvSpPr>
+          <p:cNvPr id="13" name="Rounded Rectangle 12"/>
+          <p:cNvSpPr/>
+          <p:nvPr/>
+        </p:nvSpPr>
+        <p:spPr>
+          <a:xfrm>
+            <a:off x="502920" y="5349240"/>
+            <a:ext cx="11155680" cy="749808"/>
+          </a:xfrm>
+          <a:prstGeom prst="roundRect">
+            <a:avLst/>
+          </a:prstGeom>
+          <a:solidFill>
+            <a:srgbClr val="FFFFFF"/>
+          </a:solidFill>
+          <a:ln w="12700">
+            <a:solidFill>
+              <a:srgbClr val="8A8F98"/>
+            </a:solidFill>
+          </a:ln>
+          <a:effectLst/>
+        </p:spPr>
+        <p:style>
+          <a:lnRef idx="1">
+            <a:schemeClr val="accent1"/>
+          </a:lnRef>
+          <a:fillRef idx="3">
+            <a:schemeClr val="accent1"/>
+          </a:fillRef>
+          <a:effectRef idx="2">
+            <a:schemeClr val="accent1"/>
+          </a:effectRef>
+          <a:fontRef idx="minor">
+            <a:schemeClr val="lt1"/>
+          </a:fontRef>
+        </p:style>
+        <p:txBody>
+          <a:bodyPr rtlCol="0" anchor="ctr" wrap="square" lIns="76200" rIns="76200" tIns="38100" bIns="38100"/>
+          <a:lstStyle/>
+          <a:p>
+            <a:pPr algn="l">
+              <a:lnSpc>
+                <a:spcPct val="118000"/>
+              </a:lnSpc>
+              <a:spcBef>
+                <a:spcPts val="0"/>
+              </a:spcBef>
+              <a:spcAft>
+                <a:spcPts val="300"/>
+              </a:spcAft>
+            </a:pPr>
+            <a:r>
+              <a:rPr sz="1250" b="1" i="0">
+                <a:solidFill>
+                  <a:srgbClr val="2A9D8F"/>
+                </a:solidFill>
+                <a:latin typeface="Noto Sans CJK KR"/>
+              </a:rPr>
+              <a:t>reset = (de)activation  </a:t>
+            </a:r>
+          </a:p>
+          <a:p>
+            <a:pPr algn="l">
+              <a:lnSpc>
+                <a:spcPct val="118000"/>
+              </a:lnSpc>
+              <a:spcBef>
+                <a:spcPts val="0"/>
+              </a:spcBef>
+              <a:spcAft>
+                <a:spcPts val="300"/>
+              </a:spcAft>
+            </a:pPr>
+            <a:r>
+              <a:rPr sz="1150" b="0" i="0">
+                <a:solidFill>
+                  <a:srgbClr val="22252B"/>
+                </a:solidFill>
+                <a:latin typeface="Noto Sans CJK KR"/>
+              </a:rPr>
+              <a:t>새 주기 시작 시 빠른 블록의 이전 expert들을 비활성화(pruning)해 간섭을 막는다.</a:t>
+            </a:r>
+          </a:p>
+        </p:txBody>
+      </p:sp>
+      <p:sp>
+        <p:nvSpPr>
+          <p:cNvPr id="14" name="TextBox 13"/>
+          <p:cNvSpPr txBox="1"/>
+          <p:nvPr/>
+        </p:nvSpPr>
+        <p:spPr>
+          <a:xfrm>
+            <a:off x="502920" y="6263640"/>
+            <a:ext cx="11155680" cy="274320"/>
+          </a:xfrm>
+          <a:prstGeom prst="rect">
+            <a:avLst/>
+          </a:prstGeom>
+          <a:noFill/>
+        </p:spPr>
+        <p:txBody>
+          <a:bodyPr wrap="square" anchor="t" lIns="38100" rIns="38100" tIns="25400" bIns="25400">
+            <a:spAutoFit/>
+          </a:bodyPr>
+          <a:lstStyle/>
+          <a:p>
+            <a:pPr algn="l">
+              <a:lnSpc>
+                <a:spcPct val="120000"/>
+              </a:lnSpc>
+              <a:spcBef>
+                <a:spcPts val="0"/>
+              </a:spcBef>
+              <a:spcAft>
+                <a:spcPts val="0"/>
+              </a:spcAft>
+            </a:pPr>
+            <a:r>
+              <a:rPr sz="1150" b="0" i="1">
+                <a:solidFill>
+                  <a:srgbClr val="5A5F68"/>
+                </a:solidFill>
+                <a:latin typeface="Noto Sans CJK KR"/>
+              </a:rPr>
+              <a:t>핵심: 학습 데이터가 전부 모델 자신에게서 나온다(self-generated) — 외부 코퍼스 추가 없이 지속 학습.</a:t>
+            </a:r>
+          </a:p>
+        </p:txBody>
+      </p:sp>
+    </p:spTree>
+  </p:cSld>
+  <p:clrMapOvr>
+    <a:masterClrMapping/>
+  </p:clrMapOvr>
+</p:sld>
+</file>
+
 <file path=ppt/slides/slide4.xml><?xml version="1.0" encoding="utf-8"?>
 <p:sld xmlns:a="http://schemas.openxmlformats.org/drawingml/2006/main" xmlns:p="http://schemas.openxmlformats.org/presentationml/2006/main" xmlns:r="http://schemas.openxmlformats.org/officeDocument/2006/relationships">
   <p:cSld>
@@ -24135,6 +26489,4629 @@
                 <a:latin typeface="Noto Sans CJK KR"/>
               </a:rPr>
               <a:t>Background — 학습이 처음이라면</a:t>
+            </a:r>
+          </a:p>
+        </p:txBody>
+      </p:sp>
+    </p:spTree>
+  </p:cSld>
+  <p:clrMapOvr>
+    <a:masterClrMapping/>
+  </p:clrMapOvr>
+</p:sld>
+</file>
+
+<file path=ppt/slides/slide40.xml><?xml version="1.0" encoding="utf-8"?>
+<p:sld xmlns:a="http://schemas.openxmlformats.org/drawingml/2006/main" xmlns:p="http://schemas.openxmlformats.org/presentationml/2006/main" xmlns:r="http://schemas.openxmlformats.org/officeDocument/2006/relationships">
+  <p:cSld>
+    <p:spTree>
+      <p:nvGrpSpPr>
+        <p:cNvPr id="1" name=""/>
+        <p:cNvGrpSpPr/>
+        <p:nvPr/>
+      </p:nvGrpSpPr>
+      <p:grpSpPr/>
+      <p:sp>
+        <p:nvSpPr>
+          <p:cNvPr id="2" name="Rectangle 1"/>
+          <p:cNvSpPr/>
+          <p:nvPr/>
+        </p:nvSpPr>
+        <p:spPr>
+          <a:xfrm>
+            <a:off x="0" y="0"/>
+            <a:ext cx="12191695" cy="54864"/>
+          </a:xfrm>
+          <a:prstGeom prst="rect">
+            <a:avLst/>
+          </a:prstGeom>
+          <a:solidFill>
+            <a:srgbClr val="2A9D8F"/>
+          </a:solidFill>
+          <a:ln w="12700">
+            <a:solidFill>
+              <a:srgbClr val="2A9D8F"/>
+            </a:solidFill>
+          </a:ln>
+          <a:effectLst/>
+        </p:spPr>
+        <p:style>
+          <a:lnRef idx="1">
+            <a:schemeClr val="accent1"/>
+          </a:lnRef>
+          <a:fillRef idx="3">
+            <a:schemeClr val="accent1"/>
+          </a:fillRef>
+          <a:effectRef idx="2">
+            <a:schemeClr val="accent1"/>
+          </a:effectRef>
+          <a:fontRef idx="minor">
+            <a:schemeClr val="lt1"/>
+          </a:fontRef>
+        </p:style>
+        <p:txBody>
+          <a:bodyPr rtlCol="0" anchor="ctr" wrap="square" lIns="76200" rIns="76200" tIns="38100" bIns="38100"/>
+          <a:lstStyle/>
+          <a:p>
+            <a:pPr algn="ctr">
+              <a:lnSpc>
+                <a:spcPct val="118000"/>
+              </a:lnSpc>
+              <a:spcBef>
+                <a:spcPts val="0"/>
+              </a:spcBef>
+              <a:spcAft>
+                <a:spcPts val="300"/>
+              </a:spcAft>
+            </a:pPr>
+            <a:r>
+              <a:rPr sz="1100" b="0" i="0">
+                <a:solidFill>
+                  <a:srgbClr val="22252B"/>
+                </a:solidFill>
+                <a:latin typeface="Noto Sans CJK KR"/>
+              </a:rPr>
+              <a:t/>
+            </a:r>
+          </a:p>
+        </p:txBody>
+      </p:sp>
+      <p:sp>
+        <p:nvSpPr>
+          <p:cNvPr id="3" name="TextBox 2"/>
+          <p:cNvSpPr txBox="1"/>
+          <p:nvPr/>
+        </p:nvSpPr>
+        <p:spPr>
+          <a:xfrm>
+            <a:off x="502920" y="146304"/>
+            <a:ext cx="11185855" cy="320040"/>
+          </a:xfrm>
+          <a:prstGeom prst="rect">
+            <a:avLst/>
+          </a:prstGeom>
+          <a:noFill/>
+        </p:spPr>
+        <p:txBody>
+          <a:bodyPr wrap="square" anchor="t" lIns="38100" rIns="38100" tIns="25400" bIns="25400">
+            <a:spAutoFit/>
+          </a:bodyPr>
+          <a:lstStyle/>
+          <a:p>
+            <a:pPr algn="l">
+              <a:lnSpc>
+                <a:spcPct val="120000"/>
+              </a:lnSpc>
+              <a:spcBef>
+                <a:spcPts val="0"/>
+              </a:spcBef>
+              <a:spcAft>
+                <a:spcPts val="0"/>
+              </a:spcAft>
+            </a:pPr>
+            <a:r>
+              <a:rPr sz="1350" b="1" i="0">
+                <a:solidFill>
+                  <a:srgbClr val="2A9D8F"/>
+                </a:solidFill>
+                <a:latin typeface="Noto Sans CJK KR"/>
+              </a:rPr>
+              <a:t>B6 · Sleep — 증명</a:t>
+            </a:r>
+          </a:p>
+        </p:txBody>
+      </p:sp>
+      <p:sp>
+        <p:nvSpPr>
+          <p:cNvPr id="4" name="TextBox 3"/>
+          <p:cNvSpPr txBox="1"/>
+          <p:nvPr/>
+        </p:nvSpPr>
+        <p:spPr>
+          <a:xfrm>
+            <a:off x="502920" y="457200"/>
+            <a:ext cx="11185855" cy="566928"/>
+          </a:xfrm>
+          <a:prstGeom prst="rect">
+            <a:avLst/>
+          </a:prstGeom>
+          <a:noFill/>
+        </p:spPr>
+        <p:txBody>
+          <a:bodyPr wrap="square" anchor="t" lIns="38100" rIns="38100" tIns="25400" bIns="25400">
+            <a:spAutoFit/>
+          </a:bodyPr>
+          <a:lstStyle/>
+          <a:p>
+            <a:pPr algn="l">
+              <a:lnSpc>
+                <a:spcPct val="120000"/>
+              </a:lnSpc>
+              <a:spcBef>
+                <a:spcPts val="0"/>
+              </a:spcBef>
+              <a:spcAft>
+                <a:spcPts val="0"/>
+              </a:spcAft>
+            </a:pPr>
+            <a:r>
+              <a:rPr sz="2400" b="1" i="0">
+                <a:solidFill>
+                  <a:srgbClr val="22252B"/>
+                </a:solidFill>
+                <a:latin typeface="Noto Sans CJK KR"/>
+              </a:rPr>
+              <a:t>지속 학습에서 망각을 줄이고 성능을 유지한다</a:t>
+            </a:r>
+          </a:p>
+        </p:txBody>
+      </p:sp>
+      <p:sp>
+        <p:nvSpPr>
+          <p:cNvPr id="5" name="Rectangle 4"/>
+          <p:cNvSpPr/>
+          <p:nvPr/>
+        </p:nvSpPr>
+        <p:spPr>
+          <a:xfrm>
+            <a:off x="466344" y="2134214"/>
+            <a:ext cx="5605272" cy="1309411"/>
+          </a:xfrm>
+          <a:prstGeom prst="rect">
+            <a:avLst/>
+          </a:prstGeom>
+          <a:noFill/>
+          <a:ln w="9525">
+            <a:solidFill>
+              <a:srgbClr val="8A8F98"/>
+            </a:solidFill>
+          </a:ln>
+          <a:effectLst/>
+        </p:spPr>
+        <p:style>
+          <a:lnRef idx="1">
+            <a:schemeClr val="accent1"/>
+          </a:lnRef>
+          <a:fillRef idx="3">
+            <a:schemeClr val="accent1"/>
+          </a:fillRef>
+          <a:effectRef idx="2">
+            <a:schemeClr val="accent1"/>
+          </a:effectRef>
+          <a:fontRef idx="minor">
+            <a:schemeClr val="lt1"/>
+          </a:fontRef>
+        </p:style>
+        <p:txBody>
+          <a:bodyPr rtlCol="0" anchor="ctr"/>
+          <a:lstStyle/>
+          <a:p>
+            <a:pPr algn="ctr"/>
+          </a:p>
+        </p:txBody>
+      </p:sp>
+      <p:pic>
+        <p:nvPicPr>
+          <p:cNvPr id="6" name="Picture 5" descr="fig3.png"/>
+          <p:cNvPicPr>
+            <a:picLocks noChangeAspect="1"/>
+          </p:cNvPicPr>
+          <p:nvPr/>
+        </p:nvPicPr>
+        <p:blipFill>
+          <a:blip r:embed="rId2"/>
+          <a:stretch>
+            <a:fillRect/>
+          </a:stretch>
+        </p:blipFill>
+        <p:spPr>
+          <a:xfrm>
+            <a:off x="502920" y="2170790"/>
+            <a:ext cx="5532120" cy="1236259"/>
+          </a:xfrm>
+          <a:prstGeom prst="rect">
+            <a:avLst/>
+          </a:prstGeom>
+        </p:spPr>
+      </p:pic>
+      <p:sp>
+        <p:nvSpPr>
+          <p:cNvPr id="7" name="TextBox 6"/>
+          <p:cNvSpPr txBox="1"/>
+          <p:nvPr/>
+        </p:nvSpPr>
+        <p:spPr>
+          <a:xfrm>
+            <a:off x="502920" y="4242816"/>
+            <a:ext cx="5532120" cy="420624"/>
+          </a:xfrm>
+          <a:prstGeom prst="rect">
+            <a:avLst/>
+          </a:prstGeom>
+          <a:noFill/>
+        </p:spPr>
+        <p:txBody>
+          <a:bodyPr wrap="square" anchor="t" lIns="38100" rIns="38100" tIns="25400" bIns="25400">
+            <a:spAutoFit/>
+          </a:bodyPr>
+          <a:lstStyle/>
+          <a:p>
+            <a:pPr algn="ctr">
+              <a:lnSpc>
+                <a:spcPct val="120000"/>
+              </a:lnSpc>
+              <a:spcBef>
+                <a:spcPts val="0"/>
+              </a:spcBef>
+              <a:spcAft>
+                <a:spcPts val="100"/>
+              </a:spcAft>
+            </a:pPr>
+            <a:r>
+              <a:rPr sz="1050" b="0" i="0">
+                <a:solidFill>
+                  <a:srgbClr val="22252B"/>
+                </a:solidFill>
+                <a:latin typeface="Noto Sans CJK KR"/>
+              </a:rPr>
+              <a:t>class-incremental(CLINC 등): sleep 통합이 이전 클래스 망각을 완화</a:t>
+            </a:r>
+          </a:p>
+          <a:p>
+            <a:pPr algn="ctr">
+              <a:lnSpc>
+                <a:spcPct val="120000"/>
+              </a:lnSpc>
+              <a:spcBef>
+                <a:spcPts val="0"/>
+              </a:spcBef>
+              <a:spcAft>
+                <a:spcPts val="100"/>
+              </a:spcAft>
+            </a:pPr>
+            <a:r>
+              <a:rPr sz="850" b="0" i="1">
+                <a:solidFill>
+                  <a:srgbClr val="5A5F68"/>
+                </a:solidFill>
+                <a:latin typeface="Noto Sans CJK KR"/>
+              </a:rPr>
+              <a:t>출처: 2606.03979 Fig.3</a:t>
+            </a:r>
+          </a:p>
+        </p:txBody>
+      </p:sp>
+      <p:sp>
+        <p:nvSpPr>
+          <p:cNvPr id="8" name="Rectangle 7"/>
+          <p:cNvSpPr/>
+          <p:nvPr/>
+        </p:nvSpPr>
+        <p:spPr>
+          <a:xfrm>
+            <a:off x="6712324" y="1335024"/>
+            <a:ext cx="4497590" cy="2907792"/>
+          </a:xfrm>
+          <a:prstGeom prst="rect">
+            <a:avLst/>
+          </a:prstGeom>
+          <a:noFill/>
+          <a:ln w="9525">
+            <a:solidFill>
+              <a:srgbClr val="8A8F98"/>
+            </a:solidFill>
+          </a:ln>
+          <a:effectLst/>
+        </p:spPr>
+        <p:style>
+          <a:lnRef idx="1">
+            <a:schemeClr val="accent1"/>
+          </a:lnRef>
+          <a:fillRef idx="3">
+            <a:schemeClr val="accent1"/>
+          </a:fillRef>
+          <a:effectRef idx="2">
+            <a:schemeClr val="accent1"/>
+          </a:effectRef>
+          <a:fontRef idx="minor">
+            <a:schemeClr val="lt1"/>
+          </a:fontRef>
+        </p:style>
+        <p:txBody>
+          <a:bodyPr rtlCol="0" anchor="ctr"/>
+          <a:lstStyle/>
+          <a:p>
+            <a:pPr algn="ctr"/>
+          </a:p>
+        </p:txBody>
+      </p:sp>
+      <p:pic>
+        <p:nvPicPr>
+          <p:cNvPr id="9" name="Picture 8" descr="fig6.png"/>
+          <p:cNvPicPr>
+            <a:picLocks noChangeAspect="1"/>
+          </p:cNvPicPr>
+          <p:nvPr/>
+        </p:nvPicPr>
+        <p:blipFill>
+          <a:blip r:embed="rId3"/>
+          <a:stretch>
+            <a:fillRect/>
+          </a:stretch>
+        </p:blipFill>
+        <p:spPr>
+          <a:xfrm>
+            <a:off x="6748900" y="1371600"/>
+            <a:ext cx="4424438" cy="2834640"/>
+          </a:xfrm>
+          <a:prstGeom prst="rect">
+            <a:avLst/>
+          </a:prstGeom>
+        </p:spPr>
+      </p:pic>
+      <p:sp>
+        <p:nvSpPr>
+          <p:cNvPr id="10" name="TextBox 9"/>
+          <p:cNvSpPr txBox="1"/>
+          <p:nvPr/>
+        </p:nvSpPr>
+        <p:spPr>
+          <a:xfrm>
+            <a:off x="6263640" y="4242816"/>
+            <a:ext cx="5394960" cy="420624"/>
+          </a:xfrm>
+          <a:prstGeom prst="rect">
+            <a:avLst/>
+          </a:prstGeom>
+          <a:noFill/>
+        </p:spPr>
+        <p:txBody>
+          <a:bodyPr wrap="square" anchor="t" lIns="38100" rIns="38100" tIns="25400" bIns="25400">
+            <a:spAutoFit/>
+          </a:bodyPr>
+          <a:lstStyle/>
+          <a:p>
+            <a:pPr algn="ctr">
+              <a:lnSpc>
+                <a:spcPct val="120000"/>
+              </a:lnSpc>
+              <a:spcBef>
+                <a:spcPts val="0"/>
+              </a:spcBef>
+              <a:spcAft>
+                <a:spcPts val="100"/>
+              </a:spcAft>
+            </a:pPr>
+            <a:r>
+              <a:rPr sz="1050" b="0" i="0">
+                <a:solidFill>
+                  <a:srgbClr val="22252B"/>
+                </a:solidFill>
+                <a:latin typeface="Noto Sans CJK KR"/>
+              </a:rPr>
+              <a:t>BABILong: 오프라인 통합 후에도 장문 추론 능력 유지·향상</a:t>
+            </a:r>
+          </a:p>
+          <a:p>
+            <a:pPr algn="ctr">
+              <a:lnSpc>
+                <a:spcPct val="120000"/>
+              </a:lnSpc>
+              <a:spcBef>
+                <a:spcPts val="0"/>
+              </a:spcBef>
+              <a:spcAft>
+                <a:spcPts val="100"/>
+              </a:spcAft>
+            </a:pPr>
+            <a:r>
+              <a:rPr sz="850" b="0" i="1">
+                <a:solidFill>
+                  <a:srgbClr val="5A5F68"/>
+                </a:solidFill>
+                <a:latin typeface="Noto Sans CJK KR"/>
+              </a:rPr>
+              <a:t>출처: 2606.03979 Fig.6</a:t>
+            </a:r>
+          </a:p>
+        </p:txBody>
+      </p:sp>
+      <p:sp>
+        <p:nvSpPr>
+          <p:cNvPr id="11" name="Rounded Rectangle 10"/>
+          <p:cNvSpPr/>
+          <p:nvPr/>
+        </p:nvSpPr>
+        <p:spPr>
+          <a:xfrm>
+            <a:off x="502920" y="4800600"/>
+            <a:ext cx="11155680" cy="868680"/>
+          </a:xfrm>
+          <a:prstGeom prst="roundRect">
+            <a:avLst/>
+          </a:prstGeom>
+          <a:solidFill>
+            <a:srgbClr val="ECEEF1"/>
+          </a:solidFill>
+          <a:ln w="12700">
+            <a:solidFill>
+              <a:srgbClr val="8A8F98"/>
+            </a:solidFill>
+          </a:ln>
+          <a:effectLst/>
+        </p:spPr>
+        <p:style>
+          <a:lnRef idx="1">
+            <a:schemeClr val="accent1"/>
+          </a:lnRef>
+          <a:fillRef idx="3">
+            <a:schemeClr val="accent1"/>
+          </a:fillRef>
+          <a:effectRef idx="2">
+            <a:schemeClr val="accent1"/>
+          </a:effectRef>
+          <a:fontRef idx="minor">
+            <a:schemeClr val="lt1"/>
+          </a:fontRef>
+        </p:style>
+        <p:txBody>
+          <a:bodyPr rtlCol="0" anchor="ctr" wrap="square" lIns="76200" rIns="76200" tIns="38100" bIns="38100"/>
+          <a:lstStyle/>
+          <a:p>
+            <a:pPr algn="l">
+              <a:lnSpc>
+                <a:spcPct val="118000"/>
+              </a:lnSpc>
+              <a:spcBef>
+                <a:spcPts val="0"/>
+              </a:spcBef>
+              <a:spcAft>
+                <a:spcPts val="200"/>
+              </a:spcAft>
+            </a:pPr>
+            <a:r>
+              <a:rPr sz="1250" b="1" i="0">
+                <a:solidFill>
+                  <a:srgbClr val="22252B"/>
+                </a:solidFill>
+                <a:latin typeface="Noto Sans CJK KR"/>
+              </a:rPr>
+              <a:t>읽는 법 · 6편의 도착점</a:t>
+            </a:r>
+          </a:p>
+          <a:p>
+            <a:pPr algn="l">
+              <a:lnSpc>
+                <a:spcPct val="118000"/>
+              </a:lnSpc>
+              <a:spcBef>
+                <a:spcPts val="0"/>
+              </a:spcBef>
+              <a:spcAft>
+                <a:spcPts val="300"/>
+              </a:spcAft>
+            </a:pPr>
+            <a:r>
+              <a:rPr sz="1200" b="0" i="0">
+                <a:solidFill>
+                  <a:srgbClr val="22252B"/>
+                </a:solidFill>
+                <a:latin typeface="Noto Sans CJK KR"/>
+              </a:rPr>
+              <a:t>Titans가 연 'test-time 학습'은 → Sleep에서 'wake=빠른 학습 / sleep=느린 통합'의 완결된 생애주기가 된다. 고정 용량의 한계를 파라미터 성장으로 넘은 것이 이 논문의 마지막 퍼즐.</a:t>
+            </a:r>
+          </a:p>
+        </p:txBody>
+      </p:sp>
+    </p:spTree>
+  </p:cSld>
+  <p:clrMapOvr>
+    <a:masterClrMapping/>
+  </p:clrMapOvr>
+</p:sld>
+</file>
+
+<file path=ppt/slides/slide41.xml><?xml version="1.0" encoding="utf-8"?>
+<p:sld xmlns:a="http://schemas.openxmlformats.org/drawingml/2006/main" xmlns:p="http://schemas.openxmlformats.org/presentationml/2006/main" xmlns:r="http://schemas.openxmlformats.org/officeDocument/2006/relationships">
+  <p:cSld>
+    <p:spTree>
+      <p:nvGrpSpPr>
+        <p:cNvPr id="1" name=""/>
+        <p:cNvGrpSpPr/>
+        <p:nvPr/>
+      </p:nvGrpSpPr>
+      <p:grpSpPr/>
+      <p:sp>
+        <p:nvSpPr>
+          <p:cNvPr id="2" name="Rectangle 1"/>
+          <p:cNvSpPr/>
+          <p:nvPr/>
+        </p:nvSpPr>
+        <p:spPr>
+          <a:xfrm>
+            <a:off x="0" y="0"/>
+            <a:ext cx="12191695" cy="6858000"/>
+          </a:xfrm>
+          <a:prstGeom prst="rect">
+            <a:avLst/>
+          </a:prstGeom>
+          <a:solidFill>
+            <a:srgbClr val="C9A227"/>
+          </a:solidFill>
+          <a:ln w="12700">
+            <a:solidFill>
+              <a:srgbClr val="C9A227"/>
+            </a:solidFill>
+          </a:ln>
+          <a:effectLst/>
+        </p:spPr>
+        <p:style>
+          <a:lnRef idx="1">
+            <a:schemeClr val="accent1"/>
+          </a:lnRef>
+          <a:fillRef idx="3">
+            <a:schemeClr val="accent1"/>
+          </a:fillRef>
+          <a:effectRef idx="2">
+            <a:schemeClr val="accent1"/>
+          </a:effectRef>
+          <a:fontRef idx="minor">
+            <a:schemeClr val="lt1"/>
+          </a:fontRef>
+        </p:style>
+        <p:txBody>
+          <a:bodyPr rtlCol="0" anchor="ctr" wrap="square" lIns="76200" rIns="76200" tIns="38100" bIns="38100"/>
+          <a:lstStyle/>
+          <a:p>
+            <a:pPr algn="ctr">
+              <a:lnSpc>
+                <a:spcPct val="118000"/>
+              </a:lnSpc>
+              <a:spcBef>
+                <a:spcPts val="0"/>
+              </a:spcBef>
+              <a:spcAft>
+                <a:spcPts val="300"/>
+              </a:spcAft>
+            </a:pPr>
+            <a:r>
+              <a:rPr sz="1100" b="0" i="0">
+                <a:solidFill>
+                  <a:srgbClr val="22252B"/>
+                </a:solidFill>
+                <a:latin typeface="Noto Sans CJK KR"/>
+              </a:rPr>
+              <a:t/>
+            </a:r>
+          </a:p>
+        </p:txBody>
+      </p:sp>
+      <p:sp>
+        <p:nvSpPr>
+          <p:cNvPr id="3" name="TextBox 2"/>
+          <p:cNvSpPr txBox="1"/>
+          <p:nvPr/>
+        </p:nvSpPr>
+        <p:spPr>
+          <a:xfrm>
+            <a:off x="822960" y="2468880"/>
+            <a:ext cx="10545775" cy="914400"/>
+          </a:xfrm>
+          <a:prstGeom prst="rect">
+            <a:avLst/>
+          </a:prstGeom>
+          <a:noFill/>
+        </p:spPr>
+        <p:txBody>
+          <a:bodyPr wrap="square" anchor="t" lIns="38100" rIns="38100" tIns="25400" bIns="25400">
+            <a:spAutoFit/>
+          </a:bodyPr>
+          <a:lstStyle/>
+          <a:p>
+            <a:pPr algn="l">
+              <a:lnSpc>
+                <a:spcPct val="120000"/>
+              </a:lnSpc>
+              <a:spcBef>
+                <a:spcPts val="0"/>
+              </a:spcBef>
+              <a:spcAft>
+                <a:spcPts val="400"/>
+              </a:spcAft>
+            </a:pPr>
+            <a:r>
+              <a:rPr sz="2000" b="1" i="0">
+                <a:solidFill>
+                  <a:srgbClr val="FFFFFF"/>
+                </a:solidFill>
+                <a:latin typeface="Noto Sans CJK KR"/>
+              </a:rPr>
+              <a:t>PART C</a:t>
+            </a:r>
+          </a:p>
+        </p:txBody>
+      </p:sp>
+      <p:sp>
+        <p:nvSpPr>
+          <p:cNvPr id="4" name="TextBox 3"/>
+          <p:cNvSpPr txBox="1"/>
+          <p:nvPr/>
+        </p:nvSpPr>
+        <p:spPr>
+          <a:xfrm>
+            <a:off x="822960" y="3108960"/>
+            <a:ext cx="10545775" cy="1463040"/>
+          </a:xfrm>
+          <a:prstGeom prst="rect">
+            <a:avLst/>
+          </a:prstGeom>
+          <a:noFill/>
+        </p:spPr>
+        <p:txBody>
+          <a:bodyPr wrap="square" anchor="t" lIns="38100" rIns="38100" tIns="25400" bIns="25400">
+            <a:spAutoFit/>
+          </a:bodyPr>
+          <a:lstStyle/>
+          <a:p>
+            <a:pPr algn="l">
+              <a:lnSpc>
+                <a:spcPct val="120000"/>
+              </a:lnSpc>
+              <a:spcBef>
+                <a:spcPts val="0"/>
+              </a:spcBef>
+              <a:spcAft>
+                <a:spcPts val="400"/>
+              </a:spcAft>
+            </a:pPr>
+            <a:r>
+              <a:rPr sz="3400" b="1" i="0">
+                <a:solidFill>
+                  <a:srgbClr val="FFFFFF"/>
+                </a:solidFill>
+                <a:latin typeface="Noto Sans CJK KR"/>
+              </a:rPr>
+              <a:t>System modeling (우리 기여) — 이 배포는 서빙에서 얼마나 드나</a:t>
+            </a:r>
+          </a:p>
+        </p:txBody>
+      </p:sp>
+    </p:spTree>
+  </p:cSld>
+  <p:clrMapOvr>
+    <a:masterClrMapping/>
+  </p:clrMapOvr>
+</p:sld>
+</file>
+
+<file path=ppt/slides/slide42.xml><?xml version="1.0" encoding="utf-8"?>
+<p:sld xmlns:a="http://schemas.openxmlformats.org/drawingml/2006/main" xmlns:p="http://schemas.openxmlformats.org/presentationml/2006/main" xmlns:r="http://schemas.openxmlformats.org/officeDocument/2006/relationships">
+  <p:cSld>
+    <p:spTree>
+      <p:nvGrpSpPr>
+        <p:cNvPr id="1" name=""/>
+        <p:cNvGrpSpPr/>
+        <p:nvPr/>
+      </p:nvGrpSpPr>
+      <p:grpSpPr/>
+      <p:sp>
+        <p:nvSpPr>
+          <p:cNvPr id="2" name="Rectangle 1"/>
+          <p:cNvSpPr/>
+          <p:nvPr/>
+        </p:nvSpPr>
+        <p:spPr>
+          <a:xfrm>
+            <a:off x="0" y="0"/>
+            <a:ext cx="12191695" cy="54864"/>
+          </a:xfrm>
+          <a:prstGeom prst="rect">
+            <a:avLst/>
+          </a:prstGeom>
+          <a:solidFill>
+            <a:srgbClr val="C9A227"/>
+          </a:solidFill>
+          <a:ln w="12700">
+            <a:solidFill>
+              <a:srgbClr val="C9A227"/>
+            </a:solidFill>
+          </a:ln>
+          <a:effectLst/>
+        </p:spPr>
+        <p:style>
+          <a:lnRef idx="1">
+            <a:schemeClr val="accent1"/>
+          </a:lnRef>
+          <a:fillRef idx="3">
+            <a:schemeClr val="accent1"/>
+          </a:fillRef>
+          <a:effectRef idx="2">
+            <a:schemeClr val="accent1"/>
+          </a:effectRef>
+          <a:fontRef idx="minor">
+            <a:schemeClr val="lt1"/>
+          </a:fontRef>
+        </p:style>
+        <p:txBody>
+          <a:bodyPr rtlCol="0" anchor="ctr" wrap="square" lIns="76200" rIns="76200" tIns="38100" bIns="38100"/>
+          <a:lstStyle/>
+          <a:p>
+            <a:pPr algn="ctr">
+              <a:lnSpc>
+                <a:spcPct val="118000"/>
+              </a:lnSpc>
+              <a:spcBef>
+                <a:spcPts val="0"/>
+              </a:spcBef>
+              <a:spcAft>
+                <a:spcPts val="300"/>
+              </a:spcAft>
+            </a:pPr>
+            <a:r>
+              <a:rPr sz="1100" b="0" i="0">
+                <a:solidFill>
+                  <a:srgbClr val="22252B"/>
+                </a:solidFill>
+                <a:latin typeface="Noto Sans CJK KR"/>
+              </a:rPr>
+              <a:t/>
+            </a:r>
+          </a:p>
+        </p:txBody>
+      </p:sp>
+      <p:sp>
+        <p:nvSpPr>
+          <p:cNvPr id="3" name="TextBox 2"/>
+          <p:cNvSpPr txBox="1"/>
+          <p:nvPr/>
+        </p:nvSpPr>
+        <p:spPr>
+          <a:xfrm>
+            <a:off x="502920" y="146304"/>
+            <a:ext cx="11185855" cy="320040"/>
+          </a:xfrm>
+          <a:prstGeom prst="rect">
+            <a:avLst/>
+          </a:prstGeom>
+          <a:noFill/>
+        </p:spPr>
+        <p:txBody>
+          <a:bodyPr wrap="square" anchor="t" lIns="38100" rIns="38100" tIns="25400" bIns="25400">
+            <a:spAutoFit/>
+          </a:bodyPr>
+          <a:lstStyle/>
+          <a:p>
+            <a:pPr algn="l">
+              <a:lnSpc>
+                <a:spcPct val="120000"/>
+              </a:lnSpc>
+              <a:spcBef>
+                <a:spcPts val="0"/>
+              </a:spcBef>
+              <a:spcAft>
+                <a:spcPts val="0"/>
+              </a:spcAft>
+            </a:pPr>
+            <a:r>
+              <a:rPr sz="1350" b="1" i="0">
+                <a:solidFill>
+                  <a:srgbClr val="C9A227"/>
+                </a:solidFill>
+                <a:latin typeface="Noto Sans CJK KR"/>
+              </a:rPr>
+              <a:t>C1 · pair thesis</a:t>
+            </a:r>
+          </a:p>
+        </p:txBody>
+      </p:sp>
+      <p:sp>
+        <p:nvSpPr>
+          <p:cNvPr id="4" name="TextBox 3"/>
+          <p:cNvSpPr txBox="1"/>
+          <p:nvPr/>
+        </p:nvSpPr>
+        <p:spPr>
+          <a:xfrm>
+            <a:off x="502920" y="457200"/>
+            <a:ext cx="11185855" cy="566928"/>
+          </a:xfrm>
+          <a:prstGeom prst="rect">
+            <a:avLst/>
+          </a:prstGeom>
+          <a:noFill/>
+        </p:spPr>
+        <p:txBody>
+          <a:bodyPr wrap="square" anchor="t" lIns="38100" rIns="38100" tIns="25400" bIns="25400">
+            <a:spAutoFit/>
+          </a:bodyPr>
+          <a:lstStyle/>
+          <a:p>
+            <a:pPr algn="l">
+              <a:lnSpc>
+                <a:spcPct val="120000"/>
+              </a:lnSpc>
+              <a:spcBef>
+                <a:spcPts val="0"/>
+              </a:spcBef>
+              <a:spcAft>
+                <a:spcPts val="0"/>
+              </a:spcAft>
+            </a:pPr>
+            <a:r>
+              <a:rPr sz="2400" b="1" i="0">
+                <a:solidFill>
+                  <a:srgbClr val="22252B"/>
+                </a:solidFill>
+                <a:latin typeface="Noto Sans CJK KR"/>
+              </a:rPr>
+              <a:t>학습은 compute-bound, 디코드는 memory-bound</a:t>
+            </a:r>
+          </a:p>
+        </p:txBody>
+      </p:sp>
+      <p:sp>
+        <p:nvSpPr>
+          <p:cNvPr id="5" name="Rounded Rectangle 4"/>
+          <p:cNvSpPr/>
+          <p:nvPr/>
+        </p:nvSpPr>
+        <p:spPr>
+          <a:xfrm>
+            <a:off x="502920" y="1371600"/>
+            <a:ext cx="5486400" cy="1828800"/>
+          </a:xfrm>
+          <a:prstGeom prst="roundRect">
+            <a:avLst/>
+          </a:prstGeom>
+          <a:solidFill>
+            <a:srgbClr val="DBE7F3"/>
+          </a:solidFill>
+          <a:ln w="12700">
+            <a:solidFill>
+              <a:srgbClr val="2A6F97"/>
+            </a:solidFill>
+          </a:ln>
+          <a:effectLst/>
+        </p:spPr>
+        <p:style>
+          <a:lnRef idx="1">
+            <a:schemeClr val="accent1"/>
+          </a:lnRef>
+          <a:fillRef idx="3">
+            <a:schemeClr val="accent1"/>
+          </a:fillRef>
+          <a:effectRef idx="2">
+            <a:schemeClr val="accent1"/>
+          </a:effectRef>
+          <a:fontRef idx="minor">
+            <a:schemeClr val="lt1"/>
+          </a:fontRef>
+        </p:style>
+        <p:txBody>
+          <a:bodyPr rtlCol="0" anchor="ctr" wrap="square" lIns="76200" rIns="76200" tIns="38100" bIns="38100"/>
+          <a:lstStyle/>
+          <a:p>
+            <a:pPr algn="l">
+              <a:lnSpc>
+                <a:spcPct val="118000"/>
+              </a:lnSpc>
+              <a:spcBef>
+                <a:spcPts val="0"/>
+              </a:spcBef>
+              <a:spcAft>
+                <a:spcPts val="500"/>
+              </a:spcAft>
+            </a:pPr>
+            <a:r>
+              <a:rPr sz="1400" b="1" i="0">
+                <a:solidFill>
+                  <a:srgbClr val="2A6F97"/>
+                </a:solidFill>
+                <a:latin typeface="Noto Sans CJK KR"/>
+              </a:rPr>
+              <a:t>학습(training) — compute-bound</a:t>
+            </a:r>
+          </a:p>
+          <a:p>
+            <a:pPr algn="l">
+              <a:lnSpc>
+                <a:spcPct val="118000"/>
+              </a:lnSpc>
+              <a:spcBef>
+                <a:spcPts val="0"/>
+              </a:spcBef>
+              <a:spcAft>
+                <a:spcPts val="300"/>
+              </a:spcAft>
+            </a:pPr>
+            <a:r>
+              <a:rPr sz="1250" b="0" i="0">
+                <a:solidFill>
+                  <a:srgbClr val="22252B"/>
+                </a:solidFill>
+                <a:latin typeface="Noto Sans CJK KR"/>
+              </a:rPr>
+              <a:t>chunk C를 크게 잡아 병렬 → 연산/바이트(arithmetic intensity)가 높다.</a:t>
+            </a:r>
+          </a:p>
+          <a:p>
+            <a:pPr algn="l">
+              <a:lnSpc>
+                <a:spcPct val="118000"/>
+              </a:lnSpc>
+              <a:spcBef>
+                <a:spcPts val="0"/>
+              </a:spcBef>
+              <a:spcAft>
+                <a:spcPts val="300"/>
+              </a:spcAft>
+            </a:pPr>
+            <a:r>
+              <a:rPr sz="1250" b="0" i="0">
+                <a:solidFill>
+                  <a:srgbClr val="22252B"/>
+                </a:solidFill>
+                <a:latin typeface="Noto Sans CJK KR"/>
+              </a:rPr>
+              <a:t>roofline의 오른쪽(연산 한계) → 더 빠른 연산기가 이득.</a:t>
+            </a:r>
+          </a:p>
+        </p:txBody>
+      </p:sp>
+      <p:sp>
+        <p:nvSpPr>
+          <p:cNvPr id="6" name="Rounded Rectangle 5"/>
+          <p:cNvSpPr/>
+          <p:nvPr/>
+        </p:nvSpPr>
+        <p:spPr>
+          <a:xfrm>
+            <a:off x="6172200" y="1371600"/>
+            <a:ext cx="5486400" cy="1828800"/>
+          </a:xfrm>
+          <a:prstGeom prst="roundRect">
+            <a:avLst/>
+          </a:prstGeom>
+          <a:solidFill>
+            <a:srgbClr val="F6DDDD"/>
+          </a:solidFill>
+          <a:ln w="12700">
+            <a:solidFill>
+              <a:srgbClr val="C1121F"/>
+            </a:solidFill>
+          </a:ln>
+          <a:effectLst/>
+        </p:spPr>
+        <p:style>
+          <a:lnRef idx="1">
+            <a:schemeClr val="accent1"/>
+          </a:lnRef>
+          <a:fillRef idx="3">
+            <a:schemeClr val="accent1"/>
+          </a:fillRef>
+          <a:effectRef idx="2">
+            <a:schemeClr val="accent1"/>
+          </a:effectRef>
+          <a:fontRef idx="minor">
+            <a:schemeClr val="lt1"/>
+          </a:fontRef>
+        </p:style>
+        <p:txBody>
+          <a:bodyPr rtlCol="0" anchor="ctr" wrap="square" lIns="76200" rIns="76200" tIns="38100" bIns="38100"/>
+          <a:lstStyle/>
+          <a:p>
+            <a:pPr algn="l">
+              <a:lnSpc>
+                <a:spcPct val="118000"/>
+              </a:lnSpc>
+              <a:spcBef>
+                <a:spcPts val="0"/>
+              </a:spcBef>
+              <a:spcAft>
+                <a:spcPts val="500"/>
+              </a:spcAft>
+            </a:pPr>
+            <a:r>
+              <a:rPr sz="1400" b="1" i="0">
+                <a:solidFill>
+                  <a:srgbClr val="C1121F"/>
+                </a:solidFill>
+                <a:latin typeface="Noto Sans CJK KR"/>
+              </a:rPr>
+              <a:t>디코드(decode) — memory-bound</a:t>
+            </a:r>
+          </a:p>
+          <a:p>
+            <a:pPr algn="l">
+              <a:lnSpc>
+                <a:spcPct val="118000"/>
+              </a:lnSpc>
+              <a:spcBef>
+                <a:spcPts val="0"/>
+              </a:spcBef>
+              <a:spcAft>
+                <a:spcPts val="300"/>
+              </a:spcAft>
+            </a:pPr>
+            <a:r>
+              <a:rPr sz="1250" b="0" i="0">
+                <a:solidFill>
+                  <a:srgbClr val="22252B"/>
+                </a:solidFill>
+                <a:latin typeface="Noto Sans CJK KR"/>
+              </a:rPr>
+              <a:t>chunk=1, 토큰마다 '전체 상태(state+weights)'를 read-modify-write.</a:t>
+            </a:r>
+          </a:p>
+          <a:p>
+            <a:pPr algn="l">
+              <a:lnSpc>
+                <a:spcPct val="118000"/>
+              </a:lnSpc>
+              <a:spcBef>
+                <a:spcPts val="0"/>
+              </a:spcBef>
+              <a:spcAft>
+                <a:spcPts val="300"/>
+              </a:spcAft>
+            </a:pPr>
+            <a:r>
+              <a:rPr sz="1250" b="0" i="0">
+                <a:solidFill>
+                  <a:srgbClr val="22252B"/>
+                </a:solidFill>
+                <a:latin typeface="Noto Sans CJK KR"/>
+              </a:rPr>
+              <a:t>arithmetic intensity가 낮다 → roofline의 왼쪽(대역폭 한계).</a:t>
+            </a:r>
+          </a:p>
+        </p:txBody>
+      </p:sp>
+      <p:sp>
+        <p:nvSpPr>
+          <p:cNvPr id="7" name="Rectangle 6"/>
+          <p:cNvSpPr/>
+          <p:nvPr/>
+        </p:nvSpPr>
+        <p:spPr>
+          <a:xfrm>
+            <a:off x="895197" y="3392424"/>
+            <a:ext cx="4747564" cy="2020824"/>
+          </a:xfrm>
+          <a:prstGeom prst="rect">
+            <a:avLst/>
+          </a:prstGeom>
+          <a:noFill/>
+          <a:ln w="9525">
+            <a:solidFill>
+              <a:srgbClr val="8A8F98"/>
+            </a:solidFill>
+          </a:ln>
+          <a:effectLst/>
+        </p:spPr>
+        <p:style>
+          <a:lnRef idx="1">
+            <a:schemeClr val="accent1"/>
+          </a:lnRef>
+          <a:fillRef idx="3">
+            <a:schemeClr val="accent1"/>
+          </a:fillRef>
+          <a:effectRef idx="2">
+            <a:schemeClr val="accent1"/>
+          </a:effectRef>
+          <a:fontRef idx="minor">
+            <a:schemeClr val="lt1"/>
+          </a:fontRef>
+        </p:style>
+        <p:txBody>
+          <a:bodyPr rtlCol="0" anchor="ctr"/>
+          <a:lstStyle/>
+          <a:p>
+            <a:pPr algn="ctr"/>
+          </a:p>
+        </p:txBody>
+      </p:sp>
+      <p:pic>
+        <p:nvPicPr>
+          <p:cNvPr id="8" name="Picture 7" descr="fig4-sstar-invariance.png"/>
+          <p:cNvPicPr>
+            <a:picLocks noChangeAspect="1"/>
+          </p:cNvPicPr>
+          <p:nvPr/>
+        </p:nvPicPr>
+        <p:blipFill>
+          <a:blip r:embed="rId2"/>
+          <a:stretch>
+            <a:fillRect/>
+          </a:stretch>
+        </p:blipFill>
+        <p:spPr>
+          <a:xfrm>
+            <a:off x="931773" y="3429000"/>
+            <a:ext cx="4674412" cy="1947672"/>
+          </a:xfrm>
+          <a:prstGeom prst="rect">
+            <a:avLst/>
+          </a:prstGeom>
+        </p:spPr>
+      </p:pic>
+      <p:sp>
+        <p:nvSpPr>
+          <p:cNvPr id="9" name="TextBox 8"/>
+          <p:cNvSpPr txBox="1"/>
+          <p:nvPr/>
+        </p:nvSpPr>
+        <p:spPr>
+          <a:xfrm>
+            <a:off x="502920" y="5394959"/>
+            <a:ext cx="5532120" cy="365760"/>
+          </a:xfrm>
+          <a:prstGeom prst="rect">
+            <a:avLst/>
+          </a:prstGeom>
+          <a:noFill/>
+        </p:spPr>
+        <p:txBody>
+          <a:bodyPr wrap="square" anchor="t" lIns="38100" rIns="38100" tIns="25400" bIns="25400">
+            <a:spAutoFit/>
+          </a:bodyPr>
+          <a:lstStyle/>
+          <a:p>
+            <a:pPr algn="ctr">
+              <a:lnSpc>
+                <a:spcPct val="120000"/>
+              </a:lnSpc>
+              <a:spcBef>
+                <a:spcPts val="0"/>
+              </a:spcBef>
+              <a:spcAft>
+                <a:spcPts val="0"/>
+              </a:spcAft>
+            </a:pPr>
+            <a:r>
+              <a:rPr sz="1050" b="0" i="0">
+                <a:solidFill>
+                  <a:srgbClr val="22252B"/>
+                </a:solidFill>
+                <a:latin typeface="Noto Sans CJK KR"/>
+              </a:rPr>
+              <a:t>S*(KV↔TTT 교차점)=65536 tokens — 8개 가속기 전부 동일 = 하드웨어가 아니라 workload의 성질</a:t>
+            </a:r>
+          </a:p>
+        </p:txBody>
+      </p:sp>
+      <p:sp>
+        <p:nvSpPr>
+          <p:cNvPr id="10" name="Rounded Rectangle 9"/>
+          <p:cNvSpPr/>
+          <p:nvPr/>
+        </p:nvSpPr>
+        <p:spPr>
+          <a:xfrm>
+            <a:off x="6172200" y="3429000"/>
+            <a:ext cx="5486400" cy="2103120"/>
+          </a:xfrm>
+          <a:prstGeom prst="roundRect">
+            <a:avLst/>
+          </a:prstGeom>
+          <a:solidFill>
+            <a:srgbClr val="F6ECC7"/>
+          </a:solidFill>
+          <a:ln w="12700">
+            <a:solidFill>
+              <a:srgbClr val="C9A227"/>
+            </a:solidFill>
+          </a:ln>
+          <a:effectLst/>
+        </p:spPr>
+        <p:style>
+          <a:lnRef idx="1">
+            <a:schemeClr val="accent1"/>
+          </a:lnRef>
+          <a:fillRef idx="3">
+            <a:schemeClr val="accent1"/>
+          </a:fillRef>
+          <a:effectRef idx="2">
+            <a:schemeClr val="accent1"/>
+          </a:effectRef>
+          <a:fontRef idx="minor">
+            <a:schemeClr val="lt1"/>
+          </a:fontRef>
+        </p:style>
+        <p:txBody>
+          <a:bodyPr rtlCol="0" anchor="ctr" wrap="square" lIns="76200" rIns="76200" tIns="38100" bIns="38100"/>
+          <a:lstStyle/>
+          <a:p>
+            <a:pPr algn="l">
+              <a:lnSpc>
+                <a:spcPct val="118000"/>
+              </a:lnSpc>
+              <a:spcBef>
+                <a:spcPts val="0"/>
+              </a:spcBef>
+              <a:spcAft>
+                <a:spcPts val="500"/>
+              </a:spcAft>
+            </a:pPr>
+            <a:r>
+              <a:rPr sz="1300" b="1" i="0">
+                <a:solidFill>
+                  <a:srgbClr val="C9A227"/>
+                </a:solidFill>
+                <a:latin typeface="Noto Sans CJK KR"/>
+              </a:rPr>
+              <a:t>왜 중요한가</a:t>
+            </a:r>
+          </a:p>
+          <a:p>
+            <a:pPr algn="l">
+              <a:lnSpc>
+                <a:spcPct val="118000"/>
+              </a:lnSpc>
+              <a:spcBef>
+                <a:spcPts val="0"/>
+              </a:spcBef>
+              <a:spcAft>
+                <a:spcPts val="300"/>
+              </a:spcAft>
+            </a:pPr>
+            <a:r>
+              <a:rPr sz="1250" b="0" i="0">
+                <a:solidFill>
+                  <a:srgbClr val="22252B"/>
+                </a:solidFill>
+                <a:latin typeface="Noto Sans CJK KR"/>
+              </a:rPr>
+              <a:t>메모리 상태를 갱신하는 이 계열은 디코드에서 구조적으로 memory-bound다. 그리고 그 경계(S*)는 하드웨어를 바꿔도 변하지 않는다(invariant). 즉 '어느 칩을 써도' 디코드 비용은 메모리 대역폭이 지배한다.</a:t>
+            </a:r>
+          </a:p>
+          <a:p>
+            <a:pPr algn="l">
+              <a:lnSpc>
+                <a:spcPct val="118000"/>
+              </a:lnSpc>
+              <a:spcBef>
+                <a:spcPts val="0"/>
+              </a:spcBef>
+              <a:spcAft>
+                <a:spcPts val="300"/>
+              </a:spcAft>
+            </a:pPr>
+            <a:r>
+              <a:rPr sz="1200" b="1" i="0">
+                <a:solidFill>
+                  <a:srgbClr val="2A6F97"/>
+                </a:solidFill>
+                <a:latin typeface="Noto Sans CJK KR"/>
+              </a:rPr>
+              <a:t>→ 이후 슬라이드: 실제 8칩 측정 · HOPE block roofline · 메모리 기술(zHBM/PIM/SRAM) · 청사진.</a:t>
+            </a:r>
+          </a:p>
+        </p:txBody>
+      </p:sp>
+    </p:spTree>
+  </p:cSld>
+  <p:clrMapOvr>
+    <a:masterClrMapping/>
+  </p:clrMapOvr>
+</p:sld>
+</file>
+
+<file path=ppt/slides/slide43.xml><?xml version="1.0" encoding="utf-8"?>
+<p:sld xmlns:a="http://schemas.openxmlformats.org/drawingml/2006/main" xmlns:p="http://schemas.openxmlformats.org/presentationml/2006/main" xmlns:r="http://schemas.openxmlformats.org/officeDocument/2006/relationships">
+  <p:cSld>
+    <p:spTree>
+      <p:nvGrpSpPr>
+        <p:cNvPr id="1" name=""/>
+        <p:cNvGrpSpPr/>
+        <p:nvPr/>
+      </p:nvGrpSpPr>
+      <p:grpSpPr/>
+      <p:sp>
+        <p:nvSpPr>
+          <p:cNvPr id="2" name="Rectangle 1"/>
+          <p:cNvSpPr/>
+          <p:nvPr/>
+        </p:nvSpPr>
+        <p:spPr>
+          <a:xfrm>
+            <a:off x="0" y="0"/>
+            <a:ext cx="12191695" cy="54864"/>
+          </a:xfrm>
+          <a:prstGeom prst="rect">
+            <a:avLst/>
+          </a:prstGeom>
+          <a:solidFill>
+            <a:srgbClr val="C9A227"/>
+          </a:solidFill>
+          <a:ln w="12700">
+            <a:solidFill>
+              <a:srgbClr val="C9A227"/>
+            </a:solidFill>
+          </a:ln>
+          <a:effectLst/>
+        </p:spPr>
+        <p:style>
+          <a:lnRef idx="1">
+            <a:schemeClr val="accent1"/>
+          </a:lnRef>
+          <a:fillRef idx="3">
+            <a:schemeClr val="accent1"/>
+          </a:fillRef>
+          <a:effectRef idx="2">
+            <a:schemeClr val="accent1"/>
+          </a:effectRef>
+          <a:fontRef idx="minor">
+            <a:schemeClr val="lt1"/>
+          </a:fontRef>
+        </p:style>
+        <p:txBody>
+          <a:bodyPr rtlCol="0" anchor="ctr" wrap="square" lIns="76200" rIns="76200" tIns="38100" bIns="38100"/>
+          <a:lstStyle/>
+          <a:p>
+            <a:pPr algn="ctr">
+              <a:lnSpc>
+                <a:spcPct val="118000"/>
+              </a:lnSpc>
+              <a:spcBef>
+                <a:spcPts val="0"/>
+              </a:spcBef>
+              <a:spcAft>
+                <a:spcPts val="300"/>
+              </a:spcAft>
+            </a:pPr>
+            <a:r>
+              <a:rPr sz="1100" b="0" i="0">
+                <a:solidFill>
+                  <a:srgbClr val="22252B"/>
+                </a:solidFill>
+                <a:latin typeface="Noto Sans CJK KR"/>
+              </a:rPr>
+              <a:t/>
+            </a:r>
+          </a:p>
+        </p:txBody>
+      </p:sp>
+      <p:sp>
+        <p:nvSpPr>
+          <p:cNvPr id="3" name="TextBox 2"/>
+          <p:cNvSpPr txBox="1"/>
+          <p:nvPr/>
+        </p:nvSpPr>
+        <p:spPr>
+          <a:xfrm>
+            <a:off x="502920" y="146304"/>
+            <a:ext cx="11185855" cy="320040"/>
+          </a:xfrm>
+          <a:prstGeom prst="rect">
+            <a:avLst/>
+          </a:prstGeom>
+          <a:noFill/>
+        </p:spPr>
+        <p:txBody>
+          <a:bodyPr wrap="square" anchor="t" lIns="38100" rIns="38100" tIns="25400" bIns="25400">
+            <a:spAutoFit/>
+          </a:bodyPr>
+          <a:lstStyle/>
+          <a:p>
+            <a:pPr algn="l">
+              <a:lnSpc>
+                <a:spcPct val="120000"/>
+              </a:lnSpc>
+              <a:spcBef>
+                <a:spcPts val="0"/>
+              </a:spcBef>
+              <a:spcAft>
+                <a:spcPts val="0"/>
+              </a:spcAft>
+            </a:pPr>
+            <a:r>
+              <a:rPr sz="1350" b="1" i="0">
+                <a:solidFill>
+                  <a:srgbClr val="C9A227"/>
+                </a:solidFill>
+                <a:latin typeface="Noto Sans CJK KR"/>
+              </a:rPr>
+              <a:t>C2 · 8개 가속기 크로스 측정</a:t>
+            </a:r>
+          </a:p>
+        </p:txBody>
+      </p:sp>
+      <p:sp>
+        <p:nvSpPr>
+          <p:cNvPr id="4" name="TextBox 3"/>
+          <p:cNvSpPr txBox="1"/>
+          <p:nvPr/>
+        </p:nvSpPr>
+        <p:spPr>
+          <a:xfrm>
+            <a:off x="502920" y="457200"/>
+            <a:ext cx="11185855" cy="566928"/>
+          </a:xfrm>
+          <a:prstGeom prst="rect">
+            <a:avLst/>
+          </a:prstGeom>
+          <a:noFill/>
+        </p:spPr>
+        <p:txBody>
+          <a:bodyPr wrap="square" anchor="t" lIns="38100" rIns="38100" tIns="25400" bIns="25400">
+            <a:spAutoFit/>
+          </a:bodyPr>
+          <a:lstStyle/>
+          <a:p>
+            <a:pPr algn="l">
+              <a:lnSpc>
+                <a:spcPct val="120000"/>
+              </a:lnSpc>
+              <a:spcBef>
+                <a:spcPts val="0"/>
+              </a:spcBef>
+              <a:spcAft>
+                <a:spcPts val="0"/>
+              </a:spcAft>
+            </a:pPr>
+            <a:r>
+              <a:rPr sz="2400" b="1" i="0">
+                <a:solidFill>
+                  <a:srgbClr val="22252B"/>
+                </a:solidFill>
+                <a:latin typeface="Noto Sans CJK KR"/>
+              </a:rPr>
+              <a:t>5자릿수 스프레드, 그러나 대부분 memory-bound</a:t>
+            </a:r>
+          </a:p>
+        </p:txBody>
+      </p:sp>
+      <p:sp>
+        <p:nvSpPr>
+          <p:cNvPr id="5" name="Rectangle 4"/>
+          <p:cNvSpPr/>
+          <p:nvPr/>
+        </p:nvSpPr>
+        <p:spPr>
+          <a:xfrm>
+            <a:off x="466344" y="1482725"/>
+            <a:ext cx="5605272" cy="2685542"/>
+          </a:xfrm>
+          <a:prstGeom prst="rect">
+            <a:avLst/>
+          </a:prstGeom>
+          <a:noFill/>
+          <a:ln w="9525">
+            <a:solidFill>
+              <a:srgbClr val="8A8F98"/>
+            </a:solidFill>
+          </a:ln>
+          <a:effectLst/>
+        </p:spPr>
+        <p:style>
+          <a:lnRef idx="1">
+            <a:schemeClr val="accent1"/>
+          </a:lnRef>
+          <a:fillRef idx="3">
+            <a:schemeClr val="accent1"/>
+          </a:fillRef>
+          <a:effectRef idx="2">
+            <a:schemeClr val="accent1"/>
+          </a:effectRef>
+          <a:fontRef idx="minor">
+            <a:schemeClr val="lt1"/>
+          </a:fontRef>
+        </p:style>
+        <p:txBody>
+          <a:bodyPr rtlCol="0" anchor="ctr"/>
+          <a:lstStyle/>
+          <a:p>
+            <a:pPr algn="ctr"/>
+          </a:p>
+        </p:txBody>
+      </p:sp>
+      <p:pic>
+        <p:nvPicPr>
+          <p:cNvPr id="6" name="Picture 5" descr="fig1-decode-ms.png"/>
+          <p:cNvPicPr>
+            <a:picLocks noChangeAspect="1"/>
+          </p:cNvPicPr>
+          <p:nvPr/>
+        </p:nvPicPr>
+        <p:blipFill>
+          <a:blip r:embed="rId2"/>
+          <a:stretch>
+            <a:fillRect/>
+          </a:stretch>
+        </p:blipFill>
+        <p:spPr>
+          <a:xfrm>
+            <a:off x="502920" y="1519301"/>
+            <a:ext cx="5532120" cy="2612390"/>
+          </a:xfrm>
+          <a:prstGeom prst="rect">
+            <a:avLst/>
+          </a:prstGeom>
+        </p:spPr>
+      </p:pic>
+      <p:sp>
+        <p:nvSpPr>
+          <p:cNvPr id="7" name="TextBox 6"/>
+          <p:cNvSpPr txBox="1"/>
+          <p:nvPr/>
+        </p:nvSpPr>
+        <p:spPr>
+          <a:xfrm>
+            <a:off x="502920" y="4297679"/>
+            <a:ext cx="5532120" cy="365760"/>
+          </a:xfrm>
+          <a:prstGeom prst="rect">
+            <a:avLst/>
+          </a:prstGeom>
+          <a:noFill/>
+        </p:spPr>
+        <p:txBody>
+          <a:bodyPr wrap="square" anchor="t" lIns="38100" rIns="38100" tIns="25400" bIns="25400">
+            <a:spAutoFit/>
+          </a:bodyPr>
+          <a:lstStyle/>
+          <a:p>
+            <a:pPr algn="ctr">
+              <a:lnSpc>
+                <a:spcPct val="120000"/>
+              </a:lnSpc>
+              <a:spcBef>
+                <a:spcPts val="0"/>
+              </a:spcBef>
+              <a:spcAft>
+                <a:spcPts val="0"/>
+              </a:spcAft>
+            </a:pPr>
+            <a:r>
+              <a:rPr sz="1050" b="0" i="0">
+                <a:solidFill>
+                  <a:srgbClr val="22252B"/>
+                </a:solidFill>
+                <a:latin typeface="Noto Sans CJK KR"/>
+              </a:rPr>
+              <a:t>토큰당 decode 시간(ideal 하한, log) — MTIA v2 ~31ms에서 WSE-3 ~0.0003ms까지</a:t>
+            </a:r>
+          </a:p>
+        </p:txBody>
+      </p:sp>
+      <p:sp>
+        <p:nvSpPr>
+          <p:cNvPr id="8" name="Rectangle 7"/>
+          <p:cNvSpPr/>
+          <p:nvPr/>
+        </p:nvSpPr>
+        <p:spPr>
+          <a:xfrm>
+            <a:off x="6227064" y="1664970"/>
+            <a:ext cx="5468112" cy="2321052"/>
+          </a:xfrm>
+          <a:prstGeom prst="rect">
+            <a:avLst/>
+          </a:prstGeom>
+          <a:noFill/>
+          <a:ln w="9525">
+            <a:solidFill>
+              <a:srgbClr val="8A8F98"/>
+            </a:solidFill>
+          </a:ln>
+          <a:effectLst/>
+        </p:spPr>
+        <p:style>
+          <a:lnRef idx="1">
+            <a:schemeClr val="accent1"/>
+          </a:lnRef>
+          <a:fillRef idx="3">
+            <a:schemeClr val="accent1"/>
+          </a:fillRef>
+          <a:effectRef idx="2">
+            <a:schemeClr val="accent1"/>
+          </a:effectRef>
+          <a:fontRef idx="minor">
+            <a:schemeClr val="lt1"/>
+          </a:fontRef>
+        </p:style>
+        <p:txBody>
+          <a:bodyPr rtlCol="0" anchor="ctr"/>
+          <a:lstStyle/>
+          <a:p>
+            <a:pPr algn="ctr"/>
+          </a:p>
+        </p:txBody>
+      </p:sp>
+      <p:pic>
+        <p:nvPicPr>
+          <p:cNvPr id="9" name="Picture 8" descr="fig4-sstar-invariance.png"/>
+          <p:cNvPicPr>
+            <a:picLocks noChangeAspect="1"/>
+          </p:cNvPicPr>
+          <p:nvPr/>
+        </p:nvPicPr>
+        <p:blipFill>
+          <a:blip r:embed="rId3"/>
+          <a:stretch>
+            <a:fillRect/>
+          </a:stretch>
+        </p:blipFill>
+        <p:spPr>
+          <a:xfrm>
+            <a:off x="6263640" y="1701546"/>
+            <a:ext cx="5394960" cy="2247900"/>
+          </a:xfrm>
+          <a:prstGeom prst="rect">
+            <a:avLst/>
+          </a:prstGeom>
+        </p:spPr>
+      </p:pic>
+      <p:sp>
+        <p:nvSpPr>
+          <p:cNvPr id="10" name="TextBox 9"/>
+          <p:cNvSpPr txBox="1"/>
+          <p:nvPr/>
+        </p:nvSpPr>
+        <p:spPr>
+          <a:xfrm>
+            <a:off x="6263640" y="4297679"/>
+            <a:ext cx="5394960" cy="365760"/>
+          </a:xfrm>
+          <a:prstGeom prst="rect">
+            <a:avLst/>
+          </a:prstGeom>
+          <a:noFill/>
+        </p:spPr>
+        <p:txBody>
+          <a:bodyPr wrap="square" anchor="t" lIns="38100" rIns="38100" tIns="25400" bIns="25400">
+            <a:spAutoFit/>
+          </a:bodyPr>
+          <a:lstStyle/>
+          <a:p>
+            <a:pPr algn="ctr">
+              <a:lnSpc>
+                <a:spcPct val="120000"/>
+              </a:lnSpc>
+              <a:spcBef>
+                <a:spcPts val="0"/>
+              </a:spcBef>
+              <a:spcAft>
+                <a:spcPts val="0"/>
+              </a:spcAft>
+            </a:pPr>
+            <a:r>
+              <a:rPr sz="1050" b="0" i="0">
+                <a:solidFill>
+                  <a:srgbClr val="22252B"/>
+                </a:solidFill>
+                <a:latin typeface="Noto Sans CJK KR"/>
+              </a:rPr>
+              <a:t>S* 불변: 8개 아키텍처가 같은 교차점 — workload 고유 성질</a:t>
+            </a:r>
+          </a:p>
+        </p:txBody>
+      </p:sp>
+      <p:sp>
+        <p:nvSpPr>
+          <p:cNvPr id="11" name="Rounded Rectangle 10"/>
+          <p:cNvSpPr/>
+          <p:nvPr/>
+        </p:nvSpPr>
+        <p:spPr>
+          <a:xfrm>
+            <a:off x="502920" y="4800600"/>
+            <a:ext cx="11155680" cy="914400"/>
+          </a:xfrm>
+          <a:prstGeom prst="roundRect">
+            <a:avLst/>
+          </a:prstGeom>
+          <a:solidFill>
+            <a:srgbClr val="ECEEF1"/>
+          </a:solidFill>
+          <a:ln w="12700">
+            <a:solidFill>
+              <a:srgbClr val="8A8F98"/>
+            </a:solidFill>
+          </a:ln>
+          <a:effectLst/>
+        </p:spPr>
+        <p:style>
+          <a:lnRef idx="1">
+            <a:schemeClr val="accent1"/>
+          </a:lnRef>
+          <a:fillRef idx="3">
+            <a:schemeClr val="accent1"/>
+          </a:fillRef>
+          <a:effectRef idx="2">
+            <a:schemeClr val="accent1"/>
+          </a:effectRef>
+          <a:fontRef idx="minor">
+            <a:schemeClr val="lt1"/>
+          </a:fontRef>
+        </p:style>
+        <p:txBody>
+          <a:bodyPr rtlCol="0" anchor="ctr" wrap="square" lIns="76200" rIns="76200" tIns="38100" bIns="38100"/>
+          <a:lstStyle/>
+          <a:p>
+            <a:pPr algn="l">
+              <a:lnSpc>
+                <a:spcPct val="118000"/>
+              </a:lnSpc>
+              <a:spcBef>
+                <a:spcPts val="0"/>
+              </a:spcBef>
+              <a:spcAft>
+                <a:spcPts val="200"/>
+              </a:spcAft>
+            </a:pPr>
+            <a:r>
+              <a:rPr sz="1250" b="1" i="0">
+                <a:solidFill>
+                  <a:srgbClr val="22252B"/>
+                </a:solidFill>
+                <a:latin typeface="Noto Sans CJK KR"/>
+              </a:rPr>
+              <a:t>읽는 법</a:t>
+            </a:r>
+          </a:p>
+          <a:p>
+            <a:pPr algn="l">
+              <a:lnSpc>
+                <a:spcPct val="118000"/>
+              </a:lnSpc>
+              <a:spcBef>
+                <a:spcPts val="0"/>
+              </a:spcBef>
+              <a:spcAft>
+                <a:spcPts val="300"/>
+              </a:spcAft>
+            </a:pPr>
+            <a:r>
+              <a:rPr sz="1200" b="0" i="0">
+                <a:solidFill>
+                  <a:srgbClr val="22252B"/>
+                </a:solidFill>
+                <a:latin typeface="Noto Sans CJK KR"/>
+              </a:rPr>
+              <a:t>8칩 중 7개가 memory-bound(대역폭이 결정). 예외는 WSE-3(Cerebras) — 거대한 on-chip SRAM으로 상태를 상주시켜 compute 쪽으로 넘어가는 'knee'가 생긴다. 각 칩 spec은 HAT hw twin으로 검증(die/PE 구조까지).</a:t>
+            </a:r>
+          </a:p>
+        </p:txBody>
+      </p:sp>
+    </p:spTree>
+  </p:cSld>
+  <p:clrMapOvr>
+    <a:masterClrMapping/>
+  </p:clrMapOvr>
+</p:sld>
+</file>
+
+<file path=ppt/slides/slide44.xml><?xml version="1.0" encoding="utf-8"?>
+<p:sld xmlns:a="http://schemas.openxmlformats.org/drawingml/2006/main" xmlns:p="http://schemas.openxmlformats.org/presentationml/2006/main" xmlns:r="http://schemas.openxmlformats.org/officeDocument/2006/relationships">
+  <p:cSld>
+    <p:spTree>
+      <p:nvGrpSpPr>
+        <p:cNvPr id="1" name=""/>
+        <p:cNvGrpSpPr/>
+        <p:nvPr/>
+      </p:nvGrpSpPr>
+      <p:grpSpPr/>
+      <p:sp>
+        <p:nvSpPr>
+          <p:cNvPr id="2" name="Rectangle 1"/>
+          <p:cNvSpPr/>
+          <p:nvPr/>
+        </p:nvSpPr>
+        <p:spPr>
+          <a:xfrm>
+            <a:off x="0" y="0"/>
+            <a:ext cx="12191695" cy="54864"/>
+          </a:xfrm>
+          <a:prstGeom prst="rect">
+            <a:avLst/>
+          </a:prstGeom>
+          <a:solidFill>
+            <a:srgbClr val="C9A227"/>
+          </a:solidFill>
+          <a:ln w="12700">
+            <a:solidFill>
+              <a:srgbClr val="C9A227"/>
+            </a:solidFill>
+          </a:ln>
+          <a:effectLst/>
+        </p:spPr>
+        <p:style>
+          <a:lnRef idx="1">
+            <a:schemeClr val="accent1"/>
+          </a:lnRef>
+          <a:fillRef idx="3">
+            <a:schemeClr val="accent1"/>
+          </a:fillRef>
+          <a:effectRef idx="2">
+            <a:schemeClr val="accent1"/>
+          </a:effectRef>
+          <a:fontRef idx="minor">
+            <a:schemeClr val="lt1"/>
+          </a:fontRef>
+        </p:style>
+        <p:txBody>
+          <a:bodyPr rtlCol="0" anchor="ctr" wrap="square" lIns="76200" rIns="76200" tIns="38100" bIns="38100"/>
+          <a:lstStyle/>
+          <a:p>
+            <a:pPr algn="ctr">
+              <a:lnSpc>
+                <a:spcPct val="118000"/>
+              </a:lnSpc>
+              <a:spcBef>
+                <a:spcPts val="0"/>
+              </a:spcBef>
+              <a:spcAft>
+                <a:spcPts val="300"/>
+              </a:spcAft>
+            </a:pPr>
+            <a:r>
+              <a:rPr sz="1100" b="0" i="0">
+                <a:solidFill>
+                  <a:srgbClr val="22252B"/>
+                </a:solidFill>
+                <a:latin typeface="Noto Sans CJK KR"/>
+              </a:rPr>
+              <a:t/>
+            </a:r>
+          </a:p>
+        </p:txBody>
+      </p:sp>
+      <p:sp>
+        <p:nvSpPr>
+          <p:cNvPr id="3" name="TextBox 2"/>
+          <p:cNvSpPr txBox="1"/>
+          <p:nvPr/>
+        </p:nvSpPr>
+        <p:spPr>
+          <a:xfrm>
+            <a:off x="502920" y="146304"/>
+            <a:ext cx="11185855" cy="320040"/>
+          </a:xfrm>
+          <a:prstGeom prst="rect">
+            <a:avLst/>
+          </a:prstGeom>
+          <a:noFill/>
+        </p:spPr>
+        <p:txBody>
+          <a:bodyPr wrap="square" anchor="t" lIns="38100" rIns="38100" tIns="25400" bIns="25400">
+            <a:spAutoFit/>
+          </a:bodyPr>
+          <a:lstStyle/>
+          <a:p>
+            <a:pPr algn="l">
+              <a:lnSpc>
+                <a:spcPct val="120000"/>
+              </a:lnSpc>
+              <a:spcBef>
+                <a:spcPts val="0"/>
+              </a:spcBef>
+              <a:spcAft>
+                <a:spcPts val="0"/>
+              </a:spcAft>
+            </a:pPr>
+            <a:r>
+              <a:rPr sz="1350" b="1" i="0">
+                <a:solidFill>
+                  <a:srgbClr val="C9A227"/>
+                </a:solidFill>
+                <a:latin typeface="Noto Sans CJK KR"/>
+              </a:rPr>
+              <a:t>C3 · HOPE block roofline (H100 트윈)</a:t>
+            </a:r>
+          </a:p>
+        </p:txBody>
+      </p:sp>
+      <p:sp>
+        <p:nvSpPr>
+          <p:cNvPr id="4" name="TextBox 3"/>
+          <p:cNvSpPr txBox="1"/>
+          <p:nvPr/>
+        </p:nvSpPr>
+        <p:spPr>
+          <a:xfrm>
+            <a:off x="502920" y="457200"/>
+            <a:ext cx="11185855" cy="566928"/>
+          </a:xfrm>
+          <a:prstGeom prst="rect">
+            <a:avLst/>
+          </a:prstGeom>
+          <a:noFill/>
+        </p:spPr>
+        <p:txBody>
+          <a:bodyPr wrap="square" anchor="t" lIns="38100" rIns="38100" tIns="25400" bIns="25400">
+            <a:spAutoFit/>
+          </a:bodyPr>
+          <a:lstStyle/>
+          <a:p>
+            <a:pPr algn="l">
+              <a:lnSpc>
+                <a:spcPct val="120000"/>
+              </a:lnSpc>
+              <a:spcBef>
+                <a:spcPts val="0"/>
+              </a:spcBef>
+              <a:spcAft>
+                <a:spcPts val="0"/>
+              </a:spcAft>
+            </a:pPr>
+            <a:r>
+              <a:rPr sz="2400" b="1" i="0">
+                <a:solidFill>
+                  <a:srgbClr val="22252B"/>
+                </a:solidFill>
+                <a:latin typeface="Noto Sans CJK KR"/>
+              </a:rPr>
+              <a:t>1개 HOPE block을 실제 수치로 — 어디가 병목인가</a:t>
+            </a:r>
+          </a:p>
+        </p:txBody>
+      </p:sp>
+      <p:sp>
+        <p:nvSpPr>
+          <p:cNvPr id="5" name="Rectangle 4"/>
+          <p:cNvSpPr/>
+          <p:nvPr/>
+        </p:nvSpPr>
+        <p:spPr>
+          <a:xfrm>
+            <a:off x="643845" y="1335024"/>
+            <a:ext cx="5250269" cy="2889504"/>
+          </a:xfrm>
+          <a:prstGeom prst="rect">
+            <a:avLst/>
+          </a:prstGeom>
+          <a:noFill/>
+          <a:ln w="9525">
+            <a:solidFill>
+              <a:srgbClr val="8A8F98"/>
+            </a:solidFill>
+          </a:ln>
+          <a:effectLst/>
+        </p:spPr>
+        <p:style>
+          <a:lnRef idx="1">
+            <a:schemeClr val="accent1"/>
+          </a:lnRef>
+          <a:fillRef idx="3">
+            <a:schemeClr val="accent1"/>
+          </a:fillRef>
+          <a:effectRef idx="2">
+            <a:schemeClr val="accent1"/>
+          </a:effectRef>
+          <a:fontRef idx="minor">
+            <a:schemeClr val="lt1"/>
+          </a:fontRef>
+        </p:style>
+        <p:txBody>
+          <a:bodyPr rtlCol="0" anchor="ctr"/>
+          <a:lstStyle/>
+          <a:p>
+            <a:pPr algn="ctr"/>
+          </a:p>
+        </p:txBody>
+      </p:sp>
+      <p:pic>
+        <p:nvPicPr>
+          <p:cNvPr id="6" name="Picture 5" descr="fig-hope-dag.png"/>
+          <p:cNvPicPr>
+            <a:picLocks noChangeAspect="1"/>
+          </p:cNvPicPr>
+          <p:nvPr/>
+        </p:nvPicPr>
+        <p:blipFill>
+          <a:blip r:embed="rId2"/>
+          <a:stretch>
+            <a:fillRect/>
+          </a:stretch>
+        </p:blipFill>
+        <p:spPr>
+          <a:xfrm>
+            <a:off x="680421" y="1371600"/>
+            <a:ext cx="5177117" cy="2816352"/>
+          </a:xfrm>
+          <a:prstGeom prst="rect">
+            <a:avLst/>
+          </a:prstGeom>
+        </p:spPr>
+      </p:pic>
+      <p:sp>
+        <p:nvSpPr>
+          <p:cNvPr id="7" name="TextBox 6"/>
+          <p:cNvSpPr txBox="1"/>
+          <p:nvPr/>
+        </p:nvSpPr>
+        <p:spPr>
+          <a:xfrm>
+            <a:off x="502920" y="4206240"/>
+            <a:ext cx="5532120" cy="365760"/>
+          </a:xfrm>
+          <a:prstGeom prst="rect">
+            <a:avLst/>
+          </a:prstGeom>
+          <a:noFill/>
+        </p:spPr>
+        <p:txBody>
+          <a:bodyPr wrap="square" anchor="t" lIns="38100" rIns="38100" tIns="25400" bIns="25400">
+            <a:spAutoFit/>
+          </a:bodyPr>
+          <a:lstStyle/>
+          <a:p>
+            <a:pPr algn="ctr">
+              <a:lnSpc>
+                <a:spcPct val="120000"/>
+              </a:lnSpc>
+              <a:spcBef>
+                <a:spcPts val="0"/>
+              </a:spcBef>
+              <a:spcAft>
+                <a:spcPts val="0"/>
+              </a:spcAft>
+            </a:pPr>
+            <a:r>
+              <a:rPr sz="1050" b="0" i="0">
+                <a:solidFill>
+                  <a:srgbClr val="22252B"/>
+                </a:solidFill>
+                <a:latin typeface="Noto Sans CJK KR"/>
+              </a:rPr>
+              <a:t>1 HOPE block(self-mod Titans→CMS)의 전 연산 DAG (B=1, chunk C, d=2048)</a:t>
+            </a:r>
+          </a:p>
+        </p:txBody>
+      </p:sp>
+      <p:sp>
+        <p:nvSpPr>
+          <p:cNvPr id="8" name="Rectangle 7"/>
+          <p:cNvSpPr/>
+          <p:nvPr/>
+        </p:nvSpPr>
+        <p:spPr>
+          <a:xfrm>
+            <a:off x="6227064" y="1901586"/>
+            <a:ext cx="5468112" cy="1756379"/>
+          </a:xfrm>
+          <a:prstGeom prst="rect">
+            <a:avLst/>
+          </a:prstGeom>
+          <a:noFill/>
+          <a:ln w="9525">
+            <a:solidFill>
+              <a:srgbClr val="8A8F98"/>
+            </a:solidFill>
+          </a:ln>
+          <a:effectLst/>
+        </p:spPr>
+        <p:style>
+          <a:lnRef idx="1">
+            <a:schemeClr val="accent1"/>
+          </a:lnRef>
+          <a:fillRef idx="3">
+            <a:schemeClr val="accent1"/>
+          </a:fillRef>
+          <a:effectRef idx="2">
+            <a:schemeClr val="accent1"/>
+          </a:effectRef>
+          <a:fontRef idx="minor">
+            <a:schemeClr val="lt1"/>
+          </a:fontRef>
+        </p:style>
+        <p:txBody>
+          <a:bodyPr rtlCol="0" anchor="ctr"/>
+          <a:lstStyle/>
+          <a:p>
+            <a:pPr algn="ctr"/>
+          </a:p>
+        </p:txBody>
+      </p:sp>
+      <p:pic>
+        <p:nvPicPr>
+          <p:cNvPr id="9" name="Picture 8" descr="fig-hope-roofline.png"/>
+          <p:cNvPicPr>
+            <a:picLocks noChangeAspect="1"/>
+          </p:cNvPicPr>
+          <p:nvPr/>
+        </p:nvPicPr>
+        <p:blipFill>
+          <a:blip r:embed="rId3"/>
+          <a:stretch>
+            <a:fillRect/>
+          </a:stretch>
+        </p:blipFill>
+        <p:spPr>
+          <a:xfrm>
+            <a:off x="6263640" y="1938162"/>
+            <a:ext cx="5394960" cy="1683227"/>
+          </a:xfrm>
+          <a:prstGeom prst="rect">
+            <a:avLst/>
+          </a:prstGeom>
+        </p:spPr>
+      </p:pic>
+      <p:sp>
+        <p:nvSpPr>
+          <p:cNvPr id="10" name="TextBox 9"/>
+          <p:cNvSpPr txBox="1"/>
+          <p:nvPr/>
+        </p:nvSpPr>
+        <p:spPr>
+          <a:xfrm>
+            <a:off x="6263640" y="4206240"/>
+            <a:ext cx="5394960" cy="365760"/>
+          </a:xfrm>
+          <a:prstGeom prst="rect">
+            <a:avLst/>
+          </a:prstGeom>
+          <a:noFill/>
+        </p:spPr>
+        <p:txBody>
+          <a:bodyPr wrap="square" anchor="t" lIns="38100" rIns="38100" tIns="25400" bIns="25400">
+            <a:spAutoFit/>
+          </a:bodyPr>
+          <a:lstStyle/>
+          <a:p>
+            <a:pPr algn="ctr">
+              <a:lnSpc>
+                <a:spcPct val="120000"/>
+              </a:lnSpc>
+              <a:spcBef>
+                <a:spcPts val="0"/>
+              </a:spcBef>
+              <a:spcAft>
+                <a:spcPts val="0"/>
+              </a:spcAft>
+            </a:pPr>
+            <a:r>
+              <a:rPr sz="1050" b="0" i="0">
+                <a:solidFill>
+                  <a:srgbClr val="22252B"/>
+                </a:solidFill>
+                <a:latin typeface="Noto Sans CJK KR"/>
+              </a:rPr>
+              <a:t>roofline·op별 시간·PIM 비교 (BW 3.35TB/s, peak 0.99PF, ridge 295)</a:t>
+            </a:r>
+          </a:p>
+        </p:txBody>
+      </p:sp>
+      <p:sp>
+        <p:nvSpPr>
+          <p:cNvPr id="11" name="Rounded Rectangle 10"/>
+          <p:cNvSpPr/>
+          <p:nvPr/>
+        </p:nvSpPr>
+        <p:spPr>
+          <a:xfrm>
+            <a:off x="502920" y="4709160"/>
+            <a:ext cx="11155680" cy="960120"/>
+          </a:xfrm>
+          <a:prstGeom prst="roundRect">
+            <a:avLst/>
+          </a:prstGeom>
+          <a:solidFill>
+            <a:srgbClr val="F6DDDD"/>
+          </a:solidFill>
+          <a:ln w="12700">
+            <a:solidFill>
+              <a:srgbClr val="C1121F"/>
+            </a:solidFill>
+          </a:ln>
+          <a:effectLst/>
+        </p:spPr>
+        <p:style>
+          <a:lnRef idx="1">
+            <a:schemeClr val="accent1"/>
+          </a:lnRef>
+          <a:fillRef idx="3">
+            <a:schemeClr val="accent1"/>
+          </a:fillRef>
+          <a:effectRef idx="2">
+            <a:schemeClr val="accent1"/>
+          </a:effectRef>
+          <a:fontRef idx="minor">
+            <a:schemeClr val="lt1"/>
+          </a:fontRef>
+        </p:style>
+        <p:txBody>
+          <a:bodyPr rtlCol="0" anchor="ctr" wrap="square" lIns="76200" rIns="76200" tIns="38100" bIns="38100"/>
+          <a:lstStyle/>
+          <a:p>
+            <a:pPr algn="l">
+              <a:lnSpc>
+                <a:spcPct val="118000"/>
+              </a:lnSpc>
+              <a:spcBef>
+                <a:spcPts val="0"/>
+              </a:spcBef>
+              <a:spcAft>
+                <a:spcPts val="200"/>
+              </a:spcAft>
+            </a:pPr>
+            <a:r>
+              <a:rPr sz="1250" b="1" i="0">
+                <a:solidFill>
+                  <a:srgbClr val="C1121F"/>
+                </a:solidFill>
+                <a:latin typeface="Noto Sans CJK KR"/>
+              </a:rPr>
+              <a:t>병목</a:t>
+            </a:r>
+          </a:p>
+          <a:p>
+            <a:pPr algn="l">
+              <a:lnSpc>
+                <a:spcPct val="118000"/>
+              </a:lnSpc>
+              <a:spcBef>
+                <a:spcPts val="0"/>
+              </a:spcBef>
+              <a:spcAft>
+                <a:spcPts val="300"/>
+              </a:spcAft>
+            </a:pPr>
+            <a:r>
+              <a:rPr sz="1200" b="0" i="0">
+                <a:solidFill>
+                  <a:srgbClr val="22252B"/>
+                </a:solidFill>
+                <a:latin typeface="Noto Sans CJK KR"/>
+              </a:rPr>
+              <a:t>C=1 디코드는 roofline 왼쪽(memory-bound). op별로 보면 CMS/DGD-apply의 state read-modify-write가 지배적. state(≈134MB) + weights를 매 토큰 HBM(3.35TB/s)에서 읽어야 해 block당 ~203µs(ideal 하한).</a:t>
+            </a:r>
+          </a:p>
+        </p:txBody>
+      </p:sp>
+    </p:spTree>
+  </p:cSld>
+  <p:clrMapOvr>
+    <a:masterClrMapping/>
+  </p:clrMapOvr>
+</p:sld>
+</file>
+
+<file path=ppt/slides/slide45.xml><?xml version="1.0" encoding="utf-8"?>
+<p:sld xmlns:a="http://schemas.openxmlformats.org/drawingml/2006/main" xmlns:p="http://schemas.openxmlformats.org/presentationml/2006/main" xmlns:r="http://schemas.openxmlformats.org/officeDocument/2006/relationships">
+  <p:cSld>
+    <p:spTree>
+      <p:nvGrpSpPr>
+        <p:cNvPr id="1" name=""/>
+        <p:cNvGrpSpPr/>
+        <p:nvPr/>
+      </p:nvGrpSpPr>
+      <p:grpSpPr/>
+      <p:sp>
+        <p:nvSpPr>
+          <p:cNvPr id="2" name="Rectangle 1"/>
+          <p:cNvSpPr/>
+          <p:nvPr/>
+        </p:nvSpPr>
+        <p:spPr>
+          <a:xfrm>
+            <a:off x="0" y="0"/>
+            <a:ext cx="12191695" cy="54864"/>
+          </a:xfrm>
+          <a:prstGeom prst="rect">
+            <a:avLst/>
+          </a:prstGeom>
+          <a:solidFill>
+            <a:srgbClr val="C9A227"/>
+          </a:solidFill>
+          <a:ln w="12700">
+            <a:solidFill>
+              <a:srgbClr val="C9A227"/>
+            </a:solidFill>
+          </a:ln>
+          <a:effectLst/>
+        </p:spPr>
+        <p:style>
+          <a:lnRef idx="1">
+            <a:schemeClr val="accent1"/>
+          </a:lnRef>
+          <a:fillRef idx="3">
+            <a:schemeClr val="accent1"/>
+          </a:fillRef>
+          <a:effectRef idx="2">
+            <a:schemeClr val="accent1"/>
+          </a:effectRef>
+          <a:fontRef idx="minor">
+            <a:schemeClr val="lt1"/>
+          </a:fontRef>
+        </p:style>
+        <p:txBody>
+          <a:bodyPr rtlCol="0" anchor="ctr" wrap="square" lIns="76200" rIns="76200" tIns="38100" bIns="38100"/>
+          <a:lstStyle/>
+          <a:p>
+            <a:pPr algn="ctr">
+              <a:lnSpc>
+                <a:spcPct val="118000"/>
+              </a:lnSpc>
+              <a:spcBef>
+                <a:spcPts val="0"/>
+              </a:spcBef>
+              <a:spcAft>
+                <a:spcPts val="300"/>
+              </a:spcAft>
+            </a:pPr>
+            <a:r>
+              <a:rPr sz="1100" b="0" i="0">
+                <a:solidFill>
+                  <a:srgbClr val="22252B"/>
+                </a:solidFill>
+                <a:latin typeface="Noto Sans CJK KR"/>
+              </a:rPr>
+              <a:t/>
+            </a:r>
+          </a:p>
+        </p:txBody>
+      </p:sp>
+      <p:sp>
+        <p:nvSpPr>
+          <p:cNvPr id="3" name="TextBox 2"/>
+          <p:cNvSpPr txBox="1"/>
+          <p:nvPr/>
+        </p:nvSpPr>
+        <p:spPr>
+          <a:xfrm>
+            <a:off x="502920" y="146304"/>
+            <a:ext cx="11185855" cy="320040"/>
+          </a:xfrm>
+          <a:prstGeom prst="rect">
+            <a:avLst/>
+          </a:prstGeom>
+          <a:noFill/>
+        </p:spPr>
+        <p:txBody>
+          <a:bodyPr wrap="square" anchor="t" lIns="38100" rIns="38100" tIns="25400" bIns="25400">
+            <a:spAutoFit/>
+          </a:bodyPr>
+          <a:lstStyle/>
+          <a:p>
+            <a:pPr algn="l">
+              <a:lnSpc>
+                <a:spcPct val="120000"/>
+              </a:lnSpc>
+              <a:spcBef>
+                <a:spcPts val="0"/>
+              </a:spcBef>
+              <a:spcAft>
+                <a:spcPts val="0"/>
+              </a:spcAft>
+            </a:pPr>
+            <a:r>
+              <a:rPr sz="1350" b="1" i="0">
+                <a:solidFill>
+                  <a:srgbClr val="C9A227"/>
+                </a:solidFill>
+                <a:latin typeface="Noto Sans CJK KR"/>
+              </a:rPr>
+              <a:t>C4 · 메모리 기술 — zHBM · HBM-PIM · SRAM</a:t>
+            </a:r>
+          </a:p>
+        </p:txBody>
+      </p:sp>
+      <p:sp>
+        <p:nvSpPr>
+          <p:cNvPr id="4" name="TextBox 3"/>
+          <p:cNvSpPr txBox="1"/>
+          <p:nvPr/>
+        </p:nvSpPr>
+        <p:spPr>
+          <a:xfrm>
+            <a:off x="502920" y="457200"/>
+            <a:ext cx="11185855" cy="566928"/>
+          </a:xfrm>
+          <a:prstGeom prst="rect">
+            <a:avLst/>
+          </a:prstGeom>
+          <a:noFill/>
+        </p:spPr>
+        <p:txBody>
+          <a:bodyPr wrap="square" anchor="t" lIns="38100" rIns="38100" tIns="25400" bIns="25400">
+            <a:spAutoFit/>
+          </a:bodyPr>
+          <a:lstStyle/>
+          <a:p>
+            <a:pPr algn="l">
+              <a:lnSpc>
+                <a:spcPct val="120000"/>
+              </a:lnSpc>
+              <a:spcBef>
+                <a:spcPts val="0"/>
+              </a:spcBef>
+              <a:spcAft>
+                <a:spcPts val="0"/>
+              </a:spcAft>
+            </a:pPr>
+            <a:r>
+              <a:rPr sz="2400" b="1" i="0">
+                <a:solidFill>
+                  <a:srgbClr val="22252B"/>
+                </a:solidFill>
+                <a:latin typeface="Noto Sans CJK KR"/>
+              </a:rPr>
+              <a:t>memory-bound라면 답은 '대역폭'과 '상주'</a:t>
+            </a:r>
+          </a:p>
+        </p:txBody>
+      </p:sp>
+      <p:sp>
+        <p:nvSpPr>
+          <p:cNvPr id="5" name="Rectangle 4"/>
+          <p:cNvSpPr/>
+          <p:nvPr/>
+        </p:nvSpPr>
+        <p:spPr>
+          <a:xfrm>
+            <a:off x="466344" y="1778706"/>
+            <a:ext cx="5605272" cy="2093578"/>
+          </a:xfrm>
+          <a:prstGeom prst="rect">
+            <a:avLst/>
+          </a:prstGeom>
+          <a:noFill/>
+          <a:ln w="9525">
+            <a:solidFill>
+              <a:srgbClr val="8A8F98"/>
+            </a:solidFill>
+          </a:ln>
+          <a:effectLst/>
+        </p:spPr>
+        <p:style>
+          <a:lnRef idx="1">
+            <a:schemeClr val="accent1"/>
+          </a:lnRef>
+          <a:fillRef idx="3">
+            <a:schemeClr val="accent1"/>
+          </a:fillRef>
+          <a:effectRef idx="2">
+            <a:schemeClr val="accent1"/>
+          </a:effectRef>
+          <a:fontRef idx="minor">
+            <a:schemeClr val="lt1"/>
+          </a:fontRef>
+        </p:style>
+        <p:txBody>
+          <a:bodyPr rtlCol="0" anchor="ctr"/>
+          <a:lstStyle/>
+          <a:p>
+            <a:pPr algn="ctr"/>
+          </a:p>
+        </p:txBody>
+      </p:sp>
+      <p:pic>
+        <p:nvPicPr>
+          <p:cNvPr id="6" name="Picture 5" descr="fig-zhbm-pim.png"/>
+          <p:cNvPicPr>
+            <a:picLocks noChangeAspect="1"/>
+          </p:cNvPicPr>
+          <p:nvPr/>
+        </p:nvPicPr>
+        <p:blipFill>
+          <a:blip r:embed="rId2"/>
+          <a:stretch>
+            <a:fillRect/>
+          </a:stretch>
+        </p:blipFill>
+        <p:spPr>
+          <a:xfrm>
+            <a:off x="502920" y="1815282"/>
+            <a:ext cx="5532120" cy="2020426"/>
+          </a:xfrm>
+          <a:prstGeom prst="rect">
+            <a:avLst/>
+          </a:prstGeom>
+        </p:spPr>
+      </p:pic>
+      <p:sp>
+        <p:nvSpPr>
+          <p:cNvPr id="7" name="TextBox 6"/>
+          <p:cNvSpPr txBox="1"/>
+          <p:nvPr/>
+        </p:nvSpPr>
+        <p:spPr>
+          <a:xfrm>
+            <a:off x="502920" y="4297679"/>
+            <a:ext cx="5532120" cy="365760"/>
+          </a:xfrm>
+          <a:prstGeom prst="rect">
+            <a:avLst/>
+          </a:prstGeom>
+          <a:noFill/>
+        </p:spPr>
+        <p:txBody>
+          <a:bodyPr wrap="square" anchor="t" lIns="38100" rIns="38100" tIns="25400" bIns="25400">
+            <a:spAutoFit/>
+          </a:bodyPr>
+          <a:lstStyle/>
+          <a:p>
+            <a:pPr algn="ctr">
+              <a:lnSpc>
+                <a:spcPct val="120000"/>
+              </a:lnSpc>
+              <a:spcBef>
+                <a:spcPts val="0"/>
+              </a:spcBef>
+              <a:spcAft>
+                <a:spcPts val="0"/>
+              </a:spcAft>
+            </a:pPr>
+            <a:r>
+              <a:rPr sz="1050" b="0" i="0">
+                <a:solidFill>
+                  <a:srgbClr val="22252B"/>
+                </a:solidFill>
+                <a:latin typeface="Noto Sans CJK KR"/>
+              </a:rPr>
+              <a:t>HBM/zHBM/HBM-PIM/zHBM-PIM decode 비용 + zHBM 내부 연산 추가 면적</a:t>
+            </a:r>
+          </a:p>
+        </p:txBody>
+      </p:sp>
+      <p:sp>
+        <p:nvSpPr>
+          <p:cNvPr id="8" name="Rectangle 7"/>
+          <p:cNvSpPr/>
+          <p:nvPr/>
+        </p:nvSpPr>
+        <p:spPr>
+          <a:xfrm>
+            <a:off x="6293684" y="1335024"/>
+            <a:ext cx="5334870" cy="2980944"/>
+          </a:xfrm>
+          <a:prstGeom prst="rect">
+            <a:avLst/>
+          </a:prstGeom>
+          <a:noFill/>
+          <a:ln w="9525">
+            <a:solidFill>
+              <a:srgbClr val="8A8F98"/>
+            </a:solidFill>
+          </a:ln>
+          <a:effectLst/>
+        </p:spPr>
+        <p:style>
+          <a:lnRef idx="1">
+            <a:schemeClr val="accent1"/>
+          </a:lnRef>
+          <a:fillRef idx="3">
+            <a:schemeClr val="accent1"/>
+          </a:fillRef>
+          <a:effectRef idx="2">
+            <a:schemeClr val="accent1"/>
+          </a:effectRef>
+          <a:fontRef idx="minor">
+            <a:schemeClr val="lt1"/>
+          </a:fontRef>
+        </p:style>
+        <p:txBody>
+          <a:bodyPr rtlCol="0" anchor="ctr"/>
+          <a:lstStyle/>
+          <a:p>
+            <a:pPr algn="ctr"/>
+          </a:p>
+        </p:txBody>
+      </p:sp>
+      <p:pic>
+        <p:nvPicPr>
+          <p:cNvPr id="9" name="Picture 8" descr="fig-sram-scaling.png"/>
+          <p:cNvPicPr>
+            <a:picLocks noChangeAspect="1"/>
+          </p:cNvPicPr>
+          <p:nvPr/>
+        </p:nvPicPr>
+        <p:blipFill>
+          <a:blip r:embed="rId3"/>
+          <a:stretch>
+            <a:fillRect/>
+          </a:stretch>
+        </p:blipFill>
+        <p:spPr>
+          <a:xfrm>
+            <a:off x="6330260" y="1371600"/>
+            <a:ext cx="5261718" cy="2907792"/>
+          </a:xfrm>
+          <a:prstGeom prst="rect">
+            <a:avLst/>
+          </a:prstGeom>
+        </p:spPr>
+      </p:pic>
+      <p:sp>
+        <p:nvSpPr>
+          <p:cNvPr id="10" name="TextBox 9"/>
+          <p:cNvSpPr txBox="1"/>
+          <p:nvPr/>
+        </p:nvSpPr>
+        <p:spPr>
+          <a:xfrm>
+            <a:off x="6263640" y="4297679"/>
+            <a:ext cx="5394960" cy="365760"/>
+          </a:xfrm>
+          <a:prstGeom prst="rect">
+            <a:avLst/>
+          </a:prstGeom>
+          <a:noFill/>
+        </p:spPr>
+        <p:txBody>
+          <a:bodyPr wrap="square" anchor="t" lIns="38100" rIns="38100" tIns="25400" bIns="25400">
+            <a:spAutoFit/>
+          </a:bodyPr>
+          <a:lstStyle/>
+          <a:p>
+            <a:pPr algn="ctr">
+              <a:lnSpc>
+                <a:spcPct val="120000"/>
+              </a:lnSpc>
+              <a:spcBef>
+                <a:spcPts val="0"/>
+              </a:spcBef>
+              <a:spcAft>
+                <a:spcPts val="0"/>
+              </a:spcAft>
+            </a:pPr>
+            <a:r>
+              <a:rPr sz="1050" b="0" i="0">
+                <a:solidFill>
+                  <a:srgbClr val="22252B"/>
+                </a:solidFill>
+                <a:latin typeface="Noto Sans CJK KR"/>
+              </a:rPr>
+              <a:t>on-chip SRAM 1x→10x: state가 상주하는 순간(5x~) HBM 대신 SRAM</a:t>
+            </a:r>
+          </a:p>
+        </p:txBody>
+      </p:sp>
+      <p:sp>
+        <p:nvSpPr>
+          <p:cNvPr id="11" name="Rounded Rectangle 10"/>
+          <p:cNvSpPr/>
+          <p:nvPr/>
+        </p:nvSpPr>
+        <p:spPr>
+          <a:xfrm>
+            <a:off x="502920" y="4800600"/>
+            <a:ext cx="11155680" cy="914400"/>
+          </a:xfrm>
+          <a:prstGeom prst="roundRect">
+            <a:avLst/>
+          </a:prstGeom>
+          <a:solidFill>
+            <a:srgbClr val="F6ECC7"/>
+          </a:solidFill>
+          <a:ln w="12700">
+            <a:solidFill>
+              <a:srgbClr val="C9A227"/>
+            </a:solidFill>
+          </a:ln>
+          <a:effectLst/>
+        </p:spPr>
+        <p:style>
+          <a:lnRef idx="1">
+            <a:schemeClr val="accent1"/>
+          </a:lnRef>
+          <a:fillRef idx="3">
+            <a:schemeClr val="accent1"/>
+          </a:fillRef>
+          <a:effectRef idx="2">
+            <a:schemeClr val="accent1"/>
+          </a:effectRef>
+          <a:fontRef idx="minor">
+            <a:schemeClr val="lt1"/>
+          </a:fontRef>
+        </p:style>
+        <p:txBody>
+          <a:bodyPr rtlCol="0" anchor="ctr" wrap="square" lIns="76200" rIns="76200" tIns="38100" bIns="38100"/>
+          <a:lstStyle/>
+          <a:p>
+            <a:pPr algn="l">
+              <a:lnSpc>
+                <a:spcPct val="118000"/>
+              </a:lnSpc>
+              <a:spcBef>
+                <a:spcPts val="0"/>
+              </a:spcBef>
+              <a:spcAft>
+                <a:spcPts val="200"/>
+              </a:spcAft>
+            </a:pPr>
+            <a:r>
+              <a:rPr sz="1250" b="1" i="0">
+                <a:solidFill>
+                  <a:srgbClr val="C9A227"/>
+                </a:solidFill>
+                <a:latin typeface="Noto Sans CJK KR"/>
+              </a:rPr>
+              <a:t>결론</a:t>
+            </a:r>
+          </a:p>
+          <a:p>
+            <a:pPr algn="l">
+              <a:lnSpc>
+                <a:spcPct val="118000"/>
+              </a:lnSpc>
+              <a:spcBef>
+                <a:spcPts val="0"/>
+              </a:spcBef>
+              <a:spcAft>
+                <a:spcPts val="300"/>
+              </a:spcAft>
+            </a:pPr>
+            <a:r>
+              <a:rPr sz="1200" b="0" i="0">
+                <a:solidFill>
+                  <a:srgbClr val="22252B"/>
+                </a:solidFill>
+                <a:latin typeface="Noto Sans CJK KR"/>
+              </a:rPr>
+              <a:t>zHBM(대역폭↑)이 HBM-PIM(in-bank 연산이 너무 느림)보다 유리. SRAM은 '문턱' 구조 — state(≈134MB)가 on-chip에 들어가는 5x(250MB)부터 이득(203→150µs), 10x(500MB)면 weights까지 전부 상주.</a:t>
+            </a:r>
+          </a:p>
+        </p:txBody>
+      </p:sp>
+    </p:spTree>
+  </p:cSld>
+  <p:clrMapOvr>
+    <a:masterClrMapping/>
+  </p:clrMapOvr>
+</p:sld>
+</file>
+
+<file path=ppt/slides/slide46.xml><?xml version="1.0" encoding="utf-8"?>
+<p:sld xmlns:a="http://schemas.openxmlformats.org/drawingml/2006/main" xmlns:p="http://schemas.openxmlformats.org/presentationml/2006/main" xmlns:r="http://schemas.openxmlformats.org/officeDocument/2006/relationships">
+  <p:cSld>
+    <p:spTree>
+      <p:nvGrpSpPr>
+        <p:cNvPr id="1" name=""/>
+        <p:cNvGrpSpPr/>
+        <p:nvPr/>
+      </p:nvGrpSpPr>
+      <p:grpSpPr/>
+      <p:sp>
+        <p:nvSpPr>
+          <p:cNvPr id="2" name="Rectangle 1"/>
+          <p:cNvSpPr/>
+          <p:nvPr/>
+        </p:nvSpPr>
+        <p:spPr>
+          <a:xfrm>
+            <a:off x="0" y="0"/>
+            <a:ext cx="12191695" cy="54864"/>
+          </a:xfrm>
+          <a:prstGeom prst="rect">
+            <a:avLst/>
+          </a:prstGeom>
+          <a:solidFill>
+            <a:srgbClr val="C9A227"/>
+          </a:solidFill>
+          <a:ln w="12700">
+            <a:solidFill>
+              <a:srgbClr val="C9A227"/>
+            </a:solidFill>
+          </a:ln>
+          <a:effectLst/>
+        </p:spPr>
+        <p:style>
+          <a:lnRef idx="1">
+            <a:schemeClr val="accent1"/>
+          </a:lnRef>
+          <a:fillRef idx="3">
+            <a:schemeClr val="accent1"/>
+          </a:fillRef>
+          <a:effectRef idx="2">
+            <a:schemeClr val="accent1"/>
+          </a:effectRef>
+          <a:fontRef idx="minor">
+            <a:schemeClr val="lt1"/>
+          </a:fontRef>
+        </p:style>
+        <p:txBody>
+          <a:bodyPr rtlCol="0" anchor="ctr" wrap="square" lIns="76200" rIns="76200" tIns="38100" bIns="38100"/>
+          <a:lstStyle/>
+          <a:p>
+            <a:pPr algn="ctr">
+              <a:lnSpc>
+                <a:spcPct val="118000"/>
+              </a:lnSpc>
+              <a:spcBef>
+                <a:spcPts val="0"/>
+              </a:spcBef>
+              <a:spcAft>
+                <a:spcPts val="300"/>
+              </a:spcAft>
+            </a:pPr>
+            <a:r>
+              <a:rPr sz="1100" b="0" i="0">
+                <a:solidFill>
+                  <a:srgbClr val="22252B"/>
+                </a:solidFill>
+                <a:latin typeface="Noto Sans CJK KR"/>
+              </a:rPr>
+              <a:t/>
+            </a:r>
+          </a:p>
+        </p:txBody>
+      </p:sp>
+      <p:sp>
+        <p:nvSpPr>
+          <p:cNvPr id="3" name="TextBox 2"/>
+          <p:cNvSpPr txBox="1"/>
+          <p:nvPr/>
+        </p:nvSpPr>
+        <p:spPr>
+          <a:xfrm>
+            <a:off x="502920" y="146304"/>
+            <a:ext cx="11185855" cy="320040"/>
+          </a:xfrm>
+          <a:prstGeom prst="rect">
+            <a:avLst/>
+          </a:prstGeom>
+          <a:noFill/>
+        </p:spPr>
+        <p:txBody>
+          <a:bodyPr wrap="square" anchor="t" lIns="38100" rIns="38100" tIns="25400" bIns="25400">
+            <a:spAutoFit/>
+          </a:bodyPr>
+          <a:lstStyle/>
+          <a:p>
+            <a:pPr algn="l">
+              <a:lnSpc>
+                <a:spcPct val="120000"/>
+              </a:lnSpc>
+              <a:spcBef>
+                <a:spcPts val="0"/>
+              </a:spcBef>
+              <a:spcAft>
+                <a:spcPts val="0"/>
+              </a:spcAft>
+            </a:pPr>
+            <a:r>
+              <a:rPr sz="1350" b="1" i="0">
+                <a:solidFill>
+                  <a:srgbClr val="C9A227"/>
+                </a:solidFill>
+                <a:latin typeface="Noto Sans CJK KR"/>
+              </a:rPr>
+              <a:t>C5 · scaling 청사진</a:t>
+            </a:r>
+          </a:p>
+        </p:txBody>
+      </p:sp>
+      <p:sp>
+        <p:nvSpPr>
+          <p:cNvPr id="4" name="TextBox 3"/>
+          <p:cNvSpPr txBox="1"/>
+          <p:nvPr/>
+        </p:nvSpPr>
+        <p:spPr>
+          <a:xfrm>
+            <a:off x="502920" y="457200"/>
+            <a:ext cx="11185855" cy="566928"/>
+          </a:xfrm>
+          <a:prstGeom prst="rect">
+            <a:avLst/>
+          </a:prstGeom>
+          <a:noFill/>
+        </p:spPr>
+        <p:txBody>
+          <a:bodyPr wrap="square" anchor="t" lIns="38100" rIns="38100" tIns="25400" bIns="25400">
+            <a:spAutoFit/>
+          </a:bodyPr>
+          <a:lstStyle/>
+          <a:p>
+            <a:pPr algn="l">
+              <a:lnSpc>
+                <a:spcPct val="120000"/>
+              </a:lnSpc>
+              <a:spcBef>
+                <a:spcPts val="0"/>
+              </a:spcBef>
+              <a:spcAft>
+                <a:spcPts val="0"/>
+              </a:spcAft>
+            </a:pPr>
+            <a:r>
+              <a:rPr sz="2400" b="1" i="0">
+                <a:solidFill>
+                  <a:srgbClr val="22252B"/>
+                </a:solidFill>
+                <a:latin typeface="Noto Sans CJK KR"/>
+              </a:rPr>
+              <a:t>논문의 방향 × 모델링 결과 = 어디로 가야 하나</a:t>
+            </a:r>
+          </a:p>
+        </p:txBody>
+      </p:sp>
+      <p:sp>
+        <p:nvSpPr>
+          <p:cNvPr id="5" name="Rectangle 4"/>
+          <p:cNvSpPr/>
+          <p:nvPr/>
+        </p:nvSpPr>
+        <p:spPr>
+          <a:xfrm>
+            <a:off x="466344" y="1586285"/>
+            <a:ext cx="5605272" cy="2478421"/>
+          </a:xfrm>
+          <a:prstGeom prst="rect">
+            <a:avLst/>
+          </a:prstGeom>
+          <a:noFill/>
+          <a:ln w="9525">
+            <a:solidFill>
+              <a:srgbClr val="8A8F98"/>
+            </a:solidFill>
+          </a:ln>
+          <a:effectLst/>
+        </p:spPr>
+        <p:style>
+          <a:lnRef idx="1">
+            <a:schemeClr val="accent1"/>
+          </a:lnRef>
+          <a:fillRef idx="3">
+            <a:schemeClr val="accent1"/>
+          </a:fillRef>
+          <a:effectRef idx="2">
+            <a:schemeClr val="accent1"/>
+          </a:effectRef>
+          <a:fontRef idx="minor">
+            <a:schemeClr val="lt1"/>
+          </a:fontRef>
+        </p:style>
+        <p:txBody>
+          <a:bodyPr rtlCol="0" anchor="ctr"/>
+          <a:lstStyle/>
+          <a:p>
+            <a:pPr algn="ctr"/>
+          </a:p>
+        </p:txBody>
+      </p:sp>
+      <p:pic>
+        <p:nvPicPr>
+          <p:cNvPr id="6" name="Picture 5" descr="fig8-hope-sleep-scaling.png"/>
+          <p:cNvPicPr>
+            <a:picLocks noChangeAspect="1"/>
+          </p:cNvPicPr>
+          <p:nvPr/>
+        </p:nvPicPr>
+        <p:blipFill>
+          <a:blip r:embed="rId2"/>
+          <a:stretch>
+            <a:fillRect/>
+          </a:stretch>
+        </p:blipFill>
+        <p:spPr>
+          <a:xfrm>
+            <a:off x="502920" y="1622861"/>
+            <a:ext cx="5532120" cy="2405269"/>
+          </a:xfrm>
+          <a:prstGeom prst="rect">
+            <a:avLst/>
+          </a:prstGeom>
+        </p:spPr>
+      </p:pic>
+      <p:sp>
+        <p:nvSpPr>
+          <p:cNvPr id="7" name="TextBox 6"/>
+          <p:cNvSpPr txBox="1"/>
+          <p:nvPr/>
+        </p:nvSpPr>
+        <p:spPr>
+          <a:xfrm>
+            <a:off x="502920" y="4297679"/>
+            <a:ext cx="5532120" cy="365760"/>
+          </a:xfrm>
+          <a:prstGeom prst="rect">
+            <a:avLst/>
+          </a:prstGeom>
+          <a:noFill/>
+        </p:spPr>
+        <p:txBody>
+          <a:bodyPr wrap="square" anchor="t" lIns="38100" rIns="38100" tIns="25400" bIns="25400">
+            <a:spAutoFit/>
+          </a:bodyPr>
+          <a:lstStyle/>
+          <a:p>
+            <a:pPr algn="ctr">
+              <a:lnSpc>
+                <a:spcPct val="120000"/>
+              </a:lnSpc>
+              <a:spcBef>
+                <a:spcPts val="0"/>
+              </a:spcBef>
+              <a:spcAft>
+                <a:spcPts val="0"/>
+              </a:spcAft>
+            </a:pPr>
+            <a:r>
+              <a:rPr sz="1050" b="0" i="0">
+                <a:solidFill>
+                  <a:srgbClr val="22252B"/>
+                </a:solidFill>
+                <a:latin typeface="Noto Sans CJK KR"/>
+              </a:rPr>
+              <a:t>HOPE(메모리 확장)+Sleep(파라미터 성장) 스케일링 — 상태·파라미터가 함께 자란다</a:t>
+            </a:r>
+          </a:p>
+        </p:txBody>
+      </p:sp>
+      <p:sp>
+        <p:nvSpPr>
+          <p:cNvPr id="8" name="Rounded Rectangle 7"/>
+          <p:cNvSpPr/>
+          <p:nvPr/>
+        </p:nvSpPr>
+        <p:spPr>
+          <a:xfrm>
+            <a:off x="6172200" y="1417320"/>
+            <a:ext cx="5486400" cy="1051560"/>
+          </a:xfrm>
+          <a:prstGeom prst="roundRect">
+            <a:avLst/>
+          </a:prstGeom>
+          <a:solidFill>
+            <a:srgbClr val="F6ECC7"/>
+          </a:solidFill>
+          <a:ln w="12700">
+            <a:solidFill>
+              <a:srgbClr val="C9A227"/>
+            </a:solidFill>
+          </a:ln>
+          <a:effectLst/>
+        </p:spPr>
+        <p:style>
+          <a:lnRef idx="1">
+            <a:schemeClr val="accent1"/>
+          </a:lnRef>
+          <a:fillRef idx="3">
+            <a:schemeClr val="accent1"/>
+          </a:fillRef>
+          <a:effectRef idx="2">
+            <a:schemeClr val="accent1"/>
+          </a:effectRef>
+          <a:fontRef idx="minor">
+            <a:schemeClr val="lt1"/>
+          </a:fontRef>
+        </p:style>
+        <p:txBody>
+          <a:bodyPr rtlCol="0" anchor="ctr" wrap="square" lIns="76200" rIns="76200" tIns="38100" bIns="38100"/>
+          <a:lstStyle/>
+          <a:p>
+            <a:pPr algn="l">
+              <a:lnSpc>
+                <a:spcPct val="118000"/>
+              </a:lnSpc>
+              <a:spcBef>
+                <a:spcPts val="0"/>
+              </a:spcBef>
+              <a:spcAft>
+                <a:spcPts val="300"/>
+              </a:spcAft>
+            </a:pPr>
+            <a:r>
+              <a:rPr sz="1250" b="1" i="0">
+                <a:solidFill>
+                  <a:srgbClr val="C9A227"/>
+                </a:solidFill>
+                <a:latin typeface="Noto Sans CJK KR"/>
+              </a:rPr>
+              <a:t>① 논문 방향이 memory 압력을 키운다</a:t>
+            </a:r>
+          </a:p>
+          <a:p>
+            <a:pPr algn="l">
+              <a:lnSpc>
+                <a:spcPct val="118000"/>
+              </a:lnSpc>
+              <a:spcBef>
+                <a:spcPts val="0"/>
+              </a:spcBef>
+              <a:spcAft>
+                <a:spcPts val="300"/>
+              </a:spcAft>
+            </a:pPr>
+            <a:r>
+              <a:rPr sz="1150" b="0" i="0">
+                <a:solidFill>
+                  <a:srgbClr val="22252B"/>
+                </a:solidFill>
+                <a:latin typeface="Noto Sans CJK KR"/>
+              </a:rPr>
+              <a:t>HOPE(self-mod+CMS)로 state↑, Sleep(expert 성장)로 파라미터↑ → 디코드 memory-bound가 구조적으로 심해진다.</a:t>
+            </a:r>
+          </a:p>
+        </p:txBody>
+      </p:sp>
+      <p:sp>
+        <p:nvSpPr>
+          <p:cNvPr id="9" name="Rounded Rectangle 8"/>
+          <p:cNvSpPr/>
+          <p:nvPr/>
+        </p:nvSpPr>
+        <p:spPr>
+          <a:xfrm>
+            <a:off x="6172200" y="2532888"/>
+            <a:ext cx="5486400" cy="1051560"/>
+          </a:xfrm>
+          <a:prstGeom prst="roundRect">
+            <a:avLst/>
+          </a:prstGeom>
+          <a:solidFill>
+            <a:srgbClr val="F6ECC7"/>
+          </a:solidFill>
+          <a:ln w="12700">
+            <a:solidFill>
+              <a:srgbClr val="C9A227"/>
+            </a:solidFill>
+          </a:ln>
+          <a:effectLst/>
+        </p:spPr>
+        <p:style>
+          <a:lnRef idx="1">
+            <a:schemeClr val="accent1"/>
+          </a:lnRef>
+          <a:fillRef idx="3">
+            <a:schemeClr val="accent1"/>
+          </a:fillRef>
+          <a:effectRef idx="2">
+            <a:schemeClr val="accent1"/>
+          </a:effectRef>
+          <a:fontRef idx="minor">
+            <a:schemeClr val="lt1"/>
+          </a:fontRef>
+        </p:style>
+        <p:txBody>
+          <a:bodyPr rtlCol="0" anchor="ctr" wrap="square" lIns="76200" rIns="76200" tIns="38100" bIns="38100"/>
+          <a:lstStyle/>
+          <a:p>
+            <a:pPr algn="l">
+              <a:lnSpc>
+                <a:spcPct val="118000"/>
+              </a:lnSpc>
+              <a:spcBef>
+                <a:spcPts val="0"/>
+              </a:spcBef>
+              <a:spcAft>
+                <a:spcPts val="300"/>
+              </a:spcAft>
+            </a:pPr>
+            <a:r>
+              <a:rPr sz="1250" b="1" i="0">
+                <a:solidFill>
+                  <a:srgbClr val="C9A227"/>
+                </a:solidFill>
+                <a:latin typeface="Noto Sans CJK KR"/>
+              </a:rPr>
+              <a:t>② 대역폭 우선</a:t>
+            </a:r>
+          </a:p>
+          <a:p>
+            <a:pPr algn="l">
+              <a:lnSpc>
+                <a:spcPct val="118000"/>
+              </a:lnSpc>
+              <a:spcBef>
+                <a:spcPts val="0"/>
+              </a:spcBef>
+              <a:spcAft>
+                <a:spcPts val="300"/>
+              </a:spcAft>
+            </a:pPr>
+            <a:r>
+              <a:rPr sz="1150" b="0" i="0">
+                <a:solidFill>
+                  <a:srgbClr val="22252B"/>
+                </a:solidFill>
+                <a:latin typeface="Noto Sans CJK KR"/>
+              </a:rPr>
+              <a:t>zHBM류 고대역폭 메모리가 1순위 지렛대(PIM보다 유리).</a:t>
+            </a:r>
+          </a:p>
+        </p:txBody>
+      </p:sp>
+      <p:sp>
+        <p:nvSpPr>
+          <p:cNvPr id="10" name="Rounded Rectangle 9"/>
+          <p:cNvSpPr/>
+          <p:nvPr/>
+        </p:nvSpPr>
+        <p:spPr>
+          <a:xfrm>
+            <a:off x="6172200" y="3648456"/>
+            <a:ext cx="5486400" cy="1051560"/>
+          </a:xfrm>
+          <a:prstGeom prst="roundRect">
+            <a:avLst/>
+          </a:prstGeom>
+          <a:solidFill>
+            <a:srgbClr val="F6ECC7"/>
+          </a:solidFill>
+          <a:ln w="12700">
+            <a:solidFill>
+              <a:srgbClr val="C9A227"/>
+            </a:solidFill>
+          </a:ln>
+          <a:effectLst/>
+        </p:spPr>
+        <p:style>
+          <a:lnRef idx="1">
+            <a:schemeClr val="accent1"/>
+          </a:lnRef>
+          <a:fillRef idx="3">
+            <a:schemeClr val="accent1"/>
+          </a:fillRef>
+          <a:effectRef idx="2">
+            <a:schemeClr val="accent1"/>
+          </a:effectRef>
+          <a:fontRef idx="minor">
+            <a:schemeClr val="lt1"/>
+          </a:fontRef>
+        </p:style>
+        <p:txBody>
+          <a:bodyPr rtlCol="0" anchor="ctr" wrap="square" lIns="76200" rIns="76200" tIns="38100" bIns="38100"/>
+          <a:lstStyle/>
+          <a:p>
+            <a:pPr algn="l">
+              <a:lnSpc>
+                <a:spcPct val="118000"/>
+              </a:lnSpc>
+              <a:spcBef>
+                <a:spcPts val="0"/>
+              </a:spcBef>
+              <a:spcAft>
+                <a:spcPts val="300"/>
+              </a:spcAft>
+            </a:pPr>
+            <a:r>
+              <a:rPr sz="1250" b="1" i="0">
+                <a:solidFill>
+                  <a:srgbClr val="C9A227"/>
+                </a:solidFill>
+                <a:latin typeface="Noto Sans CJK KR"/>
+              </a:rPr>
+              <a:t>③ state 상주 설계</a:t>
+            </a:r>
+          </a:p>
+          <a:p>
+            <a:pPr algn="l">
+              <a:lnSpc>
+                <a:spcPct val="118000"/>
+              </a:lnSpc>
+              <a:spcBef>
+                <a:spcPts val="0"/>
+              </a:spcBef>
+              <a:spcAft>
+                <a:spcPts val="300"/>
+              </a:spcAft>
+            </a:pPr>
+            <a:r>
+              <a:rPr sz="1150" b="0" i="0">
+                <a:solidFill>
+                  <a:srgbClr val="22252B"/>
+                </a:solidFill>
+                <a:latin typeface="Noto Sans CJK KR"/>
+              </a:rPr>
+              <a:t>on-chip 용량을 state가 들어갈 문턱 이상으로 — Cerebras의 knee가 그 증거.</a:t>
+            </a:r>
+          </a:p>
+        </p:txBody>
+      </p:sp>
+      <p:sp>
+        <p:nvSpPr>
+          <p:cNvPr id="11" name="Rounded Rectangle 10"/>
+          <p:cNvSpPr/>
+          <p:nvPr/>
+        </p:nvSpPr>
+        <p:spPr>
+          <a:xfrm>
+            <a:off x="6172200" y="4764024"/>
+            <a:ext cx="5486400" cy="1051560"/>
+          </a:xfrm>
+          <a:prstGeom prst="roundRect">
+            <a:avLst/>
+          </a:prstGeom>
+          <a:solidFill>
+            <a:srgbClr val="F6ECC7"/>
+          </a:solidFill>
+          <a:ln w="12700">
+            <a:solidFill>
+              <a:srgbClr val="C9A227"/>
+            </a:solidFill>
+          </a:ln>
+          <a:effectLst/>
+        </p:spPr>
+        <p:style>
+          <a:lnRef idx="1">
+            <a:schemeClr val="accent1"/>
+          </a:lnRef>
+          <a:fillRef idx="3">
+            <a:schemeClr val="accent1"/>
+          </a:fillRef>
+          <a:effectRef idx="2">
+            <a:schemeClr val="accent1"/>
+          </a:effectRef>
+          <a:fontRef idx="minor">
+            <a:schemeClr val="lt1"/>
+          </a:fontRef>
+        </p:style>
+        <p:txBody>
+          <a:bodyPr rtlCol="0" anchor="ctr" wrap="square" lIns="76200" rIns="76200" tIns="38100" bIns="38100"/>
+          <a:lstStyle/>
+          <a:p>
+            <a:pPr algn="l">
+              <a:lnSpc>
+                <a:spcPct val="118000"/>
+              </a:lnSpc>
+              <a:spcBef>
+                <a:spcPts val="0"/>
+              </a:spcBef>
+              <a:spcAft>
+                <a:spcPts val="300"/>
+              </a:spcAft>
+            </a:pPr>
+            <a:r>
+              <a:rPr sz="1250" b="1" i="0">
+                <a:solidFill>
+                  <a:srgbClr val="C9A227"/>
+                </a:solidFill>
+                <a:latin typeface="Noto Sans CJK KR"/>
+              </a:rPr>
+              <a:t>④ 소프트웨어 효율이 프론티어</a:t>
+            </a:r>
+          </a:p>
+          <a:p>
+            <a:pPr algn="l">
+              <a:lnSpc>
+                <a:spcPct val="118000"/>
+              </a:lnSpc>
+              <a:spcBef>
+                <a:spcPts val="0"/>
+              </a:spcBef>
+              <a:spcAft>
+                <a:spcPts val="300"/>
+              </a:spcAft>
+            </a:pPr>
+            <a:r>
+              <a:rPr sz="1150" b="0" i="0">
+                <a:solidFill>
+                  <a:srgbClr val="22252B"/>
+                </a:solidFill>
+                <a:latin typeface="Noto Sans CJK KR"/>
+              </a:rPr>
+              <a:t>cross-vendor 소프트웨어 효율(HATIR)이 남은 최대 변수.</a:t>
+            </a:r>
+          </a:p>
+        </p:txBody>
+      </p:sp>
+      <p:sp>
+        <p:nvSpPr>
+          <p:cNvPr id="12" name="Rounded Rectangle 11"/>
+          <p:cNvSpPr/>
+          <p:nvPr/>
+        </p:nvSpPr>
+        <p:spPr>
+          <a:xfrm>
+            <a:off x="502920" y="4800600"/>
+            <a:ext cx="5532120" cy="960120"/>
+          </a:xfrm>
+          <a:prstGeom prst="roundRect">
+            <a:avLst/>
+          </a:prstGeom>
+          <a:solidFill>
+            <a:srgbClr val="DBE7F3"/>
+          </a:solidFill>
+          <a:ln w="12700">
+            <a:solidFill>
+              <a:srgbClr val="2A6F97"/>
+            </a:solidFill>
+          </a:ln>
+          <a:effectLst/>
+        </p:spPr>
+        <p:style>
+          <a:lnRef idx="1">
+            <a:schemeClr val="accent1"/>
+          </a:lnRef>
+          <a:fillRef idx="3">
+            <a:schemeClr val="accent1"/>
+          </a:fillRef>
+          <a:effectRef idx="2">
+            <a:schemeClr val="accent1"/>
+          </a:effectRef>
+          <a:fontRef idx="minor">
+            <a:schemeClr val="lt1"/>
+          </a:fontRef>
+        </p:style>
+        <p:txBody>
+          <a:bodyPr rtlCol="0" anchor="ctr" wrap="square" lIns="76200" rIns="76200" tIns="38100" bIns="38100"/>
+          <a:lstStyle/>
+          <a:p>
+            <a:pPr algn="l">
+              <a:lnSpc>
+                <a:spcPct val="118000"/>
+              </a:lnSpc>
+              <a:spcBef>
+                <a:spcPts val="0"/>
+              </a:spcBef>
+              <a:spcAft>
+                <a:spcPts val="200"/>
+              </a:spcAft>
+            </a:pPr>
+            <a:r>
+              <a:rPr sz="1250" b="1" i="0">
+                <a:solidFill>
+                  <a:srgbClr val="2A6F97"/>
+                </a:solidFill>
+                <a:latin typeface="Noto Sans CJK KR"/>
+              </a:rPr>
+              <a:t>한 줄</a:t>
+            </a:r>
+          </a:p>
+          <a:p>
+            <a:pPr algn="l">
+              <a:lnSpc>
+                <a:spcPct val="118000"/>
+              </a:lnSpc>
+              <a:spcBef>
+                <a:spcPts val="0"/>
+              </a:spcBef>
+              <a:spcAft>
+                <a:spcPts val="300"/>
+              </a:spcAft>
+            </a:pPr>
+            <a:r>
+              <a:rPr sz="1200" b="0" i="0">
+                <a:solidFill>
+                  <a:srgbClr val="22252B"/>
+                </a:solidFill>
+                <a:latin typeface="Noto Sans CJK KR"/>
+              </a:rPr>
+              <a:t>이 계열을 키울수록 서빙은 '메모리 문제'가 된다 — 대역폭·상주·소프트웨어가 스케일의 열쇠.</a:t>
+            </a:r>
+          </a:p>
+        </p:txBody>
+      </p:sp>
+    </p:spTree>
+  </p:cSld>
+  <p:clrMapOvr>
+    <a:masterClrMapping/>
+  </p:clrMapOvr>
+</p:sld>
+</file>
+
+<file path=ppt/slides/slide47.xml><?xml version="1.0" encoding="utf-8"?>
+<p:sld xmlns:a="http://schemas.openxmlformats.org/drawingml/2006/main" xmlns:p="http://schemas.openxmlformats.org/presentationml/2006/main" xmlns:r="http://schemas.openxmlformats.org/officeDocument/2006/relationships">
+  <p:cSld>
+    <p:spTree>
+      <p:nvGrpSpPr>
+        <p:cNvPr id="1" name=""/>
+        <p:cNvGrpSpPr/>
+        <p:nvPr/>
+      </p:nvGrpSpPr>
+      <p:grpSpPr/>
+      <p:sp>
+        <p:nvSpPr>
+          <p:cNvPr id="2" name="Rectangle 1"/>
+          <p:cNvSpPr/>
+          <p:nvPr/>
+        </p:nvSpPr>
+        <p:spPr>
+          <a:xfrm>
+            <a:off x="0" y="0"/>
+            <a:ext cx="12191695" cy="54864"/>
+          </a:xfrm>
+          <a:prstGeom prst="rect">
+            <a:avLst/>
+          </a:prstGeom>
+          <a:solidFill>
+            <a:srgbClr val="2A9D8F"/>
+          </a:solidFill>
+          <a:ln w="12700">
+            <a:solidFill>
+              <a:srgbClr val="2A9D8F"/>
+            </a:solidFill>
+          </a:ln>
+          <a:effectLst/>
+        </p:spPr>
+        <p:style>
+          <a:lnRef idx="1">
+            <a:schemeClr val="accent1"/>
+          </a:lnRef>
+          <a:fillRef idx="3">
+            <a:schemeClr val="accent1"/>
+          </a:fillRef>
+          <a:effectRef idx="2">
+            <a:schemeClr val="accent1"/>
+          </a:effectRef>
+          <a:fontRef idx="minor">
+            <a:schemeClr val="lt1"/>
+          </a:fontRef>
+        </p:style>
+        <p:txBody>
+          <a:bodyPr rtlCol="0" anchor="ctr" wrap="square" lIns="76200" rIns="76200" tIns="38100" bIns="38100"/>
+          <a:lstStyle/>
+          <a:p>
+            <a:pPr algn="ctr">
+              <a:lnSpc>
+                <a:spcPct val="118000"/>
+              </a:lnSpc>
+              <a:spcBef>
+                <a:spcPts val="0"/>
+              </a:spcBef>
+              <a:spcAft>
+                <a:spcPts val="300"/>
+              </a:spcAft>
+            </a:pPr>
+            <a:r>
+              <a:rPr sz="1100" b="0" i="0">
+                <a:solidFill>
+                  <a:srgbClr val="22252B"/>
+                </a:solidFill>
+                <a:latin typeface="Noto Sans CJK KR"/>
+              </a:rPr>
+              <a:t/>
+            </a:r>
+          </a:p>
+        </p:txBody>
+      </p:sp>
+      <p:sp>
+        <p:nvSpPr>
+          <p:cNvPr id="3" name="TextBox 2"/>
+          <p:cNvSpPr txBox="1"/>
+          <p:nvPr/>
+        </p:nvSpPr>
+        <p:spPr>
+          <a:xfrm>
+            <a:off x="502920" y="146304"/>
+            <a:ext cx="11185855" cy="320040"/>
+          </a:xfrm>
+          <a:prstGeom prst="rect">
+            <a:avLst/>
+          </a:prstGeom>
+          <a:noFill/>
+        </p:spPr>
+        <p:txBody>
+          <a:bodyPr wrap="square" anchor="t" lIns="38100" rIns="38100" tIns="25400" bIns="25400">
+            <a:spAutoFit/>
+          </a:bodyPr>
+          <a:lstStyle/>
+          <a:p>
+            <a:pPr algn="l">
+              <a:lnSpc>
+                <a:spcPct val="120000"/>
+              </a:lnSpc>
+              <a:spcBef>
+                <a:spcPts val="0"/>
+              </a:spcBef>
+              <a:spcAft>
+                <a:spcPts val="0"/>
+              </a:spcAft>
+            </a:pPr>
+            <a:r>
+              <a:rPr sz="1350" b="1" i="0">
+                <a:solidFill>
+                  <a:srgbClr val="2A9D8F"/>
+                </a:solidFill>
+                <a:latin typeface="Noto Sans CJK KR"/>
+              </a:rPr>
+              <a:t>마무리</a:t>
+            </a:r>
+          </a:p>
+        </p:txBody>
+      </p:sp>
+      <p:sp>
+        <p:nvSpPr>
+          <p:cNvPr id="4" name="TextBox 3"/>
+          <p:cNvSpPr txBox="1"/>
+          <p:nvPr/>
+        </p:nvSpPr>
+        <p:spPr>
+          <a:xfrm>
+            <a:off x="502920" y="457200"/>
+            <a:ext cx="11185855" cy="566928"/>
+          </a:xfrm>
+          <a:prstGeom prst="rect">
+            <a:avLst/>
+          </a:prstGeom>
+          <a:noFill/>
+        </p:spPr>
+        <p:txBody>
+          <a:bodyPr wrap="square" anchor="t" lIns="38100" rIns="38100" tIns="25400" bIns="25400">
+            <a:spAutoFit/>
+          </a:bodyPr>
+          <a:lstStyle/>
+          <a:p>
+            <a:pPr algn="l">
+              <a:lnSpc>
+                <a:spcPct val="120000"/>
+              </a:lnSpc>
+              <a:spcBef>
+                <a:spcPts val="0"/>
+              </a:spcBef>
+              <a:spcAft>
+                <a:spcPts val="0"/>
+              </a:spcAft>
+            </a:pPr>
+            <a:r>
+              <a:rPr sz="2400" b="1" i="0">
+                <a:solidFill>
+                  <a:srgbClr val="22252B"/>
+                </a:solidFill>
+                <a:latin typeface="Noto Sans CJK KR"/>
+              </a:rPr>
+              <a:t>6편을 한 흐름으로, 그리고 서빙 비용까지</a:t>
+            </a:r>
+          </a:p>
+        </p:txBody>
+      </p:sp>
+      <p:sp>
+        <p:nvSpPr>
+          <p:cNvPr id="5" name="Rounded Rectangle 4"/>
+          <p:cNvSpPr/>
+          <p:nvPr/>
+        </p:nvSpPr>
+        <p:spPr>
+          <a:xfrm>
+            <a:off x="502920" y="1371600"/>
+            <a:ext cx="1554480" cy="621792"/>
+          </a:xfrm>
+          <a:prstGeom prst="roundRect">
+            <a:avLst/>
+          </a:prstGeom>
+          <a:solidFill>
+            <a:srgbClr val="2A9D8F"/>
+          </a:solidFill>
+          <a:ln w="12700">
+            <a:solidFill>
+              <a:srgbClr val="2A9D8F"/>
+            </a:solidFill>
+          </a:ln>
+          <a:effectLst/>
+        </p:spPr>
+        <p:style>
+          <a:lnRef idx="1">
+            <a:schemeClr val="accent1"/>
+          </a:lnRef>
+          <a:fillRef idx="3">
+            <a:schemeClr val="accent1"/>
+          </a:fillRef>
+          <a:effectRef idx="2">
+            <a:schemeClr val="accent1"/>
+          </a:effectRef>
+          <a:fontRef idx="minor">
+            <a:schemeClr val="lt1"/>
+          </a:fontRef>
+        </p:style>
+        <p:txBody>
+          <a:bodyPr rtlCol="0" anchor="ctr" wrap="square" lIns="76200" rIns="76200" tIns="38100" bIns="38100"/>
+          <a:lstStyle/>
+          <a:p>
+            <a:pPr algn="ctr">
+              <a:lnSpc>
+                <a:spcPct val="118000"/>
+              </a:lnSpc>
+              <a:spcBef>
+                <a:spcPts val="0"/>
+              </a:spcBef>
+              <a:spcAft>
+                <a:spcPts val="300"/>
+              </a:spcAft>
+            </a:pPr>
+            <a:r>
+              <a:rPr sz="1250" b="1" i="0">
+                <a:solidFill>
+                  <a:srgbClr val="FFFFFF"/>
+                </a:solidFill>
+                <a:latin typeface="Noto Sans CJK KR"/>
+              </a:rPr>
+              <a:t>Titans</a:t>
+            </a:r>
+          </a:p>
+        </p:txBody>
+      </p:sp>
+      <p:sp>
+        <p:nvSpPr>
+          <p:cNvPr id="6" name="Rounded Rectangle 5"/>
+          <p:cNvSpPr/>
+          <p:nvPr/>
+        </p:nvSpPr>
+        <p:spPr>
+          <a:xfrm>
+            <a:off x="2148840" y="1371600"/>
+            <a:ext cx="9509760" cy="621792"/>
+          </a:xfrm>
+          <a:prstGeom prst="roundRect">
+            <a:avLst/>
+          </a:prstGeom>
+          <a:solidFill>
+            <a:srgbClr val="FFFFFF"/>
+          </a:solidFill>
+          <a:ln w="12700">
+            <a:solidFill>
+              <a:srgbClr val="8A8F98"/>
+            </a:solidFill>
+          </a:ln>
+          <a:effectLst/>
+        </p:spPr>
+        <p:style>
+          <a:lnRef idx="1">
+            <a:schemeClr val="accent1"/>
+          </a:lnRef>
+          <a:fillRef idx="3">
+            <a:schemeClr val="accent1"/>
+          </a:fillRef>
+          <a:effectRef idx="2">
+            <a:schemeClr val="accent1"/>
+          </a:effectRef>
+          <a:fontRef idx="minor">
+            <a:schemeClr val="lt1"/>
+          </a:fontRef>
+        </p:style>
+        <p:txBody>
+          <a:bodyPr rtlCol="0" anchor="ctr" wrap="square" lIns="76200" rIns="76200" tIns="38100" bIns="38100"/>
+          <a:lstStyle/>
+          <a:p>
+            <a:pPr algn="l">
+              <a:lnSpc>
+                <a:spcPct val="118000"/>
+              </a:lnSpc>
+              <a:spcBef>
+                <a:spcPts val="0"/>
+              </a:spcBef>
+              <a:spcAft>
+                <a:spcPts val="300"/>
+              </a:spcAft>
+            </a:pPr>
+            <a:r>
+              <a:rPr sz="1200" b="0" i="0">
+                <a:solidFill>
+                  <a:srgbClr val="22252B"/>
+                </a:solidFill>
+                <a:latin typeface="Noto Sans CJK KR"/>
+              </a:rPr>
+              <a:t>test-time에 학습되는 신경망 메모리(surprise+momentum+forget)를 연다.</a:t>
+            </a:r>
+          </a:p>
+        </p:txBody>
+      </p:sp>
+      <p:sp>
+        <p:nvSpPr>
+          <p:cNvPr id="7" name="Rounded Rectangle 6"/>
+          <p:cNvSpPr/>
+          <p:nvPr/>
+        </p:nvSpPr>
+        <p:spPr>
+          <a:xfrm>
+            <a:off x="502920" y="2066543"/>
+            <a:ext cx="1554480" cy="621792"/>
+          </a:xfrm>
+          <a:prstGeom prst="roundRect">
+            <a:avLst/>
+          </a:prstGeom>
+          <a:solidFill>
+            <a:srgbClr val="2A9D8F"/>
+          </a:solidFill>
+          <a:ln w="12700">
+            <a:solidFill>
+              <a:srgbClr val="2A9D8F"/>
+            </a:solidFill>
+          </a:ln>
+          <a:effectLst/>
+        </p:spPr>
+        <p:style>
+          <a:lnRef idx="1">
+            <a:schemeClr val="accent1"/>
+          </a:lnRef>
+          <a:fillRef idx="3">
+            <a:schemeClr val="accent1"/>
+          </a:fillRef>
+          <a:effectRef idx="2">
+            <a:schemeClr val="accent1"/>
+          </a:effectRef>
+          <a:fontRef idx="minor">
+            <a:schemeClr val="lt1"/>
+          </a:fontRef>
+        </p:style>
+        <p:txBody>
+          <a:bodyPr rtlCol="0" anchor="ctr" wrap="square" lIns="76200" rIns="76200" tIns="38100" bIns="38100"/>
+          <a:lstStyle/>
+          <a:p>
+            <a:pPr algn="ctr">
+              <a:lnSpc>
+                <a:spcPct val="118000"/>
+              </a:lnSpc>
+              <a:spcBef>
+                <a:spcPts val="0"/>
+              </a:spcBef>
+              <a:spcAft>
+                <a:spcPts val="300"/>
+              </a:spcAft>
+            </a:pPr>
+            <a:r>
+              <a:rPr sz="1250" b="1" i="0">
+                <a:solidFill>
+                  <a:srgbClr val="FFFFFF"/>
+                </a:solidFill>
+                <a:latin typeface="Noto Sans CJK KR"/>
+              </a:rPr>
+              <a:t>Miras</a:t>
+            </a:r>
+          </a:p>
+        </p:txBody>
+      </p:sp>
+      <p:sp>
+        <p:nvSpPr>
+          <p:cNvPr id="8" name="Rounded Rectangle 7"/>
+          <p:cNvSpPr/>
+          <p:nvPr/>
+        </p:nvSpPr>
+        <p:spPr>
+          <a:xfrm>
+            <a:off x="2148840" y="2066543"/>
+            <a:ext cx="9509760" cy="621792"/>
+          </a:xfrm>
+          <a:prstGeom prst="roundRect">
+            <a:avLst/>
+          </a:prstGeom>
+          <a:solidFill>
+            <a:srgbClr val="FFFFFF"/>
+          </a:solidFill>
+          <a:ln w="12700">
+            <a:solidFill>
+              <a:srgbClr val="8A8F98"/>
+            </a:solidFill>
+          </a:ln>
+          <a:effectLst/>
+        </p:spPr>
+        <p:style>
+          <a:lnRef idx="1">
+            <a:schemeClr val="accent1"/>
+          </a:lnRef>
+          <a:fillRef idx="3">
+            <a:schemeClr val="accent1"/>
+          </a:fillRef>
+          <a:effectRef idx="2">
+            <a:schemeClr val="accent1"/>
+          </a:effectRef>
+          <a:fontRef idx="minor">
+            <a:schemeClr val="lt1"/>
+          </a:fontRef>
+        </p:style>
+        <p:txBody>
+          <a:bodyPr rtlCol="0" anchor="ctr" wrap="square" lIns="76200" rIns="76200" tIns="38100" bIns="38100"/>
+          <a:lstStyle/>
+          <a:p>
+            <a:pPr algn="l">
+              <a:lnSpc>
+                <a:spcPct val="118000"/>
+              </a:lnSpc>
+              <a:spcBef>
+                <a:spcPts val="0"/>
+              </a:spcBef>
+              <a:spcAft>
+                <a:spcPts val="300"/>
+              </a:spcAft>
+            </a:pPr>
+            <a:r>
+              <a:rPr sz="1200" b="0" i="0">
+                <a:solidFill>
+                  <a:srgbClr val="22252B"/>
+                </a:solidFill>
+                <a:latin typeface="Noto Sans CJK KR"/>
+              </a:rPr>
+              <a:t>그 설계를 4축 공간으로 조직화 — 무엇을·무엇을 잊고·어떤 구조로·어떤 알고리즘으로.</a:t>
+            </a:r>
+          </a:p>
+        </p:txBody>
+      </p:sp>
+      <p:sp>
+        <p:nvSpPr>
+          <p:cNvPr id="9" name="Rounded Rectangle 8"/>
+          <p:cNvSpPr/>
+          <p:nvPr/>
+        </p:nvSpPr>
+        <p:spPr>
+          <a:xfrm>
+            <a:off x="502920" y="2761487"/>
+            <a:ext cx="1554480" cy="621792"/>
+          </a:xfrm>
+          <a:prstGeom prst="roundRect">
+            <a:avLst/>
+          </a:prstGeom>
+          <a:solidFill>
+            <a:srgbClr val="2A9D8F"/>
+          </a:solidFill>
+          <a:ln w="12700">
+            <a:solidFill>
+              <a:srgbClr val="2A9D8F"/>
+            </a:solidFill>
+          </a:ln>
+          <a:effectLst/>
+        </p:spPr>
+        <p:style>
+          <a:lnRef idx="1">
+            <a:schemeClr val="accent1"/>
+          </a:lnRef>
+          <a:fillRef idx="3">
+            <a:schemeClr val="accent1"/>
+          </a:fillRef>
+          <a:effectRef idx="2">
+            <a:schemeClr val="accent1"/>
+          </a:effectRef>
+          <a:fontRef idx="minor">
+            <a:schemeClr val="lt1"/>
+          </a:fontRef>
+        </p:style>
+        <p:txBody>
+          <a:bodyPr rtlCol="0" anchor="ctr" wrap="square" lIns="76200" rIns="76200" tIns="38100" bIns="38100"/>
+          <a:lstStyle/>
+          <a:p>
+            <a:pPr algn="ctr">
+              <a:lnSpc>
+                <a:spcPct val="118000"/>
+              </a:lnSpc>
+              <a:spcBef>
+                <a:spcPts val="0"/>
+              </a:spcBef>
+              <a:spcAft>
+                <a:spcPts val="300"/>
+              </a:spcAft>
+            </a:pPr>
+            <a:r>
+              <a:rPr sz="1250" b="1" i="0">
+                <a:solidFill>
+                  <a:srgbClr val="FFFFFF"/>
+                </a:solidFill>
+                <a:latin typeface="Noto Sans CJK KR"/>
+              </a:rPr>
+              <a:t>Atlas</a:t>
+            </a:r>
+          </a:p>
+        </p:txBody>
+      </p:sp>
+      <p:sp>
+        <p:nvSpPr>
+          <p:cNvPr id="10" name="Rounded Rectangle 9"/>
+          <p:cNvSpPr/>
+          <p:nvPr/>
+        </p:nvSpPr>
+        <p:spPr>
+          <a:xfrm>
+            <a:off x="2148840" y="2761487"/>
+            <a:ext cx="9509760" cy="621792"/>
+          </a:xfrm>
+          <a:prstGeom prst="roundRect">
+            <a:avLst/>
+          </a:prstGeom>
+          <a:solidFill>
+            <a:srgbClr val="FFFFFF"/>
+          </a:solidFill>
+          <a:ln w="12700">
+            <a:solidFill>
+              <a:srgbClr val="8A8F98"/>
+            </a:solidFill>
+          </a:ln>
+          <a:effectLst/>
+        </p:spPr>
+        <p:style>
+          <a:lnRef idx="1">
+            <a:schemeClr val="accent1"/>
+          </a:lnRef>
+          <a:fillRef idx="3">
+            <a:schemeClr val="accent1"/>
+          </a:fillRef>
+          <a:effectRef idx="2">
+            <a:schemeClr val="accent1"/>
+          </a:effectRef>
+          <a:fontRef idx="minor">
+            <a:schemeClr val="lt1"/>
+          </a:fontRef>
+        </p:style>
+        <p:txBody>
+          <a:bodyPr rtlCol="0" anchor="ctr" wrap="square" lIns="76200" rIns="76200" tIns="38100" bIns="38100"/>
+          <a:lstStyle/>
+          <a:p>
+            <a:pPr algn="l">
+              <a:lnSpc>
+                <a:spcPct val="118000"/>
+              </a:lnSpc>
+              <a:spcBef>
+                <a:spcPts val="0"/>
+              </a:spcBef>
+              <a:spcAft>
+                <a:spcPts val="300"/>
+              </a:spcAft>
+            </a:pPr>
+            <a:r>
+              <a:rPr sz="1200" b="0" i="0">
+                <a:solidFill>
+                  <a:srgbClr val="22252B"/>
+                </a:solidFill>
+                <a:latin typeface="Noto Sans CJK KR"/>
+              </a:rPr>
+              <a:t>문맥 단위 기억(Omega)과 용량 확장(feature map)+Muon으로 표현력을 키운다.</a:t>
+            </a:r>
+          </a:p>
+        </p:txBody>
+      </p:sp>
+      <p:sp>
+        <p:nvSpPr>
+          <p:cNvPr id="11" name="Rounded Rectangle 10"/>
+          <p:cNvSpPr/>
+          <p:nvPr/>
+        </p:nvSpPr>
+        <p:spPr>
+          <a:xfrm>
+            <a:off x="502920" y="3456431"/>
+            <a:ext cx="1554480" cy="621792"/>
+          </a:xfrm>
+          <a:prstGeom prst="roundRect">
+            <a:avLst/>
+          </a:prstGeom>
+          <a:solidFill>
+            <a:srgbClr val="2A9D8F"/>
+          </a:solidFill>
+          <a:ln w="12700">
+            <a:solidFill>
+              <a:srgbClr val="2A9D8F"/>
+            </a:solidFill>
+          </a:ln>
+          <a:effectLst/>
+        </p:spPr>
+        <p:style>
+          <a:lnRef idx="1">
+            <a:schemeClr val="accent1"/>
+          </a:lnRef>
+          <a:fillRef idx="3">
+            <a:schemeClr val="accent1"/>
+          </a:fillRef>
+          <a:effectRef idx="2">
+            <a:schemeClr val="accent1"/>
+          </a:effectRef>
+          <a:fontRef idx="minor">
+            <a:schemeClr val="lt1"/>
+          </a:fontRef>
+        </p:style>
+        <p:txBody>
+          <a:bodyPr rtlCol="0" anchor="ctr" wrap="square" lIns="76200" rIns="76200" tIns="38100" bIns="38100"/>
+          <a:lstStyle/>
+          <a:p>
+            <a:pPr algn="ctr">
+              <a:lnSpc>
+                <a:spcPct val="118000"/>
+              </a:lnSpc>
+              <a:spcBef>
+                <a:spcPts val="0"/>
+              </a:spcBef>
+              <a:spcAft>
+                <a:spcPts val="300"/>
+              </a:spcAft>
+            </a:pPr>
+            <a:r>
+              <a:rPr sz="1250" b="1" i="0">
+                <a:solidFill>
+                  <a:srgbClr val="FFFFFF"/>
+                </a:solidFill>
+                <a:latin typeface="Noto Sans CJK KR"/>
+              </a:rPr>
+              <a:t>TNT</a:t>
+            </a:r>
+          </a:p>
+        </p:txBody>
+      </p:sp>
+      <p:sp>
+        <p:nvSpPr>
+          <p:cNvPr id="12" name="Rounded Rectangle 11"/>
+          <p:cNvSpPr/>
+          <p:nvPr/>
+        </p:nvSpPr>
+        <p:spPr>
+          <a:xfrm>
+            <a:off x="2148840" y="3456431"/>
+            <a:ext cx="9509760" cy="621792"/>
+          </a:xfrm>
+          <a:prstGeom prst="roundRect">
+            <a:avLst/>
+          </a:prstGeom>
+          <a:solidFill>
+            <a:srgbClr val="FFFFFF"/>
+          </a:solidFill>
+          <a:ln w="12700">
+            <a:solidFill>
+              <a:srgbClr val="8A8F98"/>
+            </a:solidFill>
+          </a:ln>
+          <a:effectLst/>
+        </p:spPr>
+        <p:style>
+          <a:lnRef idx="1">
+            <a:schemeClr val="accent1"/>
+          </a:lnRef>
+          <a:fillRef idx="3">
+            <a:schemeClr val="accent1"/>
+          </a:fillRef>
+          <a:effectRef idx="2">
+            <a:schemeClr val="accent1"/>
+          </a:effectRef>
+          <a:fontRef idx="minor">
+            <a:schemeClr val="lt1"/>
+          </a:fontRef>
+        </p:style>
+        <p:txBody>
+          <a:bodyPr rtlCol="0" anchor="ctr" wrap="square" lIns="76200" rIns="76200" tIns="38100" bIns="38100"/>
+          <a:lstStyle/>
+          <a:p>
+            <a:pPr algn="l">
+              <a:lnSpc>
+                <a:spcPct val="118000"/>
+              </a:lnSpc>
+              <a:spcBef>
+                <a:spcPts val="0"/>
+              </a:spcBef>
+              <a:spcAft>
+                <a:spcPts val="300"/>
+              </a:spcAft>
+            </a:pPr>
+            <a:r>
+              <a:rPr sz="1200" b="0" i="0">
+                <a:solidFill>
+                  <a:srgbClr val="22252B"/>
+                </a:solidFill>
+                <a:latin typeface="Noto Sans CJK KR"/>
+              </a:rPr>
+              <a:t>train/serve chunk 정렬과 global/local 계층으로 '어떻게 배포하나'를 답한다.</a:t>
+            </a:r>
+          </a:p>
+        </p:txBody>
+      </p:sp>
+      <p:sp>
+        <p:nvSpPr>
+          <p:cNvPr id="13" name="Rounded Rectangle 12"/>
+          <p:cNvSpPr/>
+          <p:nvPr/>
+        </p:nvSpPr>
+        <p:spPr>
+          <a:xfrm>
+            <a:off x="502920" y="4151375"/>
+            <a:ext cx="1554480" cy="621792"/>
+          </a:xfrm>
+          <a:prstGeom prst="roundRect">
+            <a:avLst/>
+          </a:prstGeom>
+          <a:solidFill>
+            <a:srgbClr val="C9A227"/>
+          </a:solidFill>
+          <a:ln w="12700">
+            <a:solidFill>
+              <a:srgbClr val="C9A227"/>
+            </a:solidFill>
+          </a:ln>
+          <a:effectLst/>
+        </p:spPr>
+        <p:style>
+          <a:lnRef idx="1">
+            <a:schemeClr val="accent1"/>
+          </a:lnRef>
+          <a:fillRef idx="3">
+            <a:schemeClr val="accent1"/>
+          </a:fillRef>
+          <a:effectRef idx="2">
+            <a:schemeClr val="accent1"/>
+          </a:effectRef>
+          <a:fontRef idx="minor">
+            <a:schemeClr val="lt1"/>
+          </a:fontRef>
+        </p:style>
+        <p:txBody>
+          <a:bodyPr rtlCol="0" anchor="ctr" wrap="square" lIns="76200" rIns="76200" tIns="38100" bIns="38100"/>
+          <a:lstStyle/>
+          <a:p>
+            <a:pPr algn="ctr">
+              <a:lnSpc>
+                <a:spcPct val="118000"/>
+              </a:lnSpc>
+              <a:spcBef>
+                <a:spcPts val="0"/>
+              </a:spcBef>
+              <a:spcAft>
+                <a:spcPts val="300"/>
+              </a:spcAft>
+            </a:pPr>
+            <a:r>
+              <a:rPr sz="1250" b="1" i="0">
+                <a:solidFill>
+                  <a:srgbClr val="FFFFFF"/>
+                </a:solidFill>
+                <a:latin typeface="Noto Sans CJK KR"/>
+              </a:rPr>
+              <a:t>HOPE</a:t>
+            </a:r>
+          </a:p>
+        </p:txBody>
+      </p:sp>
+      <p:sp>
+        <p:nvSpPr>
+          <p:cNvPr id="14" name="Rounded Rectangle 13"/>
+          <p:cNvSpPr/>
+          <p:nvPr/>
+        </p:nvSpPr>
+        <p:spPr>
+          <a:xfrm>
+            <a:off x="2148840" y="4151375"/>
+            <a:ext cx="9509760" cy="621792"/>
+          </a:xfrm>
+          <a:prstGeom prst="roundRect">
+            <a:avLst/>
+          </a:prstGeom>
+          <a:solidFill>
+            <a:srgbClr val="FFFFFF"/>
+          </a:solidFill>
+          <a:ln w="12700">
+            <a:solidFill>
+              <a:srgbClr val="8A8F98"/>
+            </a:solidFill>
+          </a:ln>
+          <a:effectLst/>
+        </p:spPr>
+        <p:style>
+          <a:lnRef idx="1">
+            <a:schemeClr val="accent1"/>
+          </a:lnRef>
+          <a:fillRef idx="3">
+            <a:schemeClr val="accent1"/>
+          </a:fillRef>
+          <a:effectRef idx="2">
+            <a:schemeClr val="accent1"/>
+          </a:effectRef>
+          <a:fontRef idx="minor">
+            <a:schemeClr val="lt1"/>
+          </a:fontRef>
+        </p:style>
+        <p:txBody>
+          <a:bodyPr rtlCol="0" anchor="ctr" wrap="square" lIns="76200" rIns="76200" tIns="38100" bIns="38100"/>
+          <a:lstStyle/>
+          <a:p>
+            <a:pPr algn="l">
+              <a:lnSpc>
+                <a:spcPct val="118000"/>
+              </a:lnSpc>
+              <a:spcBef>
+                <a:spcPts val="0"/>
+              </a:spcBef>
+              <a:spcAft>
+                <a:spcPts val="300"/>
+              </a:spcAft>
+            </a:pPr>
+            <a:r>
+              <a:rPr sz="1200" b="0" i="0">
+                <a:solidFill>
+                  <a:srgbClr val="22252B"/>
+                </a:solidFill>
+                <a:latin typeface="Noto Sans CJK KR"/>
+              </a:rPr>
+              <a:t>optimizer=memory·self-mod·CMS로 앞 4편을 하나의 중첩 시스템으로 통합.</a:t>
+            </a:r>
+          </a:p>
+        </p:txBody>
+      </p:sp>
+      <p:sp>
+        <p:nvSpPr>
+          <p:cNvPr id="15" name="Rounded Rectangle 14"/>
+          <p:cNvSpPr/>
+          <p:nvPr/>
+        </p:nvSpPr>
+        <p:spPr>
+          <a:xfrm>
+            <a:off x="502920" y="4846319"/>
+            <a:ext cx="1554480" cy="621792"/>
+          </a:xfrm>
+          <a:prstGeom prst="roundRect">
+            <a:avLst/>
+          </a:prstGeom>
+          <a:solidFill>
+            <a:srgbClr val="2A9D8F"/>
+          </a:solidFill>
+          <a:ln w="12700">
+            <a:solidFill>
+              <a:srgbClr val="2A9D8F"/>
+            </a:solidFill>
+          </a:ln>
+          <a:effectLst/>
+        </p:spPr>
+        <p:style>
+          <a:lnRef idx="1">
+            <a:schemeClr val="accent1"/>
+          </a:lnRef>
+          <a:fillRef idx="3">
+            <a:schemeClr val="accent1"/>
+          </a:fillRef>
+          <a:effectRef idx="2">
+            <a:schemeClr val="accent1"/>
+          </a:effectRef>
+          <a:fontRef idx="minor">
+            <a:schemeClr val="lt1"/>
+          </a:fontRef>
+        </p:style>
+        <p:txBody>
+          <a:bodyPr rtlCol="0" anchor="ctr" wrap="square" lIns="76200" rIns="76200" tIns="38100" bIns="38100"/>
+          <a:lstStyle/>
+          <a:p>
+            <a:pPr algn="ctr">
+              <a:lnSpc>
+                <a:spcPct val="118000"/>
+              </a:lnSpc>
+              <a:spcBef>
+                <a:spcPts val="0"/>
+              </a:spcBef>
+              <a:spcAft>
+                <a:spcPts val="300"/>
+              </a:spcAft>
+            </a:pPr>
+            <a:r>
+              <a:rPr sz="1250" b="1" i="0">
+                <a:solidFill>
+                  <a:srgbClr val="FFFFFF"/>
+                </a:solidFill>
+                <a:latin typeface="Noto Sans CJK KR"/>
+              </a:rPr>
+              <a:t>Sleep</a:t>
+            </a:r>
+          </a:p>
+        </p:txBody>
+      </p:sp>
+      <p:sp>
+        <p:nvSpPr>
+          <p:cNvPr id="16" name="Rounded Rectangle 15"/>
+          <p:cNvSpPr/>
+          <p:nvPr/>
+        </p:nvSpPr>
+        <p:spPr>
+          <a:xfrm>
+            <a:off x="2148840" y="4846319"/>
+            <a:ext cx="9509760" cy="621792"/>
+          </a:xfrm>
+          <a:prstGeom prst="roundRect">
+            <a:avLst/>
+          </a:prstGeom>
+          <a:solidFill>
+            <a:srgbClr val="FFFFFF"/>
+          </a:solidFill>
+          <a:ln w="12700">
+            <a:solidFill>
+              <a:srgbClr val="8A8F98"/>
+            </a:solidFill>
+          </a:ln>
+          <a:effectLst/>
+        </p:spPr>
+        <p:style>
+          <a:lnRef idx="1">
+            <a:schemeClr val="accent1"/>
+          </a:lnRef>
+          <a:fillRef idx="3">
+            <a:schemeClr val="accent1"/>
+          </a:fillRef>
+          <a:effectRef idx="2">
+            <a:schemeClr val="accent1"/>
+          </a:effectRef>
+          <a:fontRef idx="minor">
+            <a:schemeClr val="lt1"/>
+          </a:fontRef>
+        </p:style>
+        <p:txBody>
+          <a:bodyPr rtlCol="0" anchor="ctr" wrap="square" lIns="76200" rIns="76200" tIns="38100" bIns="38100"/>
+          <a:lstStyle/>
+          <a:p>
+            <a:pPr algn="l">
+              <a:lnSpc>
+                <a:spcPct val="118000"/>
+              </a:lnSpc>
+              <a:spcBef>
+                <a:spcPts val="0"/>
+              </a:spcBef>
+              <a:spcAft>
+                <a:spcPts val="300"/>
+              </a:spcAft>
+            </a:pPr>
+            <a:r>
+              <a:rPr sz="1200" b="0" i="0">
+                <a:solidFill>
+                  <a:srgbClr val="22252B"/>
+                </a:solidFill>
+                <a:latin typeface="Noto Sans CJK KR"/>
+              </a:rPr>
+              <a:t>wake/sleep 생애주기로 지식을 오프라인에서 위로 옮겨 파라미터를 키운다.</a:t>
+            </a:r>
+          </a:p>
+        </p:txBody>
+      </p:sp>
+      <p:sp>
+        <p:nvSpPr>
+          <p:cNvPr id="17" name="Rounded Rectangle 16"/>
+          <p:cNvSpPr/>
+          <p:nvPr/>
+        </p:nvSpPr>
+        <p:spPr>
+          <a:xfrm>
+            <a:off x="502920" y="5541263"/>
+            <a:ext cx="1554480" cy="621792"/>
+          </a:xfrm>
+          <a:prstGeom prst="roundRect">
+            <a:avLst/>
+          </a:prstGeom>
+          <a:solidFill>
+            <a:srgbClr val="C9A227"/>
+          </a:solidFill>
+          <a:ln w="12700">
+            <a:solidFill>
+              <a:srgbClr val="C9A227"/>
+            </a:solidFill>
+          </a:ln>
+          <a:effectLst/>
+        </p:spPr>
+        <p:style>
+          <a:lnRef idx="1">
+            <a:schemeClr val="accent1"/>
+          </a:lnRef>
+          <a:fillRef idx="3">
+            <a:schemeClr val="accent1"/>
+          </a:fillRef>
+          <a:effectRef idx="2">
+            <a:schemeClr val="accent1"/>
+          </a:effectRef>
+          <a:fontRef idx="minor">
+            <a:schemeClr val="lt1"/>
+          </a:fontRef>
+        </p:style>
+        <p:txBody>
+          <a:bodyPr rtlCol="0" anchor="ctr" wrap="square" lIns="76200" rIns="76200" tIns="38100" bIns="38100"/>
+          <a:lstStyle/>
+          <a:p>
+            <a:pPr algn="ctr">
+              <a:lnSpc>
+                <a:spcPct val="118000"/>
+              </a:lnSpc>
+              <a:spcBef>
+                <a:spcPts val="0"/>
+              </a:spcBef>
+              <a:spcAft>
+                <a:spcPts val="300"/>
+              </a:spcAft>
+            </a:pPr>
+            <a:r>
+              <a:rPr sz="1250" b="1" i="0">
+                <a:solidFill>
+                  <a:srgbClr val="FFFFFF"/>
+                </a:solidFill>
+                <a:latin typeface="Noto Sans CJK KR"/>
+              </a:rPr>
+              <a:t>우리 기여</a:t>
+            </a:r>
+          </a:p>
+        </p:txBody>
+      </p:sp>
+      <p:sp>
+        <p:nvSpPr>
+          <p:cNvPr id="18" name="Rounded Rectangle 17"/>
+          <p:cNvSpPr/>
+          <p:nvPr/>
+        </p:nvSpPr>
+        <p:spPr>
+          <a:xfrm>
+            <a:off x="2148840" y="5541263"/>
+            <a:ext cx="9509760" cy="621792"/>
+          </a:xfrm>
+          <a:prstGeom prst="roundRect">
+            <a:avLst/>
+          </a:prstGeom>
+          <a:solidFill>
+            <a:srgbClr val="FFFFFF"/>
+          </a:solidFill>
+          <a:ln w="12700">
+            <a:solidFill>
+              <a:srgbClr val="8A8F98"/>
+            </a:solidFill>
+          </a:ln>
+          <a:effectLst/>
+        </p:spPr>
+        <p:style>
+          <a:lnRef idx="1">
+            <a:schemeClr val="accent1"/>
+          </a:lnRef>
+          <a:fillRef idx="3">
+            <a:schemeClr val="accent1"/>
+          </a:fillRef>
+          <a:effectRef idx="2">
+            <a:schemeClr val="accent1"/>
+          </a:effectRef>
+          <a:fontRef idx="minor">
+            <a:schemeClr val="lt1"/>
+          </a:fontRef>
+        </p:style>
+        <p:txBody>
+          <a:bodyPr rtlCol="0" anchor="ctr" wrap="square" lIns="76200" rIns="76200" tIns="38100" bIns="38100"/>
+          <a:lstStyle/>
+          <a:p>
+            <a:pPr algn="l">
+              <a:lnSpc>
+                <a:spcPct val="118000"/>
+              </a:lnSpc>
+              <a:spcBef>
+                <a:spcPts val="0"/>
+              </a:spcBef>
+              <a:spcAft>
+                <a:spcPts val="300"/>
+              </a:spcAft>
+            </a:pPr>
+            <a:r>
+              <a:rPr sz="1200" b="0" i="0">
+                <a:solidFill>
+                  <a:srgbClr val="22252B"/>
+                </a:solidFill>
+                <a:latin typeface="Noto Sans CJK KR"/>
+              </a:rPr>
+              <a:t>이 배포는 디코드에서 memory-bound — 8칩 측정+HOPE roofline+zHBM/SRAM로 비용과 청사진을 냈다.</a:t>
+            </a:r>
+          </a:p>
+        </p:txBody>
+      </p:sp>
+      <p:sp>
+        <p:nvSpPr>
+          <p:cNvPr id="19" name="TextBox 18"/>
+          <p:cNvSpPr txBox="1"/>
+          <p:nvPr/>
+        </p:nvSpPr>
+        <p:spPr>
+          <a:xfrm>
+            <a:off x="502920" y="6355080"/>
+            <a:ext cx="10972800" cy="274320"/>
+          </a:xfrm>
+          <a:prstGeom prst="rect">
+            <a:avLst/>
+          </a:prstGeom>
+          <a:noFill/>
+        </p:spPr>
+        <p:txBody>
+          <a:bodyPr wrap="square" anchor="t" lIns="38100" rIns="38100" tIns="25400" bIns="25400">
+            <a:spAutoFit/>
+          </a:bodyPr>
+          <a:lstStyle/>
+          <a:p>
+            <a:pPr algn="ctr">
+              <a:lnSpc>
+                <a:spcPct val="120000"/>
+              </a:lnSpc>
+              <a:spcBef>
+                <a:spcPts val="0"/>
+              </a:spcBef>
+              <a:spcAft>
+                <a:spcPts val="0"/>
+              </a:spcAft>
+            </a:pPr>
+            <a:r>
+              <a:rPr sz="1300" b="1" i="0">
+                <a:solidFill>
+                  <a:srgbClr val="22252B"/>
+                </a:solidFill>
+                <a:latin typeface="Noto Sans CJK KR"/>
+              </a:rPr>
+              <a:t>감사합니다 · Q&amp;A</a:t>
             </a:r>
           </a:p>
         </p:txBody>

--- a/seminar/TTT-seminar.pptx
+++ b/seminar/TTT-seminar.pptx
@@ -73,6 +73,10 @@
     <p:sldId id="321" r:id="rId72"/>
     <p:sldId id="322" r:id="rId73"/>
     <p:sldId id="323" r:id="rId74"/>
+    <p:sldId id="324" r:id="rId75"/>
+    <p:sldId id="325" r:id="rId76"/>
+    <p:sldId id="326" r:id="rId77"/>
+    <p:sldId id="327" r:id="rId78"/>
   </p:sldIdLst>
   <p:sldSz cx="12191695" cy="6858000" type="screen4x3"/>
   <p:notesSz cx="6858000" cy="9144000"/>
@@ -42230,7 +42234,7 @@
                 </a:solidFill>
                 <a:latin typeface="Noto Sans CJK KR"/>
               </a:rPr>
-              <a:t>B6 · Sleep — 통합 메커니즘</a:t>
+              <a:t>B6 · Sleep — 문제</a:t>
             </a:r>
           </a:p>
         </p:txBody>
@@ -42275,29 +42279,31 @@
                 </a:solidFill>
                 <a:latin typeface="Noto Sans CJK KR"/>
               </a:rPr>
-              <a:t>느린 블록에 새 저차원 expert를 키워 지식을 위로 옮긴다</a:t>
-            </a:r>
-          </a:p>
-        </p:txBody>
-      </p:sp>
-      <p:sp>
-        <p:nvSpPr>
-          <p:cNvPr id="5" name="Rectangle 4"/>
+              <a:t>NL은 online consolidation 절반만 했다 — 잊히기 전에 옮길 곳이 없다</a:t>
+            </a:r>
+          </a:p>
+        </p:txBody>
+      </p:sp>
+      <p:sp>
+        <p:nvSpPr>
+          <p:cNvPr id="5" name="Rounded Rectangle 4"/>
           <p:cNvSpPr/>
           <p:nvPr/>
         </p:nvSpPr>
         <p:spPr>
           <a:xfrm>
-            <a:off x="466344" y="2006828"/>
-            <a:ext cx="5559552" cy="1472743"/>
-          </a:xfrm>
-          <a:prstGeom prst="rect">
-            <a:avLst/>
-          </a:prstGeom>
-          <a:noFill/>
-          <a:ln w="9525">
+            <a:off x="502920" y="1280160"/>
+            <a:ext cx="5486400" cy="2788920"/>
+          </a:xfrm>
+          <a:prstGeom prst="roundRect">
+            <a:avLst/>
+          </a:prstGeom>
+          <a:solidFill>
+            <a:srgbClr val="F6DDDD"/>
+          </a:solidFill>
+          <a:ln w="12700">
             <a:solidFill>
-              <a:srgbClr val="8A8F98"/>
+              <a:srgbClr val="C1121F"/>
             </a:solidFill>
           </a:ln>
           <a:effectLst/>
@@ -42317,249 +42323,130 @@
           </a:fontRef>
         </p:style>
         <p:txBody>
-          <a:bodyPr rtlCol="0" anchor="ctr"/>
-          <a:lstStyle/>
-          <a:p>
-            <a:pPr algn="ctr"/>
-          </a:p>
-        </p:txBody>
-      </p:sp>
-      <p:pic>
-        <p:nvPicPr>
-          <p:cNvPr id="6" name="Picture 5" descr="fig2.png"/>
-          <p:cNvPicPr>
-            <a:picLocks noChangeAspect="1"/>
-          </p:cNvPicPr>
-          <p:nvPr/>
-        </p:nvPicPr>
-        <p:blipFill>
-          <a:blip r:embed="rId2"/>
-          <a:stretch>
-            <a:fillRect/>
-          </a:stretch>
-        </p:blipFill>
-        <p:spPr>
-          <a:xfrm>
-            <a:off x="502920" y="2043404"/>
-            <a:ext cx="5486400" cy="1399591"/>
-          </a:xfrm>
-          <a:prstGeom prst="rect">
-            <a:avLst/>
-          </a:prstGeom>
-        </p:spPr>
-      </p:pic>
-      <p:sp>
-        <p:nvSpPr>
-          <p:cNvPr id="7" name="TextBox 6"/>
-          <p:cNvSpPr txBox="1"/>
-          <p:nvPr/>
-        </p:nvSpPr>
-        <p:spPr>
-          <a:xfrm>
-            <a:off x="502920" y="4151376"/>
-            <a:ext cx="5486400" cy="420624"/>
-          </a:xfrm>
-          <a:prstGeom prst="rect">
-            <a:avLst/>
-          </a:prstGeom>
-          <a:noFill/>
-        </p:spPr>
-        <p:txBody>
-          <a:bodyPr wrap="square" anchor="t" lIns="38100" rIns="38100" tIns="25400" bIns="25400">
-            <a:spAutoFit/>
-          </a:bodyPr>
-          <a:lstStyle/>
-          <a:p>
-            <a:pPr algn="ctr">
-              <a:lnSpc>
-                <a:spcPct val="120000"/>
-              </a:lnSpc>
-              <a:spcBef>
-                <a:spcPts val="0"/>
-              </a:spcBef>
-              <a:spcAft>
-                <a:spcPts val="100"/>
-              </a:spcAft>
-            </a:pPr>
-            <a:r>
-              <a:rPr sz="1050" b="0" i="0">
-                <a:solidFill>
-                  <a:srgbClr val="22252B"/>
-                </a:solidFill>
-                <a:latin typeface="Noto Sans CJK KR"/>
-              </a:rPr>
-              <a:t>Memory Consolidation: 모델이 스스로 파라미터 수를 늘려 용량을 확장</a:t>
-            </a:r>
-          </a:p>
-          <a:p>
-            <a:pPr algn="ctr">
-              <a:lnSpc>
-                <a:spcPct val="120000"/>
-              </a:lnSpc>
-              <a:spcBef>
-                <a:spcPts val="0"/>
-              </a:spcBef>
-              <a:spcAft>
-                <a:spcPts val="100"/>
-              </a:spcAft>
-            </a:pPr>
-            <a:r>
-              <a:rPr sz="850" b="0" i="1">
-                <a:solidFill>
-                  <a:srgbClr val="5A5F68"/>
-                </a:solidFill>
-                <a:latin typeface="Noto Sans CJK KR"/>
-              </a:rPr>
-              <a:t>출처: 2606.03979 Fig.2</a:t>
-            </a:r>
-          </a:p>
-        </p:txBody>
-      </p:sp>
-      <p:sp>
-        <p:nvSpPr>
-          <p:cNvPr id="8" name="Rectangle 7"/>
+          <a:bodyPr rtlCol="0" anchor="ctr" wrap="square" lIns="76200" rIns="76200" tIns="38100" bIns="38100"/>
+          <a:lstStyle/>
+          <a:p>
+            <a:pPr algn="l">
+              <a:lnSpc>
+                <a:spcPct val="118000"/>
+              </a:lnSpc>
+              <a:spcBef>
+                <a:spcPts val="0"/>
+              </a:spcBef>
+              <a:spcAft>
+                <a:spcPts val="300"/>
+              </a:spcAft>
+            </a:pPr>
+            <a:r>
+              <a:rPr sz="1250" b="1" i="0">
+                <a:solidFill>
+                  <a:srgbClr val="C1121F"/>
+                </a:solidFill>
+                <a:latin typeface="Noto Sans CJK KR"/>
+              </a:rPr>
+              <a:t>NL이 남긴 숙제 4가지</a:t>
+            </a:r>
+          </a:p>
+          <a:p>
+            <a:pPr algn="l">
+              <a:lnSpc>
+                <a:spcPct val="118000"/>
+              </a:lnSpc>
+              <a:spcBef>
+                <a:spcPts val="0"/>
+              </a:spcBef>
+              <a:spcAft>
+                <a:spcPts val="200"/>
+              </a:spcAft>
+            </a:pPr>
+            <a:r>
+              <a:rPr sz="1100" b="0" i="0">
+                <a:solidFill>
+                  <a:srgbClr val="22252B"/>
+                </a:solidFill>
+                <a:latin typeface="Noto Sans CJK KR"/>
+              </a:rPr>
+              <a:t>① catastrophic forgetting 미해결 — 여러 주기로 덮어쓰기를 지연해도, 모든 층의 갱신 시점이 겹치면 결국 덮어쓴다.</a:t>
+            </a:r>
+          </a:p>
+          <a:p>
+            <a:pPr algn="l">
+              <a:lnSpc>
+                <a:spcPct val="118000"/>
+              </a:lnSpc>
+              <a:spcBef>
+                <a:spcPts val="0"/>
+              </a:spcBef>
+              <a:spcAft>
+                <a:spcPts val="200"/>
+              </a:spcAft>
+            </a:pPr>
+            <a:r>
+              <a:rPr sz="1100" b="0" i="0">
+                <a:solidFill>
+                  <a:srgbClr val="22252B"/>
+                </a:solidFill>
+                <a:latin typeface="Noto Sans CJK KR"/>
+              </a:rPr>
+              <a:t>② NL 저자 스스로 'offline consolidation(자면서 정리)은 범위 밖'이라 명시 — 온라인 절반만.</a:t>
+            </a:r>
+          </a:p>
+          <a:p>
+            <a:pPr algn="l">
+              <a:lnSpc>
+                <a:spcPct val="118000"/>
+              </a:lnSpc>
+              <a:spcBef>
+                <a:spcPts val="0"/>
+              </a:spcBef>
+              <a:spcAft>
+                <a:spcPts val="200"/>
+              </a:spcAft>
+            </a:pPr>
+            <a:r>
+              <a:rPr sz="1100" b="0" i="0">
+                <a:solidFill>
+                  <a:srgbClr val="22252B"/>
+                </a:solidFill>
+                <a:latin typeface="Noto Sans CJK KR"/>
+              </a:rPr>
+              <a:t>③ capacity 고정 — 유한 파라미터에 계속 압축해 넣으면 언젠가 옛 지식을 덮어쓴다.</a:t>
+            </a:r>
+          </a:p>
+          <a:p>
+            <a:pPr algn="l">
+              <a:lnSpc>
+                <a:spcPct val="118000"/>
+              </a:lnSpc>
+              <a:spcBef>
+                <a:spcPts val="0"/>
+              </a:spcBef>
+              <a:spcAft>
+                <a:spcPts val="200"/>
+              </a:spcAft>
+            </a:pPr>
+            <a:r>
+              <a:rPr sz="1100" b="0" i="0">
+                <a:solidFill>
+                  <a:srgbClr val="22252B"/>
+                </a:solidFill>
+                <a:latin typeface="Noto Sans CJK KR"/>
+              </a:rPr>
+              <a:t>④ 입력을 끊고 자기 내부를 정리할 시간이 설계에 없다.</a:t>
+            </a:r>
+          </a:p>
+        </p:txBody>
+      </p:sp>
+      <p:sp>
+        <p:nvSpPr>
+          <p:cNvPr id="6" name="Rounded Rectangle 5"/>
           <p:cNvSpPr/>
           <p:nvPr/>
         </p:nvSpPr>
         <p:spPr>
           <a:xfrm>
-            <a:off x="6967967" y="1335024"/>
-            <a:ext cx="3986304" cy="2816352"/>
-          </a:xfrm>
-          <a:prstGeom prst="rect">
-            <a:avLst/>
-          </a:prstGeom>
-          <a:noFill/>
-          <a:ln w="9525">
-            <a:solidFill>
-              <a:srgbClr val="8A8F98"/>
-            </a:solidFill>
-          </a:ln>
-          <a:effectLst/>
-        </p:spPr>
-        <p:style>
-          <a:lnRef idx="1">
-            <a:schemeClr val="accent1"/>
-          </a:lnRef>
-          <a:fillRef idx="3">
-            <a:schemeClr val="accent1"/>
-          </a:fillRef>
-          <a:effectRef idx="2">
-            <a:schemeClr val="accent1"/>
-          </a:effectRef>
-          <a:fontRef idx="minor">
-            <a:schemeClr val="lt1"/>
-          </a:fontRef>
-        </p:style>
-        <p:txBody>
-          <a:bodyPr rtlCol="0" anchor="ctr"/>
-          <a:lstStyle/>
-          <a:p>
-            <a:pPr algn="ctr"/>
-          </a:p>
-        </p:txBody>
-      </p:sp>
-      <p:pic>
-        <p:nvPicPr>
-          <p:cNvPr id="9" name="Picture 8" descr="fig8.png"/>
-          <p:cNvPicPr>
-            <a:picLocks noChangeAspect="1"/>
-          </p:cNvPicPr>
-          <p:nvPr/>
-        </p:nvPicPr>
-        <p:blipFill>
-          <a:blip r:embed="rId3"/>
-          <a:stretch>
-            <a:fillRect/>
-          </a:stretch>
-        </p:blipFill>
-        <p:spPr>
-          <a:xfrm>
-            <a:off x="7004543" y="1371600"/>
-            <a:ext cx="3913152" cy="2743200"/>
-          </a:xfrm>
-          <a:prstGeom prst="rect">
-            <a:avLst/>
-          </a:prstGeom>
-        </p:spPr>
-      </p:pic>
-      <p:sp>
-        <p:nvSpPr>
-          <p:cNvPr id="10" name="TextBox 9"/>
-          <p:cNvSpPr txBox="1"/>
-          <p:nvPr/>
-        </p:nvSpPr>
-        <p:spPr>
-          <a:xfrm>
-            <a:off x="6263640" y="4151376"/>
-            <a:ext cx="5394960" cy="420624"/>
-          </a:xfrm>
-          <a:prstGeom prst="rect">
-            <a:avLst/>
-          </a:prstGeom>
-          <a:noFill/>
-        </p:spPr>
-        <p:txBody>
-          <a:bodyPr wrap="square" anchor="t" lIns="38100" rIns="38100" tIns="25400" bIns="25400">
-            <a:spAutoFit/>
-          </a:bodyPr>
-          <a:lstStyle/>
-          <a:p>
-            <a:pPr algn="ctr">
-              <a:lnSpc>
-                <a:spcPct val="120000"/>
-              </a:lnSpc>
-              <a:spcBef>
-                <a:spcPts val="0"/>
-              </a:spcBef>
-              <a:spcAft>
-                <a:spcPts val="100"/>
-              </a:spcAft>
-            </a:pPr>
-            <a:r>
-              <a:rPr sz="1050" b="0" i="0">
-                <a:solidFill>
-                  <a:srgbClr val="22252B"/>
-                </a:solidFill>
-                <a:latin typeface="Noto Sans CJK KR"/>
-              </a:rPr>
-              <a:t>Sleep cycle마다 router가 새 expert를 선택·갱신(왼→오른쪽)</a:t>
-            </a:r>
-          </a:p>
-          <a:p>
-            <a:pPr algn="ctr">
-              <a:lnSpc>
-                <a:spcPct val="120000"/>
-              </a:lnSpc>
-              <a:spcBef>
-                <a:spcPts val="0"/>
-              </a:spcBef>
-              <a:spcAft>
-                <a:spcPts val="100"/>
-              </a:spcAft>
-            </a:pPr>
-            <a:r>
-              <a:rPr sz="850" b="0" i="1">
-                <a:solidFill>
-                  <a:srgbClr val="5A5F68"/>
-                </a:solidFill>
-                <a:latin typeface="Noto Sans CJK KR"/>
-              </a:rPr>
-              <a:t>출처: 2606.03979 Fig.8</a:t>
-            </a:r>
-          </a:p>
-        </p:txBody>
-      </p:sp>
-      <p:sp>
-        <p:nvSpPr>
-          <p:cNvPr id="11" name="Rounded Rectangle 10"/>
-          <p:cNvSpPr/>
-          <p:nvPr/>
-        </p:nvSpPr>
-        <p:spPr>
-          <a:xfrm>
-            <a:off x="502920" y="4709160"/>
-            <a:ext cx="11155680" cy="960120"/>
+            <a:off x="6199632" y="1280160"/>
+            <a:ext cx="5486400" cy="2788920"/>
           </a:xfrm>
           <a:prstGeom prst="roundRect">
             <a:avLst/>
@@ -42600,39 +42487,214 @@
                 <a:spcPts val="0"/>
               </a:spcBef>
               <a:spcAft>
+                <a:spcPts val="300"/>
+              </a:spcAft>
+            </a:pPr>
+            <a:r>
+              <a:rPr sz="1250" b="1" i="0">
+                <a:solidFill>
+                  <a:srgbClr val="2A6F97"/>
+                </a:solidFill>
+                <a:latin typeface="Noto Sans CJK KR"/>
+              </a:rPr>
+              <a:t>anterograde amnesia (기억상실증)</a:t>
+            </a:r>
+          </a:p>
+          <a:p>
+            <a:pPr algn="l">
+              <a:lnSpc>
+                <a:spcPct val="118000"/>
+              </a:lnSpc>
+              <a:spcBef>
+                <a:spcPts val="0"/>
+              </a:spcBef>
+              <a:spcAft>
+                <a:spcPts val="300"/>
+              </a:spcAft>
+            </a:pPr>
+            <a:r>
+              <a:rPr sz="1100" b="0" i="0">
+                <a:solidFill>
+                  <a:srgbClr val="22252B"/>
+                </a:solidFill>
+                <a:latin typeface="Noto Sans CJK KR"/>
+              </a:rPr>
+              <a:t>배포된 LLM의 지식은 두 곳에만 산다:</a:t>
+            </a:r>
+          </a:p>
+          <a:p>
+            <a:pPr algn="l">
+              <a:lnSpc>
+                <a:spcPct val="118000"/>
+              </a:lnSpc>
+              <a:spcBef>
+                <a:spcPts val="0"/>
+              </a:spcBef>
+              <a:spcAft>
                 <a:spcPts val="200"/>
               </a:spcAft>
             </a:pPr>
             <a:r>
+              <a:rPr sz="1100" b="0" i="0">
+                <a:solidFill>
+                  <a:srgbClr val="22252B"/>
+                </a:solidFill>
+                <a:latin typeface="Noto Sans CJK KR"/>
+              </a:rPr>
+              <a:t>• 세션 끝나면 사라지는 context window</a:t>
+            </a:r>
+          </a:p>
+          <a:p>
+            <a:pPr algn="l">
+              <a:lnSpc>
+                <a:spcPct val="118000"/>
+              </a:lnSpc>
+              <a:spcBef>
+                <a:spcPts val="0"/>
+              </a:spcBef>
+              <a:spcAft>
+                <a:spcPts val="200"/>
+              </a:spcAft>
+            </a:pPr>
+            <a:r>
+              <a:rPr sz="1100" b="0" i="0">
+                <a:solidFill>
+                  <a:srgbClr val="22252B"/>
+                </a:solidFill>
+                <a:latin typeface="Noto Sans CJK KR"/>
+              </a:rPr>
+              <a:t>• pre-training 때 얼어붙은 weight</a:t>
+            </a:r>
+          </a:p>
+          <a:p>
+            <a:pPr algn="l">
+              <a:lnSpc>
+                <a:spcPct val="118000"/>
+              </a:lnSpc>
+              <a:spcBef>
+                <a:spcPts val="0"/>
+              </a:spcBef>
+              <a:spcAft>
+                <a:spcPts val="300"/>
+              </a:spcAft>
+            </a:pPr>
+            <a:r>
+              <a:rPr sz="1100" b="1" i="0">
+                <a:solidFill>
+                  <a:srgbClr val="C1121F"/>
+                </a:solidFill>
+                <a:latin typeface="Noto Sans CJK KR"/>
+              </a:rPr>
+              <a:t>이 둘을 잇는 다리가 없다 = 새 장기기억을 못 만드는 '영원한 현재'.</a:t>
+            </a:r>
+          </a:p>
+          <a:p>
+            <a:pPr algn="l">
+              <a:lnSpc>
+                <a:spcPct val="118000"/>
+              </a:lnSpc>
+              <a:spcBef>
+                <a:spcPts val="0"/>
+              </a:spcBef>
+              <a:spcAft>
+                <a:spcPts val="200"/>
+              </a:spcAft>
+            </a:pPr>
+            <a:r>
+              <a:rPr sz="1100" b="1" i="0">
+                <a:solidFill>
+                  <a:srgbClr val="2A6F97"/>
+                </a:solidFill>
+                <a:latin typeface="Noto Sans CJK KR"/>
+              </a:rPr>
+              <a:t>남는 질문: 빠른 level의 지식이 예정된 갱신으로 덮어써지기 전에, 그걸 어디로 옮길 것인가?</a:t>
+            </a:r>
+          </a:p>
+        </p:txBody>
+      </p:sp>
+      <p:sp>
+        <p:nvSpPr>
+          <p:cNvPr id="7" name="Rounded Rectangle 6"/>
+          <p:cNvSpPr/>
+          <p:nvPr/>
+        </p:nvSpPr>
+        <p:spPr>
+          <a:xfrm>
+            <a:off x="502920" y="4206240"/>
+            <a:ext cx="11183112" cy="1143000"/>
+          </a:xfrm>
+          <a:prstGeom prst="roundRect">
+            <a:avLst/>
+          </a:prstGeom>
+          <a:solidFill>
+            <a:srgbClr val="DAF0ED"/>
+          </a:solidFill>
+          <a:ln w="12700">
+            <a:solidFill>
+              <a:srgbClr val="2A9D8F"/>
+            </a:solidFill>
+          </a:ln>
+          <a:effectLst/>
+        </p:spPr>
+        <p:style>
+          <a:lnRef idx="1">
+            <a:schemeClr val="accent1"/>
+          </a:lnRef>
+          <a:fillRef idx="3">
+            <a:schemeClr val="accent1"/>
+          </a:fillRef>
+          <a:effectRef idx="2">
+            <a:schemeClr val="accent1"/>
+          </a:effectRef>
+          <a:fontRef idx="minor">
+            <a:schemeClr val="lt1"/>
+          </a:fontRef>
+        </p:style>
+        <p:txBody>
+          <a:bodyPr rtlCol="0" anchor="ctr" wrap="square" lIns="76200" rIns="76200" tIns="38100" bIns="38100"/>
+          <a:lstStyle/>
+          <a:p>
+            <a:pPr algn="l">
+              <a:lnSpc>
+                <a:spcPct val="118000"/>
+              </a:lnSpc>
+              <a:spcBef>
+                <a:spcPts val="0"/>
+              </a:spcBef>
+              <a:spcAft>
+                <a:spcPts val="300"/>
+              </a:spcAft>
+            </a:pPr>
+            <a:r>
               <a:rPr sz="1250" b="1" i="0">
                 <a:solidFill>
-                  <a:srgbClr val="2A6F97"/>
-                </a:solidFill>
-                <a:latin typeface="Noto Sans CJK KR"/>
-              </a:rPr>
-              <a:t>B5(HOPE)와의 연결 — 빠진 조각</a:t>
-            </a:r>
-          </a:p>
-          <a:p>
-            <a:pPr algn="l">
-              <a:lnSpc>
-                <a:spcPct val="118000"/>
-              </a:lnSpc>
-              <a:spcBef>
-                <a:spcPts val="0"/>
-              </a:spcBef>
-              <a:spcAft>
-                <a:spcPts val="300"/>
-              </a:spcAft>
-            </a:pPr>
-            <a:r>
-              <a:rPr sz="1200" b="0" i="0">
-                <a:solidFill>
-                  <a:srgbClr val="22252B"/>
-                </a:solidFill>
-                <a:latin typeface="Noto Sans CJK KR"/>
-              </a:rPr>
-              <a:t>HOPE의 CMS는 '느린 블록이 빠른 블록의 리셋 초기값'을 줄 뿐(런타임 diff 전달 아님). Sleep는 오프라인에서 빠른(고주파) 메모리가 배운 것을 새 low-rank expert로 만들어 느린 블록에 '실제로' 얹는다 = 위쪽 전달.</a:t>
+                  <a:srgbClr val="2A9D8F"/>
+                </a:solidFill>
+                <a:latin typeface="Noto Sans CJK KR"/>
+              </a:rPr>
+              <a:t>Sleep의 답 (미리보기)</a:t>
+            </a:r>
+          </a:p>
+          <a:p>
+            <a:pPr algn="l">
+              <a:lnSpc>
+                <a:spcPct val="118000"/>
+              </a:lnSpc>
+              <a:spcBef>
+                <a:spcPts val="0"/>
+              </a:spcBef>
+              <a:spcAft>
+                <a:spcPts val="200"/>
+              </a:spcAft>
+            </a:pPr>
+            <a:r>
+              <a:rPr sz="1150" b="0" i="0">
+                <a:solidFill>
+                  <a:srgbClr val="22252B"/>
+                </a:solidFill>
+                <a:latin typeface="Noto Sans CJK KR"/>
+              </a:rPr>
+              <a:t>wake/sleep lifecycle을 세워, 잠자는 동안 그 지식을 더 느린 블록에 '새 expert로 위쪽 distillation'하고, forgetting을 regularization이 아니라 'capacity 성장'으로 재정의한다. 그 발화 시점이 정확히 CMS의 chunk 경계.</a:t>
             </a:r>
           </a:p>
         </p:txBody>
@@ -43022,7 +43084,7 @@
                 </a:solidFill>
                 <a:latin typeface="Noto Sans CJK KR"/>
               </a:rPr>
-              <a:t>B6 · Sleep — 데이터는 어떻게 만드나</a:t>
+              <a:t>B6 · Sleep — 가설: wake/sleep lifecycle</a:t>
             </a:r>
           </a:p>
         </p:txBody>
@@ -43067,21 +43129,156 @@
                 </a:solidFill>
                 <a:latin typeface="Noto Sans CJK KR"/>
               </a:rPr>
-              <a:t>전부 오프라인·자기생성: teacher→student, GKD + RL</a:t>
-            </a:r>
-          </a:p>
-        </p:txBody>
-      </p:sp>
-      <p:sp>
-        <p:nvSpPr>
-          <p:cNvPr id="5" name="Rounded Rectangle 4"/>
+              <a:t>축을 하나 더 — 수식의 축이 아니라 '시간'의 축</a:t>
+            </a:r>
+          </a:p>
+        </p:txBody>
+      </p:sp>
+      <p:sp>
+        <p:nvSpPr>
+          <p:cNvPr id="5" name="Rectangle 4"/>
           <p:cNvSpPr/>
           <p:nvPr/>
         </p:nvSpPr>
         <p:spPr>
           <a:xfrm>
-            <a:off x="502920" y="1463040"/>
-            <a:ext cx="2468880" cy="1097280"/>
+            <a:off x="466344" y="1494017"/>
+            <a:ext cx="5285232" cy="2498364"/>
+          </a:xfrm>
+          <a:prstGeom prst="rect">
+            <a:avLst/>
+          </a:prstGeom>
+          <a:noFill/>
+          <a:ln w="9525">
+            <a:solidFill>
+              <a:srgbClr val="8A8F98"/>
+            </a:solidFill>
+          </a:ln>
+          <a:effectLst/>
+        </p:spPr>
+        <p:style>
+          <a:lnRef idx="1">
+            <a:schemeClr val="accent1"/>
+          </a:lnRef>
+          <a:fillRef idx="3">
+            <a:schemeClr val="accent1"/>
+          </a:fillRef>
+          <a:effectRef idx="2">
+            <a:schemeClr val="accent1"/>
+          </a:effectRef>
+          <a:fontRef idx="minor">
+            <a:schemeClr val="lt1"/>
+          </a:fontRef>
+        </p:style>
+        <p:txBody>
+          <a:bodyPr rtlCol="0" anchor="ctr"/>
+          <a:lstStyle/>
+          <a:p>
+            <a:pPr algn="ctr"/>
+          </a:p>
+        </p:txBody>
+      </p:sp>
+      <p:pic>
+        <p:nvPicPr>
+          <p:cNvPr id="6" name="Picture 5" descr="fig1.png"/>
+          <p:cNvPicPr>
+            <a:picLocks noChangeAspect="1"/>
+          </p:cNvPicPr>
+          <p:nvPr/>
+        </p:nvPicPr>
+        <p:blipFill>
+          <a:blip r:embed="rId2"/>
+          <a:stretch>
+            <a:fillRect/>
+          </a:stretch>
+        </p:blipFill>
+        <p:spPr>
+          <a:xfrm>
+            <a:off x="502920" y="1530593"/>
+            <a:ext cx="5212080" cy="2425212"/>
+          </a:xfrm>
+          <a:prstGeom prst="rect">
+            <a:avLst/>
+          </a:prstGeom>
+        </p:spPr>
+      </p:pic>
+      <p:sp>
+        <p:nvSpPr>
+          <p:cNvPr id="7" name="TextBox 6"/>
+          <p:cNvSpPr txBox="1"/>
+          <p:nvPr/>
+        </p:nvSpPr>
+        <p:spPr>
+          <a:xfrm>
+            <a:off x="502920" y="4151376"/>
+            <a:ext cx="5212080" cy="420624"/>
+          </a:xfrm>
+          <a:prstGeom prst="rect">
+            <a:avLst/>
+          </a:prstGeom>
+          <a:noFill/>
+        </p:spPr>
+        <p:txBody>
+          <a:bodyPr wrap="square" anchor="t" lIns="38100" rIns="38100" tIns="25400" bIns="25400">
+            <a:spAutoFit/>
+          </a:bodyPr>
+          <a:lstStyle/>
+          <a:p>
+            <a:pPr algn="ctr">
+              <a:lnSpc>
+                <a:spcPct val="120000"/>
+              </a:lnSpc>
+              <a:spcBef>
+                <a:spcPts val="0"/>
+              </a:spcBef>
+              <a:spcAft>
+                <a:spcPts val="100"/>
+              </a:spcAft>
+            </a:pPr>
+            <a:r>
+              <a:rPr sz="1050" b="0" i="0">
+                <a:solidFill>
+                  <a:srgbClr val="22252B"/>
+                </a:solidFill>
+                <a:latin typeface="Noto Sans CJK KR"/>
+              </a:rPr>
+              <a:t>Figure 1 — conventional(train/test 분리) vs continual(Active↔Sleep 주기 교대)</a:t>
+            </a:r>
+          </a:p>
+          <a:p>
+            <a:pPr algn="ctr">
+              <a:lnSpc>
+                <a:spcPct val="120000"/>
+              </a:lnSpc>
+              <a:spcBef>
+                <a:spcPts val="0"/>
+              </a:spcBef>
+              <a:spcAft>
+                <a:spcPts val="100"/>
+              </a:spcAft>
+            </a:pPr>
+            <a:r>
+              <a:rPr sz="850" b="0" i="1">
+                <a:solidFill>
+                  <a:srgbClr val="5A5F68"/>
+                </a:solidFill>
+                <a:latin typeface="Noto Sans CJK KR"/>
+              </a:rPr>
+              <a:t>출처: 2606.03979 Fig.1</a:t>
+            </a:r>
+          </a:p>
+        </p:txBody>
+      </p:sp>
+      <p:sp>
+        <p:nvSpPr>
+          <p:cNvPr id="8" name="Rounded Rectangle 7"/>
+          <p:cNvSpPr/>
+          <p:nvPr/>
+        </p:nvSpPr>
+        <p:spPr>
+          <a:xfrm>
+            <a:off x="5852160" y="1371600"/>
+            <a:ext cx="5806440" cy="1371600"/>
           </a:xfrm>
           <a:prstGeom prst="roundRect">
             <a:avLst/>
@@ -43114,7 +43311,7 @@
           <a:bodyPr rtlCol="0" anchor="ctr" wrap="square" lIns="76200" rIns="76200" tIns="38100" bIns="38100"/>
           <a:lstStyle/>
           <a:p>
-            <a:pPr algn="ctr">
+            <a:pPr algn="l">
               <a:lnSpc>
                 <a:spcPct val="118000"/>
               </a:lnSpc>
@@ -43126,107 +43323,71 @@
               </a:spcAft>
             </a:pPr>
             <a:r>
-              <a:rPr sz="1400" b="1" i="0">
+              <a:rPr sz="1250" b="1" i="0">
                 <a:solidFill>
                   <a:srgbClr val="2A9D8F"/>
                 </a:solidFill>
                 <a:latin typeface="Noto Sans CJK KR"/>
               </a:rPr>
-              <a:t>Teacher</a:t>
-            </a:r>
-          </a:p>
-          <a:p>
-            <a:pPr algn="ctr">
-              <a:lnSpc>
-                <a:spcPct val="118000"/>
-              </a:lnSpc>
-              <a:spcBef>
-                <a:spcPts val="0"/>
-              </a:spcBef>
-              <a:spcAft>
-                <a:spcPts val="300"/>
-              </a:spcAft>
-            </a:pPr>
-            <a:r>
-              <a:rPr sz="1100" b="0" i="0">
-                <a:solidFill>
-                  <a:srgbClr val="22252B"/>
-                </a:solidFill>
-                <a:latin typeface="Noto Sans CJK KR"/>
-              </a:rPr>
-              <a:t>현재 모델 LM_θ</a:t>
-            </a:r>
-          </a:p>
-          <a:p>
-            <a:pPr algn="ctr">
-              <a:lnSpc>
-                <a:spcPct val="118000"/>
-              </a:lnSpc>
-              <a:spcBef>
-                <a:spcPts val="0"/>
-              </a:spcBef>
-              <a:spcAft>
-                <a:spcPts val="300"/>
-              </a:spcAft>
-            </a:pPr>
-            <a:r>
-              <a:rPr sz="1100" b="0" i="0">
-                <a:solidFill>
-                  <a:srgbClr val="5A5F68"/>
-                </a:solidFill>
-                <a:latin typeface="Noto Sans CJK KR"/>
-              </a:rPr>
-              <a:t>샘플·'꿈' 생성</a:t>
-            </a:r>
-          </a:p>
-        </p:txBody>
-      </p:sp>
-      <p:cxnSp>
-        <p:nvCxnSpPr>
-          <p:cNvPr id="6" name="Connector 5"/>
-          <p:cNvCxnSpPr/>
-          <p:nvPr/>
-        </p:nvCxnSpPr>
-        <p:spPr>
-          <a:xfrm>
-            <a:off x="3017520" y="2011680"/>
-            <a:ext cx="868680" cy="0"/>
-          </a:xfrm>
-          <a:prstGeom prst="line">
-            <a:avLst/>
-          </a:prstGeom>
-          <a:ln w="22860">
-            <a:solidFill>
-              <a:srgbClr val="22252B"/>
-            </a:solidFill>
-            <a:tailEnd type="triangle" w="med" h="med"/>
-          </a:ln>
-        </p:spPr>
-        <p:style>
-          <a:lnRef idx="2">
-            <a:schemeClr val="accent1"/>
-          </a:lnRef>
-          <a:fillRef idx="0">
-            <a:schemeClr val="accent1"/>
-          </a:fillRef>
-          <a:effectRef idx="1">
-            <a:schemeClr val="accent1"/>
-          </a:effectRef>
-          <a:fontRef idx="minor">
-            <a:schemeClr val="tx1"/>
-          </a:fontRef>
-        </p:style>
-      </p:cxnSp>
-      <p:sp>
-        <p:nvSpPr>
-          <p:cNvPr id="7" name="Rounded Rectangle 6"/>
+              <a:t>lifecycle + inference 번역</a:t>
+            </a:r>
+          </a:p>
+          <a:p>
+            <a:pPr algn="l">
+              <a:lnSpc>
+                <a:spcPct val="118000"/>
+              </a:lnSpc>
+              <a:spcBef>
+                <a:spcPts val="0"/>
+              </a:spcBef>
+              <a:spcAft>
+                <a:spcPts val="200"/>
+              </a:spcAft>
+            </a:pPr>
+            <a:r>
+              <a:rPr sz="1000" b="0" i="0">
+                <a:solidFill>
+                  <a:srgbClr val="22252B"/>
+                </a:solidFill>
+                <a:latin typeface="Noto Sans CJK KR"/>
+              </a:rPr>
+              <a:t>sleep = 수동적 멈춤이 아니라 능동적 내부 처리(외부 입력 끊고, 고주파 모듈 기억을 느리고 안정적인 성분으로 굳힘).</a:t>
+            </a:r>
+          </a:p>
+          <a:p>
+            <a:pPr algn="l">
+              <a:lnSpc>
+                <a:spcPct val="118000"/>
+              </a:lnSpc>
+              <a:spcBef>
+                <a:spcPts val="0"/>
+              </a:spcBef>
+              <a:spcAft>
+                <a:spcPts val="200"/>
+              </a:spcAft>
+            </a:pPr>
+            <a:r>
+              <a:rPr sz="1000" b="1" i="0">
+                <a:solidFill>
+                  <a:srgbClr val="2A6F97"/>
+                </a:solidFill>
+                <a:latin typeface="Noto Sans CJK KR"/>
+              </a:rPr>
+              <a:t>= 서빙 fleet에 붙는 주기적 백그라운드 job. 낮=요청 처리하며 fast memory에 write, 밤=트래픽 끊고 compaction·GC. 단 대상이 로그/cache가 아니라 파라미터.</a:t>
+            </a:r>
+          </a:p>
+        </p:txBody>
+      </p:sp>
+      <p:sp>
+        <p:nvSpPr>
+          <p:cNvPr id="9" name="Rounded Rectangle 8"/>
           <p:cNvSpPr/>
           <p:nvPr/>
         </p:nvSpPr>
         <p:spPr>
           <a:xfrm>
-            <a:off x="3977639" y="1463040"/>
-            <a:ext cx="2468880" cy="1097280"/>
+            <a:off x="5852160" y="2834640"/>
+            <a:ext cx="5806440" cy="960120"/>
           </a:xfrm>
           <a:prstGeom prst="roundRect">
             <a:avLst/>
@@ -43259,7 +43420,7 @@
           <a:bodyPr rtlCol="0" anchor="ctr" wrap="square" lIns="76200" rIns="76200" tIns="38100" bIns="38100"/>
           <a:lstStyle/>
           <a:p>
-            <a:pPr algn="ctr">
+            <a:pPr algn="l">
               <a:lnSpc>
                 <a:spcPct val="118000"/>
               </a:lnSpc>
@@ -43271,117 +43432,59 @@
               </a:spcAft>
             </a:pPr>
             <a:r>
-              <a:rPr sz="1400" b="1" i="0">
+              <a:rPr sz="1250" b="1" i="0">
                 <a:solidFill>
                   <a:srgbClr val="C9A227"/>
                 </a:solidFill>
                 <a:latin typeface="Noto Sans CJK KR"/>
               </a:rPr>
-              <a:t>Student</a:t>
-            </a:r>
-          </a:p>
-          <a:p>
-            <a:pPr algn="ctr">
-              <a:lnSpc>
-                <a:spcPct val="118000"/>
-              </a:lnSpc>
-              <a:spcBef>
-                <a:spcPts val="0"/>
-              </a:spcBef>
-              <a:spcAft>
-                <a:spcPts val="300"/>
-              </a:spcAft>
-            </a:pPr>
-            <a:r>
-              <a:rPr sz="1100" b="0" i="0">
-                <a:solidFill>
-                  <a:srgbClr val="22252B"/>
-                </a:solidFill>
-                <a:latin typeface="Noto Sans CJK KR"/>
-              </a:rPr>
-              <a:t>새 low-rank expert</a:t>
-            </a:r>
-          </a:p>
-          <a:p>
-            <a:pPr algn="ctr">
-              <a:lnSpc>
-                <a:spcPct val="118000"/>
-              </a:lnSpc>
-              <a:spcBef>
-                <a:spcPts val="0"/>
-              </a:spcBef>
-              <a:spcAft>
-                <a:spcPts val="300"/>
-              </a:spcAft>
-            </a:pPr>
-            <a:r>
-              <a:rPr sz="1100" b="0" i="0">
-                <a:solidFill>
-                  <a:srgbClr val="5A5F68"/>
-                </a:solidFill>
-                <a:latin typeface="Noto Sans Mono CJK KR"/>
-              </a:rPr>
-              <a:t>{A: d×r, B: r×d}</a:t>
-            </a:r>
-          </a:p>
-        </p:txBody>
-      </p:sp>
-      <p:cxnSp>
-        <p:nvCxnSpPr>
-          <p:cNvPr id="8" name="Connector 7"/>
-          <p:cNvCxnSpPr/>
-          <p:nvPr/>
-        </p:nvCxnSpPr>
-        <p:spPr>
-          <a:xfrm>
-            <a:off x="6492240" y="2011680"/>
-            <a:ext cx="868680" cy="0"/>
-          </a:xfrm>
-          <a:prstGeom prst="line">
-            <a:avLst/>
-          </a:prstGeom>
-          <a:ln w="22860">
-            <a:solidFill>
-              <a:srgbClr val="22252B"/>
-            </a:solidFill>
-            <a:tailEnd type="triangle" w="med" h="med"/>
-          </a:ln>
-        </p:spPr>
-        <p:style>
-          <a:lnRef idx="2">
-            <a:schemeClr val="accent1"/>
-          </a:lnRef>
-          <a:fillRef idx="0">
-            <a:schemeClr val="accent1"/>
-          </a:fillRef>
-          <a:effectRef idx="1">
-            <a:schemeClr val="accent1"/>
-          </a:effectRef>
-          <a:fontRef idx="minor">
-            <a:schemeClr val="tx1"/>
-          </a:fontRef>
-        </p:style>
-      </p:cxnSp>
-      <p:sp>
-        <p:nvSpPr>
-          <p:cNvPr id="9" name="Rounded Rectangle 8"/>
+              <a:t>online-only의 3결함</a:t>
+            </a:r>
+          </a:p>
+          <a:p>
+            <a:pPr algn="l">
+              <a:lnSpc>
+                <a:spcPct val="118000"/>
+              </a:lnSpc>
+              <a:spcBef>
+                <a:spcPts val="0"/>
+              </a:spcBef>
+              <a:spcAft>
+                <a:spcPts val="200"/>
+              </a:spcAft>
+            </a:pPr>
+            <a:r>
+              <a:rPr sz="1000" b="0" i="0">
+                <a:solidFill>
+                  <a:srgbClr val="22252B"/>
+                </a:solidFill>
+                <a:latin typeface="Noto Sans CJK KR"/>
+              </a:rPr>
+              <a:t>① 추상화 수준 그대로(추가 압축 없이 옮겨 capacity 또 씀) ② 선택적·retrieval 의존(자주 부르는 것만 강화) ③ context에 갇힘(상위 통합 안 됨).</a:t>
+            </a:r>
+          </a:p>
+        </p:txBody>
+      </p:sp>
+      <p:sp>
+        <p:nvSpPr>
+          <p:cNvPr id="10" name="Rounded Rectangle 9"/>
           <p:cNvSpPr/>
           <p:nvPr/>
         </p:nvSpPr>
         <p:spPr>
           <a:xfrm>
-            <a:off x="7452360" y="1463040"/>
-            <a:ext cx="4206240" cy="1097280"/>
+            <a:off x="502920" y="4754880"/>
+            <a:ext cx="11183112" cy="868680"/>
           </a:xfrm>
           <a:prstGeom prst="roundRect">
             <a:avLst/>
           </a:prstGeom>
           <a:solidFill>
-            <a:srgbClr val="F6DDDD"/>
+            <a:srgbClr val="DBE7F3"/>
           </a:solidFill>
           <a:ln w="12700">
             <a:solidFill>
-              <a:srgbClr val="C1121F"/>
+              <a:srgbClr val="2A6F97"/>
             </a:solidFill>
           </a:ln>
           <a:effectLst/>
@@ -43404,7 +43507,7 @@
           <a:bodyPr rtlCol="0" anchor="ctr" wrap="square" lIns="76200" rIns="76200" tIns="38100" bIns="38100"/>
           <a:lstStyle/>
           <a:p>
-            <a:pPr algn="ctr">
+            <a:pPr algn="l">
               <a:lnSpc>
                 <a:spcPct val="118000"/>
               </a:lnSpc>
@@ -43416,134 +43519,25 @@
               </a:spcAft>
             </a:pPr>
             <a:r>
-              <a:rPr sz="1400" b="1" i="0">
-                <a:solidFill>
-                  <a:srgbClr val="C1121F"/>
-                </a:solidFill>
-                <a:latin typeface="Noto Sans CJK KR"/>
-              </a:rPr>
-              <a:t>학습 신호</a:t>
-            </a:r>
-          </a:p>
-          <a:p>
-            <a:pPr algn="ctr">
-              <a:lnSpc>
-                <a:spcPct val="118000"/>
-              </a:lnSpc>
-              <a:spcBef>
-                <a:spcPts val="0"/>
-              </a:spcBef>
-              <a:spcAft>
-                <a:spcPts val="300"/>
-              </a:spcAft>
-            </a:pPr>
-            <a:r>
-              <a:rPr sz="1100" b="0" i="0">
-                <a:solidFill>
-                  <a:srgbClr val="22252B"/>
-                </a:solidFill>
-                <a:latin typeface="Noto Sans CJK KR"/>
-              </a:rPr>
-              <a:t>GKD(on-policy rollout) + RL(LTI)</a:t>
-            </a:r>
-          </a:p>
-          <a:p>
-            <a:pPr algn="ctr">
-              <a:lnSpc>
-                <a:spcPct val="118000"/>
-              </a:lnSpc>
-              <a:spcBef>
-                <a:spcPts val="0"/>
-              </a:spcBef>
-              <a:spcAft>
-                <a:spcPts val="300"/>
-              </a:spcAft>
-            </a:pPr>
-            <a:r>
-              <a:rPr sz="1100" b="0" i="0">
-                <a:solidFill>
-                  <a:srgbClr val="5A5F68"/>
-                </a:solidFill>
-                <a:latin typeface="Noto Sans CJK KR"/>
-              </a:rPr>
-              <a:t>보상=Levenshtein·의미 유사도</a:t>
-            </a:r>
-          </a:p>
-        </p:txBody>
-      </p:sp>
-      <p:sp>
-        <p:nvSpPr>
-          <p:cNvPr id="10" name="Rounded Rectangle 9"/>
-          <p:cNvSpPr/>
-          <p:nvPr/>
-        </p:nvSpPr>
-        <p:spPr>
-          <a:xfrm>
-            <a:off x="502920" y="2880360"/>
-            <a:ext cx="11155680" cy="749808"/>
-          </a:xfrm>
-          <a:prstGeom prst="roundRect">
-            <a:avLst/>
-          </a:prstGeom>
-          <a:solidFill>
-            <a:srgbClr val="FFFFFF"/>
-          </a:solidFill>
-          <a:ln w="12700">
-            <a:solidFill>
-              <a:srgbClr val="8A8F98"/>
-            </a:solidFill>
-          </a:ln>
-          <a:effectLst/>
-        </p:spPr>
-        <p:style>
-          <a:lnRef idx="1">
-            <a:schemeClr val="accent1"/>
-          </a:lnRef>
-          <a:fillRef idx="3">
-            <a:schemeClr val="accent1"/>
-          </a:fillRef>
-          <a:effectRef idx="2">
-            <a:schemeClr val="accent1"/>
-          </a:effectRef>
-          <a:fontRef idx="minor">
-            <a:schemeClr val="lt1"/>
-          </a:fontRef>
-        </p:style>
-        <p:txBody>
-          <a:bodyPr rtlCol="0" anchor="ctr" wrap="square" lIns="76200" rIns="76200" tIns="38100" bIns="38100"/>
-          <a:lstStyle/>
-          <a:p>
-            <a:pPr algn="l">
-              <a:lnSpc>
-                <a:spcPct val="118000"/>
-              </a:lnSpc>
-              <a:spcBef>
-                <a:spcPts val="0"/>
-              </a:spcBef>
-              <a:spcAft>
-                <a:spcPts val="300"/>
-              </a:spcAft>
-            </a:pPr>
-            <a:r>
               <a:rPr sz="1250" b="1" i="0">
                 <a:solidFill>
-                  <a:srgbClr val="2A9D8F"/>
-                </a:solidFill>
-                <a:latin typeface="Noto Sans CJK KR"/>
-              </a:rPr>
-              <a:t>Knowledge Seeding (통합)  </a:t>
-            </a:r>
-          </a:p>
-          <a:p>
-            <a:pPr algn="l">
-              <a:lnSpc>
-                <a:spcPct val="118000"/>
-              </a:lnSpc>
-              <a:spcBef>
-                <a:spcPts val="0"/>
-              </a:spcBef>
-              <a:spcAft>
-                <a:spcPts val="300"/>
+                  <a:srgbClr val="2A6F97"/>
+                </a:solidFill>
+                <a:latin typeface="Noto Sans CJK KR"/>
+              </a:rPr>
+              <a:t>세 가지 핵심 주장</a:t>
+            </a:r>
+          </a:p>
+          <a:p>
+            <a:pPr algn="l">
+              <a:lnSpc>
+                <a:spcPct val="118000"/>
+              </a:lnSpc>
+              <a:spcBef>
+                <a:spcPts val="0"/>
+              </a:spcBef>
+              <a:spcAft>
+                <a:spcPts val="200"/>
               </a:spcAft>
             </a:pPr>
             <a:r>
@@ -43553,313 +43547,7 @@
                 </a:solidFill>
                 <a:latin typeface="Noto Sans CJK KR"/>
               </a:rPr>
-              <a:t>teacher가 만든 on-policy 데이터로 student를 GKD. 새 expert만 backward(나머지 freeze). router가 새 expert를 활성화.</a:t>
-            </a:r>
-          </a:p>
-        </p:txBody>
-      </p:sp>
-      <p:sp>
-        <p:nvSpPr>
-          <p:cNvPr id="11" name="Rounded Rectangle 10"/>
-          <p:cNvSpPr/>
-          <p:nvPr/>
-        </p:nvSpPr>
-        <p:spPr>
-          <a:xfrm>
-            <a:off x="502920" y="3703320"/>
-            <a:ext cx="11155680" cy="749808"/>
-          </a:xfrm>
-          <a:prstGeom prst="roundRect">
-            <a:avLst/>
-          </a:prstGeom>
-          <a:solidFill>
-            <a:srgbClr val="FFFFFF"/>
-          </a:solidFill>
-          <a:ln w="12700">
-            <a:solidFill>
-              <a:srgbClr val="8A8F98"/>
-            </a:solidFill>
-          </a:ln>
-          <a:effectLst/>
-        </p:spPr>
-        <p:style>
-          <a:lnRef idx="1">
-            <a:schemeClr val="accent1"/>
-          </a:lnRef>
-          <a:fillRef idx="3">
-            <a:schemeClr val="accent1"/>
-          </a:fillRef>
-          <a:effectRef idx="2">
-            <a:schemeClr val="accent1"/>
-          </a:effectRef>
-          <a:fontRef idx="minor">
-            <a:schemeClr val="lt1"/>
-          </a:fontRef>
-        </p:style>
-        <p:txBody>
-          <a:bodyPr rtlCol="0" anchor="ctr" wrap="square" lIns="76200" rIns="76200" tIns="38100" bIns="38100"/>
-          <a:lstStyle/>
-          <a:p>
-            <a:pPr algn="l">
-              <a:lnSpc>
-                <a:spcPct val="118000"/>
-              </a:lnSpc>
-              <a:spcBef>
-                <a:spcPts val="0"/>
-              </a:spcBef>
-              <a:spcAft>
-                <a:spcPts val="300"/>
-              </a:spcAft>
-            </a:pPr>
-            <a:r>
-              <a:rPr sz="1250" b="1" i="0">
-                <a:solidFill>
-                  <a:srgbClr val="2A9D8F"/>
-                </a:solidFill>
-                <a:latin typeface="Noto Sans CJK KR"/>
-              </a:rPr>
-              <a:t>LTI — RL 파트  </a:t>
-            </a:r>
-          </a:p>
-          <a:p>
-            <a:pPr algn="l">
-              <a:lnSpc>
-                <a:spcPct val="118000"/>
-              </a:lnSpc>
-              <a:spcBef>
-                <a:spcPts val="0"/>
-              </a:spcBef>
-              <a:spcAft>
-                <a:spcPts val="300"/>
-              </a:spcAft>
-            </a:pPr>
-            <a:r>
-              <a:rPr sz="1150" b="0" i="0">
-                <a:solidFill>
-                  <a:srgbClr val="22252B"/>
-                </a:solidFill>
-                <a:latin typeface="Noto Sans CJK KR"/>
-              </a:rPr>
-              <a:t>정답 시퀀스와의 Levenshtein/의미 보상으로 policy-gradient. 미분 불가한 목표를 RL로.</a:t>
-            </a:r>
-          </a:p>
-        </p:txBody>
-      </p:sp>
-      <p:sp>
-        <p:nvSpPr>
-          <p:cNvPr id="12" name="Rounded Rectangle 11"/>
-          <p:cNvSpPr/>
-          <p:nvPr/>
-        </p:nvSpPr>
-        <p:spPr>
-          <a:xfrm>
-            <a:off x="502920" y="4526280"/>
-            <a:ext cx="11155680" cy="749808"/>
-          </a:xfrm>
-          <a:prstGeom prst="roundRect">
-            <a:avLst/>
-          </a:prstGeom>
-          <a:solidFill>
-            <a:srgbClr val="FFFFFF"/>
-          </a:solidFill>
-          <a:ln w="12700">
-            <a:solidFill>
-              <a:srgbClr val="8A8F98"/>
-            </a:solidFill>
-          </a:ln>
-          <a:effectLst/>
-        </p:spPr>
-        <p:style>
-          <a:lnRef idx="1">
-            <a:schemeClr val="accent1"/>
-          </a:lnRef>
-          <a:fillRef idx="3">
-            <a:schemeClr val="accent1"/>
-          </a:fillRef>
-          <a:effectRef idx="2">
-            <a:schemeClr val="accent1"/>
-          </a:effectRef>
-          <a:fontRef idx="minor">
-            <a:schemeClr val="lt1"/>
-          </a:fontRef>
-        </p:style>
-        <p:txBody>
-          <a:bodyPr rtlCol="0" anchor="ctr" wrap="square" lIns="76200" rIns="76200" tIns="38100" bIns="38100"/>
-          <a:lstStyle/>
-          <a:p>
-            <a:pPr algn="l">
-              <a:lnSpc>
-                <a:spcPct val="118000"/>
-              </a:lnSpc>
-              <a:spcBef>
-                <a:spcPts val="0"/>
-              </a:spcBef>
-              <a:spcAft>
-                <a:spcPts val="300"/>
-              </a:spcAft>
-            </a:pPr>
-            <a:r>
-              <a:rPr sz="1250" b="1" i="0">
-                <a:solidFill>
-                  <a:srgbClr val="2A9D8F"/>
-                </a:solidFill>
-                <a:latin typeface="Noto Sans CJK KR"/>
-              </a:rPr>
-              <a:t>Dreaming (자기개선)  </a:t>
-            </a:r>
-          </a:p>
-          <a:p>
-            <a:pPr algn="l">
-              <a:lnSpc>
-                <a:spcPct val="118000"/>
-              </a:lnSpc>
-              <a:spcBef>
-                <a:spcPts val="0"/>
-              </a:spcBef>
-              <a:spcAft>
-                <a:spcPts val="300"/>
-              </a:spcAft>
-            </a:pPr>
-            <a:r>
-              <a:rPr sz="1150" b="0" i="0">
-                <a:solidFill>
-                  <a:srgbClr val="22252B"/>
-                </a:solidFill>
-                <a:latin typeface="Noto Sans CJK KR"/>
-              </a:rPr>
-              <a:t>teacher가 자기 생성한 '꿈'으로 SEAL식 편집·강화 — 외부 라벨 없이 능력을 끌어올림.</a:t>
-            </a:r>
-          </a:p>
-        </p:txBody>
-      </p:sp>
-      <p:sp>
-        <p:nvSpPr>
-          <p:cNvPr id="13" name="Rounded Rectangle 12"/>
-          <p:cNvSpPr/>
-          <p:nvPr/>
-        </p:nvSpPr>
-        <p:spPr>
-          <a:xfrm>
-            <a:off x="502920" y="5349240"/>
-            <a:ext cx="11155680" cy="749808"/>
-          </a:xfrm>
-          <a:prstGeom prst="roundRect">
-            <a:avLst/>
-          </a:prstGeom>
-          <a:solidFill>
-            <a:srgbClr val="FFFFFF"/>
-          </a:solidFill>
-          <a:ln w="12700">
-            <a:solidFill>
-              <a:srgbClr val="8A8F98"/>
-            </a:solidFill>
-          </a:ln>
-          <a:effectLst/>
-        </p:spPr>
-        <p:style>
-          <a:lnRef idx="1">
-            <a:schemeClr val="accent1"/>
-          </a:lnRef>
-          <a:fillRef idx="3">
-            <a:schemeClr val="accent1"/>
-          </a:fillRef>
-          <a:effectRef idx="2">
-            <a:schemeClr val="accent1"/>
-          </a:effectRef>
-          <a:fontRef idx="minor">
-            <a:schemeClr val="lt1"/>
-          </a:fontRef>
-        </p:style>
-        <p:txBody>
-          <a:bodyPr rtlCol="0" anchor="ctr" wrap="square" lIns="76200" rIns="76200" tIns="38100" bIns="38100"/>
-          <a:lstStyle/>
-          <a:p>
-            <a:pPr algn="l">
-              <a:lnSpc>
-                <a:spcPct val="118000"/>
-              </a:lnSpc>
-              <a:spcBef>
-                <a:spcPts val="0"/>
-              </a:spcBef>
-              <a:spcAft>
-                <a:spcPts val="300"/>
-              </a:spcAft>
-            </a:pPr>
-            <a:r>
-              <a:rPr sz="1250" b="1" i="0">
-                <a:solidFill>
-                  <a:srgbClr val="2A9D8F"/>
-                </a:solidFill>
-                <a:latin typeface="Noto Sans CJK KR"/>
-              </a:rPr>
-              <a:t>reset = (de)activation  </a:t>
-            </a:r>
-          </a:p>
-          <a:p>
-            <a:pPr algn="l">
-              <a:lnSpc>
-                <a:spcPct val="118000"/>
-              </a:lnSpc>
-              <a:spcBef>
-                <a:spcPts val="0"/>
-              </a:spcBef>
-              <a:spcAft>
-                <a:spcPts val="300"/>
-              </a:spcAft>
-            </a:pPr>
-            <a:r>
-              <a:rPr sz="1150" b="0" i="0">
-                <a:solidFill>
-                  <a:srgbClr val="22252B"/>
-                </a:solidFill>
-                <a:latin typeface="Noto Sans CJK KR"/>
-              </a:rPr>
-              <a:t>새 주기 시작 시 빠른 블록의 이전 expert들을 비활성화(pruning)해 간섭을 막는다.</a:t>
-            </a:r>
-          </a:p>
-        </p:txBody>
-      </p:sp>
-      <p:sp>
-        <p:nvSpPr>
-          <p:cNvPr id="14" name="TextBox 13"/>
-          <p:cNvSpPr txBox="1"/>
-          <p:nvPr/>
-        </p:nvSpPr>
-        <p:spPr>
-          <a:xfrm>
-            <a:off x="502920" y="6263640"/>
-            <a:ext cx="11155680" cy="274320"/>
-          </a:xfrm>
-          <a:prstGeom prst="rect">
-            <a:avLst/>
-          </a:prstGeom>
-          <a:noFill/>
-        </p:spPr>
-        <p:txBody>
-          <a:bodyPr wrap="square" anchor="t" lIns="38100" rIns="38100" tIns="25400" bIns="25400">
-            <a:spAutoFit/>
-          </a:bodyPr>
-          <a:lstStyle/>
-          <a:p>
-            <a:pPr algn="l">
-              <a:lnSpc>
-                <a:spcPct val="120000"/>
-              </a:lnSpc>
-              <a:spcBef>
-                <a:spcPts val="0"/>
-              </a:spcBef>
-              <a:spcAft>
-                <a:spcPts val="0"/>
-              </a:spcAft>
-            </a:pPr>
-            <a:r>
-              <a:rPr sz="1150" b="0" i="1">
-                <a:solidFill>
-                  <a:srgbClr val="5A5F68"/>
-                </a:solidFill>
-                <a:latin typeface="Noto Sans CJK KR"/>
-              </a:rPr>
-              <a:t>핵심: 학습 데이터가 전부 모델 자신에게서 나온다(self-generated) — 외부 코퍼스 추가 없이 지속 학습.</a:t>
+              <a:t>① continual learner엔 train time도 test time도 없다('test time'이란 단어의 마지막 잔재를 지움). ② catastrophic forgetting은 근본적으로 capacity 문제 → '덮어쓰지 말고 키워라'. ③ sleep은 2단계: Memory Consolidation(NREM) + Dreaming(REM).</a:t>
             </a:r>
           </a:p>
         </p:txBody>
@@ -43987,7 +43675,7 @@
                 </a:solidFill>
                 <a:latin typeface="Noto Sans CJK KR"/>
               </a:rPr>
-              <a:t>B6 · Sleep — 증명</a:t>
+              <a:t>B6 · Sleep — wake 기반: CMS 갱신 스케줄</a:t>
             </a:r>
           </a:p>
         </p:txBody>
@@ -44032,7 +43720,7 @@
                 </a:solidFill>
                 <a:latin typeface="Noto Sans CJK KR"/>
               </a:rPr>
-              <a:t>지속 학습에서 망각을 줄이고 성능을 유지한다</a:t>
+              <a:t>sleep은 학습되지 않고 chunk 경계에 고정된다</a:t>
             </a:r>
           </a:p>
         </p:txBody>
@@ -44045,8 +43733,8 @@
         </p:nvSpPr>
         <p:spPr>
           <a:xfrm>
-            <a:off x="466344" y="2134214"/>
-            <a:ext cx="5605272" cy="1309411"/>
+            <a:off x="466344" y="1929057"/>
+            <a:ext cx="5285232" cy="1674005"/>
           </a:xfrm>
           <a:prstGeom prst="rect">
             <a:avLst/>
@@ -44083,7 +43771,7 @@
       </p:sp>
       <p:pic>
         <p:nvPicPr>
-          <p:cNvPr id="6" name="Picture 5" descr="fig3.png"/>
+          <p:cNvPr id="6" name="Picture 5" descr="fig7.png"/>
           <p:cNvPicPr>
             <a:picLocks noChangeAspect="1"/>
           </p:cNvPicPr>
@@ -44097,8 +43785,8 @@
         </p:blipFill>
         <p:spPr>
           <a:xfrm>
-            <a:off x="502920" y="2170790"/>
-            <a:ext cx="5532120" cy="1236259"/>
+            <a:off x="502920" y="1965633"/>
+            <a:ext cx="5212080" cy="1600853"/>
           </a:xfrm>
           <a:prstGeom prst="rect">
             <a:avLst/>
@@ -44113,8 +43801,8 @@
         </p:nvSpPr>
         <p:spPr>
           <a:xfrm>
-            <a:off x="502920" y="4242816"/>
-            <a:ext cx="5532120" cy="420624"/>
+            <a:off x="502920" y="4197096"/>
+            <a:ext cx="5212080" cy="420624"/>
           </a:xfrm>
           <a:prstGeom prst="rect">
             <a:avLst/>
@@ -44145,7 +43833,7 @@
                 </a:solidFill>
                 <a:latin typeface="Noto Sans CJK KR"/>
               </a:rPr>
-              <a:t>class-incremental(CLINC 등): sleep 통합이 이전 클래스 망각을 완화</a:t>
+              <a:t>Figure 7 — High/Mid/Low FFN이 1k/5k/10k 토큰 주기로 배열된 CMS 사슬</a:t>
             </a:r>
           </a:p>
           <a:p>
@@ -44167,29 +43855,31 @@
                 </a:solidFill>
                 <a:latin typeface="Noto Sans CJK KR"/>
               </a:rPr>
-              <a:t>출처: 2606.03979 Fig.3</a:t>
-            </a:r>
-          </a:p>
-        </p:txBody>
-      </p:sp>
-      <p:sp>
-        <p:nvSpPr>
-          <p:cNvPr id="8" name="Rectangle 7"/>
+              <a:t>출처: 2606.03979 Fig.7</a:t>
+            </a:r>
+          </a:p>
+        </p:txBody>
+      </p:sp>
+      <p:sp>
+        <p:nvSpPr>
+          <p:cNvPr id="8" name="Rounded Rectangle 7"/>
           <p:cNvSpPr/>
           <p:nvPr/>
         </p:nvSpPr>
         <p:spPr>
           <a:xfrm>
-            <a:off x="6712324" y="1335024"/>
-            <a:ext cx="4497590" cy="2907792"/>
-          </a:xfrm>
-          <a:prstGeom prst="rect">
-            <a:avLst/>
-          </a:prstGeom>
-          <a:noFill/>
-          <a:ln w="9525">
+            <a:off x="5852160" y="1371600"/>
+            <a:ext cx="5806440" cy="1371600"/>
+          </a:xfrm>
+          <a:prstGeom prst="roundRect">
+            <a:avLst/>
+          </a:prstGeom>
+          <a:solidFill>
+            <a:srgbClr val="DAF0ED"/>
+          </a:solidFill>
+          <a:ln w="12700">
             <a:solidFill>
-              <a:srgbClr val="8A8F98"/>
+              <a:srgbClr val="2A9D8F"/>
             </a:solidFill>
           </a:ln>
           <a:effectLst/>
@@ -44209,68 +43899,40 @@
           </a:fontRef>
         </p:style>
         <p:txBody>
-          <a:bodyPr rtlCol="0" anchor="ctr"/>
-          <a:lstStyle/>
-          <a:p>
-            <a:pPr algn="ctr"/>
-          </a:p>
-        </p:txBody>
-      </p:sp>
-      <p:pic>
-        <p:nvPicPr>
-          <p:cNvPr id="9" name="Picture 8" descr="fig6.png"/>
-          <p:cNvPicPr>
-            <a:picLocks noChangeAspect="1"/>
-          </p:cNvPicPr>
-          <p:nvPr/>
-        </p:nvPicPr>
-        <p:blipFill>
-          <a:blip r:embed="rId3"/>
-          <a:stretch>
-            <a:fillRect/>
-          </a:stretch>
-        </p:blipFill>
-        <p:spPr>
-          <a:xfrm>
-            <a:off x="6748900" y="1371600"/>
-            <a:ext cx="4424438" cy="2834640"/>
-          </a:xfrm>
-          <a:prstGeom prst="rect">
-            <a:avLst/>
-          </a:prstGeom>
-        </p:spPr>
-      </p:pic>
-      <p:sp>
-        <p:nvSpPr>
-          <p:cNvPr id="10" name="TextBox 9"/>
-          <p:cNvSpPr txBox="1"/>
-          <p:nvPr/>
-        </p:nvSpPr>
-        <p:spPr>
-          <a:xfrm>
-            <a:off x="6263640" y="4242816"/>
-            <a:ext cx="5394960" cy="420624"/>
-          </a:xfrm>
-          <a:prstGeom prst="rect">
-            <a:avLst/>
-          </a:prstGeom>
-          <a:noFill/>
-        </p:spPr>
-        <p:txBody>
-          <a:bodyPr wrap="square" anchor="t" lIns="38100" rIns="38100" tIns="25400" bIns="25400">
-            <a:spAutoFit/>
-          </a:bodyPr>
-          <a:lstStyle/>
-          <a:p>
-            <a:pPr algn="ctr">
-              <a:lnSpc>
-                <a:spcPct val="120000"/>
-              </a:lnSpc>
-              <a:spcBef>
-                <a:spcPts val="0"/>
-              </a:spcBef>
-              <a:spcAft>
-                <a:spcPts val="100"/>
+          <a:bodyPr rtlCol="0" anchor="ctr" wrap="square" lIns="76200" rIns="76200" tIns="38100" bIns="38100"/>
+          <a:lstStyle/>
+          <a:p>
+            <a:pPr algn="l">
+              <a:lnSpc>
+                <a:spcPct val="118000"/>
+              </a:lnSpc>
+              <a:spcBef>
+                <a:spcPts val="0"/>
+              </a:spcBef>
+              <a:spcAft>
+                <a:spcPts val="300"/>
+              </a:spcAft>
+            </a:pPr>
+            <a:r>
+              <a:rPr sz="1250" b="1" i="0">
+                <a:solidFill>
+                  <a:srgbClr val="2A9D8F"/>
+                </a:solidFill>
+                <a:latin typeface="Noto Sans CJK KR"/>
+              </a:rPr>
+              <a:t>구조 (NL의 CMS를 그대로 수입)</a:t>
+            </a:r>
+          </a:p>
+          <a:p>
+            <a:pPr algn="l">
+              <a:lnSpc>
+                <a:spcPct val="118000"/>
+              </a:lnSpc>
+              <a:spcBef>
+                <a:spcPts val="0"/>
+              </a:spcBef>
+              <a:spcAft>
+                <a:spcPts val="200"/>
               </a:spcAft>
             </a:pPr>
             <a:r>
@@ -44280,53 +43942,53 @@
                 </a:solidFill>
                 <a:latin typeface="Noto Sans CJK KR"/>
               </a:rPr>
-              <a:t>BABILong: 오프라인 통합 후에도 장문 추론 능력 유지·향상</a:t>
-            </a:r>
-          </a:p>
-          <a:p>
-            <a:pPr algn="ctr">
-              <a:lnSpc>
-                <a:spcPct val="120000"/>
-              </a:lnSpc>
-              <a:spcBef>
-                <a:spcPts val="0"/>
-              </a:spcBef>
-              <a:spcAft>
-                <a:spcPts val="100"/>
-              </a:spcAft>
-            </a:pPr>
-            <a:r>
-              <a:rPr sz="850" b="0" i="1">
-                <a:solidFill>
-                  <a:srgbClr val="5A5F68"/>
-                </a:solidFill>
-                <a:latin typeface="Noto Sans CJK KR"/>
-              </a:rPr>
-              <a:t>출처: 2606.03979 Fig.6</a:t>
-            </a:r>
-          </a:p>
-        </p:txBody>
-      </p:sp>
-      <p:sp>
-        <p:nvSpPr>
-          <p:cNvPr id="11" name="Rounded Rectangle 10"/>
+              <a:t>sequence-mixing layer(attention/Titans) + 여러 주기의 MLP 블록 사슬.</a:t>
+            </a:r>
+          </a:p>
+          <a:p>
+            <a:pPr algn="l">
+              <a:lnSpc>
+                <a:spcPct val="118000"/>
+              </a:lnSpc>
+              <a:spcBef>
+                <a:spcPts val="0"/>
+              </a:spcBef>
+              <a:spcAft>
+                <a:spcPts val="200"/>
+              </a:spcAft>
+            </a:pPr>
+            <a:r>
+              <a:rPr sz="1050" b="0" i="0">
+                <a:solidFill>
+                  <a:srgbClr val="22252B"/>
+                </a:solidFill>
+                <a:latin typeface="Noto Sans CJK KR"/>
+              </a:rPr>
+              <a:t>각 블록은 토큰마다 error 기여분을 누적하고, 자기 chunk 경계에서만 그 누적을 파라미터에 한 번 적용.</a:t>
+            </a:r>
+          </a:p>
+        </p:txBody>
+      </p:sp>
+      <p:sp>
+        <p:nvSpPr>
+          <p:cNvPr id="9" name="Rounded Rectangle 8"/>
           <p:cNvSpPr/>
           <p:nvPr/>
         </p:nvSpPr>
         <p:spPr>
           <a:xfrm>
-            <a:off x="502920" y="4800600"/>
-            <a:ext cx="11155680" cy="868680"/>
+            <a:off x="5852160" y="2834640"/>
+            <a:ext cx="5806440" cy="960120"/>
           </a:xfrm>
           <a:prstGeom prst="roundRect">
             <a:avLst/>
           </a:prstGeom>
           <a:solidFill>
-            <a:srgbClr val="ECEEF1"/>
+            <a:srgbClr val="DBE7F3"/>
           </a:solidFill>
           <a:ln w="12700">
             <a:solidFill>
-              <a:srgbClr val="8A8F98"/>
+              <a:srgbClr val="2A6F97"/>
             </a:solidFill>
           </a:ln>
           <a:effectLst/>
@@ -44357,39 +44019,126 @@
                 <a:spcPts val="0"/>
               </a:spcBef>
               <a:spcAft>
+                <a:spcPts val="300"/>
+              </a:spcAft>
+            </a:pPr>
+            <a:r>
+              <a:rPr sz="1250" b="1" i="0">
+                <a:solidFill>
+                  <a:srgbClr val="2A6F97"/>
+                </a:solidFill>
+                <a:latin typeface="Noto Sans CJK KR"/>
+              </a:rPr>
+              <a:t>sleep 발화 시점</a:t>
+            </a:r>
+          </a:p>
+          <a:p>
+            <a:pPr algn="l">
+              <a:lnSpc>
+                <a:spcPct val="118000"/>
+              </a:lnSpc>
+              <a:spcBef>
+                <a:spcPts val="0"/>
+              </a:spcBef>
+              <a:spcAft>
                 <a:spcPts val="200"/>
               </a:spcAft>
             </a:pPr>
             <a:r>
+              <a:rPr sz="1050" b="0" i="0">
+                <a:solidFill>
+                  <a:srgbClr val="22252B"/>
+                </a:solidFill>
+                <a:latin typeface="Noto Sans CJK KR"/>
+              </a:rPr>
+              <a:t>어떤 블록이 자기 갱신 경계에 도달하면, 갱신하기 직전에 그 블록의 지식을 '한 단계 느린 블록'으로 먼저 옮긴다.</a:t>
+            </a:r>
+          </a:p>
+        </p:txBody>
+      </p:sp>
+      <p:sp>
+        <p:nvSpPr>
+          <p:cNvPr id="10" name="Rounded Rectangle 9"/>
+          <p:cNvSpPr/>
+          <p:nvPr/>
+        </p:nvSpPr>
+        <p:spPr>
+          <a:xfrm>
+            <a:off x="502920" y="4800600"/>
+            <a:ext cx="11183112" cy="868680"/>
+          </a:xfrm>
+          <a:prstGeom prst="roundRect">
+            <a:avLst/>
+          </a:prstGeom>
+          <a:solidFill>
+            <a:srgbClr val="F6DDDD"/>
+          </a:solidFill>
+          <a:ln w="12700">
+            <a:solidFill>
+              <a:srgbClr val="C1121F"/>
+            </a:solidFill>
+          </a:ln>
+          <a:effectLst/>
+        </p:spPr>
+        <p:style>
+          <a:lnRef idx="1">
+            <a:schemeClr val="accent1"/>
+          </a:lnRef>
+          <a:fillRef idx="3">
+            <a:schemeClr val="accent1"/>
+          </a:fillRef>
+          <a:effectRef idx="2">
+            <a:schemeClr val="accent1"/>
+          </a:effectRef>
+          <a:fontRef idx="minor">
+            <a:schemeClr val="lt1"/>
+          </a:fontRef>
+        </p:style>
+        <p:txBody>
+          <a:bodyPr rtlCol="0" anchor="ctr" wrap="square" lIns="76200" rIns="76200" tIns="38100" bIns="38100"/>
+          <a:lstStyle/>
+          <a:p>
+            <a:pPr algn="l">
+              <a:lnSpc>
+                <a:spcPct val="118000"/>
+              </a:lnSpc>
+              <a:spcBef>
+                <a:spcPts val="0"/>
+              </a:spcBef>
+              <a:spcAft>
+                <a:spcPts val="300"/>
+              </a:spcAft>
+            </a:pPr>
+            <a:r>
               <a:rPr sz="1250" b="1" i="0">
                 <a:solidFill>
-                  <a:srgbClr val="22252B"/>
-                </a:solidFill>
-                <a:latin typeface="Noto Sans CJK KR"/>
-              </a:rPr>
-              <a:t>읽는 법 · 6편의 도착점</a:t>
-            </a:r>
-          </a:p>
-          <a:p>
-            <a:pPr algn="l">
-              <a:lnSpc>
-                <a:spcPct val="118000"/>
-              </a:lnSpc>
-              <a:spcBef>
-                <a:spcPts val="0"/>
-              </a:spcBef>
-              <a:spcAft>
-                <a:spcPts val="300"/>
-              </a:spcAft>
-            </a:pPr>
-            <a:r>
-              <a:rPr sz="1200" b="0" i="0">
-                <a:solidFill>
-                  <a:srgbClr val="22252B"/>
-                </a:solidFill>
-                <a:latin typeface="Noto Sans CJK KR"/>
-              </a:rPr>
-              <a:t>Titans가 연 'test-time 학습'은 → Sleep에서 'wake=빠른 학습 / sleep=느린 통합'의 완결된 생애주기가 된다. 고정 용량의 한계를 파라미터 성장으로 넘은 것이 이 논문의 마지막 퍼즐.</a:t>
+                  <a:srgbClr val="C1121F"/>
+                </a:solidFill>
+                <a:latin typeface="Noto Sans CJK KR"/>
+              </a:rPr>
+              <a:t>왜 여기가 catastrophic forgetting이 터질 자리인가</a:t>
+            </a:r>
+          </a:p>
+          <a:p>
+            <a:pPr algn="l">
+              <a:lnSpc>
+                <a:spcPct val="118000"/>
+              </a:lnSpc>
+              <a:spcBef>
+                <a:spcPts val="0"/>
+              </a:spcBef>
+              <a:spcAft>
+                <a:spcPts val="200"/>
+              </a:spcAft>
+            </a:pPr>
+            <a:r>
+              <a:rPr sz="1150" b="0" i="0">
+                <a:solidFill>
+                  <a:srgbClr val="22252B"/>
+                </a:solidFill>
+                <a:latin typeface="Noto Sans CJK KR"/>
+              </a:rPr>
+              <a:t>주기가 중첩 → 다대일(빠른 블록 10번 갱신 동안 느린 블록 1번). 같은 크기의 느린 메모리에 10번을 반복해 써 넣게 됨 → 바로 그 지점이 CF가 터질 자리 → 다음의 parameter expansion이 필요.</a:t>
             </a:r>
           </a:p>
         </p:txBody>
@@ -44421,13 +44170,390 @@
         <p:spPr>
           <a:xfrm>
             <a:off x="0" y="0"/>
-            <a:ext cx="12191695" cy="6858000"/>
+            <a:ext cx="12191695" cy="54864"/>
           </a:xfrm>
           <a:prstGeom prst="rect">
             <a:avLst/>
           </a:prstGeom>
           <a:solidFill>
-            <a:srgbClr val="C9A227"/>
+            <a:srgbClr val="2A9D8F"/>
+          </a:solidFill>
+          <a:ln w="12700">
+            <a:solidFill>
+              <a:srgbClr val="2A9D8F"/>
+            </a:solidFill>
+          </a:ln>
+          <a:effectLst/>
+        </p:spPr>
+        <p:style>
+          <a:lnRef idx="1">
+            <a:schemeClr val="accent1"/>
+          </a:lnRef>
+          <a:fillRef idx="3">
+            <a:schemeClr val="accent1"/>
+          </a:fillRef>
+          <a:effectRef idx="2">
+            <a:schemeClr val="accent1"/>
+          </a:effectRef>
+          <a:fontRef idx="minor">
+            <a:schemeClr val="lt1"/>
+          </a:fontRef>
+        </p:style>
+        <p:txBody>
+          <a:bodyPr rtlCol="0" anchor="ctr" wrap="square" lIns="76200" rIns="76200" tIns="38100" bIns="38100"/>
+          <a:lstStyle/>
+          <a:p>
+            <a:pPr algn="ctr">
+              <a:lnSpc>
+                <a:spcPct val="118000"/>
+              </a:lnSpc>
+              <a:spcBef>
+                <a:spcPts val="0"/>
+              </a:spcBef>
+              <a:spcAft>
+                <a:spcPts val="300"/>
+              </a:spcAft>
+            </a:pPr>
+            <a:r>
+              <a:rPr sz="1100" b="0" i="0">
+                <a:solidFill>
+                  <a:srgbClr val="22252B"/>
+                </a:solidFill>
+                <a:latin typeface="Noto Sans CJK KR"/>
+              </a:rPr>
+              <a:t/>
+            </a:r>
+          </a:p>
+        </p:txBody>
+      </p:sp>
+      <p:sp>
+        <p:nvSpPr>
+          <p:cNvPr id="3" name="TextBox 2"/>
+          <p:cNvSpPr txBox="1"/>
+          <p:nvPr/>
+        </p:nvSpPr>
+        <p:spPr>
+          <a:xfrm>
+            <a:off x="502920" y="146304"/>
+            <a:ext cx="11185855" cy="320040"/>
+          </a:xfrm>
+          <a:prstGeom prst="rect">
+            <a:avLst/>
+          </a:prstGeom>
+          <a:noFill/>
+        </p:spPr>
+        <p:txBody>
+          <a:bodyPr wrap="square" anchor="t" lIns="38100" rIns="38100" tIns="25400" bIns="25400">
+            <a:spAutoFit/>
+          </a:bodyPr>
+          <a:lstStyle/>
+          <a:p>
+            <a:pPr algn="l">
+              <a:lnSpc>
+                <a:spcPct val="120000"/>
+              </a:lnSpc>
+              <a:spcBef>
+                <a:spcPts val="0"/>
+              </a:spcBef>
+              <a:spcAft>
+                <a:spcPts val="0"/>
+              </a:spcAft>
+            </a:pPr>
+            <a:r>
+              <a:rPr sz="1350" b="1" i="0">
+                <a:solidFill>
+                  <a:srgbClr val="2A9D8F"/>
+                </a:solidFill>
+                <a:latin typeface="Noto Sans CJK KR"/>
+              </a:rPr>
+              <a:t>B6 · Sleep — Stage 1: Memory Consolidation</a:t>
+            </a:r>
+          </a:p>
+        </p:txBody>
+      </p:sp>
+      <p:sp>
+        <p:nvSpPr>
+          <p:cNvPr id="4" name="TextBox 3"/>
+          <p:cNvSpPr txBox="1"/>
+          <p:nvPr/>
+        </p:nvSpPr>
+        <p:spPr>
+          <a:xfrm>
+            <a:off x="502920" y="457200"/>
+            <a:ext cx="11185855" cy="566928"/>
+          </a:xfrm>
+          <a:prstGeom prst="rect">
+            <a:avLst/>
+          </a:prstGeom>
+          <a:noFill/>
+        </p:spPr>
+        <p:txBody>
+          <a:bodyPr wrap="square" anchor="t" lIns="38100" rIns="38100" tIns="25400" bIns="25400">
+            <a:spAutoFit/>
+          </a:bodyPr>
+          <a:lstStyle/>
+          <a:p>
+            <a:pPr algn="l">
+              <a:lnSpc>
+                <a:spcPct val="120000"/>
+              </a:lnSpc>
+              <a:spcBef>
+                <a:spcPts val="0"/>
+              </a:spcBef>
+              <a:spcAft>
+                <a:spcPts val="0"/>
+              </a:spcAft>
+            </a:pPr>
+            <a:r>
+              <a:rPr sz="2400" b="1" i="0">
+                <a:solidFill>
+                  <a:srgbClr val="22252B"/>
+                </a:solidFill>
+                <a:latin typeface="Noto Sans CJK KR"/>
+              </a:rPr>
+              <a:t>덮어쓰지 말고 키워라 + 지식을 '위로' 증류(upward)</a:t>
+            </a:r>
+          </a:p>
+        </p:txBody>
+      </p:sp>
+      <p:sp>
+        <p:nvSpPr>
+          <p:cNvPr id="5" name="Rectangle 4"/>
+          <p:cNvSpPr/>
+          <p:nvPr/>
+        </p:nvSpPr>
+        <p:spPr>
+          <a:xfrm>
+            <a:off x="466344" y="2041817"/>
+            <a:ext cx="5285232" cy="1402764"/>
+          </a:xfrm>
+          <a:prstGeom prst="rect">
+            <a:avLst/>
+          </a:prstGeom>
+          <a:noFill/>
+          <a:ln w="9525">
+            <a:solidFill>
+              <a:srgbClr val="8A8F98"/>
+            </a:solidFill>
+          </a:ln>
+          <a:effectLst/>
+        </p:spPr>
+        <p:style>
+          <a:lnRef idx="1">
+            <a:schemeClr val="accent1"/>
+          </a:lnRef>
+          <a:fillRef idx="3">
+            <a:schemeClr val="accent1"/>
+          </a:fillRef>
+          <a:effectRef idx="2">
+            <a:schemeClr val="accent1"/>
+          </a:effectRef>
+          <a:fontRef idx="minor">
+            <a:schemeClr val="lt1"/>
+          </a:fontRef>
+        </p:style>
+        <p:txBody>
+          <a:bodyPr rtlCol="0" anchor="ctr"/>
+          <a:lstStyle/>
+          <a:p>
+            <a:pPr algn="ctr"/>
+          </a:p>
+        </p:txBody>
+      </p:sp>
+      <p:pic>
+        <p:nvPicPr>
+          <p:cNvPr id="6" name="Picture 5" descr="fig2.png"/>
+          <p:cNvPicPr>
+            <a:picLocks noChangeAspect="1"/>
+          </p:cNvPicPr>
+          <p:nvPr/>
+        </p:nvPicPr>
+        <p:blipFill>
+          <a:blip r:embed="rId2"/>
+          <a:stretch>
+            <a:fillRect/>
+          </a:stretch>
+        </p:blipFill>
+        <p:spPr>
+          <a:xfrm>
+            <a:off x="502920" y="2078393"/>
+            <a:ext cx="5212080" cy="1329612"/>
+          </a:xfrm>
+          <a:prstGeom prst="rect">
+            <a:avLst/>
+          </a:prstGeom>
+        </p:spPr>
+      </p:pic>
+      <p:sp>
+        <p:nvSpPr>
+          <p:cNvPr id="7" name="TextBox 6"/>
+          <p:cNvSpPr txBox="1"/>
+          <p:nvPr/>
+        </p:nvSpPr>
+        <p:spPr>
+          <a:xfrm>
+            <a:off x="502920" y="4151376"/>
+            <a:ext cx="5212080" cy="420624"/>
+          </a:xfrm>
+          <a:prstGeom prst="rect">
+            <a:avLst/>
+          </a:prstGeom>
+          <a:noFill/>
+        </p:spPr>
+        <p:txBody>
+          <a:bodyPr wrap="square" anchor="t" lIns="38100" rIns="38100" tIns="25400" bIns="25400">
+            <a:spAutoFit/>
+          </a:bodyPr>
+          <a:lstStyle/>
+          <a:p>
+            <a:pPr algn="ctr">
+              <a:lnSpc>
+                <a:spcPct val="120000"/>
+              </a:lnSpc>
+              <a:spcBef>
+                <a:spcPts val="0"/>
+              </a:spcBef>
+              <a:spcAft>
+                <a:spcPts val="100"/>
+              </a:spcAft>
+            </a:pPr>
+            <a:r>
+              <a:rPr sz="1050" b="0" i="0">
+                <a:solidFill>
+                  <a:srgbClr val="22252B"/>
+                </a:solidFill>
+                <a:latin typeface="Noto Sans CJK KR"/>
+              </a:rPr>
+              <a:t>Figure 2 — 파라미터를 늘리고(capacity), 사라질 지식을 새 공간에 증류</a:t>
+            </a:r>
+          </a:p>
+          <a:p>
+            <a:pPr algn="ctr">
+              <a:lnSpc>
+                <a:spcPct val="120000"/>
+              </a:lnSpc>
+              <a:spcBef>
+                <a:spcPts val="0"/>
+              </a:spcBef>
+              <a:spcAft>
+                <a:spcPts val="100"/>
+              </a:spcAft>
+            </a:pPr>
+            <a:r>
+              <a:rPr sz="850" b="0" i="1">
+                <a:solidFill>
+                  <a:srgbClr val="5A5F68"/>
+                </a:solidFill>
+                <a:latin typeface="Noto Sans CJK KR"/>
+              </a:rPr>
+              <a:t>출처: 2606.03979 Fig.2</a:t>
+            </a:r>
+          </a:p>
+        </p:txBody>
+      </p:sp>
+      <p:sp>
+        <p:nvSpPr>
+          <p:cNvPr id="8" name="Rounded Rectangle 7"/>
+          <p:cNvSpPr/>
+          <p:nvPr/>
+        </p:nvSpPr>
+        <p:spPr>
+          <a:xfrm>
+            <a:off x="5852160" y="1371600"/>
+            <a:ext cx="5806440" cy="1051560"/>
+          </a:xfrm>
+          <a:prstGeom prst="roundRect">
+            <a:avLst/>
+          </a:prstGeom>
+          <a:solidFill>
+            <a:srgbClr val="DAF0ED"/>
+          </a:solidFill>
+          <a:ln w="12700">
+            <a:solidFill>
+              <a:srgbClr val="2A9D8F"/>
+            </a:solidFill>
+          </a:ln>
+          <a:effectLst/>
+        </p:spPr>
+        <p:style>
+          <a:lnRef idx="1">
+            <a:schemeClr val="accent1"/>
+          </a:lnRef>
+          <a:fillRef idx="3">
+            <a:schemeClr val="accent1"/>
+          </a:fillRef>
+          <a:effectRef idx="2">
+            <a:schemeClr val="accent1"/>
+          </a:effectRef>
+          <a:fontRef idx="minor">
+            <a:schemeClr val="lt1"/>
+          </a:fontRef>
+        </p:style>
+        <p:txBody>
+          <a:bodyPr rtlCol="0" anchor="ctr" wrap="square" lIns="76200" rIns="76200" tIns="38100" bIns="38100"/>
+          <a:lstStyle/>
+          <a:p>
+            <a:pPr algn="l">
+              <a:lnSpc>
+                <a:spcPct val="118000"/>
+              </a:lnSpc>
+              <a:spcBef>
+                <a:spcPts val="0"/>
+              </a:spcBef>
+              <a:spcAft>
+                <a:spcPts val="300"/>
+              </a:spcAft>
+            </a:pPr>
+            <a:r>
+              <a:rPr sz="1250" b="1" i="0">
+                <a:solidFill>
+                  <a:srgbClr val="2A9D8F"/>
+                </a:solidFill>
+                <a:latin typeface="Noto Sans CJK KR"/>
+              </a:rPr>
+              <a:t>① parameter expansion</a:t>
+            </a:r>
+          </a:p>
+          <a:p>
+            <a:pPr algn="l">
+              <a:lnSpc>
+                <a:spcPct val="118000"/>
+              </a:lnSpc>
+              <a:spcBef>
+                <a:spcPts val="0"/>
+              </a:spcBef>
+              <a:spcAft>
+                <a:spcPts val="200"/>
+              </a:spcAft>
+            </a:pPr>
+            <a:r>
+              <a:rPr sz="1050" b="0" i="0">
+                <a:solidFill>
+                  <a:srgbClr val="22252B"/>
+                </a:solidFill>
+                <a:latin typeface="Noto Sans CJK KR"/>
+              </a:rPr>
+              <a:t>consolidation 받는 블록에 새 파라미터를 연다(새 MLP/Linear expert 하나). '자기 전에 파라미터를 키운다'.</a:t>
+            </a:r>
+          </a:p>
+        </p:txBody>
+      </p:sp>
+      <p:sp>
+        <p:nvSpPr>
+          <p:cNvPr id="9" name="Rounded Rectangle 8"/>
+          <p:cNvSpPr/>
+          <p:nvPr/>
+        </p:nvSpPr>
+        <p:spPr>
+          <a:xfrm>
+            <a:off x="5852160" y="2487168"/>
+            <a:ext cx="5806440" cy="1051560"/>
+          </a:xfrm>
+          <a:prstGeom prst="roundRect">
+            <a:avLst/>
+          </a:prstGeom>
+          <a:solidFill>
+            <a:srgbClr val="F6ECC7"/>
           </a:solidFill>
           <a:ln w="12700">
             <a:solidFill>
@@ -44454,7 +44580,7 @@
           <a:bodyPr rtlCol="0" anchor="ctr" wrap="square" lIns="76200" rIns="76200" tIns="38100" bIns="38100"/>
           <a:lstStyle/>
           <a:p>
-            <a:pPr algn="ctr">
+            <a:pPr algn="l">
               <a:lnSpc>
                 <a:spcPct val="118000"/>
               </a:lnSpc>
@@ -44466,103 +44592,209 @@
               </a:spcAft>
             </a:pPr>
             <a:r>
-              <a:rPr sz="1100" b="0" i="0">
-                <a:solidFill>
-                  <a:srgbClr val="22252B"/>
-                </a:solidFill>
-                <a:latin typeface="Noto Sans CJK KR"/>
-              </a:rPr>
-              <a:t/>
-            </a:r>
-          </a:p>
-        </p:txBody>
-      </p:sp>
-      <p:sp>
-        <p:nvSpPr>
-          <p:cNvPr id="3" name="TextBox 2"/>
-          <p:cNvSpPr txBox="1"/>
-          <p:nvPr/>
-        </p:nvSpPr>
-        <p:spPr>
-          <a:xfrm>
-            <a:off x="822960" y="2468880"/>
-            <a:ext cx="10545775" cy="914400"/>
-          </a:xfrm>
-          <a:prstGeom prst="rect">
-            <a:avLst/>
-          </a:prstGeom>
-          <a:noFill/>
-        </p:spPr>
-        <p:txBody>
-          <a:bodyPr wrap="square" anchor="t" lIns="38100" rIns="38100" tIns="25400" bIns="25400">
-            <a:spAutoFit/>
-          </a:bodyPr>
-          <a:lstStyle/>
-          <a:p>
-            <a:pPr algn="l">
-              <a:lnSpc>
-                <a:spcPct val="120000"/>
-              </a:lnSpc>
-              <a:spcBef>
-                <a:spcPts val="0"/>
-              </a:spcBef>
-              <a:spcAft>
-                <a:spcPts val="400"/>
-              </a:spcAft>
-            </a:pPr>
-            <a:r>
-              <a:rPr sz="2000" b="1" i="0">
-                <a:solidFill>
-                  <a:srgbClr val="FFFFFF"/>
-                </a:solidFill>
-                <a:latin typeface="Noto Sans CJK KR"/>
-              </a:rPr>
-              <a:t>PART C</a:t>
-            </a:r>
-          </a:p>
-        </p:txBody>
-      </p:sp>
-      <p:sp>
-        <p:nvSpPr>
-          <p:cNvPr id="4" name="TextBox 3"/>
-          <p:cNvSpPr txBox="1"/>
-          <p:nvPr/>
-        </p:nvSpPr>
-        <p:spPr>
-          <a:xfrm>
-            <a:off x="822960" y="3108960"/>
-            <a:ext cx="10545775" cy="1463040"/>
-          </a:xfrm>
-          <a:prstGeom prst="rect">
-            <a:avLst/>
-          </a:prstGeom>
-          <a:noFill/>
-        </p:spPr>
-        <p:txBody>
-          <a:bodyPr wrap="square" anchor="t" lIns="38100" rIns="38100" tIns="25400" bIns="25400">
-            <a:spAutoFit/>
-          </a:bodyPr>
-          <a:lstStyle/>
-          <a:p>
-            <a:pPr algn="l">
-              <a:lnSpc>
-                <a:spcPct val="120000"/>
-              </a:lnSpc>
-              <a:spcBef>
-                <a:spcPts val="0"/>
-              </a:spcBef>
-              <a:spcAft>
-                <a:spcPts val="400"/>
-              </a:spcAft>
-            </a:pPr>
-            <a:r>
-              <a:rPr sz="3400" b="1" i="0">
-                <a:solidFill>
-                  <a:srgbClr val="FFFFFF"/>
-                </a:solidFill>
-                <a:latin typeface="Noto Sans CJK KR"/>
-              </a:rPr>
-              <a:t>System modeling (우리 기여) — 이 배포는 서빙에서 얼마나 드나</a:t>
+              <a:rPr sz="1250" b="1" i="0">
+                <a:solidFill>
+                  <a:srgbClr val="C9A227"/>
+                </a:solidFill>
+                <a:latin typeface="Noto Sans CJK KR"/>
+              </a:rPr>
+              <a:t>② Knowledge Seeding</a:t>
+            </a:r>
+          </a:p>
+          <a:p>
+            <a:pPr algn="l">
+              <a:lnSpc>
+                <a:spcPct val="118000"/>
+              </a:lnSpc>
+              <a:spcBef>
+                <a:spcPts val="0"/>
+              </a:spcBef>
+              <a:spcAft>
+                <a:spcPts val="200"/>
+              </a:spcAft>
+            </a:pPr>
+            <a:r>
+              <a:rPr sz="1050" b="0" i="0">
+                <a:solidFill>
+                  <a:srgbClr val="22252B"/>
+                </a:solidFill>
+                <a:latin typeface="Noto Sans CJK KR"/>
+              </a:rPr>
+              <a:t>지식 추상을 고주파→저주파 메모리로 이전. GKD distillation(teacher 데이터 + student rollout) + Imitation Learning(RL).</a:t>
+            </a:r>
+          </a:p>
+        </p:txBody>
+      </p:sp>
+      <p:sp>
+        <p:nvSpPr>
+          <p:cNvPr id="10" name="Rounded Rectangle 9"/>
+          <p:cNvSpPr/>
+          <p:nvPr/>
+        </p:nvSpPr>
+        <p:spPr>
+          <a:xfrm>
+            <a:off x="5852160" y="3602736"/>
+            <a:ext cx="5806440" cy="1051560"/>
+          </a:xfrm>
+          <a:prstGeom prst="roundRect">
+            <a:avLst/>
+          </a:prstGeom>
+          <a:solidFill>
+            <a:srgbClr val="DBE7F3"/>
+          </a:solidFill>
+          <a:ln w="12700">
+            <a:solidFill>
+              <a:srgbClr val="2A6F97"/>
+            </a:solidFill>
+          </a:ln>
+          <a:effectLst/>
+        </p:spPr>
+        <p:style>
+          <a:lnRef idx="1">
+            <a:schemeClr val="accent1"/>
+          </a:lnRef>
+          <a:fillRef idx="3">
+            <a:schemeClr val="accent1"/>
+          </a:fillRef>
+          <a:effectRef idx="2">
+            <a:schemeClr val="accent1"/>
+          </a:effectRef>
+          <a:fontRef idx="minor">
+            <a:schemeClr val="lt1"/>
+          </a:fontRef>
+        </p:style>
+        <p:txBody>
+          <a:bodyPr rtlCol="0" anchor="ctr" wrap="square" lIns="76200" rIns="76200" tIns="38100" bIns="38100"/>
+          <a:lstStyle/>
+          <a:p>
+            <a:pPr algn="l">
+              <a:lnSpc>
+                <a:spcPct val="118000"/>
+              </a:lnSpc>
+              <a:spcBef>
+                <a:spcPts val="0"/>
+              </a:spcBef>
+              <a:spcAft>
+                <a:spcPts val="300"/>
+              </a:spcAft>
+            </a:pPr>
+            <a:r>
+              <a:rPr sz="1250" b="1" i="0">
+                <a:solidFill>
+                  <a:srgbClr val="2A6F97"/>
+                </a:solidFill>
+                <a:latin typeface="Noto Sans CJK KR"/>
+              </a:rPr>
+              <a:t>반전 — upward distillation</a:t>
+            </a:r>
+          </a:p>
+          <a:p>
+            <a:pPr algn="l">
+              <a:lnSpc>
+                <a:spcPct val="118000"/>
+              </a:lnSpc>
+              <a:spcBef>
+                <a:spcPts val="0"/>
+              </a:spcBef>
+              <a:spcAft>
+                <a:spcPts val="200"/>
+              </a:spcAft>
+            </a:pPr>
+            <a:r>
+              <a:rPr sz="1050" b="0" i="0">
+                <a:solidFill>
+                  <a:srgbClr val="22252B"/>
+                </a:solidFill>
+                <a:latin typeface="Noto Sans CJK KR"/>
+              </a:rPr>
+              <a:t>보통 distillation은 큰 teacher→작은 student로 내려보내는데, 여기선 방향이 반대(작은 것 → 큰 것). 그래서 upward distillation.</a:t>
+            </a:r>
+          </a:p>
+        </p:txBody>
+      </p:sp>
+      <p:sp>
+        <p:nvSpPr>
+          <p:cNvPr id="11" name="Rounded Rectangle 10"/>
+          <p:cNvSpPr/>
+          <p:nvPr/>
+        </p:nvSpPr>
+        <p:spPr>
+          <a:xfrm>
+            <a:off x="502920" y="4754880"/>
+            <a:ext cx="11183112" cy="868680"/>
+          </a:xfrm>
+          <a:prstGeom prst="roundRect">
+            <a:avLst/>
+          </a:prstGeom>
+          <a:solidFill>
+            <a:srgbClr val="ECEEF1"/>
+          </a:solidFill>
+          <a:ln w="12700">
+            <a:solidFill>
+              <a:srgbClr val="8A8F98"/>
+            </a:solidFill>
+          </a:ln>
+          <a:effectLst/>
+        </p:spPr>
+        <p:style>
+          <a:lnRef idx="1">
+            <a:schemeClr val="accent1"/>
+          </a:lnRef>
+          <a:fillRef idx="3">
+            <a:schemeClr val="accent1"/>
+          </a:fillRef>
+          <a:effectRef idx="2">
+            <a:schemeClr val="accent1"/>
+          </a:effectRef>
+          <a:fontRef idx="minor">
+            <a:schemeClr val="lt1"/>
+          </a:fontRef>
+        </p:style>
+        <p:txBody>
+          <a:bodyPr rtlCol="0" anchor="ctr" wrap="square" lIns="76200" rIns="76200" tIns="38100" bIns="38100"/>
+          <a:lstStyle/>
+          <a:p>
+            <a:pPr algn="l">
+              <a:lnSpc>
+                <a:spcPct val="118000"/>
+              </a:lnSpc>
+              <a:spcBef>
+                <a:spcPts val="0"/>
+              </a:spcBef>
+              <a:spcAft>
+                <a:spcPts val="300"/>
+              </a:spcAft>
+            </a:pPr>
+            <a:r>
+              <a:rPr sz="1250" b="1" i="0">
+                <a:solidFill>
+                  <a:srgbClr val="8A8F98"/>
+                </a:solidFill>
+                <a:latin typeface="Noto Sans CJK KR"/>
+              </a:rPr>
+              <a:t>B5(HOPE)와의 연결 — 빠진 조각을 채운다</a:t>
+            </a:r>
+          </a:p>
+          <a:p>
+            <a:pPr algn="l">
+              <a:lnSpc>
+                <a:spcPct val="118000"/>
+              </a:lnSpc>
+              <a:spcBef>
+                <a:spcPts val="0"/>
+              </a:spcBef>
+              <a:spcAft>
+                <a:spcPts val="200"/>
+              </a:spcAft>
+            </a:pPr>
+            <a:r>
+              <a:rPr sz="1150" b="0" i="0">
+                <a:solidFill>
+                  <a:srgbClr val="22252B"/>
+                </a:solidFill>
+                <a:latin typeface="Noto Sans CJK KR"/>
+              </a:rPr>
+              <a:t>HOPE의 CMS는 '느린 블록이 빠른 블록의 리셋 초기값'을 줄 뿐(런타임 diff 전달 아님). Sleep는 오프라인에서 빠른 메모리가 배운 것을 새 expert로 만들어 느린 블록에 '실제로' 얹는다 = 위쪽 전달.</a:t>
             </a:r>
           </a:p>
         </p:txBody>
@@ -44600,7 +44832,271 @@
             <a:avLst/>
           </a:prstGeom>
           <a:solidFill>
-            <a:srgbClr val="C9A227"/>
+            <a:srgbClr val="2A9D8F"/>
+          </a:solidFill>
+          <a:ln w="12700">
+            <a:solidFill>
+              <a:srgbClr val="2A9D8F"/>
+            </a:solidFill>
+          </a:ln>
+          <a:effectLst/>
+        </p:spPr>
+        <p:style>
+          <a:lnRef idx="1">
+            <a:schemeClr val="accent1"/>
+          </a:lnRef>
+          <a:fillRef idx="3">
+            <a:schemeClr val="accent1"/>
+          </a:fillRef>
+          <a:effectRef idx="2">
+            <a:schemeClr val="accent1"/>
+          </a:effectRef>
+          <a:fontRef idx="minor">
+            <a:schemeClr val="lt1"/>
+          </a:fontRef>
+        </p:style>
+        <p:txBody>
+          <a:bodyPr rtlCol="0" anchor="ctr" wrap="square" lIns="76200" rIns="76200" tIns="38100" bIns="38100"/>
+          <a:lstStyle/>
+          <a:p>
+            <a:pPr algn="ctr">
+              <a:lnSpc>
+                <a:spcPct val="118000"/>
+              </a:lnSpc>
+              <a:spcBef>
+                <a:spcPts val="0"/>
+              </a:spcBef>
+              <a:spcAft>
+                <a:spcPts val="300"/>
+              </a:spcAft>
+            </a:pPr>
+            <a:r>
+              <a:rPr sz="1100" b="0" i="0">
+                <a:solidFill>
+                  <a:srgbClr val="22252B"/>
+                </a:solidFill>
+                <a:latin typeface="Noto Sans CJK KR"/>
+              </a:rPr>
+              <a:t/>
+            </a:r>
+          </a:p>
+        </p:txBody>
+      </p:sp>
+      <p:sp>
+        <p:nvSpPr>
+          <p:cNvPr id="3" name="TextBox 2"/>
+          <p:cNvSpPr txBox="1"/>
+          <p:nvPr/>
+        </p:nvSpPr>
+        <p:spPr>
+          <a:xfrm>
+            <a:off x="502920" y="146304"/>
+            <a:ext cx="11185855" cy="320040"/>
+          </a:xfrm>
+          <a:prstGeom prst="rect">
+            <a:avLst/>
+          </a:prstGeom>
+          <a:noFill/>
+        </p:spPr>
+        <p:txBody>
+          <a:bodyPr wrap="square" anchor="t" lIns="38100" rIns="38100" tIns="25400" bIns="25400">
+            <a:spAutoFit/>
+          </a:bodyPr>
+          <a:lstStyle/>
+          <a:p>
+            <a:pPr algn="l">
+              <a:lnSpc>
+                <a:spcPct val="120000"/>
+              </a:lnSpc>
+              <a:spcBef>
+                <a:spcPts val="0"/>
+              </a:spcBef>
+              <a:spcAft>
+                <a:spcPts val="0"/>
+              </a:spcAft>
+            </a:pPr>
+            <a:r>
+              <a:rPr sz="1350" b="1" i="0">
+                <a:solidFill>
+                  <a:srgbClr val="2A9D8F"/>
+                </a:solidFill>
+                <a:latin typeface="Noto Sans CJK KR"/>
+              </a:rPr>
+              <a:t>B6 · Sleep — Consolidation 상세</a:t>
+            </a:r>
+          </a:p>
+        </p:txBody>
+      </p:sp>
+      <p:sp>
+        <p:nvSpPr>
+          <p:cNvPr id="4" name="TextBox 3"/>
+          <p:cNvSpPr txBox="1"/>
+          <p:nvPr/>
+        </p:nvSpPr>
+        <p:spPr>
+          <a:xfrm>
+            <a:off x="502920" y="457200"/>
+            <a:ext cx="11185855" cy="566928"/>
+          </a:xfrm>
+          <a:prstGeom prst="rect">
+            <a:avLst/>
+          </a:prstGeom>
+          <a:noFill/>
+        </p:spPr>
+        <p:txBody>
+          <a:bodyPr wrap="square" anchor="t" lIns="38100" rIns="38100" tIns="25400" bIns="25400">
+            <a:spAutoFit/>
+          </a:bodyPr>
+          <a:lstStyle/>
+          <a:p>
+            <a:pPr algn="l">
+              <a:lnSpc>
+                <a:spcPct val="120000"/>
+              </a:lnSpc>
+              <a:spcBef>
+                <a:spcPts val="0"/>
+              </a:spcBef>
+              <a:spcAft>
+                <a:spcPts val="0"/>
+              </a:spcAft>
+            </a:pPr>
+            <a:r>
+              <a:rPr sz="2400" b="1" i="0">
+                <a:solidFill>
+                  <a:srgbClr val="22252B"/>
+                </a:solidFill>
+                <a:latin typeface="Noto Sans CJK KR"/>
+              </a:rPr>
+              <a:t>새 low-rank expert에만 쓰고 · self-generated로 배우고 · 옮긴 뒤에만 지운다</a:t>
+            </a:r>
+          </a:p>
+        </p:txBody>
+      </p:sp>
+      <p:sp>
+        <p:nvSpPr>
+          <p:cNvPr id="5" name="Rounded Rectangle 4"/>
+          <p:cNvSpPr/>
+          <p:nvPr/>
+        </p:nvSpPr>
+        <p:spPr>
+          <a:xfrm>
+            <a:off x="502920" y="1280160"/>
+            <a:ext cx="11183112" cy="1234440"/>
+          </a:xfrm>
+          <a:prstGeom prst="roundRect">
+            <a:avLst/>
+          </a:prstGeom>
+          <a:solidFill>
+            <a:srgbClr val="DAF0ED"/>
+          </a:solidFill>
+          <a:ln w="12700">
+            <a:solidFill>
+              <a:srgbClr val="2A9D8F"/>
+            </a:solidFill>
+          </a:ln>
+          <a:effectLst/>
+        </p:spPr>
+        <p:style>
+          <a:lnRef idx="1">
+            <a:schemeClr val="accent1"/>
+          </a:lnRef>
+          <a:fillRef idx="3">
+            <a:schemeClr val="accent1"/>
+          </a:fillRef>
+          <a:effectRef idx="2">
+            <a:schemeClr val="accent1"/>
+          </a:effectRef>
+          <a:fontRef idx="minor">
+            <a:schemeClr val="lt1"/>
+          </a:fontRef>
+        </p:style>
+        <p:txBody>
+          <a:bodyPr rtlCol="0" anchor="ctr" wrap="square" lIns="76200" rIns="76200" tIns="38100" bIns="38100"/>
+          <a:lstStyle/>
+          <a:p>
+            <a:pPr algn="l">
+              <a:lnSpc>
+                <a:spcPct val="118000"/>
+              </a:lnSpc>
+              <a:spcBef>
+                <a:spcPts val="0"/>
+              </a:spcBef>
+              <a:spcAft>
+                <a:spcPts val="300"/>
+              </a:spcAft>
+            </a:pPr>
+            <a:r>
+              <a:rPr sz="1250" b="1" i="0">
+                <a:solidFill>
+                  <a:srgbClr val="2A9D8F"/>
+                </a:solidFill>
+                <a:latin typeface="Noto Sans CJK KR"/>
+              </a:rPr>
+              <a:t>1a. parameter expansion — '덮어쓸 수 없게' 만든다</a:t>
+            </a:r>
+          </a:p>
+          <a:p>
+            <a:pPr algn="l">
+              <a:lnSpc>
+                <a:spcPct val="118000"/>
+              </a:lnSpc>
+              <a:spcBef>
+                <a:spcPts val="0"/>
+              </a:spcBef>
+              <a:spcAft>
+                <a:spcPts val="200"/>
+              </a:spcAft>
+            </a:pPr>
+            <a:r>
+              <a:rPr sz="1000" b="0" i="0">
+                <a:solidFill>
+                  <a:srgbClr val="22252B"/>
+                </a:solidFill>
+                <a:latin typeface="Noto Sans CJK KR"/>
+              </a:rPr>
+              <a:t>각 MLP = 여러 expert를 가진 sparse MoE. 빠른 블록 지식을 옮길 때 새 low-rank expert 하나 추가(A d×r, B r×d). 옮겨지는 지식은 오직 이 새 파라미터에만 → 옛 지식 물리 자리를 안 건드림(정규화로 '잊지마' 부탁이 아니라 애초에 덮어쓸 수 없게).</a:t>
+            </a:r>
+          </a:p>
+          <a:p>
+            <a:pPr algn="l">
+              <a:lnSpc>
+                <a:spcPct val="118000"/>
+              </a:lnSpc>
+              <a:spcBef>
+                <a:spcPts val="0"/>
+              </a:spcBef>
+              <a:spcAft>
+                <a:spcPts val="200"/>
+              </a:spcAft>
+            </a:pPr>
+            <a:r>
+              <a:rPr sz="1000" b="1" i="0">
+                <a:solidFill>
+                  <a:srgbClr val="2A6F97"/>
+                </a:solidFill>
+                <a:latin typeface="Noto Sans CJK KR"/>
+              </a:rPr>
+              <a:t>[구현] 미래 expert 전부를 초기화 시점에 사전할당하고 mask만 씌운다 → 'expert 추가'는 실제론 mask 하나 여는 것. shape가 정적으로 유지(컴파일 그래프·kernel·checkpoint 안 흔들림).</a:t>
+            </a:r>
+          </a:p>
+        </p:txBody>
+      </p:sp>
+      <p:sp>
+        <p:nvSpPr>
+          <p:cNvPr id="6" name="Rounded Rectangle 5"/>
+          <p:cNvSpPr/>
+          <p:nvPr/>
+        </p:nvSpPr>
+        <p:spPr>
+          <a:xfrm>
+            <a:off x="502920" y="2651760"/>
+            <a:ext cx="5486400" cy="1874519"/>
+          </a:xfrm>
+          <a:prstGeom prst="roundRect">
+            <a:avLst/>
+          </a:prstGeom>
+          <a:solidFill>
+            <a:srgbClr val="F6ECC7"/>
           </a:solidFill>
           <a:ln w="12700">
             <a:solidFill>
@@ -44627,7 +45123,7 @@
           <a:bodyPr rtlCol="0" anchor="ctr" wrap="square" lIns="76200" rIns="76200" tIns="38100" bIns="38100"/>
           <a:lstStyle/>
           <a:p>
-            <a:pPr algn="ctr">
+            <a:pPr algn="l">
               <a:lnSpc>
                 <a:spcPct val="118000"/>
               </a:lnSpc>
@@ -44639,226 +45135,93 @@
               </a:spcAft>
             </a:pPr>
             <a:r>
-              <a:rPr sz="1100" b="0" i="0">
-                <a:solidFill>
-                  <a:srgbClr val="22252B"/>
-                </a:solidFill>
-                <a:latin typeface="Noto Sans CJK KR"/>
-              </a:rPr>
-              <a:t/>
-            </a:r>
-          </a:p>
-        </p:txBody>
-      </p:sp>
-      <p:sp>
-        <p:nvSpPr>
-          <p:cNvPr id="3" name="TextBox 2"/>
-          <p:cNvSpPr txBox="1"/>
-          <p:nvPr/>
-        </p:nvSpPr>
-        <p:spPr>
-          <a:xfrm>
-            <a:off x="502920" y="146304"/>
-            <a:ext cx="11185855" cy="320040"/>
-          </a:xfrm>
-          <a:prstGeom prst="rect">
-            <a:avLst/>
-          </a:prstGeom>
-          <a:noFill/>
-        </p:spPr>
-        <p:txBody>
-          <a:bodyPr wrap="square" anchor="t" lIns="38100" rIns="38100" tIns="25400" bIns="25400">
-            <a:spAutoFit/>
-          </a:bodyPr>
-          <a:lstStyle/>
-          <a:p>
-            <a:pPr algn="l">
-              <a:lnSpc>
-                <a:spcPct val="120000"/>
-              </a:lnSpc>
-              <a:spcBef>
-                <a:spcPts val="0"/>
-              </a:spcBef>
-              <a:spcAft>
-                <a:spcPts val="0"/>
-              </a:spcAft>
-            </a:pPr>
-            <a:r>
-              <a:rPr sz="1350" b="1" i="0">
+              <a:rPr sz="1250" b="1" i="0">
                 <a:solidFill>
                   <a:srgbClr val="C9A227"/>
                 </a:solidFill>
                 <a:latin typeface="Noto Sans CJK KR"/>
               </a:rPr>
-              <a:t>C1 · pair thesis</a:t>
-            </a:r>
-          </a:p>
-        </p:txBody>
-      </p:sp>
-      <p:sp>
-        <p:nvSpPr>
-          <p:cNvPr id="4" name="TextBox 3"/>
-          <p:cNvSpPr txBox="1"/>
-          <p:nvPr/>
-        </p:nvSpPr>
-        <p:spPr>
-          <a:xfrm>
-            <a:off x="502920" y="457200"/>
-            <a:ext cx="11185855" cy="566928"/>
-          </a:xfrm>
-          <a:prstGeom prst="rect">
-            <a:avLst/>
-          </a:prstGeom>
-          <a:noFill/>
-        </p:spPr>
-        <p:txBody>
-          <a:bodyPr wrap="square" anchor="t" lIns="38100" rIns="38100" tIns="25400" bIns="25400">
-            <a:spAutoFit/>
-          </a:bodyPr>
-          <a:lstStyle/>
-          <a:p>
-            <a:pPr algn="l">
-              <a:lnSpc>
-                <a:spcPct val="120000"/>
-              </a:lnSpc>
-              <a:spcBef>
-                <a:spcPts val="0"/>
-              </a:spcBef>
-              <a:spcAft>
-                <a:spcPts val="0"/>
-              </a:spcAft>
-            </a:pPr>
-            <a:r>
-              <a:rPr sz="2400" b="1" i="0">
-                <a:solidFill>
-                  <a:srgbClr val="22252B"/>
-                </a:solidFill>
-                <a:latin typeface="Noto Sans CJK KR"/>
-              </a:rPr>
-              <a:t>학습은 compute-bound, 디코드는 memory-bound</a:t>
-            </a:r>
-          </a:p>
-        </p:txBody>
-      </p:sp>
-      <p:sp>
-        <p:nvSpPr>
-          <p:cNvPr id="5" name="Rounded Rectangle 4"/>
+              <a:t>1b. Knowledge Seeding — teacher/student가 누구인가</a:t>
+            </a:r>
+          </a:p>
+          <a:p>
+            <a:pPr algn="l">
+              <a:lnSpc>
+                <a:spcPct val="118000"/>
+              </a:lnSpc>
+              <a:spcBef>
+                <a:spcPts val="0"/>
+              </a:spcBef>
+              <a:spcAft>
+                <a:spcPts val="200"/>
+              </a:spcAft>
+            </a:pPr>
+            <a:r>
+              <a:rPr sz="950" b="0" i="0">
+                <a:solidFill>
+                  <a:srgbClr val="22252B"/>
+                </a:solidFill>
+                <a:latin typeface="Noto Sans CJK KR"/>
+              </a:rPr>
+              <a:t>teacher = expansion 전 모델(빠른 블록이 아직 안 덮인, 그 지식을 든 자기 자신).</a:t>
+            </a:r>
+          </a:p>
+          <a:p>
+            <a:pPr algn="l">
+              <a:lnSpc>
+                <a:spcPct val="118000"/>
+              </a:lnSpc>
+              <a:spcBef>
+                <a:spcPts val="0"/>
+              </a:spcBef>
+              <a:spcAft>
+                <a:spcPts val="200"/>
+              </a:spcAft>
+            </a:pPr>
+            <a:r>
+              <a:rPr sz="950" b="0" i="0">
+                <a:solidFill>
+                  <a:srgbClr val="22252B"/>
+                </a:solidFill>
+                <a:latin typeface="Noto Sans CJK KR"/>
+              </a:rPr>
+              <a:t>student = 확장 + 빠른 블록 갱신 후(빠른 블록 지식은 잃고, 느린 블록에 빈 expert 하나 받은 상태).</a:t>
+            </a:r>
+          </a:p>
+          <a:p>
+            <a:pPr algn="l">
+              <a:lnSpc>
+                <a:spcPct val="118000"/>
+              </a:lnSpc>
+              <a:spcBef>
+                <a:spcPts val="0"/>
+              </a:spcBef>
+              <a:spcAft>
+                <a:spcPts val="200"/>
+              </a:spcAft>
+            </a:pPr>
+            <a:r>
+              <a:rPr sz="950" b="1" i="0">
+                <a:solidFill>
+                  <a:srgbClr val="C9A227"/>
+                </a:solidFill>
+                <a:latin typeface="Noto Sans CJK KR"/>
+              </a:rPr>
+              <a:t>distillation이 student 출력을 teacher로 당김 — 움직일 수 있는 건 새 expert뿐. GKD = teacher 데이터 + student on-policy rollout. student 전부 freeze, 새 expert만 학습.</a:t>
+            </a:r>
+          </a:p>
+        </p:txBody>
+      </p:sp>
+      <p:sp>
+        <p:nvSpPr>
+          <p:cNvPr id="7" name="Rounded Rectangle 6"/>
           <p:cNvSpPr/>
           <p:nvPr/>
         </p:nvSpPr>
         <p:spPr>
           <a:xfrm>
-            <a:off x="502920" y="1371600"/>
-            <a:ext cx="5486400" cy="1828800"/>
-          </a:xfrm>
-          <a:prstGeom prst="roundRect">
-            <a:avLst/>
-          </a:prstGeom>
-          <a:solidFill>
-            <a:srgbClr val="DBE7F3"/>
-          </a:solidFill>
-          <a:ln w="12700">
-            <a:solidFill>
-              <a:srgbClr val="2A6F97"/>
-            </a:solidFill>
-          </a:ln>
-          <a:effectLst/>
-        </p:spPr>
-        <p:style>
-          <a:lnRef idx="1">
-            <a:schemeClr val="accent1"/>
-          </a:lnRef>
-          <a:fillRef idx="3">
-            <a:schemeClr val="accent1"/>
-          </a:fillRef>
-          <a:effectRef idx="2">
-            <a:schemeClr val="accent1"/>
-          </a:effectRef>
-          <a:fontRef idx="minor">
-            <a:schemeClr val="lt1"/>
-          </a:fontRef>
-        </p:style>
-        <p:txBody>
-          <a:bodyPr rtlCol="0" anchor="ctr" wrap="square" lIns="76200" rIns="76200" tIns="38100" bIns="38100"/>
-          <a:lstStyle/>
-          <a:p>
-            <a:pPr algn="l">
-              <a:lnSpc>
-                <a:spcPct val="118000"/>
-              </a:lnSpc>
-              <a:spcBef>
-                <a:spcPts val="0"/>
-              </a:spcBef>
-              <a:spcAft>
-                <a:spcPts val="500"/>
-              </a:spcAft>
-            </a:pPr>
-            <a:r>
-              <a:rPr sz="1400" b="1" i="0">
-                <a:solidFill>
-                  <a:srgbClr val="2A6F97"/>
-                </a:solidFill>
-                <a:latin typeface="Noto Sans CJK KR"/>
-              </a:rPr>
-              <a:t>학습(training) — compute-bound</a:t>
-            </a:r>
-          </a:p>
-          <a:p>
-            <a:pPr algn="l">
-              <a:lnSpc>
-                <a:spcPct val="118000"/>
-              </a:lnSpc>
-              <a:spcBef>
-                <a:spcPts val="0"/>
-              </a:spcBef>
-              <a:spcAft>
-                <a:spcPts val="300"/>
-              </a:spcAft>
-            </a:pPr>
-            <a:r>
-              <a:rPr sz="1250" b="0" i="0">
-                <a:solidFill>
-                  <a:srgbClr val="22252B"/>
-                </a:solidFill>
-                <a:latin typeface="Noto Sans CJK KR"/>
-              </a:rPr>
-              <a:t>chunk C를 크게 잡아 병렬 → 연산/바이트(arithmetic intensity)가 높다.</a:t>
-            </a:r>
-          </a:p>
-          <a:p>
-            <a:pPr algn="l">
-              <a:lnSpc>
-                <a:spcPct val="118000"/>
-              </a:lnSpc>
-              <a:spcBef>
-                <a:spcPts val="0"/>
-              </a:spcBef>
-              <a:spcAft>
-                <a:spcPts val="300"/>
-              </a:spcAft>
-            </a:pPr>
-            <a:r>
-              <a:rPr sz="1250" b="0" i="0">
-                <a:solidFill>
-                  <a:srgbClr val="22252B"/>
-                </a:solidFill>
-                <a:latin typeface="Noto Sans CJK KR"/>
-              </a:rPr>
-              <a:t>roofline의 오른쪽(연산 한계) → 더 빠른 연산기가 이득.</a:t>
-            </a:r>
-          </a:p>
-        </p:txBody>
-      </p:sp>
-      <p:sp>
-        <p:nvSpPr>
-          <p:cNvPr id="6" name="Rounded Rectangle 5"/>
-          <p:cNvSpPr/>
-          <p:nvPr/>
-        </p:nvSpPr>
-        <p:spPr>
-          <a:xfrm>
-            <a:off x="6172200" y="1371600"/>
-            <a:ext cx="5486400" cy="1828800"/>
+            <a:off x="6199632" y="2651760"/>
+            <a:ext cx="5486400" cy="1874519"/>
           </a:xfrm>
           <a:prstGeom prst="roundRect">
             <a:avLst/>
@@ -44899,83 +45262,107 @@
                 <a:spcPts val="0"/>
               </a:spcBef>
               <a:spcAft>
-                <a:spcPts val="500"/>
-              </a:spcAft>
-            </a:pPr>
-            <a:r>
-              <a:rPr sz="1400" b="1" i="0">
+                <a:spcPts val="300"/>
+              </a:spcAft>
+            </a:pPr>
+            <a:r>
+              <a:rPr sz="1250" b="1" i="0">
                 <a:solidFill>
                   <a:srgbClr val="C1121F"/>
                 </a:solidFill>
                 <a:latin typeface="Noto Sans CJK KR"/>
               </a:rPr>
-              <a:t>디코드(decode) — memory-bound</a:t>
-            </a:r>
-          </a:p>
-          <a:p>
-            <a:pPr algn="l">
-              <a:lnSpc>
-                <a:spcPct val="118000"/>
-              </a:lnSpc>
-              <a:spcBef>
-                <a:spcPts val="0"/>
-              </a:spcBef>
-              <a:spcAft>
-                <a:spcPts val="300"/>
-              </a:spcAft>
-            </a:pPr>
-            <a:r>
-              <a:rPr sz="1250" b="0" i="0">
-                <a:solidFill>
-                  <a:srgbClr val="22252B"/>
-                </a:solidFill>
-                <a:latin typeface="Noto Sans CJK KR"/>
-              </a:rPr>
-              <a:t>chunk=1, 토큰마다 '전체 상태(state+weights)'를 read-modify-write.</a:t>
-            </a:r>
-          </a:p>
-          <a:p>
-            <a:pPr algn="l">
-              <a:lnSpc>
-                <a:spcPct val="118000"/>
-              </a:lnSpc>
-              <a:spcBef>
-                <a:spcPts val="0"/>
-              </a:spcBef>
-              <a:spcAft>
-                <a:spcPts val="300"/>
-              </a:spcAft>
-            </a:pPr>
-            <a:r>
-              <a:rPr sz="1250" b="0" i="0">
-                <a:solidFill>
-                  <a:srgbClr val="22252B"/>
-                </a:solidFill>
-                <a:latin typeface="Noto Sans CJK KR"/>
-              </a:rPr>
-              <a:t>arithmetic intensity가 낮다 → roofline의 왼쪽(대역폭 한계).</a:t>
-            </a:r>
-          </a:p>
-        </p:txBody>
-      </p:sp>
-      <p:sp>
-        <p:nvSpPr>
-          <p:cNvPr id="7" name="Rectangle 6"/>
+              <a:t>1c. LTI + synaptic-pruning reset</a:t>
+            </a:r>
+          </a:p>
+          <a:p>
+            <a:pPr algn="l">
+              <a:lnSpc>
+                <a:spcPct val="118000"/>
+              </a:lnSpc>
+              <a:spcBef>
+                <a:spcPts val="0"/>
+              </a:spcBef>
+              <a:spcAft>
+                <a:spcPts val="200"/>
+              </a:spcAft>
+            </a:pPr>
+            <a:r>
+              <a:rPr sz="950" b="0" i="0">
+                <a:solidFill>
+                  <a:srgbClr val="22252B"/>
+                </a:solidFill>
+                <a:latin typeface="Noto Sans CJK KR"/>
+              </a:rPr>
+              <a:t>distillation만으론 '아는 것 ≠ 쓰는 것' — teacher를 약하게만 흉내. LTI(RL): teacher 데이터 앞부분 주고 이어쓰게 해, 잘 쓰면 보상.</a:t>
+            </a:r>
+          </a:p>
+          <a:p>
+            <a:pPr algn="l">
+              <a:lnSpc>
+                <a:spcPct val="118000"/>
+              </a:lnSpc>
+              <a:spcBef>
+                <a:spcPts val="0"/>
+              </a:spcBef>
+              <a:spcAft>
+                <a:spcPts val="200"/>
+              </a:spcAft>
+            </a:pPr>
+            <a:r>
+              <a:rPr sz="950" b="0" i="0">
+                <a:solidFill>
+                  <a:srgbClr val="22252B"/>
+                </a:solidFill>
+                <a:latin typeface="Noto Sans CJK KR"/>
+              </a:rPr>
+              <a:t>보상 = semantic(frozen reward model, 의미 같으면 1) + absolute(편집거리 토큰 유사도).</a:t>
+            </a:r>
+          </a:p>
+          <a:p>
+            <a:pPr algn="l">
+              <a:lnSpc>
+                <a:spcPct val="118000"/>
+              </a:lnSpc>
+              <a:spcBef>
+                <a:spcPts val="0"/>
+              </a:spcBef>
+              <a:spcAft>
+                <a:spcPts val="200"/>
+              </a:spcAft>
+            </a:pPr>
+            <a:r>
+              <a:rPr sz="950" b="1" i="0">
+                <a:solidFill>
+                  <a:srgbClr val="C1121F"/>
+                </a:solidFill>
+                <a:latin typeface="Noto Sans CJK KR"/>
+              </a:rPr>
+              <a:t>끝나면 reset: 빠른 블록의 과거 expert들을 지워 capacity 회수 = 'eviction 전 write-back' cache 정책.</a:t>
+            </a:r>
+          </a:p>
+        </p:txBody>
+      </p:sp>
+      <p:sp>
+        <p:nvSpPr>
+          <p:cNvPr id="8" name="Rounded Rectangle 7"/>
           <p:cNvSpPr/>
           <p:nvPr/>
         </p:nvSpPr>
         <p:spPr>
           <a:xfrm>
-            <a:off x="895197" y="3392424"/>
-            <a:ext cx="4747564" cy="2020824"/>
-          </a:xfrm>
-          <a:prstGeom prst="rect">
-            <a:avLst/>
-          </a:prstGeom>
-          <a:noFill/>
-          <a:ln w="9525">
+            <a:off x="502920" y="4663440"/>
+            <a:ext cx="11183112" cy="685800"/>
+          </a:xfrm>
+          <a:prstGeom prst="roundRect">
+            <a:avLst/>
+          </a:prstGeom>
+          <a:solidFill>
+            <a:srgbClr val="DAF0ED"/>
+          </a:solidFill>
+          <a:ln w="12700">
             <a:solidFill>
-              <a:srgbClr val="8A8F98"/>
+              <a:srgbClr val="2A9D8F"/>
             </a:solidFill>
           </a:ln>
           <a:effectLst/>
@@ -44995,121 +45382,6 @@
           </a:fontRef>
         </p:style>
         <p:txBody>
-          <a:bodyPr rtlCol="0" anchor="ctr"/>
-          <a:lstStyle/>
-          <a:p>
-            <a:pPr algn="ctr"/>
-          </a:p>
-        </p:txBody>
-      </p:sp>
-      <p:pic>
-        <p:nvPicPr>
-          <p:cNvPr id="8" name="Picture 7" descr="fig4-sstar-invariance.png"/>
-          <p:cNvPicPr>
-            <a:picLocks noChangeAspect="1"/>
-          </p:cNvPicPr>
-          <p:nvPr/>
-        </p:nvPicPr>
-        <p:blipFill>
-          <a:blip r:embed="rId2"/>
-          <a:stretch>
-            <a:fillRect/>
-          </a:stretch>
-        </p:blipFill>
-        <p:spPr>
-          <a:xfrm>
-            <a:off x="931773" y="3429000"/>
-            <a:ext cx="4674412" cy="1947672"/>
-          </a:xfrm>
-          <a:prstGeom prst="rect">
-            <a:avLst/>
-          </a:prstGeom>
-        </p:spPr>
-      </p:pic>
-      <p:sp>
-        <p:nvSpPr>
-          <p:cNvPr id="9" name="TextBox 8"/>
-          <p:cNvSpPr txBox="1"/>
-          <p:nvPr/>
-        </p:nvSpPr>
-        <p:spPr>
-          <a:xfrm>
-            <a:off x="502920" y="5394959"/>
-            <a:ext cx="5532120" cy="365760"/>
-          </a:xfrm>
-          <a:prstGeom prst="rect">
-            <a:avLst/>
-          </a:prstGeom>
-          <a:noFill/>
-        </p:spPr>
-        <p:txBody>
-          <a:bodyPr wrap="square" anchor="t" lIns="38100" rIns="38100" tIns="25400" bIns="25400">
-            <a:spAutoFit/>
-          </a:bodyPr>
-          <a:lstStyle/>
-          <a:p>
-            <a:pPr algn="ctr">
-              <a:lnSpc>
-                <a:spcPct val="120000"/>
-              </a:lnSpc>
-              <a:spcBef>
-                <a:spcPts val="0"/>
-              </a:spcBef>
-              <a:spcAft>
-                <a:spcPts val="0"/>
-              </a:spcAft>
-            </a:pPr>
-            <a:r>
-              <a:rPr sz="1050" b="0" i="0">
-                <a:solidFill>
-                  <a:srgbClr val="22252B"/>
-                </a:solidFill>
-                <a:latin typeface="Noto Sans CJK KR"/>
-              </a:rPr>
-              <a:t>S*(KV↔TTT 교차점)=65536 tokens — 8개 가속기 전부 동일 = 하드웨어가 아니라 workload의 성질</a:t>
-            </a:r>
-          </a:p>
-        </p:txBody>
-      </p:sp>
-      <p:sp>
-        <p:nvSpPr>
-          <p:cNvPr id="10" name="Rounded Rectangle 9"/>
-          <p:cNvSpPr/>
-          <p:nvPr/>
-        </p:nvSpPr>
-        <p:spPr>
-          <a:xfrm>
-            <a:off x="6172200" y="3429000"/>
-            <a:ext cx="5486400" cy="2103120"/>
-          </a:xfrm>
-          <a:prstGeom prst="roundRect">
-            <a:avLst/>
-          </a:prstGeom>
-          <a:solidFill>
-            <a:srgbClr val="F6ECC7"/>
-          </a:solidFill>
-          <a:ln w="12700">
-            <a:solidFill>
-              <a:srgbClr val="C9A227"/>
-            </a:solidFill>
-          </a:ln>
-          <a:effectLst/>
-        </p:spPr>
-        <p:style>
-          <a:lnRef idx="1">
-            <a:schemeClr val="accent1"/>
-          </a:lnRef>
-          <a:fillRef idx="3">
-            <a:schemeClr val="accent1"/>
-          </a:fillRef>
-          <a:effectRef idx="2">
-            <a:schemeClr val="accent1"/>
-          </a:effectRef>
-          <a:fontRef idx="minor">
-            <a:schemeClr val="lt1"/>
-          </a:fontRef>
-        </p:style>
-        <p:txBody>
           <a:bodyPr rtlCol="0" anchor="ctr" wrap="square" lIns="76200" rIns="76200" tIns="38100" bIns="38100"/>
           <a:lstStyle/>
           <a:p>
@@ -45121,61 +45393,39 @@
                 <a:spcPts val="0"/>
               </a:spcBef>
               <a:spcAft>
-                <a:spcPts val="500"/>
-              </a:spcAft>
-            </a:pPr>
-            <a:r>
-              <a:rPr sz="1300" b="1" i="0">
-                <a:solidFill>
-                  <a:srgbClr val="C9A227"/>
-                </a:solidFill>
-                <a:latin typeface="Noto Sans CJK KR"/>
-              </a:rPr>
-              <a:t>왜 중요한가</a:t>
-            </a:r>
-          </a:p>
-          <a:p>
-            <a:pPr algn="l">
-              <a:lnSpc>
-                <a:spcPct val="118000"/>
-              </a:lnSpc>
-              <a:spcBef>
-                <a:spcPts val="0"/>
-              </a:spcBef>
-              <a:spcAft>
                 <a:spcPts val="300"/>
               </a:spcAft>
             </a:pPr>
             <a:r>
-              <a:rPr sz="1250" b="0" i="0">
-                <a:solidFill>
-                  <a:srgbClr val="22252B"/>
-                </a:solidFill>
-                <a:latin typeface="Noto Sans CJK KR"/>
-              </a:rPr>
-              <a:t>메모리 상태를 갱신하는 이 계열은 디코드에서 구조적으로 memory-bound다. 그리고 그 경계(S*)는 하드웨어를 바꿔도 변하지 않는다(invariant). 즉 '어느 칩을 써도' 디코드 비용은 메모리 대역폭이 지배한다.</a:t>
-            </a:r>
-          </a:p>
-          <a:p>
-            <a:pPr algn="l">
-              <a:lnSpc>
-                <a:spcPct val="118000"/>
-              </a:lnSpc>
-              <a:spcBef>
-                <a:spcPts val="0"/>
-              </a:spcBef>
-              <a:spcAft>
-                <a:spcPts val="300"/>
-              </a:spcAft>
-            </a:pPr>
-            <a:r>
-              <a:rPr sz="1200" b="1" i="0">
-                <a:solidFill>
-                  <a:srgbClr val="2A6F97"/>
-                </a:solidFill>
-                <a:latin typeface="Noto Sans CJK KR"/>
-              </a:rPr>
-              <a:t>→ 이후 슬라이드: 실제 8칩 측정 · HOPE block roofline · 메모리 기술(zHBM/PIM/SRAM) · 청사진.</a:t>
+              <a:rPr sz="1250" b="1" i="0">
+                <a:solidFill>
+                  <a:srgbClr val="2A9D8F"/>
+                </a:solidFill>
+                <a:latin typeface="Noto Sans CJK KR"/>
+              </a:rPr>
+              <a:t>순 효과 — 하나의 불변식</a:t>
+            </a:r>
+          </a:p>
+          <a:p>
+            <a:pPr algn="l">
+              <a:lnSpc>
+                <a:spcPct val="118000"/>
+              </a:lnSpc>
+              <a:spcBef>
+                <a:spcPts val="0"/>
+              </a:spcBef>
+              <a:spcAft>
+                <a:spcPts val="200"/>
+              </a:spcAft>
+            </a:pPr>
+            <a:r>
+              <a:rPr sz="1150" b="0" i="0">
+                <a:solidFill>
+                  <a:srgbClr val="22252B"/>
+                </a:solidFill>
+                <a:latin typeface="Noto Sans CJK KR"/>
+              </a:rPr>
+              <a:t>빠른 메모리는 작고 유연하게, 느린 메모리는 단조 성장하며 '신선한 expert로만' 쓰인다.</a:t>
             </a:r>
           </a:p>
         </p:txBody>
@@ -45213,11 +45463,11 @@
             <a:avLst/>
           </a:prstGeom>
           <a:solidFill>
-            <a:srgbClr val="C9A227"/>
+            <a:srgbClr val="2A9D8F"/>
           </a:solidFill>
           <a:ln w="12700">
             <a:solidFill>
-              <a:srgbClr val="C9A227"/>
+              <a:srgbClr val="2A9D8F"/>
             </a:solidFill>
           </a:ln>
           <a:effectLst/>
@@ -45299,11 +45549,11 @@
             <a:r>
               <a:rPr sz="1350" b="1" i="0">
                 <a:solidFill>
-                  <a:srgbClr val="C9A227"/>
-                </a:solidFill>
-                <a:latin typeface="Noto Sans CJK KR"/>
-              </a:rPr>
-              <a:t>C2 · 8개 가속기 크로스 측정</a:t>
+                  <a:srgbClr val="2A9D8F"/>
+                </a:solidFill>
+                <a:latin typeface="Noto Sans CJK KR"/>
+              </a:rPr>
+              <a:t>B6 · Sleep — Stage 2: Dreaming + 정직성</a:t>
             </a:r>
           </a:p>
         </p:txBody>
@@ -45348,7 +45598,7 @@
                 </a:solidFill>
                 <a:latin typeface="Noto Sans CJK KR"/>
               </a:rPr>
-              <a:t>5자릿수 스프레드, 그러나 대부분 memory-bound</a:t>
+              <a:t>자기 생성 데이터로 자신을 고쳐 쓴다 (REM) — 단 knob은 meta-learn 안 됨</a:t>
             </a:r>
           </a:p>
         </p:txBody>
@@ -45361,8 +45611,8 @@
         </p:nvSpPr>
         <p:spPr>
           <a:xfrm>
-            <a:off x="466344" y="1482725"/>
-            <a:ext cx="5605272" cy="2685542"/>
+            <a:off x="1115807" y="1335024"/>
+            <a:ext cx="3986304" cy="2816352"/>
           </a:xfrm>
           <a:prstGeom prst="rect">
             <a:avLst/>
@@ -45399,7 +45649,7 @@
       </p:sp>
       <p:pic>
         <p:nvPicPr>
-          <p:cNvPr id="6" name="Picture 5" descr="fig1-decode-ms.png"/>
+          <p:cNvPr id="6" name="Picture 5" descr="fig8.png"/>
           <p:cNvPicPr>
             <a:picLocks noChangeAspect="1"/>
           </p:cNvPicPr>
@@ -45413,8 +45663,8 @@
         </p:blipFill>
         <p:spPr>
           <a:xfrm>
-            <a:off x="502920" y="1519301"/>
-            <a:ext cx="5532120" cy="2612390"/>
+            <a:off x="1152383" y="1371600"/>
+            <a:ext cx="3913152" cy="2743200"/>
           </a:xfrm>
           <a:prstGeom prst="rect">
             <a:avLst/>
@@ -45429,8 +45679,8 @@
         </p:nvSpPr>
         <p:spPr>
           <a:xfrm>
-            <a:off x="502920" y="4297679"/>
-            <a:ext cx="5532120" cy="365760"/>
+            <a:off x="502920" y="4151376"/>
+            <a:ext cx="5212080" cy="420624"/>
           </a:xfrm>
           <a:prstGeom prst="rect">
             <a:avLst/>
@@ -45451,7 +45701,7 @@
                 <a:spcPts val="0"/>
               </a:spcBef>
               <a:spcAft>
-                <a:spcPts val="0"/>
+                <a:spcPts val="100"/>
               </a:spcAft>
             </a:pPr>
             <a:r>
@@ -45461,29 +45711,53 @@
                 </a:solidFill>
                 <a:latin typeface="Noto Sans CJK KR"/>
               </a:rPr>
-              <a:t>토큰당 decode 시간(ideal 하한, log) — MTIA v2 ~31ms에서 WSE-3 ~0.0003ms까지</a:t>
-            </a:r>
-          </a:p>
-        </p:txBody>
-      </p:sp>
-      <p:sp>
-        <p:nvSpPr>
-          <p:cNvPr id="8" name="Rectangle 7"/>
+              <a:t>Figure 8 — sleep 사이클마다 router가 expert를 골라 갱신, random expert로 novelty 주입</a:t>
+            </a:r>
+          </a:p>
+          <a:p>
+            <a:pPr algn="ctr">
+              <a:lnSpc>
+                <a:spcPct val="120000"/>
+              </a:lnSpc>
+              <a:spcBef>
+                <a:spcPts val="0"/>
+              </a:spcBef>
+              <a:spcAft>
+                <a:spcPts val="100"/>
+              </a:spcAft>
+            </a:pPr>
+            <a:r>
+              <a:rPr sz="850" b="0" i="1">
+                <a:solidFill>
+                  <a:srgbClr val="5A5F68"/>
+                </a:solidFill>
+                <a:latin typeface="Noto Sans CJK KR"/>
+              </a:rPr>
+              <a:t>출처: 2606.03979 Fig.8</a:t>
+            </a:r>
+          </a:p>
+        </p:txBody>
+      </p:sp>
+      <p:sp>
+        <p:nvSpPr>
+          <p:cNvPr id="8" name="Rounded Rectangle 7"/>
           <p:cNvSpPr/>
           <p:nvPr/>
         </p:nvSpPr>
         <p:spPr>
           <a:xfrm>
-            <a:off x="6227064" y="1664970"/>
-            <a:ext cx="5468112" cy="2321052"/>
-          </a:xfrm>
-          <a:prstGeom prst="rect">
-            <a:avLst/>
-          </a:prstGeom>
-          <a:noFill/>
-          <a:ln w="9525">
+            <a:off x="5852160" y="1371600"/>
+            <a:ext cx="5806440" cy="1691640"/>
+          </a:xfrm>
+          <a:prstGeom prst="roundRect">
+            <a:avLst/>
+          </a:prstGeom>
+          <a:solidFill>
+            <a:srgbClr val="DAF0ED"/>
+          </a:solidFill>
+          <a:ln w="12700">
             <a:solidFill>
-              <a:srgbClr val="8A8F98"/>
+              <a:srgbClr val="2A9D8F"/>
             </a:solidFill>
           </a:ln>
           <a:effectLst/>
@@ -45503,92 +45777,217 @@
           </a:fontRef>
         </p:style>
         <p:txBody>
-          <a:bodyPr rtlCol="0" anchor="ctr"/>
-          <a:lstStyle/>
-          <a:p>
-            <a:pPr algn="ctr"/>
-          </a:p>
-        </p:txBody>
-      </p:sp>
-      <p:pic>
-        <p:nvPicPr>
-          <p:cNvPr id="9" name="Picture 8" descr="fig4-sstar-invariance.png"/>
-          <p:cNvPicPr>
-            <a:picLocks noChangeAspect="1"/>
-          </p:cNvPicPr>
-          <p:nvPr/>
-        </p:nvPicPr>
-        <p:blipFill>
-          <a:blip r:embed="rId3"/>
-          <a:stretch>
-            <a:fillRect/>
-          </a:stretch>
-        </p:blipFill>
-        <p:spPr>
-          <a:xfrm>
-            <a:off x="6263640" y="1701546"/>
-            <a:ext cx="5394960" cy="2247900"/>
-          </a:xfrm>
-          <a:prstGeom prst="rect">
-            <a:avLst/>
-          </a:prstGeom>
-        </p:spPr>
-      </p:pic>
-      <p:sp>
-        <p:nvSpPr>
-          <p:cNvPr id="10" name="TextBox 9"/>
-          <p:cNvSpPr txBox="1"/>
-          <p:nvPr/>
-        </p:nvSpPr>
-        <p:spPr>
-          <a:xfrm>
-            <a:off x="6263640" y="4297679"/>
-            <a:ext cx="5394960" cy="365760"/>
-          </a:xfrm>
-          <a:prstGeom prst="rect">
-            <a:avLst/>
-          </a:prstGeom>
-          <a:noFill/>
-        </p:spPr>
-        <p:txBody>
-          <a:bodyPr wrap="square" anchor="t" lIns="38100" rIns="38100" tIns="25400" bIns="25400">
-            <a:spAutoFit/>
-          </a:bodyPr>
-          <a:lstStyle/>
-          <a:p>
-            <a:pPr algn="ctr">
-              <a:lnSpc>
-                <a:spcPct val="120000"/>
-              </a:lnSpc>
-              <a:spcBef>
-                <a:spcPts val="0"/>
-              </a:spcBef>
-              <a:spcAft>
-                <a:spcPts val="0"/>
-              </a:spcAft>
-            </a:pPr>
-            <a:r>
-              <a:rPr sz="1050" b="0" i="0">
-                <a:solidFill>
-                  <a:srgbClr val="22252B"/>
-                </a:solidFill>
-                <a:latin typeface="Noto Sans CJK KR"/>
-              </a:rPr>
-              <a:t>S* 불변: 8개 아키텍처가 같은 교차점 — workload 고유 성질</a:t>
-            </a:r>
-          </a:p>
-        </p:txBody>
-      </p:sp>
-      <p:sp>
-        <p:nvSpPr>
-          <p:cNvPr id="11" name="Rounded Rectangle 10"/>
+          <a:bodyPr rtlCol="0" anchor="ctr" wrap="square" lIns="76200" rIns="76200" tIns="38100" bIns="38100"/>
+          <a:lstStyle/>
+          <a:p>
+            <a:pPr algn="l">
+              <a:lnSpc>
+                <a:spcPct val="118000"/>
+              </a:lnSpc>
+              <a:spcBef>
+                <a:spcPts val="0"/>
+              </a:spcBef>
+              <a:spcAft>
+                <a:spcPts val="300"/>
+              </a:spcAft>
+            </a:pPr>
+            <a:r>
+              <a:rPr sz="1250" b="1" i="0">
+                <a:solidFill>
+                  <a:srgbClr val="2A9D8F"/>
+                </a:solidFill>
+                <a:latin typeface="Noto Sans CJK KR"/>
+              </a:rPr>
+              <a:t>Dreaming (SEAL 위에 시연, plug-in)</a:t>
+            </a:r>
+          </a:p>
+          <a:p>
+            <a:pPr algn="l">
+              <a:lnSpc>
+                <a:spcPct val="118000"/>
+              </a:lnSpc>
+              <a:spcBef>
+                <a:spcPts val="0"/>
+              </a:spcBef>
+              <a:spcAft>
+                <a:spcPts val="200"/>
+              </a:spcAft>
+            </a:pPr>
+            <a:r>
+              <a:rPr sz="950" b="0" i="0">
+                <a:solidFill>
+                  <a:srgbClr val="22252B"/>
+                </a:solidFill>
+                <a:latin typeface="Noto Sans CJK KR"/>
+              </a:rPr>
+              <a:t>모델이 성능을 올려 줄 합성 데이터(dream)를 스스로 생성하는 self-modification. 5단계:</a:t>
+            </a:r>
+          </a:p>
+          <a:p>
+            <a:pPr algn="l">
+              <a:lnSpc>
+                <a:spcPct val="118000"/>
+              </a:lnSpc>
+              <a:spcBef>
+                <a:spcPts val="0"/>
+              </a:spcBef>
+              <a:spcAft>
+                <a:spcPts val="200"/>
+              </a:spcAft>
+            </a:pPr>
+            <a:r>
+              <a:rPr sz="950" b="0" i="0">
+                <a:solidFill>
+                  <a:srgbClr val="22252B"/>
+                </a:solidFill>
+                <a:latin typeface="Noto Sans CJK KR"/>
+              </a:rPr>
+              <a:t>생성(모든 MoE router가 random expert 추가로 켬=novelty 주입) → 선별(gradient importance) → 적용(격리 복사본 LoRA fine-tune) → 보상(실제 task 개선되면 1) → 강화(ReST^EM, value network 없는 EM RL).</a:t>
+            </a:r>
+          </a:p>
+          <a:p>
+            <a:pPr algn="l">
+              <a:lnSpc>
+                <a:spcPct val="118000"/>
+              </a:lnSpc>
+              <a:spcBef>
+                <a:spcPts val="0"/>
+              </a:spcBef>
+              <a:spcAft>
+                <a:spcPts val="200"/>
+              </a:spcAft>
+            </a:pPr>
+            <a:r>
+              <a:rPr sz="950" b="1" i="0">
+                <a:solidFill>
+                  <a:srgbClr val="C9A227"/>
+                </a:solidFill>
+                <a:latin typeface="Noto Sans CJK KR"/>
+              </a:rPr>
+              <a:t>consolidation 먼저·dreaming 나중: 취약 지식을 새 expert에 격리한 뒤 반복 self-training.</a:t>
+            </a:r>
+          </a:p>
+        </p:txBody>
+      </p:sp>
+      <p:sp>
+        <p:nvSpPr>
+          <p:cNvPr id="9" name="Rounded Rectangle 8"/>
           <p:cNvSpPr/>
           <p:nvPr/>
         </p:nvSpPr>
         <p:spPr>
           <a:xfrm>
-            <a:off x="502920" y="4800600"/>
-            <a:ext cx="11155680" cy="914400"/>
+            <a:off x="5852160" y="3200400"/>
+            <a:ext cx="5806440" cy="1463040"/>
+          </a:xfrm>
+          <a:prstGeom prst="roundRect">
+            <a:avLst/>
+          </a:prstGeom>
+          <a:solidFill>
+            <a:srgbClr val="F6DDDD"/>
+          </a:solidFill>
+          <a:ln w="12700">
+            <a:solidFill>
+              <a:srgbClr val="C1121F"/>
+            </a:solidFill>
+          </a:ln>
+          <a:effectLst/>
+        </p:spPr>
+        <p:style>
+          <a:lnRef idx="1">
+            <a:schemeClr val="accent1"/>
+          </a:lnRef>
+          <a:fillRef idx="3">
+            <a:schemeClr val="accent1"/>
+          </a:fillRef>
+          <a:effectRef idx="2">
+            <a:schemeClr val="accent1"/>
+          </a:effectRef>
+          <a:fontRef idx="minor">
+            <a:schemeClr val="lt1"/>
+          </a:fontRef>
+        </p:style>
+        <p:txBody>
+          <a:bodyPr rtlCol="0" anchor="ctr" wrap="square" lIns="76200" rIns="76200" tIns="38100" bIns="38100"/>
+          <a:lstStyle/>
+          <a:p>
+            <a:pPr algn="l">
+              <a:lnSpc>
+                <a:spcPct val="118000"/>
+              </a:lnSpc>
+              <a:spcBef>
+                <a:spcPts val="0"/>
+              </a:spcBef>
+              <a:spcAft>
+                <a:spcPts val="300"/>
+              </a:spcAft>
+            </a:pPr>
+            <a:r>
+              <a:rPr sz="1250" b="1" i="0">
+                <a:solidFill>
+                  <a:srgbClr val="C1121F"/>
+                </a:solidFill>
+                <a:latin typeface="Noto Sans CJK KR"/>
+              </a:rPr>
+              <a:t>세 번째 regime + 정직한 이음새</a:t>
+            </a:r>
+          </a:p>
+          <a:p>
+            <a:pPr algn="l">
+              <a:lnSpc>
+                <a:spcPct val="118000"/>
+              </a:lnSpc>
+              <a:spcBef>
+                <a:spcPts val="0"/>
+              </a:spcBef>
+              <a:spcAft>
+                <a:spcPts val="200"/>
+              </a:spcAft>
+            </a:pPr>
+            <a:r>
+              <a:rPr sz="950" b="0" i="0">
+                <a:solidFill>
+                  <a:srgbClr val="22252B"/>
+                </a:solidFill>
+                <a:latin typeface="Noto Sans CJK KR"/>
+              </a:rPr>
+              <a:t>regime 1 pre-training · 2 wake(CMS 갱신) · 3 sleep(배포 중 주기적 '진짜 gradient 훈련', 신세계).</a:t>
+            </a:r>
+          </a:p>
+          <a:p>
+            <a:pPr algn="l">
+              <a:lnSpc>
+                <a:spcPct val="118000"/>
+              </a:lnSpc>
+              <a:spcBef>
+                <a:spcPts val="0"/>
+              </a:spcBef>
+              <a:spcAft>
+                <a:spcPts val="200"/>
+              </a:spcAft>
+            </a:pPr>
+            <a:r>
+              <a:rPr sz="950" b="1" i="0">
+                <a:solidFill>
+                  <a:srgbClr val="C1121F"/>
+                </a:solidFill>
+                <a:latin typeface="Noto Sans CJK KR"/>
+              </a:rPr>
+              <a:t>caveat: sleep 기제(혼합계수·reward model·ReST^EM)는 pre-training에서 end-to-end meta-learn 안 됨 — 이 라인 최초로 핵심이 미분되는 inner loop가 아니라 알고리즘 wrapper. 실험 대부분이 Llama/Qwen에 graft.</a:t>
+            </a:r>
+          </a:p>
+        </p:txBody>
+      </p:sp>
+      <p:sp>
+        <p:nvSpPr>
+          <p:cNvPr id="10" name="Rounded Rectangle 9"/>
+          <p:cNvSpPr/>
+          <p:nvPr/>
+        </p:nvSpPr>
+        <p:spPr>
+          <a:xfrm>
+            <a:off x="502920" y="4754880"/>
+            <a:ext cx="11183112" cy="658368"/>
           </a:xfrm>
           <a:prstGeom prst="roundRect">
             <a:avLst/>
@@ -45629,39 +46028,39 @@
                 <a:spcPts val="0"/>
               </a:spcBef>
               <a:spcAft>
+                <a:spcPts val="300"/>
+              </a:spcAft>
+            </a:pPr>
+            <a:r>
+              <a:rPr sz="1250" b="1" i="0">
+                <a:solidFill>
+                  <a:srgbClr val="8A8F98"/>
+                </a:solidFill>
+                <a:latin typeface="Noto Sans CJK KR"/>
+              </a:rPr>
+              <a:t>왜 이 순서(consolidate→dream)인가</a:t>
+            </a:r>
+          </a:p>
+          <a:p>
+            <a:pPr algn="l">
+              <a:lnSpc>
+                <a:spcPct val="118000"/>
+              </a:lnSpc>
+              <a:spcBef>
+                <a:spcPts val="0"/>
+              </a:spcBef>
+              <a:spcAft>
                 <a:spcPts val="200"/>
               </a:spcAft>
             </a:pPr>
             <a:r>
-              <a:rPr sz="1250" b="1" i="0">
-                <a:solidFill>
-                  <a:srgbClr val="22252B"/>
-                </a:solidFill>
-                <a:latin typeface="Noto Sans CJK KR"/>
-              </a:rPr>
-              <a:t>읽는 법</a:t>
-            </a:r>
-          </a:p>
-          <a:p>
-            <a:pPr algn="l">
-              <a:lnSpc>
-                <a:spcPct val="118000"/>
-              </a:lnSpc>
-              <a:spcBef>
-                <a:spcPts val="0"/>
-              </a:spcBef>
-              <a:spcAft>
-                <a:spcPts val="300"/>
-              </a:spcAft>
-            </a:pPr>
-            <a:r>
-              <a:rPr sz="1200" b="0" i="0">
-                <a:solidFill>
-                  <a:srgbClr val="22252B"/>
-                </a:solidFill>
-                <a:latin typeface="Noto Sans CJK KR"/>
-              </a:rPr>
-              <a:t>8칩 중 7개가 memory-bound(대역폭이 결정). 예외는 WSE-3(Cerebras) — 거대한 on-chip SRAM으로 상태를 상주시켜 compute 쪽으로 넘어가는 'knee'가 생긴다. 각 칩 spec은 HAT hw twin으로 검증(die/PE 구조까지).</a:t>
+              <a:rPr sz="1150" b="0" i="0">
+                <a:solidFill>
+                  <a:srgbClr val="22252B"/>
+                </a:solidFill>
+                <a:latin typeface="Noto Sans CJK KR"/>
+              </a:rPr>
+              <a:t>갓 배운 취약한 지식을 새 expert에 격리해 둔 다음 dreaming의 반복 self-training을 돌려야, 그 지식이 덜 잊힌다.</a:t>
             </a:r>
           </a:p>
         </p:txBody>
@@ -45699,11 +46098,11 @@
             <a:avLst/>
           </a:prstGeom>
           <a:solidFill>
-            <a:srgbClr val="C9A227"/>
+            <a:srgbClr val="2A9D8F"/>
           </a:solidFill>
           <a:ln w="12700">
             <a:solidFill>
-              <a:srgbClr val="C9A227"/>
+              <a:srgbClr val="2A9D8F"/>
             </a:solidFill>
           </a:ln>
           <a:effectLst/>
@@ -45785,11 +46184,11 @@
             <a:r>
               <a:rPr sz="1350" b="1" i="0">
                 <a:solidFill>
-                  <a:srgbClr val="C9A227"/>
-                </a:solidFill>
-                <a:latin typeface="Noto Sans CJK KR"/>
-              </a:rPr>
-              <a:t>C3 · HOPE block roofline (H100 트윈)</a:t>
+                  <a:srgbClr val="2A9D8F"/>
+                </a:solidFill>
+                <a:latin typeface="Noto Sans CJK KR"/>
+              </a:rPr>
+              <a:t>B6 · Sleep — 결과 &amp; 6편의 완성형</a:t>
             </a:r>
           </a:p>
         </p:txBody>
@@ -45834,7 +46233,7 @@
                 </a:solidFill>
                 <a:latin typeface="Noto Sans CJK KR"/>
               </a:rPr>
-              <a:t>1개 HOPE block을 실제 수치로 — 어디가 병목인가</a:t>
+              <a:t>방향은 일관 · 서빙 형태가 바뀐다 · 단 실증은 1.3B에 멈춤</a:t>
             </a:r>
           </a:p>
         </p:txBody>
@@ -45847,8 +46246,8 @@
         </p:nvSpPr>
         <p:spPr>
           <a:xfrm>
-            <a:off x="643845" y="1335024"/>
-            <a:ext cx="5250269" cy="2889504"/>
+            <a:off x="466344" y="2124253"/>
+            <a:ext cx="5285232" cy="1237892"/>
           </a:xfrm>
           <a:prstGeom prst="rect">
             <a:avLst/>
@@ -45885,7 +46284,7 @@
       </p:sp>
       <p:pic>
         <p:nvPicPr>
-          <p:cNvPr id="6" name="Picture 5" descr="fig-hope-dag.png"/>
+          <p:cNvPr id="6" name="Picture 5" descr="fig3.png"/>
           <p:cNvPicPr>
             <a:picLocks noChangeAspect="1"/>
           </p:cNvPicPr>
@@ -45899,8 +46298,8 @@
         </p:blipFill>
         <p:spPr>
           <a:xfrm>
-            <a:off x="680421" y="1371600"/>
-            <a:ext cx="5177117" cy="2816352"/>
+            <a:off x="502920" y="2160829"/>
+            <a:ext cx="5212080" cy="1164740"/>
           </a:xfrm>
           <a:prstGeom prst="rect">
             <a:avLst/>
@@ -45915,8 +46314,8 @@
         </p:nvSpPr>
         <p:spPr>
           <a:xfrm>
-            <a:off x="502920" y="4206240"/>
-            <a:ext cx="5532120" cy="365760"/>
+            <a:off x="502920" y="4151376"/>
+            <a:ext cx="5212080" cy="420624"/>
           </a:xfrm>
           <a:prstGeom prst="rect">
             <a:avLst/>
@@ -45937,7 +46336,7 @@
                 <a:spcPts val="0"/>
               </a:spcBef>
               <a:spcAft>
-                <a:spcPts val="0"/>
+                <a:spcPts val="100"/>
               </a:spcAft>
             </a:pPr>
             <a:r>
@@ -45947,29 +46346,53 @@
                 </a:solidFill>
                 <a:latin typeface="Noto Sans CJK KR"/>
               </a:rPr>
-              <a:t>1 HOPE block(self-mod Titans→CMS)의 전 연산 DAG (B=1, chunk C, d=2048)</a:t>
-            </a:r>
-          </a:p>
-        </p:txBody>
-      </p:sp>
-      <p:sp>
-        <p:nvSpPr>
-          <p:cNvPr id="8" name="Rectangle 7"/>
+              <a:t>Figure 3 — class-incremental(CLINC 등): consolidation 얹은 Hope가 ICL·EWC·순정 Hope 상회</a:t>
+            </a:r>
+          </a:p>
+          <a:p>
+            <a:pPr algn="ctr">
+              <a:lnSpc>
+                <a:spcPct val="120000"/>
+              </a:lnSpc>
+              <a:spcBef>
+                <a:spcPts val="0"/>
+              </a:spcBef>
+              <a:spcAft>
+                <a:spcPts val="100"/>
+              </a:spcAft>
+            </a:pPr>
+            <a:r>
+              <a:rPr sz="850" b="0" i="1">
+                <a:solidFill>
+                  <a:srgbClr val="5A5F68"/>
+                </a:solidFill>
+                <a:latin typeface="Noto Sans CJK KR"/>
+              </a:rPr>
+              <a:t>출처: 2606.03979 Fig.3</a:t>
+            </a:r>
+          </a:p>
+        </p:txBody>
+      </p:sp>
+      <p:sp>
+        <p:nvSpPr>
+          <p:cNvPr id="8" name="Rounded Rectangle 7"/>
           <p:cNvSpPr/>
           <p:nvPr/>
         </p:nvSpPr>
         <p:spPr>
           <a:xfrm>
-            <a:off x="6227064" y="1901586"/>
-            <a:ext cx="5468112" cy="1756379"/>
-          </a:xfrm>
-          <a:prstGeom prst="rect">
-            <a:avLst/>
-          </a:prstGeom>
-          <a:noFill/>
-          <a:ln w="9525">
+            <a:off x="5852160" y="1371600"/>
+            <a:ext cx="5806440" cy="1508760"/>
+          </a:xfrm>
+          <a:prstGeom prst="roundRect">
+            <a:avLst/>
+          </a:prstGeom>
+          <a:solidFill>
+            <a:srgbClr val="DAF0ED"/>
+          </a:solidFill>
+          <a:ln w="12700">
             <a:solidFill>
-              <a:srgbClr val="8A8F98"/>
+              <a:srgbClr val="2A9D8F"/>
             </a:solidFill>
           </a:ln>
           <a:effectLst/>
@@ -45989,102 +46412,96 @@
           </a:fontRef>
         </p:style>
         <p:txBody>
-          <a:bodyPr rtlCol="0" anchor="ctr"/>
-          <a:lstStyle/>
-          <a:p>
-            <a:pPr algn="ctr"/>
-          </a:p>
-        </p:txBody>
-      </p:sp>
-      <p:pic>
-        <p:nvPicPr>
-          <p:cNvPr id="9" name="Picture 8" descr="fig-hope-roofline.png"/>
-          <p:cNvPicPr>
-            <a:picLocks noChangeAspect="1"/>
-          </p:cNvPicPr>
-          <p:nvPr/>
-        </p:nvPicPr>
-        <p:blipFill>
-          <a:blip r:embed="rId3"/>
-          <a:stretch>
-            <a:fillRect/>
-          </a:stretch>
-        </p:blipFill>
-        <p:spPr>
-          <a:xfrm>
-            <a:off x="6263640" y="1938162"/>
-            <a:ext cx="5394960" cy="1683227"/>
-          </a:xfrm>
-          <a:prstGeom prst="rect">
-            <a:avLst/>
-          </a:prstGeom>
-        </p:spPr>
-      </p:pic>
-      <p:sp>
-        <p:nvSpPr>
-          <p:cNvPr id="10" name="TextBox 9"/>
-          <p:cNvSpPr txBox="1"/>
-          <p:nvPr/>
-        </p:nvSpPr>
-        <p:spPr>
-          <a:xfrm>
-            <a:off x="6263640" y="4206240"/>
-            <a:ext cx="5394960" cy="365760"/>
-          </a:xfrm>
-          <a:prstGeom prst="rect">
-            <a:avLst/>
-          </a:prstGeom>
-          <a:noFill/>
-        </p:spPr>
-        <p:txBody>
-          <a:bodyPr wrap="square" anchor="t" lIns="38100" rIns="38100" tIns="25400" bIns="25400">
-            <a:spAutoFit/>
-          </a:bodyPr>
-          <a:lstStyle/>
-          <a:p>
-            <a:pPr algn="ctr">
-              <a:lnSpc>
-                <a:spcPct val="120000"/>
-              </a:lnSpc>
-              <a:spcBef>
-                <a:spcPts val="0"/>
-              </a:spcBef>
-              <a:spcAft>
-                <a:spcPts val="0"/>
-              </a:spcAft>
-            </a:pPr>
-            <a:r>
-              <a:rPr sz="1050" b="0" i="0">
-                <a:solidFill>
-                  <a:srgbClr val="22252B"/>
-                </a:solidFill>
-                <a:latin typeface="Noto Sans CJK KR"/>
-              </a:rPr>
-              <a:t>roofline·op별 시간·PIM 비교 (BW 3.35TB/s, peak 0.99PF, ridge 295)</a:t>
-            </a:r>
-          </a:p>
-        </p:txBody>
-      </p:sp>
-      <p:sp>
-        <p:nvSpPr>
-          <p:cNvPr id="11" name="Rounded Rectangle 10"/>
+          <a:bodyPr rtlCol="0" anchor="ctr" wrap="square" lIns="76200" rIns="76200" tIns="38100" bIns="38100"/>
+          <a:lstStyle/>
+          <a:p>
+            <a:pPr algn="l">
+              <a:lnSpc>
+                <a:spcPct val="118000"/>
+              </a:lnSpc>
+              <a:spcBef>
+                <a:spcPts val="0"/>
+              </a:spcBef>
+              <a:spcAft>
+                <a:spcPts val="300"/>
+              </a:spcAft>
+            </a:pPr>
+            <a:r>
+              <a:rPr sz="1250" b="1" i="0">
+                <a:solidFill>
+                  <a:srgbClr val="2A9D8F"/>
+                </a:solidFill>
+                <a:latin typeface="Noto Sans CJK KR"/>
+              </a:rPr>
+              <a:t>결과 (방향·비율)</a:t>
+            </a:r>
+          </a:p>
+          <a:p>
+            <a:pPr algn="l">
+              <a:lnSpc>
+                <a:spcPct val="118000"/>
+              </a:lnSpc>
+              <a:spcBef>
+                <a:spcPts val="0"/>
+              </a:spcBef>
+              <a:spcAft>
+                <a:spcPts val="200"/>
+              </a:spcAft>
+            </a:pPr>
+            <a:r>
+              <a:rPr sz="950" b="0" i="0">
+                <a:solidFill>
+                  <a:srgbClr val="22252B"/>
+                </a:solidFill>
+                <a:latin typeface="Noto Sans CJK KR"/>
+              </a:rPr>
+              <a:t>sleep 단계 늘릴수록 단조 개선. SQuAD SEAL 프로토콜에서 Sleep&gt;SEAL(Dreaming 제거하면 폭락). few-shot ARC: Llama-1B ICL 0%→SEAL 72.5%→Sleep 80%. 수학 Qwen3-8B AIME-24 Sleep 79.2 &gt; GRPO 76.4.</a:t>
+            </a:r>
+          </a:p>
+          <a:p>
+            <a:pPr algn="l">
+              <a:lnSpc>
+                <a:spcPct val="118000"/>
+              </a:lnSpc>
+              <a:spcBef>
+                <a:spcPts val="0"/>
+              </a:spcBef>
+              <a:spcAft>
+                <a:spcPts val="200"/>
+              </a:spcAft>
+            </a:pPr>
+            <a:r>
+              <a:rPr sz="950" b="1" i="0">
+                <a:solidFill>
+                  <a:srgbClr val="C9A227"/>
+                </a:solidFill>
+                <a:latin typeface="Noto Sans CJK KR"/>
+              </a:rPr>
+              <a:t>효율: step당 SFT의 4배지만, 목표 성능 wall-clock은 SFT가 3.6~4.8배 더 걸림 → 사는 건 싼 step이 아니라 step·sample 효율.</a:t>
+            </a:r>
+          </a:p>
+        </p:txBody>
+      </p:sp>
+      <p:sp>
+        <p:nvSpPr>
+          <p:cNvPr id="9" name="Rounded Rectangle 8"/>
           <p:cNvSpPr/>
           <p:nvPr/>
         </p:nvSpPr>
         <p:spPr>
           <a:xfrm>
-            <a:off x="502920" y="4709160"/>
-            <a:ext cx="11155680" cy="960120"/>
+            <a:off x="5852160" y="2971800"/>
+            <a:ext cx="5806440" cy="960120"/>
           </a:xfrm>
           <a:prstGeom prst="roundRect">
             <a:avLst/>
           </a:prstGeom>
           <a:solidFill>
-            <a:srgbClr val="F6DDDD"/>
+            <a:srgbClr val="DBE7F3"/>
           </a:solidFill>
           <a:ln w="12700">
             <a:solidFill>
-              <a:srgbClr val="C1121F"/>
+              <a:srgbClr val="2A6F97"/>
             </a:solidFill>
           </a:ln>
           <a:effectLst/>
@@ -46115,39 +46532,126 @@
                 <a:spcPts val="0"/>
               </a:spcBef>
               <a:spcAft>
+                <a:spcPts val="300"/>
+              </a:spcAft>
+            </a:pPr>
+            <a:r>
+              <a:rPr sz="1250" b="1" i="0">
+                <a:solidFill>
+                  <a:srgbClr val="2A6F97"/>
+                </a:solidFill>
+                <a:latin typeface="Noto Sans CJK KR"/>
+              </a:rPr>
+              <a:t>Systems 함의 (Part C 예고)</a:t>
+            </a:r>
+          </a:p>
+          <a:p>
+            <a:pPr algn="l">
+              <a:lnSpc>
+                <a:spcPct val="118000"/>
+              </a:lnSpc>
+              <a:spcBef>
+                <a:spcPts val="0"/>
+              </a:spcBef>
+              <a:spcAft>
                 <a:spcPts val="200"/>
               </a:spcAft>
             </a:pPr>
             <a:r>
+              <a:rPr sz="950" b="0" i="0">
+                <a:solidFill>
+                  <a:srgbClr val="22252B"/>
+                </a:solidFill>
+                <a:latin typeface="Noto Sans CJK KR"/>
+              </a:rPr>
+              <a:t>inference가 forward-only가 아님(RMW 트래픽=cost model 새 항). session state = KV cache가 아니라 per-user weight-delta(=multi-tenant LoRA 서빙). sleep = 서빙에 붙는 스케줄 훈련 job, 매번 새 버전.</a:t>
+            </a:r>
+          </a:p>
+        </p:txBody>
+      </p:sp>
+      <p:sp>
+        <p:nvSpPr>
+          <p:cNvPr id="10" name="Rounded Rectangle 9"/>
+          <p:cNvSpPr/>
+          <p:nvPr/>
+        </p:nvSpPr>
+        <p:spPr>
+          <a:xfrm>
+            <a:off x="502920" y="4709160"/>
+            <a:ext cx="11183112" cy="914400"/>
+          </a:xfrm>
+          <a:prstGeom prst="roundRect">
+            <a:avLst/>
+          </a:prstGeom>
+          <a:solidFill>
+            <a:srgbClr val="DAF0ED"/>
+          </a:solidFill>
+          <a:ln w="12700">
+            <a:solidFill>
+              <a:srgbClr val="2A9D8F"/>
+            </a:solidFill>
+          </a:ln>
+          <a:effectLst/>
+        </p:spPr>
+        <p:style>
+          <a:lnRef idx="1">
+            <a:schemeClr val="accent1"/>
+          </a:lnRef>
+          <a:fillRef idx="3">
+            <a:schemeClr val="accent1"/>
+          </a:fillRef>
+          <a:effectRef idx="2">
+            <a:schemeClr val="accent1"/>
+          </a:effectRef>
+          <a:fontRef idx="minor">
+            <a:schemeClr val="lt1"/>
+          </a:fontRef>
+        </p:style>
+        <p:txBody>
+          <a:bodyPr rtlCol="0" anchor="ctr" wrap="square" lIns="76200" rIns="76200" tIns="38100" bIns="38100"/>
+          <a:lstStyle/>
+          <a:p>
+            <a:pPr algn="l">
+              <a:lnSpc>
+                <a:spcPct val="118000"/>
+              </a:lnSpc>
+              <a:spcBef>
+                <a:spcPts val="0"/>
+              </a:spcBef>
+              <a:spcAft>
+                <a:spcPts val="300"/>
+              </a:spcAft>
+            </a:pPr>
+            <a:r>
               <a:rPr sz="1250" b="1" i="0">
                 <a:solidFill>
-                  <a:srgbClr val="C1121F"/>
-                </a:solidFill>
-                <a:latin typeface="Noto Sans CJK KR"/>
-              </a:rPr>
-              <a:t>병목</a:t>
-            </a:r>
-          </a:p>
-          <a:p>
-            <a:pPr algn="l">
-              <a:lnSpc>
-                <a:spcPct val="118000"/>
-              </a:lnSpc>
-              <a:spcBef>
-                <a:spcPts val="0"/>
-              </a:spcBef>
-              <a:spcAft>
-                <a:spcPts val="300"/>
-              </a:spcAft>
-            </a:pPr>
-            <a:r>
-              <a:rPr sz="1200" b="0" i="0">
-                <a:solidFill>
-                  <a:srgbClr val="22252B"/>
-                </a:solidFill>
-                <a:latin typeface="Noto Sans CJK KR"/>
-              </a:rPr>
-              <a:t>C=1 디코드는 roofline 왼쪽(memory-bound). op별로 보면 CMS/DGD-apply의 state read-modify-write가 지배적. state(≈134MB) + weights를 매 토큰 HBM(3.35TB/s)에서 읽어야 해 block당 ~203µs(ideal 하한).</a:t>
+                  <a:srgbClr val="2A9D8F"/>
+                </a:solidFill>
+                <a:latin typeface="Noto Sans CJK KR"/>
+              </a:rPr>
+              <a:t>6편의 완성형 (개념적)</a:t>
+            </a:r>
+          </a:p>
+          <a:p>
+            <a:pPr algn="l">
+              <a:lnSpc>
+                <a:spcPct val="118000"/>
+              </a:lnSpc>
+              <a:spcBef>
+                <a:spcPts val="0"/>
+              </a:spcBef>
+              <a:spcAft>
+                <a:spcPts val="200"/>
+              </a:spcAft>
+            </a:pPr>
+            <a:r>
+              <a:rPr sz="1150" b="0" i="0">
+                <a:solidFill>
+                  <a:srgbClr val="22252B"/>
+                </a:solidFill>
+                <a:latin typeface="Noto Sans CJK KR"/>
+              </a:rPr>
+              <a:t>state는 모든 시간규모에서 weight · 모든 블록은 같은 associative memory · inner optimizer는 아키텍처와 대등한 설계면 · 훈련은 어디서나 chunk-anchored · lifecycle은 wake/sleep. Titans가 연 'test-time 학습'이 여섯 편째에 train/test 경계 자체를 지운다. (단 from-scratch 실증은 아직 1.3B.)</a:t>
             </a:r>
           </a:p>
         </p:txBody>
@@ -46179,7 +46683,7 @@
         <p:spPr>
           <a:xfrm>
             <a:off x="0" y="0"/>
-            <a:ext cx="12191695" cy="54864"/>
+            <a:ext cx="12191695" cy="6858000"/>
           </a:xfrm>
           <a:prstGeom prst="rect">
             <a:avLst/>
@@ -46243,8 +46747,8 @@
         </p:nvSpPr>
         <p:spPr>
           <a:xfrm>
-            <a:off x="502920" y="146304"/>
-            <a:ext cx="11185855" cy="320040"/>
+            <a:off x="822960" y="2468880"/>
+            <a:ext cx="10545775" cy="914400"/>
           </a:xfrm>
           <a:prstGeom prst="rect">
             <a:avLst/>
@@ -46265,17 +46769,17 @@
                 <a:spcPts val="0"/>
               </a:spcBef>
               <a:spcAft>
-                <a:spcPts val="0"/>
-              </a:spcAft>
-            </a:pPr>
-            <a:r>
-              <a:rPr sz="1350" b="1" i="0">
-                <a:solidFill>
-                  <a:srgbClr val="C9A227"/>
-                </a:solidFill>
-                <a:latin typeface="Noto Sans CJK KR"/>
-              </a:rPr>
-              <a:t>C4 · 메모리 기술 — zHBM · HBM-PIM · SRAM</a:t>
+                <a:spcPts val="400"/>
+              </a:spcAft>
+            </a:pPr>
+            <a:r>
+              <a:rPr sz="2000" b="1" i="0">
+                <a:solidFill>
+                  <a:srgbClr val="FFFFFF"/>
+                </a:solidFill>
+                <a:latin typeface="Noto Sans CJK KR"/>
+              </a:rPr>
+              <a:t>PART C</a:t>
             </a:r>
           </a:p>
         </p:txBody>
@@ -46288,8 +46792,8 @@
         </p:nvSpPr>
         <p:spPr>
           <a:xfrm>
-            <a:off x="502920" y="457200"/>
-            <a:ext cx="11185855" cy="566928"/>
+            <a:off x="822960" y="3108960"/>
+            <a:ext cx="10545775" cy="1463040"/>
           </a:xfrm>
           <a:prstGeom prst="rect">
             <a:avLst/>
@@ -46310,330 +46814,17 @@
                 <a:spcPts val="0"/>
               </a:spcBef>
               <a:spcAft>
-                <a:spcPts val="0"/>
-              </a:spcAft>
-            </a:pPr>
-            <a:r>
-              <a:rPr sz="2400" b="1" i="0">
-                <a:solidFill>
-                  <a:srgbClr val="22252B"/>
-                </a:solidFill>
-                <a:latin typeface="Noto Sans CJK KR"/>
-              </a:rPr>
-              <a:t>memory-bound라면 답은 '대역폭'과 '상주'</a:t>
-            </a:r>
-          </a:p>
-        </p:txBody>
-      </p:sp>
-      <p:sp>
-        <p:nvSpPr>
-          <p:cNvPr id="5" name="Rectangle 4"/>
-          <p:cNvSpPr/>
-          <p:nvPr/>
-        </p:nvSpPr>
-        <p:spPr>
-          <a:xfrm>
-            <a:off x="466344" y="1778706"/>
-            <a:ext cx="5605272" cy="2093578"/>
-          </a:xfrm>
-          <a:prstGeom prst="rect">
-            <a:avLst/>
-          </a:prstGeom>
-          <a:noFill/>
-          <a:ln w="9525">
-            <a:solidFill>
-              <a:srgbClr val="8A8F98"/>
-            </a:solidFill>
-          </a:ln>
-          <a:effectLst/>
-        </p:spPr>
-        <p:style>
-          <a:lnRef idx="1">
-            <a:schemeClr val="accent1"/>
-          </a:lnRef>
-          <a:fillRef idx="3">
-            <a:schemeClr val="accent1"/>
-          </a:fillRef>
-          <a:effectRef idx="2">
-            <a:schemeClr val="accent1"/>
-          </a:effectRef>
-          <a:fontRef idx="minor">
-            <a:schemeClr val="lt1"/>
-          </a:fontRef>
-        </p:style>
-        <p:txBody>
-          <a:bodyPr rtlCol="0" anchor="ctr"/>
-          <a:lstStyle/>
-          <a:p>
-            <a:pPr algn="ctr"/>
-          </a:p>
-        </p:txBody>
-      </p:sp>
-      <p:pic>
-        <p:nvPicPr>
-          <p:cNvPr id="6" name="Picture 5" descr="fig-zhbm-pim.png"/>
-          <p:cNvPicPr>
-            <a:picLocks noChangeAspect="1"/>
-          </p:cNvPicPr>
-          <p:nvPr/>
-        </p:nvPicPr>
-        <p:blipFill>
-          <a:blip r:embed="rId2"/>
-          <a:stretch>
-            <a:fillRect/>
-          </a:stretch>
-        </p:blipFill>
-        <p:spPr>
-          <a:xfrm>
-            <a:off x="502920" y="1815282"/>
-            <a:ext cx="5532120" cy="2020426"/>
-          </a:xfrm>
-          <a:prstGeom prst="rect">
-            <a:avLst/>
-          </a:prstGeom>
-        </p:spPr>
-      </p:pic>
-      <p:sp>
-        <p:nvSpPr>
-          <p:cNvPr id="7" name="TextBox 6"/>
-          <p:cNvSpPr txBox="1"/>
-          <p:nvPr/>
-        </p:nvSpPr>
-        <p:spPr>
-          <a:xfrm>
-            <a:off x="502920" y="4297679"/>
-            <a:ext cx="5532120" cy="365760"/>
-          </a:xfrm>
-          <a:prstGeom prst="rect">
-            <a:avLst/>
-          </a:prstGeom>
-          <a:noFill/>
-        </p:spPr>
-        <p:txBody>
-          <a:bodyPr wrap="square" anchor="t" lIns="38100" rIns="38100" tIns="25400" bIns="25400">
-            <a:spAutoFit/>
-          </a:bodyPr>
-          <a:lstStyle/>
-          <a:p>
-            <a:pPr algn="ctr">
-              <a:lnSpc>
-                <a:spcPct val="120000"/>
-              </a:lnSpc>
-              <a:spcBef>
-                <a:spcPts val="0"/>
-              </a:spcBef>
-              <a:spcAft>
-                <a:spcPts val="0"/>
-              </a:spcAft>
-            </a:pPr>
-            <a:r>
-              <a:rPr sz="1050" b="0" i="0">
-                <a:solidFill>
-                  <a:srgbClr val="22252B"/>
-                </a:solidFill>
-                <a:latin typeface="Noto Sans CJK KR"/>
-              </a:rPr>
-              <a:t>HBM/zHBM/HBM-PIM/zHBM-PIM decode 비용 + zHBM 내부 연산 추가 면적</a:t>
-            </a:r>
-          </a:p>
-        </p:txBody>
-      </p:sp>
-      <p:sp>
-        <p:nvSpPr>
-          <p:cNvPr id="8" name="Rectangle 7"/>
-          <p:cNvSpPr/>
-          <p:nvPr/>
-        </p:nvSpPr>
-        <p:spPr>
-          <a:xfrm>
-            <a:off x="6293684" y="1335024"/>
-            <a:ext cx="5334870" cy="2980944"/>
-          </a:xfrm>
-          <a:prstGeom prst="rect">
-            <a:avLst/>
-          </a:prstGeom>
-          <a:noFill/>
-          <a:ln w="9525">
-            <a:solidFill>
-              <a:srgbClr val="8A8F98"/>
-            </a:solidFill>
-          </a:ln>
-          <a:effectLst/>
-        </p:spPr>
-        <p:style>
-          <a:lnRef idx="1">
-            <a:schemeClr val="accent1"/>
-          </a:lnRef>
-          <a:fillRef idx="3">
-            <a:schemeClr val="accent1"/>
-          </a:fillRef>
-          <a:effectRef idx="2">
-            <a:schemeClr val="accent1"/>
-          </a:effectRef>
-          <a:fontRef idx="minor">
-            <a:schemeClr val="lt1"/>
-          </a:fontRef>
-        </p:style>
-        <p:txBody>
-          <a:bodyPr rtlCol="0" anchor="ctr"/>
-          <a:lstStyle/>
-          <a:p>
-            <a:pPr algn="ctr"/>
-          </a:p>
-        </p:txBody>
-      </p:sp>
-      <p:pic>
-        <p:nvPicPr>
-          <p:cNvPr id="9" name="Picture 8" descr="fig-sram-scaling.png"/>
-          <p:cNvPicPr>
-            <a:picLocks noChangeAspect="1"/>
-          </p:cNvPicPr>
-          <p:nvPr/>
-        </p:nvPicPr>
-        <p:blipFill>
-          <a:blip r:embed="rId3"/>
-          <a:stretch>
-            <a:fillRect/>
-          </a:stretch>
-        </p:blipFill>
-        <p:spPr>
-          <a:xfrm>
-            <a:off x="6330260" y="1371600"/>
-            <a:ext cx="5261718" cy="2907792"/>
-          </a:xfrm>
-          <a:prstGeom prst="rect">
-            <a:avLst/>
-          </a:prstGeom>
-        </p:spPr>
-      </p:pic>
-      <p:sp>
-        <p:nvSpPr>
-          <p:cNvPr id="10" name="TextBox 9"/>
-          <p:cNvSpPr txBox="1"/>
-          <p:nvPr/>
-        </p:nvSpPr>
-        <p:spPr>
-          <a:xfrm>
-            <a:off x="6263640" y="4297679"/>
-            <a:ext cx="5394960" cy="365760"/>
-          </a:xfrm>
-          <a:prstGeom prst="rect">
-            <a:avLst/>
-          </a:prstGeom>
-          <a:noFill/>
-        </p:spPr>
-        <p:txBody>
-          <a:bodyPr wrap="square" anchor="t" lIns="38100" rIns="38100" tIns="25400" bIns="25400">
-            <a:spAutoFit/>
-          </a:bodyPr>
-          <a:lstStyle/>
-          <a:p>
-            <a:pPr algn="ctr">
-              <a:lnSpc>
-                <a:spcPct val="120000"/>
-              </a:lnSpc>
-              <a:spcBef>
-                <a:spcPts val="0"/>
-              </a:spcBef>
-              <a:spcAft>
-                <a:spcPts val="0"/>
-              </a:spcAft>
-            </a:pPr>
-            <a:r>
-              <a:rPr sz="1050" b="0" i="0">
-                <a:solidFill>
-                  <a:srgbClr val="22252B"/>
-                </a:solidFill>
-                <a:latin typeface="Noto Sans CJK KR"/>
-              </a:rPr>
-              <a:t>on-chip SRAM 1x→10x: state가 상주하는 순간(5x~) HBM 대신 SRAM</a:t>
-            </a:r>
-          </a:p>
-        </p:txBody>
-      </p:sp>
-      <p:sp>
-        <p:nvSpPr>
-          <p:cNvPr id="11" name="Rounded Rectangle 10"/>
-          <p:cNvSpPr/>
-          <p:nvPr/>
-        </p:nvSpPr>
-        <p:spPr>
-          <a:xfrm>
-            <a:off x="502920" y="4800600"/>
-            <a:ext cx="11155680" cy="914400"/>
-          </a:xfrm>
-          <a:prstGeom prst="roundRect">
-            <a:avLst/>
-          </a:prstGeom>
-          <a:solidFill>
-            <a:srgbClr val="F6ECC7"/>
-          </a:solidFill>
-          <a:ln w="12700">
-            <a:solidFill>
-              <a:srgbClr val="C9A227"/>
-            </a:solidFill>
-          </a:ln>
-          <a:effectLst/>
-        </p:spPr>
-        <p:style>
-          <a:lnRef idx="1">
-            <a:schemeClr val="accent1"/>
-          </a:lnRef>
-          <a:fillRef idx="3">
-            <a:schemeClr val="accent1"/>
-          </a:fillRef>
-          <a:effectRef idx="2">
-            <a:schemeClr val="accent1"/>
-          </a:effectRef>
-          <a:fontRef idx="minor">
-            <a:schemeClr val="lt1"/>
-          </a:fontRef>
-        </p:style>
-        <p:txBody>
-          <a:bodyPr rtlCol="0" anchor="ctr" wrap="square" lIns="76200" rIns="76200" tIns="38100" bIns="38100"/>
-          <a:lstStyle/>
-          <a:p>
-            <a:pPr algn="l">
-              <a:lnSpc>
-                <a:spcPct val="118000"/>
-              </a:lnSpc>
-              <a:spcBef>
-                <a:spcPts val="0"/>
-              </a:spcBef>
-              <a:spcAft>
-                <a:spcPts val="200"/>
-              </a:spcAft>
-            </a:pPr>
-            <a:r>
-              <a:rPr sz="1250" b="1" i="0">
-                <a:solidFill>
-                  <a:srgbClr val="C9A227"/>
-                </a:solidFill>
-                <a:latin typeface="Noto Sans CJK KR"/>
-              </a:rPr>
-              <a:t>결론</a:t>
-            </a:r>
-          </a:p>
-          <a:p>
-            <a:pPr algn="l">
-              <a:lnSpc>
-                <a:spcPct val="118000"/>
-              </a:lnSpc>
-              <a:spcBef>
-                <a:spcPts val="0"/>
-              </a:spcBef>
-              <a:spcAft>
-                <a:spcPts val="300"/>
-              </a:spcAft>
-            </a:pPr>
-            <a:r>
-              <a:rPr sz="1200" b="0" i="0">
-                <a:solidFill>
-                  <a:srgbClr val="22252B"/>
-                </a:solidFill>
-                <a:latin typeface="Noto Sans CJK KR"/>
-              </a:rPr>
-              <a:t>zHBM(대역폭↑)이 HBM-PIM(in-bank 연산이 너무 느림)보다 유리. SRAM은 '문턱' 구조 — state(≈134MB)가 on-chip에 들어가는 5x(250MB)부터 이득(203→150µs), 10x(500MB)면 weights까지 전부 상주.</a:t>
+                <a:spcPts val="400"/>
+              </a:spcAft>
+            </a:pPr>
+            <a:r>
+              <a:rPr sz="3400" b="1" i="0">
+                <a:solidFill>
+                  <a:srgbClr val="FFFFFF"/>
+                </a:solidFill>
+                <a:latin typeface="Noto Sans CJK KR"/>
+              </a:rPr>
+              <a:t>System modeling (우리 기여) — 이 배포는 서빙에서 얼마나 드나</a:t>
             </a:r>
           </a:p>
         </p:txBody>
@@ -46761,7 +46952,7 @@
                 </a:solidFill>
                 <a:latin typeface="Noto Sans CJK KR"/>
               </a:rPr>
-              <a:t>C5 · scaling 청사진</a:t>
+              <a:t>C1 · pair thesis</a:t>
             </a:r>
           </a:p>
         </p:txBody>
@@ -46806,21 +46997,239 @@
                 </a:solidFill>
                 <a:latin typeface="Noto Sans CJK KR"/>
               </a:rPr>
-              <a:t>논문의 방향 × 모델링 결과 = 어디로 가야 하나</a:t>
-            </a:r>
-          </a:p>
-        </p:txBody>
-      </p:sp>
-      <p:sp>
-        <p:nvSpPr>
-          <p:cNvPr id="5" name="Rectangle 4"/>
+              <a:t>학습은 compute-bound, 디코드는 memory-bound</a:t>
+            </a:r>
+          </a:p>
+        </p:txBody>
+      </p:sp>
+      <p:sp>
+        <p:nvSpPr>
+          <p:cNvPr id="5" name="Rounded Rectangle 4"/>
           <p:cNvSpPr/>
           <p:nvPr/>
         </p:nvSpPr>
         <p:spPr>
           <a:xfrm>
-            <a:off x="466344" y="1586285"/>
-            <a:ext cx="5605272" cy="2478421"/>
+            <a:off x="502920" y="1371600"/>
+            <a:ext cx="5486400" cy="1828800"/>
+          </a:xfrm>
+          <a:prstGeom prst="roundRect">
+            <a:avLst/>
+          </a:prstGeom>
+          <a:solidFill>
+            <a:srgbClr val="DBE7F3"/>
+          </a:solidFill>
+          <a:ln w="12700">
+            <a:solidFill>
+              <a:srgbClr val="2A6F97"/>
+            </a:solidFill>
+          </a:ln>
+          <a:effectLst/>
+        </p:spPr>
+        <p:style>
+          <a:lnRef idx="1">
+            <a:schemeClr val="accent1"/>
+          </a:lnRef>
+          <a:fillRef idx="3">
+            <a:schemeClr val="accent1"/>
+          </a:fillRef>
+          <a:effectRef idx="2">
+            <a:schemeClr val="accent1"/>
+          </a:effectRef>
+          <a:fontRef idx="minor">
+            <a:schemeClr val="lt1"/>
+          </a:fontRef>
+        </p:style>
+        <p:txBody>
+          <a:bodyPr rtlCol="0" anchor="ctr" wrap="square" lIns="76200" rIns="76200" tIns="38100" bIns="38100"/>
+          <a:lstStyle/>
+          <a:p>
+            <a:pPr algn="l">
+              <a:lnSpc>
+                <a:spcPct val="118000"/>
+              </a:lnSpc>
+              <a:spcBef>
+                <a:spcPts val="0"/>
+              </a:spcBef>
+              <a:spcAft>
+                <a:spcPts val="500"/>
+              </a:spcAft>
+            </a:pPr>
+            <a:r>
+              <a:rPr sz="1400" b="1" i="0">
+                <a:solidFill>
+                  <a:srgbClr val="2A6F97"/>
+                </a:solidFill>
+                <a:latin typeface="Noto Sans CJK KR"/>
+              </a:rPr>
+              <a:t>학습(training) — compute-bound</a:t>
+            </a:r>
+          </a:p>
+          <a:p>
+            <a:pPr algn="l">
+              <a:lnSpc>
+                <a:spcPct val="118000"/>
+              </a:lnSpc>
+              <a:spcBef>
+                <a:spcPts val="0"/>
+              </a:spcBef>
+              <a:spcAft>
+                <a:spcPts val="300"/>
+              </a:spcAft>
+            </a:pPr>
+            <a:r>
+              <a:rPr sz="1250" b="0" i="0">
+                <a:solidFill>
+                  <a:srgbClr val="22252B"/>
+                </a:solidFill>
+                <a:latin typeface="Noto Sans CJK KR"/>
+              </a:rPr>
+              <a:t>chunk C를 크게 잡아 병렬 → 연산/바이트(arithmetic intensity)가 높다.</a:t>
+            </a:r>
+          </a:p>
+          <a:p>
+            <a:pPr algn="l">
+              <a:lnSpc>
+                <a:spcPct val="118000"/>
+              </a:lnSpc>
+              <a:spcBef>
+                <a:spcPts val="0"/>
+              </a:spcBef>
+              <a:spcAft>
+                <a:spcPts val="300"/>
+              </a:spcAft>
+            </a:pPr>
+            <a:r>
+              <a:rPr sz="1250" b="0" i="0">
+                <a:solidFill>
+                  <a:srgbClr val="22252B"/>
+                </a:solidFill>
+                <a:latin typeface="Noto Sans CJK KR"/>
+              </a:rPr>
+              <a:t>roofline의 오른쪽(연산 한계) → 더 빠른 연산기가 이득.</a:t>
+            </a:r>
+          </a:p>
+        </p:txBody>
+      </p:sp>
+      <p:sp>
+        <p:nvSpPr>
+          <p:cNvPr id="6" name="Rounded Rectangle 5"/>
+          <p:cNvSpPr/>
+          <p:nvPr/>
+        </p:nvSpPr>
+        <p:spPr>
+          <a:xfrm>
+            <a:off x="6172200" y="1371600"/>
+            <a:ext cx="5486400" cy="1828800"/>
+          </a:xfrm>
+          <a:prstGeom prst="roundRect">
+            <a:avLst/>
+          </a:prstGeom>
+          <a:solidFill>
+            <a:srgbClr val="F6DDDD"/>
+          </a:solidFill>
+          <a:ln w="12700">
+            <a:solidFill>
+              <a:srgbClr val="C1121F"/>
+            </a:solidFill>
+          </a:ln>
+          <a:effectLst/>
+        </p:spPr>
+        <p:style>
+          <a:lnRef idx="1">
+            <a:schemeClr val="accent1"/>
+          </a:lnRef>
+          <a:fillRef idx="3">
+            <a:schemeClr val="accent1"/>
+          </a:fillRef>
+          <a:effectRef idx="2">
+            <a:schemeClr val="accent1"/>
+          </a:effectRef>
+          <a:fontRef idx="minor">
+            <a:schemeClr val="lt1"/>
+          </a:fontRef>
+        </p:style>
+        <p:txBody>
+          <a:bodyPr rtlCol="0" anchor="ctr" wrap="square" lIns="76200" rIns="76200" tIns="38100" bIns="38100"/>
+          <a:lstStyle/>
+          <a:p>
+            <a:pPr algn="l">
+              <a:lnSpc>
+                <a:spcPct val="118000"/>
+              </a:lnSpc>
+              <a:spcBef>
+                <a:spcPts val="0"/>
+              </a:spcBef>
+              <a:spcAft>
+                <a:spcPts val="500"/>
+              </a:spcAft>
+            </a:pPr>
+            <a:r>
+              <a:rPr sz="1400" b="1" i="0">
+                <a:solidFill>
+                  <a:srgbClr val="C1121F"/>
+                </a:solidFill>
+                <a:latin typeface="Noto Sans CJK KR"/>
+              </a:rPr>
+              <a:t>디코드(decode) — memory-bound</a:t>
+            </a:r>
+          </a:p>
+          <a:p>
+            <a:pPr algn="l">
+              <a:lnSpc>
+                <a:spcPct val="118000"/>
+              </a:lnSpc>
+              <a:spcBef>
+                <a:spcPts val="0"/>
+              </a:spcBef>
+              <a:spcAft>
+                <a:spcPts val="300"/>
+              </a:spcAft>
+            </a:pPr>
+            <a:r>
+              <a:rPr sz="1250" b="0" i="0">
+                <a:solidFill>
+                  <a:srgbClr val="22252B"/>
+                </a:solidFill>
+                <a:latin typeface="Noto Sans CJK KR"/>
+              </a:rPr>
+              <a:t>chunk=1, 토큰마다 '전체 상태(state+weights)'를 read-modify-write.</a:t>
+            </a:r>
+          </a:p>
+          <a:p>
+            <a:pPr algn="l">
+              <a:lnSpc>
+                <a:spcPct val="118000"/>
+              </a:lnSpc>
+              <a:spcBef>
+                <a:spcPts val="0"/>
+              </a:spcBef>
+              <a:spcAft>
+                <a:spcPts val="300"/>
+              </a:spcAft>
+            </a:pPr>
+            <a:r>
+              <a:rPr sz="1250" b="0" i="0">
+                <a:solidFill>
+                  <a:srgbClr val="22252B"/>
+                </a:solidFill>
+                <a:latin typeface="Noto Sans CJK KR"/>
+              </a:rPr>
+              <a:t>arithmetic intensity가 낮다 → roofline의 왼쪽(대역폭 한계).</a:t>
+            </a:r>
+          </a:p>
+        </p:txBody>
+      </p:sp>
+      <p:sp>
+        <p:nvSpPr>
+          <p:cNvPr id="7" name="Rectangle 6"/>
+          <p:cNvSpPr/>
+          <p:nvPr/>
+        </p:nvSpPr>
+        <p:spPr>
+          <a:xfrm>
+            <a:off x="895197" y="3392424"/>
+            <a:ext cx="4747564" cy="2020824"/>
           </a:xfrm>
           <a:prstGeom prst="rect">
             <a:avLst/>
@@ -46857,7 +47266,7 @@
       </p:sp>
       <p:pic>
         <p:nvPicPr>
-          <p:cNvPr id="6" name="Picture 5" descr="fig8-hope-sleep-scaling.png"/>
+          <p:cNvPr id="8" name="Picture 7" descr="fig4-sstar-invariance.png"/>
           <p:cNvPicPr>
             <a:picLocks noChangeAspect="1"/>
           </p:cNvPicPr>
@@ -46871,8 +47280,8 @@
         </p:blipFill>
         <p:spPr>
           <a:xfrm>
-            <a:off x="502920" y="1622861"/>
-            <a:ext cx="5532120" cy="2405269"/>
+            <a:off x="931773" y="3429000"/>
+            <a:ext cx="4674412" cy="1947672"/>
           </a:xfrm>
           <a:prstGeom prst="rect">
             <a:avLst/>
@@ -46881,13 +47290,13 @@
       </p:pic>
       <p:sp>
         <p:nvSpPr>
-          <p:cNvPr id="7" name="TextBox 6"/>
+          <p:cNvPr id="9" name="TextBox 8"/>
           <p:cNvSpPr txBox="1"/>
           <p:nvPr/>
         </p:nvSpPr>
         <p:spPr>
           <a:xfrm>
-            <a:off x="502920" y="4297679"/>
+            <a:off x="502920" y="5394959"/>
             <a:ext cx="5532120" cy="365760"/>
           </a:xfrm>
           <a:prstGeom prst="rect">
@@ -46919,21 +47328,21 @@
                 </a:solidFill>
                 <a:latin typeface="Noto Sans CJK KR"/>
               </a:rPr>
-              <a:t>HOPE(메모리 확장)+Sleep(파라미터 성장) 스케일링 — 상태·파라미터가 함께 자란다</a:t>
-            </a:r>
-          </a:p>
-        </p:txBody>
-      </p:sp>
-      <p:sp>
-        <p:nvSpPr>
-          <p:cNvPr id="8" name="Rounded Rectangle 7"/>
+              <a:t>S*(KV↔TTT 교차점)=65536 tokens — 8개 가속기 전부 동일 = 하드웨어가 아니라 workload의 성질</a:t>
+            </a:r>
+          </a:p>
+        </p:txBody>
+      </p:sp>
+      <p:sp>
+        <p:nvSpPr>
+          <p:cNvPr id="10" name="Rounded Rectangle 9"/>
           <p:cNvSpPr/>
           <p:nvPr/>
         </p:nvSpPr>
         <p:spPr>
           <a:xfrm>
-            <a:off x="6172200" y="1417320"/>
-            <a:ext cx="5486400" cy="1051560"/>
+            <a:off x="6172200" y="3429000"/>
+            <a:ext cx="5486400" cy="2103120"/>
           </a:xfrm>
           <a:prstGeom prst="roundRect">
             <a:avLst/>
@@ -46974,17 +47383,39 @@
                 <a:spcPts val="0"/>
               </a:spcBef>
               <a:spcAft>
+                <a:spcPts val="500"/>
+              </a:spcAft>
+            </a:pPr>
+            <a:r>
+              <a:rPr sz="1300" b="1" i="0">
+                <a:solidFill>
+                  <a:srgbClr val="C9A227"/>
+                </a:solidFill>
+                <a:latin typeface="Noto Sans CJK KR"/>
+              </a:rPr>
+              <a:t>왜 중요한가</a:t>
+            </a:r>
+          </a:p>
+          <a:p>
+            <a:pPr algn="l">
+              <a:lnSpc>
+                <a:spcPct val="118000"/>
+              </a:lnSpc>
+              <a:spcBef>
+                <a:spcPts val="0"/>
+              </a:spcBef>
+              <a:spcAft>
                 <a:spcPts val="300"/>
               </a:spcAft>
             </a:pPr>
             <a:r>
-              <a:rPr sz="1250" b="1" i="0">
-                <a:solidFill>
-                  <a:srgbClr val="C9A227"/>
-                </a:solidFill>
-                <a:latin typeface="Noto Sans CJK KR"/>
-              </a:rPr>
-              <a:t>① 논문 방향이 memory 압력을 키운다</a:t>
+              <a:rPr sz="1250" b="0" i="0">
+                <a:solidFill>
+                  <a:srgbClr val="22252B"/>
+                </a:solidFill>
+                <a:latin typeface="Noto Sans CJK KR"/>
+              </a:rPr>
+              <a:t>메모리 상태를 갱신하는 이 계열은 디코드에서 구조적으로 memory-bound다. 그리고 그 경계(S*)는 하드웨어를 바꿔도 변하지 않는다(invariant). 즉 '어느 칩을 써도' 디코드 비용은 메모리 대역폭이 지배한다.</a:t>
             </a:r>
           </a:p>
           <a:p>
@@ -47000,361 +47431,13 @@
               </a:spcAft>
             </a:pPr>
             <a:r>
-              <a:rPr sz="1150" b="0" i="0">
-                <a:solidFill>
-                  <a:srgbClr val="22252B"/>
-                </a:solidFill>
-                <a:latin typeface="Noto Sans CJK KR"/>
-              </a:rPr>
-              <a:t>HOPE(self-mod+CMS)로 state↑, Sleep(expert 성장)로 파라미터↑ → 디코드 memory-bound가 구조적으로 심해진다.</a:t>
-            </a:r>
-          </a:p>
-        </p:txBody>
-      </p:sp>
-      <p:sp>
-        <p:nvSpPr>
-          <p:cNvPr id="9" name="Rounded Rectangle 8"/>
-          <p:cNvSpPr/>
-          <p:nvPr/>
-        </p:nvSpPr>
-        <p:spPr>
-          <a:xfrm>
-            <a:off x="6172200" y="2532888"/>
-            <a:ext cx="5486400" cy="1051560"/>
-          </a:xfrm>
-          <a:prstGeom prst="roundRect">
-            <a:avLst/>
-          </a:prstGeom>
-          <a:solidFill>
-            <a:srgbClr val="F6ECC7"/>
-          </a:solidFill>
-          <a:ln w="12700">
-            <a:solidFill>
-              <a:srgbClr val="C9A227"/>
-            </a:solidFill>
-          </a:ln>
-          <a:effectLst/>
-        </p:spPr>
-        <p:style>
-          <a:lnRef idx="1">
-            <a:schemeClr val="accent1"/>
-          </a:lnRef>
-          <a:fillRef idx="3">
-            <a:schemeClr val="accent1"/>
-          </a:fillRef>
-          <a:effectRef idx="2">
-            <a:schemeClr val="accent1"/>
-          </a:effectRef>
-          <a:fontRef idx="minor">
-            <a:schemeClr val="lt1"/>
-          </a:fontRef>
-        </p:style>
-        <p:txBody>
-          <a:bodyPr rtlCol="0" anchor="ctr" wrap="square" lIns="76200" rIns="76200" tIns="38100" bIns="38100"/>
-          <a:lstStyle/>
-          <a:p>
-            <a:pPr algn="l">
-              <a:lnSpc>
-                <a:spcPct val="118000"/>
-              </a:lnSpc>
-              <a:spcBef>
-                <a:spcPts val="0"/>
-              </a:spcBef>
-              <a:spcAft>
-                <a:spcPts val="300"/>
-              </a:spcAft>
-            </a:pPr>
-            <a:r>
-              <a:rPr sz="1250" b="1" i="0">
-                <a:solidFill>
-                  <a:srgbClr val="C9A227"/>
-                </a:solidFill>
-                <a:latin typeface="Noto Sans CJK KR"/>
-              </a:rPr>
-              <a:t>② 대역폭 우선</a:t>
-            </a:r>
-          </a:p>
-          <a:p>
-            <a:pPr algn="l">
-              <a:lnSpc>
-                <a:spcPct val="118000"/>
-              </a:lnSpc>
-              <a:spcBef>
-                <a:spcPts val="0"/>
-              </a:spcBef>
-              <a:spcAft>
-                <a:spcPts val="300"/>
-              </a:spcAft>
-            </a:pPr>
-            <a:r>
-              <a:rPr sz="1150" b="0" i="0">
-                <a:solidFill>
-                  <a:srgbClr val="22252B"/>
-                </a:solidFill>
-                <a:latin typeface="Noto Sans CJK KR"/>
-              </a:rPr>
-              <a:t>zHBM류 고대역폭 메모리가 1순위 지렛대(PIM보다 유리).</a:t>
-            </a:r>
-          </a:p>
-        </p:txBody>
-      </p:sp>
-      <p:sp>
-        <p:nvSpPr>
-          <p:cNvPr id="10" name="Rounded Rectangle 9"/>
-          <p:cNvSpPr/>
-          <p:nvPr/>
-        </p:nvSpPr>
-        <p:spPr>
-          <a:xfrm>
-            <a:off x="6172200" y="3648456"/>
-            <a:ext cx="5486400" cy="1051560"/>
-          </a:xfrm>
-          <a:prstGeom prst="roundRect">
-            <a:avLst/>
-          </a:prstGeom>
-          <a:solidFill>
-            <a:srgbClr val="F6ECC7"/>
-          </a:solidFill>
-          <a:ln w="12700">
-            <a:solidFill>
-              <a:srgbClr val="C9A227"/>
-            </a:solidFill>
-          </a:ln>
-          <a:effectLst/>
-        </p:spPr>
-        <p:style>
-          <a:lnRef idx="1">
-            <a:schemeClr val="accent1"/>
-          </a:lnRef>
-          <a:fillRef idx="3">
-            <a:schemeClr val="accent1"/>
-          </a:fillRef>
-          <a:effectRef idx="2">
-            <a:schemeClr val="accent1"/>
-          </a:effectRef>
-          <a:fontRef idx="minor">
-            <a:schemeClr val="lt1"/>
-          </a:fontRef>
-        </p:style>
-        <p:txBody>
-          <a:bodyPr rtlCol="0" anchor="ctr" wrap="square" lIns="76200" rIns="76200" tIns="38100" bIns="38100"/>
-          <a:lstStyle/>
-          <a:p>
-            <a:pPr algn="l">
-              <a:lnSpc>
-                <a:spcPct val="118000"/>
-              </a:lnSpc>
-              <a:spcBef>
-                <a:spcPts val="0"/>
-              </a:spcBef>
-              <a:spcAft>
-                <a:spcPts val="300"/>
-              </a:spcAft>
-            </a:pPr>
-            <a:r>
-              <a:rPr sz="1250" b="1" i="0">
-                <a:solidFill>
-                  <a:srgbClr val="C9A227"/>
-                </a:solidFill>
-                <a:latin typeface="Noto Sans CJK KR"/>
-              </a:rPr>
-              <a:t>③ state 상주 설계</a:t>
-            </a:r>
-          </a:p>
-          <a:p>
-            <a:pPr algn="l">
-              <a:lnSpc>
-                <a:spcPct val="118000"/>
-              </a:lnSpc>
-              <a:spcBef>
-                <a:spcPts val="0"/>
-              </a:spcBef>
-              <a:spcAft>
-                <a:spcPts val="300"/>
-              </a:spcAft>
-            </a:pPr>
-            <a:r>
-              <a:rPr sz="1150" b="0" i="0">
-                <a:solidFill>
-                  <a:srgbClr val="22252B"/>
-                </a:solidFill>
-                <a:latin typeface="Noto Sans CJK KR"/>
-              </a:rPr>
-              <a:t>on-chip 용량을 state가 들어갈 문턱 이상으로 — Cerebras의 knee가 그 증거.</a:t>
-            </a:r>
-          </a:p>
-        </p:txBody>
-      </p:sp>
-      <p:sp>
-        <p:nvSpPr>
-          <p:cNvPr id="11" name="Rounded Rectangle 10"/>
-          <p:cNvSpPr/>
-          <p:nvPr/>
-        </p:nvSpPr>
-        <p:spPr>
-          <a:xfrm>
-            <a:off x="6172200" y="4764024"/>
-            <a:ext cx="5486400" cy="1051560"/>
-          </a:xfrm>
-          <a:prstGeom prst="roundRect">
-            <a:avLst/>
-          </a:prstGeom>
-          <a:solidFill>
-            <a:srgbClr val="F6ECC7"/>
-          </a:solidFill>
-          <a:ln w="12700">
-            <a:solidFill>
-              <a:srgbClr val="C9A227"/>
-            </a:solidFill>
-          </a:ln>
-          <a:effectLst/>
-        </p:spPr>
-        <p:style>
-          <a:lnRef idx="1">
-            <a:schemeClr val="accent1"/>
-          </a:lnRef>
-          <a:fillRef idx="3">
-            <a:schemeClr val="accent1"/>
-          </a:fillRef>
-          <a:effectRef idx="2">
-            <a:schemeClr val="accent1"/>
-          </a:effectRef>
-          <a:fontRef idx="minor">
-            <a:schemeClr val="lt1"/>
-          </a:fontRef>
-        </p:style>
-        <p:txBody>
-          <a:bodyPr rtlCol="0" anchor="ctr" wrap="square" lIns="76200" rIns="76200" tIns="38100" bIns="38100"/>
-          <a:lstStyle/>
-          <a:p>
-            <a:pPr algn="l">
-              <a:lnSpc>
-                <a:spcPct val="118000"/>
-              </a:lnSpc>
-              <a:spcBef>
-                <a:spcPts val="0"/>
-              </a:spcBef>
-              <a:spcAft>
-                <a:spcPts val="300"/>
-              </a:spcAft>
-            </a:pPr>
-            <a:r>
-              <a:rPr sz="1250" b="1" i="0">
-                <a:solidFill>
-                  <a:srgbClr val="C9A227"/>
-                </a:solidFill>
-                <a:latin typeface="Noto Sans CJK KR"/>
-              </a:rPr>
-              <a:t>④ 소프트웨어 효율이 프론티어</a:t>
-            </a:r>
-          </a:p>
-          <a:p>
-            <a:pPr algn="l">
-              <a:lnSpc>
-                <a:spcPct val="118000"/>
-              </a:lnSpc>
-              <a:spcBef>
-                <a:spcPts val="0"/>
-              </a:spcBef>
-              <a:spcAft>
-                <a:spcPts val="300"/>
-              </a:spcAft>
-            </a:pPr>
-            <a:r>
-              <a:rPr sz="1150" b="0" i="0">
-                <a:solidFill>
-                  <a:srgbClr val="22252B"/>
-                </a:solidFill>
-                <a:latin typeface="Noto Sans CJK KR"/>
-              </a:rPr>
-              <a:t>cross-vendor 소프트웨어 효율(HATIR)이 남은 최대 변수.</a:t>
-            </a:r>
-          </a:p>
-        </p:txBody>
-      </p:sp>
-      <p:sp>
-        <p:nvSpPr>
-          <p:cNvPr id="12" name="Rounded Rectangle 11"/>
-          <p:cNvSpPr/>
-          <p:nvPr/>
-        </p:nvSpPr>
-        <p:spPr>
-          <a:xfrm>
-            <a:off x="502920" y="4800600"/>
-            <a:ext cx="5532120" cy="960120"/>
-          </a:xfrm>
-          <a:prstGeom prst="roundRect">
-            <a:avLst/>
-          </a:prstGeom>
-          <a:solidFill>
-            <a:srgbClr val="DBE7F3"/>
-          </a:solidFill>
-          <a:ln w="12700">
-            <a:solidFill>
-              <a:srgbClr val="2A6F97"/>
-            </a:solidFill>
-          </a:ln>
-          <a:effectLst/>
-        </p:spPr>
-        <p:style>
-          <a:lnRef idx="1">
-            <a:schemeClr val="accent1"/>
-          </a:lnRef>
-          <a:fillRef idx="3">
-            <a:schemeClr val="accent1"/>
-          </a:fillRef>
-          <a:effectRef idx="2">
-            <a:schemeClr val="accent1"/>
-          </a:effectRef>
-          <a:fontRef idx="minor">
-            <a:schemeClr val="lt1"/>
-          </a:fontRef>
-        </p:style>
-        <p:txBody>
-          <a:bodyPr rtlCol="0" anchor="ctr" wrap="square" lIns="76200" rIns="76200" tIns="38100" bIns="38100"/>
-          <a:lstStyle/>
-          <a:p>
-            <a:pPr algn="l">
-              <a:lnSpc>
-                <a:spcPct val="118000"/>
-              </a:lnSpc>
-              <a:spcBef>
-                <a:spcPts val="0"/>
-              </a:spcBef>
-              <a:spcAft>
-                <a:spcPts val="200"/>
-              </a:spcAft>
-            </a:pPr>
-            <a:r>
-              <a:rPr sz="1250" b="1" i="0">
+              <a:rPr sz="1200" b="1" i="0">
                 <a:solidFill>
                   <a:srgbClr val="2A6F97"/>
                 </a:solidFill>
                 <a:latin typeface="Noto Sans CJK KR"/>
               </a:rPr>
-              <a:t>한 줄</a:t>
-            </a:r>
-          </a:p>
-          <a:p>
-            <a:pPr algn="l">
-              <a:lnSpc>
-                <a:spcPct val="118000"/>
-              </a:lnSpc>
-              <a:spcBef>
-                <a:spcPts val="0"/>
-              </a:spcBef>
-              <a:spcAft>
-                <a:spcPts val="300"/>
-              </a:spcAft>
-            </a:pPr>
-            <a:r>
-              <a:rPr sz="1200" b="0" i="0">
-                <a:solidFill>
-                  <a:srgbClr val="22252B"/>
-                </a:solidFill>
-                <a:latin typeface="Noto Sans CJK KR"/>
-              </a:rPr>
-              <a:t>이 계열을 키울수록 서빙은 '메모리 문제'가 된다 — 대역폭·상주·소프트웨어가 스케일의 열쇠.</a:t>
+              <a:t>→ 이후 슬라이드: 실제 8칩 측정 · HOPE block roofline · 메모리 기술(zHBM/PIM/SRAM) · 청사진.</a:t>
             </a:r>
           </a:p>
         </p:txBody>
@@ -47392,11 +47475,11 @@
             <a:avLst/>
           </a:prstGeom>
           <a:solidFill>
-            <a:srgbClr val="2A9D8F"/>
+            <a:srgbClr val="C9A227"/>
           </a:solidFill>
           <a:ln w="12700">
             <a:solidFill>
-              <a:srgbClr val="2A9D8F"/>
+              <a:srgbClr val="C9A227"/>
             </a:solidFill>
           </a:ln>
           <a:effectLst/>
@@ -47478,11 +47561,11 @@
             <a:r>
               <a:rPr sz="1350" b="1" i="0">
                 <a:solidFill>
-                  <a:srgbClr val="2A9D8F"/>
-                </a:solidFill>
-                <a:latin typeface="Noto Sans CJK KR"/>
-              </a:rPr>
-              <a:t>마무리</a:t>
+                  <a:srgbClr val="C9A227"/>
+                </a:solidFill>
+                <a:latin typeface="Noto Sans CJK KR"/>
+              </a:rPr>
+              <a:t>C2 · 8개 가속기 크로스 측정</a:t>
             </a:r>
           </a:p>
         </p:txBody>
@@ -47527,31 +47610,29 @@
                 </a:solidFill>
                 <a:latin typeface="Noto Sans CJK KR"/>
               </a:rPr>
-              <a:t>6편을 한 흐름으로, 그리고 서빙 비용까지</a:t>
-            </a:r>
-          </a:p>
-        </p:txBody>
-      </p:sp>
-      <p:sp>
-        <p:nvSpPr>
-          <p:cNvPr id="5" name="Rounded Rectangle 4"/>
+              <a:t>5자릿수 스프레드, 그러나 대부분 memory-bound</a:t>
+            </a:r>
+          </a:p>
+        </p:txBody>
+      </p:sp>
+      <p:sp>
+        <p:nvSpPr>
+          <p:cNvPr id="5" name="Rectangle 4"/>
           <p:cNvSpPr/>
           <p:nvPr/>
         </p:nvSpPr>
         <p:spPr>
           <a:xfrm>
-            <a:off x="502920" y="1371600"/>
-            <a:ext cx="1554480" cy="621792"/>
-          </a:xfrm>
-          <a:prstGeom prst="roundRect">
-            <a:avLst/>
-          </a:prstGeom>
-          <a:solidFill>
-            <a:srgbClr val="2A9D8F"/>
-          </a:solidFill>
-          <a:ln w="12700">
+            <a:off x="466344" y="1482725"/>
+            <a:ext cx="5605272" cy="2685542"/>
+          </a:xfrm>
+          <a:prstGeom prst="rect">
+            <a:avLst/>
+          </a:prstGeom>
+          <a:noFill/>
+          <a:ln w="9525">
             <a:solidFill>
-              <a:srgbClr val="2A9D8F"/>
+              <a:srgbClr val="8A8F98"/>
             </a:solidFill>
           </a:ln>
           <a:effectLst/>
@@ -47571,48 +47652,211 @@
           </a:fontRef>
         </p:style>
         <p:txBody>
-          <a:bodyPr rtlCol="0" anchor="ctr" wrap="square" lIns="76200" rIns="76200" tIns="38100" bIns="38100"/>
+          <a:bodyPr rtlCol="0" anchor="ctr"/>
+          <a:lstStyle/>
+          <a:p>
+            <a:pPr algn="ctr"/>
+          </a:p>
+        </p:txBody>
+      </p:sp>
+      <p:pic>
+        <p:nvPicPr>
+          <p:cNvPr id="6" name="Picture 5" descr="fig1-decode-ms.png"/>
+          <p:cNvPicPr>
+            <a:picLocks noChangeAspect="1"/>
+          </p:cNvPicPr>
+          <p:nvPr/>
+        </p:nvPicPr>
+        <p:blipFill>
+          <a:blip r:embed="rId2"/>
+          <a:stretch>
+            <a:fillRect/>
+          </a:stretch>
+        </p:blipFill>
+        <p:spPr>
+          <a:xfrm>
+            <a:off x="502920" y="1519301"/>
+            <a:ext cx="5532120" cy="2612390"/>
+          </a:xfrm>
+          <a:prstGeom prst="rect">
+            <a:avLst/>
+          </a:prstGeom>
+        </p:spPr>
+      </p:pic>
+      <p:sp>
+        <p:nvSpPr>
+          <p:cNvPr id="7" name="TextBox 6"/>
+          <p:cNvSpPr txBox="1"/>
+          <p:nvPr/>
+        </p:nvSpPr>
+        <p:spPr>
+          <a:xfrm>
+            <a:off x="502920" y="4297679"/>
+            <a:ext cx="5532120" cy="365760"/>
+          </a:xfrm>
+          <a:prstGeom prst="rect">
+            <a:avLst/>
+          </a:prstGeom>
+          <a:noFill/>
+        </p:spPr>
+        <p:txBody>
+          <a:bodyPr wrap="square" anchor="t" lIns="38100" rIns="38100" tIns="25400" bIns="25400">
+            <a:spAutoFit/>
+          </a:bodyPr>
           <a:lstStyle/>
           <a:p>
             <a:pPr algn="ctr">
               <a:lnSpc>
-                <a:spcPct val="118000"/>
-              </a:lnSpc>
-              <a:spcBef>
-                <a:spcPts val="0"/>
-              </a:spcBef>
-              <a:spcAft>
-                <a:spcPts val="300"/>
-              </a:spcAft>
-            </a:pPr>
-            <a:r>
-              <a:rPr sz="1250" b="1" i="0">
-                <a:solidFill>
-                  <a:srgbClr val="FFFFFF"/>
-                </a:solidFill>
-                <a:latin typeface="Noto Sans CJK KR"/>
-              </a:rPr>
-              <a:t>Titans</a:t>
-            </a:r>
-          </a:p>
-        </p:txBody>
-      </p:sp>
-      <p:sp>
-        <p:nvSpPr>
-          <p:cNvPr id="6" name="Rounded Rectangle 5"/>
+                <a:spcPct val="120000"/>
+              </a:lnSpc>
+              <a:spcBef>
+                <a:spcPts val="0"/>
+              </a:spcBef>
+              <a:spcAft>
+                <a:spcPts val="0"/>
+              </a:spcAft>
+            </a:pPr>
+            <a:r>
+              <a:rPr sz="1050" b="0" i="0">
+                <a:solidFill>
+                  <a:srgbClr val="22252B"/>
+                </a:solidFill>
+                <a:latin typeface="Noto Sans CJK KR"/>
+              </a:rPr>
+              <a:t>토큰당 decode 시간(ideal 하한, log) — MTIA v2 ~31ms에서 WSE-3 ~0.0003ms까지</a:t>
+            </a:r>
+          </a:p>
+        </p:txBody>
+      </p:sp>
+      <p:sp>
+        <p:nvSpPr>
+          <p:cNvPr id="8" name="Rectangle 7"/>
           <p:cNvSpPr/>
           <p:nvPr/>
         </p:nvSpPr>
         <p:spPr>
           <a:xfrm>
-            <a:off x="2148840" y="1371600"/>
-            <a:ext cx="9509760" cy="621792"/>
+            <a:off x="6227064" y="1664970"/>
+            <a:ext cx="5468112" cy="2321052"/>
+          </a:xfrm>
+          <a:prstGeom prst="rect">
+            <a:avLst/>
+          </a:prstGeom>
+          <a:noFill/>
+          <a:ln w="9525">
+            <a:solidFill>
+              <a:srgbClr val="8A8F98"/>
+            </a:solidFill>
+          </a:ln>
+          <a:effectLst/>
+        </p:spPr>
+        <p:style>
+          <a:lnRef idx="1">
+            <a:schemeClr val="accent1"/>
+          </a:lnRef>
+          <a:fillRef idx="3">
+            <a:schemeClr val="accent1"/>
+          </a:fillRef>
+          <a:effectRef idx="2">
+            <a:schemeClr val="accent1"/>
+          </a:effectRef>
+          <a:fontRef idx="minor">
+            <a:schemeClr val="lt1"/>
+          </a:fontRef>
+        </p:style>
+        <p:txBody>
+          <a:bodyPr rtlCol="0" anchor="ctr"/>
+          <a:lstStyle/>
+          <a:p>
+            <a:pPr algn="ctr"/>
+          </a:p>
+        </p:txBody>
+      </p:sp>
+      <p:pic>
+        <p:nvPicPr>
+          <p:cNvPr id="9" name="Picture 8" descr="fig4-sstar-invariance.png"/>
+          <p:cNvPicPr>
+            <a:picLocks noChangeAspect="1"/>
+          </p:cNvPicPr>
+          <p:nvPr/>
+        </p:nvPicPr>
+        <p:blipFill>
+          <a:blip r:embed="rId3"/>
+          <a:stretch>
+            <a:fillRect/>
+          </a:stretch>
+        </p:blipFill>
+        <p:spPr>
+          <a:xfrm>
+            <a:off x="6263640" y="1701546"/>
+            <a:ext cx="5394960" cy="2247900"/>
+          </a:xfrm>
+          <a:prstGeom prst="rect">
+            <a:avLst/>
+          </a:prstGeom>
+        </p:spPr>
+      </p:pic>
+      <p:sp>
+        <p:nvSpPr>
+          <p:cNvPr id="10" name="TextBox 9"/>
+          <p:cNvSpPr txBox="1"/>
+          <p:nvPr/>
+        </p:nvSpPr>
+        <p:spPr>
+          <a:xfrm>
+            <a:off x="6263640" y="4297679"/>
+            <a:ext cx="5394960" cy="365760"/>
+          </a:xfrm>
+          <a:prstGeom prst="rect">
+            <a:avLst/>
+          </a:prstGeom>
+          <a:noFill/>
+        </p:spPr>
+        <p:txBody>
+          <a:bodyPr wrap="square" anchor="t" lIns="38100" rIns="38100" tIns="25400" bIns="25400">
+            <a:spAutoFit/>
+          </a:bodyPr>
+          <a:lstStyle/>
+          <a:p>
+            <a:pPr algn="ctr">
+              <a:lnSpc>
+                <a:spcPct val="120000"/>
+              </a:lnSpc>
+              <a:spcBef>
+                <a:spcPts val="0"/>
+              </a:spcBef>
+              <a:spcAft>
+                <a:spcPts val="0"/>
+              </a:spcAft>
+            </a:pPr>
+            <a:r>
+              <a:rPr sz="1050" b="0" i="0">
+                <a:solidFill>
+                  <a:srgbClr val="22252B"/>
+                </a:solidFill>
+                <a:latin typeface="Noto Sans CJK KR"/>
+              </a:rPr>
+              <a:t>S* 불변: 8개 아키텍처가 같은 교차점 — workload 고유 성질</a:t>
+            </a:r>
+          </a:p>
+        </p:txBody>
+      </p:sp>
+      <p:sp>
+        <p:nvSpPr>
+          <p:cNvPr id="11" name="Rounded Rectangle 10"/>
+          <p:cNvSpPr/>
+          <p:nvPr/>
+        </p:nvSpPr>
+        <p:spPr>
+          <a:xfrm>
+            <a:off x="502920" y="4800600"/>
+            <a:ext cx="11155680" cy="914400"/>
           </a:xfrm>
           <a:prstGeom prst="roundRect">
             <a:avLst/>
           </a:prstGeom>
           <a:solidFill>
-            <a:srgbClr val="FFFFFF"/>
+            <a:srgbClr val="ECEEF1"/>
           </a:solidFill>
           <a:ln w="12700">
             <a:solidFill>
@@ -47647,6 +47891,28 @@
                 <a:spcPts val="0"/>
               </a:spcBef>
               <a:spcAft>
+                <a:spcPts val="200"/>
+              </a:spcAft>
+            </a:pPr>
+            <a:r>
+              <a:rPr sz="1250" b="1" i="0">
+                <a:solidFill>
+                  <a:srgbClr val="22252B"/>
+                </a:solidFill>
+                <a:latin typeface="Noto Sans CJK KR"/>
+              </a:rPr>
+              <a:t>읽는 법</a:t>
+            </a:r>
+          </a:p>
+          <a:p>
+            <a:pPr algn="l">
+              <a:lnSpc>
+                <a:spcPct val="118000"/>
+              </a:lnSpc>
+              <a:spcBef>
+                <a:spcPts val="0"/>
+              </a:spcBef>
+              <a:spcAft>
                 <a:spcPts val="300"/>
               </a:spcAft>
             </a:pPr>
@@ -47657,413 +47923,41 @@
                 </a:solidFill>
                 <a:latin typeface="Noto Sans CJK KR"/>
               </a:rPr>
-              <a:t>test-time에 학습되는 신경망 메모리(surprise+momentum+forget)를 연다.</a:t>
-            </a:r>
-          </a:p>
-        </p:txBody>
-      </p:sp>
-      <p:sp>
-        <p:nvSpPr>
-          <p:cNvPr id="7" name="Rounded Rectangle 6"/>
+              <a:t>8칩 중 7개가 memory-bound(대역폭이 결정). 예외는 WSE-3(Cerebras) — 거대한 on-chip SRAM으로 상태를 상주시켜 compute 쪽으로 넘어가는 'knee'가 생긴다. 각 칩 spec은 HAT hw twin으로 검증(die/PE 구조까지).</a:t>
+            </a:r>
+          </a:p>
+        </p:txBody>
+      </p:sp>
+    </p:spTree>
+  </p:cSld>
+  <p:clrMapOvr>
+    <a:masterClrMapping/>
+  </p:clrMapOvr>
+</p:sld>
+</file>
+
+<file path=ppt/slides/slide69.xml><?xml version="1.0" encoding="utf-8"?>
+<p:sld xmlns:a="http://schemas.openxmlformats.org/drawingml/2006/main" xmlns:p="http://schemas.openxmlformats.org/presentationml/2006/main" xmlns:r="http://schemas.openxmlformats.org/officeDocument/2006/relationships">
+  <p:cSld>
+    <p:spTree>
+      <p:nvGrpSpPr>
+        <p:cNvPr id="1" name=""/>
+        <p:cNvGrpSpPr/>
+        <p:nvPr/>
+      </p:nvGrpSpPr>
+      <p:grpSpPr/>
+      <p:sp>
+        <p:nvSpPr>
+          <p:cNvPr id="2" name="Rectangle 1"/>
           <p:cNvSpPr/>
           <p:nvPr/>
         </p:nvSpPr>
         <p:spPr>
           <a:xfrm>
-            <a:off x="502920" y="2066543"/>
-            <a:ext cx="1554480" cy="621792"/>
-          </a:xfrm>
-          <a:prstGeom prst="roundRect">
-            <a:avLst/>
-          </a:prstGeom>
-          <a:solidFill>
-            <a:srgbClr val="2A9D8F"/>
-          </a:solidFill>
-          <a:ln w="12700">
-            <a:solidFill>
-              <a:srgbClr val="2A9D8F"/>
-            </a:solidFill>
-          </a:ln>
-          <a:effectLst/>
-        </p:spPr>
-        <p:style>
-          <a:lnRef idx="1">
-            <a:schemeClr val="accent1"/>
-          </a:lnRef>
-          <a:fillRef idx="3">
-            <a:schemeClr val="accent1"/>
-          </a:fillRef>
-          <a:effectRef idx="2">
-            <a:schemeClr val="accent1"/>
-          </a:effectRef>
-          <a:fontRef idx="minor">
-            <a:schemeClr val="lt1"/>
-          </a:fontRef>
-        </p:style>
-        <p:txBody>
-          <a:bodyPr rtlCol="0" anchor="ctr" wrap="square" lIns="76200" rIns="76200" tIns="38100" bIns="38100"/>
-          <a:lstStyle/>
-          <a:p>
-            <a:pPr algn="ctr">
-              <a:lnSpc>
-                <a:spcPct val="118000"/>
-              </a:lnSpc>
-              <a:spcBef>
-                <a:spcPts val="0"/>
-              </a:spcBef>
-              <a:spcAft>
-                <a:spcPts val="300"/>
-              </a:spcAft>
-            </a:pPr>
-            <a:r>
-              <a:rPr sz="1250" b="1" i="0">
-                <a:solidFill>
-                  <a:srgbClr val="FFFFFF"/>
-                </a:solidFill>
-                <a:latin typeface="Noto Sans CJK KR"/>
-              </a:rPr>
-              <a:t>Miras</a:t>
-            </a:r>
-          </a:p>
-        </p:txBody>
-      </p:sp>
-      <p:sp>
-        <p:nvSpPr>
-          <p:cNvPr id="8" name="Rounded Rectangle 7"/>
-          <p:cNvSpPr/>
-          <p:nvPr/>
-        </p:nvSpPr>
-        <p:spPr>
-          <a:xfrm>
-            <a:off x="2148840" y="2066543"/>
-            <a:ext cx="9509760" cy="621792"/>
-          </a:xfrm>
-          <a:prstGeom prst="roundRect">
-            <a:avLst/>
-          </a:prstGeom>
-          <a:solidFill>
-            <a:srgbClr val="FFFFFF"/>
-          </a:solidFill>
-          <a:ln w="12700">
-            <a:solidFill>
-              <a:srgbClr val="8A8F98"/>
-            </a:solidFill>
-          </a:ln>
-          <a:effectLst/>
-        </p:spPr>
-        <p:style>
-          <a:lnRef idx="1">
-            <a:schemeClr val="accent1"/>
-          </a:lnRef>
-          <a:fillRef idx="3">
-            <a:schemeClr val="accent1"/>
-          </a:fillRef>
-          <a:effectRef idx="2">
-            <a:schemeClr val="accent1"/>
-          </a:effectRef>
-          <a:fontRef idx="minor">
-            <a:schemeClr val="lt1"/>
-          </a:fontRef>
-        </p:style>
-        <p:txBody>
-          <a:bodyPr rtlCol="0" anchor="ctr" wrap="square" lIns="76200" rIns="76200" tIns="38100" bIns="38100"/>
-          <a:lstStyle/>
-          <a:p>
-            <a:pPr algn="l">
-              <a:lnSpc>
-                <a:spcPct val="118000"/>
-              </a:lnSpc>
-              <a:spcBef>
-                <a:spcPts val="0"/>
-              </a:spcBef>
-              <a:spcAft>
-                <a:spcPts val="300"/>
-              </a:spcAft>
-            </a:pPr>
-            <a:r>
-              <a:rPr sz="1200" b="0" i="0">
-                <a:solidFill>
-                  <a:srgbClr val="22252B"/>
-                </a:solidFill>
-                <a:latin typeface="Noto Sans CJK KR"/>
-              </a:rPr>
-              <a:t>그 설계를 4축 공간으로 조직화 — 무엇을·무엇을 잊고·어떤 구조로·어떤 알고리즘으로.</a:t>
-            </a:r>
-          </a:p>
-        </p:txBody>
-      </p:sp>
-      <p:sp>
-        <p:nvSpPr>
-          <p:cNvPr id="9" name="Rounded Rectangle 8"/>
-          <p:cNvSpPr/>
-          <p:nvPr/>
-        </p:nvSpPr>
-        <p:spPr>
-          <a:xfrm>
-            <a:off x="502920" y="2761487"/>
-            <a:ext cx="1554480" cy="621792"/>
-          </a:xfrm>
-          <a:prstGeom prst="roundRect">
-            <a:avLst/>
-          </a:prstGeom>
-          <a:solidFill>
-            <a:srgbClr val="2A9D8F"/>
-          </a:solidFill>
-          <a:ln w="12700">
-            <a:solidFill>
-              <a:srgbClr val="2A9D8F"/>
-            </a:solidFill>
-          </a:ln>
-          <a:effectLst/>
-        </p:spPr>
-        <p:style>
-          <a:lnRef idx="1">
-            <a:schemeClr val="accent1"/>
-          </a:lnRef>
-          <a:fillRef idx="3">
-            <a:schemeClr val="accent1"/>
-          </a:fillRef>
-          <a:effectRef idx="2">
-            <a:schemeClr val="accent1"/>
-          </a:effectRef>
-          <a:fontRef idx="minor">
-            <a:schemeClr val="lt1"/>
-          </a:fontRef>
-        </p:style>
-        <p:txBody>
-          <a:bodyPr rtlCol="0" anchor="ctr" wrap="square" lIns="76200" rIns="76200" tIns="38100" bIns="38100"/>
-          <a:lstStyle/>
-          <a:p>
-            <a:pPr algn="ctr">
-              <a:lnSpc>
-                <a:spcPct val="118000"/>
-              </a:lnSpc>
-              <a:spcBef>
-                <a:spcPts val="0"/>
-              </a:spcBef>
-              <a:spcAft>
-                <a:spcPts val="300"/>
-              </a:spcAft>
-            </a:pPr>
-            <a:r>
-              <a:rPr sz="1250" b="1" i="0">
-                <a:solidFill>
-                  <a:srgbClr val="FFFFFF"/>
-                </a:solidFill>
-                <a:latin typeface="Noto Sans CJK KR"/>
-              </a:rPr>
-              <a:t>Atlas</a:t>
-            </a:r>
-          </a:p>
-        </p:txBody>
-      </p:sp>
-      <p:sp>
-        <p:nvSpPr>
-          <p:cNvPr id="10" name="Rounded Rectangle 9"/>
-          <p:cNvSpPr/>
-          <p:nvPr/>
-        </p:nvSpPr>
-        <p:spPr>
-          <a:xfrm>
-            <a:off x="2148840" y="2761487"/>
-            <a:ext cx="9509760" cy="621792"/>
-          </a:xfrm>
-          <a:prstGeom prst="roundRect">
-            <a:avLst/>
-          </a:prstGeom>
-          <a:solidFill>
-            <a:srgbClr val="FFFFFF"/>
-          </a:solidFill>
-          <a:ln w="12700">
-            <a:solidFill>
-              <a:srgbClr val="8A8F98"/>
-            </a:solidFill>
-          </a:ln>
-          <a:effectLst/>
-        </p:spPr>
-        <p:style>
-          <a:lnRef idx="1">
-            <a:schemeClr val="accent1"/>
-          </a:lnRef>
-          <a:fillRef idx="3">
-            <a:schemeClr val="accent1"/>
-          </a:fillRef>
-          <a:effectRef idx="2">
-            <a:schemeClr val="accent1"/>
-          </a:effectRef>
-          <a:fontRef idx="minor">
-            <a:schemeClr val="lt1"/>
-          </a:fontRef>
-        </p:style>
-        <p:txBody>
-          <a:bodyPr rtlCol="0" anchor="ctr" wrap="square" lIns="76200" rIns="76200" tIns="38100" bIns="38100"/>
-          <a:lstStyle/>
-          <a:p>
-            <a:pPr algn="l">
-              <a:lnSpc>
-                <a:spcPct val="118000"/>
-              </a:lnSpc>
-              <a:spcBef>
-                <a:spcPts val="0"/>
-              </a:spcBef>
-              <a:spcAft>
-                <a:spcPts val="300"/>
-              </a:spcAft>
-            </a:pPr>
-            <a:r>
-              <a:rPr sz="1200" b="0" i="0">
-                <a:solidFill>
-                  <a:srgbClr val="22252B"/>
-                </a:solidFill>
-                <a:latin typeface="Noto Sans CJK KR"/>
-              </a:rPr>
-              <a:t>문맥 단위 기억(Omega)과 용량 확장(feature map)+Muon으로 표현력을 키운다.</a:t>
-            </a:r>
-          </a:p>
-        </p:txBody>
-      </p:sp>
-      <p:sp>
-        <p:nvSpPr>
-          <p:cNvPr id="11" name="Rounded Rectangle 10"/>
-          <p:cNvSpPr/>
-          <p:nvPr/>
-        </p:nvSpPr>
-        <p:spPr>
-          <a:xfrm>
-            <a:off x="502920" y="3456431"/>
-            <a:ext cx="1554480" cy="621792"/>
-          </a:xfrm>
-          <a:prstGeom prst="roundRect">
-            <a:avLst/>
-          </a:prstGeom>
-          <a:solidFill>
-            <a:srgbClr val="2A9D8F"/>
-          </a:solidFill>
-          <a:ln w="12700">
-            <a:solidFill>
-              <a:srgbClr val="2A9D8F"/>
-            </a:solidFill>
-          </a:ln>
-          <a:effectLst/>
-        </p:spPr>
-        <p:style>
-          <a:lnRef idx="1">
-            <a:schemeClr val="accent1"/>
-          </a:lnRef>
-          <a:fillRef idx="3">
-            <a:schemeClr val="accent1"/>
-          </a:fillRef>
-          <a:effectRef idx="2">
-            <a:schemeClr val="accent1"/>
-          </a:effectRef>
-          <a:fontRef idx="minor">
-            <a:schemeClr val="lt1"/>
-          </a:fontRef>
-        </p:style>
-        <p:txBody>
-          <a:bodyPr rtlCol="0" anchor="ctr" wrap="square" lIns="76200" rIns="76200" tIns="38100" bIns="38100"/>
-          <a:lstStyle/>
-          <a:p>
-            <a:pPr algn="ctr">
-              <a:lnSpc>
-                <a:spcPct val="118000"/>
-              </a:lnSpc>
-              <a:spcBef>
-                <a:spcPts val="0"/>
-              </a:spcBef>
-              <a:spcAft>
-                <a:spcPts val="300"/>
-              </a:spcAft>
-            </a:pPr>
-            <a:r>
-              <a:rPr sz="1250" b="1" i="0">
-                <a:solidFill>
-                  <a:srgbClr val="FFFFFF"/>
-                </a:solidFill>
-                <a:latin typeface="Noto Sans CJK KR"/>
-              </a:rPr>
-              <a:t>TNT</a:t>
-            </a:r>
-          </a:p>
-        </p:txBody>
-      </p:sp>
-      <p:sp>
-        <p:nvSpPr>
-          <p:cNvPr id="12" name="Rounded Rectangle 11"/>
-          <p:cNvSpPr/>
-          <p:nvPr/>
-        </p:nvSpPr>
-        <p:spPr>
-          <a:xfrm>
-            <a:off x="2148840" y="3456431"/>
-            <a:ext cx="9509760" cy="621792"/>
-          </a:xfrm>
-          <a:prstGeom prst="roundRect">
-            <a:avLst/>
-          </a:prstGeom>
-          <a:solidFill>
-            <a:srgbClr val="FFFFFF"/>
-          </a:solidFill>
-          <a:ln w="12700">
-            <a:solidFill>
-              <a:srgbClr val="8A8F98"/>
-            </a:solidFill>
-          </a:ln>
-          <a:effectLst/>
-        </p:spPr>
-        <p:style>
-          <a:lnRef idx="1">
-            <a:schemeClr val="accent1"/>
-          </a:lnRef>
-          <a:fillRef idx="3">
-            <a:schemeClr val="accent1"/>
-          </a:fillRef>
-          <a:effectRef idx="2">
-            <a:schemeClr val="accent1"/>
-          </a:effectRef>
-          <a:fontRef idx="minor">
-            <a:schemeClr val="lt1"/>
-          </a:fontRef>
-        </p:style>
-        <p:txBody>
-          <a:bodyPr rtlCol="0" anchor="ctr" wrap="square" lIns="76200" rIns="76200" tIns="38100" bIns="38100"/>
-          <a:lstStyle/>
-          <a:p>
-            <a:pPr algn="l">
-              <a:lnSpc>
-                <a:spcPct val="118000"/>
-              </a:lnSpc>
-              <a:spcBef>
-                <a:spcPts val="0"/>
-              </a:spcBef>
-              <a:spcAft>
-                <a:spcPts val="300"/>
-              </a:spcAft>
-            </a:pPr>
-            <a:r>
-              <a:rPr sz="1200" b="0" i="0">
-                <a:solidFill>
-                  <a:srgbClr val="22252B"/>
-                </a:solidFill>
-                <a:latin typeface="Noto Sans CJK KR"/>
-              </a:rPr>
-              <a:t>train/serve chunk 정렬과 global/local 계층으로 '어떻게 배포하나'를 답한다.</a:t>
-            </a:r>
-          </a:p>
-        </p:txBody>
-      </p:sp>
-      <p:sp>
-        <p:nvSpPr>
-          <p:cNvPr id="13" name="Rounded Rectangle 12"/>
-          <p:cNvSpPr/>
-          <p:nvPr/>
-        </p:nvSpPr>
-        <p:spPr>
-          <a:xfrm>
-            <a:off x="502920" y="4151375"/>
-            <a:ext cx="1554480" cy="621792"/>
-          </a:xfrm>
-          <a:prstGeom prst="roundRect">
+            <a:off x="0" y="0"/>
+            <a:ext cx="12191695" cy="54864"/>
+          </a:xfrm>
+          <a:prstGeom prst="rect">
             <a:avLst/>
           </a:prstGeom>
           <a:solidFill>
@@ -48106,35 +48000,123 @@
               </a:spcAft>
             </a:pPr>
             <a:r>
-              <a:rPr sz="1250" b="1" i="0">
-                <a:solidFill>
-                  <a:srgbClr val="FFFFFF"/>
-                </a:solidFill>
-                <a:latin typeface="Noto Sans CJK KR"/>
-              </a:rPr>
-              <a:t>HOPE</a:t>
-            </a:r>
-          </a:p>
-        </p:txBody>
-      </p:sp>
-      <p:sp>
-        <p:nvSpPr>
-          <p:cNvPr id="14" name="Rounded Rectangle 13"/>
+              <a:rPr sz="1100" b="0" i="0">
+                <a:solidFill>
+                  <a:srgbClr val="22252B"/>
+                </a:solidFill>
+                <a:latin typeface="Noto Sans CJK KR"/>
+              </a:rPr>
+              <a:t/>
+            </a:r>
+          </a:p>
+        </p:txBody>
+      </p:sp>
+      <p:sp>
+        <p:nvSpPr>
+          <p:cNvPr id="3" name="TextBox 2"/>
+          <p:cNvSpPr txBox="1"/>
+          <p:nvPr/>
+        </p:nvSpPr>
+        <p:spPr>
+          <a:xfrm>
+            <a:off x="502920" y="146304"/>
+            <a:ext cx="11185855" cy="320040"/>
+          </a:xfrm>
+          <a:prstGeom prst="rect">
+            <a:avLst/>
+          </a:prstGeom>
+          <a:noFill/>
+        </p:spPr>
+        <p:txBody>
+          <a:bodyPr wrap="square" anchor="t" lIns="38100" rIns="38100" tIns="25400" bIns="25400">
+            <a:spAutoFit/>
+          </a:bodyPr>
+          <a:lstStyle/>
+          <a:p>
+            <a:pPr algn="l">
+              <a:lnSpc>
+                <a:spcPct val="120000"/>
+              </a:lnSpc>
+              <a:spcBef>
+                <a:spcPts val="0"/>
+              </a:spcBef>
+              <a:spcAft>
+                <a:spcPts val="0"/>
+              </a:spcAft>
+            </a:pPr>
+            <a:r>
+              <a:rPr sz="1350" b="1" i="0">
+                <a:solidFill>
+                  <a:srgbClr val="C9A227"/>
+                </a:solidFill>
+                <a:latin typeface="Noto Sans CJK KR"/>
+              </a:rPr>
+              <a:t>C3 · HOPE block roofline (H100 트윈)</a:t>
+            </a:r>
+          </a:p>
+        </p:txBody>
+      </p:sp>
+      <p:sp>
+        <p:nvSpPr>
+          <p:cNvPr id="4" name="TextBox 3"/>
+          <p:cNvSpPr txBox="1"/>
+          <p:nvPr/>
+        </p:nvSpPr>
+        <p:spPr>
+          <a:xfrm>
+            <a:off x="502920" y="457200"/>
+            <a:ext cx="11185855" cy="566928"/>
+          </a:xfrm>
+          <a:prstGeom prst="rect">
+            <a:avLst/>
+          </a:prstGeom>
+          <a:noFill/>
+        </p:spPr>
+        <p:txBody>
+          <a:bodyPr wrap="square" anchor="t" lIns="38100" rIns="38100" tIns="25400" bIns="25400">
+            <a:spAutoFit/>
+          </a:bodyPr>
+          <a:lstStyle/>
+          <a:p>
+            <a:pPr algn="l">
+              <a:lnSpc>
+                <a:spcPct val="120000"/>
+              </a:lnSpc>
+              <a:spcBef>
+                <a:spcPts val="0"/>
+              </a:spcBef>
+              <a:spcAft>
+                <a:spcPts val="0"/>
+              </a:spcAft>
+            </a:pPr>
+            <a:r>
+              <a:rPr sz="2400" b="1" i="0">
+                <a:solidFill>
+                  <a:srgbClr val="22252B"/>
+                </a:solidFill>
+                <a:latin typeface="Noto Sans CJK KR"/>
+              </a:rPr>
+              <a:t>1개 HOPE block을 실제 수치로 — 어디가 병목인가</a:t>
+            </a:r>
+          </a:p>
+        </p:txBody>
+      </p:sp>
+      <p:sp>
+        <p:nvSpPr>
+          <p:cNvPr id="5" name="Rectangle 4"/>
           <p:cNvSpPr/>
           <p:nvPr/>
         </p:nvSpPr>
         <p:spPr>
           <a:xfrm>
-            <a:off x="2148840" y="4151375"/>
-            <a:ext cx="9509760" cy="621792"/>
-          </a:xfrm>
-          <a:prstGeom prst="roundRect">
-            <a:avLst/>
-          </a:prstGeom>
-          <a:solidFill>
-            <a:srgbClr val="FFFFFF"/>
-          </a:solidFill>
-          <a:ln w="12700">
+            <a:off x="643845" y="1335024"/>
+            <a:ext cx="5250269" cy="2889504"/>
+          </a:xfrm>
+          <a:prstGeom prst="rect">
+            <a:avLst/>
+          </a:prstGeom>
+          <a:noFill/>
+          <a:ln w="9525">
             <a:solidFill>
               <a:srgbClr val="8A8F98"/>
             </a:solidFill>
@@ -48156,52 +48138,100 @@
           </a:fontRef>
         </p:style>
         <p:txBody>
-          <a:bodyPr rtlCol="0" anchor="ctr" wrap="square" lIns="76200" rIns="76200" tIns="38100" bIns="38100"/>
-          <a:lstStyle/>
-          <a:p>
-            <a:pPr algn="l">
-              <a:lnSpc>
-                <a:spcPct val="118000"/>
-              </a:lnSpc>
-              <a:spcBef>
-                <a:spcPts val="0"/>
-              </a:spcBef>
-              <a:spcAft>
-                <a:spcPts val="300"/>
-              </a:spcAft>
-            </a:pPr>
-            <a:r>
-              <a:rPr sz="1200" b="0" i="0">
-                <a:solidFill>
-                  <a:srgbClr val="22252B"/>
-                </a:solidFill>
-                <a:latin typeface="Noto Sans CJK KR"/>
-              </a:rPr>
-              <a:t>optimizer=memory·self-mod·CMS로 앞 4편을 하나의 중첩 시스템으로 통합.</a:t>
-            </a:r>
-          </a:p>
-        </p:txBody>
-      </p:sp>
-      <p:sp>
-        <p:nvSpPr>
-          <p:cNvPr id="15" name="Rounded Rectangle 14"/>
+          <a:bodyPr rtlCol="0" anchor="ctr"/>
+          <a:lstStyle/>
+          <a:p>
+            <a:pPr algn="ctr"/>
+          </a:p>
+        </p:txBody>
+      </p:sp>
+      <p:pic>
+        <p:nvPicPr>
+          <p:cNvPr id="6" name="Picture 5" descr="fig-hope-dag.png"/>
+          <p:cNvPicPr>
+            <a:picLocks noChangeAspect="1"/>
+          </p:cNvPicPr>
+          <p:nvPr/>
+        </p:nvPicPr>
+        <p:blipFill>
+          <a:blip r:embed="rId2"/>
+          <a:stretch>
+            <a:fillRect/>
+          </a:stretch>
+        </p:blipFill>
+        <p:spPr>
+          <a:xfrm>
+            <a:off x="680421" y="1371600"/>
+            <a:ext cx="5177117" cy="2816352"/>
+          </a:xfrm>
+          <a:prstGeom prst="rect">
+            <a:avLst/>
+          </a:prstGeom>
+        </p:spPr>
+      </p:pic>
+      <p:sp>
+        <p:nvSpPr>
+          <p:cNvPr id="7" name="TextBox 6"/>
+          <p:cNvSpPr txBox="1"/>
+          <p:nvPr/>
+        </p:nvSpPr>
+        <p:spPr>
+          <a:xfrm>
+            <a:off x="502920" y="4206240"/>
+            <a:ext cx="5532120" cy="365760"/>
+          </a:xfrm>
+          <a:prstGeom prst="rect">
+            <a:avLst/>
+          </a:prstGeom>
+          <a:noFill/>
+        </p:spPr>
+        <p:txBody>
+          <a:bodyPr wrap="square" anchor="t" lIns="38100" rIns="38100" tIns="25400" bIns="25400">
+            <a:spAutoFit/>
+          </a:bodyPr>
+          <a:lstStyle/>
+          <a:p>
+            <a:pPr algn="ctr">
+              <a:lnSpc>
+                <a:spcPct val="120000"/>
+              </a:lnSpc>
+              <a:spcBef>
+                <a:spcPts val="0"/>
+              </a:spcBef>
+              <a:spcAft>
+                <a:spcPts val="0"/>
+              </a:spcAft>
+            </a:pPr>
+            <a:r>
+              <a:rPr sz="1050" b="0" i="0">
+                <a:solidFill>
+                  <a:srgbClr val="22252B"/>
+                </a:solidFill>
+                <a:latin typeface="Noto Sans CJK KR"/>
+              </a:rPr>
+              <a:t>1 HOPE block(self-mod Titans→CMS)의 전 연산 DAG (B=1, chunk C, d=2048)</a:t>
+            </a:r>
+          </a:p>
+        </p:txBody>
+      </p:sp>
+      <p:sp>
+        <p:nvSpPr>
+          <p:cNvPr id="8" name="Rectangle 7"/>
           <p:cNvSpPr/>
           <p:nvPr/>
         </p:nvSpPr>
         <p:spPr>
           <a:xfrm>
-            <a:off x="502920" y="4846319"/>
-            <a:ext cx="1554480" cy="621792"/>
-          </a:xfrm>
-          <a:prstGeom prst="roundRect">
-            <a:avLst/>
-          </a:prstGeom>
-          <a:solidFill>
-            <a:srgbClr val="2A9D8F"/>
-          </a:solidFill>
-          <a:ln w="12700">
+            <a:off x="6227064" y="1901586"/>
+            <a:ext cx="5468112" cy="1756379"/>
+          </a:xfrm>
+          <a:prstGeom prst="rect">
+            <a:avLst/>
+          </a:prstGeom>
+          <a:noFill/>
+          <a:ln w="9525">
             <a:solidFill>
-              <a:srgbClr val="2A9D8F"/>
+              <a:srgbClr val="8A8F98"/>
             </a:solidFill>
           </a:ln>
           <a:effectLst/>
@@ -48221,52 +48251,102 @@
           </a:fontRef>
         </p:style>
         <p:txBody>
-          <a:bodyPr rtlCol="0" anchor="ctr" wrap="square" lIns="76200" rIns="76200" tIns="38100" bIns="38100"/>
+          <a:bodyPr rtlCol="0" anchor="ctr"/>
+          <a:lstStyle/>
+          <a:p>
+            <a:pPr algn="ctr"/>
+          </a:p>
+        </p:txBody>
+      </p:sp>
+      <p:pic>
+        <p:nvPicPr>
+          <p:cNvPr id="9" name="Picture 8" descr="fig-hope-roofline.png"/>
+          <p:cNvPicPr>
+            <a:picLocks noChangeAspect="1"/>
+          </p:cNvPicPr>
+          <p:nvPr/>
+        </p:nvPicPr>
+        <p:blipFill>
+          <a:blip r:embed="rId3"/>
+          <a:stretch>
+            <a:fillRect/>
+          </a:stretch>
+        </p:blipFill>
+        <p:spPr>
+          <a:xfrm>
+            <a:off x="6263640" y="1938162"/>
+            <a:ext cx="5394960" cy="1683227"/>
+          </a:xfrm>
+          <a:prstGeom prst="rect">
+            <a:avLst/>
+          </a:prstGeom>
+        </p:spPr>
+      </p:pic>
+      <p:sp>
+        <p:nvSpPr>
+          <p:cNvPr id="10" name="TextBox 9"/>
+          <p:cNvSpPr txBox="1"/>
+          <p:nvPr/>
+        </p:nvSpPr>
+        <p:spPr>
+          <a:xfrm>
+            <a:off x="6263640" y="4206240"/>
+            <a:ext cx="5394960" cy="365760"/>
+          </a:xfrm>
+          <a:prstGeom prst="rect">
+            <a:avLst/>
+          </a:prstGeom>
+          <a:noFill/>
+        </p:spPr>
+        <p:txBody>
+          <a:bodyPr wrap="square" anchor="t" lIns="38100" rIns="38100" tIns="25400" bIns="25400">
+            <a:spAutoFit/>
+          </a:bodyPr>
           <a:lstStyle/>
           <a:p>
             <a:pPr algn="ctr">
               <a:lnSpc>
-                <a:spcPct val="118000"/>
-              </a:lnSpc>
-              <a:spcBef>
-                <a:spcPts val="0"/>
-              </a:spcBef>
-              <a:spcAft>
-                <a:spcPts val="300"/>
-              </a:spcAft>
-            </a:pPr>
-            <a:r>
-              <a:rPr sz="1250" b="1" i="0">
-                <a:solidFill>
-                  <a:srgbClr val="FFFFFF"/>
-                </a:solidFill>
-                <a:latin typeface="Noto Sans CJK KR"/>
-              </a:rPr>
-              <a:t>Sleep</a:t>
-            </a:r>
-          </a:p>
-        </p:txBody>
-      </p:sp>
-      <p:sp>
-        <p:nvSpPr>
-          <p:cNvPr id="16" name="Rounded Rectangle 15"/>
+                <a:spcPct val="120000"/>
+              </a:lnSpc>
+              <a:spcBef>
+                <a:spcPts val="0"/>
+              </a:spcBef>
+              <a:spcAft>
+                <a:spcPts val="0"/>
+              </a:spcAft>
+            </a:pPr>
+            <a:r>
+              <a:rPr sz="1050" b="0" i="0">
+                <a:solidFill>
+                  <a:srgbClr val="22252B"/>
+                </a:solidFill>
+                <a:latin typeface="Noto Sans CJK KR"/>
+              </a:rPr>
+              <a:t>roofline·op별 시간·PIM 비교 (BW 3.35TB/s, peak 0.99PF, ridge 295)</a:t>
+            </a:r>
+          </a:p>
+        </p:txBody>
+      </p:sp>
+      <p:sp>
+        <p:nvSpPr>
+          <p:cNvPr id="11" name="Rounded Rectangle 10"/>
           <p:cNvSpPr/>
           <p:nvPr/>
         </p:nvSpPr>
         <p:spPr>
           <a:xfrm>
-            <a:off x="2148840" y="4846319"/>
-            <a:ext cx="9509760" cy="621792"/>
+            <a:off x="502920" y="4709160"/>
+            <a:ext cx="11155680" cy="960120"/>
           </a:xfrm>
           <a:prstGeom prst="roundRect">
             <a:avLst/>
           </a:prstGeom>
           <a:solidFill>
-            <a:srgbClr val="FFFFFF"/>
+            <a:srgbClr val="F6DDDD"/>
           </a:solidFill>
           <a:ln w="12700">
             <a:solidFill>
-              <a:srgbClr val="8A8F98"/>
+              <a:srgbClr val="C1121F"/>
             </a:solidFill>
           </a:ln>
           <a:effectLst/>
@@ -48297,6 +48377,28 @@
                 <a:spcPts val="0"/>
               </a:spcBef>
               <a:spcAft>
+                <a:spcPts val="200"/>
+              </a:spcAft>
+            </a:pPr>
+            <a:r>
+              <a:rPr sz="1250" b="1" i="0">
+                <a:solidFill>
+                  <a:srgbClr val="C1121F"/>
+                </a:solidFill>
+                <a:latin typeface="Noto Sans CJK KR"/>
+              </a:rPr>
+              <a:t>병목</a:t>
+            </a:r>
+          </a:p>
+          <a:p>
+            <a:pPr algn="l">
+              <a:lnSpc>
+                <a:spcPct val="118000"/>
+              </a:lnSpc>
+              <a:spcBef>
+                <a:spcPts val="0"/>
+              </a:spcBef>
+              <a:spcAft>
                 <a:spcPts val="300"/>
               </a:spcAft>
             </a:pPr>
@@ -48307,182 +48409,7 @@
                 </a:solidFill>
                 <a:latin typeface="Noto Sans CJK KR"/>
               </a:rPr>
-              <a:t>wake/sleep 생애주기로 지식을 오프라인에서 위로 옮겨 파라미터를 키운다.</a:t>
-            </a:r>
-          </a:p>
-        </p:txBody>
-      </p:sp>
-      <p:sp>
-        <p:nvSpPr>
-          <p:cNvPr id="17" name="Rounded Rectangle 16"/>
-          <p:cNvSpPr/>
-          <p:nvPr/>
-        </p:nvSpPr>
-        <p:spPr>
-          <a:xfrm>
-            <a:off x="502920" y="5541263"/>
-            <a:ext cx="1554480" cy="621792"/>
-          </a:xfrm>
-          <a:prstGeom prst="roundRect">
-            <a:avLst/>
-          </a:prstGeom>
-          <a:solidFill>
-            <a:srgbClr val="C9A227"/>
-          </a:solidFill>
-          <a:ln w="12700">
-            <a:solidFill>
-              <a:srgbClr val="C9A227"/>
-            </a:solidFill>
-          </a:ln>
-          <a:effectLst/>
-        </p:spPr>
-        <p:style>
-          <a:lnRef idx="1">
-            <a:schemeClr val="accent1"/>
-          </a:lnRef>
-          <a:fillRef idx="3">
-            <a:schemeClr val="accent1"/>
-          </a:fillRef>
-          <a:effectRef idx="2">
-            <a:schemeClr val="accent1"/>
-          </a:effectRef>
-          <a:fontRef idx="minor">
-            <a:schemeClr val="lt1"/>
-          </a:fontRef>
-        </p:style>
-        <p:txBody>
-          <a:bodyPr rtlCol="0" anchor="ctr" wrap="square" lIns="76200" rIns="76200" tIns="38100" bIns="38100"/>
-          <a:lstStyle/>
-          <a:p>
-            <a:pPr algn="ctr">
-              <a:lnSpc>
-                <a:spcPct val="118000"/>
-              </a:lnSpc>
-              <a:spcBef>
-                <a:spcPts val="0"/>
-              </a:spcBef>
-              <a:spcAft>
-                <a:spcPts val="300"/>
-              </a:spcAft>
-            </a:pPr>
-            <a:r>
-              <a:rPr sz="1250" b="1" i="0">
-                <a:solidFill>
-                  <a:srgbClr val="FFFFFF"/>
-                </a:solidFill>
-                <a:latin typeface="Noto Sans CJK KR"/>
-              </a:rPr>
-              <a:t>우리 기여</a:t>
-            </a:r>
-          </a:p>
-        </p:txBody>
-      </p:sp>
-      <p:sp>
-        <p:nvSpPr>
-          <p:cNvPr id="18" name="Rounded Rectangle 17"/>
-          <p:cNvSpPr/>
-          <p:nvPr/>
-        </p:nvSpPr>
-        <p:spPr>
-          <a:xfrm>
-            <a:off x="2148840" y="5541263"/>
-            <a:ext cx="9509760" cy="621792"/>
-          </a:xfrm>
-          <a:prstGeom prst="roundRect">
-            <a:avLst/>
-          </a:prstGeom>
-          <a:solidFill>
-            <a:srgbClr val="FFFFFF"/>
-          </a:solidFill>
-          <a:ln w="12700">
-            <a:solidFill>
-              <a:srgbClr val="8A8F98"/>
-            </a:solidFill>
-          </a:ln>
-          <a:effectLst/>
-        </p:spPr>
-        <p:style>
-          <a:lnRef idx="1">
-            <a:schemeClr val="accent1"/>
-          </a:lnRef>
-          <a:fillRef idx="3">
-            <a:schemeClr val="accent1"/>
-          </a:fillRef>
-          <a:effectRef idx="2">
-            <a:schemeClr val="accent1"/>
-          </a:effectRef>
-          <a:fontRef idx="minor">
-            <a:schemeClr val="lt1"/>
-          </a:fontRef>
-        </p:style>
-        <p:txBody>
-          <a:bodyPr rtlCol="0" anchor="ctr" wrap="square" lIns="76200" rIns="76200" tIns="38100" bIns="38100"/>
-          <a:lstStyle/>
-          <a:p>
-            <a:pPr algn="l">
-              <a:lnSpc>
-                <a:spcPct val="118000"/>
-              </a:lnSpc>
-              <a:spcBef>
-                <a:spcPts val="0"/>
-              </a:spcBef>
-              <a:spcAft>
-                <a:spcPts val="300"/>
-              </a:spcAft>
-            </a:pPr>
-            <a:r>
-              <a:rPr sz="1200" b="0" i="0">
-                <a:solidFill>
-                  <a:srgbClr val="22252B"/>
-                </a:solidFill>
-                <a:latin typeface="Noto Sans CJK KR"/>
-              </a:rPr>
-              <a:t>이 배포는 디코드에서 memory-bound — 8칩 측정+HOPE roofline+zHBM/SRAM로 비용과 청사진을 냈다.</a:t>
-            </a:r>
-          </a:p>
-        </p:txBody>
-      </p:sp>
-      <p:sp>
-        <p:nvSpPr>
-          <p:cNvPr id="19" name="TextBox 18"/>
-          <p:cNvSpPr txBox="1"/>
-          <p:nvPr/>
-        </p:nvSpPr>
-        <p:spPr>
-          <a:xfrm>
-            <a:off x="502920" y="6355080"/>
-            <a:ext cx="10972800" cy="274320"/>
-          </a:xfrm>
-          <a:prstGeom prst="rect">
-            <a:avLst/>
-          </a:prstGeom>
-          <a:noFill/>
-        </p:spPr>
-        <p:txBody>
-          <a:bodyPr wrap="square" anchor="t" lIns="38100" rIns="38100" tIns="25400" bIns="25400">
-            <a:spAutoFit/>
-          </a:bodyPr>
-          <a:lstStyle/>
-          <a:p>
-            <a:pPr algn="ctr">
-              <a:lnSpc>
-                <a:spcPct val="120000"/>
-              </a:lnSpc>
-              <a:spcBef>
-                <a:spcPts val="0"/>
-              </a:spcBef>
-              <a:spcAft>
-                <a:spcPts val="0"/>
-              </a:spcAft>
-            </a:pPr>
-            <a:r>
-              <a:rPr sz="1300" b="1" i="0">
-                <a:solidFill>
-                  <a:srgbClr val="22252B"/>
-                </a:solidFill>
-                <a:latin typeface="Noto Sans CJK KR"/>
-              </a:rPr>
-              <a:t>감사합니다 · Q&amp;A</a:t>
+              <a:t>C=1 디코드는 roofline 왼쪽(memory-bound). op별로 보면 CMS/DGD-apply의 state read-modify-write가 지배적. state(≈134MB) + weights를 매 토큰 HBM(3.35TB/s)에서 읽어야 해 block당 ~203µs(ideal 하한).</a:t>
             </a:r>
           </a:p>
         </p:txBody>
@@ -49210,6 +49137,2341 @@
                 <a:latin typeface="Noto Sans CJK KR"/>
               </a:rPr>
               <a:t>한 스텝마다 데이터 N개를 전부 봐야 함 → 너무 느리다.  → SGD</a:t>
+            </a:r>
+          </a:p>
+        </p:txBody>
+      </p:sp>
+    </p:spTree>
+  </p:cSld>
+  <p:clrMapOvr>
+    <a:masterClrMapping/>
+  </p:clrMapOvr>
+</p:sld>
+</file>
+
+<file path=ppt/slides/slide70.xml><?xml version="1.0" encoding="utf-8"?>
+<p:sld xmlns:a="http://schemas.openxmlformats.org/drawingml/2006/main" xmlns:p="http://schemas.openxmlformats.org/presentationml/2006/main" xmlns:r="http://schemas.openxmlformats.org/officeDocument/2006/relationships">
+  <p:cSld>
+    <p:spTree>
+      <p:nvGrpSpPr>
+        <p:cNvPr id="1" name=""/>
+        <p:cNvGrpSpPr/>
+        <p:nvPr/>
+      </p:nvGrpSpPr>
+      <p:grpSpPr/>
+      <p:sp>
+        <p:nvSpPr>
+          <p:cNvPr id="2" name="Rectangle 1"/>
+          <p:cNvSpPr/>
+          <p:nvPr/>
+        </p:nvSpPr>
+        <p:spPr>
+          <a:xfrm>
+            <a:off x="0" y="0"/>
+            <a:ext cx="12191695" cy="54864"/>
+          </a:xfrm>
+          <a:prstGeom prst="rect">
+            <a:avLst/>
+          </a:prstGeom>
+          <a:solidFill>
+            <a:srgbClr val="C9A227"/>
+          </a:solidFill>
+          <a:ln w="12700">
+            <a:solidFill>
+              <a:srgbClr val="C9A227"/>
+            </a:solidFill>
+          </a:ln>
+          <a:effectLst/>
+        </p:spPr>
+        <p:style>
+          <a:lnRef idx="1">
+            <a:schemeClr val="accent1"/>
+          </a:lnRef>
+          <a:fillRef idx="3">
+            <a:schemeClr val="accent1"/>
+          </a:fillRef>
+          <a:effectRef idx="2">
+            <a:schemeClr val="accent1"/>
+          </a:effectRef>
+          <a:fontRef idx="minor">
+            <a:schemeClr val="lt1"/>
+          </a:fontRef>
+        </p:style>
+        <p:txBody>
+          <a:bodyPr rtlCol="0" anchor="ctr" wrap="square" lIns="76200" rIns="76200" tIns="38100" bIns="38100"/>
+          <a:lstStyle/>
+          <a:p>
+            <a:pPr algn="ctr">
+              <a:lnSpc>
+                <a:spcPct val="118000"/>
+              </a:lnSpc>
+              <a:spcBef>
+                <a:spcPts val="0"/>
+              </a:spcBef>
+              <a:spcAft>
+                <a:spcPts val="300"/>
+              </a:spcAft>
+            </a:pPr>
+            <a:r>
+              <a:rPr sz="1100" b="0" i="0">
+                <a:solidFill>
+                  <a:srgbClr val="22252B"/>
+                </a:solidFill>
+                <a:latin typeface="Noto Sans CJK KR"/>
+              </a:rPr>
+              <a:t/>
+            </a:r>
+          </a:p>
+        </p:txBody>
+      </p:sp>
+      <p:sp>
+        <p:nvSpPr>
+          <p:cNvPr id="3" name="TextBox 2"/>
+          <p:cNvSpPr txBox="1"/>
+          <p:nvPr/>
+        </p:nvSpPr>
+        <p:spPr>
+          <a:xfrm>
+            <a:off x="502920" y="146304"/>
+            <a:ext cx="11185855" cy="320040"/>
+          </a:xfrm>
+          <a:prstGeom prst="rect">
+            <a:avLst/>
+          </a:prstGeom>
+          <a:noFill/>
+        </p:spPr>
+        <p:txBody>
+          <a:bodyPr wrap="square" anchor="t" lIns="38100" rIns="38100" tIns="25400" bIns="25400">
+            <a:spAutoFit/>
+          </a:bodyPr>
+          <a:lstStyle/>
+          <a:p>
+            <a:pPr algn="l">
+              <a:lnSpc>
+                <a:spcPct val="120000"/>
+              </a:lnSpc>
+              <a:spcBef>
+                <a:spcPts val="0"/>
+              </a:spcBef>
+              <a:spcAft>
+                <a:spcPts val="0"/>
+              </a:spcAft>
+            </a:pPr>
+            <a:r>
+              <a:rPr sz="1350" b="1" i="0">
+                <a:solidFill>
+                  <a:srgbClr val="C9A227"/>
+                </a:solidFill>
+                <a:latin typeface="Noto Sans CJK KR"/>
+              </a:rPr>
+              <a:t>C4 · 메모리 기술 — zHBM · HBM-PIM · SRAM</a:t>
+            </a:r>
+          </a:p>
+        </p:txBody>
+      </p:sp>
+      <p:sp>
+        <p:nvSpPr>
+          <p:cNvPr id="4" name="TextBox 3"/>
+          <p:cNvSpPr txBox="1"/>
+          <p:nvPr/>
+        </p:nvSpPr>
+        <p:spPr>
+          <a:xfrm>
+            <a:off x="502920" y="457200"/>
+            <a:ext cx="11185855" cy="566928"/>
+          </a:xfrm>
+          <a:prstGeom prst="rect">
+            <a:avLst/>
+          </a:prstGeom>
+          <a:noFill/>
+        </p:spPr>
+        <p:txBody>
+          <a:bodyPr wrap="square" anchor="t" lIns="38100" rIns="38100" tIns="25400" bIns="25400">
+            <a:spAutoFit/>
+          </a:bodyPr>
+          <a:lstStyle/>
+          <a:p>
+            <a:pPr algn="l">
+              <a:lnSpc>
+                <a:spcPct val="120000"/>
+              </a:lnSpc>
+              <a:spcBef>
+                <a:spcPts val="0"/>
+              </a:spcBef>
+              <a:spcAft>
+                <a:spcPts val="0"/>
+              </a:spcAft>
+            </a:pPr>
+            <a:r>
+              <a:rPr sz="2400" b="1" i="0">
+                <a:solidFill>
+                  <a:srgbClr val="22252B"/>
+                </a:solidFill>
+                <a:latin typeface="Noto Sans CJK KR"/>
+              </a:rPr>
+              <a:t>memory-bound라면 답은 '대역폭'과 '상주'</a:t>
+            </a:r>
+          </a:p>
+        </p:txBody>
+      </p:sp>
+      <p:sp>
+        <p:nvSpPr>
+          <p:cNvPr id="5" name="Rectangle 4"/>
+          <p:cNvSpPr/>
+          <p:nvPr/>
+        </p:nvSpPr>
+        <p:spPr>
+          <a:xfrm>
+            <a:off x="466344" y="1778706"/>
+            <a:ext cx="5605272" cy="2093578"/>
+          </a:xfrm>
+          <a:prstGeom prst="rect">
+            <a:avLst/>
+          </a:prstGeom>
+          <a:noFill/>
+          <a:ln w="9525">
+            <a:solidFill>
+              <a:srgbClr val="8A8F98"/>
+            </a:solidFill>
+          </a:ln>
+          <a:effectLst/>
+        </p:spPr>
+        <p:style>
+          <a:lnRef idx="1">
+            <a:schemeClr val="accent1"/>
+          </a:lnRef>
+          <a:fillRef idx="3">
+            <a:schemeClr val="accent1"/>
+          </a:fillRef>
+          <a:effectRef idx="2">
+            <a:schemeClr val="accent1"/>
+          </a:effectRef>
+          <a:fontRef idx="minor">
+            <a:schemeClr val="lt1"/>
+          </a:fontRef>
+        </p:style>
+        <p:txBody>
+          <a:bodyPr rtlCol="0" anchor="ctr"/>
+          <a:lstStyle/>
+          <a:p>
+            <a:pPr algn="ctr"/>
+          </a:p>
+        </p:txBody>
+      </p:sp>
+      <p:pic>
+        <p:nvPicPr>
+          <p:cNvPr id="6" name="Picture 5" descr="fig-zhbm-pim.png"/>
+          <p:cNvPicPr>
+            <a:picLocks noChangeAspect="1"/>
+          </p:cNvPicPr>
+          <p:nvPr/>
+        </p:nvPicPr>
+        <p:blipFill>
+          <a:blip r:embed="rId2"/>
+          <a:stretch>
+            <a:fillRect/>
+          </a:stretch>
+        </p:blipFill>
+        <p:spPr>
+          <a:xfrm>
+            <a:off x="502920" y="1815282"/>
+            <a:ext cx="5532120" cy="2020426"/>
+          </a:xfrm>
+          <a:prstGeom prst="rect">
+            <a:avLst/>
+          </a:prstGeom>
+        </p:spPr>
+      </p:pic>
+      <p:sp>
+        <p:nvSpPr>
+          <p:cNvPr id="7" name="TextBox 6"/>
+          <p:cNvSpPr txBox="1"/>
+          <p:nvPr/>
+        </p:nvSpPr>
+        <p:spPr>
+          <a:xfrm>
+            <a:off x="502920" y="4297679"/>
+            <a:ext cx="5532120" cy="365760"/>
+          </a:xfrm>
+          <a:prstGeom prst="rect">
+            <a:avLst/>
+          </a:prstGeom>
+          <a:noFill/>
+        </p:spPr>
+        <p:txBody>
+          <a:bodyPr wrap="square" anchor="t" lIns="38100" rIns="38100" tIns="25400" bIns="25400">
+            <a:spAutoFit/>
+          </a:bodyPr>
+          <a:lstStyle/>
+          <a:p>
+            <a:pPr algn="ctr">
+              <a:lnSpc>
+                <a:spcPct val="120000"/>
+              </a:lnSpc>
+              <a:spcBef>
+                <a:spcPts val="0"/>
+              </a:spcBef>
+              <a:spcAft>
+                <a:spcPts val="0"/>
+              </a:spcAft>
+            </a:pPr>
+            <a:r>
+              <a:rPr sz="1050" b="0" i="0">
+                <a:solidFill>
+                  <a:srgbClr val="22252B"/>
+                </a:solidFill>
+                <a:latin typeface="Noto Sans CJK KR"/>
+              </a:rPr>
+              <a:t>HBM/zHBM/HBM-PIM/zHBM-PIM decode 비용 + zHBM 내부 연산 추가 면적</a:t>
+            </a:r>
+          </a:p>
+        </p:txBody>
+      </p:sp>
+      <p:sp>
+        <p:nvSpPr>
+          <p:cNvPr id="8" name="Rectangle 7"/>
+          <p:cNvSpPr/>
+          <p:nvPr/>
+        </p:nvSpPr>
+        <p:spPr>
+          <a:xfrm>
+            <a:off x="6293684" y="1335024"/>
+            <a:ext cx="5334870" cy="2980944"/>
+          </a:xfrm>
+          <a:prstGeom prst="rect">
+            <a:avLst/>
+          </a:prstGeom>
+          <a:noFill/>
+          <a:ln w="9525">
+            <a:solidFill>
+              <a:srgbClr val="8A8F98"/>
+            </a:solidFill>
+          </a:ln>
+          <a:effectLst/>
+        </p:spPr>
+        <p:style>
+          <a:lnRef idx="1">
+            <a:schemeClr val="accent1"/>
+          </a:lnRef>
+          <a:fillRef idx="3">
+            <a:schemeClr val="accent1"/>
+          </a:fillRef>
+          <a:effectRef idx="2">
+            <a:schemeClr val="accent1"/>
+          </a:effectRef>
+          <a:fontRef idx="minor">
+            <a:schemeClr val="lt1"/>
+          </a:fontRef>
+        </p:style>
+        <p:txBody>
+          <a:bodyPr rtlCol="0" anchor="ctr"/>
+          <a:lstStyle/>
+          <a:p>
+            <a:pPr algn="ctr"/>
+          </a:p>
+        </p:txBody>
+      </p:sp>
+      <p:pic>
+        <p:nvPicPr>
+          <p:cNvPr id="9" name="Picture 8" descr="fig-sram-scaling.png"/>
+          <p:cNvPicPr>
+            <a:picLocks noChangeAspect="1"/>
+          </p:cNvPicPr>
+          <p:nvPr/>
+        </p:nvPicPr>
+        <p:blipFill>
+          <a:blip r:embed="rId3"/>
+          <a:stretch>
+            <a:fillRect/>
+          </a:stretch>
+        </p:blipFill>
+        <p:spPr>
+          <a:xfrm>
+            <a:off x="6330260" y="1371600"/>
+            <a:ext cx="5261718" cy="2907792"/>
+          </a:xfrm>
+          <a:prstGeom prst="rect">
+            <a:avLst/>
+          </a:prstGeom>
+        </p:spPr>
+      </p:pic>
+      <p:sp>
+        <p:nvSpPr>
+          <p:cNvPr id="10" name="TextBox 9"/>
+          <p:cNvSpPr txBox="1"/>
+          <p:nvPr/>
+        </p:nvSpPr>
+        <p:spPr>
+          <a:xfrm>
+            <a:off x="6263640" y="4297679"/>
+            <a:ext cx="5394960" cy="365760"/>
+          </a:xfrm>
+          <a:prstGeom prst="rect">
+            <a:avLst/>
+          </a:prstGeom>
+          <a:noFill/>
+        </p:spPr>
+        <p:txBody>
+          <a:bodyPr wrap="square" anchor="t" lIns="38100" rIns="38100" tIns="25400" bIns="25400">
+            <a:spAutoFit/>
+          </a:bodyPr>
+          <a:lstStyle/>
+          <a:p>
+            <a:pPr algn="ctr">
+              <a:lnSpc>
+                <a:spcPct val="120000"/>
+              </a:lnSpc>
+              <a:spcBef>
+                <a:spcPts val="0"/>
+              </a:spcBef>
+              <a:spcAft>
+                <a:spcPts val="0"/>
+              </a:spcAft>
+            </a:pPr>
+            <a:r>
+              <a:rPr sz="1050" b="0" i="0">
+                <a:solidFill>
+                  <a:srgbClr val="22252B"/>
+                </a:solidFill>
+                <a:latin typeface="Noto Sans CJK KR"/>
+              </a:rPr>
+              <a:t>on-chip SRAM 1x→10x: state가 상주하는 순간(5x~) HBM 대신 SRAM</a:t>
+            </a:r>
+          </a:p>
+        </p:txBody>
+      </p:sp>
+      <p:sp>
+        <p:nvSpPr>
+          <p:cNvPr id="11" name="Rounded Rectangle 10"/>
+          <p:cNvSpPr/>
+          <p:nvPr/>
+        </p:nvSpPr>
+        <p:spPr>
+          <a:xfrm>
+            <a:off x="502920" y="4800600"/>
+            <a:ext cx="11155680" cy="914400"/>
+          </a:xfrm>
+          <a:prstGeom prst="roundRect">
+            <a:avLst/>
+          </a:prstGeom>
+          <a:solidFill>
+            <a:srgbClr val="F6ECC7"/>
+          </a:solidFill>
+          <a:ln w="12700">
+            <a:solidFill>
+              <a:srgbClr val="C9A227"/>
+            </a:solidFill>
+          </a:ln>
+          <a:effectLst/>
+        </p:spPr>
+        <p:style>
+          <a:lnRef idx="1">
+            <a:schemeClr val="accent1"/>
+          </a:lnRef>
+          <a:fillRef idx="3">
+            <a:schemeClr val="accent1"/>
+          </a:fillRef>
+          <a:effectRef idx="2">
+            <a:schemeClr val="accent1"/>
+          </a:effectRef>
+          <a:fontRef idx="minor">
+            <a:schemeClr val="lt1"/>
+          </a:fontRef>
+        </p:style>
+        <p:txBody>
+          <a:bodyPr rtlCol="0" anchor="ctr" wrap="square" lIns="76200" rIns="76200" tIns="38100" bIns="38100"/>
+          <a:lstStyle/>
+          <a:p>
+            <a:pPr algn="l">
+              <a:lnSpc>
+                <a:spcPct val="118000"/>
+              </a:lnSpc>
+              <a:spcBef>
+                <a:spcPts val="0"/>
+              </a:spcBef>
+              <a:spcAft>
+                <a:spcPts val="200"/>
+              </a:spcAft>
+            </a:pPr>
+            <a:r>
+              <a:rPr sz="1250" b="1" i="0">
+                <a:solidFill>
+                  <a:srgbClr val="C9A227"/>
+                </a:solidFill>
+                <a:latin typeface="Noto Sans CJK KR"/>
+              </a:rPr>
+              <a:t>결론</a:t>
+            </a:r>
+          </a:p>
+          <a:p>
+            <a:pPr algn="l">
+              <a:lnSpc>
+                <a:spcPct val="118000"/>
+              </a:lnSpc>
+              <a:spcBef>
+                <a:spcPts val="0"/>
+              </a:spcBef>
+              <a:spcAft>
+                <a:spcPts val="300"/>
+              </a:spcAft>
+            </a:pPr>
+            <a:r>
+              <a:rPr sz="1200" b="0" i="0">
+                <a:solidFill>
+                  <a:srgbClr val="22252B"/>
+                </a:solidFill>
+                <a:latin typeface="Noto Sans CJK KR"/>
+              </a:rPr>
+              <a:t>zHBM(대역폭↑)이 HBM-PIM(in-bank 연산이 너무 느림)보다 유리. SRAM은 '문턱' 구조 — state(≈134MB)가 on-chip에 들어가는 5x(250MB)부터 이득(203→150µs), 10x(500MB)면 weights까지 전부 상주.</a:t>
+            </a:r>
+          </a:p>
+        </p:txBody>
+      </p:sp>
+    </p:spTree>
+  </p:cSld>
+  <p:clrMapOvr>
+    <a:masterClrMapping/>
+  </p:clrMapOvr>
+</p:sld>
+</file>
+
+<file path=ppt/slides/slide71.xml><?xml version="1.0" encoding="utf-8"?>
+<p:sld xmlns:a="http://schemas.openxmlformats.org/drawingml/2006/main" xmlns:p="http://schemas.openxmlformats.org/presentationml/2006/main" xmlns:r="http://schemas.openxmlformats.org/officeDocument/2006/relationships">
+  <p:cSld>
+    <p:spTree>
+      <p:nvGrpSpPr>
+        <p:cNvPr id="1" name=""/>
+        <p:cNvGrpSpPr/>
+        <p:nvPr/>
+      </p:nvGrpSpPr>
+      <p:grpSpPr/>
+      <p:sp>
+        <p:nvSpPr>
+          <p:cNvPr id="2" name="Rectangle 1"/>
+          <p:cNvSpPr/>
+          <p:nvPr/>
+        </p:nvSpPr>
+        <p:spPr>
+          <a:xfrm>
+            <a:off x="0" y="0"/>
+            <a:ext cx="12191695" cy="54864"/>
+          </a:xfrm>
+          <a:prstGeom prst="rect">
+            <a:avLst/>
+          </a:prstGeom>
+          <a:solidFill>
+            <a:srgbClr val="C9A227"/>
+          </a:solidFill>
+          <a:ln w="12700">
+            <a:solidFill>
+              <a:srgbClr val="C9A227"/>
+            </a:solidFill>
+          </a:ln>
+          <a:effectLst/>
+        </p:spPr>
+        <p:style>
+          <a:lnRef idx="1">
+            <a:schemeClr val="accent1"/>
+          </a:lnRef>
+          <a:fillRef idx="3">
+            <a:schemeClr val="accent1"/>
+          </a:fillRef>
+          <a:effectRef idx="2">
+            <a:schemeClr val="accent1"/>
+          </a:effectRef>
+          <a:fontRef idx="minor">
+            <a:schemeClr val="lt1"/>
+          </a:fontRef>
+        </p:style>
+        <p:txBody>
+          <a:bodyPr rtlCol="0" anchor="ctr" wrap="square" lIns="76200" rIns="76200" tIns="38100" bIns="38100"/>
+          <a:lstStyle/>
+          <a:p>
+            <a:pPr algn="ctr">
+              <a:lnSpc>
+                <a:spcPct val="118000"/>
+              </a:lnSpc>
+              <a:spcBef>
+                <a:spcPts val="0"/>
+              </a:spcBef>
+              <a:spcAft>
+                <a:spcPts val="300"/>
+              </a:spcAft>
+            </a:pPr>
+            <a:r>
+              <a:rPr sz="1100" b="0" i="0">
+                <a:solidFill>
+                  <a:srgbClr val="22252B"/>
+                </a:solidFill>
+                <a:latin typeface="Noto Sans CJK KR"/>
+              </a:rPr>
+              <a:t/>
+            </a:r>
+          </a:p>
+        </p:txBody>
+      </p:sp>
+      <p:sp>
+        <p:nvSpPr>
+          <p:cNvPr id="3" name="TextBox 2"/>
+          <p:cNvSpPr txBox="1"/>
+          <p:nvPr/>
+        </p:nvSpPr>
+        <p:spPr>
+          <a:xfrm>
+            <a:off x="502920" y="146304"/>
+            <a:ext cx="11185855" cy="320040"/>
+          </a:xfrm>
+          <a:prstGeom prst="rect">
+            <a:avLst/>
+          </a:prstGeom>
+          <a:noFill/>
+        </p:spPr>
+        <p:txBody>
+          <a:bodyPr wrap="square" anchor="t" lIns="38100" rIns="38100" tIns="25400" bIns="25400">
+            <a:spAutoFit/>
+          </a:bodyPr>
+          <a:lstStyle/>
+          <a:p>
+            <a:pPr algn="l">
+              <a:lnSpc>
+                <a:spcPct val="120000"/>
+              </a:lnSpc>
+              <a:spcBef>
+                <a:spcPts val="0"/>
+              </a:spcBef>
+              <a:spcAft>
+                <a:spcPts val="0"/>
+              </a:spcAft>
+            </a:pPr>
+            <a:r>
+              <a:rPr sz="1350" b="1" i="0">
+                <a:solidFill>
+                  <a:srgbClr val="C9A227"/>
+                </a:solidFill>
+                <a:latin typeface="Noto Sans CJK KR"/>
+              </a:rPr>
+              <a:t>C5 · scaling 청사진</a:t>
+            </a:r>
+          </a:p>
+        </p:txBody>
+      </p:sp>
+      <p:sp>
+        <p:nvSpPr>
+          <p:cNvPr id="4" name="TextBox 3"/>
+          <p:cNvSpPr txBox="1"/>
+          <p:nvPr/>
+        </p:nvSpPr>
+        <p:spPr>
+          <a:xfrm>
+            <a:off x="502920" y="457200"/>
+            <a:ext cx="11185855" cy="566928"/>
+          </a:xfrm>
+          <a:prstGeom prst="rect">
+            <a:avLst/>
+          </a:prstGeom>
+          <a:noFill/>
+        </p:spPr>
+        <p:txBody>
+          <a:bodyPr wrap="square" anchor="t" lIns="38100" rIns="38100" tIns="25400" bIns="25400">
+            <a:spAutoFit/>
+          </a:bodyPr>
+          <a:lstStyle/>
+          <a:p>
+            <a:pPr algn="l">
+              <a:lnSpc>
+                <a:spcPct val="120000"/>
+              </a:lnSpc>
+              <a:spcBef>
+                <a:spcPts val="0"/>
+              </a:spcBef>
+              <a:spcAft>
+                <a:spcPts val="0"/>
+              </a:spcAft>
+            </a:pPr>
+            <a:r>
+              <a:rPr sz="2400" b="1" i="0">
+                <a:solidFill>
+                  <a:srgbClr val="22252B"/>
+                </a:solidFill>
+                <a:latin typeface="Noto Sans CJK KR"/>
+              </a:rPr>
+              <a:t>논문의 방향 × 모델링 결과 = 어디로 가야 하나</a:t>
+            </a:r>
+          </a:p>
+        </p:txBody>
+      </p:sp>
+      <p:sp>
+        <p:nvSpPr>
+          <p:cNvPr id="5" name="Rectangle 4"/>
+          <p:cNvSpPr/>
+          <p:nvPr/>
+        </p:nvSpPr>
+        <p:spPr>
+          <a:xfrm>
+            <a:off x="466344" y="1586285"/>
+            <a:ext cx="5605272" cy="2478421"/>
+          </a:xfrm>
+          <a:prstGeom prst="rect">
+            <a:avLst/>
+          </a:prstGeom>
+          <a:noFill/>
+          <a:ln w="9525">
+            <a:solidFill>
+              <a:srgbClr val="8A8F98"/>
+            </a:solidFill>
+          </a:ln>
+          <a:effectLst/>
+        </p:spPr>
+        <p:style>
+          <a:lnRef idx="1">
+            <a:schemeClr val="accent1"/>
+          </a:lnRef>
+          <a:fillRef idx="3">
+            <a:schemeClr val="accent1"/>
+          </a:fillRef>
+          <a:effectRef idx="2">
+            <a:schemeClr val="accent1"/>
+          </a:effectRef>
+          <a:fontRef idx="minor">
+            <a:schemeClr val="lt1"/>
+          </a:fontRef>
+        </p:style>
+        <p:txBody>
+          <a:bodyPr rtlCol="0" anchor="ctr"/>
+          <a:lstStyle/>
+          <a:p>
+            <a:pPr algn="ctr"/>
+          </a:p>
+        </p:txBody>
+      </p:sp>
+      <p:pic>
+        <p:nvPicPr>
+          <p:cNvPr id="6" name="Picture 5" descr="fig8-hope-sleep-scaling.png"/>
+          <p:cNvPicPr>
+            <a:picLocks noChangeAspect="1"/>
+          </p:cNvPicPr>
+          <p:nvPr/>
+        </p:nvPicPr>
+        <p:blipFill>
+          <a:blip r:embed="rId2"/>
+          <a:stretch>
+            <a:fillRect/>
+          </a:stretch>
+        </p:blipFill>
+        <p:spPr>
+          <a:xfrm>
+            <a:off x="502920" y="1622861"/>
+            <a:ext cx="5532120" cy="2405269"/>
+          </a:xfrm>
+          <a:prstGeom prst="rect">
+            <a:avLst/>
+          </a:prstGeom>
+        </p:spPr>
+      </p:pic>
+      <p:sp>
+        <p:nvSpPr>
+          <p:cNvPr id="7" name="TextBox 6"/>
+          <p:cNvSpPr txBox="1"/>
+          <p:nvPr/>
+        </p:nvSpPr>
+        <p:spPr>
+          <a:xfrm>
+            <a:off x="502920" y="4297679"/>
+            <a:ext cx="5532120" cy="365760"/>
+          </a:xfrm>
+          <a:prstGeom prst="rect">
+            <a:avLst/>
+          </a:prstGeom>
+          <a:noFill/>
+        </p:spPr>
+        <p:txBody>
+          <a:bodyPr wrap="square" anchor="t" lIns="38100" rIns="38100" tIns="25400" bIns="25400">
+            <a:spAutoFit/>
+          </a:bodyPr>
+          <a:lstStyle/>
+          <a:p>
+            <a:pPr algn="ctr">
+              <a:lnSpc>
+                <a:spcPct val="120000"/>
+              </a:lnSpc>
+              <a:spcBef>
+                <a:spcPts val="0"/>
+              </a:spcBef>
+              <a:spcAft>
+                <a:spcPts val="0"/>
+              </a:spcAft>
+            </a:pPr>
+            <a:r>
+              <a:rPr sz="1050" b="0" i="0">
+                <a:solidFill>
+                  <a:srgbClr val="22252B"/>
+                </a:solidFill>
+                <a:latin typeface="Noto Sans CJK KR"/>
+              </a:rPr>
+              <a:t>HOPE(메모리 확장)+Sleep(파라미터 성장) 스케일링 — 상태·파라미터가 함께 자란다</a:t>
+            </a:r>
+          </a:p>
+        </p:txBody>
+      </p:sp>
+      <p:sp>
+        <p:nvSpPr>
+          <p:cNvPr id="8" name="Rounded Rectangle 7"/>
+          <p:cNvSpPr/>
+          <p:nvPr/>
+        </p:nvSpPr>
+        <p:spPr>
+          <a:xfrm>
+            <a:off x="6172200" y="1417320"/>
+            <a:ext cx="5486400" cy="1051560"/>
+          </a:xfrm>
+          <a:prstGeom prst="roundRect">
+            <a:avLst/>
+          </a:prstGeom>
+          <a:solidFill>
+            <a:srgbClr val="F6ECC7"/>
+          </a:solidFill>
+          <a:ln w="12700">
+            <a:solidFill>
+              <a:srgbClr val="C9A227"/>
+            </a:solidFill>
+          </a:ln>
+          <a:effectLst/>
+        </p:spPr>
+        <p:style>
+          <a:lnRef idx="1">
+            <a:schemeClr val="accent1"/>
+          </a:lnRef>
+          <a:fillRef idx="3">
+            <a:schemeClr val="accent1"/>
+          </a:fillRef>
+          <a:effectRef idx="2">
+            <a:schemeClr val="accent1"/>
+          </a:effectRef>
+          <a:fontRef idx="minor">
+            <a:schemeClr val="lt1"/>
+          </a:fontRef>
+        </p:style>
+        <p:txBody>
+          <a:bodyPr rtlCol="0" anchor="ctr" wrap="square" lIns="76200" rIns="76200" tIns="38100" bIns="38100"/>
+          <a:lstStyle/>
+          <a:p>
+            <a:pPr algn="l">
+              <a:lnSpc>
+                <a:spcPct val="118000"/>
+              </a:lnSpc>
+              <a:spcBef>
+                <a:spcPts val="0"/>
+              </a:spcBef>
+              <a:spcAft>
+                <a:spcPts val="300"/>
+              </a:spcAft>
+            </a:pPr>
+            <a:r>
+              <a:rPr sz="1250" b="1" i="0">
+                <a:solidFill>
+                  <a:srgbClr val="C9A227"/>
+                </a:solidFill>
+                <a:latin typeface="Noto Sans CJK KR"/>
+              </a:rPr>
+              <a:t>① 논문 방향이 memory 압력을 키운다</a:t>
+            </a:r>
+          </a:p>
+          <a:p>
+            <a:pPr algn="l">
+              <a:lnSpc>
+                <a:spcPct val="118000"/>
+              </a:lnSpc>
+              <a:spcBef>
+                <a:spcPts val="0"/>
+              </a:spcBef>
+              <a:spcAft>
+                <a:spcPts val="300"/>
+              </a:spcAft>
+            </a:pPr>
+            <a:r>
+              <a:rPr sz="1150" b="0" i="0">
+                <a:solidFill>
+                  <a:srgbClr val="22252B"/>
+                </a:solidFill>
+                <a:latin typeface="Noto Sans CJK KR"/>
+              </a:rPr>
+              <a:t>HOPE(self-mod+CMS)로 state↑, Sleep(expert 성장)로 파라미터↑ → 디코드 memory-bound가 구조적으로 심해진다.</a:t>
+            </a:r>
+          </a:p>
+        </p:txBody>
+      </p:sp>
+      <p:sp>
+        <p:nvSpPr>
+          <p:cNvPr id="9" name="Rounded Rectangle 8"/>
+          <p:cNvSpPr/>
+          <p:nvPr/>
+        </p:nvSpPr>
+        <p:spPr>
+          <a:xfrm>
+            <a:off x="6172200" y="2532888"/>
+            <a:ext cx="5486400" cy="1051560"/>
+          </a:xfrm>
+          <a:prstGeom prst="roundRect">
+            <a:avLst/>
+          </a:prstGeom>
+          <a:solidFill>
+            <a:srgbClr val="F6ECC7"/>
+          </a:solidFill>
+          <a:ln w="12700">
+            <a:solidFill>
+              <a:srgbClr val="C9A227"/>
+            </a:solidFill>
+          </a:ln>
+          <a:effectLst/>
+        </p:spPr>
+        <p:style>
+          <a:lnRef idx="1">
+            <a:schemeClr val="accent1"/>
+          </a:lnRef>
+          <a:fillRef idx="3">
+            <a:schemeClr val="accent1"/>
+          </a:fillRef>
+          <a:effectRef idx="2">
+            <a:schemeClr val="accent1"/>
+          </a:effectRef>
+          <a:fontRef idx="minor">
+            <a:schemeClr val="lt1"/>
+          </a:fontRef>
+        </p:style>
+        <p:txBody>
+          <a:bodyPr rtlCol="0" anchor="ctr" wrap="square" lIns="76200" rIns="76200" tIns="38100" bIns="38100"/>
+          <a:lstStyle/>
+          <a:p>
+            <a:pPr algn="l">
+              <a:lnSpc>
+                <a:spcPct val="118000"/>
+              </a:lnSpc>
+              <a:spcBef>
+                <a:spcPts val="0"/>
+              </a:spcBef>
+              <a:spcAft>
+                <a:spcPts val="300"/>
+              </a:spcAft>
+            </a:pPr>
+            <a:r>
+              <a:rPr sz="1250" b="1" i="0">
+                <a:solidFill>
+                  <a:srgbClr val="C9A227"/>
+                </a:solidFill>
+                <a:latin typeface="Noto Sans CJK KR"/>
+              </a:rPr>
+              <a:t>② 대역폭 우선</a:t>
+            </a:r>
+          </a:p>
+          <a:p>
+            <a:pPr algn="l">
+              <a:lnSpc>
+                <a:spcPct val="118000"/>
+              </a:lnSpc>
+              <a:spcBef>
+                <a:spcPts val="0"/>
+              </a:spcBef>
+              <a:spcAft>
+                <a:spcPts val="300"/>
+              </a:spcAft>
+            </a:pPr>
+            <a:r>
+              <a:rPr sz="1150" b="0" i="0">
+                <a:solidFill>
+                  <a:srgbClr val="22252B"/>
+                </a:solidFill>
+                <a:latin typeface="Noto Sans CJK KR"/>
+              </a:rPr>
+              <a:t>zHBM류 고대역폭 메모리가 1순위 지렛대(PIM보다 유리).</a:t>
+            </a:r>
+          </a:p>
+        </p:txBody>
+      </p:sp>
+      <p:sp>
+        <p:nvSpPr>
+          <p:cNvPr id="10" name="Rounded Rectangle 9"/>
+          <p:cNvSpPr/>
+          <p:nvPr/>
+        </p:nvSpPr>
+        <p:spPr>
+          <a:xfrm>
+            <a:off x="6172200" y="3648456"/>
+            <a:ext cx="5486400" cy="1051560"/>
+          </a:xfrm>
+          <a:prstGeom prst="roundRect">
+            <a:avLst/>
+          </a:prstGeom>
+          <a:solidFill>
+            <a:srgbClr val="F6ECC7"/>
+          </a:solidFill>
+          <a:ln w="12700">
+            <a:solidFill>
+              <a:srgbClr val="C9A227"/>
+            </a:solidFill>
+          </a:ln>
+          <a:effectLst/>
+        </p:spPr>
+        <p:style>
+          <a:lnRef idx="1">
+            <a:schemeClr val="accent1"/>
+          </a:lnRef>
+          <a:fillRef idx="3">
+            <a:schemeClr val="accent1"/>
+          </a:fillRef>
+          <a:effectRef idx="2">
+            <a:schemeClr val="accent1"/>
+          </a:effectRef>
+          <a:fontRef idx="minor">
+            <a:schemeClr val="lt1"/>
+          </a:fontRef>
+        </p:style>
+        <p:txBody>
+          <a:bodyPr rtlCol="0" anchor="ctr" wrap="square" lIns="76200" rIns="76200" tIns="38100" bIns="38100"/>
+          <a:lstStyle/>
+          <a:p>
+            <a:pPr algn="l">
+              <a:lnSpc>
+                <a:spcPct val="118000"/>
+              </a:lnSpc>
+              <a:spcBef>
+                <a:spcPts val="0"/>
+              </a:spcBef>
+              <a:spcAft>
+                <a:spcPts val="300"/>
+              </a:spcAft>
+            </a:pPr>
+            <a:r>
+              <a:rPr sz="1250" b="1" i="0">
+                <a:solidFill>
+                  <a:srgbClr val="C9A227"/>
+                </a:solidFill>
+                <a:latin typeface="Noto Sans CJK KR"/>
+              </a:rPr>
+              <a:t>③ state 상주 설계</a:t>
+            </a:r>
+          </a:p>
+          <a:p>
+            <a:pPr algn="l">
+              <a:lnSpc>
+                <a:spcPct val="118000"/>
+              </a:lnSpc>
+              <a:spcBef>
+                <a:spcPts val="0"/>
+              </a:spcBef>
+              <a:spcAft>
+                <a:spcPts val="300"/>
+              </a:spcAft>
+            </a:pPr>
+            <a:r>
+              <a:rPr sz="1150" b="0" i="0">
+                <a:solidFill>
+                  <a:srgbClr val="22252B"/>
+                </a:solidFill>
+                <a:latin typeface="Noto Sans CJK KR"/>
+              </a:rPr>
+              <a:t>on-chip 용량을 state가 들어갈 문턱 이상으로 — Cerebras의 knee가 그 증거.</a:t>
+            </a:r>
+          </a:p>
+        </p:txBody>
+      </p:sp>
+      <p:sp>
+        <p:nvSpPr>
+          <p:cNvPr id="11" name="Rounded Rectangle 10"/>
+          <p:cNvSpPr/>
+          <p:nvPr/>
+        </p:nvSpPr>
+        <p:spPr>
+          <a:xfrm>
+            <a:off x="6172200" y="4764024"/>
+            <a:ext cx="5486400" cy="1051560"/>
+          </a:xfrm>
+          <a:prstGeom prst="roundRect">
+            <a:avLst/>
+          </a:prstGeom>
+          <a:solidFill>
+            <a:srgbClr val="F6ECC7"/>
+          </a:solidFill>
+          <a:ln w="12700">
+            <a:solidFill>
+              <a:srgbClr val="C9A227"/>
+            </a:solidFill>
+          </a:ln>
+          <a:effectLst/>
+        </p:spPr>
+        <p:style>
+          <a:lnRef idx="1">
+            <a:schemeClr val="accent1"/>
+          </a:lnRef>
+          <a:fillRef idx="3">
+            <a:schemeClr val="accent1"/>
+          </a:fillRef>
+          <a:effectRef idx="2">
+            <a:schemeClr val="accent1"/>
+          </a:effectRef>
+          <a:fontRef idx="minor">
+            <a:schemeClr val="lt1"/>
+          </a:fontRef>
+        </p:style>
+        <p:txBody>
+          <a:bodyPr rtlCol="0" anchor="ctr" wrap="square" lIns="76200" rIns="76200" tIns="38100" bIns="38100"/>
+          <a:lstStyle/>
+          <a:p>
+            <a:pPr algn="l">
+              <a:lnSpc>
+                <a:spcPct val="118000"/>
+              </a:lnSpc>
+              <a:spcBef>
+                <a:spcPts val="0"/>
+              </a:spcBef>
+              <a:spcAft>
+                <a:spcPts val="300"/>
+              </a:spcAft>
+            </a:pPr>
+            <a:r>
+              <a:rPr sz="1250" b="1" i="0">
+                <a:solidFill>
+                  <a:srgbClr val="C9A227"/>
+                </a:solidFill>
+                <a:latin typeface="Noto Sans CJK KR"/>
+              </a:rPr>
+              <a:t>④ 소프트웨어 효율이 프론티어</a:t>
+            </a:r>
+          </a:p>
+          <a:p>
+            <a:pPr algn="l">
+              <a:lnSpc>
+                <a:spcPct val="118000"/>
+              </a:lnSpc>
+              <a:spcBef>
+                <a:spcPts val="0"/>
+              </a:spcBef>
+              <a:spcAft>
+                <a:spcPts val="300"/>
+              </a:spcAft>
+            </a:pPr>
+            <a:r>
+              <a:rPr sz="1150" b="0" i="0">
+                <a:solidFill>
+                  <a:srgbClr val="22252B"/>
+                </a:solidFill>
+                <a:latin typeface="Noto Sans CJK KR"/>
+              </a:rPr>
+              <a:t>cross-vendor 소프트웨어 효율(HATIR)이 남은 최대 변수.</a:t>
+            </a:r>
+          </a:p>
+        </p:txBody>
+      </p:sp>
+      <p:sp>
+        <p:nvSpPr>
+          <p:cNvPr id="12" name="Rounded Rectangle 11"/>
+          <p:cNvSpPr/>
+          <p:nvPr/>
+        </p:nvSpPr>
+        <p:spPr>
+          <a:xfrm>
+            <a:off x="502920" y="4800600"/>
+            <a:ext cx="5532120" cy="960120"/>
+          </a:xfrm>
+          <a:prstGeom prst="roundRect">
+            <a:avLst/>
+          </a:prstGeom>
+          <a:solidFill>
+            <a:srgbClr val="DBE7F3"/>
+          </a:solidFill>
+          <a:ln w="12700">
+            <a:solidFill>
+              <a:srgbClr val="2A6F97"/>
+            </a:solidFill>
+          </a:ln>
+          <a:effectLst/>
+        </p:spPr>
+        <p:style>
+          <a:lnRef idx="1">
+            <a:schemeClr val="accent1"/>
+          </a:lnRef>
+          <a:fillRef idx="3">
+            <a:schemeClr val="accent1"/>
+          </a:fillRef>
+          <a:effectRef idx="2">
+            <a:schemeClr val="accent1"/>
+          </a:effectRef>
+          <a:fontRef idx="minor">
+            <a:schemeClr val="lt1"/>
+          </a:fontRef>
+        </p:style>
+        <p:txBody>
+          <a:bodyPr rtlCol="0" anchor="ctr" wrap="square" lIns="76200" rIns="76200" tIns="38100" bIns="38100"/>
+          <a:lstStyle/>
+          <a:p>
+            <a:pPr algn="l">
+              <a:lnSpc>
+                <a:spcPct val="118000"/>
+              </a:lnSpc>
+              <a:spcBef>
+                <a:spcPts val="0"/>
+              </a:spcBef>
+              <a:spcAft>
+                <a:spcPts val="200"/>
+              </a:spcAft>
+            </a:pPr>
+            <a:r>
+              <a:rPr sz="1250" b="1" i="0">
+                <a:solidFill>
+                  <a:srgbClr val="2A6F97"/>
+                </a:solidFill>
+                <a:latin typeface="Noto Sans CJK KR"/>
+              </a:rPr>
+              <a:t>한 줄</a:t>
+            </a:r>
+          </a:p>
+          <a:p>
+            <a:pPr algn="l">
+              <a:lnSpc>
+                <a:spcPct val="118000"/>
+              </a:lnSpc>
+              <a:spcBef>
+                <a:spcPts val="0"/>
+              </a:spcBef>
+              <a:spcAft>
+                <a:spcPts val="300"/>
+              </a:spcAft>
+            </a:pPr>
+            <a:r>
+              <a:rPr sz="1200" b="0" i="0">
+                <a:solidFill>
+                  <a:srgbClr val="22252B"/>
+                </a:solidFill>
+                <a:latin typeface="Noto Sans CJK KR"/>
+              </a:rPr>
+              <a:t>이 계열을 키울수록 서빙은 '메모리 문제'가 된다 — 대역폭·상주·소프트웨어가 스케일의 열쇠.</a:t>
+            </a:r>
+          </a:p>
+        </p:txBody>
+      </p:sp>
+    </p:spTree>
+  </p:cSld>
+  <p:clrMapOvr>
+    <a:masterClrMapping/>
+  </p:clrMapOvr>
+</p:sld>
+</file>
+
+<file path=ppt/slides/slide72.xml><?xml version="1.0" encoding="utf-8"?>
+<p:sld xmlns:a="http://schemas.openxmlformats.org/drawingml/2006/main" xmlns:p="http://schemas.openxmlformats.org/presentationml/2006/main" xmlns:r="http://schemas.openxmlformats.org/officeDocument/2006/relationships">
+  <p:cSld>
+    <p:spTree>
+      <p:nvGrpSpPr>
+        <p:cNvPr id="1" name=""/>
+        <p:cNvGrpSpPr/>
+        <p:nvPr/>
+      </p:nvGrpSpPr>
+      <p:grpSpPr/>
+      <p:sp>
+        <p:nvSpPr>
+          <p:cNvPr id="2" name="Rectangle 1"/>
+          <p:cNvSpPr/>
+          <p:nvPr/>
+        </p:nvSpPr>
+        <p:spPr>
+          <a:xfrm>
+            <a:off x="0" y="0"/>
+            <a:ext cx="12191695" cy="54864"/>
+          </a:xfrm>
+          <a:prstGeom prst="rect">
+            <a:avLst/>
+          </a:prstGeom>
+          <a:solidFill>
+            <a:srgbClr val="2A9D8F"/>
+          </a:solidFill>
+          <a:ln w="12700">
+            <a:solidFill>
+              <a:srgbClr val="2A9D8F"/>
+            </a:solidFill>
+          </a:ln>
+          <a:effectLst/>
+        </p:spPr>
+        <p:style>
+          <a:lnRef idx="1">
+            <a:schemeClr val="accent1"/>
+          </a:lnRef>
+          <a:fillRef idx="3">
+            <a:schemeClr val="accent1"/>
+          </a:fillRef>
+          <a:effectRef idx="2">
+            <a:schemeClr val="accent1"/>
+          </a:effectRef>
+          <a:fontRef idx="minor">
+            <a:schemeClr val="lt1"/>
+          </a:fontRef>
+        </p:style>
+        <p:txBody>
+          <a:bodyPr rtlCol="0" anchor="ctr" wrap="square" lIns="76200" rIns="76200" tIns="38100" bIns="38100"/>
+          <a:lstStyle/>
+          <a:p>
+            <a:pPr algn="ctr">
+              <a:lnSpc>
+                <a:spcPct val="118000"/>
+              </a:lnSpc>
+              <a:spcBef>
+                <a:spcPts val="0"/>
+              </a:spcBef>
+              <a:spcAft>
+                <a:spcPts val="300"/>
+              </a:spcAft>
+            </a:pPr>
+            <a:r>
+              <a:rPr sz="1100" b="0" i="0">
+                <a:solidFill>
+                  <a:srgbClr val="22252B"/>
+                </a:solidFill>
+                <a:latin typeface="Noto Sans CJK KR"/>
+              </a:rPr>
+              <a:t/>
+            </a:r>
+          </a:p>
+        </p:txBody>
+      </p:sp>
+      <p:sp>
+        <p:nvSpPr>
+          <p:cNvPr id="3" name="TextBox 2"/>
+          <p:cNvSpPr txBox="1"/>
+          <p:nvPr/>
+        </p:nvSpPr>
+        <p:spPr>
+          <a:xfrm>
+            <a:off x="502920" y="146304"/>
+            <a:ext cx="11185855" cy="320040"/>
+          </a:xfrm>
+          <a:prstGeom prst="rect">
+            <a:avLst/>
+          </a:prstGeom>
+          <a:noFill/>
+        </p:spPr>
+        <p:txBody>
+          <a:bodyPr wrap="square" anchor="t" lIns="38100" rIns="38100" tIns="25400" bIns="25400">
+            <a:spAutoFit/>
+          </a:bodyPr>
+          <a:lstStyle/>
+          <a:p>
+            <a:pPr algn="l">
+              <a:lnSpc>
+                <a:spcPct val="120000"/>
+              </a:lnSpc>
+              <a:spcBef>
+                <a:spcPts val="0"/>
+              </a:spcBef>
+              <a:spcAft>
+                <a:spcPts val="0"/>
+              </a:spcAft>
+            </a:pPr>
+            <a:r>
+              <a:rPr sz="1350" b="1" i="0">
+                <a:solidFill>
+                  <a:srgbClr val="2A9D8F"/>
+                </a:solidFill>
+                <a:latin typeface="Noto Sans CJK KR"/>
+              </a:rPr>
+              <a:t>마무리</a:t>
+            </a:r>
+          </a:p>
+        </p:txBody>
+      </p:sp>
+      <p:sp>
+        <p:nvSpPr>
+          <p:cNvPr id="4" name="TextBox 3"/>
+          <p:cNvSpPr txBox="1"/>
+          <p:nvPr/>
+        </p:nvSpPr>
+        <p:spPr>
+          <a:xfrm>
+            <a:off x="502920" y="457200"/>
+            <a:ext cx="11185855" cy="566928"/>
+          </a:xfrm>
+          <a:prstGeom prst="rect">
+            <a:avLst/>
+          </a:prstGeom>
+          <a:noFill/>
+        </p:spPr>
+        <p:txBody>
+          <a:bodyPr wrap="square" anchor="t" lIns="38100" rIns="38100" tIns="25400" bIns="25400">
+            <a:spAutoFit/>
+          </a:bodyPr>
+          <a:lstStyle/>
+          <a:p>
+            <a:pPr algn="l">
+              <a:lnSpc>
+                <a:spcPct val="120000"/>
+              </a:lnSpc>
+              <a:spcBef>
+                <a:spcPts val="0"/>
+              </a:spcBef>
+              <a:spcAft>
+                <a:spcPts val="0"/>
+              </a:spcAft>
+            </a:pPr>
+            <a:r>
+              <a:rPr sz="2400" b="1" i="0">
+                <a:solidFill>
+                  <a:srgbClr val="22252B"/>
+                </a:solidFill>
+                <a:latin typeface="Noto Sans CJK KR"/>
+              </a:rPr>
+              <a:t>6편을 한 흐름으로, 그리고 서빙 비용까지</a:t>
+            </a:r>
+          </a:p>
+        </p:txBody>
+      </p:sp>
+      <p:sp>
+        <p:nvSpPr>
+          <p:cNvPr id="5" name="Rounded Rectangle 4"/>
+          <p:cNvSpPr/>
+          <p:nvPr/>
+        </p:nvSpPr>
+        <p:spPr>
+          <a:xfrm>
+            <a:off x="502920" y="1371600"/>
+            <a:ext cx="1554480" cy="621792"/>
+          </a:xfrm>
+          <a:prstGeom prst="roundRect">
+            <a:avLst/>
+          </a:prstGeom>
+          <a:solidFill>
+            <a:srgbClr val="2A9D8F"/>
+          </a:solidFill>
+          <a:ln w="12700">
+            <a:solidFill>
+              <a:srgbClr val="2A9D8F"/>
+            </a:solidFill>
+          </a:ln>
+          <a:effectLst/>
+        </p:spPr>
+        <p:style>
+          <a:lnRef idx="1">
+            <a:schemeClr val="accent1"/>
+          </a:lnRef>
+          <a:fillRef idx="3">
+            <a:schemeClr val="accent1"/>
+          </a:fillRef>
+          <a:effectRef idx="2">
+            <a:schemeClr val="accent1"/>
+          </a:effectRef>
+          <a:fontRef idx="minor">
+            <a:schemeClr val="lt1"/>
+          </a:fontRef>
+        </p:style>
+        <p:txBody>
+          <a:bodyPr rtlCol="0" anchor="ctr" wrap="square" lIns="76200" rIns="76200" tIns="38100" bIns="38100"/>
+          <a:lstStyle/>
+          <a:p>
+            <a:pPr algn="ctr">
+              <a:lnSpc>
+                <a:spcPct val="118000"/>
+              </a:lnSpc>
+              <a:spcBef>
+                <a:spcPts val="0"/>
+              </a:spcBef>
+              <a:spcAft>
+                <a:spcPts val="300"/>
+              </a:spcAft>
+            </a:pPr>
+            <a:r>
+              <a:rPr sz="1250" b="1" i="0">
+                <a:solidFill>
+                  <a:srgbClr val="FFFFFF"/>
+                </a:solidFill>
+                <a:latin typeface="Noto Sans CJK KR"/>
+              </a:rPr>
+              <a:t>Titans</a:t>
+            </a:r>
+          </a:p>
+        </p:txBody>
+      </p:sp>
+      <p:sp>
+        <p:nvSpPr>
+          <p:cNvPr id="6" name="Rounded Rectangle 5"/>
+          <p:cNvSpPr/>
+          <p:nvPr/>
+        </p:nvSpPr>
+        <p:spPr>
+          <a:xfrm>
+            <a:off x="2148840" y="1371600"/>
+            <a:ext cx="9509760" cy="621792"/>
+          </a:xfrm>
+          <a:prstGeom prst="roundRect">
+            <a:avLst/>
+          </a:prstGeom>
+          <a:solidFill>
+            <a:srgbClr val="FFFFFF"/>
+          </a:solidFill>
+          <a:ln w="12700">
+            <a:solidFill>
+              <a:srgbClr val="8A8F98"/>
+            </a:solidFill>
+          </a:ln>
+          <a:effectLst/>
+        </p:spPr>
+        <p:style>
+          <a:lnRef idx="1">
+            <a:schemeClr val="accent1"/>
+          </a:lnRef>
+          <a:fillRef idx="3">
+            <a:schemeClr val="accent1"/>
+          </a:fillRef>
+          <a:effectRef idx="2">
+            <a:schemeClr val="accent1"/>
+          </a:effectRef>
+          <a:fontRef idx="minor">
+            <a:schemeClr val="lt1"/>
+          </a:fontRef>
+        </p:style>
+        <p:txBody>
+          <a:bodyPr rtlCol="0" anchor="ctr" wrap="square" lIns="76200" rIns="76200" tIns="38100" bIns="38100"/>
+          <a:lstStyle/>
+          <a:p>
+            <a:pPr algn="l">
+              <a:lnSpc>
+                <a:spcPct val="118000"/>
+              </a:lnSpc>
+              <a:spcBef>
+                <a:spcPts val="0"/>
+              </a:spcBef>
+              <a:spcAft>
+                <a:spcPts val="300"/>
+              </a:spcAft>
+            </a:pPr>
+            <a:r>
+              <a:rPr sz="1200" b="0" i="0">
+                <a:solidFill>
+                  <a:srgbClr val="22252B"/>
+                </a:solidFill>
+                <a:latin typeface="Noto Sans CJK KR"/>
+              </a:rPr>
+              <a:t>test-time에 학습되는 신경망 메모리(surprise+momentum+forget)를 연다.</a:t>
+            </a:r>
+          </a:p>
+        </p:txBody>
+      </p:sp>
+      <p:sp>
+        <p:nvSpPr>
+          <p:cNvPr id="7" name="Rounded Rectangle 6"/>
+          <p:cNvSpPr/>
+          <p:nvPr/>
+        </p:nvSpPr>
+        <p:spPr>
+          <a:xfrm>
+            <a:off x="502920" y="2066543"/>
+            <a:ext cx="1554480" cy="621792"/>
+          </a:xfrm>
+          <a:prstGeom prst="roundRect">
+            <a:avLst/>
+          </a:prstGeom>
+          <a:solidFill>
+            <a:srgbClr val="2A9D8F"/>
+          </a:solidFill>
+          <a:ln w="12700">
+            <a:solidFill>
+              <a:srgbClr val="2A9D8F"/>
+            </a:solidFill>
+          </a:ln>
+          <a:effectLst/>
+        </p:spPr>
+        <p:style>
+          <a:lnRef idx="1">
+            <a:schemeClr val="accent1"/>
+          </a:lnRef>
+          <a:fillRef idx="3">
+            <a:schemeClr val="accent1"/>
+          </a:fillRef>
+          <a:effectRef idx="2">
+            <a:schemeClr val="accent1"/>
+          </a:effectRef>
+          <a:fontRef idx="minor">
+            <a:schemeClr val="lt1"/>
+          </a:fontRef>
+        </p:style>
+        <p:txBody>
+          <a:bodyPr rtlCol="0" anchor="ctr" wrap="square" lIns="76200" rIns="76200" tIns="38100" bIns="38100"/>
+          <a:lstStyle/>
+          <a:p>
+            <a:pPr algn="ctr">
+              <a:lnSpc>
+                <a:spcPct val="118000"/>
+              </a:lnSpc>
+              <a:spcBef>
+                <a:spcPts val="0"/>
+              </a:spcBef>
+              <a:spcAft>
+                <a:spcPts val="300"/>
+              </a:spcAft>
+            </a:pPr>
+            <a:r>
+              <a:rPr sz="1250" b="1" i="0">
+                <a:solidFill>
+                  <a:srgbClr val="FFFFFF"/>
+                </a:solidFill>
+                <a:latin typeface="Noto Sans CJK KR"/>
+              </a:rPr>
+              <a:t>Miras</a:t>
+            </a:r>
+          </a:p>
+        </p:txBody>
+      </p:sp>
+      <p:sp>
+        <p:nvSpPr>
+          <p:cNvPr id="8" name="Rounded Rectangle 7"/>
+          <p:cNvSpPr/>
+          <p:nvPr/>
+        </p:nvSpPr>
+        <p:spPr>
+          <a:xfrm>
+            <a:off x="2148840" y="2066543"/>
+            <a:ext cx="9509760" cy="621792"/>
+          </a:xfrm>
+          <a:prstGeom prst="roundRect">
+            <a:avLst/>
+          </a:prstGeom>
+          <a:solidFill>
+            <a:srgbClr val="FFFFFF"/>
+          </a:solidFill>
+          <a:ln w="12700">
+            <a:solidFill>
+              <a:srgbClr val="8A8F98"/>
+            </a:solidFill>
+          </a:ln>
+          <a:effectLst/>
+        </p:spPr>
+        <p:style>
+          <a:lnRef idx="1">
+            <a:schemeClr val="accent1"/>
+          </a:lnRef>
+          <a:fillRef idx="3">
+            <a:schemeClr val="accent1"/>
+          </a:fillRef>
+          <a:effectRef idx="2">
+            <a:schemeClr val="accent1"/>
+          </a:effectRef>
+          <a:fontRef idx="minor">
+            <a:schemeClr val="lt1"/>
+          </a:fontRef>
+        </p:style>
+        <p:txBody>
+          <a:bodyPr rtlCol="0" anchor="ctr" wrap="square" lIns="76200" rIns="76200" tIns="38100" bIns="38100"/>
+          <a:lstStyle/>
+          <a:p>
+            <a:pPr algn="l">
+              <a:lnSpc>
+                <a:spcPct val="118000"/>
+              </a:lnSpc>
+              <a:spcBef>
+                <a:spcPts val="0"/>
+              </a:spcBef>
+              <a:spcAft>
+                <a:spcPts val="300"/>
+              </a:spcAft>
+            </a:pPr>
+            <a:r>
+              <a:rPr sz="1200" b="0" i="0">
+                <a:solidFill>
+                  <a:srgbClr val="22252B"/>
+                </a:solidFill>
+                <a:latin typeface="Noto Sans CJK KR"/>
+              </a:rPr>
+              <a:t>그 설계를 4축 공간으로 조직화 — 무엇을·무엇을 잊고·어떤 구조로·어떤 알고리즘으로.</a:t>
+            </a:r>
+          </a:p>
+        </p:txBody>
+      </p:sp>
+      <p:sp>
+        <p:nvSpPr>
+          <p:cNvPr id="9" name="Rounded Rectangle 8"/>
+          <p:cNvSpPr/>
+          <p:nvPr/>
+        </p:nvSpPr>
+        <p:spPr>
+          <a:xfrm>
+            <a:off x="502920" y="2761487"/>
+            <a:ext cx="1554480" cy="621792"/>
+          </a:xfrm>
+          <a:prstGeom prst="roundRect">
+            <a:avLst/>
+          </a:prstGeom>
+          <a:solidFill>
+            <a:srgbClr val="2A9D8F"/>
+          </a:solidFill>
+          <a:ln w="12700">
+            <a:solidFill>
+              <a:srgbClr val="2A9D8F"/>
+            </a:solidFill>
+          </a:ln>
+          <a:effectLst/>
+        </p:spPr>
+        <p:style>
+          <a:lnRef idx="1">
+            <a:schemeClr val="accent1"/>
+          </a:lnRef>
+          <a:fillRef idx="3">
+            <a:schemeClr val="accent1"/>
+          </a:fillRef>
+          <a:effectRef idx="2">
+            <a:schemeClr val="accent1"/>
+          </a:effectRef>
+          <a:fontRef idx="minor">
+            <a:schemeClr val="lt1"/>
+          </a:fontRef>
+        </p:style>
+        <p:txBody>
+          <a:bodyPr rtlCol="0" anchor="ctr" wrap="square" lIns="76200" rIns="76200" tIns="38100" bIns="38100"/>
+          <a:lstStyle/>
+          <a:p>
+            <a:pPr algn="ctr">
+              <a:lnSpc>
+                <a:spcPct val="118000"/>
+              </a:lnSpc>
+              <a:spcBef>
+                <a:spcPts val="0"/>
+              </a:spcBef>
+              <a:spcAft>
+                <a:spcPts val="300"/>
+              </a:spcAft>
+            </a:pPr>
+            <a:r>
+              <a:rPr sz="1250" b="1" i="0">
+                <a:solidFill>
+                  <a:srgbClr val="FFFFFF"/>
+                </a:solidFill>
+                <a:latin typeface="Noto Sans CJK KR"/>
+              </a:rPr>
+              <a:t>Atlas</a:t>
+            </a:r>
+          </a:p>
+        </p:txBody>
+      </p:sp>
+      <p:sp>
+        <p:nvSpPr>
+          <p:cNvPr id="10" name="Rounded Rectangle 9"/>
+          <p:cNvSpPr/>
+          <p:nvPr/>
+        </p:nvSpPr>
+        <p:spPr>
+          <a:xfrm>
+            <a:off x="2148840" y="2761487"/>
+            <a:ext cx="9509760" cy="621792"/>
+          </a:xfrm>
+          <a:prstGeom prst="roundRect">
+            <a:avLst/>
+          </a:prstGeom>
+          <a:solidFill>
+            <a:srgbClr val="FFFFFF"/>
+          </a:solidFill>
+          <a:ln w="12700">
+            <a:solidFill>
+              <a:srgbClr val="8A8F98"/>
+            </a:solidFill>
+          </a:ln>
+          <a:effectLst/>
+        </p:spPr>
+        <p:style>
+          <a:lnRef idx="1">
+            <a:schemeClr val="accent1"/>
+          </a:lnRef>
+          <a:fillRef idx="3">
+            <a:schemeClr val="accent1"/>
+          </a:fillRef>
+          <a:effectRef idx="2">
+            <a:schemeClr val="accent1"/>
+          </a:effectRef>
+          <a:fontRef idx="minor">
+            <a:schemeClr val="lt1"/>
+          </a:fontRef>
+        </p:style>
+        <p:txBody>
+          <a:bodyPr rtlCol="0" anchor="ctr" wrap="square" lIns="76200" rIns="76200" tIns="38100" bIns="38100"/>
+          <a:lstStyle/>
+          <a:p>
+            <a:pPr algn="l">
+              <a:lnSpc>
+                <a:spcPct val="118000"/>
+              </a:lnSpc>
+              <a:spcBef>
+                <a:spcPts val="0"/>
+              </a:spcBef>
+              <a:spcAft>
+                <a:spcPts val="300"/>
+              </a:spcAft>
+            </a:pPr>
+            <a:r>
+              <a:rPr sz="1200" b="0" i="0">
+                <a:solidFill>
+                  <a:srgbClr val="22252B"/>
+                </a:solidFill>
+                <a:latin typeface="Noto Sans CJK KR"/>
+              </a:rPr>
+              <a:t>문맥 단위 기억(Omega)과 용량 확장(feature map)+Muon으로 표현력을 키운다.</a:t>
+            </a:r>
+          </a:p>
+        </p:txBody>
+      </p:sp>
+      <p:sp>
+        <p:nvSpPr>
+          <p:cNvPr id="11" name="Rounded Rectangle 10"/>
+          <p:cNvSpPr/>
+          <p:nvPr/>
+        </p:nvSpPr>
+        <p:spPr>
+          <a:xfrm>
+            <a:off x="502920" y="3456431"/>
+            <a:ext cx="1554480" cy="621792"/>
+          </a:xfrm>
+          <a:prstGeom prst="roundRect">
+            <a:avLst/>
+          </a:prstGeom>
+          <a:solidFill>
+            <a:srgbClr val="2A9D8F"/>
+          </a:solidFill>
+          <a:ln w="12700">
+            <a:solidFill>
+              <a:srgbClr val="2A9D8F"/>
+            </a:solidFill>
+          </a:ln>
+          <a:effectLst/>
+        </p:spPr>
+        <p:style>
+          <a:lnRef idx="1">
+            <a:schemeClr val="accent1"/>
+          </a:lnRef>
+          <a:fillRef idx="3">
+            <a:schemeClr val="accent1"/>
+          </a:fillRef>
+          <a:effectRef idx="2">
+            <a:schemeClr val="accent1"/>
+          </a:effectRef>
+          <a:fontRef idx="minor">
+            <a:schemeClr val="lt1"/>
+          </a:fontRef>
+        </p:style>
+        <p:txBody>
+          <a:bodyPr rtlCol="0" anchor="ctr" wrap="square" lIns="76200" rIns="76200" tIns="38100" bIns="38100"/>
+          <a:lstStyle/>
+          <a:p>
+            <a:pPr algn="ctr">
+              <a:lnSpc>
+                <a:spcPct val="118000"/>
+              </a:lnSpc>
+              <a:spcBef>
+                <a:spcPts val="0"/>
+              </a:spcBef>
+              <a:spcAft>
+                <a:spcPts val="300"/>
+              </a:spcAft>
+            </a:pPr>
+            <a:r>
+              <a:rPr sz="1250" b="1" i="0">
+                <a:solidFill>
+                  <a:srgbClr val="FFFFFF"/>
+                </a:solidFill>
+                <a:latin typeface="Noto Sans CJK KR"/>
+              </a:rPr>
+              <a:t>TNT</a:t>
+            </a:r>
+          </a:p>
+        </p:txBody>
+      </p:sp>
+      <p:sp>
+        <p:nvSpPr>
+          <p:cNvPr id="12" name="Rounded Rectangle 11"/>
+          <p:cNvSpPr/>
+          <p:nvPr/>
+        </p:nvSpPr>
+        <p:spPr>
+          <a:xfrm>
+            <a:off x="2148840" y="3456431"/>
+            <a:ext cx="9509760" cy="621792"/>
+          </a:xfrm>
+          <a:prstGeom prst="roundRect">
+            <a:avLst/>
+          </a:prstGeom>
+          <a:solidFill>
+            <a:srgbClr val="FFFFFF"/>
+          </a:solidFill>
+          <a:ln w="12700">
+            <a:solidFill>
+              <a:srgbClr val="8A8F98"/>
+            </a:solidFill>
+          </a:ln>
+          <a:effectLst/>
+        </p:spPr>
+        <p:style>
+          <a:lnRef idx="1">
+            <a:schemeClr val="accent1"/>
+          </a:lnRef>
+          <a:fillRef idx="3">
+            <a:schemeClr val="accent1"/>
+          </a:fillRef>
+          <a:effectRef idx="2">
+            <a:schemeClr val="accent1"/>
+          </a:effectRef>
+          <a:fontRef idx="minor">
+            <a:schemeClr val="lt1"/>
+          </a:fontRef>
+        </p:style>
+        <p:txBody>
+          <a:bodyPr rtlCol="0" anchor="ctr" wrap="square" lIns="76200" rIns="76200" tIns="38100" bIns="38100"/>
+          <a:lstStyle/>
+          <a:p>
+            <a:pPr algn="l">
+              <a:lnSpc>
+                <a:spcPct val="118000"/>
+              </a:lnSpc>
+              <a:spcBef>
+                <a:spcPts val="0"/>
+              </a:spcBef>
+              <a:spcAft>
+                <a:spcPts val="300"/>
+              </a:spcAft>
+            </a:pPr>
+            <a:r>
+              <a:rPr sz="1200" b="0" i="0">
+                <a:solidFill>
+                  <a:srgbClr val="22252B"/>
+                </a:solidFill>
+                <a:latin typeface="Noto Sans CJK KR"/>
+              </a:rPr>
+              <a:t>train/serve chunk 정렬과 global/local 계층으로 '어떻게 배포하나'를 답한다.</a:t>
+            </a:r>
+          </a:p>
+        </p:txBody>
+      </p:sp>
+      <p:sp>
+        <p:nvSpPr>
+          <p:cNvPr id="13" name="Rounded Rectangle 12"/>
+          <p:cNvSpPr/>
+          <p:nvPr/>
+        </p:nvSpPr>
+        <p:spPr>
+          <a:xfrm>
+            <a:off x="502920" y="4151375"/>
+            <a:ext cx="1554480" cy="621792"/>
+          </a:xfrm>
+          <a:prstGeom prst="roundRect">
+            <a:avLst/>
+          </a:prstGeom>
+          <a:solidFill>
+            <a:srgbClr val="C9A227"/>
+          </a:solidFill>
+          <a:ln w="12700">
+            <a:solidFill>
+              <a:srgbClr val="C9A227"/>
+            </a:solidFill>
+          </a:ln>
+          <a:effectLst/>
+        </p:spPr>
+        <p:style>
+          <a:lnRef idx="1">
+            <a:schemeClr val="accent1"/>
+          </a:lnRef>
+          <a:fillRef idx="3">
+            <a:schemeClr val="accent1"/>
+          </a:fillRef>
+          <a:effectRef idx="2">
+            <a:schemeClr val="accent1"/>
+          </a:effectRef>
+          <a:fontRef idx="minor">
+            <a:schemeClr val="lt1"/>
+          </a:fontRef>
+        </p:style>
+        <p:txBody>
+          <a:bodyPr rtlCol="0" anchor="ctr" wrap="square" lIns="76200" rIns="76200" tIns="38100" bIns="38100"/>
+          <a:lstStyle/>
+          <a:p>
+            <a:pPr algn="ctr">
+              <a:lnSpc>
+                <a:spcPct val="118000"/>
+              </a:lnSpc>
+              <a:spcBef>
+                <a:spcPts val="0"/>
+              </a:spcBef>
+              <a:spcAft>
+                <a:spcPts val="300"/>
+              </a:spcAft>
+            </a:pPr>
+            <a:r>
+              <a:rPr sz="1250" b="1" i="0">
+                <a:solidFill>
+                  <a:srgbClr val="FFFFFF"/>
+                </a:solidFill>
+                <a:latin typeface="Noto Sans CJK KR"/>
+              </a:rPr>
+              <a:t>HOPE</a:t>
+            </a:r>
+          </a:p>
+        </p:txBody>
+      </p:sp>
+      <p:sp>
+        <p:nvSpPr>
+          <p:cNvPr id="14" name="Rounded Rectangle 13"/>
+          <p:cNvSpPr/>
+          <p:nvPr/>
+        </p:nvSpPr>
+        <p:spPr>
+          <a:xfrm>
+            <a:off x="2148840" y="4151375"/>
+            <a:ext cx="9509760" cy="621792"/>
+          </a:xfrm>
+          <a:prstGeom prst="roundRect">
+            <a:avLst/>
+          </a:prstGeom>
+          <a:solidFill>
+            <a:srgbClr val="FFFFFF"/>
+          </a:solidFill>
+          <a:ln w="12700">
+            <a:solidFill>
+              <a:srgbClr val="8A8F98"/>
+            </a:solidFill>
+          </a:ln>
+          <a:effectLst/>
+        </p:spPr>
+        <p:style>
+          <a:lnRef idx="1">
+            <a:schemeClr val="accent1"/>
+          </a:lnRef>
+          <a:fillRef idx="3">
+            <a:schemeClr val="accent1"/>
+          </a:fillRef>
+          <a:effectRef idx="2">
+            <a:schemeClr val="accent1"/>
+          </a:effectRef>
+          <a:fontRef idx="minor">
+            <a:schemeClr val="lt1"/>
+          </a:fontRef>
+        </p:style>
+        <p:txBody>
+          <a:bodyPr rtlCol="0" anchor="ctr" wrap="square" lIns="76200" rIns="76200" tIns="38100" bIns="38100"/>
+          <a:lstStyle/>
+          <a:p>
+            <a:pPr algn="l">
+              <a:lnSpc>
+                <a:spcPct val="118000"/>
+              </a:lnSpc>
+              <a:spcBef>
+                <a:spcPts val="0"/>
+              </a:spcBef>
+              <a:spcAft>
+                <a:spcPts val="300"/>
+              </a:spcAft>
+            </a:pPr>
+            <a:r>
+              <a:rPr sz="1200" b="0" i="0">
+                <a:solidFill>
+                  <a:srgbClr val="22252B"/>
+                </a:solidFill>
+                <a:latin typeface="Noto Sans CJK KR"/>
+              </a:rPr>
+              <a:t>optimizer=memory·self-mod·CMS로 앞 4편을 하나의 중첩 시스템으로 통합.</a:t>
+            </a:r>
+          </a:p>
+        </p:txBody>
+      </p:sp>
+      <p:sp>
+        <p:nvSpPr>
+          <p:cNvPr id="15" name="Rounded Rectangle 14"/>
+          <p:cNvSpPr/>
+          <p:nvPr/>
+        </p:nvSpPr>
+        <p:spPr>
+          <a:xfrm>
+            <a:off x="502920" y="4846319"/>
+            <a:ext cx="1554480" cy="621792"/>
+          </a:xfrm>
+          <a:prstGeom prst="roundRect">
+            <a:avLst/>
+          </a:prstGeom>
+          <a:solidFill>
+            <a:srgbClr val="2A9D8F"/>
+          </a:solidFill>
+          <a:ln w="12700">
+            <a:solidFill>
+              <a:srgbClr val="2A9D8F"/>
+            </a:solidFill>
+          </a:ln>
+          <a:effectLst/>
+        </p:spPr>
+        <p:style>
+          <a:lnRef idx="1">
+            <a:schemeClr val="accent1"/>
+          </a:lnRef>
+          <a:fillRef idx="3">
+            <a:schemeClr val="accent1"/>
+          </a:fillRef>
+          <a:effectRef idx="2">
+            <a:schemeClr val="accent1"/>
+          </a:effectRef>
+          <a:fontRef idx="minor">
+            <a:schemeClr val="lt1"/>
+          </a:fontRef>
+        </p:style>
+        <p:txBody>
+          <a:bodyPr rtlCol="0" anchor="ctr" wrap="square" lIns="76200" rIns="76200" tIns="38100" bIns="38100"/>
+          <a:lstStyle/>
+          <a:p>
+            <a:pPr algn="ctr">
+              <a:lnSpc>
+                <a:spcPct val="118000"/>
+              </a:lnSpc>
+              <a:spcBef>
+                <a:spcPts val="0"/>
+              </a:spcBef>
+              <a:spcAft>
+                <a:spcPts val="300"/>
+              </a:spcAft>
+            </a:pPr>
+            <a:r>
+              <a:rPr sz="1250" b="1" i="0">
+                <a:solidFill>
+                  <a:srgbClr val="FFFFFF"/>
+                </a:solidFill>
+                <a:latin typeface="Noto Sans CJK KR"/>
+              </a:rPr>
+              <a:t>Sleep</a:t>
+            </a:r>
+          </a:p>
+        </p:txBody>
+      </p:sp>
+      <p:sp>
+        <p:nvSpPr>
+          <p:cNvPr id="16" name="Rounded Rectangle 15"/>
+          <p:cNvSpPr/>
+          <p:nvPr/>
+        </p:nvSpPr>
+        <p:spPr>
+          <a:xfrm>
+            <a:off x="2148840" y="4846319"/>
+            <a:ext cx="9509760" cy="621792"/>
+          </a:xfrm>
+          <a:prstGeom prst="roundRect">
+            <a:avLst/>
+          </a:prstGeom>
+          <a:solidFill>
+            <a:srgbClr val="FFFFFF"/>
+          </a:solidFill>
+          <a:ln w="12700">
+            <a:solidFill>
+              <a:srgbClr val="8A8F98"/>
+            </a:solidFill>
+          </a:ln>
+          <a:effectLst/>
+        </p:spPr>
+        <p:style>
+          <a:lnRef idx="1">
+            <a:schemeClr val="accent1"/>
+          </a:lnRef>
+          <a:fillRef idx="3">
+            <a:schemeClr val="accent1"/>
+          </a:fillRef>
+          <a:effectRef idx="2">
+            <a:schemeClr val="accent1"/>
+          </a:effectRef>
+          <a:fontRef idx="minor">
+            <a:schemeClr val="lt1"/>
+          </a:fontRef>
+        </p:style>
+        <p:txBody>
+          <a:bodyPr rtlCol="0" anchor="ctr" wrap="square" lIns="76200" rIns="76200" tIns="38100" bIns="38100"/>
+          <a:lstStyle/>
+          <a:p>
+            <a:pPr algn="l">
+              <a:lnSpc>
+                <a:spcPct val="118000"/>
+              </a:lnSpc>
+              <a:spcBef>
+                <a:spcPts val="0"/>
+              </a:spcBef>
+              <a:spcAft>
+                <a:spcPts val="300"/>
+              </a:spcAft>
+            </a:pPr>
+            <a:r>
+              <a:rPr sz="1200" b="0" i="0">
+                <a:solidFill>
+                  <a:srgbClr val="22252B"/>
+                </a:solidFill>
+                <a:latin typeface="Noto Sans CJK KR"/>
+              </a:rPr>
+              <a:t>wake/sleep 생애주기로 지식을 오프라인에서 위로 옮겨 파라미터를 키운다.</a:t>
+            </a:r>
+          </a:p>
+        </p:txBody>
+      </p:sp>
+      <p:sp>
+        <p:nvSpPr>
+          <p:cNvPr id="17" name="Rounded Rectangle 16"/>
+          <p:cNvSpPr/>
+          <p:nvPr/>
+        </p:nvSpPr>
+        <p:spPr>
+          <a:xfrm>
+            <a:off x="502920" y="5541263"/>
+            <a:ext cx="1554480" cy="621792"/>
+          </a:xfrm>
+          <a:prstGeom prst="roundRect">
+            <a:avLst/>
+          </a:prstGeom>
+          <a:solidFill>
+            <a:srgbClr val="C9A227"/>
+          </a:solidFill>
+          <a:ln w="12700">
+            <a:solidFill>
+              <a:srgbClr val="C9A227"/>
+            </a:solidFill>
+          </a:ln>
+          <a:effectLst/>
+        </p:spPr>
+        <p:style>
+          <a:lnRef idx="1">
+            <a:schemeClr val="accent1"/>
+          </a:lnRef>
+          <a:fillRef idx="3">
+            <a:schemeClr val="accent1"/>
+          </a:fillRef>
+          <a:effectRef idx="2">
+            <a:schemeClr val="accent1"/>
+          </a:effectRef>
+          <a:fontRef idx="minor">
+            <a:schemeClr val="lt1"/>
+          </a:fontRef>
+        </p:style>
+        <p:txBody>
+          <a:bodyPr rtlCol="0" anchor="ctr" wrap="square" lIns="76200" rIns="76200" tIns="38100" bIns="38100"/>
+          <a:lstStyle/>
+          <a:p>
+            <a:pPr algn="ctr">
+              <a:lnSpc>
+                <a:spcPct val="118000"/>
+              </a:lnSpc>
+              <a:spcBef>
+                <a:spcPts val="0"/>
+              </a:spcBef>
+              <a:spcAft>
+                <a:spcPts val="300"/>
+              </a:spcAft>
+            </a:pPr>
+            <a:r>
+              <a:rPr sz="1250" b="1" i="0">
+                <a:solidFill>
+                  <a:srgbClr val="FFFFFF"/>
+                </a:solidFill>
+                <a:latin typeface="Noto Sans CJK KR"/>
+              </a:rPr>
+              <a:t>우리 기여</a:t>
+            </a:r>
+          </a:p>
+        </p:txBody>
+      </p:sp>
+      <p:sp>
+        <p:nvSpPr>
+          <p:cNvPr id="18" name="Rounded Rectangle 17"/>
+          <p:cNvSpPr/>
+          <p:nvPr/>
+        </p:nvSpPr>
+        <p:spPr>
+          <a:xfrm>
+            <a:off x="2148840" y="5541263"/>
+            <a:ext cx="9509760" cy="621792"/>
+          </a:xfrm>
+          <a:prstGeom prst="roundRect">
+            <a:avLst/>
+          </a:prstGeom>
+          <a:solidFill>
+            <a:srgbClr val="FFFFFF"/>
+          </a:solidFill>
+          <a:ln w="12700">
+            <a:solidFill>
+              <a:srgbClr val="8A8F98"/>
+            </a:solidFill>
+          </a:ln>
+          <a:effectLst/>
+        </p:spPr>
+        <p:style>
+          <a:lnRef idx="1">
+            <a:schemeClr val="accent1"/>
+          </a:lnRef>
+          <a:fillRef idx="3">
+            <a:schemeClr val="accent1"/>
+          </a:fillRef>
+          <a:effectRef idx="2">
+            <a:schemeClr val="accent1"/>
+          </a:effectRef>
+          <a:fontRef idx="minor">
+            <a:schemeClr val="lt1"/>
+          </a:fontRef>
+        </p:style>
+        <p:txBody>
+          <a:bodyPr rtlCol="0" anchor="ctr" wrap="square" lIns="76200" rIns="76200" tIns="38100" bIns="38100"/>
+          <a:lstStyle/>
+          <a:p>
+            <a:pPr algn="l">
+              <a:lnSpc>
+                <a:spcPct val="118000"/>
+              </a:lnSpc>
+              <a:spcBef>
+                <a:spcPts val="0"/>
+              </a:spcBef>
+              <a:spcAft>
+                <a:spcPts val="300"/>
+              </a:spcAft>
+            </a:pPr>
+            <a:r>
+              <a:rPr sz="1200" b="0" i="0">
+                <a:solidFill>
+                  <a:srgbClr val="22252B"/>
+                </a:solidFill>
+                <a:latin typeface="Noto Sans CJK KR"/>
+              </a:rPr>
+              <a:t>이 배포는 디코드에서 memory-bound — 8칩 측정+HOPE roofline+zHBM/SRAM로 비용과 청사진을 냈다.</a:t>
+            </a:r>
+          </a:p>
+        </p:txBody>
+      </p:sp>
+      <p:sp>
+        <p:nvSpPr>
+          <p:cNvPr id="19" name="TextBox 18"/>
+          <p:cNvSpPr txBox="1"/>
+          <p:nvPr/>
+        </p:nvSpPr>
+        <p:spPr>
+          <a:xfrm>
+            <a:off x="502920" y="6355080"/>
+            <a:ext cx="10972800" cy="274320"/>
+          </a:xfrm>
+          <a:prstGeom prst="rect">
+            <a:avLst/>
+          </a:prstGeom>
+          <a:noFill/>
+        </p:spPr>
+        <p:txBody>
+          <a:bodyPr wrap="square" anchor="t" lIns="38100" rIns="38100" tIns="25400" bIns="25400">
+            <a:spAutoFit/>
+          </a:bodyPr>
+          <a:lstStyle/>
+          <a:p>
+            <a:pPr algn="ctr">
+              <a:lnSpc>
+                <a:spcPct val="120000"/>
+              </a:lnSpc>
+              <a:spcBef>
+                <a:spcPts val="0"/>
+              </a:spcBef>
+              <a:spcAft>
+                <a:spcPts val="0"/>
+              </a:spcAft>
+            </a:pPr>
+            <a:r>
+              <a:rPr sz="1300" b="1" i="0">
+                <a:solidFill>
+                  <a:srgbClr val="22252B"/>
+                </a:solidFill>
+                <a:latin typeface="Noto Sans CJK KR"/>
+              </a:rPr>
+              <a:t>감사합니다 · Q&amp;A</a:t>
             </a:r>
           </a:p>
         </p:txBody>

--- a/seminar/TTT-seminar.pptx
+++ b/seminar/TTT-seminar.pptx
@@ -79,6 +79,8 @@
     <p:sldId id="327" r:id="rId78"/>
     <p:sldId id="328" r:id="rId79"/>
     <p:sldId id="329" r:id="rId80"/>
+    <p:sldId id="330" r:id="rId81"/>
+    <p:sldId id="331" r:id="rId82"/>
   </p:sldIdLst>
   <p:sldSz cx="12191695" cy="6858000" type="screen4x3"/>
   <p:notesSz cx="6858000" cy="9144000"/>
@@ -48172,7 +48174,7 @@
                 </a:solidFill>
                 <a:latin typeface="Noto Sans CJK KR"/>
               </a:rPr>
-              <a:t>C1 · pair thesis</a:t>
+              <a:t>C0 · 방법론</a:t>
             </a:r>
           </a:p>
         </p:txBody>
@@ -48217,7 +48219,7 @@
                 </a:solidFill>
                 <a:latin typeface="Noto Sans CJK KR"/>
               </a:rPr>
-              <a:t>학습은 compute-bound, 디코드는 memory-bound</a:t>
+              <a:t>무엇으로 뽑았고, 왜 신뢰할 수 있나 — HAT HW schema + HATIR</a:t>
             </a:r>
           </a:p>
         </p:txBody>
@@ -48230,339 +48232,8 @@
         </p:nvSpPr>
         <p:spPr>
           <a:xfrm>
-            <a:off x="502920" y="1371600"/>
-            <a:ext cx="5486400" cy="1828800"/>
-          </a:xfrm>
-          <a:prstGeom prst="roundRect">
-            <a:avLst/>
-          </a:prstGeom>
-          <a:solidFill>
-            <a:srgbClr val="DBE7F3"/>
-          </a:solidFill>
-          <a:ln w="12700">
-            <a:solidFill>
-              <a:srgbClr val="2A6F97"/>
-            </a:solidFill>
-          </a:ln>
-          <a:effectLst/>
-        </p:spPr>
-        <p:style>
-          <a:lnRef idx="1">
-            <a:schemeClr val="accent1"/>
-          </a:lnRef>
-          <a:fillRef idx="3">
-            <a:schemeClr val="accent1"/>
-          </a:fillRef>
-          <a:effectRef idx="2">
-            <a:schemeClr val="accent1"/>
-          </a:effectRef>
-          <a:fontRef idx="minor">
-            <a:schemeClr val="lt1"/>
-          </a:fontRef>
-        </p:style>
-        <p:txBody>
-          <a:bodyPr rtlCol="0" anchor="ctr" wrap="square" lIns="76200" rIns="76200" tIns="38100" bIns="38100"/>
-          <a:lstStyle/>
-          <a:p>
-            <a:pPr algn="l">
-              <a:lnSpc>
-                <a:spcPct val="118000"/>
-              </a:lnSpc>
-              <a:spcBef>
-                <a:spcPts val="0"/>
-              </a:spcBef>
-              <a:spcAft>
-                <a:spcPts val="500"/>
-              </a:spcAft>
-            </a:pPr>
-            <a:r>
-              <a:rPr sz="1400" b="1" i="0">
-                <a:solidFill>
-                  <a:srgbClr val="2A6F97"/>
-                </a:solidFill>
-                <a:latin typeface="Noto Sans CJK KR"/>
-              </a:rPr>
-              <a:t>학습(training) — compute-bound</a:t>
-            </a:r>
-          </a:p>
-          <a:p>
-            <a:pPr algn="l">
-              <a:lnSpc>
-                <a:spcPct val="118000"/>
-              </a:lnSpc>
-              <a:spcBef>
-                <a:spcPts val="0"/>
-              </a:spcBef>
-              <a:spcAft>
-                <a:spcPts val="300"/>
-              </a:spcAft>
-            </a:pPr>
-            <a:r>
-              <a:rPr sz="1250" b="0" i="0">
-                <a:solidFill>
-                  <a:srgbClr val="22252B"/>
-                </a:solidFill>
-                <a:latin typeface="Noto Sans CJK KR"/>
-              </a:rPr>
-              <a:t>chunk C를 크게 잡아 병렬 → 연산/바이트(arithmetic intensity)가 높다.</a:t>
-            </a:r>
-          </a:p>
-          <a:p>
-            <a:pPr algn="l">
-              <a:lnSpc>
-                <a:spcPct val="118000"/>
-              </a:lnSpc>
-              <a:spcBef>
-                <a:spcPts val="0"/>
-              </a:spcBef>
-              <a:spcAft>
-                <a:spcPts val="300"/>
-              </a:spcAft>
-            </a:pPr>
-            <a:r>
-              <a:rPr sz="1250" b="0" i="0">
-                <a:solidFill>
-                  <a:srgbClr val="22252B"/>
-                </a:solidFill>
-                <a:latin typeface="Noto Sans CJK KR"/>
-              </a:rPr>
-              <a:t>roofline의 오른쪽(연산 한계) → 더 빠른 연산기가 이득.</a:t>
-            </a:r>
-          </a:p>
-        </p:txBody>
-      </p:sp>
-      <p:sp>
-        <p:nvSpPr>
-          <p:cNvPr id="6" name="Rounded Rectangle 5"/>
-          <p:cNvSpPr/>
-          <p:nvPr/>
-        </p:nvSpPr>
-        <p:spPr>
-          <a:xfrm>
-            <a:off x="6172200" y="1371600"/>
-            <a:ext cx="5486400" cy="1828800"/>
-          </a:xfrm>
-          <a:prstGeom prst="roundRect">
-            <a:avLst/>
-          </a:prstGeom>
-          <a:solidFill>
-            <a:srgbClr val="F6DDDD"/>
-          </a:solidFill>
-          <a:ln w="12700">
-            <a:solidFill>
-              <a:srgbClr val="C1121F"/>
-            </a:solidFill>
-          </a:ln>
-          <a:effectLst/>
-        </p:spPr>
-        <p:style>
-          <a:lnRef idx="1">
-            <a:schemeClr val="accent1"/>
-          </a:lnRef>
-          <a:fillRef idx="3">
-            <a:schemeClr val="accent1"/>
-          </a:fillRef>
-          <a:effectRef idx="2">
-            <a:schemeClr val="accent1"/>
-          </a:effectRef>
-          <a:fontRef idx="minor">
-            <a:schemeClr val="lt1"/>
-          </a:fontRef>
-        </p:style>
-        <p:txBody>
-          <a:bodyPr rtlCol="0" anchor="ctr" wrap="square" lIns="76200" rIns="76200" tIns="38100" bIns="38100"/>
-          <a:lstStyle/>
-          <a:p>
-            <a:pPr algn="l">
-              <a:lnSpc>
-                <a:spcPct val="118000"/>
-              </a:lnSpc>
-              <a:spcBef>
-                <a:spcPts val="0"/>
-              </a:spcBef>
-              <a:spcAft>
-                <a:spcPts val="500"/>
-              </a:spcAft>
-            </a:pPr>
-            <a:r>
-              <a:rPr sz="1400" b="1" i="0">
-                <a:solidFill>
-                  <a:srgbClr val="C1121F"/>
-                </a:solidFill>
-                <a:latin typeface="Noto Sans CJK KR"/>
-              </a:rPr>
-              <a:t>디코드(decode) — memory-bound</a:t>
-            </a:r>
-          </a:p>
-          <a:p>
-            <a:pPr algn="l">
-              <a:lnSpc>
-                <a:spcPct val="118000"/>
-              </a:lnSpc>
-              <a:spcBef>
-                <a:spcPts val="0"/>
-              </a:spcBef>
-              <a:spcAft>
-                <a:spcPts val="300"/>
-              </a:spcAft>
-            </a:pPr>
-            <a:r>
-              <a:rPr sz="1250" b="0" i="0">
-                <a:solidFill>
-                  <a:srgbClr val="22252B"/>
-                </a:solidFill>
-                <a:latin typeface="Noto Sans CJK KR"/>
-              </a:rPr>
-              <a:t>chunk=1, 토큰마다 '전체 상태(state+weights)'를 read-modify-write.</a:t>
-            </a:r>
-          </a:p>
-          <a:p>
-            <a:pPr algn="l">
-              <a:lnSpc>
-                <a:spcPct val="118000"/>
-              </a:lnSpc>
-              <a:spcBef>
-                <a:spcPts val="0"/>
-              </a:spcBef>
-              <a:spcAft>
-                <a:spcPts val="300"/>
-              </a:spcAft>
-            </a:pPr>
-            <a:r>
-              <a:rPr sz="1250" b="0" i="0">
-                <a:solidFill>
-                  <a:srgbClr val="22252B"/>
-                </a:solidFill>
-                <a:latin typeface="Noto Sans CJK KR"/>
-              </a:rPr>
-              <a:t>arithmetic intensity가 낮다 → roofline의 왼쪽(대역폭 한계).</a:t>
-            </a:r>
-          </a:p>
-        </p:txBody>
-      </p:sp>
-      <p:sp>
-        <p:nvSpPr>
-          <p:cNvPr id="7" name="Rectangle 6"/>
-          <p:cNvSpPr/>
-          <p:nvPr/>
-        </p:nvSpPr>
-        <p:spPr>
-          <a:xfrm>
-            <a:off x="895197" y="3392424"/>
-            <a:ext cx="4747564" cy="2020824"/>
-          </a:xfrm>
-          <a:prstGeom prst="rect">
-            <a:avLst/>
-          </a:prstGeom>
-          <a:noFill/>
-          <a:ln w="9525">
-            <a:solidFill>
-              <a:srgbClr val="8A8F98"/>
-            </a:solidFill>
-          </a:ln>
-          <a:effectLst/>
-        </p:spPr>
-        <p:style>
-          <a:lnRef idx="1">
-            <a:schemeClr val="accent1"/>
-          </a:lnRef>
-          <a:fillRef idx="3">
-            <a:schemeClr val="accent1"/>
-          </a:fillRef>
-          <a:effectRef idx="2">
-            <a:schemeClr val="accent1"/>
-          </a:effectRef>
-          <a:fontRef idx="minor">
-            <a:schemeClr val="lt1"/>
-          </a:fontRef>
-        </p:style>
-        <p:txBody>
-          <a:bodyPr rtlCol="0" anchor="ctr"/>
-          <a:lstStyle/>
-          <a:p>
-            <a:pPr algn="ctr"/>
-          </a:p>
-        </p:txBody>
-      </p:sp>
-      <p:pic>
-        <p:nvPicPr>
-          <p:cNvPr id="8" name="Picture 7" descr="fig4-sstar-invariance.png"/>
-          <p:cNvPicPr>
-            <a:picLocks noChangeAspect="1"/>
-          </p:cNvPicPr>
-          <p:nvPr/>
-        </p:nvPicPr>
-        <p:blipFill>
-          <a:blip r:embed="rId2"/>
-          <a:stretch>
-            <a:fillRect/>
-          </a:stretch>
-        </p:blipFill>
-        <p:spPr>
-          <a:xfrm>
-            <a:off x="931773" y="3429000"/>
-            <a:ext cx="4674412" cy="1947672"/>
-          </a:xfrm>
-          <a:prstGeom prst="rect">
-            <a:avLst/>
-          </a:prstGeom>
-        </p:spPr>
-      </p:pic>
-      <p:sp>
-        <p:nvSpPr>
-          <p:cNvPr id="9" name="TextBox 8"/>
-          <p:cNvSpPr txBox="1"/>
-          <p:nvPr/>
-        </p:nvSpPr>
-        <p:spPr>
-          <a:xfrm>
-            <a:off x="502920" y="5394959"/>
-            <a:ext cx="5532120" cy="365760"/>
-          </a:xfrm>
-          <a:prstGeom prst="rect">
-            <a:avLst/>
-          </a:prstGeom>
-          <a:noFill/>
-        </p:spPr>
-        <p:txBody>
-          <a:bodyPr wrap="square" anchor="t" lIns="38100" rIns="38100" tIns="25400" bIns="25400">
-            <a:spAutoFit/>
-          </a:bodyPr>
-          <a:lstStyle/>
-          <a:p>
-            <a:pPr algn="ctr">
-              <a:lnSpc>
-                <a:spcPct val="120000"/>
-              </a:lnSpc>
-              <a:spcBef>
-                <a:spcPts val="0"/>
-              </a:spcBef>
-              <a:spcAft>
-                <a:spcPts val="0"/>
-              </a:spcAft>
-            </a:pPr>
-            <a:r>
-              <a:rPr sz="1050" b="0" i="0">
-                <a:solidFill>
-                  <a:srgbClr val="22252B"/>
-                </a:solidFill>
-                <a:latin typeface="Noto Sans CJK KR"/>
-              </a:rPr>
-              <a:t>S*(KV↔TTT 교차점)=65536 tokens — 8개 가속기 전부 동일 = 하드웨어가 아니라 workload의 성질</a:t>
-            </a:r>
-          </a:p>
-        </p:txBody>
-      </p:sp>
-      <p:sp>
-        <p:nvSpPr>
-          <p:cNvPr id="10" name="Rounded Rectangle 9"/>
-          <p:cNvSpPr/>
-          <p:nvPr/>
-        </p:nvSpPr>
-        <p:spPr>
-          <a:xfrm>
-            <a:off x="6172200" y="3429000"/>
-            <a:ext cx="5486400" cy="2103120"/>
+            <a:off x="502920" y="1234440"/>
+            <a:ext cx="5486400" cy="1783080"/>
           </a:xfrm>
           <a:prstGeom prst="roundRect">
             <a:avLst/>
@@ -48603,19 +48274,128 @@
                 <a:spcPts val="0"/>
               </a:spcBef>
               <a:spcAft>
-                <a:spcPts val="500"/>
-              </a:spcAft>
-            </a:pPr>
-            <a:r>
-              <a:rPr sz="1300" b="1" i="0">
+                <a:spcPts val="300"/>
+              </a:spcAft>
+            </a:pPr>
+            <a:r>
+              <a:rPr sz="1250" b="1" i="0">
                 <a:solidFill>
                   <a:srgbClr val="C9A227"/>
                 </a:solidFill>
                 <a:latin typeface="Noto Sans CJK KR"/>
               </a:rPr>
-              <a:t>왜 중요한가</a:t>
-            </a:r>
-          </a:p>
+              <a:t>HAT HW schema — 가속기의 '디지털 트윈'</a:t>
+            </a:r>
+          </a:p>
+          <a:p>
+            <a:pPr algn="l">
+              <a:lnSpc>
+                <a:spcPct val="118000"/>
+              </a:lnSpc>
+              <a:spcBef>
+                <a:spcPts val="0"/>
+              </a:spcBef>
+              <a:spcAft>
+                <a:spcPts val="200"/>
+              </a:spcAft>
+            </a:pPr>
+            <a:r>
+              <a:rPr sz="1050" b="0" i="0">
+                <a:solidFill>
+                  <a:srgbClr val="22252B"/>
+                </a:solidFill>
+                <a:latin typeface="Noto Sans CJK KR"/>
+              </a:rPr>
+              <a:t>무엇: 가속기를 기술하는 정식 스키마(SoT). die/PE 내부(SM→ALU→ISA), 메모리 계층(HBM/L2/SRAM의 대역폭·용량), peak FLOPS를 담는다.</a:t>
+            </a:r>
+          </a:p>
+          <a:p>
+            <a:pPr algn="l">
+              <a:lnSpc>
+                <a:spcPct val="118000"/>
+              </a:lnSpc>
+              <a:spcBef>
+                <a:spcPts val="0"/>
+              </a:spcBef>
+              <a:spcAft>
+                <a:spcPts val="200"/>
+              </a:spcAft>
+            </a:pPr>
+            <a:r>
+              <a:rPr sz="1050" b="0" i="0">
+                <a:solidFill>
+                  <a:srgbClr val="22252B"/>
+                </a:solidFill>
+                <a:latin typeface="Noto Sans CJK KR"/>
+              </a:rPr>
+              <a:t>input: 벤더 spec(여러 번 교차검색해 신뢰).  output: .hw JSON '트윈'.</a:t>
+            </a:r>
+          </a:p>
+          <a:p>
+            <a:pPr algn="l">
+              <a:lnSpc>
+                <a:spcPct val="118000"/>
+              </a:lnSpc>
+              <a:spcBef>
+                <a:spcPts val="0"/>
+              </a:spcBef>
+              <a:spcAft>
+                <a:spcPts val="200"/>
+              </a:spcAft>
+            </a:pPr>
+            <a:r>
+              <a:rPr sz="1050" b="1" i="0">
+                <a:solidFill>
+                  <a:srgbClr val="2A6F97"/>
+                </a:solidFill>
+                <a:latin typeface="Noto Sans CJK KR"/>
+              </a:rPr>
+              <a:t>검증: schema의 verify(committee). — 증거: 수정 안 한 vLLM이 이 트윈(가짜 device)을 진짜로 믿고 구동.</a:t>
+            </a:r>
+          </a:p>
+        </p:txBody>
+      </p:sp>
+      <p:sp>
+        <p:nvSpPr>
+          <p:cNvPr id="6" name="Rounded Rectangle 5"/>
+          <p:cNvSpPr/>
+          <p:nvPr/>
+        </p:nvSpPr>
+        <p:spPr>
+          <a:xfrm>
+            <a:off x="6199632" y="1234440"/>
+            <a:ext cx="5486400" cy="1783080"/>
+          </a:xfrm>
+          <a:prstGeom prst="roundRect">
+            <a:avLst/>
+          </a:prstGeom>
+          <a:solidFill>
+            <a:srgbClr val="F6ECC7"/>
+          </a:solidFill>
+          <a:ln w="12700">
+            <a:solidFill>
+              <a:srgbClr val="C9A227"/>
+            </a:solidFill>
+          </a:ln>
+          <a:effectLst/>
+        </p:spPr>
+        <p:style>
+          <a:lnRef idx="1">
+            <a:schemeClr val="accent1"/>
+          </a:lnRef>
+          <a:fillRef idx="3">
+            <a:schemeClr val="accent1"/>
+          </a:fillRef>
+          <a:effectRef idx="2">
+            <a:schemeClr val="accent1"/>
+          </a:effectRef>
+          <a:fontRef idx="minor">
+            <a:schemeClr val="lt1"/>
+          </a:fontRef>
+        </p:style>
+        <p:txBody>
+          <a:bodyPr rtlCol="0" anchor="ctr" wrap="square" lIns="76200" rIns="76200" tIns="38100" bIns="38100"/>
+          <a:lstStyle/>
           <a:p>
             <a:pPr algn="l">
               <a:lnSpc>
@@ -48629,15 +48409,124 @@
               </a:spcAft>
             </a:pPr>
             <a:r>
-              <a:rPr sz="1250" b="0" i="0">
-                <a:solidFill>
-                  <a:srgbClr val="22252B"/>
-                </a:solidFill>
-                <a:latin typeface="Noto Sans CJK KR"/>
-              </a:rPr>
-              <a:t>메모리 상태를 갱신하는 이 계열은 디코드에서 구조적으로 memory-bound다. 그리고 그 경계(S*)는 하드웨어를 바꿔도 변하지 않는다(invariant). 즉 '어느 칩을 써도' 디코드 비용은 메모리 대역폭이 지배한다.</a:t>
-            </a:r>
-          </a:p>
+              <a:rPr sz="1250" b="1" i="0">
+                <a:solidFill>
+                  <a:srgbClr val="C9A227"/>
+                </a:solidFill>
+                <a:latin typeface="Noto Sans CJK KR"/>
+              </a:rPr>
+              <a:t>HATIR — 순수 비용(cost) 모델</a:t>
+            </a:r>
+          </a:p>
+          <a:p>
+            <a:pPr algn="l">
+              <a:lnSpc>
+                <a:spcPct val="118000"/>
+              </a:lnSpc>
+              <a:spcBef>
+                <a:spcPts val="0"/>
+              </a:spcBef>
+              <a:spcAft>
+                <a:spcPts val="200"/>
+              </a:spcAft>
+            </a:pPr>
+            <a:r>
+              <a:rPr sz="1050" b="0" i="0">
+                <a:solidFill>
+                  <a:srgbClr val="22252B"/>
+                </a:solidFill>
+                <a:latin typeface="Noto Sans CJK KR"/>
+              </a:rPr>
+              <a:t>무엇: HAT IR 기반 비용 모델. 트윈과 workload를 받아 roofline 기반 시간·에너지를 낸다.</a:t>
+            </a:r>
+          </a:p>
+          <a:p>
+            <a:pPr algn="l">
+              <a:lnSpc>
+                <a:spcPct val="118000"/>
+              </a:lnSpc>
+              <a:spcBef>
+                <a:spcPts val="0"/>
+              </a:spcBef>
+              <a:spcAft>
+                <a:spcPts val="200"/>
+              </a:spcAft>
+            </a:pPr>
+            <a:r>
+              <a:rPr sz="1050" b="0" i="0">
+                <a:solidFill>
+                  <a:srgbClr val="22252B"/>
+                </a:solidFill>
+                <a:latin typeface="Noto Sans CJK KR"/>
+              </a:rPr>
+              <a:t>input: HW twin(.hw) + workload trace(연산 DAG).  output: 시간·에너지의 ideal 하한.</a:t>
+            </a:r>
+          </a:p>
+          <a:p>
+            <a:pPr algn="l">
+              <a:lnSpc>
+                <a:spcPct val="118000"/>
+              </a:lnSpc>
+              <a:spcBef>
+                <a:spcPts val="0"/>
+              </a:spcBef>
+              <a:spcAft>
+                <a:spcPts val="200"/>
+              </a:spcAft>
+            </a:pPr>
+            <a:r>
+              <a:rPr sz="1050" b="1" i="0">
+                <a:solidFill>
+                  <a:srgbClr val="2A6F97"/>
+                </a:solidFill>
+                <a:latin typeface="Noto Sans CJK KR"/>
+              </a:rPr>
+              <a:t>특징: magic derate·regression fitting 없이 독립 물리 요소로 분해(냉정한 하한).</a:t>
+            </a:r>
+          </a:p>
+        </p:txBody>
+      </p:sp>
+      <p:sp>
+        <p:nvSpPr>
+          <p:cNvPr id="7" name="Rounded Rectangle 6"/>
+          <p:cNvSpPr/>
+          <p:nvPr/>
+        </p:nvSpPr>
+        <p:spPr>
+          <a:xfrm>
+            <a:off x="502920" y="3154680"/>
+            <a:ext cx="11183112" cy="841248"/>
+          </a:xfrm>
+          <a:prstGeom prst="roundRect">
+            <a:avLst/>
+          </a:prstGeom>
+          <a:solidFill>
+            <a:srgbClr val="DAF0ED"/>
+          </a:solidFill>
+          <a:ln w="12700">
+            <a:solidFill>
+              <a:srgbClr val="2A9D8F"/>
+            </a:solidFill>
+          </a:ln>
+          <a:effectLst/>
+        </p:spPr>
+        <p:style>
+          <a:lnRef idx="1">
+            <a:schemeClr val="accent1"/>
+          </a:lnRef>
+          <a:fillRef idx="3">
+            <a:schemeClr val="accent1"/>
+          </a:fillRef>
+          <a:effectRef idx="2">
+            <a:schemeClr val="accent1"/>
+          </a:effectRef>
+          <a:fontRef idx="minor">
+            <a:schemeClr val="lt1"/>
+          </a:fontRef>
+        </p:style>
+        <p:txBody>
+          <a:bodyPr rtlCol="0" anchor="ctr" wrap="square" lIns="76200" rIns="76200" tIns="38100" bIns="38100"/>
+          <a:lstStyle/>
           <a:p>
             <a:pPr algn="l">
               <a:lnSpc>
@@ -48651,13 +48540,610 @@
               </a:spcAft>
             </a:pPr>
             <a:r>
-              <a:rPr sz="1200" b="1" i="0">
-                <a:solidFill>
-                  <a:srgbClr val="2A6F97"/>
-                </a:solidFill>
-                <a:latin typeface="Noto Sans CJK KR"/>
-              </a:rPr>
-              <a:t>→ 이후 슬라이드: 실제 8칩 측정 · HOPE block roofline · 메모리 기술(zHBM/PIM/SRAM) · 청사진.</a:t>
+              <a:rPr sz="1250" b="1" i="0">
+                <a:solidFill>
+                  <a:srgbClr val="2A9D8F"/>
+                </a:solidFill>
+                <a:latin typeface="Noto Sans CJK KR"/>
+              </a:rPr>
+              <a:t>신뢰성 원칙 — 절대값이 아니라 'trend 정합'</a:t>
+            </a:r>
+          </a:p>
+          <a:p>
+            <a:pPr algn="l">
+              <a:lnSpc>
+                <a:spcPct val="118000"/>
+              </a:lnSpc>
+              <a:spcBef>
+                <a:spcPts val="0"/>
+              </a:spcBef>
+              <a:spcAft>
+                <a:spcPts val="200"/>
+              </a:spcAft>
+            </a:pPr>
+            <a:r>
+              <a:rPr sz="1150" b="0" i="0">
+                <a:solidFill>
+                  <a:srgbClr val="22252B"/>
+                </a:solidFill>
+                <a:latin typeface="Noto Sans CJK KR"/>
+              </a:rPr>
+              <a:t>정합 = 여러 시나리오에서 trend 일관성(절대 수치 매칭 아님). ZigZag 등 기존 도구와 7/7 일치, 42 curves / 7 아키텍처 / 12 families에서 97.6% trend 일치, fitting 없음. → 이 파트의 모든 수치는 'ideal roofline 하한'(달성 가능한 최선)으로 읽어야 한다.</a:t>
+            </a:r>
+          </a:p>
+        </p:txBody>
+      </p:sp>
+      <p:sp>
+        <p:nvSpPr>
+          <p:cNvPr id="8" name="Rounded Rectangle 7"/>
+          <p:cNvSpPr/>
+          <p:nvPr/>
+        </p:nvSpPr>
+        <p:spPr>
+          <a:xfrm>
+            <a:off x="502920" y="4160520"/>
+            <a:ext cx="11183112" cy="2057400"/>
+          </a:xfrm>
+          <a:prstGeom prst="roundRect">
+            <a:avLst/>
+          </a:prstGeom>
+          <a:solidFill>
+            <a:srgbClr val="FFFFFF"/>
+          </a:solidFill>
+          <a:ln w="12700">
+            <a:solidFill>
+              <a:srgbClr val="8A8F98"/>
+            </a:solidFill>
+          </a:ln>
+          <a:effectLst/>
+        </p:spPr>
+        <p:style>
+          <a:lnRef idx="1">
+            <a:schemeClr val="accent1"/>
+          </a:lnRef>
+          <a:fillRef idx="3">
+            <a:schemeClr val="accent1"/>
+          </a:fillRef>
+          <a:effectRef idx="2">
+            <a:schemeClr val="accent1"/>
+          </a:effectRef>
+          <a:fontRef idx="minor">
+            <a:schemeClr val="lt1"/>
+          </a:fontRef>
+        </p:style>
+        <p:txBody>
+          <a:bodyPr rtlCol="0" anchor="ctr" wrap="square" lIns="76200" rIns="76200" tIns="38100" bIns="38100"/>
+          <a:lstStyle/>
+          <a:p>
+            <a:pPr algn="ctr">
+              <a:lnSpc>
+                <a:spcPct val="118000"/>
+              </a:lnSpc>
+              <a:spcBef>
+                <a:spcPts val="0"/>
+              </a:spcBef>
+              <a:spcAft>
+                <a:spcPts val="300"/>
+              </a:spcAft>
+            </a:pPr>
+            <a:r>
+              <a:rPr sz="1100" b="0" i="0">
+                <a:solidFill>
+                  <a:srgbClr val="22252B"/>
+                </a:solidFill>
+                <a:latin typeface="Noto Sans CJK KR"/>
+              </a:rPr>
+              <a:t/>
+            </a:r>
+          </a:p>
+        </p:txBody>
+      </p:sp>
+      <p:sp>
+        <p:nvSpPr>
+          <p:cNvPr id="9" name="TextBox 8"/>
+          <p:cNvSpPr txBox="1"/>
+          <p:nvPr/>
+        </p:nvSpPr>
+        <p:spPr>
+          <a:xfrm>
+            <a:off x="685800" y="4242816"/>
+            <a:ext cx="7315200" cy="274320"/>
+          </a:xfrm>
+          <a:prstGeom prst="rect">
+            <a:avLst/>
+          </a:prstGeom>
+          <a:noFill/>
+        </p:spPr>
+        <p:txBody>
+          <a:bodyPr wrap="square" anchor="t" lIns="38100" rIns="38100" tIns="25400" bIns="25400">
+            <a:spAutoFit/>
+          </a:bodyPr>
+          <a:lstStyle/>
+          <a:p>
+            <a:pPr algn="l">
+              <a:lnSpc>
+                <a:spcPct val="120000"/>
+              </a:lnSpc>
+              <a:spcBef>
+                <a:spcPts val="0"/>
+              </a:spcBef>
+              <a:spcAft>
+                <a:spcPts val="0"/>
+              </a:spcAft>
+            </a:pPr>
+            <a:r>
+              <a:rPr sz="1250" b="1" i="0">
+                <a:solidFill>
+                  <a:srgbClr val="22252B"/>
+                </a:solidFill>
+                <a:latin typeface="Noto Sans CJK KR"/>
+              </a:rPr>
+              <a:t>실험 조건 (전 Part C 공통) — 모두 명시</a:t>
+            </a:r>
+          </a:p>
+        </p:txBody>
+      </p:sp>
+      <p:sp>
+        <p:nvSpPr>
+          <p:cNvPr id="10" name="TextBox 9"/>
+          <p:cNvSpPr txBox="1"/>
+          <p:nvPr/>
+        </p:nvSpPr>
+        <p:spPr>
+          <a:xfrm>
+            <a:off x="731520" y="4617720"/>
+            <a:ext cx="3657600" cy="1554480"/>
+          </a:xfrm>
+          <a:prstGeom prst="rect">
+            <a:avLst/>
+          </a:prstGeom>
+          <a:noFill/>
+        </p:spPr>
+        <p:txBody>
+          <a:bodyPr wrap="square" anchor="t" lIns="38100" rIns="38100" tIns="25400" bIns="25400">
+            <a:spAutoFit/>
+          </a:bodyPr>
+          <a:lstStyle/>
+          <a:p>
+            <a:pPr algn="l">
+              <a:lnSpc>
+                <a:spcPct val="115000"/>
+              </a:lnSpc>
+              <a:spcBef>
+                <a:spcPts val="0"/>
+              </a:spcBef>
+              <a:spcAft>
+                <a:spcPts val="300"/>
+              </a:spcAft>
+            </a:pPr>
+            <a:r>
+              <a:rPr sz="1150" b="1" i="0">
+                <a:solidFill>
+                  <a:srgbClr val="C9A227"/>
+                </a:solidFill>
+                <a:latin typeface="Noto Sans CJK KR"/>
+              </a:rPr>
+              <a:t>HW twin — H100</a:t>
+            </a:r>
+          </a:p>
+          <a:p>
+            <a:pPr algn="l">
+              <a:lnSpc>
+                <a:spcPct val="115000"/>
+              </a:lnSpc>
+              <a:spcBef>
+                <a:spcPts val="0"/>
+              </a:spcBef>
+              <a:spcAft>
+                <a:spcPts val="200"/>
+              </a:spcAft>
+            </a:pPr>
+            <a:r>
+              <a:rPr sz="1050" b="0" i="0">
+                <a:solidFill>
+                  <a:srgbClr val="22252B"/>
+                </a:solidFill>
+                <a:latin typeface="Noto Sans CJK KR"/>
+              </a:rPr>
+              <a:t>HBM3 대역폭 3.35 TB/s</a:t>
+            </a:r>
+          </a:p>
+          <a:p>
+            <a:pPr algn="l">
+              <a:lnSpc>
+                <a:spcPct val="115000"/>
+              </a:lnSpc>
+              <a:spcBef>
+                <a:spcPts val="0"/>
+              </a:spcBef>
+              <a:spcAft>
+                <a:spcPts val="200"/>
+              </a:spcAft>
+            </a:pPr>
+            <a:r>
+              <a:rPr sz="1050" b="0" i="0">
+                <a:solidFill>
+                  <a:srgbClr val="22252B"/>
+                </a:solidFill>
+                <a:latin typeface="Noto Sans CJK KR"/>
+              </a:rPr>
+              <a:t>peak 0.99 PF (989 TFLOPS, bf16)</a:t>
+            </a:r>
+          </a:p>
+          <a:p>
+            <a:pPr algn="l">
+              <a:lnSpc>
+                <a:spcPct val="115000"/>
+              </a:lnSpc>
+              <a:spcBef>
+                <a:spcPts val="0"/>
+              </a:spcBef>
+              <a:spcAft>
+                <a:spcPts val="200"/>
+              </a:spcAft>
+            </a:pPr>
+            <a:r>
+              <a:rPr sz="1050" b="0" i="0">
+                <a:solidFill>
+                  <a:srgbClr val="22252B"/>
+                </a:solidFill>
+                <a:latin typeface="Noto Sans CJK KR"/>
+              </a:rPr>
+              <a:t>ridge 295 FLOP/byte</a:t>
+            </a:r>
+          </a:p>
+          <a:p>
+            <a:pPr algn="l">
+              <a:lnSpc>
+                <a:spcPct val="115000"/>
+              </a:lnSpc>
+              <a:spcBef>
+                <a:spcPts val="0"/>
+              </a:spcBef>
+              <a:spcAft>
+                <a:spcPts val="200"/>
+              </a:spcAft>
+            </a:pPr>
+            <a:r>
+              <a:rPr sz="1050" b="0" i="0">
+                <a:solidFill>
+                  <a:srgbClr val="22252B"/>
+                </a:solidFill>
+                <a:latin typeface="Noto Sans CJK KR"/>
+              </a:rPr>
+              <a:t>on-chip SRAM 10 TB/s</a:t>
+            </a:r>
+          </a:p>
+          <a:p>
+            <a:pPr algn="l">
+              <a:lnSpc>
+                <a:spcPct val="115000"/>
+              </a:lnSpc>
+              <a:spcBef>
+                <a:spcPts val="0"/>
+              </a:spcBef>
+              <a:spcAft>
+                <a:spcPts val="200"/>
+              </a:spcAft>
+            </a:pPr>
+            <a:r>
+              <a:rPr sz="1050" b="0" i="0">
+                <a:solidFill>
+                  <a:srgbClr val="22252B"/>
+                </a:solidFill>
+                <a:latin typeface="Noto Sans CJK KR"/>
+              </a:rPr>
+              <a:t>baseline L2 50 MB</a:t>
+            </a:r>
+          </a:p>
+        </p:txBody>
+      </p:sp>
+      <p:sp>
+        <p:nvSpPr>
+          <p:cNvPr id="11" name="TextBox 10"/>
+          <p:cNvSpPr txBox="1"/>
+          <p:nvPr/>
+        </p:nvSpPr>
+        <p:spPr>
+          <a:xfrm>
+            <a:off x="4434840" y="4617720"/>
+            <a:ext cx="3657600" cy="1554480"/>
+          </a:xfrm>
+          <a:prstGeom prst="rect">
+            <a:avLst/>
+          </a:prstGeom>
+          <a:noFill/>
+        </p:spPr>
+        <p:txBody>
+          <a:bodyPr wrap="square" anchor="t" lIns="38100" rIns="38100" tIns="25400" bIns="25400">
+            <a:spAutoFit/>
+          </a:bodyPr>
+          <a:lstStyle/>
+          <a:p>
+            <a:pPr algn="l">
+              <a:lnSpc>
+                <a:spcPct val="115000"/>
+              </a:lnSpc>
+              <a:spcBef>
+                <a:spcPts val="0"/>
+              </a:spcBef>
+              <a:spcAft>
+                <a:spcPts val="300"/>
+              </a:spcAft>
+            </a:pPr>
+            <a:r>
+              <a:rPr sz="1150" b="1" i="0">
+                <a:solidFill>
+                  <a:srgbClr val="C9A227"/>
+                </a:solidFill>
+                <a:latin typeface="Noto Sans CJK KR"/>
+              </a:rPr>
+              <a:t>model — 1 HOPE block (B=1)</a:t>
+            </a:r>
+          </a:p>
+          <a:p>
+            <a:pPr algn="l">
+              <a:lnSpc>
+                <a:spcPct val="115000"/>
+              </a:lnSpc>
+              <a:spcBef>
+                <a:spcPts val="0"/>
+              </a:spcBef>
+              <a:spcAft>
+                <a:spcPts val="200"/>
+              </a:spcAft>
+            </a:pPr>
+            <a:r>
+              <a:rPr sz="1050" b="0" i="0">
+                <a:solidFill>
+                  <a:srgbClr val="22252B"/>
+                </a:solidFill>
+                <a:latin typeface="Noto Sans CJK KR"/>
+              </a:rPr>
+              <a:t>d = 2048</a:t>
+            </a:r>
+          </a:p>
+          <a:p>
+            <a:pPr algn="l">
+              <a:lnSpc>
+                <a:spcPct val="115000"/>
+              </a:lnSpc>
+              <a:spcBef>
+                <a:spcPts val="0"/>
+              </a:spcBef>
+              <a:spcAft>
+                <a:spcPts val="200"/>
+              </a:spcAft>
+            </a:pPr>
+            <a:r>
+              <a:rPr sz="1050" b="0" i="0">
+                <a:solidFill>
+                  <a:srgbClr val="22252B"/>
+                </a:solidFill>
+                <a:latin typeface="Noto Sans CJK KR"/>
+              </a:rPr>
+              <a:t>self-mod Titans 5 memory:</a:t>
+            </a:r>
+          </a:p>
+          <a:p>
+            <a:pPr algn="l">
+              <a:lnSpc>
+                <a:spcPct val="115000"/>
+              </a:lnSpc>
+              <a:spcBef>
+                <a:spcPts val="0"/>
+              </a:spcBef>
+              <a:spcAft>
+                <a:spcPts val="200"/>
+              </a:spcAft>
+            </a:pPr>
+            <a:r>
+              <a:rPr sz="1000" b="0" i="0">
+                <a:solidFill>
+                  <a:srgbClr val="22252B"/>
+                </a:solidFill>
+                <a:latin typeface="Noto Sans Mono CJK KR"/>
+              </a:rPr>
+              <a:t>  {M_k,M_v,M_η,M_α: d², M_mem: 2d²}</a:t>
+            </a:r>
+          </a:p>
+          <a:p>
+            <a:pPr algn="l">
+              <a:lnSpc>
+                <a:spcPct val="115000"/>
+              </a:lnSpc>
+              <a:spcBef>
+                <a:spcPts val="0"/>
+              </a:spcBef>
+              <a:spcAft>
+                <a:spcPts val="200"/>
+              </a:spcAft>
+            </a:pPr>
+            <a:r>
+              <a:rPr sz="1050" b="0" i="0">
+                <a:solidFill>
+                  <a:srgbClr val="22252B"/>
+                </a:solidFill>
+                <a:latin typeface="Noto Sans CJK KR"/>
+              </a:rPr>
+              <a:t>CMS 3 레벨 (각 d→4d→d MLP)</a:t>
+            </a:r>
+          </a:p>
+          <a:p>
+            <a:pPr algn="l">
+              <a:lnSpc>
+                <a:spcPct val="115000"/>
+              </a:lnSpc>
+              <a:spcBef>
+                <a:spcPts val="0"/>
+              </a:spcBef>
+              <a:spcAft>
+                <a:spcPts val="200"/>
+              </a:spcAft>
+            </a:pPr>
+            <a:r>
+              <a:rPr sz="1050" b="0" i="0">
+                <a:solidFill>
+                  <a:srgbClr val="22252B"/>
+                </a:solidFill>
+                <a:latin typeface="Noto Sans CJK KR"/>
+              </a:rPr>
+              <a:t>state(RMW) 134 MB · weights 277 MB</a:t>
+            </a:r>
+          </a:p>
+        </p:txBody>
+      </p:sp>
+      <p:sp>
+        <p:nvSpPr>
+          <p:cNvPr id="12" name="TextBox 11"/>
+          <p:cNvSpPr txBox="1"/>
+          <p:nvPr/>
+        </p:nvSpPr>
+        <p:spPr>
+          <a:xfrm>
+            <a:off x="8183879" y="4617720"/>
+            <a:ext cx="3474720" cy="1554480"/>
+          </a:xfrm>
+          <a:prstGeom prst="rect">
+            <a:avLst/>
+          </a:prstGeom>
+          <a:noFill/>
+        </p:spPr>
+        <p:txBody>
+          <a:bodyPr wrap="square" anchor="t" lIns="38100" rIns="38100" tIns="25400" bIns="25400">
+            <a:spAutoFit/>
+          </a:bodyPr>
+          <a:lstStyle/>
+          <a:p>
+            <a:pPr algn="l">
+              <a:lnSpc>
+                <a:spcPct val="115000"/>
+              </a:lnSpc>
+              <a:spcBef>
+                <a:spcPts val="0"/>
+              </a:spcBef>
+              <a:spcAft>
+                <a:spcPts val="300"/>
+              </a:spcAft>
+            </a:pPr>
+            <a:r>
+              <a:rPr sz="1150" b="1" i="0">
+                <a:solidFill>
+                  <a:srgbClr val="C9A227"/>
+                </a:solidFill>
+                <a:latin typeface="Noto Sans CJK KR"/>
+              </a:rPr>
+              <a:t>가정 (assumptions)</a:t>
+            </a:r>
+          </a:p>
+          <a:p>
+            <a:pPr algn="l">
+              <a:lnSpc>
+                <a:spcPct val="115000"/>
+              </a:lnSpc>
+              <a:spcBef>
+                <a:spcPts val="0"/>
+              </a:spcBef>
+              <a:spcAft>
+                <a:spcPts val="200"/>
+              </a:spcAft>
+            </a:pPr>
+            <a:r>
+              <a:rPr sz="1050" b="0" i="0">
+                <a:solidFill>
+                  <a:srgbClr val="22252B"/>
+                </a:solidFill>
+                <a:latin typeface="Noto Sans CJK KR"/>
+              </a:rPr>
+              <a:t>decode C=1 (토큰당)</a:t>
+            </a:r>
+          </a:p>
+          <a:p>
+            <a:pPr algn="l">
+              <a:lnSpc>
+                <a:spcPct val="115000"/>
+              </a:lnSpc>
+              <a:spcBef>
+                <a:spcPts val="0"/>
+              </a:spcBef>
+              <a:spcAft>
+                <a:spcPts val="200"/>
+              </a:spcAft>
+            </a:pPr>
+            <a:r>
+              <a:rPr sz="1050" b="0" i="0">
+                <a:solidFill>
+                  <a:srgbClr val="22252B"/>
+                </a:solidFill>
+                <a:latin typeface="Noto Sans CJK KR"/>
+              </a:rPr>
+              <a:t>kernel launch time = 0</a:t>
+            </a:r>
+          </a:p>
+          <a:p>
+            <a:pPr algn="l">
+              <a:lnSpc>
+                <a:spcPct val="115000"/>
+              </a:lnSpc>
+              <a:spcBef>
+                <a:spcPts val="0"/>
+              </a:spcBef>
+              <a:spcAft>
+                <a:spcPts val="200"/>
+              </a:spcAft>
+            </a:pPr>
+            <a:r>
+              <a:rPr sz="1050" b="0" i="0">
+                <a:solidFill>
+                  <a:srgbClr val="22252B"/>
+                </a:solidFill>
+                <a:latin typeface="Noto Sans CJK KR"/>
+              </a:rPr>
+              <a:t>gradient는 chunk 시작 상태에서 평가</a:t>
+            </a:r>
+          </a:p>
+          <a:p>
+            <a:pPr algn="l">
+              <a:lnSpc>
+                <a:spcPct val="115000"/>
+              </a:lnSpc>
+              <a:spcBef>
+                <a:spcPts val="0"/>
+              </a:spcBef>
+              <a:spcAft>
+                <a:spcPts val="200"/>
+              </a:spcAft>
+            </a:pPr>
+            <a:r>
+              <a:rPr sz="1050" b="0" i="0">
+                <a:solidFill>
+                  <a:srgbClr val="22252B"/>
+                </a:solidFill>
+                <a:latin typeface="Noto Sans CJK KR"/>
+              </a:rPr>
+              <a:t>출력은 갱신 전(pre-update) read</a:t>
+            </a:r>
+          </a:p>
+          <a:p>
+            <a:pPr algn="l">
+              <a:lnSpc>
+                <a:spcPct val="115000"/>
+              </a:lnSpc>
+              <a:spcBef>
+                <a:spcPts val="0"/>
+              </a:spcBef>
+              <a:spcAft>
+                <a:spcPts val="200"/>
+              </a:spcAft>
+            </a:pPr>
+            <a:r>
+              <a:rPr sz="1000" b="0" i="0">
+                <a:solidFill>
+                  <a:srgbClr val="22252B"/>
+                </a:solidFill>
+                <a:latin typeface="Noto Sans Mono CJK KR"/>
+              </a:rPr>
+              <a:t>수치 = max(FLOP/peak, bytes/BW)</a:t>
             </a:r>
           </a:p>
         </p:txBody>
@@ -49512,7 +49998,7 @@
                 </a:solidFill>
                 <a:latin typeface="Noto Sans CJK KR"/>
               </a:rPr>
-              <a:t>C2 · 8개 가속기 크로스 측정</a:t>
+              <a:t>C1 · pair thesis</a:t>
             </a:r>
           </a:p>
         </p:txBody>
@@ -49557,21 +50043,239 @@
                 </a:solidFill>
                 <a:latin typeface="Noto Sans CJK KR"/>
               </a:rPr>
-              <a:t>5자릿수 스프레드, 그러나 대부분 memory-bound</a:t>
-            </a:r>
-          </a:p>
-        </p:txBody>
-      </p:sp>
-      <p:sp>
-        <p:nvSpPr>
-          <p:cNvPr id="5" name="Rectangle 4"/>
+              <a:t>학습은 compute-bound, 디코드는 memory-bound</a:t>
+            </a:r>
+          </a:p>
+        </p:txBody>
+      </p:sp>
+      <p:sp>
+        <p:nvSpPr>
+          <p:cNvPr id="5" name="Rounded Rectangle 4"/>
           <p:cNvSpPr/>
           <p:nvPr/>
         </p:nvSpPr>
         <p:spPr>
           <a:xfrm>
-            <a:off x="466344" y="1482725"/>
-            <a:ext cx="5605272" cy="2685542"/>
+            <a:off x="502920" y="1371600"/>
+            <a:ext cx="5486400" cy="1828800"/>
+          </a:xfrm>
+          <a:prstGeom prst="roundRect">
+            <a:avLst/>
+          </a:prstGeom>
+          <a:solidFill>
+            <a:srgbClr val="DBE7F3"/>
+          </a:solidFill>
+          <a:ln w="12700">
+            <a:solidFill>
+              <a:srgbClr val="2A6F97"/>
+            </a:solidFill>
+          </a:ln>
+          <a:effectLst/>
+        </p:spPr>
+        <p:style>
+          <a:lnRef idx="1">
+            <a:schemeClr val="accent1"/>
+          </a:lnRef>
+          <a:fillRef idx="3">
+            <a:schemeClr val="accent1"/>
+          </a:fillRef>
+          <a:effectRef idx="2">
+            <a:schemeClr val="accent1"/>
+          </a:effectRef>
+          <a:fontRef idx="minor">
+            <a:schemeClr val="lt1"/>
+          </a:fontRef>
+        </p:style>
+        <p:txBody>
+          <a:bodyPr rtlCol="0" anchor="ctr" wrap="square" lIns="76200" rIns="76200" tIns="38100" bIns="38100"/>
+          <a:lstStyle/>
+          <a:p>
+            <a:pPr algn="l">
+              <a:lnSpc>
+                <a:spcPct val="118000"/>
+              </a:lnSpc>
+              <a:spcBef>
+                <a:spcPts val="0"/>
+              </a:spcBef>
+              <a:spcAft>
+                <a:spcPts val="500"/>
+              </a:spcAft>
+            </a:pPr>
+            <a:r>
+              <a:rPr sz="1400" b="1" i="0">
+                <a:solidFill>
+                  <a:srgbClr val="2A6F97"/>
+                </a:solidFill>
+                <a:latin typeface="Noto Sans CJK KR"/>
+              </a:rPr>
+              <a:t>학습(training) — compute-bound</a:t>
+            </a:r>
+          </a:p>
+          <a:p>
+            <a:pPr algn="l">
+              <a:lnSpc>
+                <a:spcPct val="118000"/>
+              </a:lnSpc>
+              <a:spcBef>
+                <a:spcPts val="0"/>
+              </a:spcBef>
+              <a:spcAft>
+                <a:spcPts val="300"/>
+              </a:spcAft>
+            </a:pPr>
+            <a:r>
+              <a:rPr sz="1250" b="0" i="0">
+                <a:solidFill>
+                  <a:srgbClr val="22252B"/>
+                </a:solidFill>
+                <a:latin typeface="Noto Sans CJK KR"/>
+              </a:rPr>
+              <a:t>chunk C를 크게 잡아 병렬 → 연산/바이트(arithmetic intensity)가 높다.</a:t>
+            </a:r>
+          </a:p>
+          <a:p>
+            <a:pPr algn="l">
+              <a:lnSpc>
+                <a:spcPct val="118000"/>
+              </a:lnSpc>
+              <a:spcBef>
+                <a:spcPts val="0"/>
+              </a:spcBef>
+              <a:spcAft>
+                <a:spcPts val="300"/>
+              </a:spcAft>
+            </a:pPr>
+            <a:r>
+              <a:rPr sz="1250" b="0" i="0">
+                <a:solidFill>
+                  <a:srgbClr val="22252B"/>
+                </a:solidFill>
+                <a:latin typeface="Noto Sans CJK KR"/>
+              </a:rPr>
+              <a:t>roofline의 오른쪽(연산 한계) → 더 빠른 연산기가 이득.</a:t>
+            </a:r>
+          </a:p>
+        </p:txBody>
+      </p:sp>
+      <p:sp>
+        <p:nvSpPr>
+          <p:cNvPr id="6" name="Rounded Rectangle 5"/>
+          <p:cNvSpPr/>
+          <p:nvPr/>
+        </p:nvSpPr>
+        <p:spPr>
+          <a:xfrm>
+            <a:off x="6172200" y="1371600"/>
+            <a:ext cx="5486400" cy="1828800"/>
+          </a:xfrm>
+          <a:prstGeom prst="roundRect">
+            <a:avLst/>
+          </a:prstGeom>
+          <a:solidFill>
+            <a:srgbClr val="F6DDDD"/>
+          </a:solidFill>
+          <a:ln w="12700">
+            <a:solidFill>
+              <a:srgbClr val="C1121F"/>
+            </a:solidFill>
+          </a:ln>
+          <a:effectLst/>
+        </p:spPr>
+        <p:style>
+          <a:lnRef idx="1">
+            <a:schemeClr val="accent1"/>
+          </a:lnRef>
+          <a:fillRef idx="3">
+            <a:schemeClr val="accent1"/>
+          </a:fillRef>
+          <a:effectRef idx="2">
+            <a:schemeClr val="accent1"/>
+          </a:effectRef>
+          <a:fontRef idx="minor">
+            <a:schemeClr val="lt1"/>
+          </a:fontRef>
+        </p:style>
+        <p:txBody>
+          <a:bodyPr rtlCol="0" anchor="ctr" wrap="square" lIns="76200" rIns="76200" tIns="38100" bIns="38100"/>
+          <a:lstStyle/>
+          <a:p>
+            <a:pPr algn="l">
+              <a:lnSpc>
+                <a:spcPct val="118000"/>
+              </a:lnSpc>
+              <a:spcBef>
+                <a:spcPts val="0"/>
+              </a:spcBef>
+              <a:spcAft>
+                <a:spcPts val="500"/>
+              </a:spcAft>
+            </a:pPr>
+            <a:r>
+              <a:rPr sz="1400" b="1" i="0">
+                <a:solidFill>
+                  <a:srgbClr val="C1121F"/>
+                </a:solidFill>
+                <a:latin typeface="Noto Sans CJK KR"/>
+              </a:rPr>
+              <a:t>디코드(decode) — memory-bound</a:t>
+            </a:r>
+          </a:p>
+          <a:p>
+            <a:pPr algn="l">
+              <a:lnSpc>
+                <a:spcPct val="118000"/>
+              </a:lnSpc>
+              <a:spcBef>
+                <a:spcPts val="0"/>
+              </a:spcBef>
+              <a:spcAft>
+                <a:spcPts val="300"/>
+              </a:spcAft>
+            </a:pPr>
+            <a:r>
+              <a:rPr sz="1250" b="0" i="0">
+                <a:solidFill>
+                  <a:srgbClr val="22252B"/>
+                </a:solidFill>
+                <a:latin typeface="Noto Sans CJK KR"/>
+              </a:rPr>
+              <a:t>chunk=1, 토큰마다 '전체 상태(state+weights)'를 read-modify-write.</a:t>
+            </a:r>
+          </a:p>
+          <a:p>
+            <a:pPr algn="l">
+              <a:lnSpc>
+                <a:spcPct val="118000"/>
+              </a:lnSpc>
+              <a:spcBef>
+                <a:spcPts val="0"/>
+              </a:spcBef>
+              <a:spcAft>
+                <a:spcPts val="300"/>
+              </a:spcAft>
+            </a:pPr>
+            <a:r>
+              <a:rPr sz="1250" b="0" i="0">
+                <a:solidFill>
+                  <a:srgbClr val="22252B"/>
+                </a:solidFill>
+                <a:latin typeface="Noto Sans CJK KR"/>
+              </a:rPr>
+              <a:t>arithmetic intensity가 낮다 → roofline의 왼쪽(대역폭 한계).</a:t>
+            </a:r>
+          </a:p>
+        </p:txBody>
+      </p:sp>
+      <p:sp>
+        <p:nvSpPr>
+          <p:cNvPr id="7" name="Rectangle 6"/>
+          <p:cNvSpPr/>
+          <p:nvPr/>
+        </p:nvSpPr>
+        <p:spPr>
+          <a:xfrm>
+            <a:off x="895197" y="3392424"/>
+            <a:ext cx="4747564" cy="2020824"/>
           </a:xfrm>
           <a:prstGeom prst="rect">
             <a:avLst/>
@@ -49608,7 +50312,7 @@
       </p:sp>
       <p:pic>
         <p:nvPicPr>
-          <p:cNvPr id="6" name="Picture 5" descr="fig1-decode-ms.png"/>
+          <p:cNvPr id="8" name="Picture 7" descr="fig4-sstar-invariance.png"/>
           <p:cNvPicPr>
             <a:picLocks noChangeAspect="1"/>
           </p:cNvPicPr>
@@ -49622,8 +50326,8 @@
         </p:blipFill>
         <p:spPr>
           <a:xfrm>
-            <a:off x="502920" y="1519301"/>
-            <a:ext cx="5532120" cy="2612390"/>
+            <a:off x="931773" y="3429000"/>
+            <a:ext cx="4674412" cy="1947672"/>
           </a:xfrm>
           <a:prstGeom prst="rect">
             <a:avLst/>
@@ -49632,13 +50336,13 @@
       </p:pic>
       <p:sp>
         <p:nvSpPr>
-          <p:cNvPr id="7" name="TextBox 6"/>
+          <p:cNvPr id="9" name="TextBox 8"/>
           <p:cNvSpPr txBox="1"/>
           <p:nvPr/>
         </p:nvSpPr>
         <p:spPr>
           <a:xfrm>
-            <a:off x="502920" y="4297679"/>
+            <a:off x="502920" y="5394959"/>
             <a:ext cx="5532120" cy="365760"/>
           </a:xfrm>
           <a:prstGeom prst="rect">
@@ -49670,29 +50374,31 @@
                 </a:solidFill>
                 <a:latin typeface="Noto Sans CJK KR"/>
               </a:rPr>
-              <a:t>토큰당 decode 시간(ideal 하한, log) — MTIA v2 ~31ms에서 WSE-3 ~0.0003ms까지</a:t>
-            </a:r>
-          </a:p>
-        </p:txBody>
-      </p:sp>
-      <p:sp>
-        <p:nvSpPr>
-          <p:cNvPr id="8" name="Rectangle 7"/>
+              <a:t>S*(KV↔TTT 교차점)=65536 tokens — 8개 가속기 전부 동일 = 하드웨어가 아니라 workload의 성질</a:t>
+            </a:r>
+          </a:p>
+        </p:txBody>
+      </p:sp>
+      <p:sp>
+        <p:nvSpPr>
+          <p:cNvPr id="10" name="Rounded Rectangle 9"/>
           <p:cNvSpPr/>
           <p:nvPr/>
         </p:nvSpPr>
         <p:spPr>
           <a:xfrm>
-            <a:off x="6227064" y="1664970"/>
-            <a:ext cx="5468112" cy="2321052"/>
-          </a:xfrm>
-          <a:prstGeom prst="rect">
-            <a:avLst/>
-          </a:prstGeom>
-          <a:noFill/>
-          <a:ln w="9525">
+            <a:off x="6172200" y="3429000"/>
+            <a:ext cx="5486400" cy="2103120"/>
+          </a:xfrm>
+          <a:prstGeom prst="roundRect">
+            <a:avLst/>
+          </a:prstGeom>
+          <a:solidFill>
+            <a:srgbClr val="F6ECC7"/>
+          </a:solidFill>
+          <a:ln w="12700">
             <a:solidFill>
-              <a:srgbClr val="8A8F98"/>
+              <a:srgbClr val="C9A227"/>
             </a:solidFill>
           </a:ln>
           <a:effectLst/>
@@ -49712,121 +50418,6 @@
           </a:fontRef>
         </p:style>
         <p:txBody>
-          <a:bodyPr rtlCol="0" anchor="ctr"/>
-          <a:lstStyle/>
-          <a:p>
-            <a:pPr algn="ctr"/>
-          </a:p>
-        </p:txBody>
-      </p:sp>
-      <p:pic>
-        <p:nvPicPr>
-          <p:cNvPr id="9" name="Picture 8" descr="fig4-sstar-invariance.png"/>
-          <p:cNvPicPr>
-            <a:picLocks noChangeAspect="1"/>
-          </p:cNvPicPr>
-          <p:nvPr/>
-        </p:nvPicPr>
-        <p:blipFill>
-          <a:blip r:embed="rId3"/>
-          <a:stretch>
-            <a:fillRect/>
-          </a:stretch>
-        </p:blipFill>
-        <p:spPr>
-          <a:xfrm>
-            <a:off x="6263640" y="1701546"/>
-            <a:ext cx="5394960" cy="2247900"/>
-          </a:xfrm>
-          <a:prstGeom prst="rect">
-            <a:avLst/>
-          </a:prstGeom>
-        </p:spPr>
-      </p:pic>
-      <p:sp>
-        <p:nvSpPr>
-          <p:cNvPr id="10" name="TextBox 9"/>
-          <p:cNvSpPr txBox="1"/>
-          <p:nvPr/>
-        </p:nvSpPr>
-        <p:spPr>
-          <a:xfrm>
-            <a:off x="6263640" y="4297679"/>
-            <a:ext cx="5394960" cy="365760"/>
-          </a:xfrm>
-          <a:prstGeom prst="rect">
-            <a:avLst/>
-          </a:prstGeom>
-          <a:noFill/>
-        </p:spPr>
-        <p:txBody>
-          <a:bodyPr wrap="square" anchor="t" lIns="38100" rIns="38100" tIns="25400" bIns="25400">
-            <a:spAutoFit/>
-          </a:bodyPr>
-          <a:lstStyle/>
-          <a:p>
-            <a:pPr algn="ctr">
-              <a:lnSpc>
-                <a:spcPct val="120000"/>
-              </a:lnSpc>
-              <a:spcBef>
-                <a:spcPts val="0"/>
-              </a:spcBef>
-              <a:spcAft>
-                <a:spcPts val="0"/>
-              </a:spcAft>
-            </a:pPr>
-            <a:r>
-              <a:rPr sz="1050" b="0" i="0">
-                <a:solidFill>
-                  <a:srgbClr val="22252B"/>
-                </a:solidFill>
-                <a:latin typeface="Noto Sans CJK KR"/>
-              </a:rPr>
-              <a:t>S* 불변: 8개 아키텍처가 같은 교차점 — workload 고유 성질</a:t>
-            </a:r>
-          </a:p>
-        </p:txBody>
-      </p:sp>
-      <p:sp>
-        <p:nvSpPr>
-          <p:cNvPr id="11" name="Rounded Rectangle 10"/>
-          <p:cNvSpPr/>
-          <p:nvPr/>
-        </p:nvSpPr>
-        <p:spPr>
-          <a:xfrm>
-            <a:off x="502920" y="4800600"/>
-            <a:ext cx="11155680" cy="914400"/>
-          </a:xfrm>
-          <a:prstGeom prst="roundRect">
-            <a:avLst/>
-          </a:prstGeom>
-          <a:solidFill>
-            <a:srgbClr val="ECEEF1"/>
-          </a:solidFill>
-          <a:ln w="12700">
-            <a:solidFill>
-              <a:srgbClr val="8A8F98"/>
-            </a:solidFill>
-          </a:ln>
-          <a:effectLst/>
-        </p:spPr>
-        <p:style>
-          <a:lnRef idx="1">
-            <a:schemeClr val="accent1"/>
-          </a:lnRef>
-          <a:fillRef idx="3">
-            <a:schemeClr val="accent1"/>
-          </a:fillRef>
-          <a:effectRef idx="2">
-            <a:schemeClr val="accent1"/>
-          </a:effectRef>
-          <a:fontRef idx="minor">
-            <a:schemeClr val="lt1"/>
-          </a:fontRef>
-        </p:style>
-        <p:txBody>
           <a:bodyPr rtlCol="0" anchor="ctr" wrap="square" lIns="76200" rIns="76200" tIns="38100" bIns="38100"/>
           <a:lstStyle/>
           <a:p>
@@ -49838,17 +50429,17 @@
                 <a:spcPts val="0"/>
               </a:spcBef>
               <a:spcAft>
-                <a:spcPts val="200"/>
-              </a:spcAft>
-            </a:pPr>
-            <a:r>
-              <a:rPr sz="1250" b="1" i="0">
-                <a:solidFill>
-                  <a:srgbClr val="22252B"/>
-                </a:solidFill>
-                <a:latin typeface="Noto Sans CJK KR"/>
-              </a:rPr>
-              <a:t>읽는 법</a:t>
+                <a:spcPts val="500"/>
+              </a:spcAft>
+            </a:pPr>
+            <a:r>
+              <a:rPr sz="1300" b="1" i="0">
+                <a:solidFill>
+                  <a:srgbClr val="C9A227"/>
+                </a:solidFill>
+                <a:latin typeface="Noto Sans CJK KR"/>
+              </a:rPr>
+              <a:t>왜 중요한가</a:t>
             </a:r>
           </a:p>
           <a:p>
@@ -49864,13 +50455,35 @@
               </a:spcAft>
             </a:pPr>
             <a:r>
-              <a:rPr sz="1200" b="0" i="0">
-                <a:solidFill>
-                  <a:srgbClr val="22252B"/>
-                </a:solidFill>
-                <a:latin typeface="Noto Sans CJK KR"/>
-              </a:rPr>
-              <a:t>8칩 중 7개가 memory-bound(대역폭이 결정). 예외는 WSE-3(Cerebras) — 거대한 on-chip SRAM으로 상태를 상주시켜 compute 쪽으로 넘어가는 'knee'가 생긴다. 각 칩 spec은 HAT hw twin으로 검증(die/PE 구조까지).</a:t>
+              <a:rPr sz="1250" b="0" i="0">
+                <a:solidFill>
+                  <a:srgbClr val="22252B"/>
+                </a:solidFill>
+                <a:latin typeface="Noto Sans CJK KR"/>
+              </a:rPr>
+              <a:t>메모리 상태를 갱신하는 이 계열은 디코드에서 구조적으로 memory-bound다. 그리고 그 경계(S*)는 하드웨어를 바꿔도 변하지 않는다(invariant). 즉 '어느 칩을 써도' 디코드 비용은 메모리 대역폭이 지배한다.</a:t>
+            </a:r>
+          </a:p>
+          <a:p>
+            <a:pPr algn="l">
+              <a:lnSpc>
+                <a:spcPct val="118000"/>
+              </a:lnSpc>
+              <a:spcBef>
+                <a:spcPts val="0"/>
+              </a:spcBef>
+              <a:spcAft>
+                <a:spcPts val="300"/>
+              </a:spcAft>
+            </a:pPr>
+            <a:r>
+              <a:rPr sz="1200" b="1" i="0">
+                <a:solidFill>
+                  <a:srgbClr val="2A6F97"/>
+                </a:solidFill>
+                <a:latin typeface="Noto Sans CJK KR"/>
+              </a:rPr>
+              <a:t>→ 이후 슬라이드: 실제 8칩 측정 · HOPE block roofline · 메모리 기술(zHBM/PIM/SRAM) · 청사진.</a:t>
             </a:r>
           </a:p>
         </p:txBody>
@@ -49998,7 +50611,7 @@
                 </a:solidFill>
                 <a:latin typeface="Noto Sans CJK KR"/>
               </a:rPr>
-              <a:t>C3 · HOPE block roofline (H100 트윈)</a:t>
+              <a:t>C2 · 8개 가속기 크로스 측정</a:t>
             </a:r>
           </a:p>
         </p:txBody>
@@ -50043,7 +50656,7 @@
                 </a:solidFill>
                 <a:latin typeface="Noto Sans CJK KR"/>
               </a:rPr>
-              <a:t>1개 HOPE block을 실제 수치로 — 어디가 병목인가</a:t>
+              <a:t>5자릿수 스프레드, 그러나 대부분 memory-bound</a:t>
             </a:r>
           </a:p>
         </p:txBody>
@@ -50056,8 +50669,8 @@
         </p:nvSpPr>
         <p:spPr>
           <a:xfrm>
-            <a:off x="643845" y="1335024"/>
-            <a:ext cx="5250269" cy="2889504"/>
+            <a:off x="466344" y="1482725"/>
+            <a:ext cx="5605272" cy="2685542"/>
           </a:xfrm>
           <a:prstGeom prst="rect">
             <a:avLst/>
@@ -50094,7 +50707,7 @@
       </p:sp>
       <p:pic>
         <p:nvPicPr>
-          <p:cNvPr id="6" name="Picture 5" descr="fig-hope-dag.png"/>
+          <p:cNvPr id="6" name="Picture 5" descr="fig1-decode-ms.png"/>
           <p:cNvPicPr>
             <a:picLocks noChangeAspect="1"/>
           </p:cNvPicPr>
@@ -50108,8 +50721,8 @@
         </p:blipFill>
         <p:spPr>
           <a:xfrm>
-            <a:off x="680421" y="1371600"/>
-            <a:ext cx="5177117" cy="2816352"/>
+            <a:off x="502920" y="1519301"/>
+            <a:ext cx="5532120" cy="2612390"/>
           </a:xfrm>
           <a:prstGeom prst="rect">
             <a:avLst/>
@@ -50124,7 +50737,7 @@
         </p:nvSpPr>
         <p:spPr>
           <a:xfrm>
-            <a:off x="502920" y="4206240"/>
+            <a:off x="502920" y="4297679"/>
             <a:ext cx="5532120" cy="365760"/>
           </a:xfrm>
           <a:prstGeom prst="rect">
@@ -50156,7 +50769,7 @@
                 </a:solidFill>
                 <a:latin typeface="Noto Sans CJK KR"/>
               </a:rPr>
-              <a:t>1 HOPE block(self-mod Titans→CMS)의 전 연산 DAG (B=1, chunk C, d=2048)</a:t>
+              <a:t>토큰당 decode 시간(ideal 하한, log) — MTIA v2 ~31ms에서 WSE-3 ~0.0003ms까지</a:t>
             </a:r>
           </a:p>
         </p:txBody>
@@ -50169,8 +50782,8 @@
         </p:nvSpPr>
         <p:spPr>
           <a:xfrm>
-            <a:off x="6227064" y="1901586"/>
-            <a:ext cx="5468112" cy="1756379"/>
+            <a:off x="6227064" y="1664970"/>
+            <a:ext cx="5468112" cy="2321052"/>
           </a:xfrm>
           <a:prstGeom prst="rect">
             <a:avLst/>
@@ -50207,7 +50820,7 @@
       </p:sp>
       <p:pic>
         <p:nvPicPr>
-          <p:cNvPr id="9" name="Picture 8" descr="fig-hope-roofline.png"/>
+          <p:cNvPr id="9" name="Picture 8" descr="fig4-sstar-invariance.png"/>
           <p:cNvPicPr>
             <a:picLocks noChangeAspect="1"/>
           </p:cNvPicPr>
@@ -50221,8 +50834,8 @@
         </p:blipFill>
         <p:spPr>
           <a:xfrm>
-            <a:off x="6263640" y="1938162"/>
-            <a:ext cx="5394960" cy="1683227"/>
+            <a:off x="6263640" y="1701546"/>
+            <a:ext cx="5394960" cy="2247900"/>
           </a:xfrm>
           <a:prstGeom prst="rect">
             <a:avLst/>
@@ -50237,7 +50850,7 @@
         </p:nvSpPr>
         <p:spPr>
           <a:xfrm>
-            <a:off x="6263640" y="4206240"/>
+            <a:off x="6263640" y="4297679"/>
             <a:ext cx="5394960" cy="365760"/>
           </a:xfrm>
           <a:prstGeom prst="rect">
@@ -50269,7 +50882,7 @@
                 </a:solidFill>
                 <a:latin typeface="Noto Sans CJK KR"/>
               </a:rPr>
-              <a:t>roofline·op별 시간·PIM 비교 (BW 3.35TB/s, peak 0.99PF, ridge 295)</a:t>
+              <a:t>S* 불변: 8개 아키텍처가 같은 교차점 — workload 고유 성질</a:t>
             </a:r>
           </a:p>
         </p:txBody>
@@ -50282,18 +50895,18 @@
         </p:nvSpPr>
         <p:spPr>
           <a:xfrm>
-            <a:off x="502920" y="4709160"/>
-            <a:ext cx="11155680" cy="960120"/>
+            <a:off x="502920" y="4800600"/>
+            <a:ext cx="11155680" cy="914400"/>
           </a:xfrm>
           <a:prstGeom prst="roundRect">
             <a:avLst/>
           </a:prstGeom>
           <a:solidFill>
-            <a:srgbClr val="F6DDDD"/>
+            <a:srgbClr val="ECEEF1"/>
           </a:solidFill>
           <a:ln w="12700">
             <a:solidFill>
-              <a:srgbClr val="C1121F"/>
+              <a:srgbClr val="8A8F98"/>
             </a:solidFill>
           </a:ln>
           <a:effectLst/>
@@ -50330,11 +50943,11 @@
             <a:r>
               <a:rPr sz="1250" b="1" i="0">
                 <a:solidFill>
-                  <a:srgbClr val="C1121F"/>
-                </a:solidFill>
-                <a:latin typeface="Noto Sans CJK KR"/>
-              </a:rPr>
-              <a:t>병목</a:t>
+                  <a:srgbClr val="22252B"/>
+                </a:solidFill>
+                <a:latin typeface="Noto Sans CJK KR"/>
+              </a:rPr>
+              <a:t>읽는 법</a:t>
             </a:r>
           </a:p>
           <a:p>
@@ -50356,7 +50969,7 @@
                 </a:solidFill>
                 <a:latin typeface="Noto Sans CJK KR"/>
               </a:rPr>
-              <a:t>C=1 디코드는 roofline 왼쪽(memory-bound). op별로 보면 CMS/DGD-apply의 state read-modify-write가 지배적. state(≈134MB) + weights를 매 토큰 HBM(3.35TB/s)에서 읽어야 해 block당 ~203µs(ideal 하한).</a:t>
+              <a:t>8칩 중 7개가 memory-bound(대역폭이 결정). 예외는 WSE-3(Cerebras) — 거대한 on-chip SRAM으로 상태를 상주시켜 compute 쪽으로 넘어가는 'knee'가 생긴다. 각 칩 spec은 HAT hw twin으로 검증(die/PE 구조까지).</a:t>
             </a:r>
           </a:p>
         </p:txBody>
@@ -50484,7 +51097,7 @@
                 </a:solidFill>
                 <a:latin typeface="Noto Sans CJK KR"/>
               </a:rPr>
-              <a:t>C4 · 메모리 기술 — zHBM · HBM-PIM · SRAM</a:t>
+              <a:t>C3 · HOPE block 구조</a:t>
             </a:r>
           </a:p>
         </p:txBody>
@@ -50529,27 +51142,29 @@
                 </a:solidFill>
                 <a:latin typeface="Noto Sans CJK KR"/>
               </a:rPr>
-              <a:t>memory-bound라면 답은 '대역폭'과 '상주'</a:t>
-            </a:r>
-          </a:p>
-        </p:txBody>
-      </p:sp>
-      <p:sp>
-        <p:nvSpPr>
-          <p:cNvPr id="5" name="Rectangle 4"/>
+              <a:t>1개 block의 전 연산 (H100 트윈, d=2048, C=1) — 21개 op을 4단계로</a:t>
+            </a:r>
+          </a:p>
+        </p:txBody>
+      </p:sp>
+      <p:sp>
+        <p:nvSpPr>
+          <p:cNvPr id="5" name="Rounded Rectangle 4"/>
           <p:cNvSpPr/>
           <p:nvPr/>
         </p:nvSpPr>
         <p:spPr>
           <a:xfrm>
-            <a:off x="466344" y="1778706"/>
-            <a:ext cx="5605272" cy="2093578"/>
-          </a:xfrm>
-          <a:prstGeom prst="rect">
-            <a:avLst/>
-          </a:prstGeom>
-          <a:noFill/>
-          <a:ln w="9525">
+            <a:off x="1508760" y="1325880"/>
+            <a:ext cx="3749039" cy="402336"/>
+          </a:xfrm>
+          <a:prstGeom prst="roundRect">
+            <a:avLst/>
+          </a:prstGeom>
+          <a:solidFill>
+            <a:srgbClr val="ECEEF1"/>
+          </a:solidFill>
+          <a:ln w="12700">
             <a:solidFill>
               <a:srgbClr val="8A8F98"/>
             </a:solidFill>
@@ -50571,98 +51186,542 @@
           </a:fontRef>
         </p:style>
         <p:txBody>
-          <a:bodyPr rtlCol="0" anchor="ctr"/>
-          <a:lstStyle/>
-          <a:p>
-            <a:pPr algn="ctr"/>
-          </a:p>
-        </p:txBody>
-      </p:sp>
-      <p:pic>
-        <p:nvPicPr>
-          <p:cNvPr id="6" name="Picture 5" descr="fig-zhbm-pim.png"/>
-          <p:cNvPicPr>
-            <a:picLocks noChangeAspect="1"/>
-          </p:cNvPicPr>
-          <p:nvPr/>
-        </p:nvPicPr>
-        <p:blipFill>
-          <a:blip r:embed="rId2"/>
-          <a:stretch>
-            <a:fillRect/>
-          </a:stretch>
-        </p:blipFill>
-        <p:spPr>
-          <a:xfrm>
-            <a:off x="502920" y="1815282"/>
-            <a:ext cx="5532120" cy="2020426"/>
-          </a:xfrm>
-          <a:prstGeom prst="rect">
-            <a:avLst/>
-          </a:prstGeom>
-        </p:spPr>
-      </p:pic>
-      <p:sp>
-        <p:nvSpPr>
-          <p:cNvPr id="7" name="TextBox 6"/>
-          <p:cNvSpPr txBox="1"/>
-          <p:nvPr/>
-        </p:nvSpPr>
-        <p:spPr>
-          <a:xfrm>
-            <a:off x="502920" y="4297679"/>
-            <a:ext cx="5532120" cy="365760"/>
-          </a:xfrm>
-          <a:prstGeom prst="rect">
-            <a:avLst/>
-          </a:prstGeom>
-          <a:noFill/>
-        </p:spPr>
-        <p:txBody>
-          <a:bodyPr wrap="square" anchor="t" lIns="38100" rIns="38100" tIns="25400" bIns="25400">
-            <a:spAutoFit/>
-          </a:bodyPr>
+          <a:bodyPr rtlCol="0" anchor="ctr" wrap="square" lIns="76200" rIns="76200" tIns="38100" bIns="38100"/>
           <a:lstStyle/>
           <a:p>
             <a:pPr algn="ctr">
               <a:lnSpc>
-                <a:spcPct val="120000"/>
-              </a:lnSpc>
-              <a:spcBef>
-                <a:spcPts val="0"/>
-              </a:spcBef>
-              <a:spcAft>
-                <a:spcPts val="0"/>
-              </a:spcAft>
-            </a:pPr>
-            <a:r>
-              <a:rPr sz="1050" b="0" i="0">
-                <a:solidFill>
-                  <a:srgbClr val="22252B"/>
-                </a:solidFill>
-                <a:latin typeface="Noto Sans CJK KR"/>
-              </a:rPr>
-              <a:t>HBM/zHBM/HBM-PIM/zHBM-PIM decode 비용 + zHBM 내부 연산 추가 면적</a:t>
-            </a:r>
-          </a:p>
-        </p:txBody>
-      </p:sp>
-      <p:sp>
-        <p:nvSpPr>
-          <p:cNvPr id="8" name="Rectangle 7"/>
+                <a:spcPct val="118000"/>
+              </a:lnSpc>
+              <a:spcBef>
+                <a:spcPts val="0"/>
+              </a:spcBef>
+              <a:spcAft>
+                <a:spcPts val="300"/>
+              </a:spcAft>
+            </a:pPr>
+            <a:r>
+              <a:rPr sz="1150" b="1" i="0">
+                <a:solidFill>
+                  <a:srgbClr val="22252B"/>
+                </a:solidFill>
+                <a:latin typeface="Noto Sans CJK KR"/>
+              </a:rPr>
+              <a:t>입력 X  [1, d]</a:t>
+            </a:r>
+          </a:p>
+        </p:txBody>
+      </p:sp>
+      <p:cxnSp>
+        <p:nvCxnSpPr>
+          <p:cNvPr id="6" name="Connector 5"/>
+          <p:cNvCxnSpPr/>
+          <p:nvPr/>
+        </p:nvCxnSpPr>
+        <p:spPr>
+          <a:xfrm>
+            <a:off x="3383280" y="1746503"/>
+            <a:ext cx="0" cy="137160"/>
+          </a:xfrm>
+          <a:prstGeom prst="line">
+            <a:avLst/>
+          </a:prstGeom>
+          <a:ln w="20320">
+            <a:solidFill>
+              <a:srgbClr val="22252B"/>
+            </a:solidFill>
+            <a:tailEnd type="triangle" w="med" h="med"/>
+          </a:ln>
+        </p:spPr>
+        <p:style>
+          <a:lnRef idx="2">
+            <a:schemeClr val="accent1"/>
+          </a:lnRef>
+          <a:fillRef idx="0">
+            <a:schemeClr val="accent1"/>
+          </a:fillRef>
+          <a:effectRef idx="1">
+            <a:schemeClr val="accent1"/>
+          </a:effectRef>
+          <a:fontRef idx="minor">
+            <a:schemeClr val="tx1"/>
+          </a:fontRef>
+        </p:style>
+      </p:cxnSp>
+      <p:sp>
+        <p:nvSpPr>
+          <p:cNvPr id="7" name="Rounded Rectangle 6"/>
           <p:cNvSpPr/>
           <p:nvPr/>
         </p:nvSpPr>
         <p:spPr>
           <a:xfrm>
-            <a:off x="6293684" y="1335024"/>
-            <a:ext cx="5334870" cy="2980944"/>
-          </a:xfrm>
-          <a:prstGeom prst="rect">
-            <a:avLst/>
-          </a:prstGeom>
-          <a:noFill/>
-          <a:ln w="9525">
+            <a:off x="502920" y="1874519"/>
+            <a:ext cx="5760720" cy="676656"/>
+          </a:xfrm>
+          <a:prstGeom prst="roundRect">
+            <a:avLst/>
+          </a:prstGeom>
+          <a:solidFill>
+            <a:srgbClr val="DBE7F3"/>
+          </a:solidFill>
+          <a:ln w="12700">
+            <a:solidFill>
+              <a:srgbClr val="2A6F97"/>
+            </a:solidFill>
+          </a:ln>
+          <a:effectLst/>
+        </p:spPr>
+        <p:style>
+          <a:lnRef idx="1">
+            <a:schemeClr val="accent1"/>
+          </a:lnRef>
+          <a:fillRef idx="3">
+            <a:schemeClr val="accent1"/>
+          </a:fillRef>
+          <a:effectRef idx="2">
+            <a:schemeClr val="accent1"/>
+          </a:effectRef>
+          <a:fontRef idx="minor">
+            <a:schemeClr val="lt1"/>
+          </a:fontRef>
+        </p:style>
+        <p:txBody>
+          <a:bodyPr rtlCol="0" anchor="ctr" wrap="square" lIns="76200" rIns="76200" tIns="38100" bIns="38100"/>
+          <a:lstStyle/>
+          <a:p>
+            <a:pPr algn="l">
+              <a:lnSpc>
+                <a:spcPct val="118000"/>
+              </a:lnSpc>
+              <a:spcBef>
+                <a:spcPts val="0"/>
+              </a:spcBef>
+              <a:spcAft>
+                <a:spcPts val="200"/>
+              </a:spcAft>
+            </a:pPr>
+            <a:r>
+              <a:rPr sz="1150" b="1" i="0">
+                <a:solidFill>
+                  <a:srgbClr val="2A6F97"/>
+                </a:solidFill>
+                <a:latin typeface="Noto Sans CJK KR"/>
+              </a:rPr>
+              <a:t>① 투영 (self-mod Titans) · GEMM · 17.5µs</a:t>
+            </a:r>
+          </a:p>
+          <a:p>
+            <a:pPr algn="l">
+              <a:lnSpc>
+                <a:spcPct val="118000"/>
+              </a:lnSpc>
+              <a:spcBef>
+                <a:spcPts val="0"/>
+              </a:spcBef>
+              <a:spcAft>
+                <a:spcPts val="300"/>
+              </a:spcAft>
+            </a:pPr>
+            <a:r>
+              <a:rPr sz="1000" b="0" i="0">
+                <a:solidFill>
+                  <a:srgbClr val="22252B"/>
+                </a:solidFill>
+                <a:latin typeface="Noto Sans CJK KR"/>
+              </a:rPr>
+              <a:t>q=X·Wq(static) · k=M_k(X) · v=M_v(X) · η=M_η(X) · α=M_α(X)</a:t>
+            </a:r>
+          </a:p>
+        </p:txBody>
+      </p:sp>
+      <p:cxnSp>
+        <p:nvCxnSpPr>
+          <p:cNvPr id="8" name="Connector 7"/>
+          <p:cNvCxnSpPr/>
+          <p:nvPr/>
+        </p:nvCxnSpPr>
+        <p:spPr>
+          <a:xfrm>
+            <a:off x="3383280" y="2542032"/>
+            <a:ext cx="0" cy="137159"/>
+          </a:xfrm>
+          <a:prstGeom prst="line">
+            <a:avLst/>
+          </a:prstGeom>
+          <a:ln w="20320">
+            <a:solidFill>
+              <a:srgbClr val="22252B"/>
+            </a:solidFill>
+            <a:tailEnd type="triangle" w="med" h="med"/>
+          </a:ln>
+        </p:spPr>
+        <p:style>
+          <a:lnRef idx="2">
+            <a:schemeClr val="accent1"/>
+          </a:lnRef>
+          <a:fillRef idx="0">
+            <a:schemeClr val="accent1"/>
+          </a:fillRef>
+          <a:effectRef idx="1">
+            <a:schemeClr val="accent1"/>
+          </a:effectRef>
+          <a:fontRef idx="minor">
+            <a:schemeClr val="tx1"/>
+          </a:fontRef>
+        </p:style>
+      </p:cxnSp>
+      <p:sp>
+        <p:nvSpPr>
+          <p:cNvPr id="9" name="Rounded Rectangle 8"/>
+          <p:cNvSpPr/>
+          <p:nvPr/>
+        </p:nvSpPr>
+        <p:spPr>
+          <a:xfrm>
+            <a:off x="502920" y="2670048"/>
+            <a:ext cx="5760720" cy="548640"/>
+          </a:xfrm>
+          <a:prstGeom prst="roundRect">
+            <a:avLst/>
+          </a:prstGeom>
+          <a:solidFill>
+            <a:srgbClr val="DBE7F3"/>
+          </a:solidFill>
+          <a:ln w="12700">
+            <a:solidFill>
+              <a:srgbClr val="2A6F97"/>
+            </a:solidFill>
+          </a:ln>
+          <a:effectLst/>
+        </p:spPr>
+        <p:style>
+          <a:lnRef idx="1">
+            <a:schemeClr val="accent1"/>
+          </a:lnRef>
+          <a:fillRef idx="3">
+            <a:schemeClr val="accent1"/>
+          </a:fillRef>
+          <a:effectRef idx="2">
+            <a:schemeClr val="accent1"/>
+          </a:effectRef>
+          <a:fontRef idx="minor">
+            <a:schemeClr val="lt1"/>
+          </a:fontRef>
+        </p:style>
+        <p:txBody>
+          <a:bodyPr rtlCol="0" anchor="ctr" wrap="square" lIns="76200" rIns="76200" tIns="38100" bIns="38100"/>
+          <a:lstStyle/>
+          <a:p>
+            <a:pPr algn="l">
+              <a:lnSpc>
+                <a:spcPct val="118000"/>
+              </a:lnSpc>
+              <a:spcBef>
+                <a:spcPts val="0"/>
+              </a:spcBef>
+              <a:spcAft>
+                <a:spcPts val="200"/>
+              </a:spcAft>
+            </a:pPr>
+            <a:r>
+              <a:rPr sz="1150" b="1" i="0">
+                <a:solidFill>
+                  <a:srgbClr val="2A6F97"/>
+                </a:solidFill>
+                <a:latin typeface="Noto Sans CJK KR"/>
+              </a:rPr>
+              <a:t>② read (pre-update) · 5µs</a:t>
+            </a:r>
+          </a:p>
+          <a:p>
+            <a:pPr algn="l">
+              <a:lnSpc>
+                <a:spcPct val="118000"/>
+              </a:lnSpc>
+              <a:spcBef>
+                <a:spcPts val="0"/>
+              </a:spcBef>
+              <a:spcAft>
+                <a:spcPts val="300"/>
+              </a:spcAft>
+            </a:pPr>
+            <a:r>
+              <a:rPr sz="1000" b="0" i="0">
+                <a:solidFill>
+                  <a:srgbClr val="22252B"/>
+                </a:solidFill>
+                <a:latin typeface="Noto Sans CJK KR"/>
+              </a:rPr>
+              <a:t>o = M_mem(q) — 갱신 '전' 메모리에서 읽는다</a:t>
+            </a:r>
+          </a:p>
+        </p:txBody>
+      </p:sp>
+      <p:cxnSp>
+        <p:nvCxnSpPr>
+          <p:cNvPr id="10" name="Connector 9"/>
+          <p:cNvCxnSpPr/>
+          <p:nvPr/>
+        </p:nvCxnSpPr>
+        <p:spPr>
+          <a:xfrm>
+            <a:off x="3383280" y="3209544"/>
+            <a:ext cx="0" cy="137159"/>
+          </a:xfrm>
+          <a:prstGeom prst="line">
+            <a:avLst/>
+          </a:prstGeom>
+          <a:ln w="20320">
+            <a:solidFill>
+              <a:srgbClr val="22252B"/>
+            </a:solidFill>
+            <a:tailEnd type="triangle" w="med" h="med"/>
+          </a:ln>
+        </p:spPr>
+        <p:style>
+          <a:lnRef idx="2">
+            <a:schemeClr val="accent1"/>
+          </a:lnRef>
+          <a:fillRef idx="0">
+            <a:schemeClr val="accent1"/>
+          </a:fillRef>
+          <a:effectRef idx="1">
+            <a:schemeClr val="accent1"/>
+          </a:effectRef>
+          <a:fontRef idx="minor">
+            <a:schemeClr val="tx1"/>
+          </a:fontRef>
+        </p:style>
+      </p:cxnSp>
+      <p:sp>
+        <p:nvSpPr>
+          <p:cNvPr id="11" name="Rounded Rectangle 10"/>
+          <p:cNvSpPr/>
+          <p:nvPr/>
+        </p:nvSpPr>
+        <p:spPr>
+          <a:xfrm>
+            <a:off x="502920" y="3337560"/>
+            <a:ext cx="5760720" cy="786384"/>
+          </a:xfrm>
+          <a:prstGeom prst="roundRect">
+            <a:avLst/>
+          </a:prstGeom>
+          <a:solidFill>
+            <a:srgbClr val="F6DDDD"/>
+          </a:solidFill>
+          <a:ln w="12700">
+            <a:solidFill>
+              <a:srgbClr val="C1121F"/>
+            </a:solidFill>
+          </a:ln>
+          <a:effectLst/>
+        </p:spPr>
+        <p:style>
+          <a:lnRef idx="1">
+            <a:schemeClr val="accent1"/>
+          </a:lnRef>
+          <a:fillRef idx="3">
+            <a:schemeClr val="accent1"/>
+          </a:fillRef>
+          <a:effectRef idx="2">
+            <a:schemeClr val="accent1"/>
+          </a:effectRef>
+          <a:fontRef idx="minor">
+            <a:schemeClr val="lt1"/>
+          </a:fontRef>
+        </p:style>
+        <p:txBody>
+          <a:bodyPr rtlCol="0" anchor="ctr" wrap="square" lIns="76200" rIns="76200" tIns="38100" bIns="38100"/>
+          <a:lstStyle/>
+          <a:p>
+            <a:pPr algn="l">
+              <a:lnSpc>
+                <a:spcPct val="118000"/>
+              </a:lnSpc>
+              <a:spcBef>
+                <a:spcPts val="0"/>
+              </a:spcBef>
+              <a:spcAft>
+                <a:spcPts val="200"/>
+              </a:spcAft>
+            </a:pPr>
+            <a:r>
+              <a:rPr sz="1150" b="1" i="0">
+                <a:solidFill>
+                  <a:srgbClr val="C1121F"/>
+                </a:solidFill>
+                <a:latin typeface="Noto Sans CJK KR"/>
+              </a:rPr>
+              <a:t>③ update 5 memory · 60µs  (RMW 40µs 지배)</a:t>
+            </a:r>
+          </a:p>
+          <a:p>
+            <a:pPr algn="l">
+              <a:lnSpc>
+                <a:spcPct val="118000"/>
+              </a:lnSpc>
+              <a:spcBef>
+                <a:spcPts val="0"/>
+              </a:spcBef>
+              <a:spcAft>
+                <a:spcPts val="300"/>
+              </a:spcAft>
+            </a:pPr>
+            <a:r>
+              <a:rPr sz="1000" b="0" i="0">
+                <a:solidFill>
+                  <a:srgbClr val="22252B"/>
+                </a:solidFill>
+                <a:latin typeface="Noto Sans CJK KR"/>
+              </a:rPr>
+              <a:t>각 memory: compute(GEMM 20µs) + DGD-apply(state RMW 40µs). RMW = memory-bound</a:t>
+            </a:r>
+          </a:p>
+        </p:txBody>
+      </p:sp>
+      <p:cxnSp>
+        <p:nvCxnSpPr>
+          <p:cNvPr id="12" name="Connector 11"/>
+          <p:cNvCxnSpPr/>
+          <p:nvPr/>
+        </p:nvCxnSpPr>
+        <p:spPr>
+          <a:xfrm>
+            <a:off x="3383280" y="4114800"/>
+            <a:ext cx="0" cy="137159"/>
+          </a:xfrm>
+          <a:prstGeom prst="line">
+            <a:avLst/>
+          </a:prstGeom>
+          <a:ln w="20320">
+            <a:solidFill>
+              <a:srgbClr val="22252B"/>
+            </a:solidFill>
+            <a:tailEnd type="triangle" w="med" h="med"/>
+          </a:ln>
+        </p:spPr>
+        <p:style>
+          <a:lnRef idx="2">
+            <a:schemeClr val="accent1"/>
+          </a:lnRef>
+          <a:fillRef idx="0">
+            <a:schemeClr val="accent1"/>
+          </a:fillRef>
+          <a:effectRef idx="1">
+            <a:schemeClr val="accent1"/>
+          </a:effectRef>
+          <a:fontRef idx="minor">
+            <a:schemeClr val="tx1"/>
+          </a:fontRef>
+        </p:style>
+      </p:cxnSp>
+      <p:sp>
+        <p:nvSpPr>
+          <p:cNvPr id="13" name="Rounded Rectangle 12"/>
+          <p:cNvSpPr/>
+          <p:nvPr/>
+        </p:nvSpPr>
+        <p:spPr>
+          <a:xfrm>
+            <a:off x="502920" y="4242816"/>
+            <a:ext cx="5760720" cy="868680"/>
+          </a:xfrm>
+          <a:prstGeom prst="roundRect">
+            <a:avLst/>
+          </a:prstGeom>
+          <a:solidFill>
+            <a:srgbClr val="F6DDDD"/>
+          </a:solidFill>
+          <a:ln w="12700">
+            <a:solidFill>
+              <a:srgbClr val="C1121F"/>
+            </a:solidFill>
+          </a:ln>
+          <a:effectLst/>
+        </p:spPr>
+        <p:style>
+          <a:lnRef idx="1">
+            <a:schemeClr val="accent1"/>
+          </a:lnRef>
+          <a:fillRef idx="3">
+            <a:schemeClr val="accent1"/>
+          </a:fillRef>
+          <a:effectRef idx="2">
+            <a:schemeClr val="accent1"/>
+          </a:effectRef>
+          <a:fontRef idx="minor">
+            <a:schemeClr val="lt1"/>
+          </a:fontRef>
+        </p:style>
+        <p:txBody>
+          <a:bodyPr rtlCol="0" anchor="ctr" wrap="square" lIns="76200" rIns="76200" tIns="38100" bIns="38100"/>
+          <a:lstStyle/>
+          <a:p>
+            <a:pPr algn="l">
+              <a:lnSpc>
+                <a:spcPct val="118000"/>
+              </a:lnSpc>
+              <a:spcBef>
+                <a:spcPts val="0"/>
+              </a:spcBef>
+              <a:spcAft>
+                <a:spcPts val="200"/>
+              </a:spcAft>
+            </a:pPr>
+            <a:r>
+              <a:rPr sz="1150" b="1" i="0">
+                <a:solidFill>
+                  <a:srgbClr val="C1121F"/>
+                </a:solidFill>
+                <a:latin typeface="Noto Sans CJK KR"/>
+              </a:rPr>
+              <a:t>④ CMS 사슬 · 120µs  (RMW 40µs 지배)</a:t>
+            </a:r>
+          </a:p>
+          <a:p>
+            <a:pPr algn="l">
+              <a:lnSpc>
+                <a:spcPct val="118000"/>
+              </a:lnSpc>
+              <a:spcBef>
+                <a:spcPts val="0"/>
+              </a:spcBef>
+              <a:spcAft>
+                <a:spcPts val="300"/>
+              </a:spcAft>
+            </a:pPr>
+            <a:r>
+              <a:rPr sz="1000" b="0" i="0">
+                <a:solidFill>
+                  <a:srgbClr val="22252B"/>
+                </a:solidFill>
+                <a:latin typeface="Noto Sans CJK KR"/>
+              </a:rPr>
+              <a:t>L1→L2→L3 fwd (20×3=60µs) + L1 update(compute 20 + DGD-apply RMW 40µs)</a:t>
+            </a:r>
+          </a:p>
+        </p:txBody>
+      </p:sp>
+      <p:sp>
+        <p:nvSpPr>
+          <p:cNvPr id="14" name="Rounded Rectangle 13"/>
+          <p:cNvSpPr/>
+          <p:nvPr/>
+        </p:nvSpPr>
+        <p:spPr>
+          <a:xfrm>
+            <a:off x="6537960" y="1325880"/>
+            <a:ext cx="5166360" cy="3794760"/>
+          </a:xfrm>
+          <a:prstGeom prst="roundRect">
+            <a:avLst/>
+          </a:prstGeom>
+          <a:solidFill>
+            <a:srgbClr val="FFFFFF"/>
+          </a:solidFill>
+          <a:ln w="12700">
             <a:solidFill>
               <a:srgbClr val="8A8F98"/>
             </a:solidFill>
@@ -50684,47 +51743,42 @@
           </a:fontRef>
         </p:style>
         <p:txBody>
-          <a:bodyPr rtlCol="0" anchor="ctr"/>
-          <a:lstStyle/>
-          <a:p>
-            <a:pPr algn="ctr"/>
-          </a:p>
-        </p:txBody>
-      </p:sp>
-      <p:pic>
-        <p:nvPicPr>
-          <p:cNvPr id="9" name="Picture 8" descr="fig-sram-scaling.png"/>
-          <p:cNvPicPr>
-            <a:picLocks noChangeAspect="1"/>
-          </p:cNvPicPr>
-          <p:nvPr/>
-        </p:nvPicPr>
-        <p:blipFill>
-          <a:blip r:embed="rId3"/>
-          <a:stretch>
-            <a:fillRect/>
-          </a:stretch>
-        </p:blipFill>
-        <p:spPr>
-          <a:xfrm>
-            <a:off x="6330260" y="1371600"/>
-            <a:ext cx="5261718" cy="2907792"/>
-          </a:xfrm>
-          <a:prstGeom prst="rect">
-            <a:avLst/>
-          </a:prstGeom>
-        </p:spPr>
-      </p:pic>
-      <p:sp>
-        <p:nvSpPr>
-          <p:cNvPr id="10" name="TextBox 9"/>
+          <a:bodyPr rtlCol="0" anchor="ctr" wrap="square" lIns="76200" rIns="76200" tIns="38100" bIns="38100"/>
+          <a:lstStyle/>
+          <a:p>
+            <a:pPr algn="ctr">
+              <a:lnSpc>
+                <a:spcPct val="118000"/>
+              </a:lnSpc>
+              <a:spcBef>
+                <a:spcPts val="0"/>
+              </a:spcBef>
+              <a:spcAft>
+                <a:spcPts val="300"/>
+              </a:spcAft>
+            </a:pPr>
+            <a:r>
+              <a:rPr sz="1100" b="0" i="0">
+                <a:solidFill>
+                  <a:srgbClr val="22252B"/>
+                </a:solidFill>
+                <a:latin typeface="Noto Sans CJK KR"/>
+              </a:rPr>
+              <a:t/>
+            </a:r>
+          </a:p>
+        </p:txBody>
+      </p:sp>
+      <p:sp>
+        <p:nvSpPr>
+          <p:cNvPr id="15" name="TextBox 14"/>
           <p:cNvSpPr txBox="1"/>
           <p:nvPr/>
         </p:nvSpPr>
         <p:spPr>
           <a:xfrm>
-            <a:off x="6263640" y="4297679"/>
-            <a:ext cx="5394960" cy="365760"/>
+            <a:off x="6720840" y="1417320"/>
+            <a:ext cx="4572000" cy="274320"/>
           </a:xfrm>
           <a:prstGeom prst="rect">
             <a:avLst/>
@@ -50737,7 +51791,7 @@
           </a:bodyPr>
           <a:lstStyle/>
           <a:p>
-            <a:pPr algn="ctr">
+            <a:pPr algn="l">
               <a:lnSpc>
                 <a:spcPct val="120000"/>
               </a:lnSpc>
@@ -50749,37 +51803,667 @@
               </a:spcAft>
             </a:pPr>
             <a:r>
-              <a:rPr sz="1050" b="0" i="0">
-                <a:solidFill>
-                  <a:srgbClr val="22252B"/>
-                </a:solidFill>
-                <a:latin typeface="Noto Sans CJK KR"/>
-              </a:rPr>
-              <a:t>on-chip SRAM 1x→10x: state가 상주하는 순간(5x~) HBM 대신 SRAM</a:t>
-            </a:r>
-          </a:p>
-        </p:txBody>
-      </p:sp>
-      <p:sp>
-        <p:nvSpPr>
-          <p:cNvPr id="11" name="Rounded Rectangle 10"/>
+              <a:rPr sz="1150" b="1" i="0">
+                <a:solidFill>
+                  <a:srgbClr val="22252B"/>
+                </a:solidFill>
+                <a:latin typeface="Noto Sans CJK KR"/>
+              </a:rPr>
+              <a:t>op-time 분해 (합계 202.8µs, ideal 하한)</a:t>
+            </a:r>
+          </a:p>
+        </p:txBody>
+      </p:sp>
+      <p:sp>
+        <p:nvSpPr>
+          <p:cNvPr id="16" name="TextBox 15"/>
+          <p:cNvSpPr txBox="1"/>
+          <p:nvPr/>
+        </p:nvSpPr>
+        <p:spPr>
+          <a:xfrm>
+            <a:off x="6720840" y="1874519"/>
+            <a:ext cx="4023360" cy="292608"/>
+          </a:xfrm>
+          <a:prstGeom prst="rect">
+            <a:avLst/>
+          </a:prstGeom>
+          <a:noFill/>
+        </p:spPr>
+        <p:txBody>
+          <a:bodyPr wrap="square" anchor="t" lIns="38100" rIns="38100" tIns="25400" bIns="25400">
+            <a:spAutoFit/>
+          </a:bodyPr>
+          <a:lstStyle/>
+          <a:p>
+            <a:pPr algn="l">
+              <a:lnSpc>
+                <a:spcPct val="120000"/>
+              </a:lnSpc>
+              <a:spcBef>
+                <a:spcPts val="0"/>
+              </a:spcBef>
+              <a:spcAft>
+                <a:spcPts val="0"/>
+              </a:spcAft>
+            </a:pPr>
+            <a:r>
+              <a:rPr sz="980" b="0" i="0">
+                <a:solidFill>
+                  <a:srgbClr val="22252B"/>
+                </a:solidFill>
+                <a:latin typeface="Noto Sans CJK KR"/>
+              </a:rPr>
+              <a:t>① 투영 GEMM (q·k·v·η·α)</a:t>
+            </a:r>
+          </a:p>
+        </p:txBody>
+      </p:sp>
+      <p:sp>
+        <p:nvSpPr>
+          <p:cNvPr id="17" name="TextBox 16"/>
+          <p:cNvSpPr txBox="1"/>
+          <p:nvPr/>
+        </p:nvSpPr>
+        <p:spPr>
+          <a:xfrm>
+            <a:off x="10744200" y="1874519"/>
+            <a:ext cx="868680" cy="292608"/>
+          </a:xfrm>
+          <a:prstGeom prst="rect">
+            <a:avLst/>
+          </a:prstGeom>
+          <a:noFill/>
+        </p:spPr>
+        <p:txBody>
+          <a:bodyPr wrap="square" anchor="t" lIns="38100" rIns="38100" tIns="25400" bIns="25400">
+            <a:spAutoFit/>
+          </a:bodyPr>
+          <a:lstStyle/>
+          <a:p>
+            <a:pPr algn="r">
+              <a:lnSpc>
+                <a:spcPct val="120000"/>
+              </a:lnSpc>
+              <a:spcBef>
+                <a:spcPts val="0"/>
+              </a:spcBef>
+              <a:spcAft>
+                <a:spcPts val="0"/>
+              </a:spcAft>
+            </a:pPr>
+            <a:r>
+              <a:rPr sz="980" b="0" i="0">
+                <a:solidFill>
+                  <a:srgbClr val="22252B"/>
+                </a:solidFill>
+                <a:latin typeface="Noto Sans CJK KR"/>
+              </a:rPr>
+              <a:t>17.5µs</a:t>
+            </a:r>
+          </a:p>
+        </p:txBody>
+      </p:sp>
+      <p:sp>
+        <p:nvSpPr>
+          <p:cNvPr id="18" name="TextBox 17"/>
+          <p:cNvSpPr txBox="1"/>
+          <p:nvPr/>
+        </p:nvSpPr>
+        <p:spPr>
+          <a:xfrm>
+            <a:off x="6720840" y="2240279"/>
+            <a:ext cx="4023360" cy="292608"/>
+          </a:xfrm>
+          <a:prstGeom prst="rect">
+            <a:avLst/>
+          </a:prstGeom>
+          <a:noFill/>
+        </p:spPr>
+        <p:txBody>
+          <a:bodyPr wrap="square" anchor="t" lIns="38100" rIns="38100" tIns="25400" bIns="25400">
+            <a:spAutoFit/>
+          </a:bodyPr>
+          <a:lstStyle/>
+          <a:p>
+            <a:pPr algn="l">
+              <a:lnSpc>
+                <a:spcPct val="120000"/>
+              </a:lnSpc>
+              <a:spcBef>
+                <a:spcPts val="0"/>
+              </a:spcBef>
+              <a:spcAft>
+                <a:spcPts val="0"/>
+              </a:spcAft>
+            </a:pPr>
+            <a:r>
+              <a:rPr sz="980" b="0" i="0">
+                <a:solidFill>
+                  <a:srgbClr val="22252B"/>
+                </a:solidFill>
+                <a:latin typeface="Noto Sans CJK KR"/>
+              </a:rPr>
+              <a:t>② read o=M_mem(q) [pre-update]</a:t>
+            </a:r>
+          </a:p>
+        </p:txBody>
+      </p:sp>
+      <p:sp>
+        <p:nvSpPr>
+          <p:cNvPr id="19" name="TextBox 18"/>
+          <p:cNvSpPr txBox="1"/>
+          <p:nvPr/>
+        </p:nvSpPr>
+        <p:spPr>
+          <a:xfrm>
+            <a:off x="10744200" y="2240279"/>
+            <a:ext cx="868680" cy="292608"/>
+          </a:xfrm>
+          <a:prstGeom prst="rect">
+            <a:avLst/>
+          </a:prstGeom>
+          <a:noFill/>
+        </p:spPr>
+        <p:txBody>
+          <a:bodyPr wrap="square" anchor="t" lIns="38100" rIns="38100" tIns="25400" bIns="25400">
+            <a:spAutoFit/>
+          </a:bodyPr>
+          <a:lstStyle/>
+          <a:p>
+            <a:pPr algn="r">
+              <a:lnSpc>
+                <a:spcPct val="120000"/>
+              </a:lnSpc>
+              <a:spcBef>
+                <a:spcPts val="0"/>
+              </a:spcBef>
+              <a:spcAft>
+                <a:spcPts val="0"/>
+              </a:spcAft>
+            </a:pPr>
+            <a:r>
+              <a:rPr sz="980" b="0" i="0">
+                <a:solidFill>
+                  <a:srgbClr val="22252B"/>
+                </a:solidFill>
+                <a:latin typeface="Noto Sans CJK KR"/>
+              </a:rPr>
+              <a:t>5.0µs</a:t>
+            </a:r>
+          </a:p>
+        </p:txBody>
+      </p:sp>
+      <p:sp>
+        <p:nvSpPr>
+          <p:cNvPr id="20" name="TextBox 19"/>
+          <p:cNvSpPr txBox="1"/>
+          <p:nvPr/>
+        </p:nvSpPr>
+        <p:spPr>
+          <a:xfrm>
+            <a:off x="6720840" y="2606039"/>
+            <a:ext cx="4023360" cy="292608"/>
+          </a:xfrm>
+          <a:prstGeom prst="rect">
+            <a:avLst/>
+          </a:prstGeom>
+          <a:noFill/>
+        </p:spPr>
+        <p:txBody>
+          <a:bodyPr wrap="square" anchor="t" lIns="38100" rIns="38100" tIns="25400" bIns="25400">
+            <a:spAutoFit/>
+          </a:bodyPr>
+          <a:lstStyle/>
+          <a:p>
+            <a:pPr algn="l">
+              <a:lnSpc>
+                <a:spcPct val="120000"/>
+              </a:lnSpc>
+              <a:spcBef>
+                <a:spcPts val="0"/>
+              </a:spcBef>
+              <a:spcAft>
+                <a:spcPts val="0"/>
+              </a:spcAft>
+            </a:pPr>
+            <a:r>
+              <a:rPr sz="980" b="0" i="0">
+                <a:solidFill>
+                  <a:srgbClr val="22252B"/>
+                </a:solidFill>
+                <a:latin typeface="Noto Sans CJK KR"/>
+              </a:rPr>
+              <a:t>③ update-compute (5 memory, GEMM)</a:t>
+            </a:r>
+          </a:p>
+        </p:txBody>
+      </p:sp>
+      <p:sp>
+        <p:nvSpPr>
+          <p:cNvPr id="21" name="TextBox 20"/>
+          <p:cNvSpPr txBox="1"/>
+          <p:nvPr/>
+        </p:nvSpPr>
+        <p:spPr>
+          <a:xfrm>
+            <a:off x="10744200" y="2606039"/>
+            <a:ext cx="868680" cy="292608"/>
+          </a:xfrm>
+          <a:prstGeom prst="rect">
+            <a:avLst/>
+          </a:prstGeom>
+          <a:noFill/>
+        </p:spPr>
+        <p:txBody>
+          <a:bodyPr wrap="square" anchor="t" lIns="38100" rIns="38100" tIns="25400" bIns="25400">
+            <a:spAutoFit/>
+          </a:bodyPr>
+          <a:lstStyle/>
+          <a:p>
+            <a:pPr algn="r">
+              <a:lnSpc>
+                <a:spcPct val="120000"/>
+              </a:lnSpc>
+              <a:spcBef>
+                <a:spcPts val="0"/>
+              </a:spcBef>
+              <a:spcAft>
+                <a:spcPts val="0"/>
+              </a:spcAft>
+            </a:pPr>
+            <a:r>
+              <a:rPr sz="980" b="0" i="0">
+                <a:solidFill>
+                  <a:srgbClr val="22252B"/>
+                </a:solidFill>
+                <a:latin typeface="Noto Sans CJK KR"/>
+              </a:rPr>
+              <a:t>20.0µs</a:t>
+            </a:r>
+          </a:p>
+        </p:txBody>
+      </p:sp>
+      <p:sp>
+        <p:nvSpPr>
+          <p:cNvPr id="22" name="TextBox 21"/>
+          <p:cNvSpPr txBox="1"/>
+          <p:nvPr/>
+        </p:nvSpPr>
+        <p:spPr>
+          <a:xfrm>
+            <a:off x="6720840" y="2971799"/>
+            <a:ext cx="4023360" cy="292608"/>
+          </a:xfrm>
+          <a:prstGeom prst="rect">
+            <a:avLst/>
+          </a:prstGeom>
+          <a:noFill/>
+        </p:spPr>
+        <p:txBody>
+          <a:bodyPr wrap="square" anchor="t" lIns="38100" rIns="38100" tIns="25400" bIns="25400">
+            <a:spAutoFit/>
+          </a:bodyPr>
+          <a:lstStyle/>
+          <a:p>
+            <a:pPr algn="l">
+              <a:lnSpc>
+                <a:spcPct val="120000"/>
+              </a:lnSpc>
+              <a:spcBef>
+                <a:spcPts val="0"/>
+              </a:spcBef>
+              <a:spcAft>
+                <a:spcPts val="0"/>
+              </a:spcAft>
+            </a:pPr>
+            <a:r>
+              <a:rPr sz="980" b="1" i="0">
+                <a:solidFill>
+                  <a:srgbClr val="C1121F"/>
+                </a:solidFill>
+                <a:latin typeface="Noto Sans CJK KR"/>
+              </a:rPr>
+              <a:t>③ DGD-apply (5 memory, state RMW)</a:t>
+            </a:r>
+          </a:p>
+        </p:txBody>
+      </p:sp>
+      <p:sp>
+        <p:nvSpPr>
+          <p:cNvPr id="23" name="TextBox 22"/>
+          <p:cNvSpPr txBox="1"/>
+          <p:nvPr/>
+        </p:nvSpPr>
+        <p:spPr>
+          <a:xfrm>
+            <a:off x="10744200" y="2971799"/>
+            <a:ext cx="868680" cy="292608"/>
+          </a:xfrm>
+          <a:prstGeom prst="rect">
+            <a:avLst/>
+          </a:prstGeom>
+          <a:noFill/>
+        </p:spPr>
+        <p:txBody>
+          <a:bodyPr wrap="square" anchor="t" lIns="38100" rIns="38100" tIns="25400" bIns="25400">
+            <a:spAutoFit/>
+          </a:bodyPr>
+          <a:lstStyle/>
+          <a:p>
+            <a:pPr algn="r">
+              <a:lnSpc>
+                <a:spcPct val="120000"/>
+              </a:lnSpc>
+              <a:spcBef>
+                <a:spcPts val="0"/>
+              </a:spcBef>
+              <a:spcAft>
+                <a:spcPts val="0"/>
+              </a:spcAft>
+            </a:pPr>
+            <a:r>
+              <a:rPr sz="980" b="1" i="0">
+                <a:solidFill>
+                  <a:srgbClr val="C1121F"/>
+                </a:solidFill>
+                <a:latin typeface="Noto Sans CJK KR"/>
+              </a:rPr>
+              <a:t>40.0µs</a:t>
+            </a:r>
+          </a:p>
+        </p:txBody>
+      </p:sp>
+      <p:sp>
+        <p:nvSpPr>
+          <p:cNvPr id="24" name="TextBox 23"/>
+          <p:cNvSpPr txBox="1"/>
+          <p:nvPr/>
+        </p:nvSpPr>
+        <p:spPr>
+          <a:xfrm>
+            <a:off x="6720840" y="3337559"/>
+            <a:ext cx="4023360" cy="292608"/>
+          </a:xfrm>
+          <a:prstGeom prst="rect">
+            <a:avLst/>
+          </a:prstGeom>
+          <a:noFill/>
+        </p:spPr>
+        <p:txBody>
+          <a:bodyPr wrap="square" anchor="t" lIns="38100" rIns="38100" tIns="25400" bIns="25400">
+            <a:spAutoFit/>
+          </a:bodyPr>
+          <a:lstStyle/>
+          <a:p>
+            <a:pPr algn="l">
+              <a:lnSpc>
+                <a:spcPct val="120000"/>
+              </a:lnSpc>
+              <a:spcBef>
+                <a:spcPts val="0"/>
+              </a:spcBef>
+              <a:spcAft>
+                <a:spcPts val="0"/>
+              </a:spcAft>
+            </a:pPr>
+            <a:r>
+              <a:rPr sz="980" b="0" i="0">
+                <a:solidFill>
+                  <a:srgbClr val="22252B"/>
+                </a:solidFill>
+                <a:latin typeface="Noto Sans CJK KR"/>
+              </a:rPr>
+              <a:t>④ CMS L1/L2/L3 fwd (d→4d→d)</a:t>
+            </a:r>
+          </a:p>
+        </p:txBody>
+      </p:sp>
+      <p:sp>
+        <p:nvSpPr>
+          <p:cNvPr id="25" name="TextBox 24"/>
+          <p:cNvSpPr txBox="1"/>
+          <p:nvPr/>
+        </p:nvSpPr>
+        <p:spPr>
+          <a:xfrm>
+            <a:off x="10744200" y="3337559"/>
+            <a:ext cx="868680" cy="292608"/>
+          </a:xfrm>
+          <a:prstGeom prst="rect">
+            <a:avLst/>
+          </a:prstGeom>
+          <a:noFill/>
+        </p:spPr>
+        <p:txBody>
+          <a:bodyPr wrap="square" anchor="t" lIns="38100" rIns="38100" tIns="25400" bIns="25400">
+            <a:spAutoFit/>
+          </a:bodyPr>
+          <a:lstStyle/>
+          <a:p>
+            <a:pPr algn="r">
+              <a:lnSpc>
+                <a:spcPct val="120000"/>
+              </a:lnSpc>
+              <a:spcBef>
+                <a:spcPts val="0"/>
+              </a:spcBef>
+              <a:spcAft>
+                <a:spcPts val="0"/>
+              </a:spcAft>
+            </a:pPr>
+            <a:r>
+              <a:rPr sz="980" b="0" i="0">
+                <a:solidFill>
+                  <a:srgbClr val="22252B"/>
+                </a:solidFill>
+                <a:latin typeface="Noto Sans CJK KR"/>
+              </a:rPr>
+              <a:t>60.0µs</a:t>
+            </a:r>
+          </a:p>
+        </p:txBody>
+      </p:sp>
+      <p:sp>
+        <p:nvSpPr>
+          <p:cNvPr id="26" name="TextBox 25"/>
+          <p:cNvSpPr txBox="1"/>
+          <p:nvPr/>
+        </p:nvSpPr>
+        <p:spPr>
+          <a:xfrm>
+            <a:off x="6720840" y="3703320"/>
+            <a:ext cx="4023360" cy="292608"/>
+          </a:xfrm>
+          <a:prstGeom prst="rect">
+            <a:avLst/>
+          </a:prstGeom>
+          <a:noFill/>
+        </p:spPr>
+        <p:txBody>
+          <a:bodyPr wrap="square" anchor="t" lIns="38100" rIns="38100" tIns="25400" bIns="25400">
+            <a:spAutoFit/>
+          </a:bodyPr>
+          <a:lstStyle/>
+          <a:p>
+            <a:pPr algn="l">
+              <a:lnSpc>
+                <a:spcPct val="120000"/>
+              </a:lnSpc>
+              <a:spcBef>
+                <a:spcPts val="0"/>
+              </a:spcBef>
+              <a:spcAft>
+                <a:spcPts val="0"/>
+              </a:spcAft>
+            </a:pPr>
+            <a:r>
+              <a:rPr sz="980" b="0" i="0">
+                <a:solidFill>
+                  <a:srgbClr val="22252B"/>
+                </a:solidFill>
+                <a:latin typeface="Noto Sans CJK KR"/>
+              </a:rPr>
+              <a:t>④ CMS L1 update-compute (GEMM)</a:t>
+            </a:r>
+          </a:p>
+        </p:txBody>
+      </p:sp>
+      <p:sp>
+        <p:nvSpPr>
+          <p:cNvPr id="27" name="TextBox 26"/>
+          <p:cNvSpPr txBox="1"/>
+          <p:nvPr/>
+        </p:nvSpPr>
+        <p:spPr>
+          <a:xfrm>
+            <a:off x="10744200" y="3703320"/>
+            <a:ext cx="868680" cy="292608"/>
+          </a:xfrm>
+          <a:prstGeom prst="rect">
+            <a:avLst/>
+          </a:prstGeom>
+          <a:noFill/>
+        </p:spPr>
+        <p:txBody>
+          <a:bodyPr wrap="square" anchor="t" lIns="38100" rIns="38100" tIns="25400" bIns="25400">
+            <a:spAutoFit/>
+          </a:bodyPr>
+          <a:lstStyle/>
+          <a:p>
+            <a:pPr algn="r">
+              <a:lnSpc>
+                <a:spcPct val="120000"/>
+              </a:lnSpc>
+              <a:spcBef>
+                <a:spcPts val="0"/>
+              </a:spcBef>
+              <a:spcAft>
+                <a:spcPts val="0"/>
+              </a:spcAft>
+            </a:pPr>
+            <a:r>
+              <a:rPr sz="980" b="0" i="0">
+                <a:solidFill>
+                  <a:srgbClr val="22252B"/>
+                </a:solidFill>
+                <a:latin typeface="Noto Sans CJK KR"/>
+              </a:rPr>
+              <a:t>20.0µs</a:t>
+            </a:r>
+          </a:p>
+        </p:txBody>
+      </p:sp>
+      <p:sp>
+        <p:nvSpPr>
+          <p:cNvPr id="28" name="TextBox 27"/>
+          <p:cNvSpPr txBox="1"/>
+          <p:nvPr/>
+        </p:nvSpPr>
+        <p:spPr>
+          <a:xfrm>
+            <a:off x="6720840" y="4069080"/>
+            <a:ext cx="4023360" cy="292608"/>
+          </a:xfrm>
+          <a:prstGeom prst="rect">
+            <a:avLst/>
+          </a:prstGeom>
+          <a:noFill/>
+        </p:spPr>
+        <p:txBody>
+          <a:bodyPr wrap="square" anchor="t" lIns="38100" rIns="38100" tIns="25400" bIns="25400">
+            <a:spAutoFit/>
+          </a:bodyPr>
+          <a:lstStyle/>
+          <a:p>
+            <a:pPr algn="l">
+              <a:lnSpc>
+                <a:spcPct val="120000"/>
+              </a:lnSpc>
+              <a:spcBef>
+                <a:spcPts val="0"/>
+              </a:spcBef>
+              <a:spcAft>
+                <a:spcPts val="0"/>
+              </a:spcAft>
+            </a:pPr>
+            <a:r>
+              <a:rPr sz="980" b="1" i="0">
+                <a:solidFill>
+                  <a:srgbClr val="C1121F"/>
+                </a:solidFill>
+                <a:latin typeface="Noto Sans CJK KR"/>
+              </a:rPr>
+              <a:t>④ CMS L1 DGD-apply (state RMW)</a:t>
+            </a:r>
+          </a:p>
+        </p:txBody>
+      </p:sp>
+      <p:sp>
+        <p:nvSpPr>
+          <p:cNvPr id="29" name="TextBox 28"/>
+          <p:cNvSpPr txBox="1"/>
+          <p:nvPr/>
+        </p:nvSpPr>
+        <p:spPr>
+          <a:xfrm>
+            <a:off x="10744200" y="4069080"/>
+            <a:ext cx="868680" cy="292608"/>
+          </a:xfrm>
+          <a:prstGeom prst="rect">
+            <a:avLst/>
+          </a:prstGeom>
+          <a:noFill/>
+        </p:spPr>
+        <p:txBody>
+          <a:bodyPr wrap="square" anchor="t" lIns="38100" rIns="38100" tIns="25400" bIns="25400">
+            <a:spAutoFit/>
+          </a:bodyPr>
+          <a:lstStyle/>
+          <a:p>
+            <a:pPr algn="r">
+              <a:lnSpc>
+                <a:spcPct val="120000"/>
+              </a:lnSpc>
+              <a:spcBef>
+                <a:spcPts val="0"/>
+              </a:spcBef>
+              <a:spcAft>
+                <a:spcPts val="0"/>
+              </a:spcAft>
+            </a:pPr>
+            <a:r>
+              <a:rPr sz="980" b="1" i="0">
+                <a:solidFill>
+                  <a:srgbClr val="C1121F"/>
+                </a:solidFill>
+                <a:latin typeface="Noto Sans CJK KR"/>
+              </a:rPr>
+              <a:t>40.0µs</a:t>
+            </a:r>
+          </a:p>
+        </p:txBody>
+      </p:sp>
+      <p:sp>
+        <p:nvSpPr>
+          <p:cNvPr id="30" name="Rounded Rectangle 29"/>
           <p:cNvSpPr/>
           <p:nvPr/>
         </p:nvSpPr>
         <p:spPr>
           <a:xfrm>
-            <a:off x="502920" y="4800600"/>
-            <a:ext cx="11155680" cy="914400"/>
+            <a:off x="6720840" y="4590288"/>
+            <a:ext cx="4800600" cy="384048"/>
           </a:xfrm>
           <a:prstGeom prst="roundRect">
             <a:avLst/>
           </a:prstGeom>
           <a:solidFill>
-            <a:srgbClr val="F6ECC7"/>
+            <a:srgbClr val="F6DDDD"/>
           </a:solidFill>
           <a:ln w="12700">
             <a:solidFill>
-              <a:srgbClr val="C9A227"/>
+              <a:srgbClr val="C1121F"/>
             </a:solidFill>
           </a:ln>
           <a:effectLst/>
@@ -50802,6 +52486,71 @@
           <a:bodyPr rtlCol="0" anchor="ctr" wrap="square" lIns="76200" rIns="76200" tIns="38100" bIns="38100"/>
           <a:lstStyle/>
           <a:p>
+            <a:pPr algn="ctr">
+              <a:lnSpc>
+                <a:spcPct val="118000"/>
+              </a:lnSpc>
+              <a:spcBef>
+                <a:spcPts val="0"/>
+              </a:spcBef>
+              <a:spcAft>
+                <a:spcPts val="300"/>
+              </a:spcAft>
+            </a:pPr>
+            <a:r>
+              <a:rPr sz="1050" b="1" i="0">
+                <a:solidFill>
+                  <a:srgbClr val="C1121F"/>
+                </a:solidFill>
+                <a:latin typeface="Noto Sans CJK KR"/>
+              </a:rPr>
+              <a:t>memory-bound RMW 합 = 80µs (전체의 40%)</a:t>
+            </a:r>
+          </a:p>
+        </p:txBody>
+      </p:sp>
+      <p:sp>
+        <p:nvSpPr>
+          <p:cNvPr id="31" name="Rounded Rectangle 30"/>
+          <p:cNvSpPr/>
+          <p:nvPr/>
+        </p:nvSpPr>
+        <p:spPr>
+          <a:xfrm>
+            <a:off x="502920" y="5257800"/>
+            <a:ext cx="11183112" cy="566928"/>
+          </a:xfrm>
+          <a:prstGeom prst="roundRect">
+            <a:avLst/>
+          </a:prstGeom>
+          <a:solidFill>
+            <a:srgbClr val="ECEEF1"/>
+          </a:solidFill>
+          <a:ln w="12700">
+            <a:solidFill>
+              <a:srgbClr val="8A8F98"/>
+            </a:solidFill>
+          </a:ln>
+          <a:effectLst/>
+        </p:spPr>
+        <p:style>
+          <a:lnRef idx="1">
+            <a:schemeClr val="accent1"/>
+          </a:lnRef>
+          <a:fillRef idx="3">
+            <a:schemeClr val="accent1"/>
+          </a:fillRef>
+          <a:effectRef idx="2">
+            <a:schemeClr val="accent1"/>
+          </a:effectRef>
+          <a:fontRef idx="minor">
+            <a:schemeClr val="lt1"/>
+          </a:fontRef>
+        </p:style>
+        <p:txBody>
+          <a:bodyPr rtlCol="0" anchor="ctr" wrap="square" lIns="76200" rIns="76200" tIns="38100" bIns="38100"/>
+          <a:lstStyle/>
+          <a:p>
             <a:pPr algn="l">
               <a:lnSpc>
                 <a:spcPct val="118000"/>
@@ -50814,13 +52563,13 @@
               </a:spcAft>
             </a:pPr>
             <a:r>
-              <a:rPr sz="1250" b="1" i="0">
-                <a:solidFill>
-                  <a:srgbClr val="C9A227"/>
-                </a:solidFill>
-                <a:latin typeface="Noto Sans CJK KR"/>
-              </a:rPr>
-              <a:t>결론</a:t>
+              <a:rPr sz="1150" b="1" i="0">
+                <a:solidFill>
+                  <a:srgbClr val="22252B"/>
+                </a:solidFill>
+                <a:latin typeface="Noto Sans CJK KR"/>
+              </a:rPr>
+              <a:t>정리</a:t>
             </a:r>
           </a:p>
           <a:p>
@@ -50836,13 +52585,13 @@
               </a:spcAft>
             </a:pPr>
             <a:r>
-              <a:rPr sz="1200" b="0" i="0">
-                <a:solidFill>
-                  <a:srgbClr val="22252B"/>
-                </a:solidFill>
-                <a:latin typeface="Noto Sans CJK KR"/>
-              </a:rPr>
-              <a:t>zHBM(대역폭↑)이 HBM-PIM(in-bank 연산이 너무 느림)보다 유리. SRAM은 '문턱' 구조 — state(≈134MB)가 on-chip에 들어가는 5x(250MB)부터 이득(203→150µs), 10x(500MB)면 weights까지 전부 상주.</a:t>
+              <a:rPr sz="1050" b="0" i="0">
+                <a:solidFill>
+                  <a:srgbClr val="22252B"/>
+                </a:solidFill>
+                <a:latin typeface="Noto Sans CJK KR"/>
+              </a:rPr>
+              <a:t>compute(GEMM)는 텐서코어로 싸지만, state RMW(빨강) 80µs가 단일 최대 비용 덩어리 — 이게 decode를 memory-bound로 만든다.</a:t>
             </a:r>
           </a:p>
         </p:txBody>
@@ -50970,7 +52719,7 @@
                 </a:solidFill>
                 <a:latin typeface="Noto Sans CJK KR"/>
               </a:rPr>
-              <a:t>C5 · scaling 청사진</a:t>
+              <a:t>C3 · roofline &amp; 병목</a:t>
             </a:r>
           </a:p>
         </p:txBody>
@@ -51015,7 +52764,7 @@
                 </a:solidFill>
                 <a:latin typeface="Noto Sans CJK KR"/>
               </a:rPr>
-              <a:t>논문의 방향 × 모델링 결과 = 어디로 가야 하나</a:t>
+              <a:t>decode C=1은 roofline 왼쪽(memory-bound) — state를 매 토큰 HBM에서 RMW</a:t>
             </a:r>
           </a:p>
         </p:txBody>
@@ -51028,8 +52777,8 @@
         </p:nvSpPr>
         <p:spPr>
           <a:xfrm>
-            <a:off x="466344" y="1586285"/>
-            <a:ext cx="5605272" cy="2478421"/>
+            <a:off x="466344" y="2058863"/>
+            <a:ext cx="5925312" cy="1899025"/>
           </a:xfrm>
           <a:prstGeom prst="rect">
             <a:avLst/>
@@ -51066,7 +52815,7 @@
       </p:sp>
       <p:pic>
         <p:nvPicPr>
-          <p:cNvPr id="6" name="Picture 5" descr="fig8-hope-sleep-scaling.png"/>
+          <p:cNvPr id="6" name="Picture 5" descr="fig-hope-roofline.png"/>
           <p:cNvPicPr>
             <a:picLocks noChangeAspect="1"/>
           </p:cNvPicPr>
@@ -51080,8 +52829,8 @@
         </p:blipFill>
         <p:spPr>
           <a:xfrm>
-            <a:off x="502920" y="1622861"/>
-            <a:ext cx="5532120" cy="2405269"/>
+            <a:off x="502920" y="2095439"/>
+            <a:ext cx="5852160" cy="1825873"/>
           </a:xfrm>
           <a:prstGeom prst="rect">
             <a:avLst/>
@@ -51096,8 +52845,8 @@
         </p:nvSpPr>
         <p:spPr>
           <a:xfrm>
-            <a:off x="502920" y="4297679"/>
-            <a:ext cx="5532120" cy="365760"/>
+            <a:off x="502920" y="4663440"/>
+            <a:ext cx="5852160" cy="365760"/>
           </a:xfrm>
           <a:prstGeom prst="rect">
             <a:avLst/>
@@ -51128,7 +52877,7 @@
                 </a:solidFill>
                 <a:latin typeface="Noto Sans CJK KR"/>
               </a:rPr>
-              <a:t>HOPE(메모리 확장)+Sleep(파라미터 성장) 스케일링 — 상태·파라미터가 함께 자란다</a:t>
+              <a:t>(a) block AI vs chunk C — ridge 295 아래 = memory-bound  (b) op별 시간  (c) baseline vs HBM-PIM</a:t>
             </a:r>
           </a:p>
         </p:txBody>
@@ -51141,8 +52890,117 @@
         </p:nvSpPr>
         <p:spPr>
           <a:xfrm>
-            <a:off x="6172200" y="1417320"/>
-            <a:ext cx="5486400" cy="1051560"/>
+            <a:off x="6537960" y="1371600"/>
+            <a:ext cx="5166360" cy="1417320"/>
+          </a:xfrm>
+          <a:prstGeom prst="roundRect">
+            <a:avLst/>
+          </a:prstGeom>
+          <a:solidFill>
+            <a:srgbClr val="F6DDDD"/>
+          </a:solidFill>
+          <a:ln w="12700">
+            <a:solidFill>
+              <a:srgbClr val="C1121F"/>
+            </a:solidFill>
+          </a:ln>
+          <a:effectLst/>
+        </p:spPr>
+        <p:style>
+          <a:lnRef idx="1">
+            <a:schemeClr val="accent1"/>
+          </a:lnRef>
+          <a:fillRef idx="3">
+            <a:schemeClr val="accent1"/>
+          </a:fillRef>
+          <a:effectRef idx="2">
+            <a:schemeClr val="accent1"/>
+          </a:effectRef>
+          <a:fontRef idx="minor">
+            <a:schemeClr val="lt1"/>
+          </a:fontRef>
+        </p:style>
+        <p:txBody>
+          <a:bodyPr rtlCol="0" anchor="ctr" wrap="square" lIns="76200" rIns="76200" tIns="38100" bIns="38100"/>
+          <a:lstStyle/>
+          <a:p>
+            <a:pPr algn="l">
+              <a:lnSpc>
+                <a:spcPct val="118000"/>
+              </a:lnSpc>
+              <a:spcBef>
+                <a:spcPts val="0"/>
+              </a:spcBef>
+              <a:spcAft>
+                <a:spcPts val="300"/>
+              </a:spcAft>
+            </a:pPr>
+            <a:r>
+              <a:rPr sz="1250" b="1" i="0">
+                <a:solidFill>
+                  <a:srgbClr val="C1121F"/>
+                </a:solidFill>
+                <a:latin typeface="Noto Sans CJK KR"/>
+              </a:rPr>
+              <a:t>왜 memory-bound인가</a:t>
+            </a:r>
+          </a:p>
+          <a:p>
+            <a:pPr algn="l">
+              <a:lnSpc>
+                <a:spcPct val="118000"/>
+              </a:lnSpc>
+              <a:spcBef>
+                <a:spcPts val="0"/>
+              </a:spcBef>
+              <a:spcAft>
+                <a:spcPts val="200"/>
+              </a:spcAft>
+            </a:pPr>
+            <a:r>
+              <a:rPr sz="1050" b="0" i="0">
+                <a:solidFill>
+                  <a:srgbClr val="22252B"/>
+                </a:solidFill>
+                <a:latin typeface="Noto Sans CJK KR"/>
+              </a:rPr>
+              <a:t>block의 arithmetic intensity = FLOP/bytes = 1.08e9 / 6.80e8 ≈ 1.6 FLOP/byte.</a:t>
+            </a:r>
+          </a:p>
+          <a:p>
+            <a:pPr algn="l">
+              <a:lnSpc>
+                <a:spcPct val="118000"/>
+              </a:lnSpc>
+              <a:spcBef>
+                <a:spcPts val="0"/>
+              </a:spcBef>
+              <a:spcAft>
+                <a:spcPts val="200"/>
+              </a:spcAft>
+            </a:pPr>
+            <a:r>
+              <a:rPr sz="1050" b="1" i="0">
+                <a:solidFill>
+                  <a:srgbClr val="C1121F"/>
+                </a:solidFill>
+                <a:latin typeface="Noto Sans CJK KR"/>
+              </a:rPr>
+              <a:t>H100 ridge = 295 FLOP/byte보다 한참 낮다 → 대역폭이 병목(roofline 왼쪽).</a:t>
+            </a:r>
+          </a:p>
+        </p:txBody>
+      </p:sp>
+      <p:sp>
+        <p:nvSpPr>
+          <p:cNvPr id="9" name="Rounded Rectangle 8"/>
+          <p:cNvSpPr/>
+          <p:nvPr/>
+        </p:nvSpPr>
+        <p:spPr>
+          <a:xfrm>
+            <a:off x="6537960" y="2880360"/>
+            <a:ext cx="5166360" cy="1234440"/>
           </a:xfrm>
           <a:prstGeom prst="roundRect">
             <a:avLst/>
@@ -51193,9 +53051,74 @@
                 </a:solidFill>
                 <a:latin typeface="Noto Sans CJK KR"/>
               </a:rPr>
-              <a:t>① 논문 방향이 memory 압력을 키운다</a:t>
-            </a:r>
-          </a:p>
+              <a:t>병목의 정체</a:t>
+            </a:r>
+          </a:p>
+          <a:p>
+            <a:pPr algn="l">
+              <a:lnSpc>
+                <a:spcPct val="118000"/>
+              </a:lnSpc>
+              <a:spcBef>
+                <a:spcPts val="0"/>
+              </a:spcBef>
+              <a:spcAft>
+                <a:spcPts val="200"/>
+              </a:spcAft>
+            </a:pPr>
+            <a:r>
+              <a:rPr sz="1050" b="0" i="0">
+                <a:solidFill>
+                  <a:srgbClr val="22252B"/>
+                </a:solidFill>
+                <a:latin typeface="Noto Sans CJK KR"/>
+              </a:rPr>
+              <a:t>state(134MB, RMW되는 부분) + weights(277MB)를 매 토큰 HBM(3.35TB/s)에서 읽어야 한다. 이상적으로도 411MB / 3.35TB/s ≈ 123µs는 대역폭에 묶인다 → block당 ~203µs.</a:t>
+            </a:r>
+          </a:p>
+        </p:txBody>
+      </p:sp>
+      <p:sp>
+        <p:nvSpPr>
+          <p:cNvPr id="10" name="Rounded Rectangle 9"/>
+          <p:cNvSpPr/>
+          <p:nvPr/>
+        </p:nvSpPr>
+        <p:spPr>
+          <a:xfrm>
+            <a:off x="6537960" y="4206240"/>
+            <a:ext cx="5166360" cy="868680"/>
+          </a:xfrm>
+          <a:prstGeom prst="roundRect">
+            <a:avLst/>
+          </a:prstGeom>
+          <a:solidFill>
+            <a:srgbClr val="DBE7F3"/>
+          </a:solidFill>
+          <a:ln w="12700">
+            <a:solidFill>
+              <a:srgbClr val="2A6F97"/>
+            </a:solidFill>
+          </a:ln>
+          <a:effectLst/>
+        </p:spPr>
+        <p:style>
+          <a:lnRef idx="1">
+            <a:schemeClr val="accent1"/>
+          </a:lnRef>
+          <a:fillRef idx="3">
+            <a:schemeClr val="accent1"/>
+          </a:fillRef>
+          <a:effectRef idx="2">
+            <a:schemeClr val="accent1"/>
+          </a:effectRef>
+          <a:fontRef idx="minor">
+            <a:schemeClr val="lt1"/>
+          </a:fontRef>
+        </p:style>
+        <p:txBody>
+          <a:bodyPr rtlCol="0" anchor="ctr" wrap="square" lIns="76200" rIns="76200" tIns="38100" bIns="38100"/>
+          <a:lstStyle/>
           <a:p>
             <a:pPr algn="l">
               <a:lnSpc>
@@ -51209,27 +53132,49 @@
               </a:spcAft>
             </a:pPr>
             <a:r>
-              <a:rPr sz="1150" b="0" i="0">
-                <a:solidFill>
-                  <a:srgbClr val="22252B"/>
-                </a:solidFill>
-                <a:latin typeface="Noto Sans CJK KR"/>
-              </a:rPr>
-              <a:t>HOPE(self-mod+CMS)로 state↑, Sleep(expert 성장)로 파라미터↑ → 디코드 memory-bound가 구조적으로 심해진다.</a:t>
-            </a:r>
-          </a:p>
-        </p:txBody>
-      </p:sp>
-      <p:sp>
-        <p:nvSpPr>
-          <p:cNvPr id="9" name="Rounded Rectangle 8"/>
+              <a:rPr sz="1250" b="1" i="0">
+                <a:solidFill>
+                  <a:srgbClr val="2A6F97"/>
+                </a:solidFill>
+                <a:latin typeface="Noto Sans CJK KR"/>
+              </a:rPr>
+              <a:t>그래서 다음(C4)</a:t>
+            </a:r>
+          </a:p>
+          <a:p>
+            <a:pPr algn="l">
+              <a:lnSpc>
+                <a:spcPct val="118000"/>
+              </a:lnSpc>
+              <a:spcBef>
+                <a:spcPts val="0"/>
+              </a:spcBef>
+              <a:spcAft>
+                <a:spcPts val="200"/>
+              </a:spcAft>
+            </a:pPr>
+            <a:r>
+              <a:rPr sz="1050" b="0" i="0">
+                <a:solidFill>
+                  <a:srgbClr val="22252B"/>
+                </a:solidFill>
+                <a:latin typeface="Noto Sans CJK KR"/>
+              </a:rPr>
+              <a:t>compute를 키워도 소용없다. 답은 '대역폭↑'(zHBM) 또는 'state를 on-chip에 상주'(SRAM). PIM은 in-bank 연산이 이 RMW엔 너무 느리다.</a:t>
+            </a:r>
+          </a:p>
+        </p:txBody>
+      </p:sp>
+      <p:sp>
+        <p:nvSpPr>
+          <p:cNvPr id="11" name="Rounded Rectangle 10"/>
           <p:cNvSpPr/>
           <p:nvPr/>
         </p:nvSpPr>
         <p:spPr>
           <a:xfrm>
-            <a:off x="6172200" y="2532888"/>
-            <a:ext cx="5486400" cy="1051560"/>
+            <a:off x="502920" y="5212080"/>
+            <a:ext cx="5852160" cy="594360"/>
           </a:xfrm>
           <a:prstGeom prst="roundRect">
             <a:avLst/>
@@ -51270,53 +53215,452 @@
                 <a:spcPts val="0"/>
               </a:spcBef>
               <a:spcAft>
+                <a:spcPts val="100"/>
+              </a:spcAft>
+            </a:pPr>
+            <a:r>
+              <a:rPr sz="1050" b="1" i="0">
+                <a:solidFill>
+                  <a:srgbClr val="C9A227"/>
+                </a:solidFill>
+                <a:latin typeface="Noto Sans CJK KR"/>
+              </a:rPr>
+              <a:t>H100 트윈 spec</a:t>
+            </a:r>
+          </a:p>
+          <a:p>
+            <a:pPr algn="l">
+              <a:lnSpc>
+                <a:spcPct val="118000"/>
+              </a:lnSpc>
+              <a:spcBef>
+                <a:spcPts val="0"/>
+              </a:spcBef>
+              <a:spcAft>
                 <a:spcPts val="300"/>
               </a:spcAft>
             </a:pPr>
             <a:r>
-              <a:rPr sz="1250" b="1" i="0">
+              <a:rPr sz="1000" b="0" i="0">
+                <a:solidFill>
+                  <a:srgbClr val="22252B"/>
+                </a:solidFill>
+                <a:latin typeface="Noto Sans CJK KR"/>
+              </a:rPr>
+              <a:t>HBM3 3.35 TB/s · peak 0.99 PF · ridge 295 FLOP/B · SRAM 10 TB/s · L2 50 MB</a:t>
+            </a:r>
+          </a:p>
+        </p:txBody>
+      </p:sp>
+    </p:spTree>
+  </p:cSld>
+  <p:clrMapOvr>
+    <a:masterClrMapping/>
+  </p:clrMapOvr>
+</p:sld>
+</file>
+
+<file path=ppt/slides/slide74.xml><?xml version="1.0" encoding="utf-8"?>
+<p:sld xmlns:a="http://schemas.openxmlformats.org/drawingml/2006/main" xmlns:p="http://schemas.openxmlformats.org/presentationml/2006/main" xmlns:r="http://schemas.openxmlformats.org/officeDocument/2006/relationships">
+  <p:cSld>
+    <p:spTree>
+      <p:nvGrpSpPr>
+        <p:cNvPr id="1" name=""/>
+        <p:cNvGrpSpPr/>
+        <p:nvPr/>
+      </p:nvGrpSpPr>
+      <p:grpSpPr/>
+      <p:sp>
+        <p:nvSpPr>
+          <p:cNvPr id="2" name="Rectangle 1"/>
+          <p:cNvSpPr/>
+          <p:nvPr/>
+        </p:nvSpPr>
+        <p:spPr>
+          <a:xfrm>
+            <a:off x="0" y="0"/>
+            <a:ext cx="12191695" cy="54864"/>
+          </a:xfrm>
+          <a:prstGeom prst="rect">
+            <a:avLst/>
+          </a:prstGeom>
+          <a:solidFill>
+            <a:srgbClr val="C9A227"/>
+          </a:solidFill>
+          <a:ln w="12700">
+            <a:solidFill>
+              <a:srgbClr val="C9A227"/>
+            </a:solidFill>
+          </a:ln>
+          <a:effectLst/>
+        </p:spPr>
+        <p:style>
+          <a:lnRef idx="1">
+            <a:schemeClr val="accent1"/>
+          </a:lnRef>
+          <a:fillRef idx="3">
+            <a:schemeClr val="accent1"/>
+          </a:fillRef>
+          <a:effectRef idx="2">
+            <a:schemeClr val="accent1"/>
+          </a:effectRef>
+          <a:fontRef idx="minor">
+            <a:schemeClr val="lt1"/>
+          </a:fontRef>
+        </p:style>
+        <p:txBody>
+          <a:bodyPr rtlCol="0" anchor="ctr" wrap="square" lIns="76200" rIns="76200" tIns="38100" bIns="38100"/>
+          <a:lstStyle/>
+          <a:p>
+            <a:pPr algn="ctr">
+              <a:lnSpc>
+                <a:spcPct val="118000"/>
+              </a:lnSpc>
+              <a:spcBef>
+                <a:spcPts val="0"/>
+              </a:spcBef>
+              <a:spcAft>
+                <a:spcPts val="300"/>
+              </a:spcAft>
+            </a:pPr>
+            <a:r>
+              <a:rPr sz="1100" b="0" i="0">
+                <a:solidFill>
+                  <a:srgbClr val="22252B"/>
+                </a:solidFill>
+                <a:latin typeface="Noto Sans CJK KR"/>
+              </a:rPr>
+              <a:t/>
+            </a:r>
+          </a:p>
+        </p:txBody>
+      </p:sp>
+      <p:sp>
+        <p:nvSpPr>
+          <p:cNvPr id="3" name="TextBox 2"/>
+          <p:cNvSpPr txBox="1"/>
+          <p:nvPr/>
+        </p:nvSpPr>
+        <p:spPr>
+          <a:xfrm>
+            <a:off x="502920" y="146304"/>
+            <a:ext cx="11185855" cy="320040"/>
+          </a:xfrm>
+          <a:prstGeom prst="rect">
+            <a:avLst/>
+          </a:prstGeom>
+          <a:noFill/>
+        </p:spPr>
+        <p:txBody>
+          <a:bodyPr wrap="square" anchor="t" lIns="38100" rIns="38100" tIns="25400" bIns="25400">
+            <a:spAutoFit/>
+          </a:bodyPr>
+          <a:lstStyle/>
+          <a:p>
+            <a:pPr algn="l">
+              <a:lnSpc>
+                <a:spcPct val="120000"/>
+              </a:lnSpc>
+              <a:spcBef>
+                <a:spcPts val="0"/>
+              </a:spcBef>
+              <a:spcAft>
+                <a:spcPts val="0"/>
+              </a:spcAft>
+            </a:pPr>
+            <a:r>
+              <a:rPr sz="1350" b="1" i="0">
                 <a:solidFill>
                   <a:srgbClr val="C9A227"/>
                 </a:solidFill>
                 <a:latin typeface="Noto Sans CJK KR"/>
               </a:rPr>
-              <a:t>② 대역폭 우선</a:t>
-            </a:r>
-          </a:p>
-          <a:p>
-            <a:pPr algn="l">
-              <a:lnSpc>
-                <a:spcPct val="118000"/>
-              </a:lnSpc>
-              <a:spcBef>
-                <a:spcPts val="0"/>
-              </a:spcBef>
-              <a:spcAft>
-                <a:spcPts val="300"/>
-              </a:spcAft>
-            </a:pPr>
-            <a:r>
-              <a:rPr sz="1150" b="0" i="0">
-                <a:solidFill>
-                  <a:srgbClr val="22252B"/>
-                </a:solidFill>
-                <a:latin typeface="Noto Sans CJK KR"/>
-              </a:rPr>
-              <a:t>zHBM류 고대역폭 메모리가 1순위 지렛대(PIM보다 유리).</a:t>
-            </a:r>
-          </a:p>
-        </p:txBody>
-      </p:sp>
-      <p:sp>
-        <p:nvSpPr>
-          <p:cNvPr id="10" name="Rounded Rectangle 9"/>
+              <a:t>C4 · 메모리 기술 — zHBM · HBM-PIM · SRAM</a:t>
+            </a:r>
+          </a:p>
+        </p:txBody>
+      </p:sp>
+      <p:sp>
+        <p:nvSpPr>
+          <p:cNvPr id="4" name="TextBox 3"/>
+          <p:cNvSpPr txBox="1"/>
+          <p:nvPr/>
+        </p:nvSpPr>
+        <p:spPr>
+          <a:xfrm>
+            <a:off x="502920" y="457200"/>
+            <a:ext cx="11185855" cy="566928"/>
+          </a:xfrm>
+          <a:prstGeom prst="rect">
+            <a:avLst/>
+          </a:prstGeom>
+          <a:noFill/>
+        </p:spPr>
+        <p:txBody>
+          <a:bodyPr wrap="square" anchor="t" lIns="38100" rIns="38100" tIns="25400" bIns="25400">
+            <a:spAutoFit/>
+          </a:bodyPr>
+          <a:lstStyle/>
+          <a:p>
+            <a:pPr algn="l">
+              <a:lnSpc>
+                <a:spcPct val="120000"/>
+              </a:lnSpc>
+              <a:spcBef>
+                <a:spcPts val="0"/>
+              </a:spcBef>
+              <a:spcAft>
+                <a:spcPts val="0"/>
+              </a:spcAft>
+            </a:pPr>
+            <a:r>
+              <a:rPr sz="2400" b="1" i="0">
+                <a:solidFill>
+                  <a:srgbClr val="22252B"/>
+                </a:solidFill>
+                <a:latin typeface="Noto Sans CJK KR"/>
+              </a:rPr>
+              <a:t>memory-bound라면 답은 '대역폭'과 '상주'</a:t>
+            </a:r>
+          </a:p>
+        </p:txBody>
+      </p:sp>
+      <p:sp>
+        <p:nvSpPr>
+          <p:cNvPr id="5" name="Rectangle 4"/>
           <p:cNvSpPr/>
           <p:nvPr/>
         </p:nvSpPr>
         <p:spPr>
           <a:xfrm>
-            <a:off x="6172200" y="3648456"/>
-            <a:ext cx="5486400" cy="1051560"/>
+            <a:off x="466344" y="1778706"/>
+            <a:ext cx="5605272" cy="2093578"/>
+          </a:xfrm>
+          <a:prstGeom prst="rect">
+            <a:avLst/>
+          </a:prstGeom>
+          <a:noFill/>
+          <a:ln w="9525">
+            <a:solidFill>
+              <a:srgbClr val="8A8F98"/>
+            </a:solidFill>
+          </a:ln>
+          <a:effectLst/>
+        </p:spPr>
+        <p:style>
+          <a:lnRef idx="1">
+            <a:schemeClr val="accent1"/>
+          </a:lnRef>
+          <a:fillRef idx="3">
+            <a:schemeClr val="accent1"/>
+          </a:fillRef>
+          <a:effectRef idx="2">
+            <a:schemeClr val="accent1"/>
+          </a:effectRef>
+          <a:fontRef idx="minor">
+            <a:schemeClr val="lt1"/>
+          </a:fontRef>
+        </p:style>
+        <p:txBody>
+          <a:bodyPr rtlCol="0" anchor="ctr"/>
+          <a:lstStyle/>
+          <a:p>
+            <a:pPr algn="ctr"/>
+          </a:p>
+        </p:txBody>
+      </p:sp>
+      <p:pic>
+        <p:nvPicPr>
+          <p:cNvPr id="6" name="Picture 5" descr="fig-zhbm-pim.png"/>
+          <p:cNvPicPr>
+            <a:picLocks noChangeAspect="1"/>
+          </p:cNvPicPr>
+          <p:nvPr/>
+        </p:nvPicPr>
+        <p:blipFill>
+          <a:blip r:embed="rId2"/>
+          <a:stretch>
+            <a:fillRect/>
+          </a:stretch>
+        </p:blipFill>
+        <p:spPr>
+          <a:xfrm>
+            <a:off x="502920" y="1815282"/>
+            <a:ext cx="5532120" cy="2020426"/>
+          </a:xfrm>
+          <a:prstGeom prst="rect">
+            <a:avLst/>
+          </a:prstGeom>
+        </p:spPr>
+      </p:pic>
+      <p:sp>
+        <p:nvSpPr>
+          <p:cNvPr id="7" name="TextBox 6"/>
+          <p:cNvSpPr txBox="1"/>
+          <p:nvPr/>
+        </p:nvSpPr>
+        <p:spPr>
+          <a:xfrm>
+            <a:off x="502920" y="4297679"/>
+            <a:ext cx="5532120" cy="365760"/>
+          </a:xfrm>
+          <a:prstGeom prst="rect">
+            <a:avLst/>
+          </a:prstGeom>
+          <a:noFill/>
+        </p:spPr>
+        <p:txBody>
+          <a:bodyPr wrap="square" anchor="t" lIns="38100" rIns="38100" tIns="25400" bIns="25400">
+            <a:spAutoFit/>
+          </a:bodyPr>
+          <a:lstStyle/>
+          <a:p>
+            <a:pPr algn="ctr">
+              <a:lnSpc>
+                <a:spcPct val="120000"/>
+              </a:lnSpc>
+              <a:spcBef>
+                <a:spcPts val="0"/>
+              </a:spcBef>
+              <a:spcAft>
+                <a:spcPts val="0"/>
+              </a:spcAft>
+            </a:pPr>
+            <a:r>
+              <a:rPr sz="1050" b="0" i="0">
+                <a:solidFill>
+                  <a:srgbClr val="22252B"/>
+                </a:solidFill>
+                <a:latin typeface="Noto Sans CJK KR"/>
+              </a:rPr>
+              <a:t>HBM/zHBM/HBM-PIM/zHBM-PIM decode 비용 + zHBM 내부 연산 추가 면적</a:t>
+            </a:r>
+          </a:p>
+        </p:txBody>
+      </p:sp>
+      <p:sp>
+        <p:nvSpPr>
+          <p:cNvPr id="8" name="Rectangle 7"/>
+          <p:cNvSpPr/>
+          <p:nvPr/>
+        </p:nvSpPr>
+        <p:spPr>
+          <a:xfrm>
+            <a:off x="6293684" y="1335024"/>
+            <a:ext cx="5334870" cy="2980944"/>
+          </a:xfrm>
+          <a:prstGeom prst="rect">
+            <a:avLst/>
+          </a:prstGeom>
+          <a:noFill/>
+          <a:ln w="9525">
+            <a:solidFill>
+              <a:srgbClr val="8A8F98"/>
+            </a:solidFill>
+          </a:ln>
+          <a:effectLst/>
+        </p:spPr>
+        <p:style>
+          <a:lnRef idx="1">
+            <a:schemeClr val="accent1"/>
+          </a:lnRef>
+          <a:fillRef idx="3">
+            <a:schemeClr val="accent1"/>
+          </a:fillRef>
+          <a:effectRef idx="2">
+            <a:schemeClr val="accent1"/>
+          </a:effectRef>
+          <a:fontRef idx="minor">
+            <a:schemeClr val="lt1"/>
+          </a:fontRef>
+        </p:style>
+        <p:txBody>
+          <a:bodyPr rtlCol="0" anchor="ctr"/>
+          <a:lstStyle/>
+          <a:p>
+            <a:pPr algn="ctr"/>
+          </a:p>
+        </p:txBody>
+      </p:sp>
+      <p:pic>
+        <p:nvPicPr>
+          <p:cNvPr id="9" name="Picture 8" descr="fig-sram-scaling.png"/>
+          <p:cNvPicPr>
+            <a:picLocks noChangeAspect="1"/>
+          </p:cNvPicPr>
+          <p:nvPr/>
+        </p:nvPicPr>
+        <p:blipFill>
+          <a:blip r:embed="rId3"/>
+          <a:stretch>
+            <a:fillRect/>
+          </a:stretch>
+        </p:blipFill>
+        <p:spPr>
+          <a:xfrm>
+            <a:off x="6330260" y="1371600"/>
+            <a:ext cx="5261718" cy="2907792"/>
+          </a:xfrm>
+          <a:prstGeom prst="rect">
+            <a:avLst/>
+          </a:prstGeom>
+        </p:spPr>
+      </p:pic>
+      <p:sp>
+        <p:nvSpPr>
+          <p:cNvPr id="10" name="TextBox 9"/>
+          <p:cNvSpPr txBox="1"/>
+          <p:nvPr/>
+        </p:nvSpPr>
+        <p:spPr>
+          <a:xfrm>
+            <a:off x="6263640" y="4297679"/>
+            <a:ext cx="5394960" cy="365760"/>
+          </a:xfrm>
+          <a:prstGeom prst="rect">
+            <a:avLst/>
+          </a:prstGeom>
+          <a:noFill/>
+        </p:spPr>
+        <p:txBody>
+          <a:bodyPr wrap="square" anchor="t" lIns="38100" rIns="38100" tIns="25400" bIns="25400">
+            <a:spAutoFit/>
+          </a:bodyPr>
+          <a:lstStyle/>
+          <a:p>
+            <a:pPr algn="ctr">
+              <a:lnSpc>
+                <a:spcPct val="120000"/>
+              </a:lnSpc>
+              <a:spcBef>
+                <a:spcPts val="0"/>
+              </a:spcBef>
+              <a:spcAft>
+                <a:spcPts val="0"/>
+              </a:spcAft>
+            </a:pPr>
+            <a:r>
+              <a:rPr sz="1050" b="0" i="0">
+                <a:solidFill>
+                  <a:srgbClr val="22252B"/>
+                </a:solidFill>
+                <a:latin typeface="Noto Sans CJK KR"/>
+              </a:rPr>
+              <a:t>on-chip SRAM 1x→10x: state가 상주하는 순간(5x~) HBM 대신 SRAM</a:t>
+            </a:r>
+          </a:p>
+        </p:txBody>
+      </p:sp>
+      <p:sp>
+        <p:nvSpPr>
+          <p:cNvPr id="11" name="Rounded Rectangle 10"/>
+          <p:cNvSpPr/>
+          <p:nvPr/>
+        </p:nvSpPr>
+        <p:spPr>
+          <a:xfrm>
+            <a:off x="502920" y="4800600"/>
+            <a:ext cx="11155680" cy="914400"/>
           </a:xfrm>
           <a:prstGeom prst="roundRect">
             <a:avLst/>
@@ -51357,52 +53701,338 @@
                 <a:spcPts val="0"/>
               </a:spcBef>
               <a:spcAft>
+                <a:spcPts val="200"/>
+              </a:spcAft>
+            </a:pPr>
+            <a:r>
+              <a:rPr sz="1250" b="1" i="0">
+                <a:solidFill>
+                  <a:srgbClr val="C9A227"/>
+                </a:solidFill>
+                <a:latin typeface="Noto Sans CJK KR"/>
+              </a:rPr>
+              <a:t>결론</a:t>
+            </a:r>
+          </a:p>
+          <a:p>
+            <a:pPr algn="l">
+              <a:lnSpc>
+                <a:spcPct val="118000"/>
+              </a:lnSpc>
+              <a:spcBef>
+                <a:spcPts val="0"/>
+              </a:spcBef>
+              <a:spcAft>
                 <a:spcPts val="300"/>
               </a:spcAft>
             </a:pPr>
             <a:r>
-              <a:rPr sz="1250" b="1" i="0">
+              <a:rPr sz="1200" b="0" i="0">
+                <a:solidFill>
+                  <a:srgbClr val="22252B"/>
+                </a:solidFill>
+                <a:latin typeface="Noto Sans CJK KR"/>
+              </a:rPr>
+              <a:t>zHBM(대역폭↑)이 HBM-PIM(in-bank 연산이 너무 느림)보다 유리. SRAM은 '문턱' 구조 — state(≈134MB)가 on-chip에 들어가는 5x(250MB)부터 이득(203→150µs), 10x(500MB)면 weights까지 전부 상주.</a:t>
+            </a:r>
+          </a:p>
+        </p:txBody>
+      </p:sp>
+    </p:spTree>
+  </p:cSld>
+  <p:clrMapOvr>
+    <a:masterClrMapping/>
+  </p:clrMapOvr>
+</p:sld>
+</file>
+
+<file path=ppt/slides/slide75.xml><?xml version="1.0" encoding="utf-8"?>
+<p:sld xmlns:a="http://schemas.openxmlformats.org/drawingml/2006/main" xmlns:p="http://schemas.openxmlformats.org/presentationml/2006/main" xmlns:r="http://schemas.openxmlformats.org/officeDocument/2006/relationships">
+  <p:cSld>
+    <p:spTree>
+      <p:nvGrpSpPr>
+        <p:cNvPr id="1" name=""/>
+        <p:cNvGrpSpPr/>
+        <p:nvPr/>
+      </p:nvGrpSpPr>
+      <p:grpSpPr/>
+      <p:sp>
+        <p:nvSpPr>
+          <p:cNvPr id="2" name="Rectangle 1"/>
+          <p:cNvSpPr/>
+          <p:nvPr/>
+        </p:nvSpPr>
+        <p:spPr>
+          <a:xfrm>
+            <a:off x="0" y="0"/>
+            <a:ext cx="12191695" cy="54864"/>
+          </a:xfrm>
+          <a:prstGeom prst="rect">
+            <a:avLst/>
+          </a:prstGeom>
+          <a:solidFill>
+            <a:srgbClr val="C9A227"/>
+          </a:solidFill>
+          <a:ln w="12700">
+            <a:solidFill>
+              <a:srgbClr val="C9A227"/>
+            </a:solidFill>
+          </a:ln>
+          <a:effectLst/>
+        </p:spPr>
+        <p:style>
+          <a:lnRef idx="1">
+            <a:schemeClr val="accent1"/>
+          </a:lnRef>
+          <a:fillRef idx="3">
+            <a:schemeClr val="accent1"/>
+          </a:fillRef>
+          <a:effectRef idx="2">
+            <a:schemeClr val="accent1"/>
+          </a:effectRef>
+          <a:fontRef idx="minor">
+            <a:schemeClr val="lt1"/>
+          </a:fontRef>
+        </p:style>
+        <p:txBody>
+          <a:bodyPr rtlCol="0" anchor="ctr" wrap="square" lIns="76200" rIns="76200" tIns="38100" bIns="38100"/>
+          <a:lstStyle/>
+          <a:p>
+            <a:pPr algn="ctr">
+              <a:lnSpc>
+                <a:spcPct val="118000"/>
+              </a:lnSpc>
+              <a:spcBef>
+                <a:spcPts val="0"/>
+              </a:spcBef>
+              <a:spcAft>
+                <a:spcPts val="300"/>
+              </a:spcAft>
+            </a:pPr>
+            <a:r>
+              <a:rPr sz="1100" b="0" i="0">
+                <a:solidFill>
+                  <a:srgbClr val="22252B"/>
+                </a:solidFill>
+                <a:latin typeface="Noto Sans CJK KR"/>
+              </a:rPr>
+              <a:t/>
+            </a:r>
+          </a:p>
+        </p:txBody>
+      </p:sp>
+      <p:sp>
+        <p:nvSpPr>
+          <p:cNvPr id="3" name="TextBox 2"/>
+          <p:cNvSpPr txBox="1"/>
+          <p:nvPr/>
+        </p:nvSpPr>
+        <p:spPr>
+          <a:xfrm>
+            <a:off x="502920" y="146304"/>
+            <a:ext cx="11185855" cy="320040"/>
+          </a:xfrm>
+          <a:prstGeom prst="rect">
+            <a:avLst/>
+          </a:prstGeom>
+          <a:noFill/>
+        </p:spPr>
+        <p:txBody>
+          <a:bodyPr wrap="square" anchor="t" lIns="38100" rIns="38100" tIns="25400" bIns="25400">
+            <a:spAutoFit/>
+          </a:bodyPr>
+          <a:lstStyle/>
+          <a:p>
+            <a:pPr algn="l">
+              <a:lnSpc>
+                <a:spcPct val="120000"/>
+              </a:lnSpc>
+              <a:spcBef>
+                <a:spcPts val="0"/>
+              </a:spcBef>
+              <a:spcAft>
+                <a:spcPts val="0"/>
+              </a:spcAft>
+            </a:pPr>
+            <a:r>
+              <a:rPr sz="1350" b="1" i="0">
                 <a:solidFill>
                   <a:srgbClr val="C9A227"/>
                 </a:solidFill>
                 <a:latin typeface="Noto Sans CJK KR"/>
               </a:rPr>
-              <a:t>③ state 상주 설계</a:t>
-            </a:r>
-          </a:p>
-          <a:p>
-            <a:pPr algn="l">
-              <a:lnSpc>
-                <a:spcPct val="118000"/>
-              </a:lnSpc>
-              <a:spcBef>
-                <a:spcPts val="0"/>
-              </a:spcBef>
-              <a:spcAft>
-                <a:spcPts val="300"/>
-              </a:spcAft>
-            </a:pPr>
-            <a:r>
-              <a:rPr sz="1150" b="0" i="0">
-                <a:solidFill>
-                  <a:srgbClr val="22252B"/>
-                </a:solidFill>
-                <a:latin typeface="Noto Sans CJK KR"/>
-              </a:rPr>
-              <a:t>on-chip 용량을 state가 들어갈 문턱 이상으로 — Cerebras의 knee가 그 증거.</a:t>
-            </a:r>
-          </a:p>
-        </p:txBody>
-      </p:sp>
-      <p:sp>
-        <p:nvSpPr>
-          <p:cNvPr id="11" name="Rounded Rectangle 10"/>
+              <a:t>C5 · scaling 청사진</a:t>
+            </a:r>
+          </a:p>
+        </p:txBody>
+      </p:sp>
+      <p:sp>
+        <p:nvSpPr>
+          <p:cNvPr id="4" name="TextBox 3"/>
+          <p:cNvSpPr txBox="1"/>
+          <p:nvPr/>
+        </p:nvSpPr>
+        <p:spPr>
+          <a:xfrm>
+            <a:off x="502920" y="457200"/>
+            <a:ext cx="11185855" cy="566928"/>
+          </a:xfrm>
+          <a:prstGeom prst="rect">
+            <a:avLst/>
+          </a:prstGeom>
+          <a:noFill/>
+        </p:spPr>
+        <p:txBody>
+          <a:bodyPr wrap="square" anchor="t" lIns="38100" rIns="38100" tIns="25400" bIns="25400">
+            <a:spAutoFit/>
+          </a:bodyPr>
+          <a:lstStyle/>
+          <a:p>
+            <a:pPr algn="l">
+              <a:lnSpc>
+                <a:spcPct val="120000"/>
+              </a:lnSpc>
+              <a:spcBef>
+                <a:spcPts val="0"/>
+              </a:spcBef>
+              <a:spcAft>
+                <a:spcPts val="0"/>
+              </a:spcAft>
+            </a:pPr>
+            <a:r>
+              <a:rPr sz="2400" b="1" i="0">
+                <a:solidFill>
+                  <a:srgbClr val="22252B"/>
+                </a:solidFill>
+                <a:latin typeface="Noto Sans CJK KR"/>
+              </a:rPr>
+              <a:t>논문의 방향 × 모델링 결과 = 어디로 가야 하나</a:t>
+            </a:r>
+          </a:p>
+        </p:txBody>
+      </p:sp>
+      <p:sp>
+        <p:nvSpPr>
+          <p:cNvPr id="5" name="Rectangle 4"/>
           <p:cNvSpPr/>
           <p:nvPr/>
         </p:nvSpPr>
         <p:spPr>
           <a:xfrm>
-            <a:off x="6172200" y="4764024"/>
+            <a:off x="466344" y="1586285"/>
+            <a:ext cx="5605272" cy="2478421"/>
+          </a:xfrm>
+          <a:prstGeom prst="rect">
+            <a:avLst/>
+          </a:prstGeom>
+          <a:noFill/>
+          <a:ln w="9525">
+            <a:solidFill>
+              <a:srgbClr val="8A8F98"/>
+            </a:solidFill>
+          </a:ln>
+          <a:effectLst/>
+        </p:spPr>
+        <p:style>
+          <a:lnRef idx="1">
+            <a:schemeClr val="accent1"/>
+          </a:lnRef>
+          <a:fillRef idx="3">
+            <a:schemeClr val="accent1"/>
+          </a:fillRef>
+          <a:effectRef idx="2">
+            <a:schemeClr val="accent1"/>
+          </a:effectRef>
+          <a:fontRef idx="minor">
+            <a:schemeClr val="lt1"/>
+          </a:fontRef>
+        </p:style>
+        <p:txBody>
+          <a:bodyPr rtlCol="0" anchor="ctr"/>
+          <a:lstStyle/>
+          <a:p>
+            <a:pPr algn="ctr"/>
+          </a:p>
+        </p:txBody>
+      </p:sp>
+      <p:pic>
+        <p:nvPicPr>
+          <p:cNvPr id="6" name="Picture 5" descr="fig8-hope-sleep-scaling.png"/>
+          <p:cNvPicPr>
+            <a:picLocks noChangeAspect="1"/>
+          </p:cNvPicPr>
+          <p:nvPr/>
+        </p:nvPicPr>
+        <p:blipFill>
+          <a:blip r:embed="rId2"/>
+          <a:stretch>
+            <a:fillRect/>
+          </a:stretch>
+        </p:blipFill>
+        <p:spPr>
+          <a:xfrm>
+            <a:off x="502920" y="1622861"/>
+            <a:ext cx="5532120" cy="2405269"/>
+          </a:xfrm>
+          <a:prstGeom prst="rect">
+            <a:avLst/>
+          </a:prstGeom>
+        </p:spPr>
+      </p:pic>
+      <p:sp>
+        <p:nvSpPr>
+          <p:cNvPr id="7" name="TextBox 6"/>
+          <p:cNvSpPr txBox="1"/>
+          <p:nvPr/>
+        </p:nvSpPr>
+        <p:spPr>
+          <a:xfrm>
+            <a:off x="502920" y="4297679"/>
+            <a:ext cx="5532120" cy="365760"/>
+          </a:xfrm>
+          <a:prstGeom prst="rect">
+            <a:avLst/>
+          </a:prstGeom>
+          <a:noFill/>
+        </p:spPr>
+        <p:txBody>
+          <a:bodyPr wrap="square" anchor="t" lIns="38100" rIns="38100" tIns="25400" bIns="25400">
+            <a:spAutoFit/>
+          </a:bodyPr>
+          <a:lstStyle/>
+          <a:p>
+            <a:pPr algn="ctr">
+              <a:lnSpc>
+                <a:spcPct val="120000"/>
+              </a:lnSpc>
+              <a:spcBef>
+                <a:spcPts val="0"/>
+              </a:spcBef>
+              <a:spcAft>
+                <a:spcPts val="0"/>
+              </a:spcAft>
+            </a:pPr>
+            <a:r>
+              <a:rPr sz="1050" b="0" i="0">
+                <a:solidFill>
+                  <a:srgbClr val="22252B"/>
+                </a:solidFill>
+                <a:latin typeface="Noto Sans CJK KR"/>
+              </a:rPr>
+              <a:t>HOPE(메모리 확장)+Sleep(파라미터 성장) 스케일링 — 상태·파라미터가 함께 자란다</a:t>
+            </a:r>
+          </a:p>
+        </p:txBody>
+      </p:sp>
+      <p:sp>
+        <p:nvSpPr>
+          <p:cNvPr id="8" name="Rounded Rectangle 7"/>
+          <p:cNvSpPr/>
+          <p:nvPr/>
+        </p:nvSpPr>
+        <p:spPr>
+          <a:xfrm>
+            <a:off x="6172200" y="1417320"/>
             <a:ext cx="5486400" cy="1051560"/>
           </a:xfrm>
           <a:prstGeom prst="roundRect">
@@ -51454,6 +54084,267 @@
                 </a:solidFill>
                 <a:latin typeface="Noto Sans CJK KR"/>
               </a:rPr>
+              <a:t>① 논문 방향이 memory 압력을 키운다</a:t>
+            </a:r>
+          </a:p>
+          <a:p>
+            <a:pPr algn="l">
+              <a:lnSpc>
+                <a:spcPct val="118000"/>
+              </a:lnSpc>
+              <a:spcBef>
+                <a:spcPts val="0"/>
+              </a:spcBef>
+              <a:spcAft>
+                <a:spcPts val="300"/>
+              </a:spcAft>
+            </a:pPr>
+            <a:r>
+              <a:rPr sz="1150" b="0" i="0">
+                <a:solidFill>
+                  <a:srgbClr val="22252B"/>
+                </a:solidFill>
+                <a:latin typeface="Noto Sans CJK KR"/>
+              </a:rPr>
+              <a:t>HOPE(self-mod+CMS)로 state↑, Sleep(expert 성장)로 파라미터↑ → 디코드 memory-bound가 구조적으로 심해진다.</a:t>
+            </a:r>
+          </a:p>
+        </p:txBody>
+      </p:sp>
+      <p:sp>
+        <p:nvSpPr>
+          <p:cNvPr id="9" name="Rounded Rectangle 8"/>
+          <p:cNvSpPr/>
+          <p:nvPr/>
+        </p:nvSpPr>
+        <p:spPr>
+          <a:xfrm>
+            <a:off x="6172200" y="2532888"/>
+            <a:ext cx="5486400" cy="1051560"/>
+          </a:xfrm>
+          <a:prstGeom prst="roundRect">
+            <a:avLst/>
+          </a:prstGeom>
+          <a:solidFill>
+            <a:srgbClr val="F6ECC7"/>
+          </a:solidFill>
+          <a:ln w="12700">
+            <a:solidFill>
+              <a:srgbClr val="C9A227"/>
+            </a:solidFill>
+          </a:ln>
+          <a:effectLst/>
+        </p:spPr>
+        <p:style>
+          <a:lnRef idx="1">
+            <a:schemeClr val="accent1"/>
+          </a:lnRef>
+          <a:fillRef idx="3">
+            <a:schemeClr val="accent1"/>
+          </a:fillRef>
+          <a:effectRef idx="2">
+            <a:schemeClr val="accent1"/>
+          </a:effectRef>
+          <a:fontRef idx="minor">
+            <a:schemeClr val="lt1"/>
+          </a:fontRef>
+        </p:style>
+        <p:txBody>
+          <a:bodyPr rtlCol="0" anchor="ctr" wrap="square" lIns="76200" rIns="76200" tIns="38100" bIns="38100"/>
+          <a:lstStyle/>
+          <a:p>
+            <a:pPr algn="l">
+              <a:lnSpc>
+                <a:spcPct val="118000"/>
+              </a:lnSpc>
+              <a:spcBef>
+                <a:spcPts val="0"/>
+              </a:spcBef>
+              <a:spcAft>
+                <a:spcPts val="300"/>
+              </a:spcAft>
+            </a:pPr>
+            <a:r>
+              <a:rPr sz="1250" b="1" i="0">
+                <a:solidFill>
+                  <a:srgbClr val="C9A227"/>
+                </a:solidFill>
+                <a:latin typeface="Noto Sans CJK KR"/>
+              </a:rPr>
+              <a:t>② 대역폭 우선</a:t>
+            </a:r>
+          </a:p>
+          <a:p>
+            <a:pPr algn="l">
+              <a:lnSpc>
+                <a:spcPct val="118000"/>
+              </a:lnSpc>
+              <a:spcBef>
+                <a:spcPts val="0"/>
+              </a:spcBef>
+              <a:spcAft>
+                <a:spcPts val="300"/>
+              </a:spcAft>
+            </a:pPr>
+            <a:r>
+              <a:rPr sz="1150" b="0" i="0">
+                <a:solidFill>
+                  <a:srgbClr val="22252B"/>
+                </a:solidFill>
+                <a:latin typeface="Noto Sans CJK KR"/>
+              </a:rPr>
+              <a:t>zHBM류 고대역폭 메모리가 1순위 지렛대(PIM보다 유리).</a:t>
+            </a:r>
+          </a:p>
+        </p:txBody>
+      </p:sp>
+      <p:sp>
+        <p:nvSpPr>
+          <p:cNvPr id="10" name="Rounded Rectangle 9"/>
+          <p:cNvSpPr/>
+          <p:nvPr/>
+        </p:nvSpPr>
+        <p:spPr>
+          <a:xfrm>
+            <a:off x="6172200" y="3648456"/>
+            <a:ext cx="5486400" cy="1051560"/>
+          </a:xfrm>
+          <a:prstGeom prst="roundRect">
+            <a:avLst/>
+          </a:prstGeom>
+          <a:solidFill>
+            <a:srgbClr val="F6ECC7"/>
+          </a:solidFill>
+          <a:ln w="12700">
+            <a:solidFill>
+              <a:srgbClr val="C9A227"/>
+            </a:solidFill>
+          </a:ln>
+          <a:effectLst/>
+        </p:spPr>
+        <p:style>
+          <a:lnRef idx="1">
+            <a:schemeClr val="accent1"/>
+          </a:lnRef>
+          <a:fillRef idx="3">
+            <a:schemeClr val="accent1"/>
+          </a:fillRef>
+          <a:effectRef idx="2">
+            <a:schemeClr val="accent1"/>
+          </a:effectRef>
+          <a:fontRef idx="minor">
+            <a:schemeClr val="lt1"/>
+          </a:fontRef>
+        </p:style>
+        <p:txBody>
+          <a:bodyPr rtlCol="0" anchor="ctr" wrap="square" lIns="76200" rIns="76200" tIns="38100" bIns="38100"/>
+          <a:lstStyle/>
+          <a:p>
+            <a:pPr algn="l">
+              <a:lnSpc>
+                <a:spcPct val="118000"/>
+              </a:lnSpc>
+              <a:spcBef>
+                <a:spcPts val="0"/>
+              </a:spcBef>
+              <a:spcAft>
+                <a:spcPts val="300"/>
+              </a:spcAft>
+            </a:pPr>
+            <a:r>
+              <a:rPr sz="1250" b="1" i="0">
+                <a:solidFill>
+                  <a:srgbClr val="C9A227"/>
+                </a:solidFill>
+                <a:latin typeface="Noto Sans CJK KR"/>
+              </a:rPr>
+              <a:t>③ state 상주 설계</a:t>
+            </a:r>
+          </a:p>
+          <a:p>
+            <a:pPr algn="l">
+              <a:lnSpc>
+                <a:spcPct val="118000"/>
+              </a:lnSpc>
+              <a:spcBef>
+                <a:spcPts val="0"/>
+              </a:spcBef>
+              <a:spcAft>
+                <a:spcPts val="300"/>
+              </a:spcAft>
+            </a:pPr>
+            <a:r>
+              <a:rPr sz="1150" b="0" i="0">
+                <a:solidFill>
+                  <a:srgbClr val="22252B"/>
+                </a:solidFill>
+                <a:latin typeface="Noto Sans CJK KR"/>
+              </a:rPr>
+              <a:t>on-chip 용량을 state가 들어갈 문턱 이상으로 — Cerebras의 knee가 그 증거.</a:t>
+            </a:r>
+          </a:p>
+        </p:txBody>
+      </p:sp>
+      <p:sp>
+        <p:nvSpPr>
+          <p:cNvPr id="11" name="Rounded Rectangle 10"/>
+          <p:cNvSpPr/>
+          <p:nvPr/>
+        </p:nvSpPr>
+        <p:spPr>
+          <a:xfrm>
+            <a:off x="6172200" y="4764024"/>
+            <a:ext cx="5486400" cy="1051560"/>
+          </a:xfrm>
+          <a:prstGeom prst="roundRect">
+            <a:avLst/>
+          </a:prstGeom>
+          <a:solidFill>
+            <a:srgbClr val="F6ECC7"/>
+          </a:solidFill>
+          <a:ln w="12700">
+            <a:solidFill>
+              <a:srgbClr val="C9A227"/>
+            </a:solidFill>
+          </a:ln>
+          <a:effectLst/>
+        </p:spPr>
+        <p:style>
+          <a:lnRef idx="1">
+            <a:schemeClr val="accent1"/>
+          </a:lnRef>
+          <a:fillRef idx="3">
+            <a:schemeClr val="accent1"/>
+          </a:fillRef>
+          <a:effectRef idx="2">
+            <a:schemeClr val="accent1"/>
+          </a:effectRef>
+          <a:fontRef idx="minor">
+            <a:schemeClr val="lt1"/>
+          </a:fontRef>
+        </p:style>
+        <p:txBody>
+          <a:bodyPr rtlCol="0" anchor="ctr" wrap="square" lIns="76200" rIns="76200" tIns="38100" bIns="38100"/>
+          <a:lstStyle/>
+          <a:p>
+            <a:pPr algn="l">
+              <a:lnSpc>
+                <a:spcPct val="118000"/>
+              </a:lnSpc>
+              <a:spcBef>
+                <a:spcPts val="0"/>
+              </a:spcBef>
+              <a:spcAft>
+                <a:spcPts val="300"/>
+              </a:spcAft>
+            </a:pPr>
+            <a:r>
+              <a:rPr sz="1250" b="1" i="0">
+                <a:solidFill>
+                  <a:srgbClr val="C9A227"/>
+                </a:solidFill>
+                <a:latin typeface="Noto Sans CJK KR"/>
+              </a:rPr>
               <a:t>④ 소프트웨어 효율이 프론티어</a:t>
             </a:r>
           </a:p>
@@ -51576,7 +54467,7 @@
 </p:sld>
 </file>
 
-<file path=ppt/slides/slide74.xml><?xml version="1.0" encoding="utf-8"?>
+<file path=ppt/slides/slide76.xml><?xml version="1.0" encoding="utf-8"?>
 <p:sld xmlns:a="http://schemas.openxmlformats.org/drawingml/2006/main" xmlns:p="http://schemas.openxmlformats.org/presentationml/2006/main" xmlns:r="http://schemas.openxmlformats.org/officeDocument/2006/relationships">
   <p:cSld>
     <p:spTree>
